--- a/index.pptx
+++ b/index.pptx
@@ -8259,7 +8259,7 @@
             </a:pPr>
             <a:r>
               <a:rPr/>
-              <a:t>07/09/2026</a:t>
+              <a:t>14/09/2026</a:t>
             </a:r>
           </a:p>
         </p:txBody>

--- a/index.pptx
+++ b/index.pptx
@@ -8259,7 +8259,7 @@
             </a:pPr>
             <a:r>
               <a:rPr/>
-              <a:t>14/09/2026</a:t>
+              <a:t>21/09/2026</a:t>
             </a:r>
           </a:p>
         </p:txBody>

--- a/index.pptx
+++ b/index.pptx
@@ -5,7 +5,7 @@
     <p:sldMasterId id="2147483648" r:id="rId1"/>
   </p:sldMasterIdLst>
   <p:notesMasterIdLst>
-    <p:notesMasterId r:id="rId42"/>
+    <p:notesMasterId r:id="rId43"/>
   </p:notesMasterIdLst>
   <p:sldIdLst>
     <p:sldId id="256" r:id="rId2"/>
@@ -48,6 +48,7 @@
     <p:sldId id="293" r:id="rId39"/>
     <p:sldId id="294" r:id="rId40"/>
     <p:sldId id="295" r:id="rId41"/>
+    <p:sldId id="296" r:id="rId42"/>
   </p:sldIdLst>
   <p:sldSz cx="12192000" cy="6858000"/>
   <p:notesSz cx="6858000" cy="9144000"/>
@@ -578,7 +579,7 @@
           <a:p>
             <a:fld id="{18BDFEC3-8487-43E8-A154-7C12CBC1FFF2}" type="slidenum">
               <a:rPr lang="en-US"/>
-              <a:t>2</a:t>
+              <a:t>3</a:t>
             </a:fld>
             <a:endParaRPr lang="en-US"/>
           </a:p>
@@ -705,7 +706,7 @@
           <a:p>
             <a:fld id="{18BDFEC3-8487-43E8-A154-7C12CBC1FFF2}" type="slidenum">
               <a:rPr lang="en-US"/>
-              <a:t>14</a:t>
+              <a:t>15</a:t>
             </a:fld>
             <a:endParaRPr lang="en-US"/>
           </a:p>
@@ -846,7 +847,7 @@
           <a:p>
             <a:fld id="{18BDFEC3-8487-43E8-A154-7C12CBC1FFF2}" type="slidenum">
               <a:rPr lang="en-US"/>
-              <a:t>15</a:t>
+              <a:t>16</a:t>
             </a:fld>
             <a:endParaRPr lang="en-US"/>
           </a:p>
@@ -993,7 +994,7 @@
           <a:p>
             <a:fld id="{18BDFEC3-8487-43E8-A154-7C12CBC1FFF2}" type="slidenum">
               <a:rPr lang="en-US"/>
-              <a:t>16</a:t>
+              <a:t>17</a:t>
             </a:fld>
             <a:endParaRPr lang="en-US"/>
           </a:p>
@@ -1130,7 +1131,7 @@
           <a:p>
             <a:fld id="{18BDFEC3-8487-43E8-A154-7C12CBC1FFF2}" type="slidenum">
               <a:rPr lang="en-US"/>
-              <a:t>17</a:t>
+              <a:t>18</a:t>
             </a:fld>
             <a:endParaRPr lang="en-US"/>
           </a:p>
@@ -1230,7 +1231,7 @@
           <a:p>
             <a:fld id="{18BDFEC3-8487-43E8-A154-7C12CBC1FFF2}" type="slidenum">
               <a:rPr lang="en-US"/>
-              <a:t>18</a:t>
+              <a:t>19</a:t>
             </a:fld>
             <a:endParaRPr lang="en-US"/>
           </a:p>
@@ -1406,7 +1407,7 @@
           <a:p>
             <a:fld id="{18BDFEC3-8487-43E8-A154-7C12CBC1FFF2}" type="slidenum">
               <a:rPr lang="en-US"/>
-              <a:t>19</a:t>
+              <a:t>20</a:t>
             </a:fld>
             <a:endParaRPr lang="en-US"/>
           </a:p>
@@ -1516,7 +1517,7 @@
           <a:p>
             <a:fld id="{18BDFEC3-8487-43E8-A154-7C12CBC1FFF2}" type="slidenum">
               <a:rPr lang="en-US"/>
-              <a:t>20</a:t>
+              <a:t>21</a:t>
             </a:fld>
             <a:endParaRPr lang="en-US"/>
           </a:p>
@@ -1620,7 +1621,7 @@
           <a:p>
             <a:fld id="{18BDFEC3-8487-43E8-A154-7C12CBC1FFF2}" type="slidenum">
               <a:rPr lang="en-US"/>
-              <a:t>21</a:t>
+              <a:t>22</a:t>
             </a:fld>
             <a:endParaRPr lang="en-US"/>
           </a:p>
@@ -1792,7 +1793,7 @@
           <a:p>
             <a:fld id="{18BDFEC3-8487-43E8-A154-7C12CBC1FFF2}" type="slidenum">
               <a:rPr lang="en-US"/>
-              <a:t>22</a:t>
+              <a:t>23</a:t>
             </a:fld>
             <a:endParaRPr lang="en-US"/>
           </a:p>
@@ -1974,7 +1975,7 @@
           <a:p>
             <a:fld id="{18BDFEC3-8487-43E8-A154-7C12CBC1FFF2}" type="slidenum">
               <a:rPr lang="en-US"/>
-              <a:t>23</a:t>
+              <a:t>24</a:t>
             </a:fld>
             <a:endParaRPr lang="en-US"/>
           </a:p>
@@ -2078,7 +2079,7 @@
           <a:p>
             <a:fld id="{18BDFEC3-8487-43E8-A154-7C12CBC1FFF2}" type="slidenum">
               <a:rPr lang="en-US"/>
-              <a:t>4</a:t>
+              <a:t>5</a:t>
             </a:fld>
             <a:endParaRPr lang="en-US"/>
           </a:p>
@@ -2182,7 +2183,7 @@
           <a:p>
             <a:fld id="{18BDFEC3-8487-43E8-A154-7C12CBC1FFF2}" type="slidenum">
               <a:rPr lang="en-US"/>
-              <a:t>24</a:t>
+              <a:t>25</a:t>
             </a:fld>
             <a:endParaRPr lang="en-US"/>
           </a:p>
@@ -2306,7 +2307,7 @@
           <a:p>
             <a:fld id="{18BDFEC3-8487-43E8-A154-7C12CBC1FFF2}" type="slidenum">
               <a:rPr lang="en-US"/>
-              <a:t>26</a:t>
+              <a:t>27</a:t>
             </a:fld>
             <a:endParaRPr lang="en-US"/>
           </a:p>
@@ -2442,7 +2443,7 @@
           <a:p>
             <a:fld id="{18BDFEC3-8487-43E8-A154-7C12CBC1FFF2}" type="slidenum">
               <a:rPr lang="en-US"/>
-              <a:t>27</a:t>
+              <a:t>28</a:t>
             </a:fld>
             <a:endParaRPr lang="en-US"/>
           </a:p>
@@ -2546,7 +2547,7 @@
           <a:p>
             <a:fld id="{18BDFEC3-8487-43E8-A154-7C12CBC1FFF2}" type="slidenum">
               <a:rPr lang="en-US"/>
-              <a:t>28</a:t>
+              <a:t>29</a:t>
             </a:fld>
             <a:endParaRPr lang="en-US"/>
           </a:p>
@@ -2692,7 +2693,7 @@
           <a:p>
             <a:fld id="{18BDFEC3-8487-43E8-A154-7C12CBC1FFF2}" type="slidenum">
               <a:rPr lang="en-US"/>
-              <a:t>29</a:t>
+              <a:t>30</a:t>
             </a:fld>
             <a:endParaRPr lang="en-US"/>
           </a:p>
@@ -2921,7 +2922,7 @@
           <a:p>
             <a:fld id="{18BDFEC3-8487-43E8-A154-7C12CBC1FFF2}" type="slidenum">
               <a:rPr lang="en-US"/>
-              <a:t>30</a:t>
+              <a:t>31</a:t>
             </a:fld>
             <a:endParaRPr lang="en-US"/>
           </a:p>
@@ -3044,7 +3045,7 @@
           <a:p>
             <a:fld id="{18BDFEC3-8487-43E8-A154-7C12CBC1FFF2}" type="slidenum">
               <a:rPr lang="en-US"/>
-              <a:t>31</a:t>
+              <a:t>32</a:t>
             </a:fld>
             <a:endParaRPr lang="en-US"/>
           </a:p>
@@ -3162,7 +3163,7 @@
           <a:p>
             <a:fld id="{18BDFEC3-8487-43E8-A154-7C12CBC1FFF2}" type="slidenum">
               <a:rPr lang="en-US"/>
-              <a:t>32</a:t>
+              <a:t>33</a:t>
             </a:fld>
             <a:endParaRPr lang="en-US"/>
           </a:p>
@@ -3256,7 +3257,7 @@
           <a:p>
             <a:fld id="{18BDFEC3-8487-43E8-A154-7C12CBC1FFF2}" type="slidenum">
               <a:rPr lang="en-US"/>
-              <a:t>33</a:t>
+              <a:t>34</a:t>
             </a:fld>
             <a:endParaRPr lang="en-US"/>
           </a:p>
@@ -3380,7 +3381,7 @@
           <a:p>
             <a:fld id="{18BDFEC3-8487-43E8-A154-7C12CBC1FFF2}" type="slidenum">
               <a:rPr lang="en-US"/>
-              <a:t>36</a:t>
+              <a:t>37</a:t>
             </a:fld>
             <a:endParaRPr lang="en-US"/>
           </a:p>
@@ -3484,7 +3485,7 @@
           <a:p>
             <a:fld id="{18BDFEC3-8487-43E8-A154-7C12CBC1FFF2}" type="slidenum">
               <a:rPr lang="en-US"/>
-              <a:t>5</a:t>
+              <a:t>6</a:t>
             </a:fld>
             <a:endParaRPr lang="en-US"/>
           </a:p>
@@ -3606,7 +3607,7 @@
           <a:p>
             <a:fld id="{18BDFEC3-8487-43E8-A154-7C12CBC1FFF2}" type="slidenum">
               <a:rPr lang="en-US"/>
-              <a:t>39</a:t>
+              <a:t>40</a:t>
             </a:fld>
             <a:endParaRPr lang="en-US"/>
           </a:p>
@@ -3762,7 +3763,7 @@
           <a:p>
             <a:fld id="{18BDFEC3-8487-43E8-A154-7C12CBC1FFF2}" type="slidenum">
               <a:rPr lang="en-US"/>
-              <a:t>6</a:t>
+              <a:t>7</a:t>
             </a:fld>
             <a:endParaRPr lang="en-US"/>
           </a:p>
@@ -3894,7 +3895,7 @@
           <a:p>
             <a:fld id="{18BDFEC3-8487-43E8-A154-7C12CBC1FFF2}" type="slidenum">
               <a:rPr lang="en-US"/>
-              <a:t>7</a:t>
+              <a:t>8</a:t>
             </a:fld>
             <a:endParaRPr lang="en-US"/>
           </a:p>
@@ -3998,7 +3999,7 @@
           <a:p>
             <a:fld id="{18BDFEC3-8487-43E8-A154-7C12CBC1FFF2}" type="slidenum">
               <a:rPr lang="en-US"/>
-              <a:t>10</a:t>
+              <a:t>11</a:t>
             </a:fld>
             <a:endParaRPr lang="en-US"/>
           </a:p>
@@ -4130,7 +4131,7 @@
           <a:p>
             <a:fld id="{18BDFEC3-8487-43E8-A154-7C12CBC1FFF2}" type="slidenum">
               <a:rPr lang="en-US"/>
-              <a:t>11</a:t>
+              <a:t>12</a:t>
             </a:fld>
             <a:endParaRPr lang="en-US"/>
           </a:p>
@@ -4252,7 +4253,7 @@
           <a:p>
             <a:fld id="{18BDFEC3-8487-43E8-A154-7C12CBC1FFF2}" type="slidenum">
               <a:rPr lang="en-US"/>
-              <a:t>12</a:t>
+              <a:t>13</a:t>
             </a:fld>
             <a:endParaRPr lang="en-US"/>
           </a:p>
@@ -4375,7 +4376,7 @@
           <a:p>
             <a:fld id="{18BDFEC3-8487-43E8-A154-7C12CBC1FFF2}" type="slidenum">
               <a:rPr lang="en-US"/>
-              <a:t>13</a:t>
+              <a:t>14</a:t>
             </a:fld>
             <a:endParaRPr lang="en-US"/>
           </a:p>
@@ -8288,42 +8289,6 @@
       </p:grpSpPr>
       <p:sp>
         <p:nvSpPr>
-          <p:cNvPr id="2" name="Title 1">
-            <a:extLst>
-              <a:ext uri="{FF2B5EF4-FFF2-40B4-BE49-F238E27FC236}">
-                <a16:creationId xmlns:a16="http://schemas.microsoft.com/office/drawing/2014/main" id="{6BF04AE0-F94F-A586-34B8-68D9CAB6C6D1}"/>
-              </a:ext>
-            </a:extLst>
-          </p:cNvPr>
-          <p:cNvSpPr>
-            <a:spLocks noGrp="1"/>
-          </p:cNvSpPr>
-          <p:nvPr>
-            <p:ph type="title"/>
-          </p:nvPr>
-        </p:nvSpPr>
-        <p:spPr>
-          <a:xfrm>
-            <a:off x="2295524" y="432532"/>
-            <a:ext cx="9450077" cy="825501"/>
-          </a:xfrm>
-        </p:spPr>
-        <p:txBody>
-          <a:bodyPr/>
-          <a:lstStyle/>
-          <a:p>
-            <a:pPr lvl="0" indent="0" marL="0">
-              <a:buNone/>
-            </a:pPr>
-            <a:r>
-              <a:rPr/>
-              <a:t>Discussion of survey results</a:t>
-            </a:r>
-          </a:p>
-        </p:txBody>
-      </p:sp>
-      <p:sp>
-        <p:nvSpPr>
           <p:cNvPr id="3" name="Content Placeholder 2">
             <a:extLst>
               <a:ext uri="{FF2B5EF4-FFF2-40B4-BE49-F238E27FC236}">
@@ -8348,7 +8313,60 @@
             </a:pPr>
             <a:r>
               <a:rPr b="1"/>
-              <a:t>What do we see in the results?</a:t>
+              <a:t>How confident do you feel with the Zotero workflow of collection, organisation, and citing?</a:t>
+            </a:r>
+            <a:r>
+              <a:rPr/>
+              <a:t> </a:t>
+            </a:r>
+            <a:r>
+              <a:rPr i="1"/>
+              <a:t>(1 = Not confident at all, 5 = Very confident)</a:t>
+            </a:r>
+          </a:p>
+          <a:p>
+            <a:pPr lvl="0" indent="-457200" marL="457200">
+              <a:buAutoNum type="alphaLcPeriod"/>
+            </a:pPr>
+            <a:r>
+              <a:rPr/>
+              <a:t>1</a:t>
+            </a:r>
+          </a:p>
+          <a:p>
+            <a:pPr lvl="0" indent="-457200" marL="457200">
+              <a:buAutoNum type="alphaLcPeriod"/>
+            </a:pPr>
+            <a:r>
+              <a:rPr/>
+              <a:t>2</a:t>
+            </a:r>
+          </a:p>
+          <a:p>
+            <a:pPr lvl="0" indent="-457200" marL="457200">
+              <a:buAutoNum type="alphaLcPeriod"/>
+            </a:pPr>
+            <a:r>
+              <a:rPr/>
+              <a:t>3</a:t>
+            </a:r>
+          </a:p>
+          <a:p>
+            <a:pPr lvl="0" indent="-457200" marL="457200">
+              <a:buAutoNum type="alphaLcPeriod"/>
+            </a:pPr>
+            <a:r>
+              <a:rPr/>
+              <a:t>4</a:t>
+            </a:r>
+          </a:p>
+          <a:p>
+            <a:pPr lvl="0" indent="-457200" marL="457200">
+              <a:buAutoNum type="alphaLcPeriod"/>
+            </a:pPr>
+            <a:r>
+              <a:rPr/>
+              <a:t>5</a:t>
             </a:r>
           </a:p>
         </p:txBody>
@@ -8406,7 +8424,7 @@
             </a:pPr>
             <a:r>
               <a:rPr/>
-              <a:t>Where are we at?</a:t>
+              <a:t>Discussion of survey results</a:t>
             </a:r>
           </a:p>
         </p:txBody>
@@ -8437,73 +8455,7 @@
             </a:pPr>
             <a:r>
               <a:rPr b="1"/>
-              <a:t>Previously</a:t>
-            </a:r>
-            <a:r>
-              <a:rPr/>
-              <a:t>:</a:t>
-            </a:r>
-          </a:p>
-          <a:p>
-            <a:pPr lvl="0"/>
-            <a:r>
-              <a:rPr/>
-              <a:t>Familiarization with R basics</a:t>
-            </a:r>
-          </a:p>
-          <a:p>
-            <a:pPr lvl="0"/>
-            <a:r>
-              <a:rPr/>
-              <a:t>Advanced R skills</a:t>
-            </a:r>
-          </a:p>
-          <a:p>
-            <a:pPr lvl="0"/>
-            <a:r>
-              <a:rPr/>
-              <a:t>Version control with Git</a:t>
-            </a:r>
-          </a:p>
-          <a:p>
-            <a:pPr lvl="0"/>
-            <a:r>
-              <a:rPr/>
-              <a:t>Collaborative working with GitHub</a:t>
-            </a:r>
-          </a:p>
-          <a:p>
-            <a:pPr lvl="0"/>
-            <a:r>
-              <a:rPr/>
-              <a:t>Introduction to Quarto</a:t>
-            </a:r>
-          </a:p>
-          <a:p>
-            <a:pPr lvl="0" indent="0" marL="0">
-              <a:buNone/>
-            </a:pPr>
-            <a:r>
-              <a:rPr b="1"/>
-              <a:t>Up next</a:t>
-            </a:r>
-            <a:r>
-              <a:rPr/>
-              <a:t>:</a:t>
-            </a:r>
-          </a:p>
-          <a:p>
-            <a:pPr lvl="0"/>
-            <a:r>
-              <a:rPr/>
-              <a:t>Citations and references: What are they and when/how to use them</a:t>
-            </a:r>
-          </a:p>
-          <a:p>
-            <a:pPr lvl="0"/>
-            <a:r>
-              <a:rPr/>
-              <a:t>Citation management tool: Using Zotero in our workflow</a:t>
+              <a:t>What do we see in the results?</a:t>
             </a:r>
           </a:p>
         </p:txBody>
@@ -8514,6 +8466,161 @@
 </file>
 
 <file path=ppt/slides/slide12.xml><?xml version="1.0" encoding="utf-8"?>
+<p:sld xmlns:a="http://schemas.openxmlformats.org/drawingml/2006/main" xmlns:r="http://schemas.openxmlformats.org/officeDocument/2006/relationships" xmlns:p="http://schemas.openxmlformats.org/presentationml/2006/main">
+  <p:cSld>
+    <p:spTree>
+      <p:nvGrpSpPr>
+        <p:cNvPr id="1" name=""/>
+        <p:cNvGrpSpPr/>
+        <p:nvPr/>
+      </p:nvGrpSpPr>
+      <p:grpSpPr>
+        <a:xfrm>
+          <a:off x="0" y="0"/>
+          <a:ext cx="0" cy="0"/>
+          <a:chOff x="0" y="0"/>
+          <a:chExt cx="0" cy="0"/>
+        </a:xfrm>
+      </p:grpSpPr>
+      <p:sp>
+        <p:nvSpPr>
+          <p:cNvPr id="2" name="Title 1">
+            <a:extLst>
+              <a:ext uri="{FF2B5EF4-FFF2-40B4-BE49-F238E27FC236}">
+                <a16:creationId xmlns:a16="http://schemas.microsoft.com/office/drawing/2014/main" id="{6BF04AE0-F94F-A586-34B8-68D9CAB6C6D1}"/>
+              </a:ext>
+            </a:extLst>
+          </p:cNvPr>
+          <p:cNvSpPr>
+            <a:spLocks noGrp="1"/>
+          </p:cNvSpPr>
+          <p:nvPr>
+            <p:ph type="title"/>
+          </p:nvPr>
+        </p:nvSpPr>
+        <p:spPr>
+          <a:xfrm>
+            <a:off x="2295524" y="432532"/>
+            <a:ext cx="9450077" cy="825501"/>
+          </a:xfrm>
+        </p:spPr>
+        <p:txBody>
+          <a:bodyPr/>
+          <a:lstStyle/>
+          <a:p>
+            <a:pPr lvl="0" indent="0" marL="0">
+              <a:buNone/>
+            </a:pPr>
+            <a:r>
+              <a:rPr/>
+              <a:t>Where are we at?</a:t>
+            </a:r>
+          </a:p>
+        </p:txBody>
+      </p:sp>
+      <p:sp>
+        <p:nvSpPr>
+          <p:cNvPr id="3" name="Content Placeholder 2">
+            <a:extLst>
+              <a:ext uri="{FF2B5EF4-FFF2-40B4-BE49-F238E27FC236}">
+                <a16:creationId xmlns:a16="http://schemas.microsoft.com/office/drawing/2014/main" id="{372FA590-20E9-0368-85B4-90C26598F852}"/>
+              </a:ext>
+            </a:extLst>
+          </p:cNvPr>
+          <p:cNvSpPr>
+            <a:spLocks noGrp="1"/>
+          </p:cNvSpPr>
+          <p:nvPr>
+            <p:ph idx="1"/>
+          </p:nvPr>
+        </p:nvSpPr>
+        <p:spPr/>
+        <p:txBody>
+          <a:bodyPr/>
+          <a:lstStyle/>
+          <a:p>
+            <a:pPr lvl="0" indent="0" marL="0">
+              <a:buNone/>
+            </a:pPr>
+            <a:r>
+              <a:rPr b="1"/>
+              <a:t>Previously</a:t>
+            </a:r>
+            <a:r>
+              <a:rPr/>
+              <a:t>:</a:t>
+            </a:r>
+          </a:p>
+          <a:p>
+            <a:pPr lvl="0"/>
+            <a:r>
+              <a:rPr/>
+              <a:t>Familiarization with R basics</a:t>
+            </a:r>
+          </a:p>
+          <a:p>
+            <a:pPr lvl="0"/>
+            <a:r>
+              <a:rPr/>
+              <a:t>Advanced R skills</a:t>
+            </a:r>
+          </a:p>
+          <a:p>
+            <a:pPr lvl="0"/>
+            <a:r>
+              <a:rPr/>
+              <a:t>Version control with Git</a:t>
+            </a:r>
+          </a:p>
+          <a:p>
+            <a:pPr lvl="0"/>
+            <a:r>
+              <a:rPr/>
+              <a:t>Collaborative working with GitHub</a:t>
+            </a:r>
+          </a:p>
+          <a:p>
+            <a:pPr lvl="0"/>
+            <a:r>
+              <a:rPr/>
+              <a:t>Introduction to Quarto</a:t>
+            </a:r>
+          </a:p>
+          <a:p>
+            <a:pPr lvl="0" indent="0" marL="0">
+              <a:buNone/>
+            </a:pPr>
+            <a:r>
+              <a:rPr b="1"/>
+              <a:t>Up next</a:t>
+            </a:r>
+            <a:r>
+              <a:rPr/>
+              <a:t>:</a:t>
+            </a:r>
+          </a:p>
+          <a:p>
+            <a:pPr lvl="0"/>
+            <a:r>
+              <a:rPr/>
+              <a:t>Citations and references: What are they and when/how to use them</a:t>
+            </a:r>
+          </a:p>
+          <a:p>
+            <a:pPr lvl="0"/>
+            <a:r>
+              <a:rPr/>
+              <a:t>Citation management tool: Using Zotero in our workflow</a:t>
+            </a:r>
+          </a:p>
+        </p:txBody>
+      </p:sp>
+    </p:spTree>
+  </p:cSld>
+</p:sld>
+</file>
+
+<file path=ppt/slides/slide13.xml><?xml version="1.0" encoding="utf-8"?>
 <p:sld xmlns:a="http://schemas.openxmlformats.org/drawingml/2006/main" xmlns:r="http://schemas.openxmlformats.org/officeDocument/2006/relationships" xmlns:p="http://schemas.openxmlformats.org/presentationml/2006/main">
   <p:cSld>
     <p:spTree>
@@ -8926,7 +9033,7 @@
 </p:sld>
 </file>
 
-<file path=ppt/slides/slide13.xml><?xml version="1.0" encoding="utf-8"?>
+<file path=ppt/slides/slide14.xml><?xml version="1.0" encoding="utf-8"?>
 <p:sld xmlns:a="http://schemas.openxmlformats.org/drawingml/2006/main" xmlns:r="http://schemas.openxmlformats.org/officeDocument/2006/relationships" xmlns:p="http://schemas.openxmlformats.org/presentationml/2006/main">
   <p:cSld>
     <p:spTree>
@@ -9137,7 +9244,7 @@
 </p:sld>
 </file>
 
-<file path=ppt/slides/slide14.xml><?xml version="1.0" encoding="utf-8"?>
+<file path=ppt/slides/slide15.xml><?xml version="1.0" encoding="utf-8"?>
 <p:sld xmlns:a="http://schemas.openxmlformats.org/drawingml/2006/main" xmlns:r="http://schemas.openxmlformats.org/officeDocument/2006/relationships" xmlns:p="http://schemas.openxmlformats.org/presentationml/2006/main">
   <p:cSld>
     <p:spTree>
@@ -9266,7 +9373,7 @@
 </p:sld>
 </file>
 
-<file path=ppt/slides/slide15.xml><?xml version="1.0" encoding="utf-8"?>
+<file path=ppt/slides/slide16.xml><?xml version="1.0" encoding="utf-8"?>
 <p:sld xmlns:a="http://schemas.openxmlformats.org/drawingml/2006/main" xmlns:r="http://schemas.openxmlformats.org/officeDocument/2006/relationships" xmlns:p="http://schemas.openxmlformats.org/presentationml/2006/main">
   <p:cSld>
     <p:spTree>
@@ -9407,7 +9514,7 @@
 </p:sld>
 </file>
 
-<file path=ppt/slides/slide16.xml><?xml version="1.0" encoding="utf-8"?>
+<file path=ppt/slides/slide17.xml><?xml version="1.0" encoding="utf-8"?>
 <p:sld xmlns:a="http://schemas.openxmlformats.org/drawingml/2006/main" xmlns:r="http://schemas.openxmlformats.org/officeDocument/2006/relationships" xmlns:p="http://schemas.openxmlformats.org/presentationml/2006/main">
   <p:cSld>
     <p:spTree>
@@ -9777,7 +9884,7 @@
 </p:sld>
 </file>
 
-<file path=ppt/slides/slide17.xml><?xml version="1.0" encoding="utf-8"?>
+<file path=ppt/slides/slide18.xml><?xml version="1.0" encoding="utf-8"?>
 <p:sld xmlns:a="http://schemas.openxmlformats.org/drawingml/2006/main" xmlns:r="http://schemas.openxmlformats.org/officeDocument/2006/relationships" xmlns:p="http://schemas.openxmlformats.org/presentationml/2006/main">
   <p:cSld>
     <p:spTree>
@@ -10270,7 +10377,7 @@
 </p:sld>
 </file>
 
-<file path=ppt/slides/slide18.xml><?xml version="1.0" encoding="utf-8"?>
+<file path=ppt/slides/slide19.xml><?xml version="1.0" encoding="utf-8"?>
 <p:sld xmlns:a="http://schemas.openxmlformats.org/drawingml/2006/main" xmlns:r="http://schemas.openxmlformats.org/officeDocument/2006/relationships" xmlns:p="http://schemas.openxmlformats.org/presentationml/2006/main">
   <p:cSld>
     <p:spTree>
@@ -10457,7 +10564,120 @@
 </p:sld>
 </file>
 
-<file path=ppt/slides/slide19.xml><?xml version="1.0" encoding="utf-8"?>
+<file path=ppt/slides/slide2.xml><?xml version="1.0" encoding="utf-8"?>
+<p:sld xmlns:a="http://schemas.openxmlformats.org/drawingml/2006/main" xmlns:r="http://schemas.openxmlformats.org/officeDocument/2006/relationships" xmlns:p="http://schemas.openxmlformats.org/presentationml/2006/main">
+  <p:cSld>
+    <p:spTree>
+      <p:nvGrpSpPr>
+        <p:cNvPr id="1" name=""/>
+        <p:cNvGrpSpPr/>
+        <p:nvPr/>
+      </p:nvGrpSpPr>
+      <p:grpSpPr>
+        <a:xfrm>
+          <a:off x="0" y="0"/>
+          <a:ext cx="0" cy="0"/>
+          <a:chOff x="0" y="0"/>
+          <a:chExt cx="0" cy="0"/>
+        </a:xfrm>
+      </p:grpSpPr>
+      <p:sp>
+        <p:nvSpPr>
+          <p:cNvPr id="2" name="Title 1">
+            <a:extLst>
+              <a:ext uri="{FF2B5EF4-FFF2-40B4-BE49-F238E27FC236}">
+                <a16:creationId xmlns:a16="http://schemas.microsoft.com/office/drawing/2014/main" id="{6BF04AE0-F94F-A586-34B8-68D9CAB6C6D1}"/>
+              </a:ext>
+            </a:extLst>
+          </p:cNvPr>
+          <p:cNvSpPr>
+            <a:spLocks noGrp="1"/>
+          </p:cNvSpPr>
+          <p:nvPr>
+            <p:ph type="title"/>
+          </p:nvPr>
+        </p:nvSpPr>
+        <p:spPr>
+          <a:xfrm>
+            <a:off x="2295524" y="432532"/>
+            <a:ext cx="9450077" cy="825501"/>
+          </a:xfrm>
+        </p:spPr>
+        <p:txBody>
+          <a:bodyPr/>
+          <a:lstStyle/>
+          <a:p>
+            <a:pPr lvl="0" indent="0" marL="0">
+              <a:buNone/>
+            </a:pPr>
+            <a:r>
+              <a:rPr/>
+              <a:t>Testing Slide</a:t>
+            </a:r>
+          </a:p>
+        </p:txBody>
+      </p:sp>
+      <p:sp>
+        <p:nvSpPr>
+          <p:cNvPr id="3" name="Content Placeholder 2">
+            <a:extLst>
+              <a:ext uri="{FF2B5EF4-FFF2-40B4-BE49-F238E27FC236}">
+                <a16:creationId xmlns:a16="http://schemas.microsoft.com/office/drawing/2014/main" id="{372FA590-20E9-0368-85B4-90C26598F852}"/>
+              </a:ext>
+            </a:extLst>
+          </p:cNvPr>
+          <p:cNvSpPr>
+            <a:spLocks noGrp="1"/>
+          </p:cNvSpPr>
+          <p:nvPr>
+            <p:ph idx="1"/>
+          </p:nvPr>
+        </p:nvSpPr>
+        <p:spPr/>
+        <p:txBody>
+          <a:bodyPr/>
+          <a:lstStyle/>
+          <a:p>
+            <a:pPr lvl="0" indent="0" marL="1270000">
+              <a:buNone/>
+            </a:pPr>
+            <a:r>
+              <a:rPr sz="2000" b="1"/>
+              <a:t>Tip</a:t>
+            </a:r>
+          </a:p>
+          <a:p>
+            <a:pPr lvl="0" indent="0" marL="1270000">
+              <a:buNone/>
+            </a:pPr>
+            <a:r>
+              <a:rPr sz="2000"/>
+              <a:t>This is a callout box test</a:t>
+            </a:r>
+          </a:p>
+          <a:p>
+            <a:pPr lvl="0" indent="0" marL="0">
+              <a:buNone/>
+            </a:pPr>
+            <a:r>
+              <a:rPr/>
+              <a:t>Test citation </a:t>
+            </a:r>
+            <a:r>
+              <a:rPr>
+                <a:hlinkClick r:id="rId2" action="ppaction://hlinksldjump"/>
+              </a:rPr>
+              <a:t>Jackson (1990)</a:t>
+            </a:r>
+          </a:p>
+        </p:txBody>
+      </p:sp>
+    </p:spTree>
+  </p:cSld>
+</p:sld>
+</file>
+
+<file path=ppt/slides/slide20.xml><?xml version="1.0" encoding="utf-8"?>
 <p:sld xmlns:a="http://schemas.openxmlformats.org/drawingml/2006/main" xmlns:r="http://schemas.openxmlformats.org/officeDocument/2006/relationships" xmlns:p="http://schemas.openxmlformats.org/presentationml/2006/main">
   <p:cSld>
     <p:spTree>
@@ -10815,156 +11035,7 @@
 </p:sld>
 </file>
 
-<file path=ppt/slides/slide2.xml><?xml version="1.0" encoding="utf-8"?>
-<p:sld xmlns:a="http://schemas.openxmlformats.org/drawingml/2006/main" xmlns:r="http://schemas.openxmlformats.org/officeDocument/2006/relationships" xmlns:p="http://schemas.openxmlformats.org/presentationml/2006/main">
-  <p:cSld>
-    <p:spTree>
-      <p:nvGrpSpPr>
-        <p:cNvPr id="1" name=""/>
-        <p:cNvGrpSpPr/>
-        <p:nvPr/>
-      </p:nvGrpSpPr>
-      <p:grpSpPr>
-        <a:xfrm>
-          <a:off x="0" y="0"/>
-          <a:ext cx="0" cy="0"/>
-          <a:chOff x="0" y="0"/>
-          <a:chExt cx="0" cy="0"/>
-        </a:xfrm>
-      </p:grpSpPr>
-      <p:sp>
-        <p:nvSpPr>
-          <p:cNvPr id="2" name="Title 1">
-            <a:extLst>
-              <a:ext uri="{FF2B5EF4-FFF2-40B4-BE49-F238E27FC236}">
-                <a16:creationId xmlns:a16="http://schemas.microsoft.com/office/drawing/2014/main" id="{6BF04AE0-F94F-A586-34B8-68D9CAB6C6D1}"/>
-              </a:ext>
-            </a:extLst>
-          </p:cNvPr>
-          <p:cNvSpPr>
-            <a:spLocks noGrp="1"/>
-          </p:cNvSpPr>
-          <p:nvPr>
-            <p:ph type="title"/>
-          </p:nvPr>
-        </p:nvSpPr>
-        <p:spPr>
-          <a:xfrm>
-            <a:off x="2295524" y="432532"/>
-            <a:ext cx="9450077" cy="825501"/>
-          </a:xfrm>
-        </p:spPr>
-        <p:txBody>
-          <a:bodyPr/>
-          <a:lstStyle/>
-          <a:p>
-            <a:pPr lvl="0" indent="0" marL="0">
-              <a:buNone/>
-            </a:pPr>
-            <a:r>
-              <a:rPr/>
-              <a:t>Licence</a:t>
-            </a:r>
-          </a:p>
-        </p:txBody>
-      </p:sp>
-      <p:sp>
-        <p:nvSpPr>
-          <p:cNvPr id="3" name="Content Placeholder 2">
-            <a:extLst>
-              <a:ext uri="{FF2B5EF4-FFF2-40B4-BE49-F238E27FC236}">
-                <a16:creationId xmlns:a16="http://schemas.microsoft.com/office/drawing/2014/main" id="{372FA590-20E9-0368-85B4-90C26598F852}"/>
-              </a:ext>
-            </a:extLst>
-          </p:cNvPr>
-          <p:cNvSpPr>
-            <a:spLocks noGrp="1"/>
-          </p:cNvSpPr>
-          <p:nvPr>
-            <p:ph idx="1"/>
-          </p:nvPr>
-        </p:nvSpPr>
-        <p:spPr/>
-        <p:txBody>
-          <a:bodyPr/>
-          <a:lstStyle/>
-          <a:p>
-            <a:pPr lvl="0" indent="0" marL="0">
-              <a:buNone/>
-            </a:pPr>
-            <a:r>
-              <a:rPr/>
-              <a:t>This work was originally created by Pat Callahan and Dejana Damjanovic under a CC-BY-SA 4.0 </a:t>
-            </a:r>
-            <a:r>
-              <a:rPr>
-                <a:hlinkClick r:id="rId3"/>
-              </a:rPr>
-              <a:t>Creative Commons Attribution 4.0 International License</a:t>
-            </a:r>
-            <a:r>
-              <a:rPr/>
-              <a:t> and a CC0 1.0 </a:t>
-            </a:r>
-            <a:r>
-              <a:rPr>
-                <a:hlinkClick r:id="rId4"/>
-              </a:rPr>
-              <a:t>Creative Commons Universal</a:t>
-            </a:r>
-            <a:r>
-              <a:rPr/>
-              <a:t> licence for code snippets. It was subsequently adapted and revised by </a:t>
-            </a:r>
-            <a:r>
-              <a:rPr>
-                <a:hlinkClick r:id="rId5"/>
-              </a:rPr>
-              <a:t>Sarah von Grebmer zu Wolfsthurn</a:t>
-            </a:r>
-            <a:r>
-              <a:rPr/>
-              <a:t>. This current work by </a:t>
-            </a:r>
-            <a:r>
-              <a:rPr>
-                <a:hlinkClick r:id="rId6"/>
-              </a:rPr>
-              <a:t>Tejaswini Sharma</a:t>
-            </a:r>
-            <a:r>
-              <a:rPr/>
-              <a:t> and Sarah von Grebmer zu Wolfsthurn is licensed under a CC-BY-SA 4.0 </a:t>
-            </a:r>
-            <a:r>
-              <a:rPr>
-                <a:hlinkClick r:id="rId7"/>
-              </a:rPr>
-              <a:t>Creative Commons Attribution 4.0 International SA License</a:t>
-            </a:r>
-            <a:r>
-              <a:rPr/>
-              <a:t>. permits unrestricted re-use, distribution, and reproduction in any medium, provided the original work is properly cited. If you remix, transform, or build upon the material, you must distribute your contributions under the same license as the original. Code snippets are dedicated to the public domain and licenced under a CC0 1.0 </a:t>
-            </a:r>
-            <a:r>
-              <a:rPr>
-                <a:hlinkClick r:id="rId8"/>
-              </a:rPr>
-              <a:t>Creative Commons Universal Licence</a:t>
-            </a:r>
-            <a:r>
-              <a:rPr/>
-              <a:t>. You may use, modify, distribute, and sell the code snippets for any purpose, without permission or attribution. The code snippets are provided “as is”, without warranty of any kind.</a:t>
-            </a:r>
-          </a:p>
-        </p:txBody>
-      </p:sp>
-    </p:spTree>
-  </p:cSld>
-</p:sld>
-</file>
-
-<file path=ppt/slides/slide20.xml><?xml version="1.0" encoding="utf-8"?>
+<file path=ppt/slides/slide21.xml><?xml version="1.0" encoding="utf-8"?>
 <p:sld xmlns:a="http://schemas.openxmlformats.org/drawingml/2006/main" xmlns:r="http://schemas.openxmlformats.org/officeDocument/2006/relationships" xmlns:p="http://schemas.openxmlformats.org/presentationml/2006/main">
   <p:cSld>
     <p:spTree>
@@ -11250,103 +11321,6 @@
 </p:sld>
 </file>
 
-<file path=ppt/slides/slide21.xml><?xml version="1.0" encoding="utf-8"?>
-<p:sld xmlns:a="http://schemas.openxmlformats.org/drawingml/2006/main" xmlns:r="http://schemas.openxmlformats.org/officeDocument/2006/relationships" xmlns:p="http://schemas.openxmlformats.org/presentationml/2006/main">
-  <p:cSld>
-    <p:spTree>
-      <p:nvGrpSpPr>
-        <p:cNvPr id="1" name=""/>
-        <p:cNvGrpSpPr/>
-        <p:nvPr/>
-      </p:nvGrpSpPr>
-      <p:grpSpPr>
-        <a:xfrm>
-          <a:off x="0" y="0"/>
-          <a:ext cx="0" cy="0"/>
-          <a:chOff x="0" y="0"/>
-          <a:chExt cx="0" cy="0"/>
-        </a:xfrm>
-      </p:grpSpPr>
-      <p:sp>
-        <p:nvSpPr>
-          <p:cNvPr id="2" name="Title 1">
-            <a:extLst>
-              <a:ext uri="{FF2B5EF4-FFF2-40B4-BE49-F238E27FC236}">
-                <a16:creationId xmlns:a16="http://schemas.microsoft.com/office/drawing/2014/main" id="{6BF04AE0-F94F-A586-34B8-68D9CAB6C6D1}"/>
-              </a:ext>
-            </a:extLst>
-          </p:cNvPr>
-          <p:cNvSpPr>
-            <a:spLocks noGrp="1"/>
-          </p:cNvSpPr>
-          <p:nvPr>
-            <p:ph type="title"/>
-          </p:nvPr>
-        </p:nvSpPr>
-        <p:spPr>
-          <a:xfrm>
-            <a:off x="2295524" y="432532"/>
-            <a:ext cx="9450077" cy="825501"/>
-          </a:xfrm>
-        </p:spPr>
-        <p:txBody>
-          <a:bodyPr/>
-          <a:lstStyle/>
-          <a:p>
-            <a:pPr lvl="0" indent="0" marL="0">
-              <a:buNone/>
-            </a:pPr>
-            <a:r>
-              <a:rPr/>
-              <a:t>Short exercise</a:t>
-            </a:r>
-          </a:p>
-        </p:txBody>
-      </p:sp>
-      <p:sp>
-        <p:nvSpPr>
-          <p:cNvPr id="3" name="Content Placeholder 2">
-            <a:extLst>
-              <a:ext uri="{FF2B5EF4-FFF2-40B4-BE49-F238E27FC236}">
-                <a16:creationId xmlns:a16="http://schemas.microsoft.com/office/drawing/2014/main" id="{372FA590-20E9-0368-85B4-90C26598F852}"/>
-              </a:ext>
-            </a:extLst>
-          </p:cNvPr>
-          <p:cNvSpPr>
-            <a:spLocks noGrp="1"/>
-          </p:cNvSpPr>
-          <p:nvPr>
-            <p:ph idx="1"/>
-          </p:nvPr>
-        </p:nvSpPr>
-        <p:spPr/>
-        <p:txBody>
-          <a:bodyPr/>
-          <a:lstStyle/>
-          <a:p>
-            <a:pPr lvl="0" indent="0" marL="0">
-              <a:buNone/>
-            </a:pPr>
-            <a:r>
-              <a:rPr/>
-              <a:t>Use a minute to think about which citation format is used in </a:t>
-            </a:r>
-            <a:r>
-              <a:rPr b="1"/>
-              <a:t>your field</a:t>
-            </a:r>
-            <a:r>
-              <a:rPr/>
-              <a:t>.</a:t>
-            </a:r>
-          </a:p>
-        </p:txBody>
-      </p:sp>
-    </p:spTree>
-  </p:cSld>
-</p:sld>
-</file>
-
 <file path=ppt/slides/slide22.xml><?xml version="1.0" encoding="utf-8"?>
 <p:sld xmlns:a="http://schemas.openxmlformats.org/drawingml/2006/main" xmlns:r="http://schemas.openxmlformats.org/officeDocument/2006/relationships" xmlns:p="http://schemas.openxmlformats.org/presentationml/2006/main">
   <p:cSld>
@@ -11395,7 +11369,7 @@
             </a:pPr>
             <a:r>
               <a:rPr/>
-              <a:t>What are citation tools?</a:t>
+              <a:t>Short exercise</a:t>
             </a:r>
           </a:p>
         </p:txBody>
@@ -11425,67 +11399,16 @@
               <a:buNone/>
             </a:pPr>
             <a:r>
+              <a:rPr/>
+              <a:t>Use a minute to think about which citation format is used in </a:t>
+            </a:r>
+            <a:r>
               <a:rPr b="1"/>
-              <a:t>Citation tools</a:t>
-            </a:r>
-            <a:r>
-              <a:rPr/>
-              <a:t> (or </a:t>
-            </a:r>
-            <a:r>
-              <a:rPr b="1"/>
-              <a:t>reference managers</a:t>
-            </a:r>
-            <a:r>
-              <a:rPr/>
-              <a:t>) are apps or software that help you </a:t>
-            </a:r>
-            <a:r>
-              <a:rPr i="1"/>
-              <a:t>collect, organize, and format citations</a:t>
-            </a:r>
-            <a:r>
-              <a:rPr/>
-              <a:t> for academic essays or scientific research. Examples include:</a:t>
-            </a:r>
-          </a:p>
-          <a:p>
-            <a:pPr lvl="0"/>
-            <a:r>
-              <a:rPr/>
-              <a:t>Zotero: </a:t>
-            </a:r>
-            <a:r>
-              <a:rPr>
-                <a:hlinkClick r:id="rId3"/>
-              </a:rPr>
-              <a:t>https://www.zotero.org/</a:t>
-            </a:r>
-          </a:p>
-          <a:p>
-            <a:pPr lvl="0"/>
-            <a:r>
-              <a:rPr/>
-              <a:t>Mendeley: </a:t>
-            </a:r>
-            <a:r>
-              <a:rPr>
-                <a:hlinkClick r:id="rId4"/>
-              </a:rPr>
-              <a:t>https://www.mendeley.com/</a:t>
-            </a:r>
-          </a:p>
-          <a:p>
-            <a:pPr lvl="0"/>
-            <a:r>
-              <a:rPr/>
-              <a:t>Citavi: </a:t>
-            </a:r>
-            <a:r>
-              <a:rPr>
-                <a:hlinkClick r:id="rId5"/>
-              </a:rPr>
-              <a:t>https://www.citavi.com</a:t>
+              <a:t>your field</a:t>
+            </a:r>
+            <a:r>
+              <a:rPr/>
+              <a:t>.</a:t>
             </a:r>
           </a:p>
         </p:txBody>
@@ -11496,6 +11419,154 @@
 </file>
 
 <file path=ppt/slides/slide23.xml><?xml version="1.0" encoding="utf-8"?>
+<p:sld xmlns:a="http://schemas.openxmlformats.org/drawingml/2006/main" xmlns:r="http://schemas.openxmlformats.org/officeDocument/2006/relationships" xmlns:p="http://schemas.openxmlformats.org/presentationml/2006/main">
+  <p:cSld>
+    <p:spTree>
+      <p:nvGrpSpPr>
+        <p:cNvPr id="1" name=""/>
+        <p:cNvGrpSpPr/>
+        <p:nvPr/>
+      </p:nvGrpSpPr>
+      <p:grpSpPr>
+        <a:xfrm>
+          <a:off x="0" y="0"/>
+          <a:ext cx="0" cy="0"/>
+          <a:chOff x="0" y="0"/>
+          <a:chExt cx="0" cy="0"/>
+        </a:xfrm>
+      </p:grpSpPr>
+      <p:sp>
+        <p:nvSpPr>
+          <p:cNvPr id="2" name="Title 1">
+            <a:extLst>
+              <a:ext uri="{FF2B5EF4-FFF2-40B4-BE49-F238E27FC236}">
+                <a16:creationId xmlns:a16="http://schemas.microsoft.com/office/drawing/2014/main" id="{6BF04AE0-F94F-A586-34B8-68D9CAB6C6D1}"/>
+              </a:ext>
+            </a:extLst>
+          </p:cNvPr>
+          <p:cNvSpPr>
+            <a:spLocks noGrp="1"/>
+          </p:cNvSpPr>
+          <p:nvPr>
+            <p:ph type="title"/>
+          </p:nvPr>
+        </p:nvSpPr>
+        <p:spPr>
+          <a:xfrm>
+            <a:off x="2295524" y="432532"/>
+            <a:ext cx="9450077" cy="825501"/>
+          </a:xfrm>
+        </p:spPr>
+        <p:txBody>
+          <a:bodyPr/>
+          <a:lstStyle/>
+          <a:p>
+            <a:pPr lvl="0" indent="0" marL="0">
+              <a:buNone/>
+            </a:pPr>
+            <a:r>
+              <a:rPr/>
+              <a:t>What are citation tools?</a:t>
+            </a:r>
+          </a:p>
+        </p:txBody>
+      </p:sp>
+      <p:sp>
+        <p:nvSpPr>
+          <p:cNvPr id="3" name="Content Placeholder 2">
+            <a:extLst>
+              <a:ext uri="{FF2B5EF4-FFF2-40B4-BE49-F238E27FC236}">
+                <a16:creationId xmlns:a16="http://schemas.microsoft.com/office/drawing/2014/main" id="{372FA590-20E9-0368-85B4-90C26598F852}"/>
+              </a:ext>
+            </a:extLst>
+          </p:cNvPr>
+          <p:cNvSpPr>
+            <a:spLocks noGrp="1"/>
+          </p:cNvSpPr>
+          <p:nvPr>
+            <p:ph idx="1"/>
+          </p:nvPr>
+        </p:nvSpPr>
+        <p:spPr/>
+        <p:txBody>
+          <a:bodyPr/>
+          <a:lstStyle/>
+          <a:p>
+            <a:pPr lvl="0" indent="0" marL="0">
+              <a:buNone/>
+            </a:pPr>
+            <a:r>
+              <a:rPr b="1"/>
+              <a:t>Citation tools</a:t>
+            </a:r>
+            <a:r>
+              <a:rPr/>
+              <a:t> (or </a:t>
+            </a:r>
+            <a:r>
+              <a:rPr b="1"/>
+              <a:t>reference managers</a:t>
+            </a:r>
+            <a:r>
+              <a:rPr/>
+              <a:t>) are apps or software that help you </a:t>
+            </a:r>
+            <a:r>
+              <a:rPr i="1"/>
+              <a:t>collect, organize, and format citations</a:t>
+            </a:r>
+            <a:r>
+              <a:rPr/>
+              <a:t> for academic essays or scientific research. Examples include:</a:t>
+            </a:r>
+          </a:p>
+          <a:p>
+            <a:pPr lvl="0"/>
+            <a:r>
+              <a:rPr/>
+              <a:t>Zotero: </a:t>
+            </a:r>
+            <a:r>
+              <a:rPr>
+                <a:hlinkClick r:id="rId3"/>
+              </a:rPr>
+              <a:t>https://www.zotero.org/</a:t>
+            </a:r>
+          </a:p>
+          <a:p>
+            <a:pPr lvl="0"/>
+            <a:r>
+              <a:rPr/>
+              <a:t>Mendeley: </a:t>
+            </a:r>
+            <a:r>
+              <a:rPr>
+                <a:hlinkClick r:id="rId4"/>
+              </a:rPr>
+              <a:t>https://www.mendeley.com/</a:t>
+            </a:r>
+          </a:p>
+          <a:p>
+            <a:pPr lvl="0"/>
+            <a:r>
+              <a:rPr/>
+              <a:t>Citavi: </a:t>
+            </a:r>
+            <a:r>
+              <a:rPr>
+                <a:hlinkClick r:id="rId5"/>
+              </a:rPr>
+              <a:t>https://www.citavi.com</a:t>
+            </a:r>
+          </a:p>
+        </p:txBody>
+      </p:sp>
+    </p:spTree>
+  </p:cSld>
+</p:sld>
+</file>
+
+<file path=ppt/slides/slide24.xml><?xml version="1.0" encoding="utf-8"?>
 <p:sld xmlns:a="http://schemas.openxmlformats.org/drawingml/2006/main" xmlns:r="http://schemas.openxmlformats.org/officeDocument/2006/relationships" xmlns:p="http://schemas.openxmlformats.org/presentationml/2006/main">
   <p:cSld>
     <p:spTree>
@@ -11994,64 +12065,6 @@
 </p:sld>
 </file>
 
-<file path=ppt/slides/slide24.xml><?xml version="1.0" encoding="utf-8"?>
-<p:sld xmlns:a="http://schemas.openxmlformats.org/drawingml/2006/main" xmlns:r="http://schemas.openxmlformats.org/officeDocument/2006/relationships" xmlns:p="http://schemas.openxmlformats.org/presentationml/2006/main">
-  <p:cSld>
-    <p:spTree>
-      <p:nvGrpSpPr>
-        <p:cNvPr id="1" name=""/>
-        <p:cNvGrpSpPr/>
-        <p:nvPr/>
-      </p:nvGrpSpPr>
-      <p:grpSpPr>
-        <a:xfrm>
-          <a:off x="0" y="0"/>
-          <a:ext cx="0" cy="0"/>
-          <a:chOff x="0" y="0"/>
-          <a:chExt cx="0" cy="0"/>
-        </a:xfrm>
-      </p:grpSpPr>
-      <p:sp>
-        <p:nvSpPr>
-          <p:cNvPr id="2" name="Title 1">
-            <a:extLst>
-              <a:ext uri="{FF2B5EF4-FFF2-40B4-BE49-F238E27FC236}">
-                <a16:creationId xmlns:a16="http://schemas.microsoft.com/office/drawing/2014/main" id="{6BF04AE0-F94F-A586-34B8-68D9CAB6C6D1}"/>
-              </a:ext>
-            </a:extLst>
-          </p:cNvPr>
-          <p:cNvSpPr>
-            <a:spLocks noGrp="1"/>
-          </p:cNvSpPr>
-          <p:nvPr>
-            <p:ph type="title"/>
-          </p:nvPr>
-        </p:nvSpPr>
-        <p:spPr>
-          <a:xfrm>
-            <a:off x="2295524" y="432532"/>
-            <a:ext cx="9450077" cy="825501"/>
-          </a:xfrm>
-        </p:spPr>
-        <p:txBody>
-          <a:bodyPr/>
-          <a:lstStyle/>
-          <a:p>
-            <a:pPr lvl="0" indent="0" marL="0">
-              <a:buNone/>
-            </a:pPr>
-            <a:r>
-              <a:rPr/>
-              <a:t>Questions at this point?</a:t>
-            </a:r>
-          </a:p>
-        </p:txBody>
-      </p:sp>
-    </p:spTree>
-  </p:cSld>
-</p:sld>
-</file>
-
 <file path=ppt/slides/slide25.xml><?xml version="1.0" encoding="utf-8"?>
 <p:sld xmlns:a="http://schemas.openxmlformats.org/drawingml/2006/main" xmlns:r="http://schemas.openxmlformats.org/officeDocument/2006/relationships" xmlns:p="http://schemas.openxmlformats.org/presentationml/2006/main">
   <p:cSld>
@@ -12074,6 +12087,64 @@
           <p:cNvPr id="2" name="Title 1">
             <a:extLst>
               <a:ext uri="{FF2B5EF4-FFF2-40B4-BE49-F238E27FC236}">
+                <a16:creationId xmlns:a16="http://schemas.microsoft.com/office/drawing/2014/main" id="{6BF04AE0-F94F-A586-34B8-68D9CAB6C6D1}"/>
+              </a:ext>
+            </a:extLst>
+          </p:cNvPr>
+          <p:cNvSpPr>
+            <a:spLocks noGrp="1"/>
+          </p:cNvSpPr>
+          <p:nvPr>
+            <p:ph type="title"/>
+          </p:nvPr>
+        </p:nvSpPr>
+        <p:spPr>
+          <a:xfrm>
+            <a:off x="2295524" y="432532"/>
+            <a:ext cx="9450077" cy="825501"/>
+          </a:xfrm>
+        </p:spPr>
+        <p:txBody>
+          <a:bodyPr/>
+          <a:lstStyle/>
+          <a:p>
+            <a:pPr lvl="0" indent="0" marL="0">
+              <a:buNone/>
+            </a:pPr>
+            <a:r>
+              <a:rPr/>
+              <a:t>Questions at this point?</a:t>
+            </a:r>
+          </a:p>
+        </p:txBody>
+      </p:sp>
+    </p:spTree>
+  </p:cSld>
+</p:sld>
+</file>
+
+<file path=ppt/slides/slide26.xml><?xml version="1.0" encoding="utf-8"?>
+<p:sld xmlns:a="http://schemas.openxmlformats.org/drawingml/2006/main" xmlns:r="http://schemas.openxmlformats.org/officeDocument/2006/relationships" xmlns:p="http://schemas.openxmlformats.org/presentationml/2006/main">
+  <p:cSld>
+    <p:spTree>
+      <p:nvGrpSpPr>
+        <p:cNvPr id="1" name=""/>
+        <p:cNvGrpSpPr/>
+        <p:nvPr/>
+      </p:nvGrpSpPr>
+      <p:grpSpPr>
+        <a:xfrm>
+          <a:off x="0" y="0"/>
+          <a:ext cx="0" cy="0"/>
+          <a:chOff x="0" y="0"/>
+          <a:chExt cx="0" cy="0"/>
+        </a:xfrm>
+      </p:grpSpPr>
+      <p:sp>
+        <p:nvSpPr>
+          <p:cNvPr id="2" name="Title 1">
+            <a:extLst>
+              <a:ext uri="{FF2B5EF4-FFF2-40B4-BE49-F238E27FC236}">
                 <a16:creationId xmlns:a16="http://schemas.microsoft.com/office/drawing/2014/main" id="{125F7DD1-BC99-F967-7E0D-AD07C61B1543}"/>
               </a:ext>
             </a:extLst>
@@ -12110,7 +12181,7 @@
 </p:sld>
 </file>
 
-<file path=ppt/slides/slide26.xml><?xml version="1.0" encoding="utf-8"?>
+<file path=ppt/slides/slide27.xml><?xml version="1.0" encoding="utf-8"?>
 <p:sld xmlns:a="http://schemas.openxmlformats.org/drawingml/2006/main" xmlns:r="http://schemas.openxmlformats.org/officeDocument/2006/relationships" xmlns:p="http://schemas.openxmlformats.org/presentationml/2006/main">
   <p:cSld>
     <p:spTree>
@@ -12403,7 +12474,7 @@
 </p:sld>
 </file>
 
-<file path=ppt/slides/slide27.xml><?xml version="1.0" encoding="utf-8"?>
+<file path=ppt/slides/slide28.xml><?xml version="1.0" encoding="utf-8"?>
 <p:sld xmlns:a="http://schemas.openxmlformats.org/drawingml/2006/main" xmlns:r="http://schemas.openxmlformats.org/officeDocument/2006/relationships" xmlns:p="http://schemas.openxmlformats.org/presentationml/2006/main">
   <p:cSld>
     <p:spTree>
@@ -12491,171 +12562,6 @@
 </p:sld>
 </file>
 
-<file path=ppt/slides/slide28.xml><?xml version="1.0" encoding="utf-8"?>
-<p:sld xmlns:a="http://schemas.openxmlformats.org/drawingml/2006/main" xmlns:r="http://schemas.openxmlformats.org/officeDocument/2006/relationships" xmlns:p="http://schemas.openxmlformats.org/presentationml/2006/main">
-  <p:cSld>
-    <p:spTree>
-      <p:nvGrpSpPr>
-        <p:cNvPr id="1" name=""/>
-        <p:cNvGrpSpPr/>
-        <p:nvPr/>
-      </p:nvGrpSpPr>
-      <p:grpSpPr>
-        <a:xfrm>
-          <a:off x="0" y="0"/>
-          <a:ext cx="0" cy="0"/>
-          <a:chOff x="0" y="0"/>
-          <a:chExt cx="0" cy="0"/>
-        </a:xfrm>
-      </p:grpSpPr>
-      <p:sp>
-        <p:nvSpPr>
-          <p:cNvPr id="2" name="Title 1">
-            <a:extLst>
-              <a:ext uri="{FF2B5EF4-FFF2-40B4-BE49-F238E27FC236}">
-                <a16:creationId xmlns:a16="http://schemas.microsoft.com/office/drawing/2014/main" id="{6BF04AE0-F94F-A586-34B8-68D9CAB6C6D1}"/>
-              </a:ext>
-            </a:extLst>
-          </p:cNvPr>
-          <p:cNvSpPr>
-            <a:spLocks noGrp="1"/>
-          </p:cNvSpPr>
-          <p:nvPr>
-            <p:ph type="title"/>
-          </p:nvPr>
-        </p:nvSpPr>
-        <p:spPr>
-          <a:xfrm>
-            <a:off x="2295524" y="432532"/>
-            <a:ext cx="9450077" cy="825501"/>
-          </a:xfrm>
-        </p:spPr>
-        <p:txBody>
-          <a:bodyPr/>
-          <a:lstStyle/>
-          <a:p>
-            <a:pPr lvl="0" indent="0" marL="0">
-              <a:buNone/>
-            </a:pPr>
-            <a:r>
-              <a:rPr/>
-              <a:t>Your turn!</a:t>
-            </a:r>
-          </a:p>
-        </p:txBody>
-      </p:sp>
-      <p:sp>
-        <p:nvSpPr>
-          <p:cNvPr id="3" name="Content Placeholder 2">
-            <a:extLst>
-              <a:ext uri="{FF2B5EF4-FFF2-40B4-BE49-F238E27FC236}">
-                <a16:creationId xmlns:a16="http://schemas.microsoft.com/office/drawing/2014/main" id="{372FA590-20E9-0368-85B4-90C26598F852}"/>
-              </a:ext>
-            </a:extLst>
-          </p:cNvPr>
-          <p:cNvSpPr>
-            <a:spLocks noGrp="1"/>
-          </p:cNvSpPr>
-          <p:nvPr>
-            <p:ph idx="1"/>
-          </p:nvPr>
-        </p:nvSpPr>
-        <p:spPr/>
-        <p:txBody>
-          <a:bodyPr/>
-          <a:lstStyle/>
-          <a:p>
-            <a:pPr lvl="0" indent="0" marL="0">
-              <a:buNone/>
-            </a:pPr>
-            <a:r>
-              <a:rPr/>
-              <a:t>In this next part, you will familiarize yourself with </a:t>
-            </a:r>
-            <a:r>
-              <a:rPr b="1"/>
-              <a:t>Zotero</a:t>
-            </a:r>
-            <a:r>
-              <a:rPr/>
-              <a:t> through </a:t>
-            </a:r>
-            <a:r>
-              <a:rPr b="1"/>
-              <a:t>hands-on exercices and activities</a:t>
-            </a:r>
-            <a:r>
-              <a:rPr/>
-              <a:t>:</a:t>
-            </a:r>
-          </a:p>
-          <a:p>
-            <a:pPr lvl="0"/>
-            <a:r>
-              <a:rPr/>
-              <a:t>Click here: </a:t>
-            </a:r>
-            <a:r>
-              <a:rPr>
-                <a:hlinkClick r:id="rId3"/>
-              </a:rPr>
-              <a:t>Zotero: Hands-on practical activities</a:t>
-            </a:r>
-          </a:p>
-          <a:p>
-            <a:pPr lvl="0"/>
-            <a:r>
-              <a:rPr/>
-              <a:t>Or follow: </a:t>
-            </a:r>
-            <a:r>
-              <a:rPr>
-                <a:hlinkClick r:id="rId4"/>
-              </a:rPr>
-              <a:t>https://lmu-osc.github.io/introduction-to-zotero/background/zotero_basics.html</a:t>
-            </a:r>
-          </a:p>
-          <a:p>
-            <a:pPr lvl="0" indent="0" marL="0">
-              <a:buNone/>
-            </a:pPr>
-            <a:r>
-              <a:rPr b="1"/>
-              <a:t>Tip:</a:t>
-            </a:r>
-          </a:p>
-          <a:p>
-            <a:pPr lvl="0" indent="0" marL="0">
-              <a:buNone/>
-            </a:pPr>
-            <a:r>
-              <a:rPr/>
-              <a:t>Since this is a self-paced tutorial, </a:t>
-            </a:r>
-            <a:r>
-              <a:rPr i="1"/>
-              <a:t>take your time</a:t>
-            </a:r>
-            <a:r>
-              <a:rPr/>
-              <a:t> on navigating it; and it can be finished at home as well. We will have a </a:t>
-            </a:r>
-            <a:r>
-              <a:rPr b="1"/>
-              <a:t>check-in moment</a:t>
-            </a:r>
-            <a:r>
-              <a:rPr/>
-              <a:t> at the end of this session and discuss any remaining questions.</a:t>
-            </a:r>
-          </a:p>
-        </p:txBody>
-      </p:sp>
-    </p:spTree>
-  </p:cSld>
-</p:sld>
-</file>
-
 <file path=ppt/slides/slide29.xml><?xml version="1.0" encoding="utf-8"?>
 <p:sld xmlns:a="http://schemas.openxmlformats.org/drawingml/2006/main" xmlns:r="http://schemas.openxmlformats.org/officeDocument/2006/relationships" xmlns:p="http://schemas.openxmlformats.org/presentationml/2006/main">
   <p:cSld>
@@ -12704,7 +12610,7 @@
             </a:pPr>
             <a:r>
               <a:rPr/>
-              <a:t>Wrapping up</a:t>
+              <a:t>Your turn!</a:t>
             </a:r>
           </a:p>
         </p:txBody>
@@ -12730,46 +12636,88 @@
           <a:bodyPr/>
           <a:lstStyle/>
           <a:p>
+            <a:pPr lvl="0" indent="0" marL="0">
+              <a:buNone/>
+            </a:pPr>
+            <a:r>
+              <a:rPr/>
+              <a:t>In this next part, you will familiarize yourself with </a:t>
+            </a:r>
+            <a:r>
+              <a:rPr b="1"/>
+              <a:t>Zotero</a:t>
+            </a:r>
+            <a:r>
+              <a:rPr/>
+              <a:t> through </a:t>
+            </a:r>
+            <a:r>
+              <a:rPr b="1"/>
+              <a:t>hands-on exercices and activities</a:t>
+            </a:r>
+            <a:r>
+              <a:rPr/>
+              <a:t>:</a:t>
+            </a:r>
+          </a:p>
+          <a:p>
             <a:pPr lvl="0"/>
             <a:r>
+              <a:rPr/>
+              <a:t>Click here: </a:t>
+            </a:r>
+            <a:r>
+              <a:rPr>
+                <a:hlinkClick r:id="rId3"/>
+              </a:rPr>
+              <a:t>Zotero: Hands-on practical activities</a:t>
+            </a:r>
+          </a:p>
+          <a:p>
+            <a:pPr lvl="0"/>
+            <a:r>
+              <a:rPr/>
+              <a:t>Or follow: </a:t>
+            </a:r>
+            <a:r>
+              <a:rPr>
+                <a:hlinkClick r:id="rId4"/>
+              </a:rPr>
+              <a:t>https://lmu-osc.github.io/introduction-to-zotero/background/zotero_basics.html</a:t>
+            </a:r>
+          </a:p>
+          <a:p>
+            <a:pPr lvl="0" indent="0" marL="0">
+              <a:buNone/>
+            </a:pPr>
+            <a:r>
               <a:rPr b="1"/>
-              <a:t>For later</a:t>
-            </a:r>
-            <a:r>
-              <a:rPr/>
-              <a:t>: Finish the remaining of the ‘Introduction to Zotero’ tutorial and its exercises at home.</a:t>
-            </a:r>
-          </a:p>
-          <a:p>
-            <a:pPr lvl="0"/>
+              <a:t>Tip:</a:t>
+            </a:r>
+          </a:p>
+          <a:p>
+            <a:pPr lvl="0" indent="0" marL="0">
+              <a:buNone/>
+            </a:pPr>
+            <a:r>
+              <a:rPr/>
+              <a:t>Since this is a self-paced tutorial, </a:t>
+            </a:r>
+            <a:r>
+              <a:rPr i="1"/>
+              <a:t>take your time</a:t>
+            </a:r>
+            <a:r>
+              <a:rPr/>
+              <a:t> on navigating it; and it can be finished at home as well. We will have a </a:t>
+            </a:r>
             <a:r>
               <a:rPr b="1"/>
-              <a:t>For now</a:t>
-            </a:r>
-            <a:r>
-              <a:rPr/>
-              <a:t>: Take one minute to assess your learning progress from the tutorial:</a:t>
-            </a:r>
-          </a:p>
-          <a:p>
-            <a:pPr lvl="1"/>
-            <a:r>
-              <a:rPr/>
-              <a:t>What is one key concept about citations or Zotero that became clearer after completing the exercises?</a:t>
-            </a:r>
-          </a:p>
-          <a:p>
-            <a:pPr lvl="1"/>
-            <a:r>
-              <a:rPr/>
-              <a:t>Which Zotero task can you now perform confidently, and which one still feels challenging?</a:t>
-            </a:r>
-          </a:p>
-          <a:p>
-            <a:pPr lvl="1"/>
-            <a:r>
-              <a:rPr/>
-              <a:t>How easy has it been navigating different CSL formats?</a:t>
+              <a:t>check-in moment</a:t>
+            </a:r>
+            <a:r>
+              <a:rPr/>
+              <a:t> at the end of this session and discuss any remaining questions.</a:t>
             </a:r>
           </a:p>
         </p:txBody>
@@ -12798,6 +12746,42 @@
       </p:grpSpPr>
       <p:sp>
         <p:nvSpPr>
+          <p:cNvPr id="2" name="Title 1">
+            <a:extLst>
+              <a:ext uri="{FF2B5EF4-FFF2-40B4-BE49-F238E27FC236}">
+                <a16:creationId xmlns:a16="http://schemas.microsoft.com/office/drawing/2014/main" id="{6BF04AE0-F94F-A586-34B8-68D9CAB6C6D1}"/>
+              </a:ext>
+            </a:extLst>
+          </p:cNvPr>
+          <p:cNvSpPr>
+            <a:spLocks noGrp="1"/>
+          </p:cNvSpPr>
+          <p:nvPr>
+            <p:ph type="title"/>
+          </p:nvPr>
+        </p:nvSpPr>
+        <p:spPr>
+          <a:xfrm>
+            <a:off x="2295524" y="432532"/>
+            <a:ext cx="9450077" cy="825501"/>
+          </a:xfrm>
+        </p:spPr>
+        <p:txBody>
+          <a:bodyPr/>
+          <a:lstStyle/>
+          <a:p>
+            <a:pPr lvl="0" indent="0" marL="0">
+              <a:buNone/>
+            </a:pPr>
+            <a:r>
+              <a:rPr/>
+              <a:t>Licence</a:t>
+            </a:r>
+          </a:p>
+        </p:txBody>
+      </p:sp>
+      <p:sp>
+        <p:nvSpPr>
           <p:cNvPr id="3" name="Content Placeholder 2">
             <a:extLst>
               <a:ext uri="{FF2B5EF4-FFF2-40B4-BE49-F238E27FC236}">
@@ -12818,60 +12802,71 @@
           <a:lstStyle/>
           <a:p>
             <a:pPr lvl="0" indent="0" marL="0">
-              <a:spcBef>
-                <a:spcPts val="3000"/>
-              </a:spcBef>
-              <a:buNone/>
-            </a:pPr>
-            <a:r>
-              <a:rPr b="1"/>
-              <a:t>Contribution statement</a:t>
-            </a:r>
-          </a:p>
-          <a:p>
-            <a:pPr lvl="0" indent="0" marL="0">
-              <a:buNone/>
-            </a:pPr>
-            <a:r>
-              <a:rPr b="1"/>
-              <a:t>Creator</a:t>
-            </a:r>
-            <a:r>
-              <a:rPr/>
-              <a:t>: Sharma, Tejaswini (</a:t>
-            </a:r>
-            <a:r>
-              <a:rPr>
-                <a:hlinkClick r:id="rId2"/>
-              </a:rPr>
-              <a:t>Orcid-ID: 00009-0000-0305-9751</a:t>
-            </a:r>
-            <a:r>
-              <a:rPr/>
-              <a:t>)</a:t>
-            </a:r>
-          </a:p>
-          <a:p>
-            <a:pPr lvl="0" indent="0" marL="0">
-              <a:buNone/>
-            </a:pPr>
-            <a:r>
-              <a:rPr b="1"/>
-              <a:t>Reviewer</a:t>
-            </a:r>
-            <a:r>
-              <a:rPr/>
-              <a:t>: Von Grebmer zu Wolfsthurn, Sarah (</a:t>
+              <a:buNone/>
+            </a:pPr>
+            <a:r>
+              <a:rPr/>
+              <a:t>This work was originally created by Pat Callahan and Dejana Damjanovic under a CC-BY-SA 4.0 </a:t>
             </a:r>
             <a:r>
               <a:rPr>
                 <a:hlinkClick r:id="rId3"/>
               </a:rPr>
-              <a:t>Ordcid-ID: 0000-0002-6413-3895</a:t>
-            </a:r>
-            <a:r>
-              <a:rPr/>
-              <a:t>)</a:t>
+              <a:t>Creative Commons Attribution 4.0 International License</a:t>
+            </a:r>
+            <a:r>
+              <a:rPr/>
+              <a:t> and a CC0 1.0 </a:t>
+            </a:r>
+            <a:r>
+              <a:rPr>
+                <a:hlinkClick r:id="rId4"/>
+              </a:rPr>
+              <a:t>Creative Commons Universal</a:t>
+            </a:r>
+            <a:r>
+              <a:rPr/>
+              <a:t> licence for code snippets. It was subsequently adapted and revised by </a:t>
+            </a:r>
+            <a:r>
+              <a:rPr>
+                <a:hlinkClick r:id="rId5"/>
+              </a:rPr>
+              <a:t>Sarah von Grebmer zu Wolfsthurn</a:t>
+            </a:r>
+            <a:r>
+              <a:rPr/>
+              <a:t>. This current work by </a:t>
+            </a:r>
+            <a:r>
+              <a:rPr>
+                <a:hlinkClick r:id="rId6"/>
+              </a:rPr>
+              <a:t>Tejaswini Sharma</a:t>
+            </a:r>
+            <a:r>
+              <a:rPr/>
+              <a:t> and Sarah von Grebmer zu Wolfsthurn is licensed under a CC-BY-SA 4.0 </a:t>
+            </a:r>
+            <a:r>
+              <a:rPr>
+                <a:hlinkClick r:id="rId7"/>
+              </a:rPr>
+              <a:t>Creative Commons Attribution 4.0 International SA License</a:t>
+            </a:r>
+            <a:r>
+              <a:rPr/>
+              <a:t>. permits unrestricted re-use, distribution, and reproduction in any medium, provided the original work is properly cited. If you remix, transform, or build upon the material, you must distribute your contributions under the same license as the original. Code snippets are dedicated to the public domain and licenced under a CC0 1.0 </a:t>
+            </a:r>
+            <a:r>
+              <a:rPr>
+                <a:hlinkClick r:id="rId8"/>
+              </a:rPr>
+              <a:t>Creative Commons Universal Licence</a:t>
+            </a:r>
+            <a:r>
+              <a:rPr/>
+              <a:t>. You may use, modify, distribute, and sell the code snippets for any purpose, without permission or attribution. The code snippets are provided “as is”, without warranty of any kind.</a:t>
             </a:r>
           </a:p>
         </p:txBody>
@@ -12929,7 +12924,7 @@
             </a:pPr>
             <a:r>
               <a:rPr/>
-              <a:t>Looking into the future</a:t>
+              <a:t>Wrapping up</a:t>
             </a:r>
           </a:p>
         </p:txBody>
@@ -12955,66 +12950,46 @@
           <a:bodyPr/>
           <a:lstStyle/>
           <a:p>
-            <a:pPr lvl="0" indent="-457200" marL="457200">
-              <a:buAutoNum type="arabicPeriod"/>
-            </a:pPr>
+            <a:pPr lvl="0"/>
             <a:r>
               <a:rPr b="1"/>
-              <a:t>Take a minute to think about the following questions, first for yourself, then in a pair:</a:t>
+              <a:t>For later</a:t>
+            </a:r>
+            <a:r>
+              <a:rPr/>
+              <a:t>: Finish the remaining of the ‘Introduction to Zotero’ tutorial and its exercises at home.</a:t>
             </a:r>
           </a:p>
           <a:p>
             <a:pPr lvl="0"/>
             <a:r>
-              <a:rPr/>
-              <a:t>Can you identify some </a:t>
-            </a:r>
-            <a:r>
               <a:rPr b="1"/>
-              <a:t>practical benefits</a:t>
-            </a:r>
-            <a:r>
-              <a:rPr/>
-              <a:t> of using Zotero?</a:t>
-            </a:r>
-          </a:p>
-          <a:p>
-            <a:pPr lvl="0"/>
-            <a:r>
-              <a:rPr/>
-              <a:t>What </a:t>
-            </a:r>
-            <a:r>
-              <a:rPr b="1"/>
-              <a:t>obstacles</a:t>
-            </a:r>
-            <a:r>
-              <a:rPr/>
-              <a:t> do you anticipate in using it consistently?</a:t>
-            </a:r>
-          </a:p>
-          <a:p>
-            <a:pPr lvl="0"/>
-            <a:r>
-              <a:rPr/>
-              <a:t>How can Zotero support you in your </a:t>
-            </a:r>
-            <a:r>
-              <a:rPr b="1"/>
-              <a:t>upcoming projects</a:t>
-            </a:r>
-            <a:r>
-              <a:rPr/>
-              <a:t>?</a:t>
-            </a:r>
-          </a:p>
-          <a:p>
-            <a:pPr lvl="0" indent="-457200" marL="457200">
-              <a:buAutoNum startAt="2" type="arabicPeriod"/>
-            </a:pPr>
-            <a:r>
-              <a:rPr b="1"/>
-              <a:t>Share your thoughts with the group.</a:t>
+              <a:t>For now</a:t>
+            </a:r>
+            <a:r>
+              <a:rPr/>
+              <a:t>: Take one minute to assess your learning progress from the tutorial:</a:t>
+            </a:r>
+          </a:p>
+          <a:p>
+            <a:pPr lvl="1"/>
+            <a:r>
+              <a:rPr/>
+              <a:t>What is one key concept about citations or Zotero that became clearer after completing the exercises?</a:t>
+            </a:r>
+          </a:p>
+          <a:p>
+            <a:pPr lvl="1"/>
+            <a:r>
+              <a:rPr/>
+              <a:t>Which Zotero task can you now perform confidently, and which one still feels challenging?</a:t>
+            </a:r>
+          </a:p>
+          <a:p>
+            <a:pPr lvl="1"/>
+            <a:r>
+              <a:rPr/>
+              <a:t>How easy has it been navigating different CSL formats?</a:t>
             </a:r>
           </a:p>
         </p:txBody>
@@ -13025,6 +13000,149 @@
 </file>
 
 <file path=ppt/slides/slide31.xml><?xml version="1.0" encoding="utf-8"?>
+<p:sld xmlns:a="http://schemas.openxmlformats.org/drawingml/2006/main" xmlns:r="http://schemas.openxmlformats.org/officeDocument/2006/relationships" xmlns:p="http://schemas.openxmlformats.org/presentationml/2006/main">
+  <p:cSld>
+    <p:spTree>
+      <p:nvGrpSpPr>
+        <p:cNvPr id="1" name=""/>
+        <p:cNvGrpSpPr/>
+        <p:nvPr/>
+      </p:nvGrpSpPr>
+      <p:grpSpPr>
+        <a:xfrm>
+          <a:off x="0" y="0"/>
+          <a:ext cx="0" cy="0"/>
+          <a:chOff x="0" y="0"/>
+          <a:chExt cx="0" cy="0"/>
+        </a:xfrm>
+      </p:grpSpPr>
+      <p:sp>
+        <p:nvSpPr>
+          <p:cNvPr id="2" name="Title 1">
+            <a:extLst>
+              <a:ext uri="{FF2B5EF4-FFF2-40B4-BE49-F238E27FC236}">
+                <a16:creationId xmlns:a16="http://schemas.microsoft.com/office/drawing/2014/main" id="{6BF04AE0-F94F-A586-34B8-68D9CAB6C6D1}"/>
+              </a:ext>
+            </a:extLst>
+          </p:cNvPr>
+          <p:cNvSpPr>
+            <a:spLocks noGrp="1"/>
+          </p:cNvSpPr>
+          <p:nvPr>
+            <p:ph type="title"/>
+          </p:nvPr>
+        </p:nvSpPr>
+        <p:spPr>
+          <a:xfrm>
+            <a:off x="2295524" y="432532"/>
+            <a:ext cx="9450077" cy="825501"/>
+          </a:xfrm>
+        </p:spPr>
+        <p:txBody>
+          <a:bodyPr/>
+          <a:lstStyle/>
+          <a:p>
+            <a:pPr lvl="0" indent="0" marL="0">
+              <a:buNone/>
+            </a:pPr>
+            <a:r>
+              <a:rPr/>
+              <a:t>Looking into the future</a:t>
+            </a:r>
+          </a:p>
+        </p:txBody>
+      </p:sp>
+      <p:sp>
+        <p:nvSpPr>
+          <p:cNvPr id="3" name="Content Placeholder 2">
+            <a:extLst>
+              <a:ext uri="{FF2B5EF4-FFF2-40B4-BE49-F238E27FC236}">
+                <a16:creationId xmlns:a16="http://schemas.microsoft.com/office/drawing/2014/main" id="{372FA590-20E9-0368-85B4-90C26598F852}"/>
+              </a:ext>
+            </a:extLst>
+          </p:cNvPr>
+          <p:cNvSpPr>
+            <a:spLocks noGrp="1"/>
+          </p:cNvSpPr>
+          <p:nvPr>
+            <p:ph idx="1"/>
+          </p:nvPr>
+        </p:nvSpPr>
+        <p:spPr/>
+        <p:txBody>
+          <a:bodyPr/>
+          <a:lstStyle/>
+          <a:p>
+            <a:pPr lvl="0" indent="-457200" marL="457200">
+              <a:buAutoNum type="arabicPeriod"/>
+            </a:pPr>
+            <a:r>
+              <a:rPr b="1"/>
+              <a:t>Take a minute to think about the following questions, first for yourself, then in a pair:</a:t>
+            </a:r>
+          </a:p>
+          <a:p>
+            <a:pPr lvl="0"/>
+            <a:r>
+              <a:rPr/>
+              <a:t>Can you identify some </a:t>
+            </a:r>
+            <a:r>
+              <a:rPr b="1"/>
+              <a:t>practical benefits</a:t>
+            </a:r>
+            <a:r>
+              <a:rPr/>
+              <a:t> of using Zotero?</a:t>
+            </a:r>
+          </a:p>
+          <a:p>
+            <a:pPr lvl="0"/>
+            <a:r>
+              <a:rPr/>
+              <a:t>What </a:t>
+            </a:r>
+            <a:r>
+              <a:rPr b="1"/>
+              <a:t>obstacles</a:t>
+            </a:r>
+            <a:r>
+              <a:rPr/>
+              <a:t> do you anticipate in using it consistently?</a:t>
+            </a:r>
+          </a:p>
+          <a:p>
+            <a:pPr lvl="0"/>
+            <a:r>
+              <a:rPr/>
+              <a:t>How can Zotero support you in your </a:t>
+            </a:r>
+            <a:r>
+              <a:rPr b="1"/>
+              <a:t>upcoming projects</a:t>
+            </a:r>
+            <a:r>
+              <a:rPr/>
+              <a:t>?</a:t>
+            </a:r>
+          </a:p>
+          <a:p>
+            <a:pPr lvl="0" indent="-457200" marL="457200">
+              <a:buAutoNum startAt="2" type="arabicPeriod"/>
+            </a:pPr>
+            <a:r>
+              <a:rPr b="1"/>
+              <a:t>Share your thoughts with the group.</a:t>
+            </a:r>
+          </a:p>
+        </p:txBody>
+      </p:sp>
+    </p:spTree>
+  </p:cSld>
+</p:sld>
+</file>
+
+<file path=ppt/slides/slide32.xml><?xml version="1.0" encoding="utf-8"?>
 <p:sld xmlns:a="http://schemas.openxmlformats.org/drawingml/2006/main" xmlns:r="http://schemas.openxmlformats.org/officeDocument/2006/relationships" xmlns:p="http://schemas.openxmlformats.org/presentationml/2006/main">
   <p:cSld>
     <p:spTree>
@@ -13299,7 +13417,7 @@
 </p:sld>
 </file>
 
-<file path=ppt/slides/slide32.xml><?xml version="1.0" encoding="utf-8"?>
+<file path=ppt/slides/slide33.xml><?xml version="1.0" encoding="utf-8"?>
 <p:sld xmlns:a="http://schemas.openxmlformats.org/drawingml/2006/main" xmlns:r="http://schemas.openxmlformats.org/officeDocument/2006/relationships" xmlns:p="http://schemas.openxmlformats.org/presentationml/2006/main">
   <p:cSld>
     <p:spTree>
@@ -13721,64 +13839,6 @@
 </p:sld>
 </file>
 
-<file path=ppt/slides/slide33.xml><?xml version="1.0" encoding="utf-8"?>
-<p:sld xmlns:a="http://schemas.openxmlformats.org/drawingml/2006/main" xmlns:r="http://schemas.openxmlformats.org/officeDocument/2006/relationships" xmlns:p="http://schemas.openxmlformats.org/presentationml/2006/main">
-  <p:cSld>
-    <p:spTree>
-      <p:nvGrpSpPr>
-        <p:cNvPr id="1" name=""/>
-        <p:cNvGrpSpPr/>
-        <p:nvPr/>
-      </p:nvGrpSpPr>
-      <p:grpSpPr>
-        <a:xfrm>
-          <a:off x="0" y="0"/>
-          <a:ext cx="0" cy="0"/>
-          <a:chOff x="0" y="0"/>
-          <a:chExt cx="0" cy="0"/>
-        </a:xfrm>
-      </p:grpSpPr>
-      <p:sp>
-        <p:nvSpPr>
-          <p:cNvPr id="2" name="Title 1">
-            <a:extLst>
-              <a:ext uri="{FF2B5EF4-FFF2-40B4-BE49-F238E27FC236}">
-                <a16:creationId xmlns:a16="http://schemas.microsoft.com/office/drawing/2014/main" id="{6BF04AE0-F94F-A586-34B8-68D9CAB6C6D1}"/>
-              </a:ext>
-            </a:extLst>
-          </p:cNvPr>
-          <p:cNvSpPr>
-            <a:spLocks noGrp="1"/>
-          </p:cNvSpPr>
-          <p:nvPr>
-            <p:ph type="title"/>
-          </p:nvPr>
-        </p:nvSpPr>
-        <p:spPr>
-          <a:xfrm>
-            <a:off x="2295524" y="432532"/>
-            <a:ext cx="9450077" cy="825501"/>
-          </a:xfrm>
-        </p:spPr>
-        <p:txBody>
-          <a:bodyPr/>
-          <a:lstStyle/>
-          <a:p>
-            <a:pPr lvl="0" indent="0" marL="0">
-              <a:buNone/>
-            </a:pPr>
-            <a:r>
-              <a:rPr/>
-              <a:t>To conclude: Survey time!</a:t>
-            </a:r>
-          </a:p>
-        </p:txBody>
-      </p:sp>
-    </p:spTree>
-  </p:cSld>
-</p:sld>
-</file>
-
 <file path=ppt/slides/slide34.xml><?xml version="1.0" encoding="utf-8"?>
 <p:sld xmlns:a="http://schemas.openxmlformats.org/drawingml/2006/main" xmlns:r="http://schemas.openxmlformats.org/officeDocument/2006/relationships" xmlns:p="http://schemas.openxmlformats.org/presentationml/2006/main">
   <p:cSld>
@@ -13798,10 +13858,10 @@
       </p:grpSpPr>
       <p:sp>
         <p:nvSpPr>
-          <p:cNvPr id="3" name="Content Placeholder 2">
+          <p:cNvPr id="2" name="Title 1">
             <a:extLst>
               <a:ext uri="{FF2B5EF4-FFF2-40B4-BE49-F238E27FC236}">
-                <a16:creationId xmlns:a16="http://schemas.microsoft.com/office/drawing/2014/main" id="{372FA590-20E9-0368-85B4-90C26598F852}"/>
+                <a16:creationId xmlns:a16="http://schemas.microsoft.com/office/drawing/2014/main" id="{6BF04AE0-F94F-A586-34B8-68D9CAB6C6D1}"/>
               </a:ext>
             </a:extLst>
           </p:cNvPr>
@@ -13809,56 +13869,25 @@
             <a:spLocks noGrp="1"/>
           </p:cNvSpPr>
           <p:nvPr>
-            <p:ph idx="1"/>
-          </p:nvPr>
-        </p:nvSpPr>
-        <p:spPr/>
-        <p:txBody>
-          <a:bodyPr/>
-          <a:lstStyle/>
-          <a:p>
-            <a:pPr lvl="0" indent="0" marL="0">
-              <a:buNone/>
-            </a:pPr>
-            <a:r>
-              <a:rPr b="1"/>
-              <a:t>What is your level of familiarity with citing and referencing scientific papers?</a:t>
-            </a:r>
-          </a:p>
-          <a:p>
-            <a:pPr lvl="0" indent="-457200" marL="457200">
-              <a:buAutoNum type="alphaLcPeriod"/>
-            </a:pPr>
-            <a:r>
-              <a:rPr/>
-              <a:t>I have never heard of it before.</a:t>
-            </a:r>
-          </a:p>
-          <a:p>
-            <a:pPr lvl="0" indent="-457200" marL="457200">
-              <a:buAutoNum type="alphaLcPeriod"/>
-            </a:pPr>
-            <a:r>
-              <a:rPr/>
-              <a:t>I have heard of it but have never worked with it.</a:t>
-            </a:r>
-          </a:p>
-          <a:p>
-            <a:pPr lvl="0" indent="-457200" marL="457200">
-              <a:buAutoNum type="alphaLcPeriod"/>
-            </a:pPr>
-            <a:r>
-              <a:rPr/>
-              <a:t>I have basic understanding and experience with it.</a:t>
-            </a:r>
-          </a:p>
-          <a:p>
-            <a:pPr lvl="0" indent="-457200" marL="457200">
-              <a:buAutoNum type="alphaLcPeriod"/>
-            </a:pPr>
-            <a:r>
-              <a:rPr/>
-              <a:t>I am very familiar and have worked with it extensively.</a:t>
+            <p:ph type="title"/>
+          </p:nvPr>
+        </p:nvSpPr>
+        <p:spPr>
+          <a:xfrm>
+            <a:off x="2295524" y="432532"/>
+            <a:ext cx="9450077" cy="825501"/>
+          </a:xfrm>
+        </p:spPr>
+        <p:txBody>
+          <a:bodyPr/>
+          <a:lstStyle/>
+          <a:p>
+            <a:pPr lvl="0" indent="0" marL="0">
+              <a:buNone/>
+            </a:pPr>
+            <a:r>
+              <a:rPr/>
+              <a:t>To conclude: Survey time!</a:t>
             </a:r>
           </a:p>
         </p:txBody>
@@ -13911,15 +13940,7 @@
             </a:pPr>
             <a:r>
               <a:rPr b="1"/>
-              <a:t>How confident do you feel with the Zotero workflow of collection, organisation, and citing?</a:t>
-            </a:r>
-            <a:r>
-              <a:rPr/>
-              <a:t> </a:t>
-            </a:r>
-            <a:r>
-              <a:rPr i="1"/>
-              <a:t>(1 = Not confident at all, 5 = Very confident)</a:t>
+              <a:t>What is your level of familiarity with citing and referencing scientific papers?</a:t>
             </a:r>
           </a:p>
           <a:p>
@@ -13928,7 +13949,7 @@
             </a:pPr>
             <a:r>
               <a:rPr/>
-              <a:t>1</a:t>
+              <a:t>I have never heard of it before.</a:t>
             </a:r>
           </a:p>
           <a:p>
@@ -13937,7 +13958,7 @@
             </a:pPr>
             <a:r>
               <a:rPr/>
-              <a:t>2</a:t>
+              <a:t>I have heard of it but have never worked with it.</a:t>
             </a:r>
           </a:p>
           <a:p>
@@ -13946,7 +13967,7 @@
             </a:pPr>
             <a:r>
               <a:rPr/>
-              <a:t>3</a:t>
+              <a:t>I have basic understanding and experience with it.</a:t>
             </a:r>
           </a:p>
           <a:p>
@@ -13955,16 +13976,7 @@
             </a:pPr>
             <a:r>
               <a:rPr/>
-              <a:t>4</a:t>
-            </a:r>
-          </a:p>
-          <a:p>
-            <a:pPr lvl="0" indent="-457200" marL="457200">
-              <a:buAutoNum type="alphaLcPeriod"/>
-            </a:pPr>
-            <a:r>
-              <a:rPr/>
-              <a:t>5</a:t>
+              <a:t>I am very familiar and have worked with it extensively.</a:t>
             </a:r>
           </a:p>
         </p:txBody>
@@ -13993,42 +14005,6 @@
       </p:grpSpPr>
       <p:sp>
         <p:nvSpPr>
-          <p:cNvPr id="2" name="Title 1">
-            <a:extLst>
-              <a:ext uri="{FF2B5EF4-FFF2-40B4-BE49-F238E27FC236}">
-                <a16:creationId xmlns:a16="http://schemas.microsoft.com/office/drawing/2014/main" id="{6BF04AE0-F94F-A586-34B8-68D9CAB6C6D1}"/>
-              </a:ext>
-            </a:extLst>
-          </p:cNvPr>
-          <p:cNvSpPr>
-            <a:spLocks noGrp="1"/>
-          </p:cNvSpPr>
-          <p:nvPr>
-            <p:ph type="title"/>
-          </p:nvPr>
-        </p:nvSpPr>
-        <p:spPr>
-          <a:xfrm>
-            <a:off x="2295524" y="432532"/>
-            <a:ext cx="9450077" cy="825501"/>
-          </a:xfrm>
-        </p:spPr>
-        <p:txBody>
-          <a:bodyPr/>
-          <a:lstStyle/>
-          <a:p>
-            <a:pPr lvl="0" indent="0" marL="0">
-              <a:buNone/>
-            </a:pPr>
-            <a:r>
-              <a:rPr/>
-              <a:t>Discussion of survey results</a:t>
-            </a:r>
-          </a:p>
-        </p:txBody>
-      </p:sp>
-      <p:sp>
-        <p:nvSpPr>
           <p:cNvPr id="3" name="Content Placeholder 2">
             <a:extLst>
               <a:ext uri="{FF2B5EF4-FFF2-40B4-BE49-F238E27FC236}">
@@ -14053,7 +14029,60 @@
             </a:pPr>
             <a:r>
               <a:rPr b="1"/>
-              <a:t>What do we see in the results?</a:t>
+              <a:t>How confident do you feel with the Zotero workflow of collection, organisation, and citing?</a:t>
+            </a:r>
+            <a:r>
+              <a:rPr/>
+              <a:t> </a:t>
+            </a:r>
+            <a:r>
+              <a:rPr i="1"/>
+              <a:t>(1 = Not confident at all, 5 = Very confident)</a:t>
+            </a:r>
+          </a:p>
+          <a:p>
+            <a:pPr lvl="0" indent="-457200" marL="457200">
+              <a:buAutoNum type="alphaLcPeriod"/>
+            </a:pPr>
+            <a:r>
+              <a:rPr/>
+              <a:t>1</a:t>
+            </a:r>
+          </a:p>
+          <a:p>
+            <a:pPr lvl="0" indent="-457200" marL="457200">
+              <a:buAutoNum type="alphaLcPeriod"/>
+            </a:pPr>
+            <a:r>
+              <a:rPr/>
+              <a:t>2</a:t>
+            </a:r>
+          </a:p>
+          <a:p>
+            <a:pPr lvl="0" indent="-457200" marL="457200">
+              <a:buAutoNum type="alphaLcPeriod"/>
+            </a:pPr>
+            <a:r>
+              <a:rPr/>
+              <a:t>3</a:t>
+            </a:r>
+          </a:p>
+          <a:p>
+            <a:pPr lvl="0" indent="-457200" marL="457200">
+              <a:buAutoNum type="alphaLcPeriod"/>
+            </a:pPr>
+            <a:r>
+              <a:rPr/>
+              <a:t>4</a:t>
+            </a:r>
+          </a:p>
+          <a:p>
+            <a:pPr lvl="0" indent="-457200" marL="457200">
+              <a:buAutoNum type="alphaLcPeriod"/>
+            </a:pPr>
+            <a:r>
+              <a:rPr/>
+              <a:t>5</a:t>
             </a:r>
           </a:p>
         </p:txBody>
@@ -14111,7 +14140,38 @@
             </a:pPr>
             <a:r>
               <a:rPr/>
-              <a:t>References</a:t>
+              <a:t>Discussion of survey results</a:t>
+            </a:r>
+          </a:p>
+        </p:txBody>
+      </p:sp>
+      <p:sp>
+        <p:nvSpPr>
+          <p:cNvPr id="3" name="Content Placeholder 2">
+            <a:extLst>
+              <a:ext uri="{FF2B5EF4-FFF2-40B4-BE49-F238E27FC236}">
+                <a16:creationId xmlns:a16="http://schemas.microsoft.com/office/drawing/2014/main" id="{372FA590-20E9-0368-85B4-90C26598F852}"/>
+              </a:ext>
+            </a:extLst>
+          </p:cNvPr>
+          <p:cNvSpPr>
+            <a:spLocks noGrp="1"/>
+          </p:cNvSpPr>
+          <p:nvPr>
+            <p:ph idx="1"/>
+          </p:nvPr>
+        </p:nvSpPr>
+        <p:spPr/>
+        <p:txBody>
+          <a:bodyPr/>
+          <a:lstStyle/>
+          <a:p>
+            <a:pPr lvl="0" indent="0" marL="0">
+              <a:buNone/>
+            </a:pPr>
+            <a:r>
+              <a:rPr b="1"/>
+              <a:t>What do we see in the results?</a:t>
             </a:r>
           </a:p>
         </p:txBody>
@@ -14169,7 +14229,7 @@
             </a:pPr>
             <a:r>
               <a:rPr/>
-              <a:t>Thanks!</a:t>
+              <a:t>References</a:t>
             </a:r>
           </a:p>
         </p:txBody>
@@ -14200,7 +14260,15 @@
             </a:pPr>
             <a:r>
               <a:rPr/>
-              <a:t>See you next session :)</a:t>
+              <a:t>Jackson, P. (1990). The Daily Grind. In </a:t>
+            </a:r>
+            <a:r>
+              <a:rPr i="1"/>
+              <a:t>Life in Classrooms</a:t>
+            </a:r>
+            <a:r>
+              <a:rPr/>
+              <a:t> (2nd ed., pp. 34–35). Teachers College Press.</a:t>
             </a:r>
           </a:p>
         </p:txBody>
@@ -14258,7 +14326,7 @@
             </a:pPr>
             <a:r>
               <a:rPr/>
-              <a:t>Additional in-class activity</a:t>
+              <a:t>Thanks!</a:t>
             </a:r>
           </a:p>
         </p:txBody>
@@ -14284,14 +14352,12 @@
           <a:bodyPr/>
           <a:lstStyle/>
           <a:p>
-            <a:pPr lvl="0"/>
-            <a:r>
-              <a:rPr b="1"/>
-              <a:t>Activity</a:t>
-            </a:r>
-            <a:r>
-              <a:rPr/>
-              <a:t>: Get in a pair, navigate a literature database (Google Scholar), find a paper of your choice with its full text, analyse the citations and the reference list. Note what features you see and share in class.</a:t>
+            <a:pPr lvl="0" indent="0" marL="0">
+              <a:buNone/>
+            </a:pPr>
+            <a:r>
+              <a:rPr/>
+              <a:t>See you next session :)</a:t>
             </a:r>
           </a:p>
         </p:txBody>
@@ -14302,6 +14368,317 @@
 </file>
 
 <file path=ppt/slides/slide4.xml><?xml version="1.0" encoding="utf-8"?>
+<p:sld xmlns:a="http://schemas.openxmlformats.org/drawingml/2006/main" xmlns:r="http://schemas.openxmlformats.org/officeDocument/2006/relationships" xmlns:p="http://schemas.openxmlformats.org/presentationml/2006/main">
+  <p:cSld>
+    <p:spTree>
+      <p:nvGrpSpPr>
+        <p:cNvPr id="1" name=""/>
+        <p:cNvGrpSpPr/>
+        <p:nvPr/>
+      </p:nvGrpSpPr>
+      <p:grpSpPr>
+        <a:xfrm>
+          <a:off x="0" y="0"/>
+          <a:ext cx="0" cy="0"/>
+          <a:chOff x="0" y="0"/>
+          <a:chExt cx="0" cy="0"/>
+        </a:xfrm>
+      </p:grpSpPr>
+      <p:sp>
+        <p:nvSpPr>
+          <p:cNvPr id="3" name="Content Placeholder 2">
+            <a:extLst>
+              <a:ext uri="{FF2B5EF4-FFF2-40B4-BE49-F238E27FC236}">
+                <a16:creationId xmlns:a16="http://schemas.microsoft.com/office/drawing/2014/main" id="{372FA590-20E9-0368-85B4-90C26598F852}"/>
+              </a:ext>
+            </a:extLst>
+          </p:cNvPr>
+          <p:cNvSpPr>
+            <a:spLocks noGrp="1"/>
+          </p:cNvSpPr>
+          <p:nvPr>
+            <p:ph idx="1"/>
+          </p:nvPr>
+        </p:nvSpPr>
+        <p:spPr/>
+        <p:txBody>
+          <a:bodyPr/>
+          <a:lstStyle/>
+          <a:p>
+            <a:pPr lvl="0" indent="0" marL="0">
+              <a:spcBef>
+                <a:spcPts val="3000"/>
+              </a:spcBef>
+              <a:buNone/>
+            </a:pPr>
+            <a:r>
+              <a:rPr b="1"/>
+              <a:t>Contribution statement</a:t>
+            </a:r>
+          </a:p>
+          <a:p>
+            <a:pPr lvl="0" indent="0" marL="0">
+              <a:buNone/>
+            </a:pPr>
+            <a:r>
+              <a:rPr b="1"/>
+              <a:t>Creator</a:t>
+            </a:r>
+            <a:r>
+              <a:rPr/>
+              <a:t>: Sharma, Tejaswini (</a:t>
+            </a:r>
+            <a:r>
+              <a:rPr>
+                <a:hlinkClick r:id="rId2"/>
+              </a:rPr>
+              <a:t>Orcid-ID: 00009-0000-0305-9751</a:t>
+            </a:r>
+            <a:r>
+              <a:rPr/>
+              <a:t>)</a:t>
+            </a:r>
+          </a:p>
+          <a:p>
+            <a:pPr lvl="0" indent="0" marL="0">
+              <a:buNone/>
+            </a:pPr>
+            <a:r>
+              <a:rPr b="1"/>
+              <a:t>Reviewer</a:t>
+            </a:r>
+            <a:r>
+              <a:rPr/>
+              <a:t>: Von Grebmer zu Wolfsthurn, Sarah (</a:t>
+            </a:r>
+            <a:r>
+              <a:rPr>
+                <a:hlinkClick r:id="rId3"/>
+              </a:rPr>
+              <a:t>Ordcid-ID: 0000-0002-6413-3895</a:t>
+            </a:r>
+            <a:r>
+              <a:rPr/>
+              <a:t>)</a:t>
+            </a:r>
+          </a:p>
+        </p:txBody>
+      </p:sp>
+    </p:spTree>
+  </p:cSld>
+</p:sld>
+</file>
+
+<file path=ppt/slides/slide40.xml><?xml version="1.0" encoding="utf-8"?>
+<p:sld xmlns:a="http://schemas.openxmlformats.org/drawingml/2006/main" xmlns:r="http://schemas.openxmlformats.org/officeDocument/2006/relationships" xmlns:p="http://schemas.openxmlformats.org/presentationml/2006/main">
+  <p:cSld>
+    <p:spTree>
+      <p:nvGrpSpPr>
+        <p:cNvPr id="1" name=""/>
+        <p:cNvGrpSpPr/>
+        <p:nvPr/>
+      </p:nvGrpSpPr>
+      <p:grpSpPr>
+        <a:xfrm>
+          <a:off x="0" y="0"/>
+          <a:ext cx="0" cy="0"/>
+          <a:chOff x="0" y="0"/>
+          <a:chExt cx="0" cy="0"/>
+        </a:xfrm>
+      </p:grpSpPr>
+      <p:sp>
+        <p:nvSpPr>
+          <p:cNvPr id="2" name="Title 1">
+            <a:extLst>
+              <a:ext uri="{FF2B5EF4-FFF2-40B4-BE49-F238E27FC236}">
+                <a16:creationId xmlns:a16="http://schemas.microsoft.com/office/drawing/2014/main" id="{6BF04AE0-F94F-A586-34B8-68D9CAB6C6D1}"/>
+              </a:ext>
+            </a:extLst>
+          </p:cNvPr>
+          <p:cNvSpPr>
+            <a:spLocks noGrp="1"/>
+          </p:cNvSpPr>
+          <p:nvPr>
+            <p:ph type="title"/>
+          </p:nvPr>
+        </p:nvSpPr>
+        <p:spPr>
+          <a:xfrm>
+            <a:off x="2295524" y="432532"/>
+            <a:ext cx="9450077" cy="825501"/>
+          </a:xfrm>
+        </p:spPr>
+        <p:txBody>
+          <a:bodyPr/>
+          <a:lstStyle/>
+          <a:p>
+            <a:pPr lvl="0" indent="0" marL="0">
+              <a:buNone/>
+            </a:pPr>
+            <a:r>
+              <a:rPr/>
+              <a:t>Additional in-class activity</a:t>
+            </a:r>
+          </a:p>
+        </p:txBody>
+      </p:sp>
+      <p:sp>
+        <p:nvSpPr>
+          <p:cNvPr id="3" name="Content Placeholder 2">
+            <a:extLst>
+              <a:ext uri="{FF2B5EF4-FFF2-40B4-BE49-F238E27FC236}">
+                <a16:creationId xmlns:a16="http://schemas.microsoft.com/office/drawing/2014/main" id="{372FA590-20E9-0368-85B4-90C26598F852}"/>
+              </a:ext>
+            </a:extLst>
+          </p:cNvPr>
+          <p:cNvSpPr>
+            <a:spLocks noGrp="1"/>
+          </p:cNvSpPr>
+          <p:nvPr>
+            <p:ph idx="1"/>
+          </p:nvPr>
+        </p:nvSpPr>
+        <p:spPr/>
+        <p:txBody>
+          <a:bodyPr/>
+          <a:lstStyle/>
+          <a:p>
+            <a:pPr lvl="0"/>
+            <a:r>
+              <a:rPr b="1"/>
+              <a:t>Activity</a:t>
+            </a:r>
+            <a:r>
+              <a:rPr/>
+              <a:t>: Get in a pair, navigate a literature database (Google Scholar), find a paper of your choice with its full text, analyse the citations and the reference list. Note what features you see and share in class.</a:t>
+            </a:r>
+          </a:p>
+        </p:txBody>
+      </p:sp>
+    </p:spTree>
+  </p:cSld>
+</p:sld>
+</file>
+
+<file path=ppt/slides/slide41.xml><?xml version="1.0" encoding="utf-8"?>
+<p:sld xmlns:a="http://schemas.openxmlformats.org/drawingml/2006/main" xmlns:r="http://schemas.openxmlformats.org/officeDocument/2006/relationships" xmlns:p="http://schemas.openxmlformats.org/presentationml/2006/main">
+  <p:cSld>
+    <p:spTree>
+      <p:nvGrpSpPr>
+        <p:cNvPr id="1" name=""/>
+        <p:cNvGrpSpPr/>
+        <p:nvPr/>
+      </p:nvGrpSpPr>
+      <p:grpSpPr>
+        <a:xfrm>
+          <a:off x="0" y="0"/>
+          <a:ext cx="0" cy="0"/>
+          <a:chOff x="0" y="0"/>
+          <a:chExt cx="0" cy="0"/>
+        </a:xfrm>
+      </p:grpSpPr>
+      <p:sp>
+        <p:nvSpPr>
+          <p:cNvPr id="2" name="Title 1">
+            <a:extLst>
+              <a:ext uri="{FF2B5EF4-FFF2-40B4-BE49-F238E27FC236}">
+                <a16:creationId xmlns:a16="http://schemas.microsoft.com/office/drawing/2014/main" id="{6BF04AE0-F94F-A586-34B8-68D9CAB6C6D1}"/>
+              </a:ext>
+            </a:extLst>
+          </p:cNvPr>
+          <p:cNvSpPr>
+            <a:spLocks noGrp="1"/>
+          </p:cNvSpPr>
+          <p:nvPr>
+            <p:ph type="title"/>
+          </p:nvPr>
+        </p:nvSpPr>
+        <p:spPr>
+          <a:xfrm>
+            <a:off x="2295524" y="432532"/>
+            <a:ext cx="9450077" cy="825501"/>
+          </a:xfrm>
+        </p:spPr>
+        <p:txBody>
+          <a:bodyPr/>
+          <a:lstStyle/>
+          <a:p>
+            <a:pPr lvl="0" indent="0" marL="0">
+              <a:buNone/>
+            </a:pPr>
+            <a:r>
+              <a:rPr/>
+              <a:t>CREDiT Contribution Statement - TO DO</a:t>
+            </a:r>
+          </a:p>
+        </p:txBody>
+      </p:sp>
+      <p:sp>
+        <p:nvSpPr>
+          <p:cNvPr id="3" name="Content Placeholder 2">
+            <a:extLst>
+              <a:ext uri="{FF2B5EF4-FFF2-40B4-BE49-F238E27FC236}">
+                <a16:creationId xmlns:a16="http://schemas.microsoft.com/office/drawing/2014/main" id="{372FA590-20E9-0368-85B4-90C26598F852}"/>
+              </a:ext>
+            </a:extLst>
+          </p:cNvPr>
+          <p:cNvSpPr>
+            <a:spLocks noGrp="1"/>
+          </p:cNvSpPr>
+          <p:nvPr>
+            <p:ph idx="1"/>
+          </p:nvPr>
+        </p:nvSpPr>
+        <p:spPr/>
+        <p:txBody>
+          <a:bodyPr/>
+          <a:lstStyle/>
+          <a:p>
+            <a:pPr lvl="0" indent="0" marL="0">
+              <a:buNone/>
+            </a:pPr>
+            <a:r>
+              <a:rPr/>
+              <a:t>Possible roles using the CRediT contribition system or the Zenodo Contribution System:</a:t>
+            </a:r>
+          </a:p>
+          <a:p>
+            <a:pPr lvl="0" indent="0" marL="0">
+              <a:buNone/>
+            </a:pPr>
+            <a:r>
+              <a:rPr b="1"/>
+              <a:t>Name main content creator</a:t>
+            </a:r>
+            <a:r>
+              <a:rPr/>
+              <a:t>: Conceptualization, Software, Writing - Original Draft, Visualization. </a:t>
+            </a:r>
+            <a:r>
+              <a:rPr b="1"/>
+              <a:t>Sara Lil Middleton</a:t>
+            </a:r>
+            <a:r>
+              <a:rPr/>
+              <a:t>: Writing - Review &amp; Editing, Supervision. </a:t>
+            </a:r>
+            <a:r>
+              <a:rPr b="1"/>
+              <a:t>Sarah von Grebmer zu Wolfsthurn</a:t>
+            </a:r>
+            <a:r>
+              <a:rPr/>
+              <a:t>: Conceptualisation, Writing - Review &amp; Editing, Supervision, Project Administration, Validation.</a:t>
+            </a:r>
+          </a:p>
+        </p:txBody>
+      </p:sp>
+    </p:spTree>
+  </p:cSld>
+</p:sld>
+</file>
+
+<file path=ppt/slides/slide5.xml><?xml version="1.0" encoding="utf-8"?>
 <p:sld xmlns:a="http://schemas.openxmlformats.org/drawingml/2006/main" xmlns:r="http://schemas.openxmlformats.org/officeDocument/2006/relationships" xmlns:p="http://schemas.openxmlformats.org/presentationml/2006/main">
   <p:cSld>
     <p:spTree>
@@ -14620,125 +14997,7 @@
 </p:sld>
 </file>
 
-<file path=ppt/slides/slide40.xml><?xml version="1.0" encoding="utf-8"?>
-<p:sld xmlns:a="http://schemas.openxmlformats.org/drawingml/2006/main" xmlns:r="http://schemas.openxmlformats.org/officeDocument/2006/relationships" xmlns:p="http://schemas.openxmlformats.org/presentationml/2006/main">
-  <p:cSld>
-    <p:spTree>
-      <p:nvGrpSpPr>
-        <p:cNvPr id="1" name=""/>
-        <p:cNvGrpSpPr/>
-        <p:nvPr/>
-      </p:nvGrpSpPr>
-      <p:grpSpPr>
-        <a:xfrm>
-          <a:off x="0" y="0"/>
-          <a:ext cx="0" cy="0"/>
-          <a:chOff x="0" y="0"/>
-          <a:chExt cx="0" cy="0"/>
-        </a:xfrm>
-      </p:grpSpPr>
-      <p:sp>
-        <p:nvSpPr>
-          <p:cNvPr id="2" name="Title 1">
-            <a:extLst>
-              <a:ext uri="{FF2B5EF4-FFF2-40B4-BE49-F238E27FC236}">
-                <a16:creationId xmlns:a16="http://schemas.microsoft.com/office/drawing/2014/main" id="{6BF04AE0-F94F-A586-34B8-68D9CAB6C6D1}"/>
-              </a:ext>
-            </a:extLst>
-          </p:cNvPr>
-          <p:cNvSpPr>
-            <a:spLocks noGrp="1"/>
-          </p:cNvSpPr>
-          <p:nvPr>
-            <p:ph type="title"/>
-          </p:nvPr>
-        </p:nvSpPr>
-        <p:spPr>
-          <a:xfrm>
-            <a:off x="2295524" y="432532"/>
-            <a:ext cx="9450077" cy="825501"/>
-          </a:xfrm>
-        </p:spPr>
-        <p:txBody>
-          <a:bodyPr/>
-          <a:lstStyle/>
-          <a:p>
-            <a:pPr lvl="0" indent="0" marL="0">
-              <a:buNone/>
-            </a:pPr>
-            <a:r>
-              <a:rPr/>
-              <a:t>CREDiT Contribution Statement - TO DO</a:t>
-            </a:r>
-          </a:p>
-        </p:txBody>
-      </p:sp>
-      <p:sp>
-        <p:nvSpPr>
-          <p:cNvPr id="3" name="Content Placeholder 2">
-            <a:extLst>
-              <a:ext uri="{FF2B5EF4-FFF2-40B4-BE49-F238E27FC236}">
-                <a16:creationId xmlns:a16="http://schemas.microsoft.com/office/drawing/2014/main" id="{372FA590-20E9-0368-85B4-90C26598F852}"/>
-              </a:ext>
-            </a:extLst>
-          </p:cNvPr>
-          <p:cNvSpPr>
-            <a:spLocks noGrp="1"/>
-          </p:cNvSpPr>
-          <p:nvPr>
-            <p:ph idx="1"/>
-          </p:nvPr>
-        </p:nvSpPr>
-        <p:spPr/>
-        <p:txBody>
-          <a:bodyPr/>
-          <a:lstStyle/>
-          <a:p>
-            <a:pPr lvl="0" indent="0" marL="0">
-              <a:buNone/>
-            </a:pPr>
-            <a:r>
-              <a:rPr/>
-              <a:t>Possible roles using the CRediT contribition system or the Zenodo Contribution System:</a:t>
-            </a:r>
-          </a:p>
-          <a:p>
-            <a:pPr lvl="0" indent="0" marL="0">
-              <a:buNone/>
-            </a:pPr>
-            <a:r>
-              <a:rPr b="1"/>
-              <a:t>Name main content creator</a:t>
-            </a:r>
-            <a:r>
-              <a:rPr/>
-              <a:t>: Conceptualization, Software, Writing - Original Draft, Visualization. </a:t>
-            </a:r>
-            <a:r>
-              <a:rPr b="1"/>
-              <a:t>Sara Lil Middleton</a:t>
-            </a:r>
-            <a:r>
-              <a:rPr/>
-              <a:t>: Writing - Review &amp; Editing, Supervision. </a:t>
-            </a:r>
-            <a:r>
-              <a:rPr b="1"/>
-              <a:t>Sarah von Grebmer zu Wolfsthurn</a:t>
-            </a:r>
-            <a:r>
-              <a:rPr/>
-              <a:t>: Conceptualisation, Writing - Review &amp; Editing, Supervision, Project Administration, Validation.</a:t>
-            </a:r>
-          </a:p>
-        </p:txBody>
-      </p:sp>
-    </p:spTree>
-  </p:cSld>
-</p:sld>
-</file>
-
-<file path=ppt/slides/slide5.xml><?xml version="1.0" encoding="utf-8"?>
+<file path=ppt/slides/slide6.xml><?xml version="1.0" encoding="utf-8"?>
 <p:sld xmlns:a="http://schemas.openxmlformats.org/drawingml/2006/main" xmlns:r="http://schemas.openxmlformats.org/officeDocument/2006/relationships" xmlns:p="http://schemas.openxmlformats.org/presentationml/2006/main">
   <p:cSld>
     <p:spTree>
@@ -14871,64 +15130,6 @@
 </p:sld>
 </file>
 
-<file path=ppt/slides/slide6.xml><?xml version="1.0" encoding="utf-8"?>
-<p:sld xmlns:a="http://schemas.openxmlformats.org/drawingml/2006/main" xmlns:r="http://schemas.openxmlformats.org/officeDocument/2006/relationships" xmlns:p="http://schemas.openxmlformats.org/presentationml/2006/main">
-  <p:cSld>
-    <p:spTree>
-      <p:nvGrpSpPr>
-        <p:cNvPr id="1" name=""/>
-        <p:cNvGrpSpPr/>
-        <p:nvPr/>
-      </p:nvGrpSpPr>
-      <p:grpSpPr>
-        <a:xfrm>
-          <a:off x="0" y="0"/>
-          <a:ext cx="0" cy="0"/>
-          <a:chOff x="0" y="0"/>
-          <a:chExt cx="0" cy="0"/>
-        </a:xfrm>
-      </p:grpSpPr>
-      <p:sp>
-        <p:nvSpPr>
-          <p:cNvPr id="2" name="Title 1">
-            <a:extLst>
-              <a:ext uri="{FF2B5EF4-FFF2-40B4-BE49-F238E27FC236}">
-                <a16:creationId xmlns:a16="http://schemas.microsoft.com/office/drawing/2014/main" id="{6BF04AE0-F94F-A586-34B8-68D9CAB6C6D1}"/>
-              </a:ext>
-            </a:extLst>
-          </p:cNvPr>
-          <p:cNvSpPr>
-            <a:spLocks noGrp="1"/>
-          </p:cNvSpPr>
-          <p:nvPr>
-            <p:ph type="title"/>
-          </p:nvPr>
-        </p:nvSpPr>
-        <p:spPr>
-          <a:xfrm>
-            <a:off x="2295524" y="432532"/>
-            <a:ext cx="9450077" cy="825501"/>
-          </a:xfrm>
-        </p:spPr>
-        <p:txBody>
-          <a:bodyPr/>
-          <a:lstStyle/>
-          <a:p>
-            <a:pPr lvl="0" indent="0" marL="0">
-              <a:buNone/>
-            </a:pPr>
-            <a:r>
-              <a:rPr/>
-              <a:t>Questions from the previous submodule?</a:t>
-            </a:r>
-          </a:p>
-        </p:txBody>
-      </p:sp>
-    </p:spTree>
-  </p:cSld>
-</p:sld>
-</file>
-
 <file path=ppt/slides/slide7.xml><?xml version="1.0" encoding="utf-8"?>
 <p:sld xmlns:a="http://schemas.openxmlformats.org/drawingml/2006/main" xmlns:r="http://schemas.openxmlformats.org/officeDocument/2006/relationships" xmlns:p="http://schemas.openxmlformats.org/presentationml/2006/main">
   <p:cSld>
@@ -14977,7 +15178,7 @@
             </a:pPr>
             <a:r>
               <a:rPr/>
-              <a:t>Before we start: Survey time!</a:t>
+              <a:t>Questions from the previous submodule?</a:t>
             </a:r>
           </a:p>
         </p:txBody>
@@ -15006,10 +15207,10 @@
       </p:grpSpPr>
       <p:sp>
         <p:nvSpPr>
-          <p:cNvPr id="3" name="Content Placeholder 2">
+          <p:cNvPr id="2" name="Title 1">
             <a:extLst>
               <a:ext uri="{FF2B5EF4-FFF2-40B4-BE49-F238E27FC236}">
-                <a16:creationId xmlns:a16="http://schemas.microsoft.com/office/drawing/2014/main" id="{372FA590-20E9-0368-85B4-90C26598F852}"/>
+                <a16:creationId xmlns:a16="http://schemas.microsoft.com/office/drawing/2014/main" id="{6BF04AE0-F94F-A586-34B8-68D9CAB6C6D1}"/>
               </a:ext>
             </a:extLst>
           </p:cNvPr>
@@ -15017,56 +15218,25 @@
             <a:spLocks noGrp="1"/>
           </p:cNvSpPr>
           <p:nvPr>
-            <p:ph idx="1"/>
-          </p:nvPr>
-        </p:nvSpPr>
-        <p:spPr/>
-        <p:txBody>
-          <a:bodyPr/>
-          <a:lstStyle/>
-          <a:p>
-            <a:pPr lvl="0" indent="0" marL="0">
-              <a:buNone/>
-            </a:pPr>
-            <a:r>
-              <a:rPr b="1"/>
-              <a:t>What is your level of familiarity with citing and referencing scientific papers?</a:t>
-            </a:r>
-          </a:p>
-          <a:p>
-            <a:pPr lvl="0" indent="-457200" marL="457200">
-              <a:buAutoNum type="alphaLcPeriod"/>
-            </a:pPr>
-            <a:r>
-              <a:rPr/>
-              <a:t>I have never heard of it before.</a:t>
-            </a:r>
-          </a:p>
-          <a:p>
-            <a:pPr lvl="0" indent="-457200" marL="457200">
-              <a:buAutoNum type="alphaLcPeriod"/>
-            </a:pPr>
-            <a:r>
-              <a:rPr/>
-              <a:t>I have heard of it but have never worked with it.</a:t>
-            </a:r>
-          </a:p>
-          <a:p>
-            <a:pPr lvl="0" indent="-457200" marL="457200">
-              <a:buAutoNum type="alphaLcPeriod"/>
-            </a:pPr>
-            <a:r>
-              <a:rPr/>
-              <a:t>I have basic understanding and experience with it.</a:t>
-            </a:r>
-          </a:p>
-          <a:p>
-            <a:pPr lvl="0" indent="-457200" marL="457200">
-              <a:buAutoNum type="alphaLcPeriod"/>
-            </a:pPr>
-            <a:r>
-              <a:rPr/>
-              <a:t>I am very familiar and have worked with it extensively.</a:t>
+            <p:ph type="title"/>
+          </p:nvPr>
+        </p:nvSpPr>
+        <p:spPr>
+          <a:xfrm>
+            <a:off x="2295524" y="432532"/>
+            <a:ext cx="9450077" cy="825501"/>
+          </a:xfrm>
+        </p:spPr>
+        <p:txBody>
+          <a:bodyPr/>
+          <a:lstStyle/>
+          <a:p>
+            <a:pPr lvl="0" indent="0" marL="0">
+              <a:buNone/>
+            </a:pPr>
+            <a:r>
+              <a:rPr/>
+              <a:t>Before we start: Survey time!</a:t>
             </a:r>
           </a:p>
         </p:txBody>
@@ -15119,15 +15289,7 @@
             </a:pPr>
             <a:r>
               <a:rPr b="1"/>
-              <a:t>How confident do you feel with the Zotero workflow of collection, organisation, and citing?</a:t>
-            </a:r>
-            <a:r>
-              <a:rPr/>
-              <a:t> </a:t>
-            </a:r>
-            <a:r>
-              <a:rPr i="1"/>
-              <a:t>(1 = Not confident at all, 5 = Very confident)</a:t>
+              <a:t>What is your level of familiarity with citing and referencing scientific papers?</a:t>
             </a:r>
           </a:p>
           <a:p>
@@ -15136,7 +15298,7 @@
             </a:pPr>
             <a:r>
               <a:rPr/>
-              <a:t>1</a:t>
+              <a:t>I have never heard of it before.</a:t>
             </a:r>
           </a:p>
           <a:p>
@@ -15145,7 +15307,7 @@
             </a:pPr>
             <a:r>
               <a:rPr/>
-              <a:t>2</a:t>
+              <a:t>I have heard of it but have never worked with it.</a:t>
             </a:r>
           </a:p>
           <a:p>
@@ -15154,7 +15316,7 @@
             </a:pPr>
             <a:r>
               <a:rPr/>
-              <a:t>3</a:t>
+              <a:t>I have basic understanding and experience with it.</a:t>
             </a:r>
           </a:p>
           <a:p>
@@ -15163,16 +15325,7 @@
             </a:pPr>
             <a:r>
               <a:rPr/>
-              <a:t>4</a:t>
-            </a:r>
-          </a:p>
-          <a:p>
-            <a:pPr lvl="0" indent="-457200" marL="457200">
-              <a:buAutoNum type="alphaLcPeriod"/>
-            </a:pPr>
-            <a:r>
-              <a:rPr/>
-              <a:t>5</a:t>
+              <a:t>I am very familiar and have worked with it extensively.</a:t>
             </a:r>
           </a:p>
         </p:txBody>

--- a/index.pptx
+++ b/index.pptx
@@ -235,9 +235,9 @@
             </a:lvl1pPr>
           </a:lstStyle>
           <a:p>
-            <a:fld id="{0F9C1CCF-B725-44A7-AA57-5E433BD85C9F}" type="datetimeFigureOut">
+            <a:fld id="{8B57B064-B752-FD47-97A2-4C24AE6B024A}" type="datetimeFigureOut">
               <a:rPr lang="en-US" smtClean="0"/>
-              <a:t>1/2/22</a:t>
+              <a:t>9/22/26</a:t>
             </a:fld>
             <a:endParaRPr lang="en-US"/>
           </a:p>
@@ -393,7 +393,7 @@
             </a:lvl1pPr>
           </a:lstStyle>
           <a:p>
-            <a:fld id="{18BDFEC3-8487-43E8-A154-7C12CBC1FFF2}" type="slidenum">
+            <a:fld id="{1335DC12-1F25-3F4F-8976-F7B9B059DA07}" type="slidenum">
               <a:rPr lang="en-US" smtClean="0"/>
               <a:t>‹#›</a:t>
             </a:fld>
@@ -404,7 +404,7 @@
     </p:spTree>
     <p:extLst>
       <p:ext uri="{BB962C8B-B14F-4D97-AF65-F5344CB8AC3E}">
-        <p14:creationId xmlns:p14="http://schemas.microsoft.com/office/powerpoint/2010/main" val="3782709779"/>
+        <p14:creationId xmlns:p14="http://schemas.microsoft.com/office/powerpoint/2010/main" val="2309847607"/>
       </p:ext>
     </p:extLst>
   </p:cSld>
@@ -577,7 +577,7 @@
           <a:bodyPr/>
           <a:lstStyle/>
           <a:p>
-            <a:fld id="{18BDFEC3-8487-43E8-A154-7C12CBC1FFF2}" type="slidenum">
+            <a:fld id="{1335DC12-1F25-3F4F-8976-F7B9B059DA07}" type="slidenum">
               <a:rPr lang="en-US"/>
               <a:t>3</a:t>
             </a:fld>
@@ -704,7 +704,7 @@
           <a:bodyPr/>
           <a:lstStyle/>
           <a:p>
-            <a:fld id="{18BDFEC3-8487-43E8-A154-7C12CBC1FFF2}" type="slidenum">
+            <a:fld id="{1335DC12-1F25-3F4F-8976-F7B9B059DA07}" type="slidenum">
               <a:rPr lang="en-US"/>
               <a:t>15</a:t>
             </a:fld>
@@ -845,7 +845,7 @@
           <a:bodyPr/>
           <a:lstStyle/>
           <a:p>
-            <a:fld id="{18BDFEC3-8487-43E8-A154-7C12CBC1FFF2}" type="slidenum">
+            <a:fld id="{1335DC12-1F25-3F4F-8976-F7B9B059DA07}" type="slidenum">
               <a:rPr lang="en-US"/>
               <a:t>16</a:t>
             </a:fld>
@@ -992,7 +992,7 @@
           <a:bodyPr/>
           <a:lstStyle/>
           <a:p>
-            <a:fld id="{18BDFEC3-8487-43E8-A154-7C12CBC1FFF2}" type="slidenum">
+            <a:fld id="{1335DC12-1F25-3F4F-8976-F7B9B059DA07}" type="slidenum">
               <a:rPr lang="en-US"/>
               <a:t>17</a:t>
             </a:fld>
@@ -1129,7 +1129,7 @@
           <a:bodyPr/>
           <a:lstStyle/>
           <a:p>
-            <a:fld id="{18BDFEC3-8487-43E8-A154-7C12CBC1FFF2}" type="slidenum">
+            <a:fld id="{1335DC12-1F25-3F4F-8976-F7B9B059DA07}" type="slidenum">
               <a:rPr lang="en-US"/>
               <a:t>18</a:t>
             </a:fld>
@@ -1229,7 +1229,7 @@
           <a:bodyPr/>
           <a:lstStyle/>
           <a:p>
-            <a:fld id="{18BDFEC3-8487-43E8-A154-7C12CBC1FFF2}" type="slidenum">
+            <a:fld id="{1335DC12-1F25-3F4F-8976-F7B9B059DA07}" type="slidenum">
               <a:rPr lang="en-US"/>
               <a:t>19</a:t>
             </a:fld>
@@ -1405,7 +1405,7 @@
           <a:bodyPr/>
           <a:lstStyle/>
           <a:p>
-            <a:fld id="{18BDFEC3-8487-43E8-A154-7C12CBC1FFF2}" type="slidenum">
+            <a:fld id="{1335DC12-1F25-3F4F-8976-F7B9B059DA07}" type="slidenum">
               <a:rPr lang="en-US"/>
               <a:t>20</a:t>
             </a:fld>
@@ -1515,7 +1515,7 @@
           <a:bodyPr/>
           <a:lstStyle/>
           <a:p>
-            <a:fld id="{18BDFEC3-8487-43E8-A154-7C12CBC1FFF2}" type="slidenum">
+            <a:fld id="{1335DC12-1F25-3F4F-8976-F7B9B059DA07}" type="slidenum">
               <a:rPr lang="en-US"/>
               <a:t>21</a:t>
             </a:fld>
@@ -1619,7 +1619,7 @@
           <a:bodyPr/>
           <a:lstStyle/>
           <a:p>
-            <a:fld id="{18BDFEC3-8487-43E8-A154-7C12CBC1FFF2}" type="slidenum">
+            <a:fld id="{1335DC12-1F25-3F4F-8976-F7B9B059DA07}" type="slidenum">
               <a:rPr lang="en-US"/>
               <a:t>22</a:t>
             </a:fld>
@@ -1791,7 +1791,7 @@
           <a:bodyPr/>
           <a:lstStyle/>
           <a:p>
-            <a:fld id="{18BDFEC3-8487-43E8-A154-7C12CBC1FFF2}" type="slidenum">
+            <a:fld id="{1335DC12-1F25-3F4F-8976-F7B9B059DA07}" type="slidenum">
               <a:rPr lang="en-US"/>
               <a:t>23</a:t>
             </a:fld>
@@ -1973,7 +1973,7 @@
           <a:bodyPr/>
           <a:lstStyle/>
           <a:p>
-            <a:fld id="{18BDFEC3-8487-43E8-A154-7C12CBC1FFF2}" type="slidenum">
+            <a:fld id="{1335DC12-1F25-3F4F-8976-F7B9B059DA07}" type="slidenum">
               <a:rPr lang="en-US"/>
               <a:t>24</a:t>
             </a:fld>
@@ -2077,7 +2077,7 @@
           <a:bodyPr/>
           <a:lstStyle/>
           <a:p>
-            <a:fld id="{18BDFEC3-8487-43E8-A154-7C12CBC1FFF2}" type="slidenum">
+            <a:fld id="{1335DC12-1F25-3F4F-8976-F7B9B059DA07}" type="slidenum">
               <a:rPr lang="en-US"/>
               <a:t>5</a:t>
             </a:fld>
@@ -2181,7 +2181,7 @@
           <a:bodyPr/>
           <a:lstStyle/>
           <a:p>
-            <a:fld id="{18BDFEC3-8487-43E8-A154-7C12CBC1FFF2}" type="slidenum">
+            <a:fld id="{1335DC12-1F25-3F4F-8976-F7B9B059DA07}" type="slidenum">
               <a:rPr lang="en-US"/>
               <a:t>25</a:t>
             </a:fld>
@@ -2305,7 +2305,7 @@
           <a:bodyPr/>
           <a:lstStyle/>
           <a:p>
-            <a:fld id="{18BDFEC3-8487-43E8-A154-7C12CBC1FFF2}" type="slidenum">
+            <a:fld id="{1335DC12-1F25-3F4F-8976-F7B9B059DA07}" type="slidenum">
               <a:rPr lang="en-US"/>
               <a:t>27</a:t>
             </a:fld>
@@ -2441,7 +2441,7 @@
           <a:bodyPr/>
           <a:lstStyle/>
           <a:p>
-            <a:fld id="{18BDFEC3-8487-43E8-A154-7C12CBC1FFF2}" type="slidenum">
+            <a:fld id="{1335DC12-1F25-3F4F-8976-F7B9B059DA07}" type="slidenum">
               <a:rPr lang="en-US"/>
               <a:t>28</a:t>
             </a:fld>
@@ -2545,7 +2545,7 @@
           <a:bodyPr/>
           <a:lstStyle/>
           <a:p>
-            <a:fld id="{18BDFEC3-8487-43E8-A154-7C12CBC1FFF2}" type="slidenum">
+            <a:fld id="{1335DC12-1F25-3F4F-8976-F7B9B059DA07}" type="slidenum">
               <a:rPr lang="en-US"/>
               <a:t>29</a:t>
             </a:fld>
@@ -2691,7 +2691,7 @@
           <a:bodyPr/>
           <a:lstStyle/>
           <a:p>
-            <a:fld id="{18BDFEC3-8487-43E8-A154-7C12CBC1FFF2}" type="slidenum">
+            <a:fld id="{1335DC12-1F25-3F4F-8976-F7B9B059DA07}" type="slidenum">
               <a:rPr lang="en-US"/>
               <a:t>30</a:t>
             </a:fld>
@@ -2920,7 +2920,7 @@
           <a:bodyPr/>
           <a:lstStyle/>
           <a:p>
-            <a:fld id="{18BDFEC3-8487-43E8-A154-7C12CBC1FFF2}" type="slidenum">
+            <a:fld id="{1335DC12-1F25-3F4F-8976-F7B9B059DA07}" type="slidenum">
               <a:rPr lang="en-US"/>
               <a:t>31</a:t>
             </a:fld>
@@ -3043,7 +3043,7 @@
           <a:bodyPr/>
           <a:lstStyle/>
           <a:p>
-            <a:fld id="{18BDFEC3-8487-43E8-A154-7C12CBC1FFF2}" type="slidenum">
+            <a:fld id="{1335DC12-1F25-3F4F-8976-F7B9B059DA07}" type="slidenum">
               <a:rPr lang="en-US"/>
               <a:t>32</a:t>
             </a:fld>
@@ -3161,7 +3161,7 @@
           <a:bodyPr/>
           <a:lstStyle/>
           <a:p>
-            <a:fld id="{18BDFEC3-8487-43E8-A154-7C12CBC1FFF2}" type="slidenum">
+            <a:fld id="{1335DC12-1F25-3F4F-8976-F7B9B059DA07}" type="slidenum">
               <a:rPr lang="en-US"/>
               <a:t>33</a:t>
             </a:fld>
@@ -3255,7 +3255,7 @@
           <a:bodyPr/>
           <a:lstStyle/>
           <a:p>
-            <a:fld id="{18BDFEC3-8487-43E8-A154-7C12CBC1FFF2}" type="slidenum">
+            <a:fld id="{1335DC12-1F25-3F4F-8976-F7B9B059DA07}" type="slidenum">
               <a:rPr lang="en-US"/>
               <a:t>34</a:t>
             </a:fld>
@@ -3379,7 +3379,7 @@
           <a:bodyPr/>
           <a:lstStyle/>
           <a:p>
-            <a:fld id="{18BDFEC3-8487-43E8-A154-7C12CBC1FFF2}" type="slidenum">
+            <a:fld id="{1335DC12-1F25-3F4F-8976-F7B9B059DA07}" type="slidenum">
               <a:rPr lang="en-US"/>
               <a:t>37</a:t>
             </a:fld>
@@ -3483,7 +3483,7 @@
           <a:bodyPr/>
           <a:lstStyle/>
           <a:p>
-            <a:fld id="{18BDFEC3-8487-43E8-A154-7C12CBC1FFF2}" type="slidenum">
+            <a:fld id="{1335DC12-1F25-3F4F-8976-F7B9B059DA07}" type="slidenum">
               <a:rPr lang="en-US"/>
               <a:t>6</a:t>
             </a:fld>
@@ -3605,7 +3605,7 @@
           <a:bodyPr/>
           <a:lstStyle/>
           <a:p>
-            <a:fld id="{18BDFEC3-8487-43E8-A154-7C12CBC1FFF2}" type="slidenum">
+            <a:fld id="{1335DC12-1F25-3F4F-8976-F7B9B059DA07}" type="slidenum">
               <a:rPr lang="en-US"/>
               <a:t>40</a:t>
             </a:fld>
@@ -3761,7 +3761,7 @@
           <a:bodyPr/>
           <a:lstStyle/>
           <a:p>
-            <a:fld id="{18BDFEC3-8487-43E8-A154-7C12CBC1FFF2}" type="slidenum">
+            <a:fld id="{1335DC12-1F25-3F4F-8976-F7B9B059DA07}" type="slidenum">
               <a:rPr lang="en-US"/>
               <a:t>7</a:t>
             </a:fld>
@@ -3893,7 +3893,7 @@
           <a:bodyPr/>
           <a:lstStyle/>
           <a:p>
-            <a:fld id="{18BDFEC3-8487-43E8-A154-7C12CBC1FFF2}" type="slidenum">
+            <a:fld id="{1335DC12-1F25-3F4F-8976-F7B9B059DA07}" type="slidenum">
               <a:rPr lang="en-US"/>
               <a:t>8</a:t>
             </a:fld>
@@ -3997,7 +3997,7 @@
           <a:bodyPr/>
           <a:lstStyle/>
           <a:p>
-            <a:fld id="{18BDFEC3-8487-43E8-A154-7C12CBC1FFF2}" type="slidenum">
+            <a:fld id="{1335DC12-1F25-3F4F-8976-F7B9B059DA07}" type="slidenum">
               <a:rPr lang="en-US"/>
               <a:t>11</a:t>
             </a:fld>
@@ -4129,7 +4129,7 @@
           <a:bodyPr/>
           <a:lstStyle/>
           <a:p>
-            <a:fld id="{18BDFEC3-8487-43E8-A154-7C12CBC1FFF2}" type="slidenum">
+            <a:fld id="{1335DC12-1F25-3F4F-8976-F7B9B059DA07}" type="slidenum">
               <a:rPr lang="en-US"/>
               <a:t>12</a:t>
             </a:fld>
@@ -4251,7 +4251,7 @@
           <a:bodyPr/>
           <a:lstStyle/>
           <a:p>
-            <a:fld id="{18BDFEC3-8487-43E8-A154-7C12CBC1FFF2}" type="slidenum">
+            <a:fld id="{1335DC12-1F25-3F4F-8976-F7B9B059DA07}" type="slidenum">
               <a:rPr lang="en-US"/>
               <a:t>13</a:t>
             </a:fld>
@@ -4374,7 +4374,7 @@
           <a:bodyPr/>
           <a:lstStyle/>
           <a:p>
-            <a:fld id="{18BDFEC3-8487-43E8-A154-7C12CBC1FFF2}" type="slidenum">
+            <a:fld id="{1335DC12-1F25-3F4F-8976-F7B9B059DA07}" type="slidenum">
               <a:rPr lang="en-US"/>
               <a:t>14</a:t>
             </a:fld>
@@ -4685,10 +4685,9 @@
             </a:lvl1pPr>
           </a:lstStyle>
           <a:p>
-            <a:fld id="{C0D80282-B9AD-46AC-8F7B-174883973D43}" type="datetimeFigureOut">
-              <a:rPr lang="de-DE" smtClean="0"/>
-              <a:pPr/>
-              <a:t>07.07.2026</a:t>
+            <a:fld id="{F4E803E4-C7BA-F14D-AC42-A22C6EB66783}" type="datetime1">
+              <a:rPr lang="en-US" smtClean="0"/>
+              <a:t>9/22/26</a:t>
             </a:fld>
             <a:endParaRPr lang="de-DE"/>
           </a:p>
@@ -4784,6 +4783,22 @@
   <p:clrMapOvr>
     <a:masterClrMapping/>
   </p:clrMapOvr>
+  <p:extLst>
+    <p:ext uri="{DCECCB84-F9BA-43D5-87BE-67443E8EF086}">
+      <p15:sldGuideLst xmlns:p15="http://schemas.microsoft.com/office/powerpoint/2012/main">
+        <p15:guide id="1" orient="horz" pos="2160" userDrawn="1">
+          <p15:clr>
+            <a:srgbClr val="FBAE40"/>
+          </p15:clr>
+        </p15:guide>
+        <p15:guide id="2" pos="3840" userDrawn="1">
+          <p15:clr>
+            <a:srgbClr val="FBAE40"/>
+          </p15:clr>
+        </p15:guide>
+      </p15:sldGuideLst>
+    </p:ext>
+  </p:extLst>
 </p:sldLayout>
 </file>
 
@@ -4912,9 +4927,9 @@
           <a:bodyPr/>
           <a:lstStyle/>
           <a:p>
-            <a:fld id="{C0D80282-B9AD-46AC-8F7B-174883973D43}" type="datetimeFigureOut">
-              <a:rPr lang="de-DE" smtClean="0"/>
-              <a:t>07.07.2026</a:t>
+            <a:fld id="{C1F8A8BE-9F5A-9242-B888-1B340635B5B3}" type="datetime1">
+              <a:rPr lang="en-US" smtClean="0"/>
+              <a:t>9/22/26</a:t>
             </a:fld>
             <a:endParaRPr lang="de-DE"/>
           </a:p>
@@ -5122,9 +5137,9 @@
           <a:bodyPr/>
           <a:lstStyle/>
           <a:p>
-            <a:fld id="{C0D80282-B9AD-46AC-8F7B-174883973D43}" type="datetimeFigureOut">
-              <a:rPr lang="de-DE" smtClean="0"/>
-              <a:t>07.07.2026</a:t>
+            <a:fld id="{21AE4B26-B4AB-2342-9FD2-B54D98EB2689}" type="datetime1">
+              <a:rPr lang="en-US" smtClean="0"/>
+              <a:t>9/22/26</a:t>
             </a:fld>
             <a:endParaRPr lang="de-DE"/>
           </a:p>
@@ -5353,9 +5368,9 @@
           <a:bodyPr/>
           <a:lstStyle/>
           <a:p>
-            <a:fld id="{C0D80282-B9AD-46AC-8F7B-174883973D43}" type="datetimeFigureOut">
-              <a:rPr lang="de-DE" smtClean="0"/>
-              <a:t>07.07.2026</a:t>
+            <a:fld id="{E85A3416-A813-F447-89B3-37ECFBBE4EFA}" type="datetime1">
+              <a:rPr lang="en-US" smtClean="0"/>
+              <a:t>9/22/26</a:t>
             </a:fld>
             <a:endParaRPr lang="de-DE"/>
           </a:p>
@@ -5669,9 +5684,9 @@
           <a:bodyPr/>
           <a:lstStyle/>
           <a:p>
-            <a:fld id="{C0D80282-B9AD-46AC-8F7B-174883973D43}" type="datetimeFigureOut">
-              <a:rPr lang="de-DE" smtClean="0"/>
-              <a:t>07.07.2026</a:t>
+            <a:fld id="{6BFA26B1-2218-D643-9983-927612BCF827}" type="datetime1">
+              <a:rPr lang="en-US" smtClean="0"/>
+              <a:t>9/22/26</a:t>
             </a:fld>
             <a:endParaRPr lang="de-DE"/>
           </a:p>
@@ -6000,9 +6015,9 @@
           <a:bodyPr/>
           <a:lstStyle/>
           <a:p>
-            <a:fld id="{C0D80282-B9AD-46AC-8F7B-174883973D43}" type="datetimeFigureOut">
-              <a:rPr lang="de-DE" smtClean="0"/>
-              <a:t>07.07.2026</a:t>
+            <a:fld id="{C1588426-C358-B343-A366-E3E7336823B1}" type="datetime1">
+              <a:rPr lang="en-US" smtClean="0"/>
+              <a:t>9/22/26</a:t>
             </a:fld>
             <a:endParaRPr lang="de-DE"/>
           </a:p>
@@ -6335,9 +6350,9 @@
           <a:bodyPr/>
           <a:lstStyle/>
           <a:p>
-            <a:fld id="{C0D80282-B9AD-46AC-8F7B-174883973D43}" type="datetimeFigureOut">
-              <a:rPr lang="de-DE" smtClean="0"/>
-              <a:t>07.07.2026</a:t>
+            <a:fld id="{7D1F46F6-2FB8-E348-BEB7-ECE7E886726D}" type="datetime1">
+              <a:rPr lang="en-US" smtClean="0"/>
+              <a:t>9/22/26</a:t>
             </a:fld>
             <a:endParaRPr lang="de-DE"/>
           </a:p>
@@ -6874,9 +6889,9 @@
           <a:bodyPr/>
           <a:lstStyle/>
           <a:p>
-            <a:fld id="{C0D80282-B9AD-46AC-8F7B-174883973D43}" type="datetimeFigureOut">
-              <a:rPr lang="de-DE" smtClean="0"/>
-              <a:t>07.07.2026</a:t>
+            <a:fld id="{2BED87DE-3125-1D4E-99ED-F4C0CC774B19}" type="datetime1">
+              <a:rPr lang="en-US" smtClean="0"/>
+              <a:t>9/22/26</a:t>
             </a:fld>
             <a:endParaRPr lang="de-DE"/>
           </a:p>
@@ -7027,9 +7042,9 @@
           <a:bodyPr/>
           <a:lstStyle/>
           <a:p>
-            <a:fld id="{C0D80282-B9AD-46AC-8F7B-174883973D43}" type="datetimeFigureOut">
-              <a:rPr lang="de-DE" smtClean="0"/>
-              <a:t>07.07.2026</a:t>
+            <a:fld id="{43C3618C-C306-F848-BE7E-873814464F34}" type="datetime1">
+              <a:rPr lang="en-US" smtClean="0"/>
+              <a:t>9/22/26</a:t>
             </a:fld>
             <a:endParaRPr lang="de-DE"/>
           </a:p>
@@ -7206,9 +7221,9 @@
           <a:bodyPr/>
           <a:lstStyle/>
           <a:p>
-            <a:fld id="{C0D80282-B9AD-46AC-8F7B-174883973D43}" type="datetimeFigureOut">
-              <a:rPr lang="de-DE" smtClean="0"/>
-              <a:t>07.07.2026</a:t>
+            <a:fld id="{CBECF02C-3C7A-A047-B181-FDDE9ECD3312}" type="datetime1">
+              <a:rPr lang="en-US" smtClean="0"/>
+              <a:t>9/22/26</a:t>
             </a:fld>
             <a:endParaRPr lang="de-DE"/>
           </a:p>
@@ -7495,9 +7510,9 @@
           <a:bodyPr/>
           <a:lstStyle/>
           <a:p>
-            <a:fld id="{C0D80282-B9AD-46AC-8F7B-174883973D43}" type="datetimeFigureOut">
-              <a:rPr lang="de-DE" smtClean="0"/>
-              <a:t>07.07.2026</a:t>
+            <a:fld id="{C1CB0BDE-9158-9842-9649-F7D64D576DD4}" type="datetime1">
+              <a:rPr lang="en-US" smtClean="0"/>
+              <a:t>9/22/26</a:t>
             </a:fld>
             <a:endParaRPr lang="de-DE"/>
           </a:p>
@@ -7738,9 +7753,9 @@
             </a:lvl1pPr>
           </a:lstStyle>
           <a:p>
-            <a:fld id="{C0D80282-B9AD-46AC-8F7B-174883973D43}" type="datetimeFigureOut">
-              <a:rPr lang="de-DE" smtClean="0"/>
-              <a:t>07.07.2026</a:t>
+            <a:fld id="{5F4432E8-C144-0141-ADD6-F0C21840F670}" type="datetime1">
+              <a:rPr lang="en-US" smtClean="0"/>
+              <a:t>9/22/26</a:t>
             </a:fld>
             <a:endParaRPr lang="de-DE"/>
           </a:p>
@@ -7857,6 +7872,7 @@
     <p:sldLayoutId id="2147483658" r:id="rId10"/>
     <p:sldLayoutId id="2147483659" r:id="rId11"/>
   </p:sldLayoutIdLst>
+  <p:hf dt="0" ftr="0" hdr="0"/>
   <p:txStyles>
     <p:titleStyle>
       <a:lvl1pPr algn="l" defTabSz="914400" eaLnBrk="1" hangingPunct="1" latinLnBrk="0" rtl="0">
@@ -8260,8 +8276,51 @@
             </a:pPr>
             <a:r>
               <a:rPr/>
-              <a:t>21/09/2026</a:t>
-            </a:r>
+              <a:t>22/09/2026</a:t>
+            </a:r>
+          </a:p>
+        </p:txBody>
+      </p:sp>
+      <p:sp>
+        <p:nvSpPr>
+          <p:cNvPr id="6" name="Slide Number Placeholder 5">
+            <a:extLst>
+              <a:ext uri="{FF2B5EF4-FFF2-40B4-BE49-F238E27FC236}">
+                <a16:creationId xmlns:a16="http://schemas.microsoft.com/office/drawing/2014/main" id="{A5E5FB60-FFB4-682C-82D2-0D1E175BDC09}"/>
+              </a:ext>
+            </a:extLst>
+          </p:cNvPr>
+          <p:cNvSpPr>
+            <a:spLocks noGrp="1"/>
+          </p:cNvSpPr>
+          <p:nvPr>
+            <p:ph idx="12" sz="quarter" type="sldNum"/>
+          </p:nvPr>
+        </p:nvSpPr>
+        <p:spPr>
+          <a:xfrm>
+            <a:off x="8610600" y="6356350"/>
+            <a:ext cx="3135000" cy="365125"/>
+          </a:xfrm>
+        </p:spPr>
+        <p:txBody>
+          <a:bodyPr/>
+          <a:lstStyle>
+            <a:lvl1pPr>
+              <a:defRPr>
+                <a:solidFill>
+                  <a:schemeClr val="bg1"/>
+                </a:solidFill>
+              </a:defRPr>
+            </a:lvl1pPr>
+          </a:lstStyle>
+          <a:p>
+            <a:fld id="{7FEFBAB6-26D0-44D8-BD53-612461CE1ACC}" type="slidenum">
+              <a:rPr lang="de-DE" smtClean="0"/>
+              <a:pPr/>
+              <a:t>‹#›</a:t>
+            </a:fld>
+            <a:endParaRPr lang="de-DE"/>
           </a:p>
         </p:txBody>
       </p:sp>
@@ -8371,6 +8430,40 @@
           </a:p>
         </p:txBody>
       </p:sp>
+      <p:sp>
+        <p:nvSpPr>
+          <p:cNvPr id="6" name="Slide Number Placeholder 5">
+            <a:extLst>
+              <a:ext uri="{FF2B5EF4-FFF2-40B4-BE49-F238E27FC236}">
+                <a16:creationId xmlns:a16="http://schemas.microsoft.com/office/drawing/2014/main" id="{5F33F24B-1A9E-2EAF-F2AB-89426454DEE9}"/>
+              </a:ext>
+            </a:extLst>
+          </p:cNvPr>
+          <p:cNvSpPr>
+            <a:spLocks noGrp="1"/>
+          </p:cNvSpPr>
+          <p:nvPr>
+            <p:ph idx="12" sz="quarter" type="sldNum"/>
+          </p:nvPr>
+        </p:nvSpPr>
+        <p:spPr>
+          <a:xfrm>
+            <a:off x="8610599" y="6356350"/>
+            <a:ext cx="3135001" cy="365125"/>
+          </a:xfrm>
+        </p:spPr>
+        <p:txBody>
+          <a:bodyPr/>
+          <a:lstStyle/>
+          <a:p>
+            <a:fld id="{7FEFBAB6-26D0-44D8-BD53-612461CE1ACC}" type="slidenum">
+              <a:rPr lang="de-DE" smtClean="0"/>
+              <a:t>‹#›</a:t>
+            </a:fld>
+            <a:endParaRPr lang="de-DE"/>
+          </a:p>
+        </p:txBody>
+      </p:sp>
     </p:spTree>
   </p:cSld>
 </p:sld>
@@ -8460,6 +8553,40 @@
           </a:p>
         </p:txBody>
       </p:sp>
+      <p:sp>
+        <p:nvSpPr>
+          <p:cNvPr id="6" name="Slide Number Placeholder 5">
+            <a:extLst>
+              <a:ext uri="{FF2B5EF4-FFF2-40B4-BE49-F238E27FC236}">
+                <a16:creationId xmlns:a16="http://schemas.microsoft.com/office/drawing/2014/main" id="{5F33F24B-1A9E-2EAF-F2AB-89426454DEE9}"/>
+              </a:ext>
+            </a:extLst>
+          </p:cNvPr>
+          <p:cNvSpPr>
+            <a:spLocks noGrp="1"/>
+          </p:cNvSpPr>
+          <p:nvPr>
+            <p:ph idx="12" sz="quarter" type="sldNum"/>
+          </p:nvPr>
+        </p:nvSpPr>
+        <p:spPr>
+          <a:xfrm>
+            <a:off x="8610599" y="6356350"/>
+            <a:ext cx="3135001" cy="365125"/>
+          </a:xfrm>
+        </p:spPr>
+        <p:txBody>
+          <a:bodyPr/>
+          <a:lstStyle/>
+          <a:p>
+            <a:fld id="{7FEFBAB6-26D0-44D8-BD53-612461CE1ACC}" type="slidenum">
+              <a:rPr lang="de-DE" smtClean="0"/>
+              <a:t>‹#›</a:t>
+            </a:fld>
+            <a:endParaRPr lang="de-DE"/>
+          </a:p>
+        </p:txBody>
+      </p:sp>
     </p:spTree>
   </p:cSld>
 </p:sld>
@@ -8615,6 +8742,40 @@
           </a:p>
         </p:txBody>
       </p:sp>
+      <p:sp>
+        <p:nvSpPr>
+          <p:cNvPr id="6" name="Slide Number Placeholder 5">
+            <a:extLst>
+              <a:ext uri="{FF2B5EF4-FFF2-40B4-BE49-F238E27FC236}">
+                <a16:creationId xmlns:a16="http://schemas.microsoft.com/office/drawing/2014/main" id="{5F33F24B-1A9E-2EAF-F2AB-89426454DEE9}"/>
+              </a:ext>
+            </a:extLst>
+          </p:cNvPr>
+          <p:cNvSpPr>
+            <a:spLocks noGrp="1"/>
+          </p:cNvSpPr>
+          <p:nvPr>
+            <p:ph idx="12" sz="quarter" type="sldNum"/>
+          </p:nvPr>
+        </p:nvSpPr>
+        <p:spPr>
+          <a:xfrm>
+            <a:off x="8610599" y="6356350"/>
+            <a:ext cx="3135001" cy="365125"/>
+          </a:xfrm>
+        </p:spPr>
+        <p:txBody>
+          <a:bodyPr/>
+          <a:lstStyle/>
+          <a:p>
+            <a:fld id="{7FEFBAB6-26D0-44D8-BD53-612461CE1ACC}" type="slidenum">
+              <a:rPr lang="de-DE" smtClean="0"/>
+              <a:t>‹#›</a:t>
+            </a:fld>
+            <a:endParaRPr lang="de-DE"/>
+          </a:p>
+        </p:txBody>
+      </p:sp>
     </p:spTree>
   </p:cSld>
 </p:sld>
@@ -8747,6 +8908,40 @@
               <a:rPr/>
               <a:t> a referencing workflow in MS Word</a:t>
             </a:r>
+          </a:p>
+        </p:txBody>
+      </p:sp>
+      <p:sp>
+        <p:nvSpPr>
+          <p:cNvPr id="6" name="Slide Number Placeholder 5">
+            <a:extLst>
+              <a:ext uri="{FF2B5EF4-FFF2-40B4-BE49-F238E27FC236}">
+                <a16:creationId xmlns:a16="http://schemas.microsoft.com/office/drawing/2014/main" id="{5F33F24B-1A9E-2EAF-F2AB-89426454DEE9}"/>
+              </a:ext>
+            </a:extLst>
+          </p:cNvPr>
+          <p:cNvSpPr>
+            <a:spLocks noGrp="1"/>
+          </p:cNvSpPr>
+          <p:nvPr>
+            <p:ph idx="12" sz="quarter" type="sldNum"/>
+          </p:nvPr>
+        </p:nvSpPr>
+        <p:spPr>
+          <a:xfrm>
+            <a:off x="8610599" y="6356350"/>
+            <a:ext cx="3135001" cy="365125"/>
+          </a:xfrm>
+        </p:spPr>
+        <p:txBody>
+          <a:bodyPr/>
+          <a:lstStyle/>
+          <a:p>
+            <a:fld id="{7FEFBAB6-26D0-44D8-BD53-612461CE1ACC}" type="slidenum">
+              <a:rPr lang="de-DE" smtClean="0"/>
+              <a:t>‹#›</a:t>
+            </a:fld>
+            <a:endParaRPr lang="de-DE"/>
           </a:p>
         </p:txBody>
       </p:sp>
@@ -9239,6 +9434,40 @@
           </a:p>
         </p:txBody>
       </p:sp>
+      <p:sp>
+        <p:nvSpPr>
+          <p:cNvPr id="7" name="Slide Number Placeholder 6">
+            <a:extLst>
+              <a:ext uri="{FF2B5EF4-FFF2-40B4-BE49-F238E27FC236}">
+                <a16:creationId xmlns:a16="http://schemas.microsoft.com/office/drawing/2014/main" id="{7EC0C6E5-A864-8D29-B45D-21E23026496C}"/>
+              </a:ext>
+            </a:extLst>
+          </p:cNvPr>
+          <p:cNvSpPr>
+            <a:spLocks noGrp="1"/>
+          </p:cNvSpPr>
+          <p:nvPr>
+            <p:ph idx="12" sz="quarter" type="sldNum"/>
+          </p:nvPr>
+        </p:nvSpPr>
+        <p:spPr>
+          <a:xfrm>
+            <a:off x="8610600" y="6356350"/>
+            <a:ext cx="3135000" cy="365125"/>
+          </a:xfrm>
+        </p:spPr>
+        <p:txBody>
+          <a:bodyPr/>
+          <a:lstStyle/>
+          <a:p>
+            <a:fld id="{7FEFBAB6-26D0-44D8-BD53-612461CE1ACC}" type="slidenum">
+              <a:rPr lang="de-DE" smtClean="0"/>
+              <a:t>‹#›</a:t>
+            </a:fld>
+            <a:endParaRPr lang="de-DE"/>
+          </a:p>
+        </p:txBody>
+      </p:sp>
     </p:spTree>
   </p:cSld>
 </p:sld>
@@ -9368,6 +9597,40 @@
           </a:ln>
         </p:spPr>
       </p:pic>
+      <p:sp>
+        <p:nvSpPr>
+          <p:cNvPr id="7" name="Slide Number Placeholder 6">
+            <a:extLst>
+              <a:ext uri="{FF2B5EF4-FFF2-40B4-BE49-F238E27FC236}">
+                <a16:creationId xmlns:a16="http://schemas.microsoft.com/office/drawing/2014/main" id="{7EC0C6E5-A864-8D29-B45D-21E23026496C}"/>
+              </a:ext>
+            </a:extLst>
+          </p:cNvPr>
+          <p:cNvSpPr>
+            <a:spLocks noGrp="1"/>
+          </p:cNvSpPr>
+          <p:nvPr>
+            <p:ph idx="12" sz="quarter" type="sldNum"/>
+          </p:nvPr>
+        </p:nvSpPr>
+        <p:spPr>
+          <a:xfrm>
+            <a:off x="8610600" y="6356350"/>
+            <a:ext cx="3135000" cy="365125"/>
+          </a:xfrm>
+        </p:spPr>
+        <p:txBody>
+          <a:bodyPr/>
+          <a:lstStyle/>
+          <a:p>
+            <a:fld id="{7FEFBAB6-26D0-44D8-BD53-612461CE1ACC}" type="slidenum">
+              <a:rPr lang="de-DE" smtClean="0"/>
+              <a:t>‹#›</a:t>
+            </a:fld>
+            <a:endParaRPr lang="de-DE"/>
+          </a:p>
+        </p:txBody>
+      </p:sp>
     </p:spTree>
   </p:cSld>
 </p:sld>
@@ -9509,6 +9772,40 @@
           </a:ln>
         </p:spPr>
       </p:pic>
+      <p:sp>
+        <p:nvSpPr>
+          <p:cNvPr id="7" name="Slide Number Placeholder 6">
+            <a:extLst>
+              <a:ext uri="{FF2B5EF4-FFF2-40B4-BE49-F238E27FC236}">
+                <a16:creationId xmlns:a16="http://schemas.microsoft.com/office/drawing/2014/main" id="{7EC0C6E5-A864-8D29-B45D-21E23026496C}"/>
+              </a:ext>
+            </a:extLst>
+          </p:cNvPr>
+          <p:cNvSpPr>
+            <a:spLocks noGrp="1"/>
+          </p:cNvSpPr>
+          <p:nvPr>
+            <p:ph idx="12" sz="quarter" type="sldNum"/>
+          </p:nvPr>
+        </p:nvSpPr>
+        <p:spPr>
+          <a:xfrm>
+            <a:off x="8610600" y="6356350"/>
+            <a:ext cx="3135000" cy="365125"/>
+          </a:xfrm>
+        </p:spPr>
+        <p:txBody>
+          <a:bodyPr/>
+          <a:lstStyle/>
+          <a:p>
+            <a:fld id="{7FEFBAB6-26D0-44D8-BD53-612461CE1ACC}" type="slidenum">
+              <a:rPr lang="de-DE" smtClean="0"/>
+              <a:t>‹#›</a:t>
+            </a:fld>
+            <a:endParaRPr lang="de-DE"/>
+          </a:p>
+        </p:txBody>
+      </p:sp>
     </p:spTree>
   </p:cSld>
 </p:sld>
@@ -9647,6 +9944,40 @@
               <a:rPr/>
               <a:t> Citations link papers into a big web of knowledge and are often used (not perfectly) to see which work has had a big impact.</a:t>
             </a:r>
+          </a:p>
+        </p:txBody>
+      </p:sp>
+      <p:sp>
+        <p:nvSpPr>
+          <p:cNvPr id="6" name="Slide Number Placeholder 5">
+            <a:extLst>
+              <a:ext uri="{FF2B5EF4-FFF2-40B4-BE49-F238E27FC236}">
+                <a16:creationId xmlns:a16="http://schemas.microsoft.com/office/drawing/2014/main" id="{5F33F24B-1A9E-2EAF-F2AB-89426454DEE9}"/>
+              </a:ext>
+            </a:extLst>
+          </p:cNvPr>
+          <p:cNvSpPr>
+            <a:spLocks noGrp="1"/>
+          </p:cNvSpPr>
+          <p:nvPr>
+            <p:ph idx="12" sz="quarter" type="sldNum"/>
+          </p:nvPr>
+        </p:nvSpPr>
+        <p:spPr>
+          <a:xfrm>
+            <a:off x="8610599" y="6356350"/>
+            <a:ext cx="3135001" cy="365125"/>
+          </a:xfrm>
+        </p:spPr>
+        <p:txBody>
+          <a:bodyPr/>
+          <a:lstStyle/>
+          <a:p>
+            <a:fld id="{7FEFBAB6-26D0-44D8-BD53-612461CE1ACC}" type="slidenum">
+              <a:rPr lang="de-DE" smtClean="0"/>
+              <a:t>‹#›</a:t>
+            </a:fld>
+            <a:endParaRPr lang="de-DE"/>
           </a:p>
         </p:txBody>
       </p:sp>
@@ -10042,6 +10373,40 @@
               <a:rPr i="1"/>
               <a:t>Note: Listed in an alphabetical order.</a:t>
             </a:r>
+          </a:p>
+        </p:txBody>
+      </p:sp>
+      <p:sp>
+        <p:nvSpPr>
+          <p:cNvPr id="6" name="Slide Number Placeholder 5">
+            <a:extLst>
+              <a:ext uri="{FF2B5EF4-FFF2-40B4-BE49-F238E27FC236}">
+                <a16:creationId xmlns:a16="http://schemas.microsoft.com/office/drawing/2014/main" id="{5F33F24B-1A9E-2EAF-F2AB-89426454DEE9}"/>
+              </a:ext>
+            </a:extLst>
+          </p:cNvPr>
+          <p:cNvSpPr>
+            <a:spLocks noGrp="1"/>
+          </p:cNvSpPr>
+          <p:nvPr>
+            <p:ph idx="12" sz="quarter" type="sldNum"/>
+          </p:nvPr>
+        </p:nvSpPr>
+        <p:spPr>
+          <a:xfrm>
+            <a:off x="8610599" y="6356350"/>
+            <a:ext cx="3135001" cy="365125"/>
+          </a:xfrm>
+        </p:spPr>
+        <p:txBody>
+          <a:bodyPr/>
+          <a:lstStyle/>
+          <a:p>
+            <a:fld id="{7FEFBAB6-26D0-44D8-BD53-612461CE1ACC}" type="slidenum">
+              <a:rPr lang="de-DE" smtClean="0"/>
+              <a:t>‹#›</a:t>
+            </a:fld>
+            <a:endParaRPr lang="de-DE"/>
           </a:p>
         </p:txBody>
       </p:sp>
@@ -10559,6 +10924,40 @@
           </a:p>
         </p:txBody>
       </p:sp>
+      <p:sp>
+        <p:nvSpPr>
+          <p:cNvPr id="6" name="Slide Number Placeholder 5">
+            <a:extLst>
+              <a:ext uri="{FF2B5EF4-FFF2-40B4-BE49-F238E27FC236}">
+                <a16:creationId xmlns:a16="http://schemas.microsoft.com/office/drawing/2014/main" id="{5F33F24B-1A9E-2EAF-F2AB-89426454DEE9}"/>
+              </a:ext>
+            </a:extLst>
+          </p:cNvPr>
+          <p:cNvSpPr>
+            <a:spLocks noGrp="1"/>
+          </p:cNvSpPr>
+          <p:nvPr>
+            <p:ph idx="12" sz="quarter" type="sldNum"/>
+          </p:nvPr>
+        </p:nvSpPr>
+        <p:spPr>
+          <a:xfrm>
+            <a:off x="8610599" y="6356350"/>
+            <a:ext cx="3135001" cy="365125"/>
+          </a:xfrm>
+        </p:spPr>
+        <p:txBody>
+          <a:bodyPr/>
+          <a:lstStyle/>
+          <a:p>
+            <a:fld id="{7FEFBAB6-26D0-44D8-BD53-612461CE1ACC}" type="slidenum">
+              <a:rPr lang="de-DE" smtClean="0"/>
+              <a:t>‹#›</a:t>
+            </a:fld>
+            <a:endParaRPr lang="de-DE"/>
+          </a:p>
+        </p:txBody>
+      </p:sp>
     </p:spTree>
   </p:cSld>
 </p:sld>
@@ -10669,6 +11068,40 @@
               </a:rPr>
               <a:t>Jackson (1990)</a:t>
             </a:r>
+          </a:p>
+        </p:txBody>
+      </p:sp>
+      <p:sp>
+        <p:nvSpPr>
+          <p:cNvPr id="6" name="Slide Number Placeholder 5">
+            <a:extLst>
+              <a:ext uri="{FF2B5EF4-FFF2-40B4-BE49-F238E27FC236}">
+                <a16:creationId xmlns:a16="http://schemas.microsoft.com/office/drawing/2014/main" id="{5F33F24B-1A9E-2EAF-F2AB-89426454DEE9}"/>
+              </a:ext>
+            </a:extLst>
+          </p:cNvPr>
+          <p:cNvSpPr>
+            <a:spLocks noGrp="1"/>
+          </p:cNvSpPr>
+          <p:nvPr>
+            <p:ph idx="12" sz="quarter" type="sldNum"/>
+          </p:nvPr>
+        </p:nvSpPr>
+        <p:spPr>
+          <a:xfrm>
+            <a:off x="8610599" y="6356350"/>
+            <a:ext cx="3135001" cy="365125"/>
+          </a:xfrm>
+        </p:spPr>
+        <p:txBody>
+          <a:bodyPr/>
+          <a:lstStyle/>
+          <a:p>
+            <a:fld id="{7FEFBAB6-26D0-44D8-BD53-612461CE1ACC}" type="slidenum">
+              <a:rPr lang="de-DE" smtClean="0"/>
+              <a:t>‹#›</a:t>
+            </a:fld>
+            <a:endParaRPr lang="de-DE"/>
           </a:p>
         </p:txBody>
       </p:sp>
@@ -11030,6 +11463,40 @@
           </a:graphicData>
         </a:graphic>
       </p:graphicFrame>
+      <p:sp>
+        <p:nvSpPr>
+          <p:cNvPr id="6" name="Slide Number Placeholder 5">
+            <a:extLst>
+              <a:ext uri="{FF2B5EF4-FFF2-40B4-BE49-F238E27FC236}">
+                <a16:creationId xmlns:a16="http://schemas.microsoft.com/office/drawing/2014/main" id="{5F33F24B-1A9E-2EAF-F2AB-89426454DEE9}"/>
+              </a:ext>
+            </a:extLst>
+          </p:cNvPr>
+          <p:cNvSpPr>
+            <a:spLocks noGrp="1"/>
+          </p:cNvSpPr>
+          <p:nvPr>
+            <p:ph idx="12" sz="quarter" type="sldNum"/>
+          </p:nvPr>
+        </p:nvSpPr>
+        <p:spPr>
+          <a:xfrm>
+            <a:off x="8610599" y="6356350"/>
+            <a:ext cx="3135001" cy="365125"/>
+          </a:xfrm>
+        </p:spPr>
+        <p:txBody>
+          <a:bodyPr/>
+          <a:lstStyle/>
+          <a:p>
+            <a:fld id="{7FEFBAB6-26D0-44D8-BD53-612461CE1ACC}" type="slidenum">
+              <a:rPr lang="de-DE" smtClean="0"/>
+              <a:t>‹#›</a:t>
+            </a:fld>
+            <a:endParaRPr lang="de-DE"/>
+          </a:p>
+        </p:txBody>
+      </p:sp>
     </p:spTree>
   </p:cSld>
 </p:sld>
@@ -11316,6 +11783,40 @@
           </a:graphicData>
         </a:graphic>
       </p:graphicFrame>
+      <p:sp>
+        <p:nvSpPr>
+          <p:cNvPr id="6" name="Slide Number Placeholder 5">
+            <a:extLst>
+              <a:ext uri="{FF2B5EF4-FFF2-40B4-BE49-F238E27FC236}">
+                <a16:creationId xmlns:a16="http://schemas.microsoft.com/office/drawing/2014/main" id="{5F33F24B-1A9E-2EAF-F2AB-89426454DEE9}"/>
+              </a:ext>
+            </a:extLst>
+          </p:cNvPr>
+          <p:cNvSpPr>
+            <a:spLocks noGrp="1"/>
+          </p:cNvSpPr>
+          <p:nvPr>
+            <p:ph idx="12" sz="quarter" type="sldNum"/>
+          </p:nvPr>
+        </p:nvSpPr>
+        <p:spPr>
+          <a:xfrm>
+            <a:off x="8610599" y="6356350"/>
+            <a:ext cx="3135001" cy="365125"/>
+          </a:xfrm>
+        </p:spPr>
+        <p:txBody>
+          <a:bodyPr/>
+          <a:lstStyle/>
+          <a:p>
+            <a:fld id="{7FEFBAB6-26D0-44D8-BD53-612461CE1ACC}" type="slidenum">
+              <a:rPr lang="de-DE" smtClean="0"/>
+              <a:t>‹#›</a:t>
+            </a:fld>
+            <a:endParaRPr lang="de-DE"/>
+          </a:p>
+        </p:txBody>
+      </p:sp>
     </p:spTree>
   </p:cSld>
 </p:sld>
@@ -11413,6 +11914,40 @@
           </a:p>
         </p:txBody>
       </p:sp>
+      <p:sp>
+        <p:nvSpPr>
+          <p:cNvPr id="6" name="Slide Number Placeholder 5">
+            <a:extLst>
+              <a:ext uri="{FF2B5EF4-FFF2-40B4-BE49-F238E27FC236}">
+                <a16:creationId xmlns:a16="http://schemas.microsoft.com/office/drawing/2014/main" id="{5F33F24B-1A9E-2EAF-F2AB-89426454DEE9}"/>
+              </a:ext>
+            </a:extLst>
+          </p:cNvPr>
+          <p:cNvSpPr>
+            <a:spLocks noGrp="1"/>
+          </p:cNvSpPr>
+          <p:nvPr>
+            <p:ph idx="12" sz="quarter" type="sldNum"/>
+          </p:nvPr>
+        </p:nvSpPr>
+        <p:spPr>
+          <a:xfrm>
+            <a:off x="8610599" y="6356350"/>
+            <a:ext cx="3135001" cy="365125"/>
+          </a:xfrm>
+        </p:spPr>
+        <p:txBody>
+          <a:bodyPr/>
+          <a:lstStyle/>
+          <a:p>
+            <a:fld id="{7FEFBAB6-26D0-44D8-BD53-612461CE1ACC}" type="slidenum">
+              <a:rPr lang="de-DE" smtClean="0"/>
+              <a:t>‹#›</a:t>
+            </a:fld>
+            <a:endParaRPr lang="de-DE"/>
+          </a:p>
+        </p:txBody>
+      </p:sp>
     </p:spTree>
   </p:cSld>
 </p:sld>
@@ -11561,6 +12096,40 @@
           </a:p>
         </p:txBody>
       </p:sp>
+      <p:sp>
+        <p:nvSpPr>
+          <p:cNvPr id="6" name="Slide Number Placeholder 5">
+            <a:extLst>
+              <a:ext uri="{FF2B5EF4-FFF2-40B4-BE49-F238E27FC236}">
+                <a16:creationId xmlns:a16="http://schemas.microsoft.com/office/drawing/2014/main" id="{5F33F24B-1A9E-2EAF-F2AB-89426454DEE9}"/>
+              </a:ext>
+            </a:extLst>
+          </p:cNvPr>
+          <p:cNvSpPr>
+            <a:spLocks noGrp="1"/>
+          </p:cNvSpPr>
+          <p:nvPr>
+            <p:ph idx="12" sz="quarter" type="sldNum"/>
+          </p:nvPr>
+        </p:nvSpPr>
+        <p:spPr>
+          <a:xfrm>
+            <a:off x="8610599" y="6356350"/>
+            <a:ext cx="3135001" cy="365125"/>
+          </a:xfrm>
+        </p:spPr>
+        <p:txBody>
+          <a:bodyPr/>
+          <a:lstStyle/>
+          <a:p>
+            <a:fld id="{7FEFBAB6-26D0-44D8-BD53-612461CE1ACC}" type="slidenum">
+              <a:rPr lang="de-DE" smtClean="0"/>
+              <a:t>‹#›</a:t>
+            </a:fld>
+            <a:endParaRPr lang="de-DE"/>
+          </a:p>
+        </p:txBody>
+      </p:sp>
     </p:spTree>
   </p:cSld>
 </p:sld>
@@ -11730,6 +12299,40 @@
               <a:rPr/>
               <a:t>, e.g., pdfs, notes, snapshots, urls</a:t>
             </a:r>
+          </a:p>
+        </p:txBody>
+      </p:sp>
+      <p:sp>
+        <p:nvSpPr>
+          <p:cNvPr id="6" name="Slide Number Placeholder 5">
+            <a:extLst>
+              <a:ext uri="{FF2B5EF4-FFF2-40B4-BE49-F238E27FC236}">
+                <a16:creationId xmlns:a16="http://schemas.microsoft.com/office/drawing/2014/main" id="{5F33F24B-1A9E-2EAF-F2AB-89426454DEE9}"/>
+              </a:ext>
+            </a:extLst>
+          </p:cNvPr>
+          <p:cNvSpPr>
+            <a:spLocks noGrp="1"/>
+          </p:cNvSpPr>
+          <p:nvPr>
+            <p:ph idx="12" sz="quarter" type="sldNum"/>
+          </p:nvPr>
+        </p:nvSpPr>
+        <p:spPr>
+          <a:xfrm>
+            <a:off x="8610599" y="6356350"/>
+            <a:ext cx="3135001" cy="365125"/>
+          </a:xfrm>
+        </p:spPr>
+        <p:txBody>
+          <a:bodyPr/>
+          <a:lstStyle/>
+          <a:p>
+            <a:fld id="{7FEFBAB6-26D0-44D8-BD53-612461CE1ACC}" type="slidenum">
+              <a:rPr lang="de-DE" smtClean="0"/>
+              <a:t>‹#›</a:t>
+            </a:fld>
+            <a:endParaRPr lang="de-DE"/>
           </a:p>
         </p:txBody>
       </p:sp>
@@ -12118,6 +12721,40 @@
           </a:p>
         </p:txBody>
       </p:sp>
+      <p:sp>
+        <p:nvSpPr>
+          <p:cNvPr id="6" name="Slide Number Placeholder 5">
+            <a:extLst>
+              <a:ext uri="{FF2B5EF4-FFF2-40B4-BE49-F238E27FC236}">
+                <a16:creationId xmlns:a16="http://schemas.microsoft.com/office/drawing/2014/main" id="{5F33F24B-1A9E-2EAF-F2AB-89426454DEE9}"/>
+              </a:ext>
+            </a:extLst>
+          </p:cNvPr>
+          <p:cNvSpPr>
+            <a:spLocks noGrp="1"/>
+          </p:cNvSpPr>
+          <p:nvPr>
+            <p:ph idx="12" sz="quarter" type="sldNum"/>
+          </p:nvPr>
+        </p:nvSpPr>
+        <p:spPr>
+          <a:xfrm>
+            <a:off x="8610599" y="6356350"/>
+            <a:ext cx="3135001" cy="365125"/>
+          </a:xfrm>
+        </p:spPr>
+        <p:txBody>
+          <a:bodyPr/>
+          <a:lstStyle/>
+          <a:p>
+            <a:fld id="{7FEFBAB6-26D0-44D8-BD53-612461CE1ACC}" type="slidenum">
+              <a:rPr lang="de-DE" smtClean="0"/>
+              <a:t>‹#›</a:t>
+            </a:fld>
+            <a:endParaRPr lang="de-DE"/>
+          </a:p>
+        </p:txBody>
+      </p:sp>
     </p:spTree>
   </p:cSld>
 </p:sld>
@@ -12176,6 +12813,40 @@
           </a:p>
         </p:txBody>
       </p:sp>
+      <p:sp>
+        <p:nvSpPr>
+          <p:cNvPr id="6" name="Slide Number Placeholder 5">
+            <a:extLst>
+              <a:ext uri="{FF2B5EF4-FFF2-40B4-BE49-F238E27FC236}">
+                <a16:creationId xmlns:a16="http://schemas.microsoft.com/office/drawing/2014/main" id="{B93C94A4-D223-C226-398A-59B1A3955C6C}"/>
+              </a:ext>
+            </a:extLst>
+          </p:cNvPr>
+          <p:cNvSpPr>
+            <a:spLocks noGrp="1"/>
+          </p:cNvSpPr>
+          <p:nvPr>
+            <p:ph idx="12" sz="quarter" type="sldNum"/>
+          </p:nvPr>
+        </p:nvSpPr>
+        <p:spPr>
+          <a:xfrm>
+            <a:off x="8610599" y="6356350"/>
+            <a:ext cx="3135001" cy="365125"/>
+          </a:xfrm>
+        </p:spPr>
+        <p:txBody>
+          <a:bodyPr/>
+          <a:lstStyle/>
+          <a:p>
+            <a:fld id="{7FEFBAB6-26D0-44D8-BD53-612461CE1ACC}" type="slidenum">
+              <a:rPr lang="de-DE" smtClean="0"/>
+              <a:t>‹#›</a:t>
+            </a:fld>
+            <a:endParaRPr lang="de-DE"/>
+          </a:p>
+        </p:txBody>
+      </p:sp>
     </p:spTree>
   </p:cSld>
 </p:sld>
@@ -12286,6 +12957,40 @@
               <a:rPr/>
               <a:t>: Plugins for Word, Quarto, and Google Docs generate in‑text citations and bibliographies automatically.</a:t>
             </a:r>
+          </a:p>
+        </p:txBody>
+      </p:sp>
+      <p:sp>
+        <p:nvSpPr>
+          <p:cNvPr id="6" name="Slide Number Placeholder 5">
+            <a:extLst>
+              <a:ext uri="{FF2B5EF4-FFF2-40B4-BE49-F238E27FC236}">
+                <a16:creationId xmlns:a16="http://schemas.microsoft.com/office/drawing/2014/main" id="{5F33F24B-1A9E-2EAF-F2AB-89426454DEE9}"/>
+              </a:ext>
+            </a:extLst>
+          </p:cNvPr>
+          <p:cNvSpPr>
+            <a:spLocks noGrp="1"/>
+          </p:cNvSpPr>
+          <p:nvPr>
+            <p:ph idx="12" sz="quarter" type="sldNum"/>
+          </p:nvPr>
+        </p:nvSpPr>
+        <p:spPr>
+          <a:xfrm>
+            <a:off x="8610599" y="6356350"/>
+            <a:ext cx="3135001" cy="365125"/>
+          </a:xfrm>
+        </p:spPr>
+        <p:txBody>
+          <a:bodyPr/>
+          <a:lstStyle/>
+          <a:p>
+            <a:fld id="{7FEFBAB6-26D0-44D8-BD53-612461CE1ACC}" type="slidenum">
+              <a:rPr lang="de-DE" smtClean="0"/>
+              <a:t>‹#›</a:t>
+            </a:fld>
+            <a:endParaRPr lang="de-DE"/>
           </a:p>
         </p:txBody>
       </p:sp>
@@ -12557,6 +13262,40 @@
           </a:ln>
         </p:spPr>
       </p:pic>
+      <p:sp>
+        <p:nvSpPr>
+          <p:cNvPr id="6" name="Slide Number Placeholder 5">
+            <a:extLst>
+              <a:ext uri="{FF2B5EF4-FFF2-40B4-BE49-F238E27FC236}">
+                <a16:creationId xmlns:a16="http://schemas.microsoft.com/office/drawing/2014/main" id="{5F33F24B-1A9E-2EAF-F2AB-89426454DEE9}"/>
+              </a:ext>
+            </a:extLst>
+          </p:cNvPr>
+          <p:cNvSpPr>
+            <a:spLocks noGrp="1"/>
+          </p:cNvSpPr>
+          <p:nvPr>
+            <p:ph idx="12" sz="quarter" type="sldNum"/>
+          </p:nvPr>
+        </p:nvSpPr>
+        <p:spPr>
+          <a:xfrm>
+            <a:off x="8610599" y="6356350"/>
+            <a:ext cx="3135001" cy="365125"/>
+          </a:xfrm>
+        </p:spPr>
+        <p:txBody>
+          <a:bodyPr/>
+          <a:lstStyle/>
+          <a:p>
+            <a:fld id="{7FEFBAB6-26D0-44D8-BD53-612461CE1ACC}" type="slidenum">
+              <a:rPr lang="de-DE" smtClean="0"/>
+              <a:t>‹#›</a:t>
+            </a:fld>
+            <a:endParaRPr lang="de-DE"/>
+          </a:p>
+        </p:txBody>
+      </p:sp>
     </p:spTree>
   </p:cSld>
 </p:sld>
@@ -12722,6 +13461,40 @@
           </a:p>
         </p:txBody>
       </p:sp>
+      <p:sp>
+        <p:nvSpPr>
+          <p:cNvPr id="6" name="Slide Number Placeholder 5">
+            <a:extLst>
+              <a:ext uri="{FF2B5EF4-FFF2-40B4-BE49-F238E27FC236}">
+                <a16:creationId xmlns:a16="http://schemas.microsoft.com/office/drawing/2014/main" id="{5F33F24B-1A9E-2EAF-F2AB-89426454DEE9}"/>
+              </a:ext>
+            </a:extLst>
+          </p:cNvPr>
+          <p:cNvSpPr>
+            <a:spLocks noGrp="1"/>
+          </p:cNvSpPr>
+          <p:nvPr>
+            <p:ph idx="12" sz="quarter" type="sldNum"/>
+          </p:nvPr>
+        </p:nvSpPr>
+        <p:spPr>
+          <a:xfrm>
+            <a:off x="8610599" y="6356350"/>
+            <a:ext cx="3135001" cy="365125"/>
+          </a:xfrm>
+        </p:spPr>
+        <p:txBody>
+          <a:bodyPr/>
+          <a:lstStyle/>
+          <a:p>
+            <a:fld id="{7FEFBAB6-26D0-44D8-BD53-612461CE1ACC}" type="slidenum">
+              <a:rPr lang="de-DE" smtClean="0"/>
+              <a:t>‹#›</a:t>
+            </a:fld>
+            <a:endParaRPr lang="de-DE"/>
+          </a:p>
+        </p:txBody>
+      </p:sp>
     </p:spTree>
   </p:cSld>
 </p:sld>
@@ -12871,6 +13644,40 @@
           </a:p>
         </p:txBody>
       </p:sp>
+      <p:sp>
+        <p:nvSpPr>
+          <p:cNvPr id="6" name="Slide Number Placeholder 5">
+            <a:extLst>
+              <a:ext uri="{FF2B5EF4-FFF2-40B4-BE49-F238E27FC236}">
+                <a16:creationId xmlns:a16="http://schemas.microsoft.com/office/drawing/2014/main" id="{5F33F24B-1A9E-2EAF-F2AB-89426454DEE9}"/>
+              </a:ext>
+            </a:extLst>
+          </p:cNvPr>
+          <p:cNvSpPr>
+            <a:spLocks noGrp="1"/>
+          </p:cNvSpPr>
+          <p:nvPr>
+            <p:ph idx="12" sz="quarter" type="sldNum"/>
+          </p:nvPr>
+        </p:nvSpPr>
+        <p:spPr>
+          <a:xfrm>
+            <a:off x="8610599" y="6356350"/>
+            <a:ext cx="3135001" cy="365125"/>
+          </a:xfrm>
+        </p:spPr>
+        <p:txBody>
+          <a:bodyPr/>
+          <a:lstStyle/>
+          <a:p>
+            <a:fld id="{7FEFBAB6-26D0-44D8-BD53-612461CE1ACC}" type="slidenum">
+              <a:rPr lang="de-DE" smtClean="0"/>
+              <a:t>‹#›</a:t>
+            </a:fld>
+            <a:endParaRPr lang="de-DE"/>
+          </a:p>
+        </p:txBody>
+      </p:sp>
     </p:spTree>
   </p:cSld>
 </p:sld>
@@ -12994,6 +13801,40 @@
           </a:p>
         </p:txBody>
       </p:sp>
+      <p:sp>
+        <p:nvSpPr>
+          <p:cNvPr id="6" name="Slide Number Placeholder 5">
+            <a:extLst>
+              <a:ext uri="{FF2B5EF4-FFF2-40B4-BE49-F238E27FC236}">
+                <a16:creationId xmlns:a16="http://schemas.microsoft.com/office/drawing/2014/main" id="{5F33F24B-1A9E-2EAF-F2AB-89426454DEE9}"/>
+              </a:ext>
+            </a:extLst>
+          </p:cNvPr>
+          <p:cNvSpPr>
+            <a:spLocks noGrp="1"/>
+          </p:cNvSpPr>
+          <p:nvPr>
+            <p:ph idx="12" sz="quarter" type="sldNum"/>
+          </p:nvPr>
+        </p:nvSpPr>
+        <p:spPr>
+          <a:xfrm>
+            <a:off x="8610599" y="6356350"/>
+            <a:ext cx="3135001" cy="365125"/>
+          </a:xfrm>
+        </p:spPr>
+        <p:txBody>
+          <a:bodyPr/>
+          <a:lstStyle/>
+          <a:p>
+            <a:fld id="{7FEFBAB6-26D0-44D8-BD53-612461CE1ACC}" type="slidenum">
+              <a:rPr lang="de-DE" smtClean="0"/>
+              <a:t>‹#›</a:t>
+            </a:fld>
+            <a:endParaRPr lang="de-DE"/>
+          </a:p>
+        </p:txBody>
+      </p:sp>
     </p:spTree>
   </p:cSld>
 </p:sld>
@@ -13137,6 +13978,40 @@
           </a:p>
         </p:txBody>
       </p:sp>
+      <p:sp>
+        <p:nvSpPr>
+          <p:cNvPr id="6" name="Slide Number Placeholder 5">
+            <a:extLst>
+              <a:ext uri="{FF2B5EF4-FFF2-40B4-BE49-F238E27FC236}">
+                <a16:creationId xmlns:a16="http://schemas.microsoft.com/office/drawing/2014/main" id="{5F33F24B-1A9E-2EAF-F2AB-89426454DEE9}"/>
+              </a:ext>
+            </a:extLst>
+          </p:cNvPr>
+          <p:cNvSpPr>
+            <a:spLocks noGrp="1"/>
+          </p:cNvSpPr>
+          <p:nvPr>
+            <p:ph idx="12" sz="quarter" type="sldNum"/>
+          </p:nvPr>
+        </p:nvSpPr>
+        <p:spPr>
+          <a:xfrm>
+            <a:off x="8610599" y="6356350"/>
+            <a:ext cx="3135001" cy="365125"/>
+          </a:xfrm>
+        </p:spPr>
+        <p:txBody>
+          <a:bodyPr/>
+          <a:lstStyle/>
+          <a:p>
+            <a:fld id="{7FEFBAB6-26D0-44D8-BD53-612461CE1ACC}" type="slidenum">
+              <a:rPr lang="de-DE" smtClean="0"/>
+              <a:t>‹#›</a:t>
+            </a:fld>
+            <a:endParaRPr lang="de-DE"/>
+          </a:p>
+        </p:txBody>
+      </p:sp>
     </p:spTree>
   </p:cSld>
 </p:sld>
@@ -13278,6 +14153,40 @@
               <a:rPr/>
               <a:t>Zotero can be your go-to tool for saving and citing studies, from assignments to thesis.</a:t>
             </a:r>
+          </a:p>
+        </p:txBody>
+      </p:sp>
+      <p:sp>
+        <p:nvSpPr>
+          <p:cNvPr id="6" name="Slide Number Placeholder 5">
+            <a:extLst>
+              <a:ext uri="{FF2B5EF4-FFF2-40B4-BE49-F238E27FC236}">
+                <a16:creationId xmlns:a16="http://schemas.microsoft.com/office/drawing/2014/main" id="{5F33F24B-1A9E-2EAF-F2AB-89426454DEE9}"/>
+              </a:ext>
+            </a:extLst>
+          </p:cNvPr>
+          <p:cNvSpPr>
+            <a:spLocks noGrp="1"/>
+          </p:cNvSpPr>
+          <p:nvPr>
+            <p:ph idx="12" sz="quarter" type="sldNum"/>
+          </p:nvPr>
+        </p:nvSpPr>
+        <p:spPr>
+          <a:xfrm>
+            <a:off x="8610599" y="6356350"/>
+            <a:ext cx="3135001" cy="365125"/>
+          </a:xfrm>
+        </p:spPr>
+        <p:txBody>
+          <a:bodyPr/>
+          <a:lstStyle/>
+          <a:p>
+            <a:fld id="{7FEFBAB6-26D0-44D8-BD53-612461CE1ACC}" type="slidenum">
+              <a:rPr lang="de-DE" smtClean="0"/>
+              <a:t>‹#›</a:t>
+            </a:fld>
+            <a:endParaRPr lang="de-DE"/>
           </a:p>
         </p:txBody>
       </p:sp>
@@ -13553,6 +14462,40 @@
               <a:rPr/>
               <a:t> a referencing workflow in MS Word</a:t>
             </a:r>
+          </a:p>
+        </p:txBody>
+      </p:sp>
+      <p:sp>
+        <p:nvSpPr>
+          <p:cNvPr id="6" name="Slide Number Placeholder 5">
+            <a:extLst>
+              <a:ext uri="{FF2B5EF4-FFF2-40B4-BE49-F238E27FC236}">
+                <a16:creationId xmlns:a16="http://schemas.microsoft.com/office/drawing/2014/main" id="{5F33F24B-1A9E-2EAF-F2AB-89426454DEE9}"/>
+              </a:ext>
+            </a:extLst>
+          </p:cNvPr>
+          <p:cNvSpPr>
+            <a:spLocks noGrp="1"/>
+          </p:cNvSpPr>
+          <p:nvPr>
+            <p:ph idx="12" sz="quarter" type="sldNum"/>
+          </p:nvPr>
+        </p:nvSpPr>
+        <p:spPr>
+          <a:xfrm>
+            <a:off x="8610599" y="6356350"/>
+            <a:ext cx="3135001" cy="365125"/>
+          </a:xfrm>
+        </p:spPr>
+        <p:txBody>
+          <a:bodyPr/>
+          <a:lstStyle/>
+          <a:p>
+            <a:fld id="{7FEFBAB6-26D0-44D8-BD53-612461CE1ACC}" type="slidenum">
+              <a:rPr lang="de-DE" smtClean="0"/>
+              <a:t>‹#›</a:t>
+            </a:fld>
+            <a:endParaRPr lang="de-DE"/>
           </a:p>
         </p:txBody>
       </p:sp>
@@ -13892,6 +14835,40 @@
           </a:p>
         </p:txBody>
       </p:sp>
+      <p:sp>
+        <p:nvSpPr>
+          <p:cNvPr id="6" name="Slide Number Placeholder 5">
+            <a:extLst>
+              <a:ext uri="{FF2B5EF4-FFF2-40B4-BE49-F238E27FC236}">
+                <a16:creationId xmlns:a16="http://schemas.microsoft.com/office/drawing/2014/main" id="{5F33F24B-1A9E-2EAF-F2AB-89426454DEE9}"/>
+              </a:ext>
+            </a:extLst>
+          </p:cNvPr>
+          <p:cNvSpPr>
+            <a:spLocks noGrp="1"/>
+          </p:cNvSpPr>
+          <p:nvPr>
+            <p:ph idx="12" sz="quarter" type="sldNum"/>
+          </p:nvPr>
+        </p:nvSpPr>
+        <p:spPr>
+          <a:xfrm>
+            <a:off x="8610599" y="6356350"/>
+            <a:ext cx="3135001" cy="365125"/>
+          </a:xfrm>
+        </p:spPr>
+        <p:txBody>
+          <a:bodyPr/>
+          <a:lstStyle/>
+          <a:p>
+            <a:fld id="{7FEFBAB6-26D0-44D8-BD53-612461CE1ACC}" type="slidenum">
+              <a:rPr lang="de-DE" smtClean="0"/>
+              <a:t>‹#›</a:t>
+            </a:fld>
+            <a:endParaRPr lang="de-DE"/>
+          </a:p>
+        </p:txBody>
+      </p:sp>
     </p:spTree>
   </p:cSld>
 </p:sld>
@@ -13981,6 +14958,40 @@
           </a:p>
         </p:txBody>
       </p:sp>
+      <p:sp>
+        <p:nvSpPr>
+          <p:cNvPr id="6" name="Slide Number Placeholder 5">
+            <a:extLst>
+              <a:ext uri="{FF2B5EF4-FFF2-40B4-BE49-F238E27FC236}">
+                <a16:creationId xmlns:a16="http://schemas.microsoft.com/office/drawing/2014/main" id="{5F33F24B-1A9E-2EAF-F2AB-89426454DEE9}"/>
+              </a:ext>
+            </a:extLst>
+          </p:cNvPr>
+          <p:cNvSpPr>
+            <a:spLocks noGrp="1"/>
+          </p:cNvSpPr>
+          <p:nvPr>
+            <p:ph idx="12" sz="quarter" type="sldNum"/>
+          </p:nvPr>
+        </p:nvSpPr>
+        <p:spPr>
+          <a:xfrm>
+            <a:off x="8610599" y="6356350"/>
+            <a:ext cx="3135001" cy="365125"/>
+          </a:xfrm>
+        </p:spPr>
+        <p:txBody>
+          <a:bodyPr/>
+          <a:lstStyle/>
+          <a:p>
+            <a:fld id="{7FEFBAB6-26D0-44D8-BD53-612461CE1ACC}" type="slidenum">
+              <a:rPr lang="de-DE" smtClean="0"/>
+              <a:t>‹#›</a:t>
+            </a:fld>
+            <a:endParaRPr lang="de-DE"/>
+          </a:p>
+        </p:txBody>
+      </p:sp>
     </p:spTree>
   </p:cSld>
 </p:sld>
@@ -14087,6 +15098,40 @@
           </a:p>
         </p:txBody>
       </p:sp>
+      <p:sp>
+        <p:nvSpPr>
+          <p:cNvPr id="6" name="Slide Number Placeholder 5">
+            <a:extLst>
+              <a:ext uri="{FF2B5EF4-FFF2-40B4-BE49-F238E27FC236}">
+                <a16:creationId xmlns:a16="http://schemas.microsoft.com/office/drawing/2014/main" id="{5F33F24B-1A9E-2EAF-F2AB-89426454DEE9}"/>
+              </a:ext>
+            </a:extLst>
+          </p:cNvPr>
+          <p:cNvSpPr>
+            <a:spLocks noGrp="1"/>
+          </p:cNvSpPr>
+          <p:nvPr>
+            <p:ph idx="12" sz="quarter" type="sldNum"/>
+          </p:nvPr>
+        </p:nvSpPr>
+        <p:spPr>
+          <a:xfrm>
+            <a:off x="8610599" y="6356350"/>
+            <a:ext cx="3135001" cy="365125"/>
+          </a:xfrm>
+        </p:spPr>
+        <p:txBody>
+          <a:bodyPr/>
+          <a:lstStyle/>
+          <a:p>
+            <a:fld id="{7FEFBAB6-26D0-44D8-BD53-612461CE1ACC}" type="slidenum">
+              <a:rPr lang="de-DE" smtClean="0"/>
+              <a:t>‹#›</a:t>
+            </a:fld>
+            <a:endParaRPr lang="de-DE"/>
+          </a:p>
+        </p:txBody>
+      </p:sp>
     </p:spTree>
   </p:cSld>
 </p:sld>
@@ -14176,6 +15221,40 @@
           </a:p>
         </p:txBody>
       </p:sp>
+      <p:sp>
+        <p:nvSpPr>
+          <p:cNvPr id="6" name="Slide Number Placeholder 5">
+            <a:extLst>
+              <a:ext uri="{FF2B5EF4-FFF2-40B4-BE49-F238E27FC236}">
+                <a16:creationId xmlns:a16="http://schemas.microsoft.com/office/drawing/2014/main" id="{5F33F24B-1A9E-2EAF-F2AB-89426454DEE9}"/>
+              </a:ext>
+            </a:extLst>
+          </p:cNvPr>
+          <p:cNvSpPr>
+            <a:spLocks noGrp="1"/>
+          </p:cNvSpPr>
+          <p:nvPr>
+            <p:ph idx="12" sz="quarter" type="sldNum"/>
+          </p:nvPr>
+        </p:nvSpPr>
+        <p:spPr>
+          <a:xfrm>
+            <a:off x="8610599" y="6356350"/>
+            <a:ext cx="3135001" cy="365125"/>
+          </a:xfrm>
+        </p:spPr>
+        <p:txBody>
+          <a:bodyPr/>
+          <a:lstStyle/>
+          <a:p>
+            <a:fld id="{7FEFBAB6-26D0-44D8-BD53-612461CE1ACC}" type="slidenum">
+              <a:rPr lang="de-DE" smtClean="0"/>
+              <a:t>‹#›</a:t>
+            </a:fld>
+            <a:endParaRPr lang="de-DE"/>
+          </a:p>
+        </p:txBody>
+      </p:sp>
     </p:spTree>
   </p:cSld>
 </p:sld>
@@ -14273,6 +15352,40 @@
           </a:p>
         </p:txBody>
       </p:sp>
+      <p:sp>
+        <p:nvSpPr>
+          <p:cNvPr id="6" name="Slide Number Placeholder 5">
+            <a:extLst>
+              <a:ext uri="{FF2B5EF4-FFF2-40B4-BE49-F238E27FC236}">
+                <a16:creationId xmlns:a16="http://schemas.microsoft.com/office/drawing/2014/main" id="{5F33F24B-1A9E-2EAF-F2AB-89426454DEE9}"/>
+              </a:ext>
+            </a:extLst>
+          </p:cNvPr>
+          <p:cNvSpPr>
+            <a:spLocks noGrp="1"/>
+          </p:cNvSpPr>
+          <p:nvPr>
+            <p:ph idx="12" sz="quarter" type="sldNum"/>
+          </p:nvPr>
+        </p:nvSpPr>
+        <p:spPr>
+          <a:xfrm>
+            <a:off x="8610599" y="6356350"/>
+            <a:ext cx="3135001" cy="365125"/>
+          </a:xfrm>
+        </p:spPr>
+        <p:txBody>
+          <a:bodyPr/>
+          <a:lstStyle/>
+          <a:p>
+            <a:fld id="{7FEFBAB6-26D0-44D8-BD53-612461CE1ACC}" type="slidenum">
+              <a:rPr lang="de-DE" smtClean="0"/>
+              <a:t>‹#›</a:t>
+            </a:fld>
+            <a:endParaRPr lang="de-DE"/>
+          </a:p>
+        </p:txBody>
+      </p:sp>
     </p:spTree>
   </p:cSld>
 </p:sld>
@@ -14362,6 +15475,40 @@
           </a:p>
         </p:txBody>
       </p:sp>
+      <p:sp>
+        <p:nvSpPr>
+          <p:cNvPr id="6" name="Slide Number Placeholder 5">
+            <a:extLst>
+              <a:ext uri="{FF2B5EF4-FFF2-40B4-BE49-F238E27FC236}">
+                <a16:creationId xmlns:a16="http://schemas.microsoft.com/office/drawing/2014/main" id="{5F33F24B-1A9E-2EAF-F2AB-89426454DEE9}"/>
+              </a:ext>
+            </a:extLst>
+          </p:cNvPr>
+          <p:cNvSpPr>
+            <a:spLocks noGrp="1"/>
+          </p:cNvSpPr>
+          <p:nvPr>
+            <p:ph idx="12" sz="quarter" type="sldNum"/>
+          </p:nvPr>
+        </p:nvSpPr>
+        <p:spPr>
+          <a:xfrm>
+            <a:off x="8610599" y="6356350"/>
+            <a:ext cx="3135001" cy="365125"/>
+          </a:xfrm>
+        </p:spPr>
+        <p:txBody>
+          <a:bodyPr/>
+          <a:lstStyle/>
+          <a:p>
+            <a:fld id="{7FEFBAB6-26D0-44D8-BD53-612461CE1ACC}" type="slidenum">
+              <a:rPr lang="de-DE" smtClean="0"/>
+              <a:t>‹#›</a:t>
+            </a:fld>
+            <a:endParaRPr lang="de-DE"/>
+          </a:p>
+        </p:txBody>
+      </p:sp>
     </p:spTree>
   </p:cSld>
 </p:sld>
@@ -14464,6 +15611,40 @@
           </a:p>
         </p:txBody>
       </p:sp>
+      <p:sp>
+        <p:nvSpPr>
+          <p:cNvPr id="6" name="Slide Number Placeholder 5">
+            <a:extLst>
+              <a:ext uri="{FF2B5EF4-FFF2-40B4-BE49-F238E27FC236}">
+                <a16:creationId xmlns:a16="http://schemas.microsoft.com/office/drawing/2014/main" id="{5F33F24B-1A9E-2EAF-F2AB-89426454DEE9}"/>
+              </a:ext>
+            </a:extLst>
+          </p:cNvPr>
+          <p:cNvSpPr>
+            <a:spLocks noGrp="1"/>
+          </p:cNvSpPr>
+          <p:nvPr>
+            <p:ph idx="12" sz="quarter" type="sldNum"/>
+          </p:nvPr>
+        </p:nvSpPr>
+        <p:spPr>
+          <a:xfrm>
+            <a:off x="8610599" y="6356350"/>
+            <a:ext cx="3135001" cy="365125"/>
+          </a:xfrm>
+        </p:spPr>
+        <p:txBody>
+          <a:bodyPr/>
+          <a:lstStyle/>
+          <a:p>
+            <a:fld id="{7FEFBAB6-26D0-44D8-BD53-612461CE1ACC}" type="slidenum">
+              <a:rPr lang="de-DE" smtClean="0"/>
+              <a:t>‹#›</a:t>
+            </a:fld>
+            <a:endParaRPr lang="de-DE"/>
+          </a:p>
+        </p:txBody>
+      </p:sp>
     </p:spTree>
   </p:cSld>
 </p:sld>
@@ -14555,6 +15736,40 @@
           </a:p>
         </p:txBody>
       </p:sp>
+      <p:sp>
+        <p:nvSpPr>
+          <p:cNvPr id="6" name="Slide Number Placeholder 5">
+            <a:extLst>
+              <a:ext uri="{FF2B5EF4-FFF2-40B4-BE49-F238E27FC236}">
+                <a16:creationId xmlns:a16="http://schemas.microsoft.com/office/drawing/2014/main" id="{5F33F24B-1A9E-2EAF-F2AB-89426454DEE9}"/>
+              </a:ext>
+            </a:extLst>
+          </p:cNvPr>
+          <p:cNvSpPr>
+            <a:spLocks noGrp="1"/>
+          </p:cNvSpPr>
+          <p:nvPr>
+            <p:ph idx="12" sz="quarter" type="sldNum"/>
+          </p:nvPr>
+        </p:nvSpPr>
+        <p:spPr>
+          <a:xfrm>
+            <a:off x="8610599" y="6356350"/>
+            <a:ext cx="3135001" cy="365125"/>
+          </a:xfrm>
+        </p:spPr>
+        <p:txBody>
+          <a:bodyPr/>
+          <a:lstStyle/>
+          <a:p>
+            <a:fld id="{7FEFBAB6-26D0-44D8-BD53-612461CE1ACC}" type="slidenum">
+              <a:rPr lang="de-DE" smtClean="0"/>
+              <a:t>‹#›</a:t>
+            </a:fld>
+            <a:endParaRPr lang="de-DE"/>
+          </a:p>
+        </p:txBody>
+      </p:sp>
     </p:spTree>
   </p:cSld>
 </p:sld>
@@ -14670,6 +15885,40 @@
               <a:rPr/>
               <a:t>: Conceptualisation, Writing - Review &amp; Editing, Supervision, Project Administration, Validation.</a:t>
             </a:r>
+          </a:p>
+        </p:txBody>
+      </p:sp>
+      <p:sp>
+        <p:nvSpPr>
+          <p:cNvPr id="6" name="Slide Number Placeholder 5">
+            <a:extLst>
+              <a:ext uri="{FF2B5EF4-FFF2-40B4-BE49-F238E27FC236}">
+                <a16:creationId xmlns:a16="http://schemas.microsoft.com/office/drawing/2014/main" id="{5F33F24B-1A9E-2EAF-F2AB-89426454DEE9}"/>
+              </a:ext>
+            </a:extLst>
+          </p:cNvPr>
+          <p:cNvSpPr>
+            <a:spLocks noGrp="1"/>
+          </p:cNvSpPr>
+          <p:nvPr>
+            <p:ph idx="12" sz="quarter" type="sldNum"/>
+          </p:nvPr>
+        </p:nvSpPr>
+        <p:spPr>
+          <a:xfrm>
+            <a:off x="8610599" y="6356350"/>
+            <a:ext cx="3135001" cy="365125"/>
+          </a:xfrm>
+        </p:spPr>
+        <p:txBody>
+          <a:bodyPr/>
+          <a:lstStyle/>
+          <a:p>
+            <a:fld id="{7FEFBAB6-26D0-44D8-BD53-612461CE1ACC}" type="slidenum">
+              <a:rPr lang="de-DE" smtClean="0"/>
+              <a:t>‹#›</a:t>
+            </a:fld>
+            <a:endParaRPr lang="de-DE"/>
           </a:p>
         </p:txBody>
       </p:sp>
@@ -14992,6 +16241,40 @@
           </a:graphicData>
         </a:graphic>
       </p:graphicFrame>
+      <p:sp>
+        <p:nvSpPr>
+          <p:cNvPr id="7" name="Slide Number Placeholder 6">
+            <a:extLst>
+              <a:ext uri="{FF2B5EF4-FFF2-40B4-BE49-F238E27FC236}">
+                <a16:creationId xmlns:a16="http://schemas.microsoft.com/office/drawing/2014/main" id="{7EC0C6E5-A864-8D29-B45D-21E23026496C}"/>
+              </a:ext>
+            </a:extLst>
+          </p:cNvPr>
+          <p:cNvSpPr>
+            <a:spLocks noGrp="1"/>
+          </p:cNvSpPr>
+          <p:nvPr>
+            <p:ph idx="12" sz="quarter" type="sldNum"/>
+          </p:nvPr>
+        </p:nvSpPr>
+        <p:spPr>
+          <a:xfrm>
+            <a:off x="8610600" y="6356350"/>
+            <a:ext cx="3135000" cy="365125"/>
+          </a:xfrm>
+        </p:spPr>
+        <p:txBody>
+          <a:bodyPr/>
+          <a:lstStyle/>
+          <a:p>
+            <a:fld id="{7FEFBAB6-26D0-44D8-BD53-612461CE1ACC}" type="slidenum">
+              <a:rPr lang="de-DE" smtClean="0"/>
+              <a:t>‹#›</a:t>
+            </a:fld>
+            <a:endParaRPr lang="de-DE"/>
+          </a:p>
+        </p:txBody>
+      </p:sp>
     </p:spTree>
   </p:cSld>
 </p:sld>
@@ -15125,6 +16408,40 @@
           </a:ln>
         </p:spPr>
       </p:pic>
+      <p:sp>
+        <p:nvSpPr>
+          <p:cNvPr id="7" name="Slide Number Placeholder 6">
+            <a:extLst>
+              <a:ext uri="{FF2B5EF4-FFF2-40B4-BE49-F238E27FC236}">
+                <a16:creationId xmlns:a16="http://schemas.microsoft.com/office/drawing/2014/main" id="{7EC0C6E5-A864-8D29-B45D-21E23026496C}"/>
+              </a:ext>
+            </a:extLst>
+          </p:cNvPr>
+          <p:cNvSpPr>
+            <a:spLocks noGrp="1"/>
+          </p:cNvSpPr>
+          <p:nvPr>
+            <p:ph idx="12" sz="quarter" type="sldNum"/>
+          </p:nvPr>
+        </p:nvSpPr>
+        <p:spPr>
+          <a:xfrm>
+            <a:off x="8610600" y="6356350"/>
+            <a:ext cx="3135000" cy="365125"/>
+          </a:xfrm>
+        </p:spPr>
+        <p:txBody>
+          <a:bodyPr/>
+          <a:lstStyle/>
+          <a:p>
+            <a:fld id="{7FEFBAB6-26D0-44D8-BD53-612461CE1ACC}" type="slidenum">
+              <a:rPr lang="de-DE" smtClean="0"/>
+              <a:t>‹#›</a:t>
+            </a:fld>
+            <a:endParaRPr lang="de-DE"/>
+          </a:p>
+        </p:txBody>
+      </p:sp>
     </p:spTree>
   </p:cSld>
 </p:sld>
@@ -15183,6 +16500,40 @@
           </a:p>
         </p:txBody>
       </p:sp>
+      <p:sp>
+        <p:nvSpPr>
+          <p:cNvPr id="6" name="Slide Number Placeholder 5">
+            <a:extLst>
+              <a:ext uri="{FF2B5EF4-FFF2-40B4-BE49-F238E27FC236}">
+                <a16:creationId xmlns:a16="http://schemas.microsoft.com/office/drawing/2014/main" id="{5F33F24B-1A9E-2EAF-F2AB-89426454DEE9}"/>
+              </a:ext>
+            </a:extLst>
+          </p:cNvPr>
+          <p:cNvSpPr>
+            <a:spLocks noGrp="1"/>
+          </p:cNvSpPr>
+          <p:nvPr>
+            <p:ph idx="12" sz="quarter" type="sldNum"/>
+          </p:nvPr>
+        </p:nvSpPr>
+        <p:spPr>
+          <a:xfrm>
+            <a:off x="8610599" y="6356350"/>
+            <a:ext cx="3135001" cy="365125"/>
+          </a:xfrm>
+        </p:spPr>
+        <p:txBody>
+          <a:bodyPr/>
+          <a:lstStyle/>
+          <a:p>
+            <a:fld id="{7FEFBAB6-26D0-44D8-BD53-612461CE1ACC}" type="slidenum">
+              <a:rPr lang="de-DE" smtClean="0"/>
+              <a:t>‹#›</a:t>
+            </a:fld>
+            <a:endParaRPr lang="de-DE"/>
+          </a:p>
+        </p:txBody>
+      </p:sp>
     </p:spTree>
   </p:cSld>
 </p:sld>
@@ -15241,6 +16592,40 @@
           </a:p>
         </p:txBody>
       </p:sp>
+      <p:sp>
+        <p:nvSpPr>
+          <p:cNvPr id="6" name="Slide Number Placeholder 5">
+            <a:extLst>
+              <a:ext uri="{FF2B5EF4-FFF2-40B4-BE49-F238E27FC236}">
+                <a16:creationId xmlns:a16="http://schemas.microsoft.com/office/drawing/2014/main" id="{5F33F24B-1A9E-2EAF-F2AB-89426454DEE9}"/>
+              </a:ext>
+            </a:extLst>
+          </p:cNvPr>
+          <p:cNvSpPr>
+            <a:spLocks noGrp="1"/>
+          </p:cNvSpPr>
+          <p:nvPr>
+            <p:ph idx="12" sz="quarter" type="sldNum"/>
+          </p:nvPr>
+        </p:nvSpPr>
+        <p:spPr>
+          <a:xfrm>
+            <a:off x="8610599" y="6356350"/>
+            <a:ext cx="3135001" cy="365125"/>
+          </a:xfrm>
+        </p:spPr>
+        <p:txBody>
+          <a:bodyPr/>
+          <a:lstStyle/>
+          <a:p>
+            <a:fld id="{7FEFBAB6-26D0-44D8-BD53-612461CE1ACC}" type="slidenum">
+              <a:rPr lang="de-DE" smtClean="0"/>
+              <a:t>‹#›</a:t>
+            </a:fld>
+            <a:endParaRPr lang="de-DE"/>
+          </a:p>
+        </p:txBody>
+      </p:sp>
     </p:spTree>
   </p:cSld>
 </p:sld>
@@ -15327,6 +16712,40 @@
               <a:rPr/>
               <a:t>I am very familiar and have worked with it extensively.</a:t>
             </a:r>
+          </a:p>
+        </p:txBody>
+      </p:sp>
+      <p:sp>
+        <p:nvSpPr>
+          <p:cNvPr id="6" name="Slide Number Placeholder 5">
+            <a:extLst>
+              <a:ext uri="{FF2B5EF4-FFF2-40B4-BE49-F238E27FC236}">
+                <a16:creationId xmlns:a16="http://schemas.microsoft.com/office/drawing/2014/main" id="{5F33F24B-1A9E-2EAF-F2AB-89426454DEE9}"/>
+              </a:ext>
+            </a:extLst>
+          </p:cNvPr>
+          <p:cNvSpPr>
+            <a:spLocks noGrp="1"/>
+          </p:cNvSpPr>
+          <p:nvPr>
+            <p:ph idx="12" sz="quarter" type="sldNum"/>
+          </p:nvPr>
+        </p:nvSpPr>
+        <p:spPr>
+          <a:xfrm>
+            <a:off x="8610599" y="6356350"/>
+            <a:ext cx="3135001" cy="365125"/>
+          </a:xfrm>
+        </p:spPr>
+        <p:txBody>
+          <a:bodyPr/>
+          <a:lstStyle/>
+          <a:p>
+            <a:fld id="{7FEFBAB6-26D0-44D8-BD53-612461CE1ACC}" type="slidenum">
+              <a:rPr lang="de-DE" smtClean="0"/>
+              <a:t>‹#›</a:t>
+            </a:fld>
+            <a:endParaRPr lang="de-DE"/>
           </a:p>
         </p:txBody>
       </p:sp>
@@ -15661,44 +17080,44 @@
         <a:sysClr val="window" lastClr="FFFFFF"/>
       </a:lt1>
       <a:dk2>
-        <a:srgbClr val="44546A"/>
+        <a:srgbClr val="0E2841"/>
       </a:dk2>
       <a:lt2>
-        <a:srgbClr val="E7E6E6"/>
+        <a:srgbClr val="E8E8E8"/>
       </a:lt2>
       <a:accent1>
-        <a:srgbClr val="5B9BD5"/>
+        <a:srgbClr val="156082"/>
       </a:accent1>
       <a:accent2>
-        <a:srgbClr val="ED7D31"/>
+        <a:srgbClr val="E97132"/>
       </a:accent2>
       <a:accent3>
-        <a:srgbClr val="A5A5A5"/>
+        <a:srgbClr val="196B24"/>
       </a:accent3>
       <a:accent4>
-        <a:srgbClr val="FFC000"/>
+        <a:srgbClr val="0F9ED5"/>
       </a:accent4>
       <a:accent5>
-        <a:srgbClr val="4472C4"/>
+        <a:srgbClr val="A02B93"/>
       </a:accent5>
       <a:accent6>
-        <a:srgbClr val="70AD47"/>
+        <a:srgbClr val="4EA72E"/>
       </a:accent6>
       <a:hlink>
-        <a:srgbClr val="0563C1"/>
+        <a:srgbClr val="467886"/>
       </a:hlink>
       <a:folHlink>
-        <a:srgbClr val="954F72"/>
+        <a:srgbClr val="96607D"/>
       </a:folHlink>
     </a:clrScheme>
     <a:fontScheme name="Office">
       <a:majorFont>
-        <a:latin typeface="Calibri Light" panose="020F0302020204030204"/>
+        <a:latin typeface="Aptos Display" panose="02110004020202020204"/>
         <a:ea typeface=""/>
         <a:cs typeface=""/>
-        <a:font script="Jpan" typeface="ＭＳ Ｐゴシック"/>
+        <a:font script="Jpan" typeface="游ゴシック Light"/>
         <a:font script="Hang" typeface="맑은 고딕"/>
-        <a:font script="Hans" typeface="宋体"/>
+        <a:font script="Hans" typeface="等线 Light"/>
         <a:font script="Hant" typeface="新細明體"/>
         <a:font script="Arab" typeface="Times New Roman"/>
         <a:font script="Hebr" typeface="Times New Roman"/>
@@ -15726,14 +17145,31 @@
         <a:font script="Viet" typeface="Times New Roman"/>
         <a:font script="Uigh" typeface="Microsoft Uighur"/>
         <a:font script="Geor" typeface="Sylfaen"/>
+        <a:font script="Armn" typeface="Arial"/>
+        <a:font script="Bugi" typeface="Leelawadee UI"/>
+        <a:font script="Bopo" typeface="Microsoft JhengHei"/>
+        <a:font script="Java" typeface="Javanese Text"/>
+        <a:font script="Lisu" typeface="Segoe UI"/>
+        <a:font script="Mymr" typeface="Myanmar Text"/>
+        <a:font script="Nkoo" typeface="Ebrima"/>
+        <a:font script="Olck" typeface="Nirmala UI"/>
+        <a:font script="Osma" typeface="Ebrima"/>
+        <a:font script="Phag" typeface="Phagspa"/>
+        <a:font script="Syrn" typeface="Estrangelo Edessa"/>
+        <a:font script="Syrj" typeface="Estrangelo Edessa"/>
+        <a:font script="Syre" typeface="Estrangelo Edessa"/>
+        <a:font script="Sora" typeface="Nirmala UI"/>
+        <a:font script="Tale" typeface="Microsoft Tai Le"/>
+        <a:font script="Talu" typeface="Microsoft New Tai Lue"/>
+        <a:font script="Tfng" typeface="Ebrima"/>
       </a:majorFont>
       <a:minorFont>
-        <a:latin typeface="Calibri" panose="020F0502020204030204"/>
+        <a:latin typeface="Aptos" panose="02110004020202020204"/>
         <a:ea typeface=""/>
         <a:cs typeface=""/>
-        <a:font script="Jpan" typeface="ＭＳ Ｐゴシック"/>
+        <a:font script="Jpan" typeface="游ゴシック"/>
         <a:font script="Hang" typeface="맑은 고딕"/>
-        <a:font script="Hans" typeface="宋体"/>
+        <a:font script="Hans" typeface="等线"/>
         <a:font script="Hant" typeface="新細明體"/>
         <a:font script="Arab" typeface="Arial"/>
         <a:font script="Hebr" typeface="Arial"/>
@@ -15761,6 +17197,23 @@
         <a:font script="Viet" typeface="Arial"/>
         <a:font script="Uigh" typeface="Microsoft Uighur"/>
         <a:font script="Geor" typeface="Sylfaen"/>
+        <a:font script="Armn" typeface="Arial"/>
+        <a:font script="Bugi" typeface="Leelawadee UI"/>
+        <a:font script="Bopo" typeface="Microsoft JhengHei"/>
+        <a:font script="Java" typeface="Javanese Text"/>
+        <a:font script="Lisu" typeface="Segoe UI"/>
+        <a:font script="Mymr" typeface="Myanmar Text"/>
+        <a:font script="Nkoo" typeface="Ebrima"/>
+        <a:font script="Olck" typeface="Nirmala UI"/>
+        <a:font script="Osma" typeface="Ebrima"/>
+        <a:font script="Phag" typeface="Phagspa"/>
+        <a:font script="Syrn" typeface="Estrangelo Edessa"/>
+        <a:font script="Syrj" typeface="Estrangelo Edessa"/>
+        <a:font script="Syre" typeface="Estrangelo Edessa"/>
+        <a:font script="Sora" typeface="Nirmala UI"/>
+        <a:font script="Tale" typeface="Microsoft Tai Le"/>
+        <a:font script="Talu" typeface="Microsoft New Tai Lue"/>
+        <a:font script="Tfng" typeface="Ebrima"/>
       </a:minorFont>
     </a:fontScheme>
     <a:fmtScheme name="Office">
@@ -15822,13 +17275,6 @@
         </a:gradFill>
       </a:fillStyleLst>
       <a:lnStyleLst>
-        <a:ln w="6350" cap="flat" cmpd="sng" algn="ctr">
-          <a:solidFill>
-            <a:schemeClr val="phClr"/>
-          </a:solidFill>
-          <a:prstDash val="solid"/>
-          <a:miter lim="800000"/>
-        </a:ln>
         <a:ln w="12700" cap="flat" cmpd="sng" algn="ctr">
           <a:solidFill>
             <a:schemeClr val="phClr"/>
@@ -15837,6 +17283,13 @@
           <a:miter lim="800000"/>
         </a:ln>
         <a:ln w="19050" cap="flat" cmpd="sng" algn="ctr">
+          <a:solidFill>
+            <a:schemeClr val="phClr"/>
+          </a:solidFill>
+          <a:prstDash val="solid"/>
+          <a:miter lim="800000"/>
+        </a:ln>
+        <a:ln w="25400" cap="flat" cmpd="sng" algn="ctr">
           <a:solidFill>
             <a:schemeClr val="phClr"/>
           </a:solidFill>
@@ -15901,11 +17354,31 @@
       </a:bgFillStyleLst>
     </a:fmtScheme>
   </a:themeElements>
-  <a:objectDefaults/>
+  <a:objectDefaults>
+    <a:lnDef>
+      <a:spPr/>
+      <a:bodyPr/>
+      <a:lstStyle/>
+      <a:style>
+        <a:lnRef idx="2">
+          <a:schemeClr val="accent1"/>
+        </a:lnRef>
+        <a:fillRef idx="0">
+          <a:schemeClr val="accent1"/>
+        </a:fillRef>
+        <a:effectRef idx="1">
+          <a:schemeClr val="accent1"/>
+        </a:effectRef>
+        <a:fontRef idx="minor">
+          <a:schemeClr val="tx1"/>
+        </a:fontRef>
+      </a:style>
+    </a:lnDef>
+  </a:objectDefaults>
   <a:extraClrSchemeLst/>
   <a:extLst>
     <a:ext uri="{05A4C25C-085E-4340-85A3-A5531E510DB2}">
-      <thm15:themeFamily xmlns:thm15="http://schemas.microsoft.com/office/thememl/2012/main" name="Office Theme" id="{62F939B6-93AF-4DB8-9C6B-D6C7DFDC589F}" vid="{4A3C46E8-61CC-4603-A589-7422A47A8E4A}"/>
+      <thm15:themeFamily xmlns:thm15="http://schemas.microsoft.com/office/thememl/2012/main" name="Office Theme" id="{2E142A2C-CD16-42D6-873A-C26D2A0506FA}" vid="{1BDDFF52-6CD6-40A5-AB3C-68EB2F1E4D0A}"/>
     </a:ext>
   </a:extLst>
 </a:theme>

--- a/index.pptx
+++ b/index.pptx
@@ -5,7 +5,7 @@
     <p:sldMasterId id="2147483648" r:id="rId1"/>
   </p:sldMasterIdLst>
   <p:notesMasterIdLst>
-    <p:notesMasterId r:id="rId43"/>
+    <p:notesMasterId r:id="rId45"/>
   </p:notesMasterIdLst>
   <p:sldIdLst>
     <p:sldId id="256" r:id="rId2"/>
@@ -49,6 +49,8 @@
     <p:sldId id="294" r:id="rId40"/>
     <p:sldId id="295" r:id="rId41"/>
     <p:sldId id="296" r:id="rId42"/>
+    <p:sldId id="297" r:id="rId43"/>
+    <p:sldId id="298" r:id="rId44"/>
   </p:sldIdLst>
   <p:sldSz cx="12192000" cy="6858000"/>
   <p:notesSz cx="6858000" cy="9144000"/>
@@ -579,7 +581,7 @@
           <a:p>
             <a:fld id="{1335DC12-1F25-3F4F-8976-F7B9B059DA07}" type="slidenum">
               <a:rPr lang="en-US"/>
-              <a:t>3</a:t>
+              <a:t>5</a:t>
             </a:fld>
             <a:endParaRPr lang="en-US"/>
           </a:p>
@@ -706,7 +708,7 @@
           <a:p>
             <a:fld id="{1335DC12-1F25-3F4F-8976-F7B9B059DA07}" type="slidenum">
               <a:rPr lang="en-US"/>
-              <a:t>15</a:t>
+              <a:t>17</a:t>
             </a:fld>
             <a:endParaRPr lang="en-US"/>
           </a:p>
@@ -847,7 +849,7 @@
           <a:p>
             <a:fld id="{1335DC12-1F25-3F4F-8976-F7B9B059DA07}" type="slidenum">
               <a:rPr lang="en-US"/>
-              <a:t>16</a:t>
+              <a:t>18</a:t>
             </a:fld>
             <a:endParaRPr lang="en-US"/>
           </a:p>
@@ -994,7 +996,7 @@
           <a:p>
             <a:fld id="{1335DC12-1F25-3F4F-8976-F7B9B059DA07}" type="slidenum">
               <a:rPr lang="en-US"/>
-              <a:t>17</a:t>
+              <a:t>19</a:t>
             </a:fld>
             <a:endParaRPr lang="en-US"/>
           </a:p>
@@ -1131,7 +1133,7 @@
           <a:p>
             <a:fld id="{1335DC12-1F25-3F4F-8976-F7B9B059DA07}" type="slidenum">
               <a:rPr lang="en-US"/>
-              <a:t>18</a:t>
+              <a:t>20</a:t>
             </a:fld>
             <a:endParaRPr lang="en-US"/>
           </a:p>
@@ -1231,7 +1233,7 @@
           <a:p>
             <a:fld id="{1335DC12-1F25-3F4F-8976-F7B9B059DA07}" type="slidenum">
               <a:rPr lang="en-US"/>
-              <a:t>19</a:t>
+              <a:t>21</a:t>
             </a:fld>
             <a:endParaRPr lang="en-US"/>
           </a:p>
@@ -1407,7 +1409,7 @@
           <a:p>
             <a:fld id="{1335DC12-1F25-3F4F-8976-F7B9B059DA07}" type="slidenum">
               <a:rPr lang="en-US"/>
-              <a:t>20</a:t>
+              <a:t>22</a:t>
             </a:fld>
             <a:endParaRPr lang="en-US"/>
           </a:p>
@@ -1517,7 +1519,7 @@
           <a:p>
             <a:fld id="{1335DC12-1F25-3F4F-8976-F7B9B059DA07}" type="slidenum">
               <a:rPr lang="en-US"/>
-              <a:t>21</a:t>
+              <a:t>23</a:t>
             </a:fld>
             <a:endParaRPr lang="en-US"/>
           </a:p>
@@ -1621,7 +1623,7 @@
           <a:p>
             <a:fld id="{1335DC12-1F25-3F4F-8976-F7B9B059DA07}" type="slidenum">
               <a:rPr lang="en-US"/>
-              <a:t>22</a:t>
+              <a:t>24</a:t>
             </a:fld>
             <a:endParaRPr lang="en-US"/>
           </a:p>
@@ -1793,7 +1795,7 @@
           <a:p>
             <a:fld id="{1335DC12-1F25-3F4F-8976-F7B9B059DA07}" type="slidenum">
               <a:rPr lang="en-US"/>
-              <a:t>23</a:t>
+              <a:t>25</a:t>
             </a:fld>
             <a:endParaRPr lang="en-US"/>
           </a:p>
@@ -1975,7 +1977,7 @@
           <a:p>
             <a:fld id="{1335DC12-1F25-3F4F-8976-F7B9B059DA07}" type="slidenum">
               <a:rPr lang="en-US"/>
-              <a:t>24</a:t>
+              <a:t>26</a:t>
             </a:fld>
             <a:endParaRPr lang="en-US"/>
           </a:p>
@@ -2079,7 +2081,7 @@
           <a:p>
             <a:fld id="{1335DC12-1F25-3F4F-8976-F7B9B059DA07}" type="slidenum">
               <a:rPr lang="en-US"/>
-              <a:t>5</a:t>
+              <a:t>7</a:t>
             </a:fld>
             <a:endParaRPr lang="en-US"/>
           </a:p>
@@ -2183,7 +2185,7 @@
           <a:p>
             <a:fld id="{1335DC12-1F25-3F4F-8976-F7B9B059DA07}" type="slidenum">
               <a:rPr lang="en-US"/>
-              <a:t>25</a:t>
+              <a:t>27</a:t>
             </a:fld>
             <a:endParaRPr lang="en-US"/>
           </a:p>
@@ -2307,7 +2309,7 @@
           <a:p>
             <a:fld id="{1335DC12-1F25-3F4F-8976-F7B9B059DA07}" type="slidenum">
               <a:rPr lang="en-US"/>
-              <a:t>27</a:t>
+              <a:t>29</a:t>
             </a:fld>
             <a:endParaRPr lang="en-US"/>
           </a:p>
@@ -2443,7 +2445,7 @@
           <a:p>
             <a:fld id="{1335DC12-1F25-3F4F-8976-F7B9B059DA07}" type="slidenum">
               <a:rPr lang="en-US"/>
-              <a:t>28</a:t>
+              <a:t>30</a:t>
             </a:fld>
             <a:endParaRPr lang="en-US"/>
           </a:p>
@@ -2547,7 +2549,7 @@
           <a:p>
             <a:fld id="{1335DC12-1F25-3F4F-8976-F7B9B059DA07}" type="slidenum">
               <a:rPr lang="en-US"/>
-              <a:t>29</a:t>
+              <a:t>31</a:t>
             </a:fld>
             <a:endParaRPr lang="en-US"/>
           </a:p>
@@ -2693,7 +2695,7 @@
           <a:p>
             <a:fld id="{1335DC12-1F25-3F4F-8976-F7B9B059DA07}" type="slidenum">
               <a:rPr lang="en-US"/>
-              <a:t>30</a:t>
+              <a:t>32</a:t>
             </a:fld>
             <a:endParaRPr lang="en-US"/>
           </a:p>
@@ -2922,7 +2924,7 @@
           <a:p>
             <a:fld id="{1335DC12-1F25-3F4F-8976-F7B9B059DA07}" type="slidenum">
               <a:rPr lang="en-US"/>
-              <a:t>31</a:t>
+              <a:t>33</a:t>
             </a:fld>
             <a:endParaRPr lang="en-US"/>
           </a:p>
@@ -3045,7 +3047,7 @@
           <a:p>
             <a:fld id="{1335DC12-1F25-3F4F-8976-F7B9B059DA07}" type="slidenum">
               <a:rPr lang="en-US"/>
-              <a:t>32</a:t>
+              <a:t>34</a:t>
             </a:fld>
             <a:endParaRPr lang="en-US"/>
           </a:p>
@@ -3163,7 +3165,7 @@
           <a:p>
             <a:fld id="{1335DC12-1F25-3F4F-8976-F7B9B059DA07}" type="slidenum">
               <a:rPr lang="en-US"/>
-              <a:t>33</a:t>
+              <a:t>35</a:t>
             </a:fld>
             <a:endParaRPr lang="en-US"/>
           </a:p>
@@ -3257,7 +3259,7 @@
           <a:p>
             <a:fld id="{1335DC12-1F25-3F4F-8976-F7B9B059DA07}" type="slidenum">
               <a:rPr lang="en-US"/>
-              <a:t>34</a:t>
+              <a:t>36</a:t>
             </a:fld>
             <a:endParaRPr lang="en-US"/>
           </a:p>
@@ -3381,7 +3383,7 @@
           <a:p>
             <a:fld id="{1335DC12-1F25-3F4F-8976-F7B9B059DA07}" type="slidenum">
               <a:rPr lang="en-US"/>
-              <a:t>37</a:t>
+              <a:t>39</a:t>
             </a:fld>
             <a:endParaRPr lang="en-US"/>
           </a:p>
@@ -3485,7 +3487,7 @@
           <a:p>
             <a:fld id="{1335DC12-1F25-3F4F-8976-F7B9B059DA07}" type="slidenum">
               <a:rPr lang="en-US"/>
-              <a:t>6</a:t>
+              <a:t>8</a:t>
             </a:fld>
             <a:endParaRPr lang="en-US"/>
           </a:p>
@@ -3607,7 +3609,7 @@
           <a:p>
             <a:fld id="{1335DC12-1F25-3F4F-8976-F7B9B059DA07}" type="slidenum">
               <a:rPr lang="en-US"/>
-              <a:t>40</a:t>
+              <a:t>42</a:t>
             </a:fld>
             <a:endParaRPr lang="en-US"/>
           </a:p>
@@ -3763,7 +3765,7 @@
           <a:p>
             <a:fld id="{1335DC12-1F25-3F4F-8976-F7B9B059DA07}" type="slidenum">
               <a:rPr lang="en-US"/>
-              <a:t>7</a:t>
+              <a:t>9</a:t>
             </a:fld>
             <a:endParaRPr lang="en-US"/>
           </a:p>
@@ -3895,7 +3897,7 @@
           <a:p>
             <a:fld id="{1335DC12-1F25-3F4F-8976-F7B9B059DA07}" type="slidenum">
               <a:rPr lang="en-US"/>
-              <a:t>8</a:t>
+              <a:t>10</a:t>
             </a:fld>
             <a:endParaRPr lang="en-US"/>
           </a:p>
@@ -3999,7 +4001,7 @@
           <a:p>
             <a:fld id="{1335DC12-1F25-3F4F-8976-F7B9B059DA07}" type="slidenum">
               <a:rPr lang="en-US"/>
-              <a:t>11</a:t>
+              <a:t>13</a:t>
             </a:fld>
             <a:endParaRPr lang="en-US"/>
           </a:p>
@@ -4131,7 +4133,7 @@
           <a:p>
             <a:fld id="{1335DC12-1F25-3F4F-8976-F7B9B059DA07}" type="slidenum">
               <a:rPr lang="en-US"/>
-              <a:t>12</a:t>
+              <a:t>14</a:t>
             </a:fld>
             <a:endParaRPr lang="en-US"/>
           </a:p>
@@ -4253,7 +4255,7 @@
           <a:p>
             <a:fld id="{1335DC12-1F25-3F4F-8976-F7B9B059DA07}" type="slidenum">
               <a:rPr lang="en-US"/>
-              <a:t>13</a:t>
+              <a:t>15</a:t>
             </a:fld>
             <a:endParaRPr lang="en-US"/>
           </a:p>
@@ -4376,7 +4378,7 @@
           <a:p>
             <a:fld id="{1335DC12-1F25-3F4F-8976-F7B9B059DA07}" type="slidenum">
               <a:rPr lang="en-US"/>
-              <a:t>14</a:t>
+              <a:t>16</a:t>
             </a:fld>
             <a:endParaRPr lang="en-US"/>
           </a:p>
@@ -8348,84 +8350,36 @@
       </p:grpSpPr>
       <p:sp>
         <p:nvSpPr>
-          <p:cNvPr id="3" name="Content Placeholder 2">
-            <a:extLst>
-              <a:ext uri="{FF2B5EF4-FFF2-40B4-BE49-F238E27FC236}">
-                <a16:creationId xmlns:a16="http://schemas.microsoft.com/office/drawing/2014/main" id="{372FA590-20E9-0368-85B4-90C26598F852}"/>
-              </a:ext>
-            </a:extLst>
-          </p:cNvPr>
-          <p:cNvSpPr>
-            <a:spLocks noGrp="1"/>
-          </p:cNvSpPr>
-          <p:nvPr>
-            <p:ph idx="1"/>
-          </p:nvPr>
-        </p:nvSpPr>
-        <p:spPr/>
-        <p:txBody>
-          <a:bodyPr/>
-          <a:lstStyle/>
-          <a:p>
-            <a:pPr lvl="0" indent="0" marL="0">
-              <a:buNone/>
-            </a:pPr>
-            <a:r>
-              <a:rPr b="1"/>
-              <a:t>How confident do you feel with the Zotero workflow of collection, organisation, and citing?</a:t>
-            </a:r>
-            <a:r>
-              <a:rPr/>
-              <a:t> </a:t>
-            </a:r>
-            <a:r>
-              <a:rPr i="1"/>
-              <a:t>(1 = Not confident at all, 5 = Very confident)</a:t>
-            </a:r>
-          </a:p>
-          <a:p>
-            <a:pPr lvl="0" indent="-457200" marL="457200">
-              <a:buAutoNum type="alphaLcPeriod"/>
-            </a:pPr>
-            <a:r>
-              <a:rPr/>
-              <a:t>1</a:t>
-            </a:r>
-          </a:p>
-          <a:p>
-            <a:pPr lvl="0" indent="-457200" marL="457200">
-              <a:buAutoNum type="alphaLcPeriod"/>
-            </a:pPr>
-            <a:r>
-              <a:rPr/>
-              <a:t>2</a:t>
-            </a:r>
-          </a:p>
-          <a:p>
-            <a:pPr lvl="0" indent="-457200" marL="457200">
-              <a:buAutoNum type="alphaLcPeriod"/>
-            </a:pPr>
-            <a:r>
-              <a:rPr/>
-              <a:t>3</a:t>
-            </a:r>
-          </a:p>
-          <a:p>
-            <a:pPr lvl="0" indent="-457200" marL="457200">
-              <a:buAutoNum type="alphaLcPeriod"/>
-            </a:pPr>
-            <a:r>
-              <a:rPr/>
-              <a:t>4</a:t>
-            </a:r>
-          </a:p>
-          <a:p>
-            <a:pPr lvl="0" indent="-457200" marL="457200">
-              <a:buAutoNum type="alphaLcPeriod"/>
-            </a:pPr>
-            <a:r>
-              <a:rPr/>
-              <a:t>5</a:t>
+          <p:cNvPr id="2" name="Title 1">
+            <a:extLst>
+              <a:ext uri="{FF2B5EF4-FFF2-40B4-BE49-F238E27FC236}">
+                <a16:creationId xmlns:a16="http://schemas.microsoft.com/office/drawing/2014/main" id="{6BF04AE0-F94F-A586-34B8-68D9CAB6C6D1}"/>
+              </a:ext>
+            </a:extLst>
+          </p:cNvPr>
+          <p:cNvSpPr>
+            <a:spLocks noGrp="1"/>
+          </p:cNvSpPr>
+          <p:nvPr>
+            <p:ph type="title"/>
+          </p:nvPr>
+        </p:nvSpPr>
+        <p:spPr>
+          <a:xfrm>
+            <a:off x="2295524" y="432532"/>
+            <a:ext cx="9450077" cy="825501"/>
+          </a:xfrm>
+        </p:spPr>
+        <p:txBody>
+          <a:bodyPr/>
+          <a:lstStyle/>
+          <a:p>
+            <a:pPr lvl="0" indent="0" marL="0">
+              <a:buNone/>
+            </a:pPr>
+            <a:r>
+              <a:rPr/>
+              <a:t>Before we start: Survey time!</a:t>
             </a:r>
           </a:p>
         </p:txBody>
@@ -8488,42 +8442,6 @@
       </p:grpSpPr>
       <p:sp>
         <p:nvSpPr>
-          <p:cNvPr id="2" name="Title 1">
-            <a:extLst>
-              <a:ext uri="{FF2B5EF4-FFF2-40B4-BE49-F238E27FC236}">
-                <a16:creationId xmlns:a16="http://schemas.microsoft.com/office/drawing/2014/main" id="{6BF04AE0-F94F-A586-34B8-68D9CAB6C6D1}"/>
-              </a:ext>
-            </a:extLst>
-          </p:cNvPr>
-          <p:cNvSpPr>
-            <a:spLocks noGrp="1"/>
-          </p:cNvSpPr>
-          <p:nvPr>
-            <p:ph type="title"/>
-          </p:nvPr>
-        </p:nvSpPr>
-        <p:spPr>
-          <a:xfrm>
-            <a:off x="2295524" y="432532"/>
-            <a:ext cx="9450077" cy="825501"/>
-          </a:xfrm>
-        </p:spPr>
-        <p:txBody>
-          <a:bodyPr/>
-          <a:lstStyle/>
-          <a:p>
-            <a:pPr lvl="0" indent="0" marL="0">
-              <a:buNone/>
-            </a:pPr>
-            <a:r>
-              <a:rPr/>
-              <a:t>Discussion of survey results</a:t>
-            </a:r>
-          </a:p>
-        </p:txBody>
-      </p:sp>
-      <p:sp>
-        <p:nvSpPr>
           <p:cNvPr id="3" name="Content Placeholder 2">
             <a:extLst>
               <a:ext uri="{FF2B5EF4-FFF2-40B4-BE49-F238E27FC236}">
@@ -8548,7 +8466,43 @@
             </a:pPr>
             <a:r>
               <a:rPr b="1"/>
-              <a:t>What do we see in the results?</a:t>
+              <a:t>What is your level of familiarity with citing and referencing scientific papers?</a:t>
+            </a:r>
+          </a:p>
+          <a:p>
+            <a:pPr lvl="0" indent="-457200" marL="457200">
+              <a:buAutoNum type="alphaLcPeriod"/>
+            </a:pPr>
+            <a:r>
+              <a:rPr/>
+              <a:t>I have never heard of it before.</a:t>
+            </a:r>
+          </a:p>
+          <a:p>
+            <a:pPr lvl="0" indent="-457200" marL="457200">
+              <a:buAutoNum type="alphaLcPeriod"/>
+            </a:pPr>
+            <a:r>
+              <a:rPr/>
+              <a:t>I have heard of it but have never worked with it.</a:t>
+            </a:r>
+          </a:p>
+          <a:p>
+            <a:pPr lvl="0" indent="-457200" marL="457200">
+              <a:buAutoNum type="alphaLcPeriod"/>
+            </a:pPr>
+            <a:r>
+              <a:rPr/>
+              <a:t>I have basic understanding and experience with it.</a:t>
+            </a:r>
+          </a:p>
+          <a:p>
+            <a:pPr lvl="0" indent="-457200" marL="457200">
+              <a:buAutoNum type="alphaLcPeriod"/>
+            </a:pPr>
+            <a:r>
+              <a:rPr/>
+              <a:t>I am very familiar and have worked with it extensively.</a:t>
             </a:r>
           </a:p>
         </p:txBody>
@@ -8611,6 +8565,146 @@
       </p:grpSpPr>
       <p:sp>
         <p:nvSpPr>
+          <p:cNvPr id="3" name="Content Placeholder 2">
+            <a:extLst>
+              <a:ext uri="{FF2B5EF4-FFF2-40B4-BE49-F238E27FC236}">
+                <a16:creationId xmlns:a16="http://schemas.microsoft.com/office/drawing/2014/main" id="{372FA590-20E9-0368-85B4-90C26598F852}"/>
+              </a:ext>
+            </a:extLst>
+          </p:cNvPr>
+          <p:cNvSpPr>
+            <a:spLocks noGrp="1"/>
+          </p:cNvSpPr>
+          <p:nvPr>
+            <p:ph idx="1"/>
+          </p:nvPr>
+        </p:nvSpPr>
+        <p:spPr/>
+        <p:txBody>
+          <a:bodyPr/>
+          <a:lstStyle/>
+          <a:p>
+            <a:pPr lvl="0" indent="0" marL="0">
+              <a:buNone/>
+            </a:pPr>
+            <a:r>
+              <a:rPr b="1"/>
+              <a:t>How confident do you feel with the Zotero workflow of collection, organisation, and citing?</a:t>
+            </a:r>
+            <a:r>
+              <a:rPr/>
+              <a:t> </a:t>
+            </a:r>
+            <a:r>
+              <a:rPr i="1"/>
+              <a:t>(1 = Not confident at all, 5 = Very confident)</a:t>
+            </a:r>
+          </a:p>
+          <a:p>
+            <a:pPr lvl="0" indent="-457200" marL="457200">
+              <a:buAutoNum type="alphaLcPeriod"/>
+            </a:pPr>
+            <a:r>
+              <a:rPr/>
+              <a:t>1</a:t>
+            </a:r>
+          </a:p>
+          <a:p>
+            <a:pPr lvl="0" indent="-457200" marL="457200">
+              <a:buAutoNum type="alphaLcPeriod"/>
+            </a:pPr>
+            <a:r>
+              <a:rPr/>
+              <a:t>2</a:t>
+            </a:r>
+          </a:p>
+          <a:p>
+            <a:pPr lvl="0" indent="-457200" marL="457200">
+              <a:buAutoNum type="alphaLcPeriod"/>
+            </a:pPr>
+            <a:r>
+              <a:rPr/>
+              <a:t>3</a:t>
+            </a:r>
+          </a:p>
+          <a:p>
+            <a:pPr lvl="0" indent="-457200" marL="457200">
+              <a:buAutoNum type="alphaLcPeriod"/>
+            </a:pPr>
+            <a:r>
+              <a:rPr/>
+              <a:t>4</a:t>
+            </a:r>
+          </a:p>
+          <a:p>
+            <a:pPr lvl="0" indent="-457200" marL="457200">
+              <a:buAutoNum type="alphaLcPeriod"/>
+            </a:pPr>
+            <a:r>
+              <a:rPr/>
+              <a:t>5</a:t>
+            </a:r>
+          </a:p>
+        </p:txBody>
+      </p:sp>
+      <p:sp>
+        <p:nvSpPr>
+          <p:cNvPr id="6" name="Slide Number Placeholder 5">
+            <a:extLst>
+              <a:ext uri="{FF2B5EF4-FFF2-40B4-BE49-F238E27FC236}">
+                <a16:creationId xmlns:a16="http://schemas.microsoft.com/office/drawing/2014/main" id="{5F33F24B-1A9E-2EAF-F2AB-89426454DEE9}"/>
+              </a:ext>
+            </a:extLst>
+          </p:cNvPr>
+          <p:cNvSpPr>
+            <a:spLocks noGrp="1"/>
+          </p:cNvSpPr>
+          <p:nvPr>
+            <p:ph idx="12" sz="quarter" type="sldNum"/>
+          </p:nvPr>
+        </p:nvSpPr>
+        <p:spPr>
+          <a:xfrm>
+            <a:off x="8610599" y="6356350"/>
+            <a:ext cx="3135001" cy="365125"/>
+          </a:xfrm>
+        </p:spPr>
+        <p:txBody>
+          <a:bodyPr/>
+          <a:lstStyle/>
+          <a:p>
+            <a:fld id="{7FEFBAB6-26D0-44D8-BD53-612461CE1ACC}" type="slidenum">
+              <a:rPr lang="de-DE" smtClean="0"/>
+              <a:t>‹#›</a:t>
+            </a:fld>
+            <a:endParaRPr lang="de-DE"/>
+          </a:p>
+        </p:txBody>
+      </p:sp>
+    </p:spTree>
+  </p:cSld>
+</p:sld>
+</file>
+
+<file path=ppt/slides/slide13.xml><?xml version="1.0" encoding="utf-8"?>
+<p:sld xmlns:a="http://schemas.openxmlformats.org/drawingml/2006/main" xmlns:r="http://schemas.openxmlformats.org/officeDocument/2006/relationships" xmlns:p="http://schemas.openxmlformats.org/presentationml/2006/main">
+  <p:cSld>
+    <p:spTree>
+      <p:nvGrpSpPr>
+        <p:cNvPr id="1" name=""/>
+        <p:cNvGrpSpPr/>
+        <p:nvPr/>
+      </p:nvGrpSpPr>
+      <p:grpSpPr>
+        <a:xfrm>
+          <a:off x="0" y="0"/>
+          <a:ext cx="0" cy="0"/>
+          <a:chOff x="0" y="0"/>
+          <a:chExt cx="0" cy="0"/>
+        </a:xfrm>
+      </p:grpSpPr>
+      <p:sp>
+        <p:nvSpPr>
           <p:cNvPr id="2" name="Title 1">
             <a:extLst>
               <a:ext uri="{FF2B5EF4-FFF2-40B4-BE49-F238E27FC236}">
@@ -8640,7 +8734,7 @@
             </a:pPr>
             <a:r>
               <a:rPr/>
-              <a:t>Where are we at?</a:t>
+              <a:t>Discussion of survey results</a:t>
             </a:r>
           </a:p>
         </p:txBody>
@@ -8671,73 +8765,7 @@
             </a:pPr>
             <a:r>
               <a:rPr b="1"/>
-              <a:t>Previously</a:t>
-            </a:r>
-            <a:r>
-              <a:rPr/>
-              <a:t>:</a:t>
-            </a:r>
-          </a:p>
-          <a:p>
-            <a:pPr lvl="0"/>
-            <a:r>
-              <a:rPr/>
-              <a:t>Familiarization with R basics</a:t>
-            </a:r>
-          </a:p>
-          <a:p>
-            <a:pPr lvl="0"/>
-            <a:r>
-              <a:rPr/>
-              <a:t>Advanced R skills</a:t>
-            </a:r>
-          </a:p>
-          <a:p>
-            <a:pPr lvl="0"/>
-            <a:r>
-              <a:rPr/>
-              <a:t>Version control with Git</a:t>
-            </a:r>
-          </a:p>
-          <a:p>
-            <a:pPr lvl="0"/>
-            <a:r>
-              <a:rPr/>
-              <a:t>Collaborative working with GitHub</a:t>
-            </a:r>
-          </a:p>
-          <a:p>
-            <a:pPr lvl="0"/>
-            <a:r>
-              <a:rPr/>
-              <a:t>Introduction to Quarto</a:t>
-            </a:r>
-          </a:p>
-          <a:p>
-            <a:pPr lvl="0" indent="0" marL="0">
-              <a:buNone/>
-            </a:pPr>
-            <a:r>
-              <a:rPr b="1"/>
-              <a:t>Up next</a:t>
-            </a:r>
-            <a:r>
-              <a:rPr/>
-              <a:t>:</a:t>
-            </a:r>
-          </a:p>
-          <a:p>
-            <a:pPr lvl="0"/>
-            <a:r>
-              <a:rPr/>
-              <a:t>Citations and references: What are they and when/how to use them</a:t>
-            </a:r>
-          </a:p>
-          <a:p>
-            <a:pPr lvl="0"/>
-            <a:r>
-              <a:rPr/>
-              <a:t>Citation management tool: Using Zotero in our workflow</a:t>
+              <a:t>What do we see in the results?</a:t>
             </a:r>
           </a:p>
         </p:txBody>
@@ -8781,7 +8809,196 @@
 </p:sld>
 </file>
 
-<file path=ppt/slides/slide13.xml><?xml version="1.0" encoding="utf-8"?>
+<file path=ppt/slides/slide14.xml><?xml version="1.0" encoding="utf-8"?>
+<p:sld xmlns:a="http://schemas.openxmlformats.org/drawingml/2006/main" xmlns:r="http://schemas.openxmlformats.org/officeDocument/2006/relationships" xmlns:p="http://schemas.openxmlformats.org/presentationml/2006/main">
+  <p:cSld>
+    <p:spTree>
+      <p:nvGrpSpPr>
+        <p:cNvPr id="1" name=""/>
+        <p:cNvGrpSpPr/>
+        <p:nvPr/>
+      </p:nvGrpSpPr>
+      <p:grpSpPr>
+        <a:xfrm>
+          <a:off x="0" y="0"/>
+          <a:ext cx="0" cy="0"/>
+          <a:chOff x="0" y="0"/>
+          <a:chExt cx="0" cy="0"/>
+        </a:xfrm>
+      </p:grpSpPr>
+      <p:sp>
+        <p:nvSpPr>
+          <p:cNvPr id="2" name="Title 1">
+            <a:extLst>
+              <a:ext uri="{FF2B5EF4-FFF2-40B4-BE49-F238E27FC236}">
+                <a16:creationId xmlns:a16="http://schemas.microsoft.com/office/drawing/2014/main" id="{6BF04AE0-F94F-A586-34B8-68D9CAB6C6D1}"/>
+              </a:ext>
+            </a:extLst>
+          </p:cNvPr>
+          <p:cNvSpPr>
+            <a:spLocks noGrp="1"/>
+          </p:cNvSpPr>
+          <p:nvPr>
+            <p:ph type="title"/>
+          </p:nvPr>
+        </p:nvSpPr>
+        <p:spPr>
+          <a:xfrm>
+            <a:off x="2295524" y="432532"/>
+            <a:ext cx="9450077" cy="825501"/>
+          </a:xfrm>
+        </p:spPr>
+        <p:txBody>
+          <a:bodyPr/>
+          <a:lstStyle/>
+          <a:p>
+            <a:pPr lvl="0" indent="0" marL="0">
+              <a:buNone/>
+            </a:pPr>
+            <a:r>
+              <a:rPr/>
+              <a:t>Where are we at?</a:t>
+            </a:r>
+          </a:p>
+        </p:txBody>
+      </p:sp>
+      <p:sp>
+        <p:nvSpPr>
+          <p:cNvPr id="3" name="Content Placeholder 2">
+            <a:extLst>
+              <a:ext uri="{FF2B5EF4-FFF2-40B4-BE49-F238E27FC236}">
+                <a16:creationId xmlns:a16="http://schemas.microsoft.com/office/drawing/2014/main" id="{372FA590-20E9-0368-85B4-90C26598F852}"/>
+              </a:ext>
+            </a:extLst>
+          </p:cNvPr>
+          <p:cNvSpPr>
+            <a:spLocks noGrp="1"/>
+          </p:cNvSpPr>
+          <p:nvPr>
+            <p:ph idx="1"/>
+          </p:nvPr>
+        </p:nvSpPr>
+        <p:spPr/>
+        <p:txBody>
+          <a:bodyPr/>
+          <a:lstStyle/>
+          <a:p>
+            <a:pPr lvl="0" indent="0" marL="0">
+              <a:buNone/>
+            </a:pPr>
+            <a:r>
+              <a:rPr b="1"/>
+              <a:t>Previously</a:t>
+            </a:r>
+            <a:r>
+              <a:rPr/>
+              <a:t>:</a:t>
+            </a:r>
+          </a:p>
+          <a:p>
+            <a:pPr lvl="0"/>
+            <a:r>
+              <a:rPr/>
+              <a:t>Familiarization with R basics</a:t>
+            </a:r>
+          </a:p>
+          <a:p>
+            <a:pPr lvl="0"/>
+            <a:r>
+              <a:rPr/>
+              <a:t>Advanced R skills</a:t>
+            </a:r>
+          </a:p>
+          <a:p>
+            <a:pPr lvl="0"/>
+            <a:r>
+              <a:rPr/>
+              <a:t>Version control with Git</a:t>
+            </a:r>
+          </a:p>
+          <a:p>
+            <a:pPr lvl="0"/>
+            <a:r>
+              <a:rPr/>
+              <a:t>Collaborative working with GitHub</a:t>
+            </a:r>
+          </a:p>
+          <a:p>
+            <a:pPr lvl="0"/>
+            <a:r>
+              <a:rPr/>
+              <a:t>Introduction to Quarto</a:t>
+            </a:r>
+          </a:p>
+          <a:p>
+            <a:pPr lvl="0" indent="0" marL="0">
+              <a:buNone/>
+            </a:pPr>
+            <a:r>
+              <a:rPr b="1"/>
+              <a:t>Up next</a:t>
+            </a:r>
+            <a:r>
+              <a:rPr/>
+              <a:t>:</a:t>
+            </a:r>
+          </a:p>
+          <a:p>
+            <a:pPr lvl="0"/>
+            <a:r>
+              <a:rPr/>
+              <a:t>Citations and references: What are they and when/how to use them</a:t>
+            </a:r>
+          </a:p>
+          <a:p>
+            <a:pPr lvl="0"/>
+            <a:r>
+              <a:rPr/>
+              <a:t>Citation management tool: Using Zotero in our workflow</a:t>
+            </a:r>
+          </a:p>
+        </p:txBody>
+      </p:sp>
+      <p:sp>
+        <p:nvSpPr>
+          <p:cNvPr id="6" name="Slide Number Placeholder 5">
+            <a:extLst>
+              <a:ext uri="{FF2B5EF4-FFF2-40B4-BE49-F238E27FC236}">
+                <a16:creationId xmlns:a16="http://schemas.microsoft.com/office/drawing/2014/main" id="{5F33F24B-1A9E-2EAF-F2AB-89426454DEE9}"/>
+              </a:ext>
+            </a:extLst>
+          </p:cNvPr>
+          <p:cNvSpPr>
+            <a:spLocks noGrp="1"/>
+          </p:cNvSpPr>
+          <p:nvPr>
+            <p:ph idx="12" sz="quarter" type="sldNum"/>
+          </p:nvPr>
+        </p:nvSpPr>
+        <p:spPr>
+          <a:xfrm>
+            <a:off x="8610599" y="6356350"/>
+            <a:ext cx="3135001" cy="365125"/>
+          </a:xfrm>
+        </p:spPr>
+        <p:txBody>
+          <a:bodyPr/>
+          <a:lstStyle/>
+          <a:p>
+            <a:fld id="{7FEFBAB6-26D0-44D8-BD53-612461CE1ACC}" type="slidenum">
+              <a:rPr lang="de-DE" smtClean="0"/>
+              <a:t>‹#›</a:t>
+            </a:fld>
+            <a:endParaRPr lang="de-DE"/>
+          </a:p>
+        </p:txBody>
+      </p:sp>
+    </p:spTree>
+  </p:cSld>
+</p:sld>
+</file>
+
+<file path=ppt/slides/slide15.xml><?xml version="1.0" encoding="utf-8"?>
 <p:sld xmlns:a="http://schemas.openxmlformats.org/drawingml/2006/main" xmlns:r="http://schemas.openxmlformats.org/officeDocument/2006/relationships" xmlns:p="http://schemas.openxmlformats.org/presentationml/2006/main">
   <p:cSld>
     <p:spTree>
@@ -9228,7 +9445,7 @@
 </p:sld>
 </file>
 
-<file path=ppt/slides/slide14.xml><?xml version="1.0" encoding="utf-8"?>
+<file path=ppt/slides/slide16.xml><?xml version="1.0" encoding="utf-8"?>
 <p:sld xmlns:a="http://schemas.openxmlformats.org/drawingml/2006/main" xmlns:r="http://schemas.openxmlformats.org/officeDocument/2006/relationships" xmlns:p="http://schemas.openxmlformats.org/presentationml/2006/main">
   <p:cSld>
     <p:spTree>
@@ -9473,7 +9690,7 @@
 </p:sld>
 </file>
 
-<file path=ppt/slides/slide15.xml><?xml version="1.0" encoding="utf-8"?>
+<file path=ppt/slides/slide17.xml><?xml version="1.0" encoding="utf-8"?>
 <p:sld xmlns:a="http://schemas.openxmlformats.org/drawingml/2006/main" xmlns:r="http://schemas.openxmlformats.org/officeDocument/2006/relationships" xmlns:p="http://schemas.openxmlformats.org/presentationml/2006/main">
   <p:cSld>
     <p:spTree>
@@ -9636,7 +9853,7 @@
 </p:sld>
 </file>
 
-<file path=ppt/slides/slide16.xml><?xml version="1.0" encoding="utf-8"?>
+<file path=ppt/slides/slide18.xml><?xml version="1.0" encoding="utf-8"?>
 <p:sld xmlns:a="http://schemas.openxmlformats.org/drawingml/2006/main" xmlns:r="http://schemas.openxmlformats.org/officeDocument/2006/relationships" xmlns:p="http://schemas.openxmlformats.org/presentationml/2006/main">
   <p:cSld>
     <p:spTree>
@@ -9811,7 +10028,7 @@
 </p:sld>
 </file>
 
-<file path=ppt/slides/slide17.xml><?xml version="1.0" encoding="utf-8"?>
+<file path=ppt/slides/slide19.xml><?xml version="1.0" encoding="utf-8"?>
 <p:sld xmlns:a="http://schemas.openxmlformats.org/drawingml/2006/main" xmlns:r="http://schemas.openxmlformats.org/officeDocument/2006/relationships" xmlns:p="http://schemas.openxmlformats.org/presentationml/2006/main">
   <p:cSld>
     <p:spTree>
@@ -10215,7 +10432,154 @@
 </p:sld>
 </file>
 
-<file path=ppt/slides/slide18.xml><?xml version="1.0" encoding="utf-8"?>
+<file path=ppt/slides/slide2.xml><?xml version="1.0" encoding="utf-8"?>
+<p:sld xmlns:a="http://schemas.openxmlformats.org/drawingml/2006/main" xmlns:r="http://schemas.openxmlformats.org/officeDocument/2006/relationships" xmlns:p="http://schemas.openxmlformats.org/presentationml/2006/main">
+  <p:cSld>
+    <p:spTree>
+      <p:nvGrpSpPr>
+        <p:cNvPr id="1" name=""/>
+        <p:cNvGrpSpPr/>
+        <p:nvPr/>
+      </p:nvGrpSpPr>
+      <p:grpSpPr>
+        <a:xfrm>
+          <a:off x="0" y="0"/>
+          <a:ext cx="0" cy="0"/>
+          <a:chOff x="0" y="0"/>
+          <a:chExt cx="0" cy="0"/>
+        </a:xfrm>
+      </p:grpSpPr>
+      <p:sp>
+        <p:nvSpPr>
+          <p:cNvPr id="2" name="Title 1">
+            <a:extLst>
+              <a:ext uri="{FF2B5EF4-FFF2-40B4-BE49-F238E27FC236}">
+                <a16:creationId xmlns:a16="http://schemas.microsoft.com/office/drawing/2014/main" id="{6BF04AE0-F94F-A586-34B8-68D9CAB6C6D1}"/>
+              </a:ext>
+            </a:extLst>
+          </p:cNvPr>
+          <p:cNvSpPr>
+            <a:spLocks noGrp="1"/>
+          </p:cNvSpPr>
+          <p:nvPr>
+            <p:ph type="title"/>
+          </p:nvPr>
+        </p:nvSpPr>
+        <p:spPr>
+          <a:xfrm>
+            <a:off x="2295524" y="432532"/>
+            <a:ext cx="9450077" cy="825501"/>
+          </a:xfrm>
+        </p:spPr>
+        <p:txBody>
+          <a:bodyPr/>
+          <a:lstStyle/>
+          <a:p>
+            <a:pPr lvl="0" indent="0" marL="0">
+              <a:buNone/>
+            </a:pPr>
+            <a:r>
+              <a:rPr/>
+              <a:t>Testing Slide</a:t>
+            </a:r>
+          </a:p>
+        </p:txBody>
+      </p:sp>
+      <p:sp>
+        <p:nvSpPr>
+          <p:cNvPr id="3" name="Content Placeholder 2">
+            <a:extLst>
+              <a:ext uri="{FF2B5EF4-FFF2-40B4-BE49-F238E27FC236}">
+                <a16:creationId xmlns:a16="http://schemas.microsoft.com/office/drawing/2014/main" id="{372FA590-20E9-0368-85B4-90C26598F852}"/>
+              </a:ext>
+            </a:extLst>
+          </p:cNvPr>
+          <p:cNvSpPr>
+            <a:spLocks noGrp="1"/>
+          </p:cNvSpPr>
+          <p:nvPr>
+            <p:ph idx="1"/>
+          </p:nvPr>
+        </p:nvSpPr>
+        <p:spPr/>
+        <p:txBody>
+          <a:bodyPr/>
+          <a:lstStyle/>
+          <a:p>
+            <a:pPr lvl="0" indent="0" marL="1270000">
+              <a:buNone/>
+            </a:pPr>
+            <a:r>
+              <a:rPr sz="2000" b="1"/>
+              <a:t>Tip</a:t>
+            </a:r>
+          </a:p>
+          <a:p>
+            <a:pPr lvl="0" indent="0" marL="1270000">
+              <a:buNone/>
+            </a:pPr>
+            <a:r>
+              <a:rPr sz="2000"/>
+              <a:t>This is a callout box test</a:t>
+            </a:r>
+          </a:p>
+          <a:p>
+            <a:pPr lvl="0" indent="0" marL="0">
+              <a:buNone/>
+            </a:pPr>
+            <a:r>
+              <a:rPr/>
+              <a:t>Test citation </a:t>
+            </a:r>
+            <a:r>
+              <a:rPr>
+                <a:hlinkClick r:id="rId2" action="ppaction://hlinksldjump"/>
+              </a:rPr>
+              <a:t>Jackson (1990)</a:t>
+            </a:r>
+          </a:p>
+        </p:txBody>
+      </p:sp>
+      <p:sp>
+        <p:nvSpPr>
+          <p:cNvPr id="6" name="Slide Number Placeholder 5">
+            <a:extLst>
+              <a:ext uri="{FF2B5EF4-FFF2-40B4-BE49-F238E27FC236}">
+                <a16:creationId xmlns:a16="http://schemas.microsoft.com/office/drawing/2014/main" id="{5F33F24B-1A9E-2EAF-F2AB-89426454DEE9}"/>
+              </a:ext>
+            </a:extLst>
+          </p:cNvPr>
+          <p:cNvSpPr>
+            <a:spLocks noGrp="1"/>
+          </p:cNvSpPr>
+          <p:nvPr>
+            <p:ph idx="12" sz="quarter" type="sldNum"/>
+          </p:nvPr>
+        </p:nvSpPr>
+        <p:spPr>
+          <a:xfrm>
+            <a:off x="8610599" y="6356350"/>
+            <a:ext cx="3135001" cy="365125"/>
+          </a:xfrm>
+        </p:spPr>
+        <p:txBody>
+          <a:bodyPr/>
+          <a:lstStyle/>
+          <a:p>
+            <a:fld id="{7FEFBAB6-26D0-44D8-BD53-612461CE1ACC}" type="slidenum">
+              <a:rPr lang="de-DE" smtClean="0"/>
+              <a:t>‹#›</a:t>
+            </a:fld>
+            <a:endParaRPr lang="de-DE"/>
+          </a:p>
+        </p:txBody>
+      </p:sp>
+    </p:spTree>
+  </p:cSld>
+</p:sld>
+</file>
+
+<file path=ppt/slides/slide20.xml><?xml version="1.0" encoding="utf-8"?>
 <p:sld xmlns:a="http://schemas.openxmlformats.org/drawingml/2006/main" xmlns:r="http://schemas.openxmlformats.org/officeDocument/2006/relationships" xmlns:p="http://schemas.openxmlformats.org/presentationml/2006/main">
   <p:cSld>
     <p:spTree>
@@ -10742,7 +11106,7 @@
 </p:sld>
 </file>
 
-<file path=ppt/slides/slide19.xml><?xml version="1.0" encoding="utf-8"?>
+<file path=ppt/slides/slide21.xml><?xml version="1.0" encoding="utf-8"?>
 <p:sld xmlns:a="http://schemas.openxmlformats.org/drawingml/2006/main" xmlns:r="http://schemas.openxmlformats.org/officeDocument/2006/relationships" xmlns:p="http://schemas.openxmlformats.org/presentationml/2006/main">
   <p:cSld>
     <p:spTree>
@@ -10963,154 +11327,7 @@
 </p:sld>
 </file>
 
-<file path=ppt/slides/slide2.xml><?xml version="1.0" encoding="utf-8"?>
-<p:sld xmlns:a="http://schemas.openxmlformats.org/drawingml/2006/main" xmlns:r="http://schemas.openxmlformats.org/officeDocument/2006/relationships" xmlns:p="http://schemas.openxmlformats.org/presentationml/2006/main">
-  <p:cSld>
-    <p:spTree>
-      <p:nvGrpSpPr>
-        <p:cNvPr id="1" name=""/>
-        <p:cNvGrpSpPr/>
-        <p:nvPr/>
-      </p:nvGrpSpPr>
-      <p:grpSpPr>
-        <a:xfrm>
-          <a:off x="0" y="0"/>
-          <a:ext cx="0" cy="0"/>
-          <a:chOff x="0" y="0"/>
-          <a:chExt cx="0" cy="0"/>
-        </a:xfrm>
-      </p:grpSpPr>
-      <p:sp>
-        <p:nvSpPr>
-          <p:cNvPr id="2" name="Title 1">
-            <a:extLst>
-              <a:ext uri="{FF2B5EF4-FFF2-40B4-BE49-F238E27FC236}">
-                <a16:creationId xmlns:a16="http://schemas.microsoft.com/office/drawing/2014/main" id="{6BF04AE0-F94F-A586-34B8-68D9CAB6C6D1}"/>
-              </a:ext>
-            </a:extLst>
-          </p:cNvPr>
-          <p:cNvSpPr>
-            <a:spLocks noGrp="1"/>
-          </p:cNvSpPr>
-          <p:nvPr>
-            <p:ph type="title"/>
-          </p:nvPr>
-        </p:nvSpPr>
-        <p:spPr>
-          <a:xfrm>
-            <a:off x="2295524" y="432532"/>
-            <a:ext cx="9450077" cy="825501"/>
-          </a:xfrm>
-        </p:spPr>
-        <p:txBody>
-          <a:bodyPr/>
-          <a:lstStyle/>
-          <a:p>
-            <a:pPr lvl="0" indent="0" marL="0">
-              <a:buNone/>
-            </a:pPr>
-            <a:r>
-              <a:rPr/>
-              <a:t>Testing Slide</a:t>
-            </a:r>
-          </a:p>
-        </p:txBody>
-      </p:sp>
-      <p:sp>
-        <p:nvSpPr>
-          <p:cNvPr id="3" name="Content Placeholder 2">
-            <a:extLst>
-              <a:ext uri="{FF2B5EF4-FFF2-40B4-BE49-F238E27FC236}">
-                <a16:creationId xmlns:a16="http://schemas.microsoft.com/office/drawing/2014/main" id="{372FA590-20E9-0368-85B4-90C26598F852}"/>
-              </a:ext>
-            </a:extLst>
-          </p:cNvPr>
-          <p:cNvSpPr>
-            <a:spLocks noGrp="1"/>
-          </p:cNvSpPr>
-          <p:nvPr>
-            <p:ph idx="1"/>
-          </p:nvPr>
-        </p:nvSpPr>
-        <p:spPr/>
-        <p:txBody>
-          <a:bodyPr/>
-          <a:lstStyle/>
-          <a:p>
-            <a:pPr lvl="0" indent="0" marL="1270000">
-              <a:buNone/>
-            </a:pPr>
-            <a:r>
-              <a:rPr sz="2000" b="1"/>
-              <a:t>Tip</a:t>
-            </a:r>
-          </a:p>
-          <a:p>
-            <a:pPr lvl="0" indent="0" marL="1270000">
-              <a:buNone/>
-            </a:pPr>
-            <a:r>
-              <a:rPr sz="2000"/>
-              <a:t>This is a callout box test</a:t>
-            </a:r>
-          </a:p>
-          <a:p>
-            <a:pPr lvl="0" indent="0" marL="0">
-              <a:buNone/>
-            </a:pPr>
-            <a:r>
-              <a:rPr/>
-              <a:t>Test citation </a:t>
-            </a:r>
-            <a:r>
-              <a:rPr>
-                <a:hlinkClick r:id="rId2" action="ppaction://hlinksldjump"/>
-              </a:rPr>
-              <a:t>Jackson (1990)</a:t>
-            </a:r>
-          </a:p>
-        </p:txBody>
-      </p:sp>
-      <p:sp>
-        <p:nvSpPr>
-          <p:cNvPr id="6" name="Slide Number Placeholder 5">
-            <a:extLst>
-              <a:ext uri="{FF2B5EF4-FFF2-40B4-BE49-F238E27FC236}">
-                <a16:creationId xmlns:a16="http://schemas.microsoft.com/office/drawing/2014/main" id="{5F33F24B-1A9E-2EAF-F2AB-89426454DEE9}"/>
-              </a:ext>
-            </a:extLst>
-          </p:cNvPr>
-          <p:cNvSpPr>
-            <a:spLocks noGrp="1"/>
-          </p:cNvSpPr>
-          <p:nvPr>
-            <p:ph idx="12" sz="quarter" type="sldNum"/>
-          </p:nvPr>
-        </p:nvSpPr>
-        <p:spPr>
-          <a:xfrm>
-            <a:off x="8610599" y="6356350"/>
-            <a:ext cx="3135001" cy="365125"/>
-          </a:xfrm>
-        </p:spPr>
-        <p:txBody>
-          <a:bodyPr/>
-          <a:lstStyle/>
-          <a:p>
-            <a:fld id="{7FEFBAB6-26D0-44D8-BD53-612461CE1ACC}" type="slidenum">
-              <a:rPr lang="de-DE" smtClean="0"/>
-              <a:t>‹#›</a:t>
-            </a:fld>
-            <a:endParaRPr lang="de-DE"/>
-          </a:p>
-        </p:txBody>
-      </p:sp>
-    </p:spTree>
-  </p:cSld>
-</p:sld>
-</file>
-
-<file path=ppt/slides/slide20.xml><?xml version="1.0" encoding="utf-8"?>
+<file path=ppt/slides/slide22.xml><?xml version="1.0" encoding="utf-8"?>
 <p:sld xmlns:a="http://schemas.openxmlformats.org/drawingml/2006/main" xmlns:r="http://schemas.openxmlformats.org/officeDocument/2006/relationships" xmlns:p="http://schemas.openxmlformats.org/presentationml/2006/main">
   <p:cSld>
     <p:spTree>
@@ -11502,7 +11719,7 @@
 </p:sld>
 </file>
 
-<file path=ppt/slides/slide21.xml><?xml version="1.0" encoding="utf-8"?>
+<file path=ppt/slides/slide23.xml><?xml version="1.0" encoding="utf-8"?>
 <p:sld xmlns:a="http://schemas.openxmlformats.org/drawingml/2006/main" xmlns:r="http://schemas.openxmlformats.org/officeDocument/2006/relationships" xmlns:p="http://schemas.openxmlformats.org/presentationml/2006/main">
   <p:cSld>
     <p:spTree>
@@ -11822,7 +12039,7 @@
 </p:sld>
 </file>
 
-<file path=ppt/slides/slide22.xml><?xml version="1.0" encoding="utf-8"?>
+<file path=ppt/slides/slide24.xml><?xml version="1.0" encoding="utf-8"?>
 <p:sld xmlns:a="http://schemas.openxmlformats.org/drawingml/2006/main" xmlns:r="http://schemas.openxmlformats.org/officeDocument/2006/relationships" xmlns:p="http://schemas.openxmlformats.org/presentationml/2006/main">
   <p:cSld>
     <p:spTree>
@@ -11953,7 +12170,7 @@
 </p:sld>
 </file>
 
-<file path=ppt/slides/slide23.xml><?xml version="1.0" encoding="utf-8"?>
+<file path=ppt/slides/slide25.xml><?xml version="1.0" encoding="utf-8"?>
 <p:sld xmlns:a="http://schemas.openxmlformats.org/drawingml/2006/main" xmlns:r="http://schemas.openxmlformats.org/officeDocument/2006/relationships" xmlns:p="http://schemas.openxmlformats.org/presentationml/2006/main">
   <p:cSld>
     <p:spTree>
@@ -12135,7 +12352,7 @@
 </p:sld>
 </file>
 
-<file path=ppt/slides/slide24.xml><?xml version="1.0" encoding="utf-8"?>
+<file path=ppt/slides/slide26.xml><?xml version="1.0" encoding="utf-8"?>
 <p:sld xmlns:a="http://schemas.openxmlformats.org/drawingml/2006/main" xmlns:r="http://schemas.openxmlformats.org/officeDocument/2006/relationships" xmlns:p="http://schemas.openxmlformats.org/presentationml/2006/main">
   <p:cSld>
     <p:spTree>
@@ -12668,7 +12885,7 @@
 </p:sld>
 </file>
 
-<file path=ppt/slides/slide25.xml><?xml version="1.0" encoding="utf-8"?>
+<file path=ppt/slides/slide27.xml><?xml version="1.0" encoding="utf-8"?>
 <p:sld xmlns:a="http://schemas.openxmlformats.org/drawingml/2006/main" xmlns:r="http://schemas.openxmlformats.org/officeDocument/2006/relationships" xmlns:p="http://schemas.openxmlformats.org/presentationml/2006/main">
   <p:cSld>
     <p:spTree>
@@ -12760,7 +12977,7 @@
 </p:sld>
 </file>
 
-<file path=ppt/slides/slide26.xml><?xml version="1.0" encoding="utf-8"?>
+<file path=ppt/slides/slide28.xml><?xml version="1.0" encoding="utf-8"?>
 <p:sld xmlns:a="http://schemas.openxmlformats.org/drawingml/2006/main" xmlns:r="http://schemas.openxmlformats.org/officeDocument/2006/relationships" xmlns:p="http://schemas.openxmlformats.org/presentationml/2006/main">
   <p:cSld>
     <p:spTree>
@@ -12852,7 +13069,7 @@
 </p:sld>
 </file>
 
-<file path=ppt/slides/slide27.xml><?xml version="1.0" encoding="utf-8"?>
+<file path=ppt/slides/slide29.xml><?xml version="1.0" encoding="utf-8"?>
 <p:sld xmlns:a="http://schemas.openxmlformats.org/drawingml/2006/main" xmlns:r="http://schemas.openxmlformats.org/officeDocument/2006/relationships" xmlns:p="http://schemas.openxmlformats.org/presentationml/2006/main">
   <p:cSld>
     <p:spTree>
@@ -13179,7 +13396,99 @@
 </p:sld>
 </file>
 
-<file path=ppt/slides/slide28.xml><?xml version="1.0" encoding="utf-8"?>
+<file path=ppt/slides/slide3.xml><?xml version="1.0" encoding="utf-8"?>
+<p:sld xmlns:a="http://schemas.openxmlformats.org/drawingml/2006/main" xmlns:r="http://schemas.openxmlformats.org/officeDocument/2006/relationships" xmlns:p="http://schemas.openxmlformats.org/presentationml/2006/main">
+  <p:cSld>
+    <p:spTree>
+      <p:nvGrpSpPr>
+        <p:cNvPr id="1" name=""/>
+        <p:cNvGrpSpPr/>
+        <p:nvPr/>
+      </p:nvGrpSpPr>
+      <p:grpSpPr>
+        <a:xfrm>
+          <a:off x="0" y="0"/>
+          <a:ext cx="0" cy="0"/>
+          <a:chOff x="0" y="0"/>
+          <a:chExt cx="0" cy="0"/>
+        </a:xfrm>
+      </p:grpSpPr>
+      <p:sp>
+        <p:nvSpPr>
+          <p:cNvPr id="2" name="Title 1">
+            <a:extLst>
+              <a:ext uri="{FF2B5EF4-FFF2-40B4-BE49-F238E27FC236}">
+                <a16:creationId xmlns:a16="http://schemas.microsoft.com/office/drawing/2014/main" id="{125F7DD1-BC99-F967-7E0D-AD07C61B1543}"/>
+              </a:ext>
+            </a:extLst>
+          </p:cNvPr>
+          <p:cNvSpPr>
+            <a:spLocks noGrp="1"/>
+          </p:cNvSpPr>
+          <p:nvPr>
+            <p:ph type="title"/>
+          </p:nvPr>
+        </p:nvSpPr>
+        <p:spPr>
+          <a:xfrm>
+            <a:off x="831850" y="1709738"/>
+            <a:ext cx="10515600" cy="2852737"/>
+          </a:xfrm>
+        </p:spPr>
+        <p:txBody>
+          <a:bodyPr/>
+          <a:lstStyle/>
+          <a:p>
+            <a:pPr lvl="0" indent="0" marL="0">
+              <a:buNone/>
+            </a:pPr>
+            <a:r>
+              <a:rPr/>
+              <a:t>Section Header?</a:t>
+            </a:r>
+          </a:p>
+        </p:txBody>
+      </p:sp>
+      <p:sp>
+        <p:nvSpPr>
+          <p:cNvPr id="6" name="Slide Number Placeholder 5">
+            <a:extLst>
+              <a:ext uri="{FF2B5EF4-FFF2-40B4-BE49-F238E27FC236}">
+                <a16:creationId xmlns:a16="http://schemas.microsoft.com/office/drawing/2014/main" id="{B93C94A4-D223-C226-398A-59B1A3955C6C}"/>
+              </a:ext>
+            </a:extLst>
+          </p:cNvPr>
+          <p:cNvSpPr>
+            <a:spLocks noGrp="1"/>
+          </p:cNvSpPr>
+          <p:nvPr>
+            <p:ph idx="12" sz="quarter" type="sldNum"/>
+          </p:nvPr>
+        </p:nvSpPr>
+        <p:spPr>
+          <a:xfrm>
+            <a:off x="8610599" y="6356350"/>
+            <a:ext cx="3135001" cy="365125"/>
+          </a:xfrm>
+        </p:spPr>
+        <p:txBody>
+          <a:bodyPr/>
+          <a:lstStyle/>
+          <a:p>
+            <a:fld id="{7FEFBAB6-26D0-44D8-BD53-612461CE1ACC}" type="slidenum">
+              <a:rPr lang="de-DE" smtClean="0"/>
+              <a:t>‹#›</a:t>
+            </a:fld>
+            <a:endParaRPr lang="de-DE"/>
+          </a:p>
+        </p:txBody>
+      </p:sp>
+    </p:spTree>
+  </p:cSld>
+</p:sld>
+</file>
+
+<file path=ppt/slides/slide30.xml><?xml version="1.0" encoding="utf-8"?>
 <p:sld xmlns:a="http://schemas.openxmlformats.org/drawingml/2006/main" xmlns:r="http://schemas.openxmlformats.org/officeDocument/2006/relationships" xmlns:p="http://schemas.openxmlformats.org/presentationml/2006/main">
   <p:cSld>
     <p:spTree>
@@ -13301,545 +13610,6 @@
 </p:sld>
 </file>
 
-<file path=ppt/slides/slide29.xml><?xml version="1.0" encoding="utf-8"?>
-<p:sld xmlns:a="http://schemas.openxmlformats.org/drawingml/2006/main" xmlns:r="http://schemas.openxmlformats.org/officeDocument/2006/relationships" xmlns:p="http://schemas.openxmlformats.org/presentationml/2006/main">
-  <p:cSld>
-    <p:spTree>
-      <p:nvGrpSpPr>
-        <p:cNvPr id="1" name=""/>
-        <p:cNvGrpSpPr/>
-        <p:nvPr/>
-      </p:nvGrpSpPr>
-      <p:grpSpPr>
-        <a:xfrm>
-          <a:off x="0" y="0"/>
-          <a:ext cx="0" cy="0"/>
-          <a:chOff x="0" y="0"/>
-          <a:chExt cx="0" cy="0"/>
-        </a:xfrm>
-      </p:grpSpPr>
-      <p:sp>
-        <p:nvSpPr>
-          <p:cNvPr id="2" name="Title 1">
-            <a:extLst>
-              <a:ext uri="{FF2B5EF4-FFF2-40B4-BE49-F238E27FC236}">
-                <a16:creationId xmlns:a16="http://schemas.microsoft.com/office/drawing/2014/main" id="{6BF04AE0-F94F-A586-34B8-68D9CAB6C6D1}"/>
-              </a:ext>
-            </a:extLst>
-          </p:cNvPr>
-          <p:cNvSpPr>
-            <a:spLocks noGrp="1"/>
-          </p:cNvSpPr>
-          <p:nvPr>
-            <p:ph type="title"/>
-          </p:nvPr>
-        </p:nvSpPr>
-        <p:spPr>
-          <a:xfrm>
-            <a:off x="2295524" y="432532"/>
-            <a:ext cx="9450077" cy="825501"/>
-          </a:xfrm>
-        </p:spPr>
-        <p:txBody>
-          <a:bodyPr/>
-          <a:lstStyle/>
-          <a:p>
-            <a:pPr lvl="0" indent="0" marL="0">
-              <a:buNone/>
-            </a:pPr>
-            <a:r>
-              <a:rPr/>
-              <a:t>Your turn!</a:t>
-            </a:r>
-          </a:p>
-        </p:txBody>
-      </p:sp>
-      <p:sp>
-        <p:nvSpPr>
-          <p:cNvPr id="3" name="Content Placeholder 2">
-            <a:extLst>
-              <a:ext uri="{FF2B5EF4-FFF2-40B4-BE49-F238E27FC236}">
-                <a16:creationId xmlns:a16="http://schemas.microsoft.com/office/drawing/2014/main" id="{372FA590-20E9-0368-85B4-90C26598F852}"/>
-              </a:ext>
-            </a:extLst>
-          </p:cNvPr>
-          <p:cNvSpPr>
-            <a:spLocks noGrp="1"/>
-          </p:cNvSpPr>
-          <p:nvPr>
-            <p:ph idx="1"/>
-          </p:nvPr>
-        </p:nvSpPr>
-        <p:spPr/>
-        <p:txBody>
-          <a:bodyPr/>
-          <a:lstStyle/>
-          <a:p>
-            <a:pPr lvl="0" indent="0" marL="0">
-              <a:buNone/>
-            </a:pPr>
-            <a:r>
-              <a:rPr/>
-              <a:t>In this next part, you will familiarize yourself with </a:t>
-            </a:r>
-            <a:r>
-              <a:rPr b="1"/>
-              <a:t>Zotero</a:t>
-            </a:r>
-            <a:r>
-              <a:rPr/>
-              <a:t> through </a:t>
-            </a:r>
-            <a:r>
-              <a:rPr b="1"/>
-              <a:t>hands-on exercices and activities</a:t>
-            </a:r>
-            <a:r>
-              <a:rPr/>
-              <a:t>:</a:t>
-            </a:r>
-          </a:p>
-          <a:p>
-            <a:pPr lvl="0"/>
-            <a:r>
-              <a:rPr/>
-              <a:t>Click here: </a:t>
-            </a:r>
-            <a:r>
-              <a:rPr>
-                <a:hlinkClick r:id="rId3"/>
-              </a:rPr>
-              <a:t>Zotero: Hands-on practical activities</a:t>
-            </a:r>
-          </a:p>
-          <a:p>
-            <a:pPr lvl="0"/>
-            <a:r>
-              <a:rPr/>
-              <a:t>Or follow: </a:t>
-            </a:r>
-            <a:r>
-              <a:rPr>
-                <a:hlinkClick r:id="rId4"/>
-              </a:rPr>
-              <a:t>https://lmu-osc.github.io/introduction-to-zotero/background/zotero_basics.html</a:t>
-            </a:r>
-          </a:p>
-          <a:p>
-            <a:pPr lvl="0" indent="0" marL="0">
-              <a:buNone/>
-            </a:pPr>
-            <a:r>
-              <a:rPr b="1"/>
-              <a:t>Tip:</a:t>
-            </a:r>
-          </a:p>
-          <a:p>
-            <a:pPr lvl="0" indent="0" marL="0">
-              <a:buNone/>
-            </a:pPr>
-            <a:r>
-              <a:rPr/>
-              <a:t>Since this is a self-paced tutorial, </a:t>
-            </a:r>
-            <a:r>
-              <a:rPr i="1"/>
-              <a:t>take your time</a:t>
-            </a:r>
-            <a:r>
-              <a:rPr/>
-              <a:t> on navigating it; and it can be finished at home as well. We will have a </a:t>
-            </a:r>
-            <a:r>
-              <a:rPr b="1"/>
-              <a:t>check-in moment</a:t>
-            </a:r>
-            <a:r>
-              <a:rPr/>
-              <a:t> at the end of this session and discuss any remaining questions.</a:t>
-            </a:r>
-          </a:p>
-        </p:txBody>
-      </p:sp>
-      <p:sp>
-        <p:nvSpPr>
-          <p:cNvPr id="6" name="Slide Number Placeholder 5">
-            <a:extLst>
-              <a:ext uri="{FF2B5EF4-FFF2-40B4-BE49-F238E27FC236}">
-                <a16:creationId xmlns:a16="http://schemas.microsoft.com/office/drawing/2014/main" id="{5F33F24B-1A9E-2EAF-F2AB-89426454DEE9}"/>
-              </a:ext>
-            </a:extLst>
-          </p:cNvPr>
-          <p:cNvSpPr>
-            <a:spLocks noGrp="1"/>
-          </p:cNvSpPr>
-          <p:nvPr>
-            <p:ph idx="12" sz="quarter" type="sldNum"/>
-          </p:nvPr>
-        </p:nvSpPr>
-        <p:spPr>
-          <a:xfrm>
-            <a:off x="8610599" y="6356350"/>
-            <a:ext cx="3135001" cy="365125"/>
-          </a:xfrm>
-        </p:spPr>
-        <p:txBody>
-          <a:bodyPr/>
-          <a:lstStyle/>
-          <a:p>
-            <a:fld id="{7FEFBAB6-26D0-44D8-BD53-612461CE1ACC}" type="slidenum">
-              <a:rPr lang="de-DE" smtClean="0"/>
-              <a:t>‹#›</a:t>
-            </a:fld>
-            <a:endParaRPr lang="de-DE"/>
-          </a:p>
-        </p:txBody>
-      </p:sp>
-    </p:spTree>
-  </p:cSld>
-</p:sld>
-</file>
-
-<file path=ppt/slides/slide3.xml><?xml version="1.0" encoding="utf-8"?>
-<p:sld xmlns:a="http://schemas.openxmlformats.org/drawingml/2006/main" xmlns:r="http://schemas.openxmlformats.org/officeDocument/2006/relationships" xmlns:p="http://schemas.openxmlformats.org/presentationml/2006/main">
-  <p:cSld>
-    <p:spTree>
-      <p:nvGrpSpPr>
-        <p:cNvPr id="1" name=""/>
-        <p:cNvGrpSpPr/>
-        <p:nvPr/>
-      </p:nvGrpSpPr>
-      <p:grpSpPr>
-        <a:xfrm>
-          <a:off x="0" y="0"/>
-          <a:ext cx="0" cy="0"/>
-          <a:chOff x="0" y="0"/>
-          <a:chExt cx="0" cy="0"/>
-        </a:xfrm>
-      </p:grpSpPr>
-      <p:sp>
-        <p:nvSpPr>
-          <p:cNvPr id="2" name="Title 1">
-            <a:extLst>
-              <a:ext uri="{FF2B5EF4-FFF2-40B4-BE49-F238E27FC236}">
-                <a16:creationId xmlns:a16="http://schemas.microsoft.com/office/drawing/2014/main" id="{6BF04AE0-F94F-A586-34B8-68D9CAB6C6D1}"/>
-              </a:ext>
-            </a:extLst>
-          </p:cNvPr>
-          <p:cNvSpPr>
-            <a:spLocks noGrp="1"/>
-          </p:cNvSpPr>
-          <p:nvPr>
-            <p:ph type="title"/>
-          </p:nvPr>
-        </p:nvSpPr>
-        <p:spPr>
-          <a:xfrm>
-            <a:off x="2295524" y="432532"/>
-            <a:ext cx="9450077" cy="825501"/>
-          </a:xfrm>
-        </p:spPr>
-        <p:txBody>
-          <a:bodyPr/>
-          <a:lstStyle/>
-          <a:p>
-            <a:pPr lvl="0" indent="0" marL="0">
-              <a:buNone/>
-            </a:pPr>
-            <a:r>
-              <a:rPr/>
-              <a:t>Licence</a:t>
-            </a:r>
-          </a:p>
-        </p:txBody>
-      </p:sp>
-      <p:sp>
-        <p:nvSpPr>
-          <p:cNvPr id="3" name="Content Placeholder 2">
-            <a:extLst>
-              <a:ext uri="{FF2B5EF4-FFF2-40B4-BE49-F238E27FC236}">
-                <a16:creationId xmlns:a16="http://schemas.microsoft.com/office/drawing/2014/main" id="{372FA590-20E9-0368-85B4-90C26598F852}"/>
-              </a:ext>
-            </a:extLst>
-          </p:cNvPr>
-          <p:cNvSpPr>
-            <a:spLocks noGrp="1"/>
-          </p:cNvSpPr>
-          <p:nvPr>
-            <p:ph idx="1"/>
-          </p:nvPr>
-        </p:nvSpPr>
-        <p:spPr/>
-        <p:txBody>
-          <a:bodyPr/>
-          <a:lstStyle/>
-          <a:p>
-            <a:pPr lvl="0" indent="0" marL="0">
-              <a:buNone/>
-            </a:pPr>
-            <a:r>
-              <a:rPr/>
-              <a:t>This work was originally created by Pat Callahan and Dejana Damjanovic under a CC-BY-SA 4.0 </a:t>
-            </a:r>
-            <a:r>
-              <a:rPr>
-                <a:hlinkClick r:id="rId3"/>
-              </a:rPr>
-              <a:t>Creative Commons Attribution 4.0 International License</a:t>
-            </a:r>
-            <a:r>
-              <a:rPr/>
-              <a:t> and a CC0 1.0 </a:t>
-            </a:r>
-            <a:r>
-              <a:rPr>
-                <a:hlinkClick r:id="rId4"/>
-              </a:rPr>
-              <a:t>Creative Commons Universal</a:t>
-            </a:r>
-            <a:r>
-              <a:rPr/>
-              <a:t> licence for code snippets. It was subsequently adapted and revised by </a:t>
-            </a:r>
-            <a:r>
-              <a:rPr>
-                <a:hlinkClick r:id="rId5"/>
-              </a:rPr>
-              <a:t>Sarah von Grebmer zu Wolfsthurn</a:t>
-            </a:r>
-            <a:r>
-              <a:rPr/>
-              <a:t>. This current work by </a:t>
-            </a:r>
-            <a:r>
-              <a:rPr>
-                <a:hlinkClick r:id="rId6"/>
-              </a:rPr>
-              <a:t>Tejaswini Sharma</a:t>
-            </a:r>
-            <a:r>
-              <a:rPr/>
-              <a:t> and Sarah von Grebmer zu Wolfsthurn is licensed under a CC-BY-SA 4.0 </a:t>
-            </a:r>
-            <a:r>
-              <a:rPr>
-                <a:hlinkClick r:id="rId7"/>
-              </a:rPr>
-              <a:t>Creative Commons Attribution 4.0 International SA License</a:t>
-            </a:r>
-            <a:r>
-              <a:rPr/>
-              <a:t>. permits unrestricted re-use, distribution, and reproduction in any medium, provided the original work is properly cited. If you remix, transform, or build upon the material, you must distribute your contributions under the same license as the original. Code snippets are dedicated to the public domain and licenced under a CC0 1.0 </a:t>
-            </a:r>
-            <a:r>
-              <a:rPr>
-                <a:hlinkClick r:id="rId8"/>
-              </a:rPr>
-              <a:t>Creative Commons Universal Licence</a:t>
-            </a:r>
-            <a:r>
-              <a:rPr/>
-              <a:t>. You may use, modify, distribute, and sell the code snippets for any purpose, without permission or attribution. The code snippets are provided “as is”, without warranty of any kind.</a:t>
-            </a:r>
-          </a:p>
-        </p:txBody>
-      </p:sp>
-      <p:sp>
-        <p:nvSpPr>
-          <p:cNvPr id="6" name="Slide Number Placeholder 5">
-            <a:extLst>
-              <a:ext uri="{FF2B5EF4-FFF2-40B4-BE49-F238E27FC236}">
-                <a16:creationId xmlns:a16="http://schemas.microsoft.com/office/drawing/2014/main" id="{5F33F24B-1A9E-2EAF-F2AB-89426454DEE9}"/>
-              </a:ext>
-            </a:extLst>
-          </p:cNvPr>
-          <p:cNvSpPr>
-            <a:spLocks noGrp="1"/>
-          </p:cNvSpPr>
-          <p:nvPr>
-            <p:ph idx="12" sz="quarter" type="sldNum"/>
-          </p:nvPr>
-        </p:nvSpPr>
-        <p:spPr>
-          <a:xfrm>
-            <a:off x="8610599" y="6356350"/>
-            <a:ext cx="3135001" cy="365125"/>
-          </a:xfrm>
-        </p:spPr>
-        <p:txBody>
-          <a:bodyPr/>
-          <a:lstStyle/>
-          <a:p>
-            <a:fld id="{7FEFBAB6-26D0-44D8-BD53-612461CE1ACC}" type="slidenum">
-              <a:rPr lang="de-DE" smtClean="0"/>
-              <a:t>‹#›</a:t>
-            </a:fld>
-            <a:endParaRPr lang="de-DE"/>
-          </a:p>
-        </p:txBody>
-      </p:sp>
-    </p:spTree>
-  </p:cSld>
-</p:sld>
-</file>
-
-<file path=ppt/slides/slide30.xml><?xml version="1.0" encoding="utf-8"?>
-<p:sld xmlns:a="http://schemas.openxmlformats.org/drawingml/2006/main" xmlns:r="http://schemas.openxmlformats.org/officeDocument/2006/relationships" xmlns:p="http://schemas.openxmlformats.org/presentationml/2006/main">
-  <p:cSld>
-    <p:spTree>
-      <p:nvGrpSpPr>
-        <p:cNvPr id="1" name=""/>
-        <p:cNvGrpSpPr/>
-        <p:nvPr/>
-      </p:nvGrpSpPr>
-      <p:grpSpPr>
-        <a:xfrm>
-          <a:off x="0" y="0"/>
-          <a:ext cx="0" cy="0"/>
-          <a:chOff x="0" y="0"/>
-          <a:chExt cx="0" cy="0"/>
-        </a:xfrm>
-      </p:grpSpPr>
-      <p:sp>
-        <p:nvSpPr>
-          <p:cNvPr id="2" name="Title 1">
-            <a:extLst>
-              <a:ext uri="{FF2B5EF4-FFF2-40B4-BE49-F238E27FC236}">
-                <a16:creationId xmlns:a16="http://schemas.microsoft.com/office/drawing/2014/main" id="{6BF04AE0-F94F-A586-34B8-68D9CAB6C6D1}"/>
-              </a:ext>
-            </a:extLst>
-          </p:cNvPr>
-          <p:cNvSpPr>
-            <a:spLocks noGrp="1"/>
-          </p:cNvSpPr>
-          <p:nvPr>
-            <p:ph type="title"/>
-          </p:nvPr>
-        </p:nvSpPr>
-        <p:spPr>
-          <a:xfrm>
-            <a:off x="2295524" y="432532"/>
-            <a:ext cx="9450077" cy="825501"/>
-          </a:xfrm>
-        </p:spPr>
-        <p:txBody>
-          <a:bodyPr/>
-          <a:lstStyle/>
-          <a:p>
-            <a:pPr lvl="0" indent="0" marL="0">
-              <a:buNone/>
-            </a:pPr>
-            <a:r>
-              <a:rPr/>
-              <a:t>Wrapping up</a:t>
-            </a:r>
-          </a:p>
-        </p:txBody>
-      </p:sp>
-      <p:sp>
-        <p:nvSpPr>
-          <p:cNvPr id="3" name="Content Placeholder 2">
-            <a:extLst>
-              <a:ext uri="{FF2B5EF4-FFF2-40B4-BE49-F238E27FC236}">
-                <a16:creationId xmlns:a16="http://schemas.microsoft.com/office/drawing/2014/main" id="{372FA590-20E9-0368-85B4-90C26598F852}"/>
-              </a:ext>
-            </a:extLst>
-          </p:cNvPr>
-          <p:cNvSpPr>
-            <a:spLocks noGrp="1"/>
-          </p:cNvSpPr>
-          <p:nvPr>
-            <p:ph idx="1"/>
-          </p:nvPr>
-        </p:nvSpPr>
-        <p:spPr/>
-        <p:txBody>
-          <a:bodyPr/>
-          <a:lstStyle/>
-          <a:p>
-            <a:pPr lvl="0"/>
-            <a:r>
-              <a:rPr b="1"/>
-              <a:t>For later</a:t>
-            </a:r>
-            <a:r>
-              <a:rPr/>
-              <a:t>: Finish the remaining of the ‘Introduction to Zotero’ tutorial and its exercises at home.</a:t>
-            </a:r>
-          </a:p>
-          <a:p>
-            <a:pPr lvl="0"/>
-            <a:r>
-              <a:rPr b="1"/>
-              <a:t>For now</a:t>
-            </a:r>
-            <a:r>
-              <a:rPr/>
-              <a:t>: Take one minute to assess your learning progress from the tutorial:</a:t>
-            </a:r>
-          </a:p>
-          <a:p>
-            <a:pPr lvl="1"/>
-            <a:r>
-              <a:rPr/>
-              <a:t>What is one key concept about citations or Zotero that became clearer after completing the exercises?</a:t>
-            </a:r>
-          </a:p>
-          <a:p>
-            <a:pPr lvl="1"/>
-            <a:r>
-              <a:rPr/>
-              <a:t>Which Zotero task can you now perform confidently, and which one still feels challenging?</a:t>
-            </a:r>
-          </a:p>
-          <a:p>
-            <a:pPr lvl="1"/>
-            <a:r>
-              <a:rPr/>
-              <a:t>How easy has it been navigating different CSL formats?</a:t>
-            </a:r>
-          </a:p>
-        </p:txBody>
-      </p:sp>
-      <p:sp>
-        <p:nvSpPr>
-          <p:cNvPr id="6" name="Slide Number Placeholder 5">
-            <a:extLst>
-              <a:ext uri="{FF2B5EF4-FFF2-40B4-BE49-F238E27FC236}">
-                <a16:creationId xmlns:a16="http://schemas.microsoft.com/office/drawing/2014/main" id="{5F33F24B-1A9E-2EAF-F2AB-89426454DEE9}"/>
-              </a:ext>
-            </a:extLst>
-          </p:cNvPr>
-          <p:cNvSpPr>
-            <a:spLocks noGrp="1"/>
-          </p:cNvSpPr>
-          <p:nvPr>
-            <p:ph idx="12" sz="quarter" type="sldNum"/>
-          </p:nvPr>
-        </p:nvSpPr>
-        <p:spPr>
-          <a:xfrm>
-            <a:off x="8610599" y="6356350"/>
-            <a:ext cx="3135001" cy="365125"/>
-          </a:xfrm>
-        </p:spPr>
-        <p:txBody>
-          <a:bodyPr/>
-          <a:lstStyle/>
-          <a:p>
-            <a:fld id="{7FEFBAB6-26D0-44D8-BD53-612461CE1ACC}" type="slidenum">
-              <a:rPr lang="de-DE" smtClean="0"/>
-              <a:t>‹#›</a:t>
-            </a:fld>
-            <a:endParaRPr lang="de-DE"/>
-          </a:p>
-        </p:txBody>
-      </p:sp>
-    </p:spTree>
-  </p:cSld>
-</p:sld>
-</file>
-
 <file path=ppt/slides/slide31.xml><?xml version="1.0" encoding="utf-8"?>
 <p:sld xmlns:a="http://schemas.openxmlformats.org/drawingml/2006/main" xmlns:r="http://schemas.openxmlformats.org/officeDocument/2006/relationships" xmlns:p="http://schemas.openxmlformats.org/presentationml/2006/main">
   <p:cSld>
@@ -13888,7 +13658,7 @@
             </a:pPr>
             <a:r>
               <a:rPr/>
-              <a:t>Looking into the future</a:t>
+              <a:t>Your turn!</a:t>
             </a:r>
           </a:p>
         </p:txBody>
@@ -13914,66 +13684,88 @@
           <a:bodyPr/>
           <a:lstStyle/>
           <a:p>
-            <a:pPr lvl="0" indent="-457200" marL="457200">
-              <a:buAutoNum type="arabicPeriod"/>
-            </a:pPr>
+            <a:pPr lvl="0" indent="0" marL="0">
+              <a:buNone/>
+            </a:pPr>
+            <a:r>
+              <a:rPr/>
+              <a:t>In this next part, you will familiarize yourself with </a:t>
+            </a:r>
             <a:r>
               <a:rPr b="1"/>
-              <a:t>Take a minute to think about the following questions, first for yourself, then in a pair:</a:t>
+              <a:t>Zotero</a:t>
+            </a:r>
+            <a:r>
+              <a:rPr/>
+              <a:t> through </a:t>
+            </a:r>
+            <a:r>
+              <a:rPr b="1"/>
+              <a:t>hands-on exercices and activities</a:t>
+            </a:r>
+            <a:r>
+              <a:rPr/>
+              <a:t>:</a:t>
             </a:r>
           </a:p>
           <a:p>
             <a:pPr lvl="0"/>
             <a:r>
               <a:rPr/>
-              <a:t>Can you identify some </a:t>
-            </a:r>
+              <a:t>Click here: </a:t>
+            </a:r>
+            <a:r>
+              <a:rPr>
+                <a:hlinkClick r:id="rId3"/>
+              </a:rPr>
+              <a:t>Zotero: Hands-on practical activities</a:t>
+            </a:r>
+          </a:p>
+          <a:p>
+            <a:pPr lvl="0"/>
+            <a:r>
+              <a:rPr/>
+              <a:t>Or follow: </a:t>
+            </a:r>
+            <a:r>
+              <a:rPr>
+                <a:hlinkClick r:id="rId4"/>
+              </a:rPr>
+              <a:t>https://lmu-osc.github.io/introduction-to-zotero/background/zotero_basics.html</a:t>
+            </a:r>
+          </a:p>
+          <a:p>
+            <a:pPr lvl="0" indent="0" marL="0">
+              <a:buNone/>
+            </a:pPr>
             <a:r>
               <a:rPr b="1"/>
-              <a:t>practical benefits</a:t>
-            </a:r>
-            <a:r>
-              <a:rPr/>
-              <a:t> of using Zotero?</a:t>
-            </a:r>
-          </a:p>
-          <a:p>
-            <a:pPr lvl="0"/>
-            <a:r>
-              <a:rPr/>
-              <a:t>What </a:t>
+              <a:t>Tip:</a:t>
+            </a:r>
+          </a:p>
+          <a:p>
+            <a:pPr lvl="0" indent="0" marL="0">
+              <a:buNone/>
+            </a:pPr>
+            <a:r>
+              <a:rPr/>
+              <a:t>Since this is a self-paced tutorial, </a:t>
+            </a:r>
+            <a:r>
+              <a:rPr i="1"/>
+              <a:t>take your time</a:t>
+            </a:r>
+            <a:r>
+              <a:rPr/>
+              <a:t> on navigating it; and it can be finished at home as well. We will have a </a:t>
             </a:r>
             <a:r>
               <a:rPr b="1"/>
-              <a:t>obstacles</a:t>
-            </a:r>
-            <a:r>
-              <a:rPr/>
-              <a:t> do you anticipate in using it consistently?</a:t>
-            </a:r>
-          </a:p>
-          <a:p>
-            <a:pPr lvl="0"/>
-            <a:r>
-              <a:rPr/>
-              <a:t>How can Zotero support you in your </a:t>
-            </a:r>
-            <a:r>
-              <a:rPr b="1"/>
-              <a:t>upcoming projects</a:t>
-            </a:r>
-            <a:r>
-              <a:rPr/>
-              <a:t>?</a:t>
-            </a:r>
-          </a:p>
-          <a:p>
-            <a:pPr lvl="0" indent="-457200" marL="457200">
-              <a:buAutoNum startAt="2" type="arabicPeriod"/>
-            </a:pPr>
-            <a:r>
-              <a:rPr b="1"/>
-              <a:t>Share your thoughts with the group.</a:t>
+              <a:t>check-in moment</a:t>
+            </a:r>
+            <a:r>
+              <a:rPr/>
+              <a:t> at the end of this session and discuss any remaining questions.</a:t>
             </a:r>
           </a:p>
         </p:txBody>
@@ -14018,6 +13810,340 @@
 </file>
 
 <file path=ppt/slides/slide32.xml><?xml version="1.0" encoding="utf-8"?>
+<p:sld xmlns:a="http://schemas.openxmlformats.org/drawingml/2006/main" xmlns:r="http://schemas.openxmlformats.org/officeDocument/2006/relationships" xmlns:p="http://schemas.openxmlformats.org/presentationml/2006/main">
+  <p:cSld>
+    <p:spTree>
+      <p:nvGrpSpPr>
+        <p:cNvPr id="1" name=""/>
+        <p:cNvGrpSpPr/>
+        <p:nvPr/>
+      </p:nvGrpSpPr>
+      <p:grpSpPr>
+        <a:xfrm>
+          <a:off x="0" y="0"/>
+          <a:ext cx="0" cy="0"/>
+          <a:chOff x="0" y="0"/>
+          <a:chExt cx="0" cy="0"/>
+        </a:xfrm>
+      </p:grpSpPr>
+      <p:sp>
+        <p:nvSpPr>
+          <p:cNvPr id="2" name="Title 1">
+            <a:extLst>
+              <a:ext uri="{FF2B5EF4-FFF2-40B4-BE49-F238E27FC236}">
+                <a16:creationId xmlns:a16="http://schemas.microsoft.com/office/drawing/2014/main" id="{6BF04AE0-F94F-A586-34B8-68D9CAB6C6D1}"/>
+              </a:ext>
+            </a:extLst>
+          </p:cNvPr>
+          <p:cNvSpPr>
+            <a:spLocks noGrp="1"/>
+          </p:cNvSpPr>
+          <p:nvPr>
+            <p:ph type="title"/>
+          </p:nvPr>
+        </p:nvSpPr>
+        <p:spPr>
+          <a:xfrm>
+            <a:off x="2295524" y="432532"/>
+            <a:ext cx="9450077" cy="825501"/>
+          </a:xfrm>
+        </p:spPr>
+        <p:txBody>
+          <a:bodyPr/>
+          <a:lstStyle/>
+          <a:p>
+            <a:pPr lvl="0" indent="0" marL="0">
+              <a:buNone/>
+            </a:pPr>
+            <a:r>
+              <a:rPr/>
+              <a:t>Wrapping up</a:t>
+            </a:r>
+          </a:p>
+        </p:txBody>
+      </p:sp>
+      <p:sp>
+        <p:nvSpPr>
+          <p:cNvPr id="3" name="Content Placeholder 2">
+            <a:extLst>
+              <a:ext uri="{FF2B5EF4-FFF2-40B4-BE49-F238E27FC236}">
+                <a16:creationId xmlns:a16="http://schemas.microsoft.com/office/drawing/2014/main" id="{372FA590-20E9-0368-85B4-90C26598F852}"/>
+              </a:ext>
+            </a:extLst>
+          </p:cNvPr>
+          <p:cNvSpPr>
+            <a:spLocks noGrp="1"/>
+          </p:cNvSpPr>
+          <p:nvPr>
+            <p:ph idx="1"/>
+          </p:nvPr>
+        </p:nvSpPr>
+        <p:spPr/>
+        <p:txBody>
+          <a:bodyPr/>
+          <a:lstStyle/>
+          <a:p>
+            <a:pPr lvl="0"/>
+            <a:r>
+              <a:rPr b="1"/>
+              <a:t>For later</a:t>
+            </a:r>
+            <a:r>
+              <a:rPr/>
+              <a:t>: Finish the remaining of the ‘Introduction to Zotero’ tutorial and its exercises at home.</a:t>
+            </a:r>
+          </a:p>
+          <a:p>
+            <a:pPr lvl="0"/>
+            <a:r>
+              <a:rPr b="1"/>
+              <a:t>For now</a:t>
+            </a:r>
+            <a:r>
+              <a:rPr/>
+              <a:t>: Take one minute to assess your learning progress from the tutorial:</a:t>
+            </a:r>
+          </a:p>
+          <a:p>
+            <a:pPr lvl="1"/>
+            <a:r>
+              <a:rPr/>
+              <a:t>What is one key concept about citations or Zotero that became clearer after completing the exercises?</a:t>
+            </a:r>
+          </a:p>
+          <a:p>
+            <a:pPr lvl="1"/>
+            <a:r>
+              <a:rPr/>
+              <a:t>Which Zotero task can you now perform confidently, and which one still feels challenging?</a:t>
+            </a:r>
+          </a:p>
+          <a:p>
+            <a:pPr lvl="1"/>
+            <a:r>
+              <a:rPr/>
+              <a:t>How easy has it been navigating different CSL formats?</a:t>
+            </a:r>
+          </a:p>
+        </p:txBody>
+      </p:sp>
+      <p:sp>
+        <p:nvSpPr>
+          <p:cNvPr id="6" name="Slide Number Placeholder 5">
+            <a:extLst>
+              <a:ext uri="{FF2B5EF4-FFF2-40B4-BE49-F238E27FC236}">
+                <a16:creationId xmlns:a16="http://schemas.microsoft.com/office/drawing/2014/main" id="{5F33F24B-1A9E-2EAF-F2AB-89426454DEE9}"/>
+              </a:ext>
+            </a:extLst>
+          </p:cNvPr>
+          <p:cNvSpPr>
+            <a:spLocks noGrp="1"/>
+          </p:cNvSpPr>
+          <p:nvPr>
+            <p:ph idx="12" sz="quarter" type="sldNum"/>
+          </p:nvPr>
+        </p:nvSpPr>
+        <p:spPr>
+          <a:xfrm>
+            <a:off x="8610599" y="6356350"/>
+            <a:ext cx="3135001" cy="365125"/>
+          </a:xfrm>
+        </p:spPr>
+        <p:txBody>
+          <a:bodyPr/>
+          <a:lstStyle/>
+          <a:p>
+            <a:fld id="{7FEFBAB6-26D0-44D8-BD53-612461CE1ACC}" type="slidenum">
+              <a:rPr lang="de-DE" smtClean="0"/>
+              <a:t>‹#›</a:t>
+            </a:fld>
+            <a:endParaRPr lang="de-DE"/>
+          </a:p>
+        </p:txBody>
+      </p:sp>
+    </p:spTree>
+  </p:cSld>
+</p:sld>
+</file>
+
+<file path=ppt/slides/slide33.xml><?xml version="1.0" encoding="utf-8"?>
+<p:sld xmlns:a="http://schemas.openxmlformats.org/drawingml/2006/main" xmlns:r="http://schemas.openxmlformats.org/officeDocument/2006/relationships" xmlns:p="http://schemas.openxmlformats.org/presentationml/2006/main">
+  <p:cSld>
+    <p:spTree>
+      <p:nvGrpSpPr>
+        <p:cNvPr id="1" name=""/>
+        <p:cNvGrpSpPr/>
+        <p:nvPr/>
+      </p:nvGrpSpPr>
+      <p:grpSpPr>
+        <a:xfrm>
+          <a:off x="0" y="0"/>
+          <a:ext cx="0" cy="0"/>
+          <a:chOff x="0" y="0"/>
+          <a:chExt cx="0" cy="0"/>
+        </a:xfrm>
+      </p:grpSpPr>
+      <p:sp>
+        <p:nvSpPr>
+          <p:cNvPr id="2" name="Title 1">
+            <a:extLst>
+              <a:ext uri="{FF2B5EF4-FFF2-40B4-BE49-F238E27FC236}">
+                <a16:creationId xmlns:a16="http://schemas.microsoft.com/office/drawing/2014/main" id="{6BF04AE0-F94F-A586-34B8-68D9CAB6C6D1}"/>
+              </a:ext>
+            </a:extLst>
+          </p:cNvPr>
+          <p:cNvSpPr>
+            <a:spLocks noGrp="1"/>
+          </p:cNvSpPr>
+          <p:nvPr>
+            <p:ph type="title"/>
+          </p:nvPr>
+        </p:nvSpPr>
+        <p:spPr>
+          <a:xfrm>
+            <a:off x="2295524" y="432532"/>
+            <a:ext cx="9450077" cy="825501"/>
+          </a:xfrm>
+        </p:spPr>
+        <p:txBody>
+          <a:bodyPr/>
+          <a:lstStyle/>
+          <a:p>
+            <a:pPr lvl="0" indent="0" marL="0">
+              <a:buNone/>
+            </a:pPr>
+            <a:r>
+              <a:rPr/>
+              <a:t>Looking into the future</a:t>
+            </a:r>
+          </a:p>
+        </p:txBody>
+      </p:sp>
+      <p:sp>
+        <p:nvSpPr>
+          <p:cNvPr id="3" name="Content Placeholder 2">
+            <a:extLst>
+              <a:ext uri="{FF2B5EF4-FFF2-40B4-BE49-F238E27FC236}">
+                <a16:creationId xmlns:a16="http://schemas.microsoft.com/office/drawing/2014/main" id="{372FA590-20E9-0368-85B4-90C26598F852}"/>
+              </a:ext>
+            </a:extLst>
+          </p:cNvPr>
+          <p:cNvSpPr>
+            <a:spLocks noGrp="1"/>
+          </p:cNvSpPr>
+          <p:nvPr>
+            <p:ph idx="1"/>
+          </p:nvPr>
+        </p:nvSpPr>
+        <p:spPr/>
+        <p:txBody>
+          <a:bodyPr/>
+          <a:lstStyle/>
+          <a:p>
+            <a:pPr lvl="0" indent="-457200" marL="457200">
+              <a:buAutoNum type="arabicPeriod"/>
+            </a:pPr>
+            <a:r>
+              <a:rPr b="1"/>
+              <a:t>Take a minute to think about the following questions, first for yourself, then in a pair:</a:t>
+            </a:r>
+          </a:p>
+          <a:p>
+            <a:pPr lvl="0"/>
+            <a:r>
+              <a:rPr/>
+              <a:t>Can you identify some </a:t>
+            </a:r>
+            <a:r>
+              <a:rPr b="1"/>
+              <a:t>practical benefits</a:t>
+            </a:r>
+            <a:r>
+              <a:rPr/>
+              <a:t> of using Zotero?</a:t>
+            </a:r>
+          </a:p>
+          <a:p>
+            <a:pPr lvl="0"/>
+            <a:r>
+              <a:rPr/>
+              <a:t>What </a:t>
+            </a:r>
+            <a:r>
+              <a:rPr b="1"/>
+              <a:t>obstacles</a:t>
+            </a:r>
+            <a:r>
+              <a:rPr/>
+              <a:t> do you anticipate in using it consistently?</a:t>
+            </a:r>
+          </a:p>
+          <a:p>
+            <a:pPr lvl="0"/>
+            <a:r>
+              <a:rPr/>
+              <a:t>How can Zotero support you in your </a:t>
+            </a:r>
+            <a:r>
+              <a:rPr b="1"/>
+              <a:t>upcoming projects</a:t>
+            </a:r>
+            <a:r>
+              <a:rPr/>
+              <a:t>?</a:t>
+            </a:r>
+          </a:p>
+          <a:p>
+            <a:pPr lvl="0" indent="-457200" marL="457200">
+              <a:buAutoNum startAt="2" type="arabicPeriod"/>
+            </a:pPr>
+            <a:r>
+              <a:rPr b="1"/>
+              <a:t>Share your thoughts with the group.</a:t>
+            </a:r>
+          </a:p>
+        </p:txBody>
+      </p:sp>
+      <p:sp>
+        <p:nvSpPr>
+          <p:cNvPr id="6" name="Slide Number Placeholder 5">
+            <a:extLst>
+              <a:ext uri="{FF2B5EF4-FFF2-40B4-BE49-F238E27FC236}">
+                <a16:creationId xmlns:a16="http://schemas.microsoft.com/office/drawing/2014/main" id="{5F33F24B-1A9E-2EAF-F2AB-89426454DEE9}"/>
+              </a:ext>
+            </a:extLst>
+          </p:cNvPr>
+          <p:cNvSpPr>
+            <a:spLocks noGrp="1"/>
+          </p:cNvSpPr>
+          <p:nvPr>
+            <p:ph idx="12" sz="quarter" type="sldNum"/>
+          </p:nvPr>
+        </p:nvSpPr>
+        <p:spPr>
+          <a:xfrm>
+            <a:off x="8610599" y="6356350"/>
+            <a:ext cx="3135001" cy="365125"/>
+          </a:xfrm>
+        </p:spPr>
+        <p:txBody>
+          <a:bodyPr/>
+          <a:lstStyle/>
+          <a:p>
+            <a:fld id="{7FEFBAB6-26D0-44D8-BD53-612461CE1ACC}" type="slidenum">
+              <a:rPr lang="de-DE" smtClean="0"/>
+              <a:t>‹#›</a:t>
+            </a:fld>
+            <a:endParaRPr lang="de-DE"/>
+          </a:p>
+        </p:txBody>
+      </p:sp>
+    </p:spTree>
+  </p:cSld>
+</p:sld>
+</file>
+
+<file path=ppt/slides/slide34.xml><?xml version="1.0" encoding="utf-8"?>
 <p:sld xmlns:a="http://schemas.openxmlformats.org/drawingml/2006/main" xmlns:r="http://schemas.openxmlformats.org/officeDocument/2006/relationships" xmlns:p="http://schemas.openxmlformats.org/presentationml/2006/main">
   <p:cSld>
     <p:spTree>
@@ -14326,7 +14452,7 @@
 </p:sld>
 </file>
 
-<file path=ppt/slides/slide33.xml><?xml version="1.0" encoding="utf-8"?>
+<file path=ppt/slides/slide35.xml><?xml version="1.0" encoding="utf-8"?>
 <p:sld xmlns:a="http://schemas.openxmlformats.org/drawingml/2006/main" xmlns:r="http://schemas.openxmlformats.org/officeDocument/2006/relationships" xmlns:p="http://schemas.openxmlformats.org/presentationml/2006/main">
   <p:cSld>
     <p:spTree>
@@ -14782,221 +14908,6 @@
 </p:sld>
 </file>
 
-<file path=ppt/slides/slide34.xml><?xml version="1.0" encoding="utf-8"?>
-<p:sld xmlns:a="http://schemas.openxmlformats.org/drawingml/2006/main" xmlns:r="http://schemas.openxmlformats.org/officeDocument/2006/relationships" xmlns:p="http://schemas.openxmlformats.org/presentationml/2006/main">
-  <p:cSld>
-    <p:spTree>
-      <p:nvGrpSpPr>
-        <p:cNvPr id="1" name=""/>
-        <p:cNvGrpSpPr/>
-        <p:nvPr/>
-      </p:nvGrpSpPr>
-      <p:grpSpPr>
-        <a:xfrm>
-          <a:off x="0" y="0"/>
-          <a:ext cx="0" cy="0"/>
-          <a:chOff x="0" y="0"/>
-          <a:chExt cx="0" cy="0"/>
-        </a:xfrm>
-      </p:grpSpPr>
-      <p:sp>
-        <p:nvSpPr>
-          <p:cNvPr id="2" name="Title 1">
-            <a:extLst>
-              <a:ext uri="{FF2B5EF4-FFF2-40B4-BE49-F238E27FC236}">
-                <a16:creationId xmlns:a16="http://schemas.microsoft.com/office/drawing/2014/main" id="{6BF04AE0-F94F-A586-34B8-68D9CAB6C6D1}"/>
-              </a:ext>
-            </a:extLst>
-          </p:cNvPr>
-          <p:cNvSpPr>
-            <a:spLocks noGrp="1"/>
-          </p:cNvSpPr>
-          <p:nvPr>
-            <p:ph type="title"/>
-          </p:nvPr>
-        </p:nvSpPr>
-        <p:spPr>
-          <a:xfrm>
-            <a:off x="2295524" y="432532"/>
-            <a:ext cx="9450077" cy="825501"/>
-          </a:xfrm>
-        </p:spPr>
-        <p:txBody>
-          <a:bodyPr/>
-          <a:lstStyle/>
-          <a:p>
-            <a:pPr lvl="0" indent="0" marL="0">
-              <a:buNone/>
-            </a:pPr>
-            <a:r>
-              <a:rPr/>
-              <a:t>To conclude: Survey time!</a:t>
-            </a:r>
-          </a:p>
-        </p:txBody>
-      </p:sp>
-      <p:sp>
-        <p:nvSpPr>
-          <p:cNvPr id="6" name="Slide Number Placeholder 5">
-            <a:extLst>
-              <a:ext uri="{FF2B5EF4-FFF2-40B4-BE49-F238E27FC236}">
-                <a16:creationId xmlns:a16="http://schemas.microsoft.com/office/drawing/2014/main" id="{5F33F24B-1A9E-2EAF-F2AB-89426454DEE9}"/>
-              </a:ext>
-            </a:extLst>
-          </p:cNvPr>
-          <p:cNvSpPr>
-            <a:spLocks noGrp="1"/>
-          </p:cNvSpPr>
-          <p:nvPr>
-            <p:ph idx="12" sz="quarter" type="sldNum"/>
-          </p:nvPr>
-        </p:nvSpPr>
-        <p:spPr>
-          <a:xfrm>
-            <a:off x="8610599" y="6356350"/>
-            <a:ext cx="3135001" cy="365125"/>
-          </a:xfrm>
-        </p:spPr>
-        <p:txBody>
-          <a:bodyPr/>
-          <a:lstStyle/>
-          <a:p>
-            <a:fld id="{7FEFBAB6-26D0-44D8-BD53-612461CE1ACC}" type="slidenum">
-              <a:rPr lang="de-DE" smtClean="0"/>
-              <a:t>‹#›</a:t>
-            </a:fld>
-            <a:endParaRPr lang="de-DE"/>
-          </a:p>
-        </p:txBody>
-      </p:sp>
-    </p:spTree>
-  </p:cSld>
-</p:sld>
-</file>
-
-<file path=ppt/slides/slide35.xml><?xml version="1.0" encoding="utf-8"?>
-<p:sld xmlns:a="http://schemas.openxmlformats.org/drawingml/2006/main" xmlns:r="http://schemas.openxmlformats.org/officeDocument/2006/relationships" xmlns:p="http://schemas.openxmlformats.org/presentationml/2006/main">
-  <p:cSld>
-    <p:spTree>
-      <p:nvGrpSpPr>
-        <p:cNvPr id="1" name=""/>
-        <p:cNvGrpSpPr/>
-        <p:nvPr/>
-      </p:nvGrpSpPr>
-      <p:grpSpPr>
-        <a:xfrm>
-          <a:off x="0" y="0"/>
-          <a:ext cx="0" cy="0"/>
-          <a:chOff x="0" y="0"/>
-          <a:chExt cx="0" cy="0"/>
-        </a:xfrm>
-      </p:grpSpPr>
-      <p:sp>
-        <p:nvSpPr>
-          <p:cNvPr id="3" name="Content Placeholder 2">
-            <a:extLst>
-              <a:ext uri="{FF2B5EF4-FFF2-40B4-BE49-F238E27FC236}">
-                <a16:creationId xmlns:a16="http://schemas.microsoft.com/office/drawing/2014/main" id="{372FA590-20E9-0368-85B4-90C26598F852}"/>
-              </a:ext>
-            </a:extLst>
-          </p:cNvPr>
-          <p:cNvSpPr>
-            <a:spLocks noGrp="1"/>
-          </p:cNvSpPr>
-          <p:nvPr>
-            <p:ph idx="1"/>
-          </p:nvPr>
-        </p:nvSpPr>
-        <p:spPr/>
-        <p:txBody>
-          <a:bodyPr/>
-          <a:lstStyle/>
-          <a:p>
-            <a:pPr lvl="0" indent="0" marL="0">
-              <a:buNone/>
-            </a:pPr>
-            <a:r>
-              <a:rPr b="1"/>
-              <a:t>What is your level of familiarity with citing and referencing scientific papers?</a:t>
-            </a:r>
-          </a:p>
-          <a:p>
-            <a:pPr lvl="0" indent="-457200" marL="457200">
-              <a:buAutoNum type="alphaLcPeriod"/>
-            </a:pPr>
-            <a:r>
-              <a:rPr/>
-              <a:t>I have never heard of it before.</a:t>
-            </a:r>
-          </a:p>
-          <a:p>
-            <a:pPr lvl="0" indent="-457200" marL="457200">
-              <a:buAutoNum type="alphaLcPeriod"/>
-            </a:pPr>
-            <a:r>
-              <a:rPr/>
-              <a:t>I have heard of it but have never worked with it.</a:t>
-            </a:r>
-          </a:p>
-          <a:p>
-            <a:pPr lvl="0" indent="-457200" marL="457200">
-              <a:buAutoNum type="alphaLcPeriod"/>
-            </a:pPr>
-            <a:r>
-              <a:rPr/>
-              <a:t>I have basic understanding and experience with it.</a:t>
-            </a:r>
-          </a:p>
-          <a:p>
-            <a:pPr lvl="0" indent="-457200" marL="457200">
-              <a:buAutoNum type="alphaLcPeriod"/>
-            </a:pPr>
-            <a:r>
-              <a:rPr/>
-              <a:t>I am very familiar and have worked with it extensively.</a:t>
-            </a:r>
-          </a:p>
-        </p:txBody>
-      </p:sp>
-      <p:sp>
-        <p:nvSpPr>
-          <p:cNvPr id="6" name="Slide Number Placeholder 5">
-            <a:extLst>
-              <a:ext uri="{FF2B5EF4-FFF2-40B4-BE49-F238E27FC236}">
-                <a16:creationId xmlns:a16="http://schemas.microsoft.com/office/drawing/2014/main" id="{5F33F24B-1A9E-2EAF-F2AB-89426454DEE9}"/>
-              </a:ext>
-            </a:extLst>
-          </p:cNvPr>
-          <p:cNvSpPr>
-            <a:spLocks noGrp="1"/>
-          </p:cNvSpPr>
-          <p:nvPr>
-            <p:ph idx="12" sz="quarter" type="sldNum"/>
-          </p:nvPr>
-        </p:nvSpPr>
-        <p:spPr>
-          <a:xfrm>
-            <a:off x="8610599" y="6356350"/>
-            <a:ext cx="3135001" cy="365125"/>
-          </a:xfrm>
-        </p:spPr>
-        <p:txBody>
-          <a:bodyPr/>
-          <a:lstStyle/>
-          <a:p>
-            <a:fld id="{7FEFBAB6-26D0-44D8-BD53-612461CE1ACC}" type="slidenum">
-              <a:rPr lang="de-DE" smtClean="0"/>
-              <a:t>‹#›</a:t>
-            </a:fld>
-            <a:endParaRPr lang="de-DE"/>
-          </a:p>
-        </p:txBody>
-      </p:sp>
-    </p:spTree>
-  </p:cSld>
-</p:sld>
-</file>
-
 <file path=ppt/slides/slide36.xml><?xml version="1.0" encoding="utf-8"?>
 <p:sld xmlns:a="http://schemas.openxmlformats.org/drawingml/2006/main" xmlns:r="http://schemas.openxmlformats.org/officeDocument/2006/relationships" xmlns:p="http://schemas.openxmlformats.org/presentationml/2006/main">
   <p:cSld>
@@ -15016,84 +14927,36 @@
       </p:grpSpPr>
       <p:sp>
         <p:nvSpPr>
-          <p:cNvPr id="3" name="Content Placeholder 2">
-            <a:extLst>
-              <a:ext uri="{FF2B5EF4-FFF2-40B4-BE49-F238E27FC236}">
-                <a16:creationId xmlns:a16="http://schemas.microsoft.com/office/drawing/2014/main" id="{372FA590-20E9-0368-85B4-90C26598F852}"/>
-              </a:ext>
-            </a:extLst>
-          </p:cNvPr>
-          <p:cNvSpPr>
-            <a:spLocks noGrp="1"/>
-          </p:cNvSpPr>
-          <p:nvPr>
-            <p:ph idx="1"/>
-          </p:nvPr>
-        </p:nvSpPr>
-        <p:spPr/>
-        <p:txBody>
-          <a:bodyPr/>
-          <a:lstStyle/>
-          <a:p>
-            <a:pPr lvl="0" indent="0" marL="0">
-              <a:buNone/>
-            </a:pPr>
-            <a:r>
-              <a:rPr b="1"/>
-              <a:t>How confident do you feel with the Zotero workflow of collection, organisation, and citing?</a:t>
-            </a:r>
-            <a:r>
-              <a:rPr/>
-              <a:t> </a:t>
-            </a:r>
-            <a:r>
-              <a:rPr i="1"/>
-              <a:t>(1 = Not confident at all, 5 = Very confident)</a:t>
-            </a:r>
-          </a:p>
-          <a:p>
-            <a:pPr lvl="0" indent="-457200" marL="457200">
-              <a:buAutoNum type="alphaLcPeriod"/>
-            </a:pPr>
-            <a:r>
-              <a:rPr/>
-              <a:t>1</a:t>
-            </a:r>
-          </a:p>
-          <a:p>
-            <a:pPr lvl="0" indent="-457200" marL="457200">
-              <a:buAutoNum type="alphaLcPeriod"/>
-            </a:pPr>
-            <a:r>
-              <a:rPr/>
-              <a:t>2</a:t>
-            </a:r>
-          </a:p>
-          <a:p>
-            <a:pPr lvl="0" indent="-457200" marL="457200">
-              <a:buAutoNum type="alphaLcPeriod"/>
-            </a:pPr>
-            <a:r>
-              <a:rPr/>
-              <a:t>3</a:t>
-            </a:r>
-          </a:p>
-          <a:p>
-            <a:pPr lvl="0" indent="-457200" marL="457200">
-              <a:buAutoNum type="alphaLcPeriod"/>
-            </a:pPr>
-            <a:r>
-              <a:rPr/>
-              <a:t>4</a:t>
-            </a:r>
-          </a:p>
-          <a:p>
-            <a:pPr lvl="0" indent="-457200" marL="457200">
-              <a:buAutoNum type="alphaLcPeriod"/>
-            </a:pPr>
-            <a:r>
-              <a:rPr/>
-              <a:t>5</a:t>
+          <p:cNvPr id="2" name="Title 1">
+            <a:extLst>
+              <a:ext uri="{FF2B5EF4-FFF2-40B4-BE49-F238E27FC236}">
+                <a16:creationId xmlns:a16="http://schemas.microsoft.com/office/drawing/2014/main" id="{6BF04AE0-F94F-A586-34B8-68D9CAB6C6D1}"/>
+              </a:ext>
+            </a:extLst>
+          </p:cNvPr>
+          <p:cNvSpPr>
+            <a:spLocks noGrp="1"/>
+          </p:cNvSpPr>
+          <p:nvPr>
+            <p:ph type="title"/>
+          </p:nvPr>
+        </p:nvSpPr>
+        <p:spPr>
+          <a:xfrm>
+            <a:off x="2295524" y="432532"/>
+            <a:ext cx="9450077" cy="825501"/>
+          </a:xfrm>
+        </p:spPr>
+        <p:txBody>
+          <a:bodyPr/>
+          <a:lstStyle/>
+          <a:p>
+            <a:pPr lvl="0" indent="0" marL="0">
+              <a:buNone/>
+            </a:pPr>
+            <a:r>
+              <a:rPr/>
+              <a:t>To conclude: Survey time!</a:t>
             </a:r>
           </a:p>
         </p:txBody>
@@ -15156,42 +15019,6 @@
       </p:grpSpPr>
       <p:sp>
         <p:nvSpPr>
-          <p:cNvPr id="2" name="Title 1">
-            <a:extLst>
-              <a:ext uri="{FF2B5EF4-FFF2-40B4-BE49-F238E27FC236}">
-                <a16:creationId xmlns:a16="http://schemas.microsoft.com/office/drawing/2014/main" id="{6BF04AE0-F94F-A586-34B8-68D9CAB6C6D1}"/>
-              </a:ext>
-            </a:extLst>
-          </p:cNvPr>
-          <p:cNvSpPr>
-            <a:spLocks noGrp="1"/>
-          </p:cNvSpPr>
-          <p:nvPr>
-            <p:ph type="title"/>
-          </p:nvPr>
-        </p:nvSpPr>
-        <p:spPr>
-          <a:xfrm>
-            <a:off x="2295524" y="432532"/>
-            <a:ext cx="9450077" cy="825501"/>
-          </a:xfrm>
-        </p:spPr>
-        <p:txBody>
-          <a:bodyPr/>
-          <a:lstStyle/>
-          <a:p>
-            <a:pPr lvl="0" indent="0" marL="0">
-              <a:buNone/>
-            </a:pPr>
-            <a:r>
-              <a:rPr/>
-              <a:t>Discussion of survey results</a:t>
-            </a:r>
-          </a:p>
-        </p:txBody>
-      </p:sp>
-      <p:sp>
-        <p:nvSpPr>
           <p:cNvPr id="3" name="Content Placeholder 2">
             <a:extLst>
               <a:ext uri="{FF2B5EF4-FFF2-40B4-BE49-F238E27FC236}">
@@ -15216,7 +15043,43 @@
             </a:pPr>
             <a:r>
               <a:rPr b="1"/>
-              <a:t>What do we see in the results?</a:t>
+              <a:t>What is your level of familiarity with citing and referencing scientific papers?</a:t>
+            </a:r>
+          </a:p>
+          <a:p>
+            <a:pPr lvl="0" indent="-457200" marL="457200">
+              <a:buAutoNum type="alphaLcPeriod"/>
+            </a:pPr>
+            <a:r>
+              <a:rPr/>
+              <a:t>I have never heard of it before.</a:t>
+            </a:r>
+          </a:p>
+          <a:p>
+            <a:pPr lvl="0" indent="-457200" marL="457200">
+              <a:buAutoNum type="alphaLcPeriod"/>
+            </a:pPr>
+            <a:r>
+              <a:rPr/>
+              <a:t>I have heard of it but have never worked with it.</a:t>
+            </a:r>
+          </a:p>
+          <a:p>
+            <a:pPr lvl="0" indent="-457200" marL="457200">
+              <a:buAutoNum type="alphaLcPeriod"/>
+            </a:pPr>
+            <a:r>
+              <a:rPr/>
+              <a:t>I have basic understanding and experience with it.</a:t>
+            </a:r>
+          </a:p>
+          <a:p>
+            <a:pPr lvl="0" indent="-457200" marL="457200">
+              <a:buAutoNum type="alphaLcPeriod"/>
+            </a:pPr>
+            <a:r>
+              <a:rPr/>
+              <a:t>I am very familiar and have worked with it extensively.</a:t>
             </a:r>
           </a:p>
         </p:txBody>
@@ -15279,42 +15142,6 @@
       </p:grpSpPr>
       <p:sp>
         <p:nvSpPr>
-          <p:cNvPr id="2" name="Title 1">
-            <a:extLst>
-              <a:ext uri="{FF2B5EF4-FFF2-40B4-BE49-F238E27FC236}">
-                <a16:creationId xmlns:a16="http://schemas.microsoft.com/office/drawing/2014/main" id="{6BF04AE0-F94F-A586-34B8-68D9CAB6C6D1}"/>
-              </a:ext>
-            </a:extLst>
-          </p:cNvPr>
-          <p:cNvSpPr>
-            <a:spLocks noGrp="1"/>
-          </p:cNvSpPr>
-          <p:nvPr>
-            <p:ph type="title"/>
-          </p:nvPr>
-        </p:nvSpPr>
-        <p:spPr>
-          <a:xfrm>
-            <a:off x="2295524" y="432532"/>
-            <a:ext cx="9450077" cy="825501"/>
-          </a:xfrm>
-        </p:spPr>
-        <p:txBody>
-          <a:bodyPr/>
-          <a:lstStyle/>
-          <a:p>
-            <a:pPr lvl="0" indent="0" marL="0">
-              <a:buNone/>
-            </a:pPr>
-            <a:r>
-              <a:rPr/>
-              <a:t>References</a:t>
-            </a:r>
-          </a:p>
-        </p:txBody>
-      </p:sp>
-      <p:sp>
-        <p:nvSpPr>
           <p:cNvPr id="3" name="Content Placeholder 2">
             <a:extLst>
               <a:ext uri="{FF2B5EF4-FFF2-40B4-BE49-F238E27FC236}">
@@ -15338,16 +15165,61 @@
               <a:buNone/>
             </a:pPr>
             <a:r>
-              <a:rPr/>
-              <a:t>Jackson, P. (1990). The Daily Grind. In </a:t>
+              <a:rPr b="1"/>
+              <a:t>How confident do you feel with the Zotero workflow of collection, organisation, and citing?</a:t>
+            </a:r>
+            <a:r>
+              <a:rPr/>
+              <a:t> </a:t>
             </a:r>
             <a:r>
               <a:rPr i="1"/>
-              <a:t>Life in Classrooms</a:t>
-            </a:r>
-            <a:r>
-              <a:rPr/>
-              <a:t> (2nd ed., pp. 34–35). Teachers College Press.</a:t>
+              <a:t>(1 = Not confident at all, 5 = Very confident)</a:t>
+            </a:r>
+          </a:p>
+          <a:p>
+            <a:pPr lvl="0" indent="-457200" marL="457200">
+              <a:buAutoNum type="alphaLcPeriod"/>
+            </a:pPr>
+            <a:r>
+              <a:rPr/>
+              <a:t>1</a:t>
+            </a:r>
+          </a:p>
+          <a:p>
+            <a:pPr lvl="0" indent="-457200" marL="457200">
+              <a:buAutoNum type="alphaLcPeriod"/>
+            </a:pPr>
+            <a:r>
+              <a:rPr/>
+              <a:t>2</a:t>
+            </a:r>
+          </a:p>
+          <a:p>
+            <a:pPr lvl="0" indent="-457200" marL="457200">
+              <a:buAutoNum type="alphaLcPeriod"/>
+            </a:pPr>
+            <a:r>
+              <a:rPr/>
+              <a:t>3</a:t>
+            </a:r>
+          </a:p>
+          <a:p>
+            <a:pPr lvl="0" indent="-457200" marL="457200">
+              <a:buAutoNum type="alphaLcPeriod"/>
+            </a:pPr>
+            <a:r>
+              <a:rPr/>
+              <a:t>4</a:t>
+            </a:r>
+          </a:p>
+          <a:p>
+            <a:pPr lvl="0" indent="-457200" marL="457200">
+              <a:buAutoNum type="alphaLcPeriod"/>
+            </a:pPr>
+            <a:r>
+              <a:rPr/>
+              <a:t>5</a:t>
             </a:r>
           </a:p>
         </p:txBody>
@@ -15439,7 +15311,7 @@
             </a:pPr>
             <a:r>
               <a:rPr/>
-              <a:t>Thanks!</a:t>
+              <a:t>Discussion of survey results</a:t>
             </a:r>
           </a:p>
         </p:txBody>
@@ -15469,8 +15341,8 @@
               <a:buNone/>
             </a:pPr>
             <a:r>
-              <a:rPr/>
-              <a:t>See you next session :)</a:t>
+              <a:rPr b="1"/>
+              <a:t>What do we see in the results?</a:t>
             </a:r>
           </a:p>
         </p:txBody>
@@ -15553,60 +15425,11 @@
           <a:lstStyle/>
           <a:p>
             <a:pPr lvl="0" indent="0" marL="0">
-              <a:spcBef>
-                <a:spcPts val="3000"/>
-              </a:spcBef>
-              <a:buNone/>
-            </a:pPr>
-            <a:r>
-              <a:rPr b="1"/>
-              <a:t>Contribution statement</a:t>
-            </a:r>
-          </a:p>
-          <a:p>
-            <a:pPr lvl="0" indent="0" marL="0">
-              <a:buNone/>
-            </a:pPr>
-            <a:r>
-              <a:rPr b="1"/>
-              <a:t>Creator</a:t>
-            </a:r>
-            <a:r>
-              <a:rPr/>
-              <a:t>: Sharma, Tejaswini (</a:t>
-            </a:r>
-            <a:r>
-              <a:rPr>
-                <a:hlinkClick r:id="rId2"/>
-              </a:rPr>
-              <a:t>Orcid-ID: 00009-0000-0305-9751</a:t>
-            </a:r>
-            <a:r>
-              <a:rPr/>
-              <a:t>)</a:t>
-            </a:r>
-          </a:p>
-          <a:p>
-            <a:pPr lvl="0" indent="0" marL="0">
-              <a:buNone/>
-            </a:pPr>
-            <a:r>
-              <a:rPr b="1"/>
-              <a:t>Reviewer</a:t>
-            </a:r>
-            <a:r>
-              <a:rPr/>
-              <a:t>: Von Grebmer zu Wolfsthurn, Sarah (</a:t>
-            </a:r>
-            <a:r>
-              <a:rPr>
-                <a:hlinkClick r:id="rId3"/>
-              </a:rPr>
-              <a:t>Ordcid-ID: 0000-0002-6413-3895</a:t>
-            </a:r>
-            <a:r>
-              <a:rPr/>
-              <a:t>)</a:t>
+              <a:buNone/>
+            </a:pPr>
+            <a:r>
+              <a:rPr/>
+              <a:t>content in section header?</a:t>
             </a:r>
           </a:p>
         </p:txBody>
@@ -15698,7 +15521,7 @@
             </a:pPr>
             <a:r>
               <a:rPr/>
-              <a:t>Additional in-class activity</a:t>
+              <a:t>References</a:t>
             </a:r>
           </a:p>
         </p:txBody>
@@ -15724,14 +15547,20 @@
           <a:bodyPr/>
           <a:lstStyle/>
           <a:p>
-            <a:pPr lvl="0"/>
-            <a:r>
-              <a:rPr b="1"/>
-              <a:t>Activity</a:t>
-            </a:r>
-            <a:r>
-              <a:rPr/>
-              <a:t>: Get in a pair, navigate a literature database (Google Scholar), find a paper of your choice with its full text, analyse the citations and the reference list. Note what features you see and share in class.</a:t>
+            <a:pPr lvl="0" indent="0" marL="0">
+              <a:buNone/>
+            </a:pPr>
+            <a:r>
+              <a:rPr/>
+              <a:t>Jackson, P. (1990). The Daily Grind. In </a:t>
+            </a:r>
+            <a:r>
+              <a:rPr i="1"/>
+              <a:t>Life in Classrooms</a:t>
+            </a:r>
+            <a:r>
+              <a:rPr/>
+              <a:t> (2nd ed., pp. 34–35). Teachers College Press.</a:t>
             </a:r>
           </a:p>
         </p:txBody>
@@ -15823,7 +15652,7 @@
             </a:pPr>
             <a:r>
               <a:rPr/>
-              <a:t>CREDiT Contribution Statement - TO DO</a:t>
+              <a:t>Thanks!</a:t>
             </a:r>
           </a:p>
         </p:txBody>
@@ -15854,36 +15683,7 @@
             </a:pPr>
             <a:r>
               <a:rPr/>
-              <a:t>Possible roles using the CRediT contribition system or the Zenodo Contribution System:</a:t>
-            </a:r>
-          </a:p>
-          <a:p>
-            <a:pPr lvl="0" indent="0" marL="0">
-              <a:buNone/>
-            </a:pPr>
-            <a:r>
-              <a:rPr b="1"/>
-              <a:t>Name main content creator</a:t>
-            </a:r>
-            <a:r>
-              <a:rPr/>
-              <a:t>: Conceptualization, Software, Writing - Original Draft, Visualization. </a:t>
-            </a:r>
-            <a:r>
-              <a:rPr b="1"/>
-              <a:t>Sara Lil Middleton</a:t>
-            </a:r>
-            <a:r>
-              <a:rPr/>
-              <a:t>: Writing - Review &amp; Editing, Supervision. </a:t>
-            </a:r>
-            <a:r>
-              <a:rPr b="1"/>
-              <a:t>Sarah von Grebmer zu Wolfsthurn</a:t>
-            </a:r>
-            <a:r>
-              <a:rPr/>
-              <a:t>: Conceptualisation, Writing - Review &amp; Editing, Supervision, Project Administration, Validation.</a:t>
+              <a:t>See you next session :)</a:t>
             </a:r>
           </a:p>
         </p:txBody>
@@ -15927,7 +15727,603 @@
 </p:sld>
 </file>
 
+<file path=ppt/slides/slide42.xml><?xml version="1.0" encoding="utf-8"?>
+<p:sld xmlns:a="http://schemas.openxmlformats.org/drawingml/2006/main" xmlns:r="http://schemas.openxmlformats.org/officeDocument/2006/relationships" xmlns:p="http://schemas.openxmlformats.org/presentationml/2006/main">
+  <p:cSld>
+    <p:spTree>
+      <p:nvGrpSpPr>
+        <p:cNvPr id="1" name=""/>
+        <p:cNvGrpSpPr/>
+        <p:nvPr/>
+      </p:nvGrpSpPr>
+      <p:grpSpPr>
+        <a:xfrm>
+          <a:off x="0" y="0"/>
+          <a:ext cx="0" cy="0"/>
+          <a:chOff x="0" y="0"/>
+          <a:chExt cx="0" cy="0"/>
+        </a:xfrm>
+      </p:grpSpPr>
+      <p:sp>
+        <p:nvSpPr>
+          <p:cNvPr id="2" name="Title 1">
+            <a:extLst>
+              <a:ext uri="{FF2B5EF4-FFF2-40B4-BE49-F238E27FC236}">
+                <a16:creationId xmlns:a16="http://schemas.microsoft.com/office/drawing/2014/main" id="{6BF04AE0-F94F-A586-34B8-68D9CAB6C6D1}"/>
+              </a:ext>
+            </a:extLst>
+          </p:cNvPr>
+          <p:cNvSpPr>
+            <a:spLocks noGrp="1"/>
+          </p:cNvSpPr>
+          <p:nvPr>
+            <p:ph type="title"/>
+          </p:nvPr>
+        </p:nvSpPr>
+        <p:spPr>
+          <a:xfrm>
+            <a:off x="2295524" y="432532"/>
+            <a:ext cx="9450077" cy="825501"/>
+          </a:xfrm>
+        </p:spPr>
+        <p:txBody>
+          <a:bodyPr/>
+          <a:lstStyle/>
+          <a:p>
+            <a:pPr lvl="0" indent="0" marL="0">
+              <a:buNone/>
+            </a:pPr>
+            <a:r>
+              <a:rPr/>
+              <a:t>Additional in-class activity</a:t>
+            </a:r>
+          </a:p>
+        </p:txBody>
+      </p:sp>
+      <p:sp>
+        <p:nvSpPr>
+          <p:cNvPr id="3" name="Content Placeholder 2">
+            <a:extLst>
+              <a:ext uri="{FF2B5EF4-FFF2-40B4-BE49-F238E27FC236}">
+                <a16:creationId xmlns:a16="http://schemas.microsoft.com/office/drawing/2014/main" id="{372FA590-20E9-0368-85B4-90C26598F852}"/>
+              </a:ext>
+            </a:extLst>
+          </p:cNvPr>
+          <p:cNvSpPr>
+            <a:spLocks noGrp="1"/>
+          </p:cNvSpPr>
+          <p:nvPr>
+            <p:ph idx="1"/>
+          </p:nvPr>
+        </p:nvSpPr>
+        <p:spPr/>
+        <p:txBody>
+          <a:bodyPr/>
+          <a:lstStyle/>
+          <a:p>
+            <a:pPr lvl="0"/>
+            <a:r>
+              <a:rPr b="1"/>
+              <a:t>Activity</a:t>
+            </a:r>
+            <a:r>
+              <a:rPr/>
+              <a:t>: Get in a pair, navigate a literature database (Google Scholar), find a paper of your choice with its full text, analyse the citations and the reference list. Note what features you see and share in class.</a:t>
+            </a:r>
+          </a:p>
+        </p:txBody>
+      </p:sp>
+      <p:sp>
+        <p:nvSpPr>
+          <p:cNvPr id="6" name="Slide Number Placeholder 5">
+            <a:extLst>
+              <a:ext uri="{FF2B5EF4-FFF2-40B4-BE49-F238E27FC236}">
+                <a16:creationId xmlns:a16="http://schemas.microsoft.com/office/drawing/2014/main" id="{5F33F24B-1A9E-2EAF-F2AB-89426454DEE9}"/>
+              </a:ext>
+            </a:extLst>
+          </p:cNvPr>
+          <p:cNvSpPr>
+            <a:spLocks noGrp="1"/>
+          </p:cNvSpPr>
+          <p:nvPr>
+            <p:ph idx="12" sz="quarter" type="sldNum"/>
+          </p:nvPr>
+        </p:nvSpPr>
+        <p:spPr>
+          <a:xfrm>
+            <a:off x="8610599" y="6356350"/>
+            <a:ext cx="3135001" cy="365125"/>
+          </a:xfrm>
+        </p:spPr>
+        <p:txBody>
+          <a:bodyPr/>
+          <a:lstStyle/>
+          <a:p>
+            <a:fld id="{7FEFBAB6-26D0-44D8-BD53-612461CE1ACC}" type="slidenum">
+              <a:rPr lang="de-DE" smtClean="0"/>
+              <a:t>‹#›</a:t>
+            </a:fld>
+            <a:endParaRPr lang="de-DE"/>
+          </a:p>
+        </p:txBody>
+      </p:sp>
+    </p:spTree>
+  </p:cSld>
+</p:sld>
+</file>
+
+<file path=ppt/slides/slide43.xml><?xml version="1.0" encoding="utf-8"?>
+<p:sld xmlns:a="http://schemas.openxmlformats.org/drawingml/2006/main" xmlns:r="http://schemas.openxmlformats.org/officeDocument/2006/relationships" xmlns:p="http://schemas.openxmlformats.org/presentationml/2006/main">
+  <p:cSld>
+    <p:spTree>
+      <p:nvGrpSpPr>
+        <p:cNvPr id="1" name=""/>
+        <p:cNvGrpSpPr/>
+        <p:nvPr/>
+      </p:nvGrpSpPr>
+      <p:grpSpPr>
+        <a:xfrm>
+          <a:off x="0" y="0"/>
+          <a:ext cx="0" cy="0"/>
+          <a:chOff x="0" y="0"/>
+          <a:chExt cx="0" cy="0"/>
+        </a:xfrm>
+      </p:grpSpPr>
+      <p:sp>
+        <p:nvSpPr>
+          <p:cNvPr id="2" name="Title 1">
+            <a:extLst>
+              <a:ext uri="{FF2B5EF4-FFF2-40B4-BE49-F238E27FC236}">
+                <a16:creationId xmlns:a16="http://schemas.microsoft.com/office/drawing/2014/main" id="{6BF04AE0-F94F-A586-34B8-68D9CAB6C6D1}"/>
+              </a:ext>
+            </a:extLst>
+          </p:cNvPr>
+          <p:cNvSpPr>
+            <a:spLocks noGrp="1"/>
+          </p:cNvSpPr>
+          <p:nvPr>
+            <p:ph type="title"/>
+          </p:nvPr>
+        </p:nvSpPr>
+        <p:spPr>
+          <a:xfrm>
+            <a:off x="2295524" y="432532"/>
+            <a:ext cx="9450077" cy="825501"/>
+          </a:xfrm>
+        </p:spPr>
+        <p:txBody>
+          <a:bodyPr/>
+          <a:lstStyle/>
+          <a:p>
+            <a:pPr lvl="0" indent="0" marL="0">
+              <a:buNone/>
+            </a:pPr>
+            <a:r>
+              <a:rPr/>
+              <a:t>CREDiT Contribution Statement - TO DO</a:t>
+            </a:r>
+          </a:p>
+        </p:txBody>
+      </p:sp>
+      <p:sp>
+        <p:nvSpPr>
+          <p:cNvPr id="3" name="Content Placeholder 2">
+            <a:extLst>
+              <a:ext uri="{FF2B5EF4-FFF2-40B4-BE49-F238E27FC236}">
+                <a16:creationId xmlns:a16="http://schemas.microsoft.com/office/drawing/2014/main" id="{372FA590-20E9-0368-85B4-90C26598F852}"/>
+              </a:ext>
+            </a:extLst>
+          </p:cNvPr>
+          <p:cNvSpPr>
+            <a:spLocks noGrp="1"/>
+          </p:cNvSpPr>
+          <p:nvPr>
+            <p:ph idx="1"/>
+          </p:nvPr>
+        </p:nvSpPr>
+        <p:spPr/>
+        <p:txBody>
+          <a:bodyPr/>
+          <a:lstStyle/>
+          <a:p>
+            <a:pPr lvl="0" indent="0" marL="0">
+              <a:buNone/>
+            </a:pPr>
+            <a:r>
+              <a:rPr/>
+              <a:t>Possible roles using the CRediT contribition system or the Zenodo Contribution System:</a:t>
+            </a:r>
+          </a:p>
+          <a:p>
+            <a:pPr lvl="0" indent="0" marL="0">
+              <a:buNone/>
+            </a:pPr>
+            <a:r>
+              <a:rPr b="1"/>
+              <a:t>Name main content creator</a:t>
+            </a:r>
+            <a:r>
+              <a:rPr/>
+              <a:t>: Conceptualization, Software, Writing - Original Draft, Visualization. </a:t>
+            </a:r>
+            <a:r>
+              <a:rPr b="1"/>
+              <a:t>Sara Lil Middleton</a:t>
+            </a:r>
+            <a:r>
+              <a:rPr/>
+              <a:t>: Writing - Review &amp; Editing, Supervision. </a:t>
+            </a:r>
+            <a:r>
+              <a:rPr b="1"/>
+              <a:t>Sarah von Grebmer zu Wolfsthurn</a:t>
+            </a:r>
+            <a:r>
+              <a:rPr/>
+              <a:t>: Conceptualisation, Writing - Review &amp; Editing, Supervision, Project Administration, Validation.</a:t>
+            </a:r>
+          </a:p>
+        </p:txBody>
+      </p:sp>
+      <p:sp>
+        <p:nvSpPr>
+          <p:cNvPr id="6" name="Slide Number Placeholder 5">
+            <a:extLst>
+              <a:ext uri="{FF2B5EF4-FFF2-40B4-BE49-F238E27FC236}">
+                <a16:creationId xmlns:a16="http://schemas.microsoft.com/office/drawing/2014/main" id="{5F33F24B-1A9E-2EAF-F2AB-89426454DEE9}"/>
+              </a:ext>
+            </a:extLst>
+          </p:cNvPr>
+          <p:cNvSpPr>
+            <a:spLocks noGrp="1"/>
+          </p:cNvSpPr>
+          <p:nvPr>
+            <p:ph idx="12" sz="quarter" type="sldNum"/>
+          </p:nvPr>
+        </p:nvSpPr>
+        <p:spPr>
+          <a:xfrm>
+            <a:off x="8610599" y="6356350"/>
+            <a:ext cx="3135001" cy="365125"/>
+          </a:xfrm>
+        </p:spPr>
+        <p:txBody>
+          <a:bodyPr/>
+          <a:lstStyle/>
+          <a:p>
+            <a:fld id="{7FEFBAB6-26D0-44D8-BD53-612461CE1ACC}" type="slidenum">
+              <a:rPr lang="de-DE" smtClean="0"/>
+              <a:t>‹#›</a:t>
+            </a:fld>
+            <a:endParaRPr lang="de-DE"/>
+          </a:p>
+        </p:txBody>
+      </p:sp>
+    </p:spTree>
+  </p:cSld>
+</p:sld>
+</file>
+
 <file path=ppt/slides/slide5.xml><?xml version="1.0" encoding="utf-8"?>
+<p:sld xmlns:a="http://schemas.openxmlformats.org/drawingml/2006/main" xmlns:r="http://schemas.openxmlformats.org/officeDocument/2006/relationships" xmlns:p="http://schemas.openxmlformats.org/presentationml/2006/main">
+  <p:cSld>
+    <p:spTree>
+      <p:nvGrpSpPr>
+        <p:cNvPr id="1" name=""/>
+        <p:cNvGrpSpPr/>
+        <p:nvPr/>
+      </p:nvGrpSpPr>
+      <p:grpSpPr>
+        <a:xfrm>
+          <a:off x="0" y="0"/>
+          <a:ext cx="0" cy="0"/>
+          <a:chOff x="0" y="0"/>
+          <a:chExt cx="0" cy="0"/>
+        </a:xfrm>
+      </p:grpSpPr>
+      <p:sp>
+        <p:nvSpPr>
+          <p:cNvPr id="2" name="Title 1">
+            <a:extLst>
+              <a:ext uri="{FF2B5EF4-FFF2-40B4-BE49-F238E27FC236}">
+                <a16:creationId xmlns:a16="http://schemas.microsoft.com/office/drawing/2014/main" id="{6BF04AE0-F94F-A586-34B8-68D9CAB6C6D1}"/>
+              </a:ext>
+            </a:extLst>
+          </p:cNvPr>
+          <p:cNvSpPr>
+            <a:spLocks noGrp="1"/>
+          </p:cNvSpPr>
+          <p:nvPr>
+            <p:ph type="title"/>
+          </p:nvPr>
+        </p:nvSpPr>
+        <p:spPr>
+          <a:xfrm>
+            <a:off x="2295524" y="432532"/>
+            <a:ext cx="9450077" cy="825501"/>
+          </a:xfrm>
+        </p:spPr>
+        <p:txBody>
+          <a:bodyPr/>
+          <a:lstStyle/>
+          <a:p>
+            <a:pPr lvl="0" indent="0" marL="0">
+              <a:buNone/>
+            </a:pPr>
+            <a:r>
+              <a:rPr/>
+              <a:t>Licence</a:t>
+            </a:r>
+          </a:p>
+        </p:txBody>
+      </p:sp>
+      <p:sp>
+        <p:nvSpPr>
+          <p:cNvPr id="3" name="Content Placeholder 2">
+            <a:extLst>
+              <a:ext uri="{FF2B5EF4-FFF2-40B4-BE49-F238E27FC236}">
+                <a16:creationId xmlns:a16="http://schemas.microsoft.com/office/drawing/2014/main" id="{372FA590-20E9-0368-85B4-90C26598F852}"/>
+              </a:ext>
+            </a:extLst>
+          </p:cNvPr>
+          <p:cNvSpPr>
+            <a:spLocks noGrp="1"/>
+          </p:cNvSpPr>
+          <p:nvPr>
+            <p:ph idx="1"/>
+          </p:nvPr>
+        </p:nvSpPr>
+        <p:spPr/>
+        <p:txBody>
+          <a:bodyPr/>
+          <a:lstStyle/>
+          <a:p>
+            <a:pPr lvl="0" indent="0" marL="0">
+              <a:buNone/>
+            </a:pPr>
+            <a:r>
+              <a:rPr/>
+              <a:t>This work was originally created by Pat Callahan and Dejana Damjanovic under a CC-BY-SA 4.0 </a:t>
+            </a:r>
+            <a:r>
+              <a:rPr>
+                <a:hlinkClick r:id="rId3"/>
+              </a:rPr>
+              <a:t>Creative Commons Attribution 4.0 International License</a:t>
+            </a:r>
+            <a:r>
+              <a:rPr/>
+              <a:t> and a CC0 1.0 </a:t>
+            </a:r>
+            <a:r>
+              <a:rPr>
+                <a:hlinkClick r:id="rId4"/>
+              </a:rPr>
+              <a:t>Creative Commons Universal</a:t>
+            </a:r>
+            <a:r>
+              <a:rPr/>
+              <a:t> licence for code snippets. It was subsequently adapted and revised by </a:t>
+            </a:r>
+            <a:r>
+              <a:rPr>
+                <a:hlinkClick r:id="rId5"/>
+              </a:rPr>
+              <a:t>Sarah von Grebmer zu Wolfsthurn</a:t>
+            </a:r>
+            <a:r>
+              <a:rPr/>
+              <a:t>. This current work by </a:t>
+            </a:r>
+            <a:r>
+              <a:rPr>
+                <a:hlinkClick r:id="rId6"/>
+              </a:rPr>
+              <a:t>Tejaswini Sharma</a:t>
+            </a:r>
+            <a:r>
+              <a:rPr/>
+              <a:t> and Sarah von Grebmer zu Wolfsthurn is licensed under a CC-BY-SA 4.0 </a:t>
+            </a:r>
+            <a:r>
+              <a:rPr>
+                <a:hlinkClick r:id="rId7"/>
+              </a:rPr>
+              <a:t>Creative Commons Attribution 4.0 International SA License</a:t>
+            </a:r>
+            <a:r>
+              <a:rPr/>
+              <a:t>. permits unrestricted re-use, distribution, and reproduction in any medium, provided the original work is properly cited. If you remix, transform, or build upon the material, you must distribute your contributions under the same license as the original. Code snippets are dedicated to the public domain and licenced under a CC0 1.0 </a:t>
+            </a:r>
+            <a:r>
+              <a:rPr>
+                <a:hlinkClick r:id="rId8"/>
+              </a:rPr>
+              <a:t>Creative Commons Universal Licence</a:t>
+            </a:r>
+            <a:r>
+              <a:rPr/>
+              <a:t>. You may use, modify, distribute, and sell the code snippets for any purpose, without permission or attribution. The code snippets are provided “as is”, without warranty of any kind.</a:t>
+            </a:r>
+          </a:p>
+        </p:txBody>
+      </p:sp>
+      <p:sp>
+        <p:nvSpPr>
+          <p:cNvPr id="6" name="Slide Number Placeholder 5">
+            <a:extLst>
+              <a:ext uri="{FF2B5EF4-FFF2-40B4-BE49-F238E27FC236}">
+                <a16:creationId xmlns:a16="http://schemas.microsoft.com/office/drawing/2014/main" id="{5F33F24B-1A9E-2EAF-F2AB-89426454DEE9}"/>
+              </a:ext>
+            </a:extLst>
+          </p:cNvPr>
+          <p:cNvSpPr>
+            <a:spLocks noGrp="1"/>
+          </p:cNvSpPr>
+          <p:nvPr>
+            <p:ph idx="12" sz="quarter" type="sldNum"/>
+          </p:nvPr>
+        </p:nvSpPr>
+        <p:spPr>
+          <a:xfrm>
+            <a:off x="8610599" y="6356350"/>
+            <a:ext cx="3135001" cy="365125"/>
+          </a:xfrm>
+        </p:spPr>
+        <p:txBody>
+          <a:bodyPr/>
+          <a:lstStyle/>
+          <a:p>
+            <a:fld id="{7FEFBAB6-26D0-44D8-BD53-612461CE1ACC}" type="slidenum">
+              <a:rPr lang="de-DE" smtClean="0"/>
+              <a:t>‹#›</a:t>
+            </a:fld>
+            <a:endParaRPr lang="de-DE"/>
+          </a:p>
+        </p:txBody>
+      </p:sp>
+    </p:spTree>
+  </p:cSld>
+</p:sld>
+</file>
+
+<file path=ppt/slides/slide6.xml><?xml version="1.0" encoding="utf-8"?>
+<p:sld xmlns:a="http://schemas.openxmlformats.org/drawingml/2006/main" xmlns:r="http://schemas.openxmlformats.org/officeDocument/2006/relationships" xmlns:p="http://schemas.openxmlformats.org/presentationml/2006/main">
+  <p:cSld>
+    <p:spTree>
+      <p:nvGrpSpPr>
+        <p:cNvPr id="1" name=""/>
+        <p:cNvGrpSpPr/>
+        <p:nvPr/>
+      </p:nvGrpSpPr>
+      <p:grpSpPr>
+        <a:xfrm>
+          <a:off x="0" y="0"/>
+          <a:ext cx="0" cy="0"/>
+          <a:chOff x="0" y="0"/>
+          <a:chExt cx="0" cy="0"/>
+        </a:xfrm>
+      </p:grpSpPr>
+      <p:sp>
+        <p:nvSpPr>
+          <p:cNvPr id="3" name="Content Placeholder 2">
+            <a:extLst>
+              <a:ext uri="{FF2B5EF4-FFF2-40B4-BE49-F238E27FC236}">
+                <a16:creationId xmlns:a16="http://schemas.microsoft.com/office/drawing/2014/main" id="{372FA590-20E9-0368-85B4-90C26598F852}"/>
+              </a:ext>
+            </a:extLst>
+          </p:cNvPr>
+          <p:cNvSpPr>
+            <a:spLocks noGrp="1"/>
+          </p:cNvSpPr>
+          <p:nvPr>
+            <p:ph idx="1"/>
+          </p:nvPr>
+        </p:nvSpPr>
+        <p:spPr/>
+        <p:txBody>
+          <a:bodyPr/>
+          <a:lstStyle/>
+          <a:p>
+            <a:pPr lvl="0" indent="0" marL="0">
+              <a:spcBef>
+                <a:spcPts val="3000"/>
+              </a:spcBef>
+              <a:buNone/>
+            </a:pPr>
+            <a:r>
+              <a:rPr b="1"/>
+              <a:t>Contribution statement</a:t>
+            </a:r>
+          </a:p>
+          <a:p>
+            <a:pPr lvl="0" indent="0" marL="0">
+              <a:buNone/>
+            </a:pPr>
+            <a:r>
+              <a:rPr b="1"/>
+              <a:t>Creator</a:t>
+            </a:r>
+            <a:r>
+              <a:rPr/>
+              <a:t>: Sharma, Tejaswini (</a:t>
+            </a:r>
+            <a:r>
+              <a:rPr>
+                <a:hlinkClick r:id="rId2"/>
+              </a:rPr>
+              <a:t>Orcid-ID: 00009-0000-0305-9751</a:t>
+            </a:r>
+            <a:r>
+              <a:rPr/>
+              <a:t>)</a:t>
+            </a:r>
+          </a:p>
+          <a:p>
+            <a:pPr lvl="0" indent="0" marL="0">
+              <a:buNone/>
+            </a:pPr>
+            <a:r>
+              <a:rPr b="1"/>
+              <a:t>Reviewer</a:t>
+            </a:r>
+            <a:r>
+              <a:rPr/>
+              <a:t>: Von Grebmer zu Wolfsthurn, Sarah (</a:t>
+            </a:r>
+            <a:r>
+              <a:rPr>
+                <a:hlinkClick r:id="rId3"/>
+              </a:rPr>
+              <a:t>Ordcid-ID: 0000-0002-6413-3895</a:t>
+            </a:r>
+            <a:r>
+              <a:rPr/>
+              <a:t>)</a:t>
+            </a:r>
+          </a:p>
+        </p:txBody>
+      </p:sp>
+      <p:sp>
+        <p:nvSpPr>
+          <p:cNvPr id="6" name="Slide Number Placeholder 5">
+            <a:extLst>
+              <a:ext uri="{FF2B5EF4-FFF2-40B4-BE49-F238E27FC236}">
+                <a16:creationId xmlns:a16="http://schemas.microsoft.com/office/drawing/2014/main" id="{5F33F24B-1A9E-2EAF-F2AB-89426454DEE9}"/>
+              </a:ext>
+            </a:extLst>
+          </p:cNvPr>
+          <p:cNvSpPr>
+            <a:spLocks noGrp="1"/>
+          </p:cNvSpPr>
+          <p:nvPr>
+            <p:ph idx="12" sz="quarter" type="sldNum"/>
+          </p:nvPr>
+        </p:nvSpPr>
+        <p:spPr>
+          <a:xfrm>
+            <a:off x="8610599" y="6356350"/>
+            <a:ext cx="3135001" cy="365125"/>
+          </a:xfrm>
+        </p:spPr>
+        <p:txBody>
+          <a:bodyPr/>
+          <a:lstStyle/>
+          <a:p>
+            <a:fld id="{7FEFBAB6-26D0-44D8-BD53-612461CE1ACC}" type="slidenum">
+              <a:rPr lang="de-DE" smtClean="0"/>
+              <a:t>‹#›</a:t>
+            </a:fld>
+            <a:endParaRPr lang="de-DE"/>
+          </a:p>
+        </p:txBody>
+      </p:sp>
+    </p:spTree>
+  </p:cSld>
+</p:sld>
+</file>
+
+<file path=ppt/slides/slide7.xml><?xml version="1.0" encoding="utf-8"?>
 <p:sld xmlns:a="http://schemas.openxmlformats.org/drawingml/2006/main" xmlns:r="http://schemas.openxmlformats.org/officeDocument/2006/relationships" xmlns:p="http://schemas.openxmlformats.org/presentationml/2006/main">
   <p:cSld>
     <p:spTree>
@@ -16280,7 +16676,7 @@
 </p:sld>
 </file>
 
-<file path=ppt/slides/slide6.xml><?xml version="1.0" encoding="utf-8"?>
+<file path=ppt/slides/slide8.xml><?xml version="1.0" encoding="utf-8"?>
 <p:sld xmlns:a="http://schemas.openxmlformats.org/drawingml/2006/main" xmlns:r="http://schemas.openxmlformats.org/officeDocument/2006/relationships" xmlns:p="http://schemas.openxmlformats.org/presentationml/2006/main">
   <p:cSld>
     <p:spTree>
@@ -16447,190 +16843,6 @@
 </p:sld>
 </file>
 
-<file path=ppt/slides/slide7.xml><?xml version="1.0" encoding="utf-8"?>
-<p:sld xmlns:a="http://schemas.openxmlformats.org/drawingml/2006/main" xmlns:r="http://schemas.openxmlformats.org/officeDocument/2006/relationships" xmlns:p="http://schemas.openxmlformats.org/presentationml/2006/main">
-  <p:cSld>
-    <p:spTree>
-      <p:nvGrpSpPr>
-        <p:cNvPr id="1" name=""/>
-        <p:cNvGrpSpPr/>
-        <p:nvPr/>
-      </p:nvGrpSpPr>
-      <p:grpSpPr>
-        <a:xfrm>
-          <a:off x="0" y="0"/>
-          <a:ext cx="0" cy="0"/>
-          <a:chOff x="0" y="0"/>
-          <a:chExt cx="0" cy="0"/>
-        </a:xfrm>
-      </p:grpSpPr>
-      <p:sp>
-        <p:nvSpPr>
-          <p:cNvPr id="2" name="Title 1">
-            <a:extLst>
-              <a:ext uri="{FF2B5EF4-FFF2-40B4-BE49-F238E27FC236}">
-                <a16:creationId xmlns:a16="http://schemas.microsoft.com/office/drawing/2014/main" id="{6BF04AE0-F94F-A586-34B8-68D9CAB6C6D1}"/>
-              </a:ext>
-            </a:extLst>
-          </p:cNvPr>
-          <p:cNvSpPr>
-            <a:spLocks noGrp="1"/>
-          </p:cNvSpPr>
-          <p:nvPr>
-            <p:ph type="title"/>
-          </p:nvPr>
-        </p:nvSpPr>
-        <p:spPr>
-          <a:xfrm>
-            <a:off x="2295524" y="432532"/>
-            <a:ext cx="9450077" cy="825501"/>
-          </a:xfrm>
-        </p:spPr>
-        <p:txBody>
-          <a:bodyPr/>
-          <a:lstStyle/>
-          <a:p>
-            <a:pPr lvl="0" indent="0" marL="0">
-              <a:buNone/>
-            </a:pPr>
-            <a:r>
-              <a:rPr/>
-              <a:t>Questions from the previous submodule?</a:t>
-            </a:r>
-          </a:p>
-        </p:txBody>
-      </p:sp>
-      <p:sp>
-        <p:nvSpPr>
-          <p:cNvPr id="6" name="Slide Number Placeholder 5">
-            <a:extLst>
-              <a:ext uri="{FF2B5EF4-FFF2-40B4-BE49-F238E27FC236}">
-                <a16:creationId xmlns:a16="http://schemas.microsoft.com/office/drawing/2014/main" id="{5F33F24B-1A9E-2EAF-F2AB-89426454DEE9}"/>
-              </a:ext>
-            </a:extLst>
-          </p:cNvPr>
-          <p:cNvSpPr>
-            <a:spLocks noGrp="1"/>
-          </p:cNvSpPr>
-          <p:nvPr>
-            <p:ph idx="12" sz="quarter" type="sldNum"/>
-          </p:nvPr>
-        </p:nvSpPr>
-        <p:spPr>
-          <a:xfrm>
-            <a:off x="8610599" y="6356350"/>
-            <a:ext cx="3135001" cy="365125"/>
-          </a:xfrm>
-        </p:spPr>
-        <p:txBody>
-          <a:bodyPr/>
-          <a:lstStyle/>
-          <a:p>
-            <a:fld id="{7FEFBAB6-26D0-44D8-BD53-612461CE1ACC}" type="slidenum">
-              <a:rPr lang="de-DE" smtClean="0"/>
-              <a:t>‹#›</a:t>
-            </a:fld>
-            <a:endParaRPr lang="de-DE"/>
-          </a:p>
-        </p:txBody>
-      </p:sp>
-    </p:spTree>
-  </p:cSld>
-</p:sld>
-</file>
-
-<file path=ppt/slides/slide8.xml><?xml version="1.0" encoding="utf-8"?>
-<p:sld xmlns:a="http://schemas.openxmlformats.org/drawingml/2006/main" xmlns:r="http://schemas.openxmlformats.org/officeDocument/2006/relationships" xmlns:p="http://schemas.openxmlformats.org/presentationml/2006/main">
-  <p:cSld>
-    <p:spTree>
-      <p:nvGrpSpPr>
-        <p:cNvPr id="1" name=""/>
-        <p:cNvGrpSpPr/>
-        <p:nvPr/>
-      </p:nvGrpSpPr>
-      <p:grpSpPr>
-        <a:xfrm>
-          <a:off x="0" y="0"/>
-          <a:ext cx="0" cy="0"/>
-          <a:chOff x="0" y="0"/>
-          <a:chExt cx="0" cy="0"/>
-        </a:xfrm>
-      </p:grpSpPr>
-      <p:sp>
-        <p:nvSpPr>
-          <p:cNvPr id="2" name="Title 1">
-            <a:extLst>
-              <a:ext uri="{FF2B5EF4-FFF2-40B4-BE49-F238E27FC236}">
-                <a16:creationId xmlns:a16="http://schemas.microsoft.com/office/drawing/2014/main" id="{6BF04AE0-F94F-A586-34B8-68D9CAB6C6D1}"/>
-              </a:ext>
-            </a:extLst>
-          </p:cNvPr>
-          <p:cNvSpPr>
-            <a:spLocks noGrp="1"/>
-          </p:cNvSpPr>
-          <p:nvPr>
-            <p:ph type="title"/>
-          </p:nvPr>
-        </p:nvSpPr>
-        <p:spPr>
-          <a:xfrm>
-            <a:off x="2295524" y="432532"/>
-            <a:ext cx="9450077" cy="825501"/>
-          </a:xfrm>
-        </p:spPr>
-        <p:txBody>
-          <a:bodyPr/>
-          <a:lstStyle/>
-          <a:p>
-            <a:pPr lvl="0" indent="0" marL="0">
-              <a:buNone/>
-            </a:pPr>
-            <a:r>
-              <a:rPr/>
-              <a:t>Before we start: Survey time!</a:t>
-            </a:r>
-          </a:p>
-        </p:txBody>
-      </p:sp>
-      <p:sp>
-        <p:nvSpPr>
-          <p:cNvPr id="6" name="Slide Number Placeholder 5">
-            <a:extLst>
-              <a:ext uri="{FF2B5EF4-FFF2-40B4-BE49-F238E27FC236}">
-                <a16:creationId xmlns:a16="http://schemas.microsoft.com/office/drawing/2014/main" id="{5F33F24B-1A9E-2EAF-F2AB-89426454DEE9}"/>
-              </a:ext>
-            </a:extLst>
-          </p:cNvPr>
-          <p:cNvSpPr>
-            <a:spLocks noGrp="1"/>
-          </p:cNvSpPr>
-          <p:nvPr>
-            <p:ph idx="12" sz="quarter" type="sldNum"/>
-          </p:nvPr>
-        </p:nvSpPr>
-        <p:spPr>
-          <a:xfrm>
-            <a:off x="8610599" y="6356350"/>
-            <a:ext cx="3135001" cy="365125"/>
-          </a:xfrm>
-        </p:spPr>
-        <p:txBody>
-          <a:bodyPr/>
-          <a:lstStyle/>
-          <a:p>
-            <a:fld id="{7FEFBAB6-26D0-44D8-BD53-612461CE1ACC}" type="slidenum">
-              <a:rPr lang="de-DE" smtClean="0"/>
-              <a:t>‹#›</a:t>
-            </a:fld>
-            <a:endParaRPr lang="de-DE"/>
-          </a:p>
-        </p:txBody>
-      </p:sp>
-    </p:spTree>
-  </p:cSld>
-</p:sld>
-</file>
-
 <file path=ppt/slides/slide9.xml><?xml version="1.0" encoding="utf-8"?>
 <p:sld xmlns:a="http://schemas.openxmlformats.org/drawingml/2006/main" xmlns:r="http://schemas.openxmlformats.org/officeDocument/2006/relationships" xmlns:p="http://schemas.openxmlformats.org/presentationml/2006/main">
   <p:cSld>
@@ -16650,67 +16862,36 @@
       </p:grpSpPr>
       <p:sp>
         <p:nvSpPr>
-          <p:cNvPr id="3" name="Content Placeholder 2">
-            <a:extLst>
-              <a:ext uri="{FF2B5EF4-FFF2-40B4-BE49-F238E27FC236}">
-                <a16:creationId xmlns:a16="http://schemas.microsoft.com/office/drawing/2014/main" id="{372FA590-20E9-0368-85B4-90C26598F852}"/>
-              </a:ext>
-            </a:extLst>
-          </p:cNvPr>
-          <p:cNvSpPr>
-            <a:spLocks noGrp="1"/>
-          </p:cNvSpPr>
-          <p:nvPr>
-            <p:ph idx="1"/>
-          </p:nvPr>
-        </p:nvSpPr>
-        <p:spPr/>
-        <p:txBody>
-          <a:bodyPr/>
-          <a:lstStyle/>
-          <a:p>
-            <a:pPr lvl="0" indent="0" marL="0">
-              <a:buNone/>
-            </a:pPr>
-            <a:r>
-              <a:rPr b="1"/>
-              <a:t>What is your level of familiarity with citing and referencing scientific papers?</a:t>
-            </a:r>
-          </a:p>
-          <a:p>
-            <a:pPr lvl="0" indent="-457200" marL="457200">
-              <a:buAutoNum type="alphaLcPeriod"/>
-            </a:pPr>
-            <a:r>
-              <a:rPr/>
-              <a:t>I have never heard of it before.</a:t>
-            </a:r>
-          </a:p>
-          <a:p>
-            <a:pPr lvl="0" indent="-457200" marL="457200">
-              <a:buAutoNum type="alphaLcPeriod"/>
-            </a:pPr>
-            <a:r>
-              <a:rPr/>
-              <a:t>I have heard of it but have never worked with it.</a:t>
-            </a:r>
-          </a:p>
-          <a:p>
-            <a:pPr lvl="0" indent="-457200" marL="457200">
-              <a:buAutoNum type="alphaLcPeriod"/>
-            </a:pPr>
-            <a:r>
-              <a:rPr/>
-              <a:t>I have basic understanding and experience with it.</a:t>
-            </a:r>
-          </a:p>
-          <a:p>
-            <a:pPr lvl="0" indent="-457200" marL="457200">
-              <a:buAutoNum type="alphaLcPeriod"/>
-            </a:pPr>
-            <a:r>
-              <a:rPr/>
-              <a:t>I am very familiar and have worked with it extensively.</a:t>
+          <p:cNvPr id="2" name="Title 1">
+            <a:extLst>
+              <a:ext uri="{FF2B5EF4-FFF2-40B4-BE49-F238E27FC236}">
+                <a16:creationId xmlns:a16="http://schemas.microsoft.com/office/drawing/2014/main" id="{6BF04AE0-F94F-A586-34B8-68D9CAB6C6D1}"/>
+              </a:ext>
+            </a:extLst>
+          </p:cNvPr>
+          <p:cNvSpPr>
+            <a:spLocks noGrp="1"/>
+          </p:cNvSpPr>
+          <p:nvPr>
+            <p:ph type="title"/>
+          </p:nvPr>
+        </p:nvSpPr>
+        <p:spPr>
+          <a:xfrm>
+            <a:off x="2295524" y="432532"/>
+            <a:ext cx="9450077" cy="825501"/>
+          </a:xfrm>
+        </p:spPr>
+        <p:txBody>
+          <a:bodyPr/>
+          <a:lstStyle/>
+          <a:p>
+            <a:pPr lvl="0" indent="0" marL="0">
+              <a:buNone/>
+            </a:pPr>
+            <a:r>
+              <a:rPr/>
+              <a:t>Questions from the previous submodule?</a:t>
             </a:r>
           </a:p>
         </p:txBody>

--- a/index.pptx
+++ b/index.pptx
@@ -1,6 +1,6 @@
 
 <file path=ppt/presentation.xml><?xml version="1.0" encoding="utf-8"?>
-<p:presentation xmlns:a="http://schemas.openxmlformats.org/drawingml/2006/main" xmlns:p="http://schemas.openxmlformats.org/presentationml/2006/main" xmlns:r="http://schemas.openxmlformats.org/officeDocument/2006/relationships" saveSubsetFonts="1">
+<p:presentation xmlns:a="http://schemas.openxmlformats.org/drawingml/2006/main" xmlns:p="http://schemas.openxmlformats.org/presentationml/2006/main" xmlns:r="http://schemas.openxmlformats.org/officeDocument/2006/relationships" autoCompressPictures="0" saveSubsetFonts="1">
   <p:sldMasterIdLst>
     <p:sldMasterId id="2147483648" r:id="rId1"/>
   </p:sldMasterIdLst>
@@ -52,13 +52,13 @@
     <p:sldId id="297" r:id="rId43"/>
     <p:sldId id="298" r:id="rId44"/>
   </p:sldIdLst>
-  <p:sldSz cx="12192000" cy="6858000"/>
+  <p:sldSz cx="9144000" cy="5143500" type="screen16x9"/>
   <p:notesSz cx="6858000" cy="9144000"/>
   <p:defaultTextStyle>
     <a:defPPr>
-      <a:defRPr lang="de-DE"/>
+      <a:defRPr lang="en-US"/>
     </a:defPPr>
-    <a:lvl1pPr algn="l" defTabSz="914400" eaLnBrk="1" hangingPunct="1" latinLnBrk="0" marL="0" rtl="0">
+    <a:lvl1pPr algn="l" defTabSz="457200" eaLnBrk="1" hangingPunct="1" latinLnBrk="0" marL="0" rtl="0">
       <a:defRPr kern="1200" sz="1800">
         <a:solidFill>
           <a:schemeClr val="tx1"/>
@@ -68,7 +68,7 @@
         <a:cs typeface="+mn-cs"/>
       </a:defRPr>
     </a:lvl1pPr>
-    <a:lvl2pPr algn="l" defTabSz="914400" eaLnBrk="1" hangingPunct="1" latinLnBrk="0" marL="457200" rtl="0">
+    <a:lvl2pPr algn="l" defTabSz="457200" eaLnBrk="1" hangingPunct="1" latinLnBrk="0" marL="457200" rtl="0">
       <a:defRPr kern="1200" sz="1800">
         <a:solidFill>
           <a:schemeClr val="tx1"/>
@@ -78,7 +78,7 @@
         <a:cs typeface="+mn-cs"/>
       </a:defRPr>
     </a:lvl2pPr>
-    <a:lvl3pPr algn="l" defTabSz="914400" eaLnBrk="1" hangingPunct="1" latinLnBrk="0" marL="914400" rtl="0">
+    <a:lvl3pPr algn="l" defTabSz="457200" eaLnBrk="1" hangingPunct="1" latinLnBrk="0" marL="914400" rtl="0">
       <a:defRPr kern="1200" sz="1800">
         <a:solidFill>
           <a:schemeClr val="tx1"/>
@@ -88,7 +88,7 @@
         <a:cs typeface="+mn-cs"/>
       </a:defRPr>
     </a:lvl3pPr>
-    <a:lvl4pPr algn="l" defTabSz="914400" eaLnBrk="1" hangingPunct="1" latinLnBrk="0" marL="1371600" rtl="0">
+    <a:lvl4pPr algn="l" defTabSz="457200" eaLnBrk="1" hangingPunct="1" latinLnBrk="0" marL="1371600" rtl="0">
       <a:defRPr kern="1200" sz="1800">
         <a:solidFill>
           <a:schemeClr val="tx1"/>
@@ -98,7 +98,7 @@
         <a:cs typeface="+mn-cs"/>
       </a:defRPr>
     </a:lvl4pPr>
-    <a:lvl5pPr algn="l" defTabSz="914400" eaLnBrk="1" hangingPunct="1" latinLnBrk="0" marL="1828800" rtl="0">
+    <a:lvl5pPr algn="l" defTabSz="457200" eaLnBrk="1" hangingPunct="1" latinLnBrk="0" marL="1828800" rtl="0">
       <a:defRPr kern="1200" sz="1800">
         <a:solidFill>
           <a:schemeClr val="tx1"/>
@@ -108,7 +108,7 @@
         <a:cs typeface="+mn-cs"/>
       </a:defRPr>
     </a:lvl5pPr>
-    <a:lvl6pPr algn="l" defTabSz="914400" eaLnBrk="1" hangingPunct="1" latinLnBrk="0" marL="2286000" rtl="0">
+    <a:lvl6pPr algn="l" defTabSz="457200" eaLnBrk="1" hangingPunct="1" latinLnBrk="0" marL="2286000" rtl="0">
       <a:defRPr kern="1200" sz="1800">
         <a:solidFill>
           <a:schemeClr val="tx1"/>
@@ -118,7 +118,7 @@
         <a:cs typeface="+mn-cs"/>
       </a:defRPr>
     </a:lvl6pPr>
-    <a:lvl7pPr algn="l" defTabSz="914400" eaLnBrk="1" hangingPunct="1" latinLnBrk="0" marL="2743200" rtl="0">
+    <a:lvl7pPr algn="l" defTabSz="457200" eaLnBrk="1" hangingPunct="1" latinLnBrk="0" marL="2743200" rtl="0">
       <a:defRPr kern="1200" sz="1800">
         <a:solidFill>
           <a:schemeClr val="tx1"/>
@@ -128,7 +128,7 @@
         <a:cs typeface="+mn-cs"/>
       </a:defRPr>
     </a:lvl7pPr>
-    <a:lvl8pPr algn="l" defTabSz="914400" eaLnBrk="1" hangingPunct="1" latinLnBrk="0" marL="3200400" rtl="0">
+    <a:lvl8pPr algn="l" defTabSz="457200" eaLnBrk="1" hangingPunct="1" latinLnBrk="0" marL="3200400" rtl="0">
       <a:defRPr kern="1200" sz="1800">
         <a:solidFill>
           <a:schemeClr val="tx1"/>
@@ -138,7 +138,7 @@
         <a:cs typeface="+mn-cs"/>
       </a:defRPr>
     </a:lvl8pPr>
-    <a:lvl9pPr algn="l" defTabSz="914400" eaLnBrk="1" hangingPunct="1" latinLnBrk="0" marL="3657600" rtl="0">
+    <a:lvl9pPr algn="l" defTabSz="457200" eaLnBrk="1" hangingPunct="1" latinLnBrk="0" marL="3657600" rtl="0">
       <a:defRPr kern="1200" sz="1800">
         <a:solidFill>
           <a:schemeClr val="tx1"/>
@@ -151,7 +151,18 @@
   </p:defaultTextStyle>
   <p:extLst>
     <p:ext uri="{EFAFB233-063F-42B5-8137-9DF3F51BA10A}">
-      <p15:sldGuideLst xmlns:p15="http://schemas.microsoft.com/office/powerpoint/2012/main"/>
+      <p15:sldGuideLst xmlns:p15="http://schemas.microsoft.com/office/powerpoint/2012/main">
+        <p15:guide id="1" orient="horz" pos="1620" userDrawn="1">
+          <p15:clr>
+            <a:srgbClr val="A4A3A4"/>
+          </p15:clr>
+        </p15:guide>
+        <p15:guide id="2" pos="2880" userDrawn="1">
+          <p15:clr>
+            <a:srgbClr val="A4A3A4"/>
+          </p15:clr>
+        </p15:guide>
+      </p15:sldGuideLst>
     </p:ext>
   </p:extLst>
 </p:presentation>
@@ -237,9 +248,9 @@
             </a:lvl1pPr>
           </a:lstStyle>
           <a:p>
-            <a:fld id="{8B57B064-B752-FD47-97A2-4C24AE6B024A}" type="datetimeFigureOut">
+            <a:fld id="{0F9C1CCF-B725-44A7-AA57-5E433BD85C9F}" type="datetimeFigureOut">
               <a:rPr lang="en-US" smtClean="0"/>
-              <a:t>9/22/26</a:t>
+              <a:t>1/2/22</a:t>
             </a:fld>
             <a:endParaRPr lang="en-US"/>
           </a:p>
@@ -395,7 +406,7 @@
             </a:lvl1pPr>
           </a:lstStyle>
           <a:p>
-            <a:fld id="{1335DC12-1F25-3F4F-8976-F7B9B059DA07}" type="slidenum">
+            <a:fld id="{18BDFEC3-8487-43E8-A154-7C12CBC1FFF2}" type="slidenum">
               <a:rPr lang="en-US" smtClean="0"/>
               <a:t>‹#›</a:t>
             </a:fld>
@@ -406,7 +417,7 @@
     </p:spTree>
     <p:extLst>
       <p:ext uri="{BB962C8B-B14F-4D97-AF65-F5344CB8AC3E}">
-        <p14:creationId xmlns:p14="http://schemas.microsoft.com/office/powerpoint/2010/main" val="2309847607"/>
+        <p14:creationId xmlns:p14="http://schemas.microsoft.com/office/powerpoint/2010/main" val="3782709779"/>
       </p:ext>
     </p:extLst>
   </p:cSld>
@@ -579,7 +590,7 @@
           <a:bodyPr/>
           <a:lstStyle/>
           <a:p>
-            <a:fld id="{1335DC12-1F25-3F4F-8976-F7B9B059DA07}" type="slidenum">
+            <a:fld id="{18BDFEC3-8487-43E8-A154-7C12CBC1FFF2}" type="slidenum">
               <a:rPr lang="en-US"/>
               <a:t>5</a:t>
             </a:fld>
@@ -706,7 +717,7 @@
           <a:bodyPr/>
           <a:lstStyle/>
           <a:p>
-            <a:fld id="{1335DC12-1F25-3F4F-8976-F7B9B059DA07}" type="slidenum">
+            <a:fld id="{18BDFEC3-8487-43E8-A154-7C12CBC1FFF2}" type="slidenum">
               <a:rPr lang="en-US"/>
               <a:t>17</a:t>
             </a:fld>
@@ -847,7 +858,7 @@
           <a:bodyPr/>
           <a:lstStyle/>
           <a:p>
-            <a:fld id="{1335DC12-1F25-3F4F-8976-F7B9B059DA07}" type="slidenum">
+            <a:fld id="{18BDFEC3-8487-43E8-A154-7C12CBC1FFF2}" type="slidenum">
               <a:rPr lang="en-US"/>
               <a:t>18</a:t>
             </a:fld>
@@ -994,7 +1005,7 @@
           <a:bodyPr/>
           <a:lstStyle/>
           <a:p>
-            <a:fld id="{1335DC12-1F25-3F4F-8976-F7B9B059DA07}" type="slidenum">
+            <a:fld id="{18BDFEC3-8487-43E8-A154-7C12CBC1FFF2}" type="slidenum">
               <a:rPr lang="en-US"/>
               <a:t>19</a:t>
             </a:fld>
@@ -1131,7 +1142,7 @@
           <a:bodyPr/>
           <a:lstStyle/>
           <a:p>
-            <a:fld id="{1335DC12-1F25-3F4F-8976-F7B9B059DA07}" type="slidenum">
+            <a:fld id="{18BDFEC3-8487-43E8-A154-7C12CBC1FFF2}" type="slidenum">
               <a:rPr lang="en-US"/>
               <a:t>20</a:t>
             </a:fld>
@@ -1231,7 +1242,7 @@
           <a:bodyPr/>
           <a:lstStyle/>
           <a:p>
-            <a:fld id="{1335DC12-1F25-3F4F-8976-F7B9B059DA07}" type="slidenum">
+            <a:fld id="{18BDFEC3-8487-43E8-A154-7C12CBC1FFF2}" type="slidenum">
               <a:rPr lang="en-US"/>
               <a:t>21</a:t>
             </a:fld>
@@ -1407,7 +1418,7 @@
           <a:bodyPr/>
           <a:lstStyle/>
           <a:p>
-            <a:fld id="{1335DC12-1F25-3F4F-8976-F7B9B059DA07}" type="slidenum">
+            <a:fld id="{18BDFEC3-8487-43E8-A154-7C12CBC1FFF2}" type="slidenum">
               <a:rPr lang="en-US"/>
               <a:t>22</a:t>
             </a:fld>
@@ -1517,7 +1528,7 @@
           <a:bodyPr/>
           <a:lstStyle/>
           <a:p>
-            <a:fld id="{1335DC12-1F25-3F4F-8976-F7B9B059DA07}" type="slidenum">
+            <a:fld id="{18BDFEC3-8487-43E8-A154-7C12CBC1FFF2}" type="slidenum">
               <a:rPr lang="en-US"/>
               <a:t>23</a:t>
             </a:fld>
@@ -1621,7 +1632,7 @@
           <a:bodyPr/>
           <a:lstStyle/>
           <a:p>
-            <a:fld id="{1335DC12-1F25-3F4F-8976-F7B9B059DA07}" type="slidenum">
+            <a:fld id="{18BDFEC3-8487-43E8-A154-7C12CBC1FFF2}" type="slidenum">
               <a:rPr lang="en-US"/>
               <a:t>24</a:t>
             </a:fld>
@@ -1793,7 +1804,7 @@
           <a:bodyPr/>
           <a:lstStyle/>
           <a:p>
-            <a:fld id="{1335DC12-1F25-3F4F-8976-F7B9B059DA07}" type="slidenum">
+            <a:fld id="{18BDFEC3-8487-43E8-A154-7C12CBC1FFF2}" type="slidenum">
               <a:rPr lang="en-US"/>
               <a:t>25</a:t>
             </a:fld>
@@ -1975,7 +1986,7 @@
           <a:bodyPr/>
           <a:lstStyle/>
           <a:p>
-            <a:fld id="{1335DC12-1F25-3F4F-8976-F7B9B059DA07}" type="slidenum">
+            <a:fld id="{18BDFEC3-8487-43E8-A154-7C12CBC1FFF2}" type="slidenum">
               <a:rPr lang="en-US"/>
               <a:t>26</a:t>
             </a:fld>
@@ -2079,7 +2090,7 @@
           <a:bodyPr/>
           <a:lstStyle/>
           <a:p>
-            <a:fld id="{1335DC12-1F25-3F4F-8976-F7B9B059DA07}" type="slidenum">
+            <a:fld id="{18BDFEC3-8487-43E8-A154-7C12CBC1FFF2}" type="slidenum">
               <a:rPr lang="en-US"/>
               <a:t>7</a:t>
             </a:fld>
@@ -2183,7 +2194,7 @@
           <a:bodyPr/>
           <a:lstStyle/>
           <a:p>
-            <a:fld id="{1335DC12-1F25-3F4F-8976-F7B9B059DA07}" type="slidenum">
+            <a:fld id="{18BDFEC3-8487-43E8-A154-7C12CBC1FFF2}" type="slidenum">
               <a:rPr lang="en-US"/>
               <a:t>27</a:t>
             </a:fld>
@@ -2307,7 +2318,7 @@
           <a:bodyPr/>
           <a:lstStyle/>
           <a:p>
-            <a:fld id="{1335DC12-1F25-3F4F-8976-F7B9B059DA07}" type="slidenum">
+            <a:fld id="{18BDFEC3-8487-43E8-A154-7C12CBC1FFF2}" type="slidenum">
               <a:rPr lang="en-US"/>
               <a:t>29</a:t>
             </a:fld>
@@ -2443,7 +2454,7 @@
           <a:bodyPr/>
           <a:lstStyle/>
           <a:p>
-            <a:fld id="{1335DC12-1F25-3F4F-8976-F7B9B059DA07}" type="slidenum">
+            <a:fld id="{18BDFEC3-8487-43E8-A154-7C12CBC1FFF2}" type="slidenum">
               <a:rPr lang="en-US"/>
               <a:t>30</a:t>
             </a:fld>
@@ -2547,7 +2558,7 @@
           <a:bodyPr/>
           <a:lstStyle/>
           <a:p>
-            <a:fld id="{1335DC12-1F25-3F4F-8976-F7B9B059DA07}" type="slidenum">
+            <a:fld id="{18BDFEC3-8487-43E8-A154-7C12CBC1FFF2}" type="slidenum">
               <a:rPr lang="en-US"/>
               <a:t>31</a:t>
             </a:fld>
@@ -2693,7 +2704,7 @@
           <a:bodyPr/>
           <a:lstStyle/>
           <a:p>
-            <a:fld id="{1335DC12-1F25-3F4F-8976-F7B9B059DA07}" type="slidenum">
+            <a:fld id="{18BDFEC3-8487-43E8-A154-7C12CBC1FFF2}" type="slidenum">
               <a:rPr lang="en-US"/>
               <a:t>32</a:t>
             </a:fld>
@@ -2922,7 +2933,7 @@
           <a:bodyPr/>
           <a:lstStyle/>
           <a:p>
-            <a:fld id="{1335DC12-1F25-3F4F-8976-F7B9B059DA07}" type="slidenum">
+            <a:fld id="{18BDFEC3-8487-43E8-A154-7C12CBC1FFF2}" type="slidenum">
               <a:rPr lang="en-US"/>
               <a:t>33</a:t>
             </a:fld>
@@ -3045,7 +3056,7 @@
           <a:bodyPr/>
           <a:lstStyle/>
           <a:p>
-            <a:fld id="{1335DC12-1F25-3F4F-8976-F7B9B059DA07}" type="slidenum">
+            <a:fld id="{18BDFEC3-8487-43E8-A154-7C12CBC1FFF2}" type="slidenum">
               <a:rPr lang="en-US"/>
               <a:t>34</a:t>
             </a:fld>
@@ -3163,7 +3174,7 @@
           <a:bodyPr/>
           <a:lstStyle/>
           <a:p>
-            <a:fld id="{1335DC12-1F25-3F4F-8976-F7B9B059DA07}" type="slidenum">
+            <a:fld id="{18BDFEC3-8487-43E8-A154-7C12CBC1FFF2}" type="slidenum">
               <a:rPr lang="en-US"/>
               <a:t>35</a:t>
             </a:fld>
@@ -3257,7 +3268,7 @@
           <a:bodyPr/>
           <a:lstStyle/>
           <a:p>
-            <a:fld id="{1335DC12-1F25-3F4F-8976-F7B9B059DA07}" type="slidenum">
+            <a:fld id="{18BDFEC3-8487-43E8-A154-7C12CBC1FFF2}" type="slidenum">
               <a:rPr lang="en-US"/>
               <a:t>36</a:t>
             </a:fld>
@@ -3381,7 +3392,7 @@
           <a:bodyPr/>
           <a:lstStyle/>
           <a:p>
-            <a:fld id="{1335DC12-1F25-3F4F-8976-F7B9B059DA07}" type="slidenum">
+            <a:fld id="{18BDFEC3-8487-43E8-A154-7C12CBC1FFF2}" type="slidenum">
               <a:rPr lang="en-US"/>
               <a:t>39</a:t>
             </a:fld>
@@ -3485,7 +3496,7 @@
           <a:bodyPr/>
           <a:lstStyle/>
           <a:p>
-            <a:fld id="{1335DC12-1F25-3F4F-8976-F7B9B059DA07}" type="slidenum">
+            <a:fld id="{18BDFEC3-8487-43E8-A154-7C12CBC1FFF2}" type="slidenum">
               <a:rPr lang="en-US"/>
               <a:t>8</a:t>
             </a:fld>
@@ -3607,7 +3618,7 @@
           <a:bodyPr/>
           <a:lstStyle/>
           <a:p>
-            <a:fld id="{1335DC12-1F25-3F4F-8976-F7B9B059DA07}" type="slidenum">
+            <a:fld id="{18BDFEC3-8487-43E8-A154-7C12CBC1FFF2}" type="slidenum">
               <a:rPr lang="en-US"/>
               <a:t>42</a:t>
             </a:fld>
@@ -3763,7 +3774,7 @@
           <a:bodyPr/>
           <a:lstStyle/>
           <a:p>
-            <a:fld id="{1335DC12-1F25-3F4F-8976-F7B9B059DA07}" type="slidenum">
+            <a:fld id="{18BDFEC3-8487-43E8-A154-7C12CBC1FFF2}" type="slidenum">
               <a:rPr lang="en-US"/>
               <a:t>9</a:t>
             </a:fld>
@@ -3895,7 +3906,7 @@
           <a:bodyPr/>
           <a:lstStyle/>
           <a:p>
-            <a:fld id="{1335DC12-1F25-3F4F-8976-F7B9B059DA07}" type="slidenum">
+            <a:fld id="{18BDFEC3-8487-43E8-A154-7C12CBC1FFF2}" type="slidenum">
               <a:rPr lang="en-US"/>
               <a:t>10</a:t>
             </a:fld>
@@ -3999,7 +4010,7 @@
           <a:bodyPr/>
           <a:lstStyle/>
           <a:p>
-            <a:fld id="{1335DC12-1F25-3F4F-8976-F7B9B059DA07}" type="slidenum">
+            <a:fld id="{18BDFEC3-8487-43E8-A154-7C12CBC1FFF2}" type="slidenum">
               <a:rPr lang="en-US"/>
               <a:t>13</a:t>
             </a:fld>
@@ -4131,7 +4142,7 @@
           <a:bodyPr/>
           <a:lstStyle/>
           <a:p>
-            <a:fld id="{1335DC12-1F25-3F4F-8976-F7B9B059DA07}" type="slidenum">
+            <a:fld id="{18BDFEC3-8487-43E8-A154-7C12CBC1FFF2}" type="slidenum">
               <a:rPr lang="en-US"/>
               <a:t>14</a:t>
             </a:fld>
@@ -4253,7 +4264,7 @@
           <a:bodyPr/>
           <a:lstStyle/>
           <a:p>
-            <a:fld id="{1335DC12-1F25-3F4F-8976-F7B9B059DA07}" type="slidenum">
+            <a:fld id="{18BDFEC3-8487-43E8-A154-7C12CBC1FFF2}" type="slidenum">
               <a:rPr lang="en-US"/>
               <a:t>15</a:t>
             </a:fld>
@@ -4376,7 +4387,7 @@
           <a:bodyPr/>
           <a:lstStyle/>
           <a:p>
-            <a:fld id="{1335DC12-1F25-3F4F-8976-F7B9B059DA07}" type="slidenum">
+            <a:fld id="{18BDFEC3-8487-43E8-A154-7C12CBC1FFF2}" type="slidenum">
               <a:rPr lang="en-US"/>
               <a:t>16</a:t>
             </a:fld>
@@ -4408,260 +4419,152 @@
       </p:grpSpPr>
       <p:sp>
         <p:nvSpPr>
-          <p:cNvPr id="7" name="Rechteck 6">
-            <a:extLst>
-              <a:ext uri="{FF2B5EF4-FFF2-40B4-BE49-F238E27FC236}">
-                <a16:creationId xmlns:a16="http://schemas.microsoft.com/office/drawing/2014/main" id="{0EBEDB44-0C23-AFEA-4271-46EBABA13E26}"/>
-              </a:ext>
-            </a:extLst>
-          </p:cNvPr>
-          <p:cNvSpPr/>
-          <p:nvPr userDrawn="1"/>
+          <p:cNvPr id="2" name="Title 1"/>
+          <p:cNvSpPr>
+            <a:spLocks noGrp="1"/>
+          </p:cNvSpPr>
+          <p:nvPr>
+            <p:ph type="ctrTitle"/>
+          </p:nvPr>
         </p:nvSpPr>
         <p:spPr>
           <a:xfrm>
-            <a:off x="0" y="1483200"/>
-            <a:ext cx="12191999" cy="5374800"/>
+            <a:off x="685800" y="1597819"/>
+            <a:ext cx="7772400" cy="1102519"/>
           </a:xfrm>
-          <a:prstGeom prst="rect">
-            <a:avLst/>
-          </a:prstGeom>
-          <a:solidFill>
-            <a:srgbClr val="00883A"/>
-          </a:solidFill>
-          <a:ln w="12700" cap="flat" cmpd="sng" algn="ctr">
-            <a:noFill/>
-            <a:prstDash val="solid"/>
-            <a:miter lim="800000"/>
-          </a:ln>
-          <a:effectLst/>
         </p:spPr>
         <p:txBody>
-          <a:bodyPr rtlCol="0" anchor="ctr"/>
-          <a:lstStyle/>
-          <a:p>
-            <a:pPr marL="0" marR="0" lvl="0" indent="0" algn="ctr" defTabSz="914400" eaLnBrk="1" fontAlgn="auto" latinLnBrk="0" hangingPunct="1">
-              <a:lnSpc>
-                <a:spcPct val="100000"/>
-              </a:lnSpc>
-              <a:spcBef>
-                <a:spcPts val="0"/>
-              </a:spcBef>
-              <a:spcAft>
-                <a:spcPts val="0"/>
-              </a:spcAft>
-              <a:buClrTx/>
-              <a:buSzTx/>
-              <a:buFontTx/>
-              <a:buNone/>
-              <a:tabLst/>
-              <a:defRPr/>
-            </a:pPr>
-            <a:endParaRPr kumimoji="0" lang="de-DE" sz="1800" b="0" i="0" u="none" strike="noStrike" kern="0" cap="none" spc="0" normalizeH="0" baseline="0" noProof="0" dirty="0">
-              <a:ln>
-                <a:noFill/>
-              </a:ln>
-              <a:solidFill>
-                <a:prstClr val="white"/>
-              </a:solidFill>
-              <a:effectLst/>
-              <a:uLnTx/>
-              <a:uFillTx/>
-              <a:latin typeface="Arial" panose="020B0604020202020204"/>
-              <a:ea typeface="+mn-ea"/>
-              <a:cs typeface="+mn-cs"/>
-            </a:endParaRPr>
-          </a:p>
-        </p:txBody>
-      </p:sp>
-      <p:pic>
-        <p:nvPicPr>
-          <p:cNvPr id="8" name="Grafik 13">
-            <a:extLst>
-              <a:ext uri="{FF2B5EF4-FFF2-40B4-BE49-F238E27FC236}">
-                <a16:creationId xmlns:a16="http://schemas.microsoft.com/office/drawing/2014/main" id="{22F54C65-43D5-D8D5-DDA2-B5D60E5D9B82}"/>
-              </a:ext>
-            </a:extLst>
-          </p:cNvPr>
-          <p:cNvPicPr>
-            <a:picLocks noChangeAspect="1"/>
-          </p:cNvPicPr>
-          <p:nvPr userDrawn="1"/>
-        </p:nvPicPr>
-        <p:blipFill>
-          <a:blip r:embed="rId2"/>
-          <a:stretch>
-            <a:fillRect/>
-          </a:stretch>
-        </p:blipFill>
+          <a:bodyPr/>
+          <a:lstStyle/>
+          <a:p>
+            <a:r>
+              <a:rPr lang="en-US"/>
+              <a:t>Click to edit Master title style</a:t>
+            </a:r>
+          </a:p>
+        </p:txBody>
+      </p:sp>
+      <p:sp>
+        <p:nvSpPr>
+          <p:cNvPr id="3" name="Subtitle 2"/>
+          <p:cNvSpPr>
+            <a:spLocks noGrp="1"/>
+          </p:cNvSpPr>
+          <p:nvPr>
+            <p:ph type="subTitle" idx="1"/>
+          </p:nvPr>
+        </p:nvSpPr>
         <p:spPr>
           <a:xfrm>
-            <a:off x="446400" y="434007"/>
-            <a:ext cx="11303000" cy="825500"/>
-          </a:xfrm>
-          <a:prstGeom prst="rect">
-            <a:avLst/>
-          </a:prstGeom>
-        </p:spPr>
-      </p:pic>
-      <p:pic>
-        <p:nvPicPr>
-          <p:cNvPr id="9" name="Grafik 3">
-            <a:extLst>
-              <a:ext uri="{FF2B5EF4-FFF2-40B4-BE49-F238E27FC236}">
-                <a16:creationId xmlns:a16="http://schemas.microsoft.com/office/drawing/2014/main" id="{7E813C3B-F59C-66E9-DADA-8C29868BA177}"/>
-              </a:ext>
-            </a:extLst>
-          </p:cNvPr>
-          <p:cNvPicPr>
-            <a:picLocks noChangeAspect="1"/>
-          </p:cNvPicPr>
-          <p:nvPr userDrawn="1"/>
-        </p:nvPicPr>
-        <p:blipFill>
-          <a:blip r:embed="rId3">
-            <a:alphaModFix/>
-          </a:blip>
-          <a:stretch>
-            <a:fillRect/>
-          </a:stretch>
-        </p:blipFill>
-        <p:spPr>
-          <a:xfrm>
-            <a:off x="8648700" y="2743200"/>
-            <a:ext cx="3543300" cy="4114800"/>
-          </a:xfrm>
-          <a:prstGeom prst="rect">
-            <a:avLst/>
-          </a:prstGeom>
-        </p:spPr>
-      </p:pic>
-      <p:sp>
-        <p:nvSpPr>
-          <p:cNvPr id="2" name="Title 1">
-            <a:extLst>
-              <a:ext uri="{FF2B5EF4-FFF2-40B4-BE49-F238E27FC236}">
-                <a16:creationId xmlns:a16="http://schemas.microsoft.com/office/drawing/2014/main" id="{F53F8BAC-AD64-825E-E9B9-6AFEAD4DE15C}"/>
-              </a:ext>
-            </a:extLst>
-          </p:cNvPr>
-          <p:cNvSpPr>
-            <a:spLocks noGrp="1"/>
-          </p:cNvSpPr>
-          <p:nvPr>
-            <p:ph type="ctrTitle"/>
-          </p:nvPr>
-        </p:nvSpPr>
-        <p:spPr>
-          <a:xfrm>
-            <a:off x="1524000" y="1714499"/>
-            <a:ext cx="9144000" cy="1795463"/>
+            <a:off x="1371600" y="2914650"/>
+            <a:ext cx="6400800" cy="1314450"/>
           </a:xfrm>
         </p:spPr>
         <p:txBody>
-          <a:bodyPr anchor="b"/>
+          <a:bodyPr/>
           <a:lstStyle>
-            <a:lvl1pPr algn="ctr">
-              <a:defRPr sz="6000">
+            <a:lvl1pPr marL="0" indent="0" algn="ctr">
+              <a:buNone/>
+              <a:defRPr>
                 <a:solidFill>
-                  <a:schemeClr val="bg1"/>
+                  <a:schemeClr val="tx1">
+                    <a:tint val="75000"/>
+                  </a:schemeClr>
                 </a:solidFill>
               </a:defRPr>
             </a:lvl1pPr>
-          </a:lstStyle>
-          <a:p>
-            <a:r>
-              <a:rPr lang="en-US" dirty="0"/>
-              <a:t>Click to edit Master title style</a:t>
-            </a:r>
-            <a:endParaRPr lang="de-DE" dirty="0"/>
-          </a:p>
-        </p:txBody>
-      </p:sp>
-      <p:sp>
-        <p:nvSpPr>
-          <p:cNvPr id="3" name="Subtitle 2">
-            <a:extLst>
-              <a:ext uri="{FF2B5EF4-FFF2-40B4-BE49-F238E27FC236}">
-                <a16:creationId xmlns:a16="http://schemas.microsoft.com/office/drawing/2014/main" id="{032BD40E-7E13-B1FA-A1D1-2C360EE8DF4B}"/>
-              </a:ext>
-            </a:extLst>
-          </p:cNvPr>
-          <p:cNvSpPr>
-            <a:spLocks noGrp="1"/>
-          </p:cNvSpPr>
-          <p:nvPr>
-            <p:ph type="subTitle" idx="1"/>
-          </p:nvPr>
-        </p:nvSpPr>
-        <p:spPr>
-          <a:xfrm>
-            <a:off x="1524000" y="3602038"/>
-            <a:ext cx="9144000" cy="1655762"/>
-          </a:xfrm>
-        </p:spPr>
-        <p:txBody>
-          <a:bodyPr/>
-          <a:lstStyle>
-            <a:lvl1pPr marL="0" indent="0" algn="ctr">
-              <a:buNone/>
-              <a:defRPr sz="2400">
+            <a:lvl2pPr marL="342900" indent="0" algn="ctr">
+              <a:buNone/>
+              <a:defRPr>
                 <a:solidFill>
-                  <a:schemeClr val="bg1"/>
+                  <a:schemeClr val="tx1">
+                    <a:tint val="75000"/>
+                  </a:schemeClr>
                 </a:solidFill>
               </a:defRPr>
-            </a:lvl1pPr>
-            <a:lvl2pPr marL="457200" indent="0" algn="ctr">
-              <a:buNone/>
-              <a:defRPr sz="2000"/>
             </a:lvl2pPr>
-            <a:lvl3pPr marL="914400" indent="0" algn="ctr">
-              <a:buNone/>
-              <a:defRPr sz="1800"/>
+            <a:lvl3pPr marL="685800" indent="0" algn="ctr">
+              <a:buNone/>
+              <a:defRPr>
+                <a:solidFill>
+                  <a:schemeClr val="tx1">
+                    <a:tint val="75000"/>
+                  </a:schemeClr>
+                </a:solidFill>
+              </a:defRPr>
             </a:lvl3pPr>
-            <a:lvl4pPr marL="1371600" indent="0" algn="ctr">
-              <a:buNone/>
-              <a:defRPr sz="1600"/>
+            <a:lvl4pPr marL="1028700" indent="0" algn="ctr">
+              <a:buNone/>
+              <a:defRPr>
+                <a:solidFill>
+                  <a:schemeClr val="tx1">
+                    <a:tint val="75000"/>
+                  </a:schemeClr>
+                </a:solidFill>
+              </a:defRPr>
             </a:lvl4pPr>
-            <a:lvl5pPr marL="1828800" indent="0" algn="ctr">
-              <a:buNone/>
-              <a:defRPr sz="1600"/>
+            <a:lvl5pPr marL="1371600" indent="0" algn="ctr">
+              <a:buNone/>
+              <a:defRPr>
+                <a:solidFill>
+                  <a:schemeClr val="tx1">
+                    <a:tint val="75000"/>
+                  </a:schemeClr>
+                </a:solidFill>
+              </a:defRPr>
             </a:lvl5pPr>
-            <a:lvl6pPr marL="2286000" indent="0" algn="ctr">
-              <a:buNone/>
-              <a:defRPr sz="1600"/>
+            <a:lvl6pPr marL="1714500" indent="0" algn="ctr">
+              <a:buNone/>
+              <a:defRPr>
+                <a:solidFill>
+                  <a:schemeClr val="tx1">
+                    <a:tint val="75000"/>
+                  </a:schemeClr>
+                </a:solidFill>
+              </a:defRPr>
             </a:lvl6pPr>
-            <a:lvl7pPr marL="2743200" indent="0" algn="ctr">
-              <a:buNone/>
-              <a:defRPr sz="1600"/>
+            <a:lvl7pPr marL="2057400" indent="0" algn="ctr">
+              <a:buNone/>
+              <a:defRPr>
+                <a:solidFill>
+                  <a:schemeClr val="tx1">
+                    <a:tint val="75000"/>
+                  </a:schemeClr>
+                </a:solidFill>
+              </a:defRPr>
             </a:lvl7pPr>
-            <a:lvl8pPr marL="3200400" indent="0" algn="ctr">
-              <a:buNone/>
-              <a:defRPr sz="1600"/>
+            <a:lvl8pPr marL="2400300" indent="0" algn="ctr">
+              <a:buNone/>
+              <a:defRPr>
+                <a:solidFill>
+                  <a:schemeClr val="tx1">
+                    <a:tint val="75000"/>
+                  </a:schemeClr>
+                </a:solidFill>
+              </a:defRPr>
             </a:lvl8pPr>
-            <a:lvl9pPr marL="3657600" indent="0" algn="ctr">
-              <a:buNone/>
-              <a:defRPr sz="1600"/>
+            <a:lvl9pPr marL="2743200" indent="0" algn="ctr">
+              <a:buNone/>
+              <a:defRPr>
+                <a:solidFill>
+                  <a:schemeClr val="tx1">
+                    <a:tint val="75000"/>
+                  </a:schemeClr>
+                </a:solidFill>
+              </a:defRPr>
             </a:lvl9pPr>
           </a:lstStyle>
           <a:p>
             <a:r>
-              <a:rPr lang="en-US" dirty="0"/>
+              <a:rPr lang="en-US"/>
               <a:t>Click to edit Master subtitle style</a:t>
             </a:r>
-            <a:endParaRPr lang="de-DE" dirty="0"/>
-          </a:p>
-        </p:txBody>
-      </p:sp>
-      <p:sp>
-        <p:nvSpPr>
-          <p:cNvPr id="4" name="Date Placeholder 3">
-            <a:extLst>
-              <a:ext uri="{FF2B5EF4-FFF2-40B4-BE49-F238E27FC236}">
-                <a16:creationId xmlns:a16="http://schemas.microsoft.com/office/drawing/2014/main" id="{349C7714-67B2-3985-27ED-BCB048C59339}"/>
-              </a:ext>
-            </a:extLst>
-          </p:cNvPr>
+          </a:p>
+        </p:txBody>
+      </p:sp>
+      <p:sp>
+        <p:nvSpPr>
+          <p:cNvPr id="4" name="Date Placeholder 3"/>
           <p:cNvSpPr>
             <a:spLocks noGrp="1"/>
           </p:cNvSpPr>
@@ -4669,41 +4572,22 @@
             <p:ph type="dt" sz="half" idx="10"/>
           </p:nvPr>
         </p:nvSpPr>
-        <p:spPr>
-          <a:xfrm>
-            <a:off x="446400" y="6356350"/>
-            <a:ext cx="3135000" cy="365125"/>
-          </a:xfrm>
-        </p:spPr>
-        <p:txBody>
-          <a:bodyPr/>
-          <a:lstStyle>
-            <a:lvl1pPr>
-              <a:defRPr>
-                <a:solidFill>
-                  <a:schemeClr val="bg1"/>
-                </a:solidFill>
-              </a:defRPr>
-            </a:lvl1pPr>
-          </a:lstStyle>
-          <a:p>
-            <a:fld id="{F4E803E4-C7BA-F14D-AC42-A22C6EB66783}" type="datetime1">
+        <p:spPr/>
+        <p:txBody>
+          <a:bodyPr/>
+          <a:lstStyle/>
+          <a:p>
+            <a:fld id="{241EB5C9-1307-BA42-ABA2-0BC069CD8E7F}" type="datetimeFigureOut">
               <a:rPr lang="en-US" smtClean="0"/>
-              <a:t>9/22/26</a:t>
+              <a:t>1/2/22</a:t>
             </a:fld>
-            <a:endParaRPr lang="de-DE"/>
-          </a:p>
-        </p:txBody>
-      </p:sp>
-      <p:sp>
-        <p:nvSpPr>
-          <p:cNvPr id="5" name="Footer Placeholder 4">
-            <a:extLst>
-              <a:ext uri="{FF2B5EF4-FFF2-40B4-BE49-F238E27FC236}">
-                <a16:creationId xmlns:a16="http://schemas.microsoft.com/office/drawing/2014/main" id="{E6631ECA-ACEA-F53B-4A40-EB6369990CFB}"/>
-              </a:ext>
-            </a:extLst>
-          </p:cNvPr>
+            <a:endParaRPr lang="en-US"/>
+          </a:p>
+        </p:txBody>
+      </p:sp>
+      <p:sp>
+        <p:nvSpPr>
+          <p:cNvPr id="5" name="Footer Placeholder 4"/>
           <p:cNvSpPr>
             <a:spLocks noGrp="1"/>
           </p:cNvSpPr>
@@ -4714,33 +4598,15 @@
         <p:spPr/>
         <p:txBody>
           <a:bodyPr/>
-          <a:lstStyle>
-            <a:lvl1pPr>
-              <a:defRPr>
-                <a:solidFill>
-                  <a:schemeClr val="bg1"/>
-                </a:solidFill>
-              </a:defRPr>
-            </a:lvl1pPr>
-          </a:lstStyle>
-          <a:p>
-            <a:endParaRPr lang="de-DE">
-              <a:solidFill>
-                <a:schemeClr val="bg1"/>
-              </a:solidFill>
-            </a:endParaRPr>
-          </a:p>
-        </p:txBody>
-      </p:sp>
-      <p:sp>
-        <p:nvSpPr>
-          <p:cNvPr id="6" name="Slide Number Placeholder 5">
-            <a:extLst>
-              <a:ext uri="{FF2B5EF4-FFF2-40B4-BE49-F238E27FC236}">
-                <a16:creationId xmlns:a16="http://schemas.microsoft.com/office/drawing/2014/main" id="{A5E5FB60-FFB4-682C-82D2-0D1E175BDC09}"/>
-              </a:ext>
-            </a:extLst>
-          </p:cNvPr>
+          <a:lstStyle/>
+          <a:p>
+            <a:endParaRPr lang="en-US"/>
+          </a:p>
+        </p:txBody>
+      </p:sp>
+      <p:sp>
+        <p:nvSpPr>
+          <p:cNvPr id="6" name="Slide Number Placeholder 5"/>
           <p:cNvSpPr>
             <a:spLocks noGrp="1"/>
           </p:cNvSpPr>
@@ -4748,59 +4614,29 @@
             <p:ph type="sldNum" sz="quarter" idx="12"/>
           </p:nvPr>
         </p:nvSpPr>
-        <p:spPr>
-          <a:xfrm>
-            <a:off x="8610600" y="6356350"/>
-            <a:ext cx="3135000" cy="365125"/>
-          </a:xfrm>
-        </p:spPr>
-        <p:txBody>
-          <a:bodyPr/>
-          <a:lstStyle>
-            <a:lvl1pPr>
-              <a:defRPr>
-                <a:solidFill>
-                  <a:schemeClr val="bg1"/>
-                </a:solidFill>
-              </a:defRPr>
-            </a:lvl1pPr>
-          </a:lstStyle>
-          <a:p>
-            <a:fld id="{7FEFBAB6-26D0-44D8-BD53-612461CE1ACC}" type="slidenum">
-              <a:rPr lang="de-DE" smtClean="0"/>
-              <a:pPr/>
+        <p:spPr/>
+        <p:txBody>
+          <a:bodyPr/>
+          <a:lstStyle/>
+          <a:p>
+            <a:fld id="{C5EF2332-01BF-834F-8236-50238282D533}" type="slidenum">
+              <a:rPr lang="en-US" smtClean="0"/>
               <a:t>‹#›</a:t>
             </a:fld>
-            <a:endParaRPr lang="de-DE"/>
+            <a:endParaRPr lang="en-US"/>
           </a:p>
         </p:txBody>
       </p:sp>
     </p:spTree>
     <p:extLst>
       <p:ext uri="{BB962C8B-B14F-4D97-AF65-F5344CB8AC3E}">
-        <p14:creationId xmlns:p14="http://schemas.microsoft.com/office/powerpoint/2010/main" val="1327749860"/>
+        <p14:creationId xmlns:p14="http://schemas.microsoft.com/office/powerpoint/2010/main" val="1444357513"/>
       </p:ext>
     </p:extLst>
   </p:cSld>
   <p:clrMapOvr>
     <a:masterClrMapping/>
   </p:clrMapOvr>
-  <p:extLst>
-    <p:ext uri="{DCECCB84-F9BA-43D5-87BE-67443E8EF086}">
-      <p15:sldGuideLst xmlns:p15="http://schemas.microsoft.com/office/powerpoint/2012/main">
-        <p15:guide id="1" orient="horz" pos="2160" userDrawn="1">
-          <p15:clr>
-            <a:srgbClr val="FBAE40"/>
-          </p15:clr>
-        </p15:guide>
-        <p15:guide id="2" pos="3840" userDrawn="1">
-          <p15:clr>
-            <a:srgbClr val="FBAE40"/>
-          </p15:clr>
-        </p15:guide>
-      </p15:sldGuideLst>
-    </p:ext>
-  </p:extLst>
 </p:sldLayout>
 </file>
 
@@ -4823,13 +4659,7 @@
       </p:grpSpPr>
       <p:sp>
         <p:nvSpPr>
-          <p:cNvPr id="2" name="Title 1">
-            <a:extLst>
-              <a:ext uri="{FF2B5EF4-FFF2-40B4-BE49-F238E27FC236}">
-                <a16:creationId xmlns:a16="http://schemas.microsoft.com/office/drawing/2014/main" id="{704E73F5-CB6D-3E99-FE78-B82E345B690B}"/>
-              </a:ext>
-            </a:extLst>
-          </p:cNvPr>
+          <p:cNvPr id="2" name="Title 1"/>
           <p:cNvSpPr>
             <a:spLocks noGrp="1"/>
           </p:cNvSpPr>
@@ -4846,19 +4676,12 @@
               <a:rPr lang="en-US"/>
               <a:t>Click to edit Master title style</a:t>
             </a:r>
-            <a:endParaRPr lang="de-DE"/>
-          </a:p>
-        </p:txBody>
-      </p:sp>
-      <p:sp>
-        <p:nvSpPr>
-          <p:cNvPr id="3" name="Vertical Text Placeholder 2">
-            <a:extLst>
-              <a:ext uri="{FF2B5EF4-FFF2-40B4-BE49-F238E27FC236}">
-                <a16:creationId xmlns:a16="http://schemas.microsoft.com/office/drawing/2014/main" id="{373A1FF6-5E0F-4B73-AFF3-B7196FFF36E3}"/>
-              </a:ext>
-            </a:extLst>
-          </p:cNvPr>
+          </a:p>
+        </p:txBody>
+      </p:sp>
+      <p:sp>
+        <p:nvSpPr>
+          <p:cNvPr id="3" name="Vertical Text Placeholder 2"/>
           <p:cNvSpPr>
             <a:spLocks noGrp="1"/>
           </p:cNvSpPr>
@@ -4904,19 +4727,12 @@
               <a:rPr lang="en-US"/>
               <a:t>Fifth level</a:t>
             </a:r>
-            <a:endParaRPr lang="de-DE"/>
-          </a:p>
-        </p:txBody>
-      </p:sp>
-      <p:sp>
-        <p:nvSpPr>
-          <p:cNvPr id="4" name="Date Placeholder 3">
-            <a:extLst>
-              <a:ext uri="{FF2B5EF4-FFF2-40B4-BE49-F238E27FC236}">
-                <a16:creationId xmlns:a16="http://schemas.microsoft.com/office/drawing/2014/main" id="{1D1B6167-3A02-2D54-0A05-15622B1A6CC0}"/>
-              </a:ext>
-            </a:extLst>
-          </p:cNvPr>
+          </a:p>
+        </p:txBody>
+      </p:sp>
+      <p:sp>
+        <p:nvSpPr>
+          <p:cNvPr id="4" name="Date Placeholder 3"/>
           <p:cNvSpPr>
             <a:spLocks noGrp="1"/>
           </p:cNvSpPr>
@@ -4929,23 +4745,17 @@
           <a:bodyPr/>
           <a:lstStyle/>
           <a:p>
-            <a:fld id="{C1F8A8BE-9F5A-9242-B888-1B340635B5B3}" type="datetime1">
+            <a:fld id="{241EB5C9-1307-BA42-ABA2-0BC069CD8E7F}" type="datetimeFigureOut">
               <a:rPr lang="en-US" smtClean="0"/>
-              <a:t>9/22/26</a:t>
+              <a:t>1/2/22</a:t>
             </a:fld>
-            <a:endParaRPr lang="de-DE"/>
-          </a:p>
-        </p:txBody>
-      </p:sp>
-      <p:sp>
-        <p:nvSpPr>
-          <p:cNvPr id="5" name="Footer Placeholder 4">
-            <a:extLst>
-              <a:ext uri="{FF2B5EF4-FFF2-40B4-BE49-F238E27FC236}">
-                <a16:creationId xmlns:a16="http://schemas.microsoft.com/office/drawing/2014/main" id="{52E232CF-D0D9-E5A7-02AE-89A4C8378BCB}"/>
-              </a:ext>
-            </a:extLst>
-          </p:cNvPr>
+            <a:endParaRPr lang="en-US"/>
+          </a:p>
+        </p:txBody>
+      </p:sp>
+      <p:sp>
+        <p:nvSpPr>
+          <p:cNvPr id="5" name="Footer Placeholder 4"/>
           <p:cNvSpPr>
             <a:spLocks noGrp="1"/>
           </p:cNvSpPr>
@@ -4958,19 +4768,13 @@
           <a:bodyPr/>
           <a:lstStyle/>
           <a:p>
-            <a:endParaRPr lang="de-DE"/>
-          </a:p>
-        </p:txBody>
-      </p:sp>
-      <p:sp>
-        <p:nvSpPr>
-          <p:cNvPr id="6" name="Slide Number Placeholder 5">
-            <a:extLst>
-              <a:ext uri="{FF2B5EF4-FFF2-40B4-BE49-F238E27FC236}">
-                <a16:creationId xmlns:a16="http://schemas.microsoft.com/office/drawing/2014/main" id="{3FA172CD-5AFF-BFDF-A5FF-3ED16759EE80}"/>
-              </a:ext>
-            </a:extLst>
-          </p:cNvPr>
+            <a:endParaRPr lang="en-US"/>
+          </a:p>
+        </p:txBody>
+      </p:sp>
+      <p:sp>
+        <p:nvSpPr>
+          <p:cNvPr id="6" name="Slide Number Placeholder 5"/>
           <p:cNvSpPr>
             <a:spLocks noGrp="1"/>
           </p:cNvSpPr>
@@ -4983,18 +4787,18 @@
           <a:bodyPr/>
           <a:lstStyle/>
           <a:p>
-            <a:fld id="{7FEFBAB6-26D0-44D8-BD53-612461CE1ACC}" type="slidenum">
-              <a:rPr lang="de-DE" smtClean="0"/>
+            <a:fld id="{C5EF2332-01BF-834F-8236-50238282D533}" type="slidenum">
+              <a:rPr lang="en-US" smtClean="0"/>
               <a:t>‹#›</a:t>
             </a:fld>
-            <a:endParaRPr lang="de-DE"/>
+            <a:endParaRPr lang="en-US"/>
           </a:p>
         </p:txBody>
       </p:sp>
     </p:spTree>
     <p:extLst>
       <p:ext uri="{BB962C8B-B14F-4D97-AF65-F5344CB8AC3E}">
-        <p14:creationId xmlns:p14="http://schemas.microsoft.com/office/powerpoint/2010/main" val="3801224494"/>
+        <p14:creationId xmlns:p14="http://schemas.microsoft.com/office/powerpoint/2010/main" val="313914798"/>
       </p:ext>
     </p:extLst>
   </p:cSld>
@@ -5023,13 +4827,7 @@
       </p:grpSpPr>
       <p:sp>
         <p:nvSpPr>
-          <p:cNvPr id="2" name="Vertical Title 1">
-            <a:extLst>
-              <a:ext uri="{FF2B5EF4-FFF2-40B4-BE49-F238E27FC236}">
-                <a16:creationId xmlns:a16="http://schemas.microsoft.com/office/drawing/2014/main" id="{8FE75433-AEAA-29BE-3441-9F1D2D2B1E56}"/>
-              </a:ext>
-            </a:extLst>
-          </p:cNvPr>
+          <p:cNvPr id="2" name="Vertical Title 1"/>
           <p:cNvSpPr>
             <a:spLocks noGrp="1"/>
           </p:cNvSpPr>
@@ -5039,8 +4837,8 @@
         </p:nvSpPr>
         <p:spPr>
           <a:xfrm>
-            <a:off x="8724900" y="365125"/>
-            <a:ext cx="2628900" cy="5811838"/>
+            <a:off x="6629400" y="205979"/>
+            <a:ext cx="2057400" cy="4388644"/>
           </a:xfrm>
         </p:spPr>
         <p:txBody>
@@ -5051,19 +4849,12 @@
               <a:rPr lang="en-US"/>
               <a:t>Click to edit Master title style</a:t>
             </a:r>
-            <a:endParaRPr lang="de-DE"/>
-          </a:p>
-        </p:txBody>
-      </p:sp>
-      <p:sp>
-        <p:nvSpPr>
-          <p:cNvPr id="3" name="Vertical Text Placeholder 2">
-            <a:extLst>
-              <a:ext uri="{FF2B5EF4-FFF2-40B4-BE49-F238E27FC236}">
-                <a16:creationId xmlns:a16="http://schemas.microsoft.com/office/drawing/2014/main" id="{B7474DBD-F4DC-1A85-7707-5862E8BA6F4F}"/>
-              </a:ext>
-            </a:extLst>
-          </p:cNvPr>
+          </a:p>
+        </p:txBody>
+      </p:sp>
+      <p:sp>
+        <p:nvSpPr>
+          <p:cNvPr id="3" name="Vertical Text Placeholder 2"/>
           <p:cNvSpPr>
             <a:spLocks noGrp="1"/>
           </p:cNvSpPr>
@@ -5073,8 +4864,8 @@
         </p:nvSpPr>
         <p:spPr>
           <a:xfrm>
-            <a:off x="838200" y="365125"/>
-            <a:ext cx="7734300" cy="5811838"/>
+            <a:off x="457200" y="205979"/>
+            <a:ext cx="6019800" cy="4388644"/>
           </a:xfrm>
         </p:spPr>
         <p:txBody>
@@ -5114,19 +4905,12 @@
               <a:rPr lang="en-US"/>
               <a:t>Fifth level</a:t>
             </a:r>
-            <a:endParaRPr lang="de-DE"/>
-          </a:p>
-        </p:txBody>
-      </p:sp>
-      <p:sp>
-        <p:nvSpPr>
-          <p:cNvPr id="4" name="Date Placeholder 3">
-            <a:extLst>
-              <a:ext uri="{FF2B5EF4-FFF2-40B4-BE49-F238E27FC236}">
-                <a16:creationId xmlns:a16="http://schemas.microsoft.com/office/drawing/2014/main" id="{B8C9C324-C7CD-7442-C024-FBF5C147C365}"/>
-              </a:ext>
-            </a:extLst>
-          </p:cNvPr>
+          </a:p>
+        </p:txBody>
+      </p:sp>
+      <p:sp>
+        <p:nvSpPr>
+          <p:cNvPr id="4" name="Date Placeholder 3"/>
           <p:cNvSpPr>
             <a:spLocks noGrp="1"/>
           </p:cNvSpPr>
@@ -5139,23 +4923,17 @@
           <a:bodyPr/>
           <a:lstStyle/>
           <a:p>
-            <a:fld id="{21AE4B26-B4AB-2342-9FD2-B54D98EB2689}" type="datetime1">
+            <a:fld id="{241EB5C9-1307-BA42-ABA2-0BC069CD8E7F}" type="datetimeFigureOut">
               <a:rPr lang="en-US" smtClean="0"/>
-              <a:t>9/22/26</a:t>
+              <a:t>1/2/22</a:t>
             </a:fld>
-            <a:endParaRPr lang="de-DE"/>
-          </a:p>
-        </p:txBody>
-      </p:sp>
-      <p:sp>
-        <p:nvSpPr>
-          <p:cNvPr id="5" name="Footer Placeholder 4">
-            <a:extLst>
-              <a:ext uri="{FF2B5EF4-FFF2-40B4-BE49-F238E27FC236}">
-                <a16:creationId xmlns:a16="http://schemas.microsoft.com/office/drawing/2014/main" id="{DC9FB9FA-927B-C32C-9164-FB16484AAE87}"/>
-              </a:ext>
-            </a:extLst>
-          </p:cNvPr>
+            <a:endParaRPr lang="en-US"/>
+          </a:p>
+        </p:txBody>
+      </p:sp>
+      <p:sp>
+        <p:nvSpPr>
+          <p:cNvPr id="5" name="Footer Placeholder 4"/>
           <p:cNvSpPr>
             <a:spLocks noGrp="1"/>
           </p:cNvSpPr>
@@ -5168,19 +4946,13 @@
           <a:bodyPr/>
           <a:lstStyle/>
           <a:p>
-            <a:endParaRPr lang="de-DE"/>
-          </a:p>
-        </p:txBody>
-      </p:sp>
-      <p:sp>
-        <p:nvSpPr>
-          <p:cNvPr id="6" name="Slide Number Placeholder 5">
-            <a:extLst>
-              <a:ext uri="{FF2B5EF4-FFF2-40B4-BE49-F238E27FC236}">
-                <a16:creationId xmlns:a16="http://schemas.microsoft.com/office/drawing/2014/main" id="{D7DAB917-9A4F-201D-34B4-1A6AFCA2C5AD}"/>
-              </a:ext>
-            </a:extLst>
-          </p:cNvPr>
+            <a:endParaRPr lang="en-US"/>
+          </a:p>
+        </p:txBody>
+      </p:sp>
+      <p:sp>
+        <p:nvSpPr>
+          <p:cNvPr id="6" name="Slide Number Placeholder 5"/>
           <p:cNvSpPr>
             <a:spLocks noGrp="1"/>
           </p:cNvSpPr>
@@ -5193,18 +4965,18 @@
           <a:bodyPr/>
           <a:lstStyle/>
           <a:p>
-            <a:fld id="{7FEFBAB6-26D0-44D8-BD53-612461CE1ACC}" type="slidenum">
-              <a:rPr lang="de-DE" smtClean="0"/>
+            <a:fld id="{C5EF2332-01BF-834F-8236-50238282D533}" type="slidenum">
+              <a:rPr lang="en-US" smtClean="0"/>
               <a:t>‹#›</a:t>
             </a:fld>
-            <a:endParaRPr lang="de-DE"/>
+            <a:endParaRPr lang="en-US"/>
           </a:p>
         </p:txBody>
       </p:sp>
     </p:spTree>
     <p:extLst>
       <p:ext uri="{BB962C8B-B14F-4D97-AF65-F5344CB8AC3E}">
-        <p14:creationId xmlns:p14="http://schemas.microsoft.com/office/powerpoint/2010/main" val="73648842"/>
+        <p14:creationId xmlns:p14="http://schemas.microsoft.com/office/powerpoint/2010/main" val="2581529045"/>
       </p:ext>
     </p:extLst>
   </p:cSld>
@@ -5233,13 +5005,7 @@
       </p:grpSpPr>
       <p:sp>
         <p:nvSpPr>
-          <p:cNvPr id="2" name="Title 1">
-            <a:extLst>
-              <a:ext uri="{FF2B5EF4-FFF2-40B4-BE49-F238E27FC236}">
-                <a16:creationId xmlns:a16="http://schemas.microsoft.com/office/drawing/2014/main" id="{6BF04AE0-F94F-A586-34B8-68D9CAB6C6D1}"/>
-              </a:ext>
-            </a:extLst>
-          </p:cNvPr>
+          <p:cNvPr id="2" name="Title 1"/>
           <p:cNvSpPr>
             <a:spLocks noGrp="1"/>
           </p:cNvSpPr>
@@ -5247,39 +5013,21 @@
             <p:ph type="title"/>
           </p:nvPr>
         </p:nvSpPr>
-        <p:spPr>
-          <a:xfrm>
-            <a:off x="2295524" y="432532"/>
-            <a:ext cx="9450077" cy="825501"/>
-          </a:xfrm>
-        </p:spPr>
-        <p:txBody>
-          <a:bodyPr>
-            <a:normAutofit/>
-          </a:bodyPr>
-          <a:lstStyle>
-            <a:lvl1pPr>
-              <a:defRPr sz="2800" b="1"/>
-            </a:lvl1pPr>
-          </a:lstStyle>
-          <a:p>
-            <a:r>
-              <a:rPr lang="en-US" dirty="0"/>
+        <p:spPr/>
+        <p:txBody>
+          <a:bodyPr/>
+          <a:lstStyle/>
+          <a:p>
+            <a:r>
+              <a:rPr lang="en-US"/>
               <a:t>Click to edit Master title style</a:t>
             </a:r>
-            <a:endParaRPr lang="de-DE" dirty="0"/>
-          </a:p>
-        </p:txBody>
-      </p:sp>
-      <p:sp>
-        <p:nvSpPr>
-          <p:cNvPr id="3" name="Content Placeholder 2">
-            <a:extLst>
-              <a:ext uri="{FF2B5EF4-FFF2-40B4-BE49-F238E27FC236}">
-                <a16:creationId xmlns:a16="http://schemas.microsoft.com/office/drawing/2014/main" id="{372FA590-20E9-0368-85B4-90C26598F852}"/>
-              </a:ext>
-            </a:extLst>
-          </p:cNvPr>
+          </a:p>
+        </p:txBody>
+      </p:sp>
+      <p:sp>
+        <p:nvSpPr>
+          <p:cNvPr id="3" name="Content Placeholder 2"/>
           <p:cNvSpPr>
             <a:spLocks noGrp="1"/>
           </p:cNvSpPr>
@@ -5287,72 +5035,50 @@
             <p:ph idx="1"/>
           </p:nvPr>
         </p:nvSpPr>
-        <p:spPr>
-          <a:xfrm>
-            <a:off x="446400" y="1514475"/>
-            <a:ext cx="11299202" cy="4662488"/>
-          </a:xfrm>
-        </p:spPr>
-        <p:txBody>
-          <a:bodyPr/>
-          <a:lstStyle>
-            <a:lvl1pPr>
-              <a:defRPr sz="2200"/>
-            </a:lvl1pPr>
-            <a:lvl2pPr>
-              <a:defRPr sz="2100"/>
-            </a:lvl2pPr>
-            <a:lvl4pPr>
-              <a:defRPr sz="1900"/>
-            </a:lvl4pPr>
-          </a:lstStyle>
+        <p:spPr/>
+        <p:txBody>
+          <a:bodyPr/>
+          <a:lstStyle/>
           <a:p>
             <a:pPr lvl="0"/>
             <a:r>
-              <a:rPr lang="en-US" dirty="0"/>
+              <a:rPr lang="en-US"/>
               <a:t>Click to edit Master text styles</a:t>
             </a:r>
           </a:p>
           <a:p>
             <a:pPr lvl="1"/>
             <a:r>
-              <a:rPr lang="en-US" dirty="0"/>
+              <a:rPr lang="en-US"/>
               <a:t>Second level</a:t>
             </a:r>
           </a:p>
           <a:p>
             <a:pPr lvl="2"/>
             <a:r>
-              <a:rPr lang="en-US" dirty="0"/>
+              <a:rPr lang="en-US"/>
               <a:t>Third level</a:t>
             </a:r>
           </a:p>
           <a:p>
             <a:pPr lvl="3"/>
             <a:r>
-              <a:rPr lang="en-US" dirty="0"/>
+              <a:rPr lang="en-US"/>
               <a:t>Fourth level</a:t>
             </a:r>
           </a:p>
           <a:p>
             <a:pPr lvl="4"/>
             <a:r>
-              <a:rPr lang="en-US" dirty="0"/>
+              <a:rPr lang="en-US"/>
               <a:t>Fifth level</a:t>
             </a:r>
-            <a:endParaRPr lang="de-DE" dirty="0"/>
-          </a:p>
-        </p:txBody>
-      </p:sp>
-      <p:sp>
-        <p:nvSpPr>
-          <p:cNvPr id="4" name="Date Placeholder 3">
-            <a:extLst>
-              <a:ext uri="{FF2B5EF4-FFF2-40B4-BE49-F238E27FC236}">
-                <a16:creationId xmlns:a16="http://schemas.microsoft.com/office/drawing/2014/main" id="{229C20A6-D561-498F-72E0-E562857AB225}"/>
-              </a:ext>
-            </a:extLst>
-          </p:cNvPr>
+          </a:p>
+        </p:txBody>
+      </p:sp>
+      <p:sp>
+        <p:nvSpPr>
+          <p:cNvPr id="4" name="Date Placeholder 3"/>
           <p:cNvSpPr>
             <a:spLocks noGrp="1"/>
           </p:cNvSpPr>
@@ -5360,33 +5086,22 @@
             <p:ph type="dt" sz="half" idx="10"/>
           </p:nvPr>
         </p:nvSpPr>
-        <p:spPr>
-          <a:xfrm>
-            <a:off x="446399" y="6356350"/>
-            <a:ext cx="3135001" cy="365125"/>
-          </a:xfrm>
-        </p:spPr>
-        <p:txBody>
-          <a:bodyPr/>
-          <a:lstStyle/>
-          <a:p>
-            <a:fld id="{E85A3416-A813-F447-89B3-37ECFBBE4EFA}" type="datetime1">
+        <p:spPr/>
+        <p:txBody>
+          <a:bodyPr/>
+          <a:lstStyle/>
+          <a:p>
+            <a:fld id="{241EB5C9-1307-BA42-ABA2-0BC069CD8E7F}" type="datetimeFigureOut">
               <a:rPr lang="en-US" smtClean="0"/>
-              <a:t>9/22/26</a:t>
+              <a:t>1/2/22</a:t>
             </a:fld>
-            <a:endParaRPr lang="de-DE"/>
-          </a:p>
-        </p:txBody>
-      </p:sp>
-      <p:sp>
-        <p:nvSpPr>
-          <p:cNvPr id="5" name="Footer Placeholder 4">
-            <a:extLst>
-              <a:ext uri="{FF2B5EF4-FFF2-40B4-BE49-F238E27FC236}">
-                <a16:creationId xmlns:a16="http://schemas.microsoft.com/office/drawing/2014/main" id="{08CA18E6-A373-C1EC-B057-8D8A972DA8EB}"/>
-              </a:ext>
-            </a:extLst>
-          </p:cNvPr>
+            <a:endParaRPr lang="en-US"/>
+          </a:p>
+        </p:txBody>
+      </p:sp>
+      <p:sp>
+        <p:nvSpPr>
+          <p:cNvPr id="5" name="Footer Placeholder 4"/>
           <p:cNvSpPr>
             <a:spLocks noGrp="1"/>
           </p:cNvSpPr>
@@ -5399,19 +5114,13 @@
           <a:bodyPr/>
           <a:lstStyle/>
           <a:p>
-            <a:endParaRPr lang="de-DE"/>
-          </a:p>
-        </p:txBody>
-      </p:sp>
-      <p:sp>
-        <p:nvSpPr>
-          <p:cNvPr id="6" name="Slide Number Placeholder 5">
-            <a:extLst>
-              <a:ext uri="{FF2B5EF4-FFF2-40B4-BE49-F238E27FC236}">
-                <a16:creationId xmlns:a16="http://schemas.microsoft.com/office/drawing/2014/main" id="{5F33F24B-1A9E-2EAF-F2AB-89426454DEE9}"/>
-              </a:ext>
-            </a:extLst>
-          </p:cNvPr>
+            <a:endParaRPr lang="en-US"/>
+          </a:p>
+        </p:txBody>
+      </p:sp>
+      <p:sp>
+        <p:nvSpPr>
+          <p:cNvPr id="6" name="Slide Number Placeholder 5"/>
           <p:cNvSpPr>
             <a:spLocks noGrp="1"/>
           </p:cNvSpPr>
@@ -5419,58 +5128,23 @@
             <p:ph type="sldNum" sz="quarter" idx="12"/>
           </p:nvPr>
         </p:nvSpPr>
-        <p:spPr>
-          <a:xfrm>
-            <a:off x="8610599" y="6356350"/>
-            <a:ext cx="3135001" cy="365125"/>
-          </a:xfrm>
-        </p:spPr>
-        <p:txBody>
-          <a:bodyPr/>
-          <a:lstStyle/>
-          <a:p>
-            <a:fld id="{7FEFBAB6-26D0-44D8-BD53-612461CE1ACC}" type="slidenum">
-              <a:rPr lang="de-DE" smtClean="0"/>
+        <p:spPr/>
+        <p:txBody>
+          <a:bodyPr/>
+          <a:lstStyle/>
+          <a:p>
+            <a:fld id="{C5EF2332-01BF-834F-8236-50238282D533}" type="slidenum">
+              <a:rPr lang="en-US" smtClean="0"/>
               <a:t>‹#›</a:t>
             </a:fld>
-            <a:endParaRPr lang="de-DE"/>
-          </a:p>
-        </p:txBody>
-      </p:sp>
-      <p:pic>
-        <p:nvPicPr>
-          <p:cNvPr id="7" name="Grafik 1">
-            <a:extLst>
-              <a:ext uri="{FF2B5EF4-FFF2-40B4-BE49-F238E27FC236}">
-                <a16:creationId xmlns:a16="http://schemas.microsoft.com/office/drawing/2014/main" id="{D22FDA19-2A2B-CF79-465C-7AC11A5D7E6C}"/>
-              </a:ext>
-            </a:extLst>
-          </p:cNvPr>
-          <p:cNvPicPr>
-            <a:picLocks noChangeAspect="1"/>
-          </p:cNvPicPr>
-          <p:nvPr userDrawn="1"/>
-        </p:nvPicPr>
-        <p:blipFill>
-          <a:blip r:embed="rId2"/>
-          <a:stretch>
-            <a:fillRect/>
-          </a:stretch>
-        </p:blipFill>
-        <p:spPr>
-          <a:xfrm>
-            <a:off x="446399" y="432533"/>
-            <a:ext cx="1744349" cy="825500"/>
-          </a:xfrm>
-          <a:prstGeom prst="rect">
-            <a:avLst/>
-          </a:prstGeom>
-        </p:spPr>
-      </p:pic>
+            <a:endParaRPr lang="en-US"/>
+          </a:p>
+        </p:txBody>
+      </p:sp>
     </p:spTree>
     <p:extLst>
       <p:ext uri="{BB962C8B-B14F-4D97-AF65-F5344CB8AC3E}">
-        <p14:creationId xmlns:p14="http://schemas.microsoft.com/office/powerpoint/2010/main" val="3582762791"/>
+        <p14:creationId xmlns:p14="http://schemas.microsoft.com/office/powerpoint/2010/main" val="338346009"/>
       </p:ext>
     </p:extLst>
   </p:cSld>
@@ -5499,13 +5173,7 @@
       </p:grpSpPr>
       <p:sp>
         <p:nvSpPr>
-          <p:cNvPr id="2" name="Title 1">
-            <a:extLst>
-              <a:ext uri="{FF2B5EF4-FFF2-40B4-BE49-F238E27FC236}">
-                <a16:creationId xmlns:a16="http://schemas.microsoft.com/office/drawing/2014/main" id="{125F7DD1-BC99-F967-7E0D-AD07C61B1543}"/>
-              </a:ext>
-            </a:extLst>
-          </p:cNvPr>
+          <p:cNvPr id="2" name="Title 1"/>
           <p:cNvSpPr>
             <a:spLocks noGrp="1"/>
           </p:cNvSpPr>
@@ -5515,137 +5183,130 @@
         </p:nvSpPr>
         <p:spPr>
           <a:xfrm>
-            <a:off x="831850" y="1709738"/>
-            <a:ext cx="10515600" cy="2852737"/>
+            <a:off x="722313" y="3305176"/>
+            <a:ext cx="7772400" cy="1021556"/>
           </a:xfrm>
         </p:spPr>
         <p:txBody>
+          <a:bodyPr anchor="t"/>
+          <a:lstStyle>
+            <a:lvl1pPr algn="l">
+              <a:defRPr sz="3000" b="1" cap="all"/>
+            </a:lvl1pPr>
+          </a:lstStyle>
+          <a:p>
+            <a:r>
+              <a:rPr lang="en-US"/>
+              <a:t>Click to edit Master title style</a:t>
+            </a:r>
+          </a:p>
+        </p:txBody>
+      </p:sp>
+      <p:sp>
+        <p:nvSpPr>
+          <p:cNvPr id="3" name="Text Placeholder 2"/>
+          <p:cNvSpPr>
+            <a:spLocks noGrp="1"/>
+          </p:cNvSpPr>
+          <p:nvPr>
+            <p:ph type="body" idx="1"/>
+          </p:nvPr>
+        </p:nvSpPr>
+        <p:spPr>
+          <a:xfrm>
+            <a:off x="722313" y="2180035"/>
+            <a:ext cx="7772400" cy="1125140"/>
+          </a:xfrm>
+        </p:spPr>
+        <p:txBody>
           <a:bodyPr anchor="b"/>
           <a:lstStyle>
-            <a:lvl1pPr>
-              <a:defRPr sz="6000"/>
-            </a:lvl1pPr>
-          </a:lstStyle>
-          <a:p>
-            <a:r>
-              <a:rPr lang="en-US" dirty="0"/>
-              <a:t>Click to edit Master title style</a:t>
-            </a:r>
-            <a:endParaRPr lang="de-DE" dirty="0"/>
-          </a:p>
-        </p:txBody>
-      </p:sp>
-      <p:sp>
-        <p:nvSpPr>
-          <p:cNvPr id="3" name="Text Placeholder 2">
-            <a:extLst>
-              <a:ext uri="{FF2B5EF4-FFF2-40B4-BE49-F238E27FC236}">
-                <a16:creationId xmlns:a16="http://schemas.microsoft.com/office/drawing/2014/main" id="{11F2346C-3ABC-1D14-68DA-C177489CD7CC}"/>
-              </a:ext>
-            </a:extLst>
-          </p:cNvPr>
-          <p:cNvSpPr>
-            <a:spLocks noGrp="1"/>
-          </p:cNvSpPr>
-          <p:nvPr>
-            <p:ph type="body" idx="1"/>
-          </p:nvPr>
-        </p:nvSpPr>
-        <p:spPr>
-          <a:xfrm>
-            <a:off x="831850" y="4589463"/>
-            <a:ext cx="10515600" cy="1500187"/>
-          </a:xfrm>
-        </p:spPr>
-        <p:txBody>
-          <a:bodyPr/>
-          <a:lstStyle>
             <a:lvl1pPr marL="0" indent="0">
               <a:buNone/>
-              <a:defRPr sz="2400">
+              <a:defRPr sz="1500">
                 <a:solidFill>
                   <a:schemeClr val="tx1">
-                    <a:tint val="82000"/>
+                    <a:tint val="75000"/>
                   </a:schemeClr>
                 </a:solidFill>
               </a:defRPr>
             </a:lvl1pPr>
-            <a:lvl2pPr marL="457200" indent="0">
-              <a:buNone/>
-              <a:defRPr sz="2000">
+            <a:lvl2pPr marL="342900" indent="0">
+              <a:buNone/>
+              <a:defRPr sz="1350">
                 <a:solidFill>
                   <a:schemeClr val="tx1">
-                    <a:tint val="82000"/>
+                    <a:tint val="75000"/>
                   </a:schemeClr>
                 </a:solidFill>
               </a:defRPr>
             </a:lvl2pPr>
-            <a:lvl3pPr marL="914400" indent="0">
-              <a:buNone/>
-              <a:defRPr sz="1800">
+            <a:lvl3pPr marL="685800" indent="0">
+              <a:buNone/>
+              <a:defRPr sz="1200">
                 <a:solidFill>
                   <a:schemeClr val="tx1">
-                    <a:tint val="82000"/>
+                    <a:tint val="75000"/>
                   </a:schemeClr>
                 </a:solidFill>
               </a:defRPr>
             </a:lvl3pPr>
-            <a:lvl4pPr marL="1371600" indent="0">
-              <a:buNone/>
-              <a:defRPr sz="1600">
+            <a:lvl4pPr marL="1028700" indent="0">
+              <a:buNone/>
+              <a:defRPr sz="1050">
                 <a:solidFill>
                   <a:schemeClr val="tx1">
-                    <a:tint val="82000"/>
+                    <a:tint val="75000"/>
                   </a:schemeClr>
                 </a:solidFill>
               </a:defRPr>
             </a:lvl4pPr>
-            <a:lvl5pPr marL="1828800" indent="0">
-              <a:buNone/>
-              <a:defRPr sz="1600">
+            <a:lvl5pPr marL="1371600" indent="0">
+              <a:buNone/>
+              <a:defRPr sz="1050">
                 <a:solidFill>
                   <a:schemeClr val="tx1">
-                    <a:tint val="82000"/>
+                    <a:tint val="75000"/>
                   </a:schemeClr>
                 </a:solidFill>
               </a:defRPr>
             </a:lvl5pPr>
-            <a:lvl6pPr marL="2286000" indent="0">
-              <a:buNone/>
-              <a:defRPr sz="1600">
+            <a:lvl6pPr marL="1714500" indent="0">
+              <a:buNone/>
+              <a:defRPr sz="1050">
                 <a:solidFill>
                   <a:schemeClr val="tx1">
-                    <a:tint val="82000"/>
+                    <a:tint val="75000"/>
                   </a:schemeClr>
                 </a:solidFill>
               </a:defRPr>
             </a:lvl6pPr>
-            <a:lvl7pPr marL="2743200" indent="0">
-              <a:buNone/>
-              <a:defRPr sz="1600">
+            <a:lvl7pPr marL="2057400" indent="0">
+              <a:buNone/>
+              <a:defRPr sz="1050">
                 <a:solidFill>
                   <a:schemeClr val="tx1">
-                    <a:tint val="82000"/>
+                    <a:tint val="75000"/>
                   </a:schemeClr>
                 </a:solidFill>
               </a:defRPr>
             </a:lvl7pPr>
-            <a:lvl8pPr marL="3200400" indent="0">
-              <a:buNone/>
-              <a:defRPr sz="1600">
+            <a:lvl8pPr marL="2400300" indent="0">
+              <a:buNone/>
+              <a:defRPr sz="1050">
                 <a:solidFill>
                   <a:schemeClr val="tx1">
-                    <a:tint val="82000"/>
+                    <a:tint val="75000"/>
                   </a:schemeClr>
                 </a:solidFill>
               </a:defRPr>
             </a:lvl8pPr>
-            <a:lvl9pPr marL="3657600" indent="0">
-              <a:buNone/>
-              <a:defRPr sz="1600">
+            <a:lvl9pPr marL="2743200" indent="0">
+              <a:buNone/>
+              <a:defRPr sz="1050">
                 <a:solidFill>
                   <a:schemeClr val="tx1">
-                    <a:tint val="82000"/>
+                    <a:tint val="75000"/>
                   </a:schemeClr>
                 </a:solidFill>
               </a:defRPr>
@@ -5654,7 +5315,7 @@
           <a:p>
             <a:pPr lvl="0"/>
             <a:r>
-              <a:rPr lang="en-US" dirty="0"/>
+              <a:rPr lang="en-US"/>
               <a:t>Click to edit Master text styles</a:t>
             </a:r>
           </a:p>
@@ -5662,13 +5323,7 @@
       </p:sp>
       <p:sp>
         <p:nvSpPr>
-          <p:cNvPr id="4" name="Date Placeholder 3">
-            <a:extLst>
-              <a:ext uri="{FF2B5EF4-FFF2-40B4-BE49-F238E27FC236}">
-                <a16:creationId xmlns:a16="http://schemas.microsoft.com/office/drawing/2014/main" id="{E17E0D26-06AC-D98A-5F48-FBB8ED24C0E3}"/>
-              </a:ext>
-            </a:extLst>
-          </p:cNvPr>
+          <p:cNvPr id="4" name="Date Placeholder 3"/>
           <p:cNvSpPr>
             <a:spLocks noGrp="1"/>
           </p:cNvSpPr>
@@ -5676,33 +5331,22 @@
             <p:ph type="dt" sz="half" idx="10"/>
           </p:nvPr>
         </p:nvSpPr>
-        <p:spPr>
-          <a:xfrm>
-            <a:off x="446399" y="6356350"/>
-            <a:ext cx="3135001" cy="365125"/>
-          </a:xfrm>
-        </p:spPr>
-        <p:txBody>
-          <a:bodyPr/>
-          <a:lstStyle/>
-          <a:p>
-            <a:fld id="{6BFA26B1-2218-D643-9983-927612BCF827}" type="datetime1">
+        <p:spPr/>
+        <p:txBody>
+          <a:bodyPr/>
+          <a:lstStyle/>
+          <a:p>
+            <a:fld id="{241EB5C9-1307-BA42-ABA2-0BC069CD8E7F}" type="datetimeFigureOut">
               <a:rPr lang="en-US" smtClean="0"/>
-              <a:t>9/22/26</a:t>
+              <a:t>1/2/22</a:t>
             </a:fld>
-            <a:endParaRPr lang="de-DE"/>
-          </a:p>
-        </p:txBody>
-      </p:sp>
-      <p:sp>
-        <p:nvSpPr>
-          <p:cNvPr id="5" name="Footer Placeholder 4">
-            <a:extLst>
-              <a:ext uri="{FF2B5EF4-FFF2-40B4-BE49-F238E27FC236}">
-                <a16:creationId xmlns:a16="http://schemas.microsoft.com/office/drawing/2014/main" id="{44C2B45A-371A-B259-0C2E-F2D74630EFCA}"/>
-              </a:ext>
-            </a:extLst>
-          </p:cNvPr>
+            <a:endParaRPr lang="en-US"/>
+          </a:p>
+        </p:txBody>
+      </p:sp>
+      <p:sp>
+        <p:nvSpPr>
+          <p:cNvPr id="5" name="Footer Placeholder 4"/>
           <p:cNvSpPr>
             <a:spLocks noGrp="1"/>
           </p:cNvSpPr>
@@ -5715,19 +5359,13 @@
           <a:bodyPr/>
           <a:lstStyle/>
           <a:p>
-            <a:endParaRPr lang="de-DE"/>
-          </a:p>
-        </p:txBody>
-      </p:sp>
-      <p:sp>
-        <p:nvSpPr>
-          <p:cNvPr id="6" name="Slide Number Placeholder 5">
-            <a:extLst>
-              <a:ext uri="{FF2B5EF4-FFF2-40B4-BE49-F238E27FC236}">
-                <a16:creationId xmlns:a16="http://schemas.microsoft.com/office/drawing/2014/main" id="{B93C94A4-D223-C226-398A-59B1A3955C6C}"/>
-              </a:ext>
-            </a:extLst>
-          </p:cNvPr>
+            <a:endParaRPr lang="en-US"/>
+          </a:p>
+        </p:txBody>
+      </p:sp>
+      <p:sp>
+        <p:nvSpPr>
+          <p:cNvPr id="6" name="Slide Number Placeholder 5"/>
           <p:cNvSpPr>
             <a:spLocks noGrp="1"/>
           </p:cNvSpPr>
@@ -5735,90 +5373,23 @@
             <p:ph type="sldNum" sz="quarter" idx="12"/>
           </p:nvPr>
         </p:nvSpPr>
-        <p:spPr>
-          <a:xfrm>
-            <a:off x="8610599" y="6356350"/>
-            <a:ext cx="3135001" cy="365125"/>
-          </a:xfrm>
-        </p:spPr>
-        <p:txBody>
-          <a:bodyPr/>
-          <a:lstStyle/>
-          <a:p>
-            <a:fld id="{7FEFBAB6-26D0-44D8-BD53-612461CE1ACC}" type="slidenum">
-              <a:rPr lang="de-DE" smtClean="0"/>
+        <p:spPr/>
+        <p:txBody>
+          <a:bodyPr/>
+          <a:lstStyle/>
+          <a:p>
+            <a:fld id="{C5EF2332-01BF-834F-8236-50238282D533}" type="slidenum">
+              <a:rPr lang="en-US" smtClean="0"/>
               <a:t>‹#›</a:t>
             </a:fld>
-            <a:endParaRPr lang="de-DE"/>
-          </a:p>
-        </p:txBody>
-      </p:sp>
-      <p:pic>
-        <p:nvPicPr>
-          <p:cNvPr id="7" name="Grafik 2">
-            <a:extLst>
-              <a:ext uri="{FF2B5EF4-FFF2-40B4-BE49-F238E27FC236}">
-                <a16:creationId xmlns:a16="http://schemas.microsoft.com/office/drawing/2014/main" id="{74C1C64D-9803-3C7A-9C6A-A6AB5895627B}"/>
-              </a:ext>
-            </a:extLst>
-          </p:cNvPr>
-          <p:cNvPicPr>
-            <a:picLocks noChangeAspect="1"/>
-          </p:cNvPicPr>
-          <p:nvPr userDrawn="1"/>
-        </p:nvPicPr>
-        <p:blipFill>
-          <a:blip r:embed="rId2">
-            <a:alphaModFix amt="15000"/>
-          </a:blip>
-          <a:stretch>
-            <a:fillRect/>
-          </a:stretch>
-        </p:blipFill>
-        <p:spPr>
-          <a:xfrm>
-            <a:off x="8648700" y="2743200"/>
-            <a:ext cx="3543300" cy="4114800"/>
-          </a:xfrm>
-          <a:prstGeom prst="rect">
-            <a:avLst/>
-          </a:prstGeom>
-        </p:spPr>
-      </p:pic>
-      <p:pic>
-        <p:nvPicPr>
-          <p:cNvPr id="8" name="Grafik 4">
-            <a:extLst>
-              <a:ext uri="{FF2B5EF4-FFF2-40B4-BE49-F238E27FC236}">
-                <a16:creationId xmlns:a16="http://schemas.microsoft.com/office/drawing/2014/main" id="{352188AF-1F33-4164-5235-B4761EF8F4BC}"/>
-              </a:ext>
-            </a:extLst>
-          </p:cNvPr>
-          <p:cNvPicPr>
-            <a:picLocks noChangeAspect="1"/>
-          </p:cNvPicPr>
-          <p:nvPr userDrawn="1"/>
-        </p:nvPicPr>
-        <p:blipFill>
-          <a:blip r:embed="rId3"/>
-          <a:stretch>
-            <a:fillRect/>
-          </a:stretch>
-        </p:blipFill>
-        <p:spPr>
-          <a:xfrm>
-            <a:off x="446399" y="441325"/>
-            <a:ext cx="1744349" cy="825500"/>
-          </a:xfrm>
-          <a:prstGeom prst="rect">
-            <a:avLst/>
-          </a:prstGeom>
-        </p:spPr>
-      </p:pic>
+            <a:endParaRPr lang="en-US"/>
+          </a:p>
+        </p:txBody>
+      </p:sp>
     </p:spTree>
     <p:extLst>
       <p:ext uri="{BB962C8B-B14F-4D97-AF65-F5344CB8AC3E}">
-        <p14:creationId xmlns:p14="http://schemas.microsoft.com/office/powerpoint/2010/main" val="3034901721"/>
+        <p14:creationId xmlns:p14="http://schemas.microsoft.com/office/powerpoint/2010/main" val="1073069076"/>
       </p:ext>
     </p:extLst>
   </p:cSld>
@@ -5829,7 +5400,7 @@
 </file>
 
 <file path=ppt/slideLayouts/slideLayout4.xml><?xml version="1.0" encoding="utf-8"?>
-<p:sldLayout xmlns:a="http://schemas.openxmlformats.org/drawingml/2006/main" xmlns:r="http://schemas.openxmlformats.org/officeDocument/2006/relationships" xmlns:p="http://schemas.openxmlformats.org/presentationml/2006/main" preserve="1" userDrawn="1">
+<p:sldLayout xmlns:a="http://schemas.openxmlformats.org/drawingml/2006/main" xmlns:r="http://schemas.openxmlformats.org/officeDocument/2006/relationships" xmlns:p="http://schemas.openxmlformats.org/presentationml/2006/main" type="twoObj" preserve="1">
   <p:cSld name="Two Content">
     <p:spTree>
       <p:nvGrpSpPr>
@@ -5847,13 +5418,29 @@
       </p:grpSpPr>
       <p:sp>
         <p:nvSpPr>
-          <p:cNvPr id="3" name="Content Placeholder 2">
-            <a:extLst>
-              <a:ext uri="{FF2B5EF4-FFF2-40B4-BE49-F238E27FC236}">
-                <a16:creationId xmlns:a16="http://schemas.microsoft.com/office/drawing/2014/main" id="{2E30DF69-0E9B-E535-4A08-1A4493559DC4}"/>
-              </a:ext>
-            </a:extLst>
-          </p:cNvPr>
+          <p:cNvPr id="2" name="Title 1"/>
+          <p:cNvSpPr>
+            <a:spLocks noGrp="1"/>
+          </p:cNvSpPr>
+          <p:nvPr>
+            <p:ph type="title"/>
+          </p:nvPr>
+        </p:nvSpPr>
+        <p:spPr/>
+        <p:txBody>
+          <a:bodyPr/>
+          <a:lstStyle/>
+          <a:p>
+            <a:r>
+              <a:rPr lang="en-US"/>
+              <a:t>Click to edit Master title style</a:t>
+            </a:r>
+          </a:p>
+        </p:txBody>
+      </p:sp>
+      <p:sp>
+        <p:nvSpPr>
+          <p:cNvPr id="3" name="Content Placeholder 2"/>
           <p:cNvSpPr>
             <a:spLocks noGrp="1"/>
           </p:cNvSpPr>
@@ -5863,70 +5450,81 @@
         </p:nvSpPr>
         <p:spPr>
           <a:xfrm>
-            <a:off x="446399" y="1571625"/>
-            <a:ext cx="5573401" cy="4605338"/>
+            <a:off x="457200" y="1200151"/>
+            <a:ext cx="4038600" cy="3394472"/>
           </a:xfrm>
         </p:spPr>
         <p:txBody>
           <a:bodyPr/>
           <a:lstStyle>
             <a:lvl1pPr>
-              <a:defRPr sz="2200"/>
+              <a:defRPr sz="2100"/>
             </a:lvl1pPr>
             <a:lvl2pPr>
-              <a:defRPr sz="2100"/>
+              <a:defRPr sz="1800"/>
             </a:lvl2pPr>
+            <a:lvl3pPr>
+              <a:defRPr sz="1500"/>
+            </a:lvl3pPr>
             <a:lvl4pPr>
-              <a:defRPr sz="1900"/>
+              <a:defRPr sz="1350"/>
             </a:lvl4pPr>
+            <a:lvl5pPr>
+              <a:defRPr sz="1350"/>
+            </a:lvl5pPr>
+            <a:lvl6pPr>
+              <a:defRPr sz="1350"/>
+            </a:lvl6pPr>
+            <a:lvl7pPr>
+              <a:defRPr sz="1350"/>
+            </a:lvl7pPr>
+            <a:lvl8pPr>
+              <a:defRPr sz="1350"/>
+            </a:lvl8pPr>
+            <a:lvl9pPr>
+              <a:defRPr sz="1350"/>
+            </a:lvl9pPr>
           </a:lstStyle>
           <a:p>
             <a:pPr lvl="0"/>
             <a:r>
-              <a:rPr lang="en-US" dirty="0"/>
+              <a:rPr lang="en-US"/>
               <a:t>Click to edit Master text styles</a:t>
             </a:r>
           </a:p>
           <a:p>
             <a:pPr lvl="1"/>
             <a:r>
-              <a:rPr lang="en-US" dirty="0"/>
+              <a:rPr lang="en-US"/>
               <a:t>Second level</a:t>
             </a:r>
           </a:p>
           <a:p>
             <a:pPr lvl="2"/>
             <a:r>
-              <a:rPr lang="en-US" dirty="0"/>
+              <a:rPr lang="en-US"/>
               <a:t>Third level</a:t>
             </a:r>
           </a:p>
           <a:p>
             <a:pPr lvl="3"/>
             <a:r>
-              <a:rPr lang="en-US" dirty="0"/>
+              <a:rPr lang="en-US"/>
               <a:t>Fourth level</a:t>
             </a:r>
           </a:p>
           <a:p>
             <a:pPr lvl="4"/>
             <a:r>
-              <a:rPr lang="en-US" dirty="0"/>
+              <a:rPr lang="en-US"/>
               <a:t>Fifth level</a:t>
             </a:r>
-            <a:endParaRPr lang="de-DE" dirty="0"/>
-          </a:p>
-        </p:txBody>
-      </p:sp>
-      <p:sp>
-        <p:nvSpPr>
-          <p:cNvPr id="4" name="Content Placeholder 3">
-            <a:extLst>
-              <a:ext uri="{FF2B5EF4-FFF2-40B4-BE49-F238E27FC236}">
-                <a16:creationId xmlns:a16="http://schemas.microsoft.com/office/drawing/2014/main" id="{3ADB2C77-250F-A7AE-9022-31D102256250}"/>
-              </a:ext>
-            </a:extLst>
-          </p:cNvPr>
+          </a:p>
+        </p:txBody>
+      </p:sp>
+      <p:sp>
+        <p:nvSpPr>
+          <p:cNvPr id="4" name="Content Placeholder 3"/>
           <p:cNvSpPr>
             <a:spLocks noGrp="1"/>
           </p:cNvSpPr>
@@ -5936,70 +5534,81 @@
         </p:nvSpPr>
         <p:spPr>
           <a:xfrm>
-            <a:off x="6172199" y="1571625"/>
-            <a:ext cx="5573401" cy="4605338"/>
+            <a:off x="4648200" y="1200151"/>
+            <a:ext cx="4038600" cy="3394472"/>
           </a:xfrm>
         </p:spPr>
         <p:txBody>
           <a:bodyPr/>
           <a:lstStyle>
             <a:lvl1pPr>
-              <a:defRPr sz="2200"/>
+              <a:defRPr sz="2100"/>
             </a:lvl1pPr>
             <a:lvl2pPr>
-              <a:defRPr sz="2100"/>
+              <a:defRPr sz="1800"/>
             </a:lvl2pPr>
+            <a:lvl3pPr>
+              <a:defRPr sz="1500"/>
+            </a:lvl3pPr>
             <a:lvl4pPr>
-              <a:defRPr sz="1900"/>
+              <a:defRPr sz="1350"/>
             </a:lvl4pPr>
+            <a:lvl5pPr>
+              <a:defRPr sz="1350"/>
+            </a:lvl5pPr>
+            <a:lvl6pPr>
+              <a:defRPr sz="1350"/>
+            </a:lvl6pPr>
+            <a:lvl7pPr>
+              <a:defRPr sz="1350"/>
+            </a:lvl7pPr>
+            <a:lvl8pPr>
+              <a:defRPr sz="1350"/>
+            </a:lvl8pPr>
+            <a:lvl9pPr>
+              <a:defRPr sz="1350"/>
+            </a:lvl9pPr>
           </a:lstStyle>
           <a:p>
             <a:pPr lvl="0"/>
             <a:r>
-              <a:rPr lang="en-US" dirty="0"/>
+              <a:rPr lang="en-US"/>
               <a:t>Click to edit Master text styles</a:t>
             </a:r>
           </a:p>
           <a:p>
             <a:pPr lvl="1"/>
             <a:r>
-              <a:rPr lang="en-US" dirty="0"/>
+              <a:rPr lang="en-US"/>
               <a:t>Second level</a:t>
             </a:r>
           </a:p>
           <a:p>
             <a:pPr lvl="2"/>
             <a:r>
-              <a:rPr lang="en-US" dirty="0"/>
+              <a:rPr lang="en-US"/>
               <a:t>Third level</a:t>
             </a:r>
           </a:p>
           <a:p>
             <a:pPr lvl="3"/>
             <a:r>
-              <a:rPr lang="en-US" dirty="0"/>
+              <a:rPr lang="en-US"/>
               <a:t>Fourth level</a:t>
             </a:r>
           </a:p>
           <a:p>
             <a:pPr lvl="4"/>
             <a:r>
-              <a:rPr lang="en-US" dirty="0"/>
+              <a:rPr lang="en-US"/>
               <a:t>Fifth level</a:t>
             </a:r>
-            <a:endParaRPr lang="de-DE" dirty="0"/>
-          </a:p>
-        </p:txBody>
-      </p:sp>
-      <p:sp>
-        <p:nvSpPr>
-          <p:cNvPr id="5" name="Date Placeholder 4">
-            <a:extLst>
-              <a:ext uri="{FF2B5EF4-FFF2-40B4-BE49-F238E27FC236}">
-                <a16:creationId xmlns:a16="http://schemas.microsoft.com/office/drawing/2014/main" id="{90EB133B-4B34-F9C1-E5EA-2AFC347E30FD}"/>
-              </a:ext>
-            </a:extLst>
-          </p:cNvPr>
+          </a:p>
+        </p:txBody>
+      </p:sp>
+      <p:sp>
+        <p:nvSpPr>
+          <p:cNvPr id="5" name="Date Placeholder 4"/>
           <p:cNvSpPr>
             <a:spLocks noGrp="1"/>
           </p:cNvSpPr>
@@ -6007,33 +5616,22 @@
             <p:ph type="dt" sz="half" idx="10"/>
           </p:nvPr>
         </p:nvSpPr>
-        <p:spPr>
-          <a:xfrm>
-            <a:off x="446399" y="6356350"/>
-            <a:ext cx="3135001" cy="365125"/>
-          </a:xfrm>
-        </p:spPr>
-        <p:txBody>
-          <a:bodyPr/>
-          <a:lstStyle/>
-          <a:p>
-            <a:fld id="{C1588426-C358-B343-A366-E3E7336823B1}" type="datetime1">
+        <p:spPr/>
+        <p:txBody>
+          <a:bodyPr/>
+          <a:lstStyle/>
+          <a:p>
+            <a:fld id="{241EB5C9-1307-BA42-ABA2-0BC069CD8E7F}" type="datetimeFigureOut">
               <a:rPr lang="en-US" smtClean="0"/>
-              <a:t>9/22/26</a:t>
+              <a:t>1/2/22</a:t>
             </a:fld>
-            <a:endParaRPr lang="de-DE"/>
-          </a:p>
-        </p:txBody>
-      </p:sp>
-      <p:sp>
-        <p:nvSpPr>
-          <p:cNvPr id="6" name="Footer Placeholder 5">
-            <a:extLst>
-              <a:ext uri="{FF2B5EF4-FFF2-40B4-BE49-F238E27FC236}">
-                <a16:creationId xmlns:a16="http://schemas.microsoft.com/office/drawing/2014/main" id="{2EA827AC-A01C-29EF-12C8-56CB25A33D55}"/>
-              </a:ext>
-            </a:extLst>
-          </p:cNvPr>
+            <a:endParaRPr lang="en-US"/>
+          </a:p>
+        </p:txBody>
+      </p:sp>
+      <p:sp>
+        <p:nvSpPr>
+          <p:cNvPr id="6" name="Footer Placeholder 5"/>
           <p:cNvSpPr>
             <a:spLocks noGrp="1"/>
           </p:cNvSpPr>
@@ -6046,19 +5644,13 @@
           <a:bodyPr/>
           <a:lstStyle/>
           <a:p>
-            <a:endParaRPr lang="de-DE"/>
-          </a:p>
-        </p:txBody>
-      </p:sp>
-      <p:sp>
-        <p:nvSpPr>
-          <p:cNvPr id="7" name="Slide Number Placeholder 6">
-            <a:extLst>
-              <a:ext uri="{FF2B5EF4-FFF2-40B4-BE49-F238E27FC236}">
-                <a16:creationId xmlns:a16="http://schemas.microsoft.com/office/drawing/2014/main" id="{845D32B8-3259-7568-F10A-9EE0233C7895}"/>
-              </a:ext>
-            </a:extLst>
-          </p:cNvPr>
+            <a:endParaRPr lang="en-US"/>
+          </a:p>
+        </p:txBody>
+      </p:sp>
+      <p:sp>
+        <p:nvSpPr>
+          <p:cNvPr id="7" name="Slide Number Placeholder 6"/>
           <p:cNvSpPr>
             <a:spLocks noGrp="1"/>
           </p:cNvSpPr>
@@ -6066,98 +5658,23 @@
             <p:ph type="sldNum" sz="quarter" idx="12"/>
           </p:nvPr>
         </p:nvSpPr>
-        <p:spPr>
-          <a:xfrm>
-            <a:off x="8610600" y="6356350"/>
-            <a:ext cx="3135000" cy="365125"/>
-          </a:xfrm>
-        </p:spPr>
-        <p:txBody>
-          <a:bodyPr/>
-          <a:lstStyle/>
-          <a:p>
-            <a:fld id="{7FEFBAB6-26D0-44D8-BD53-612461CE1ACC}" type="slidenum">
-              <a:rPr lang="de-DE" smtClean="0"/>
+        <p:spPr/>
+        <p:txBody>
+          <a:bodyPr/>
+          <a:lstStyle/>
+          <a:p>
+            <a:fld id="{C5EF2332-01BF-834F-8236-50238282D533}" type="slidenum">
+              <a:rPr lang="en-US" smtClean="0"/>
               <a:t>‹#›</a:t>
             </a:fld>
-            <a:endParaRPr lang="de-DE"/>
-          </a:p>
-        </p:txBody>
-      </p:sp>
-      <p:pic>
-        <p:nvPicPr>
-          <p:cNvPr id="8" name="Grafik 1">
-            <a:extLst>
-              <a:ext uri="{FF2B5EF4-FFF2-40B4-BE49-F238E27FC236}">
-                <a16:creationId xmlns:a16="http://schemas.microsoft.com/office/drawing/2014/main" id="{754036A0-8FA0-9C7A-8FFE-2ED279CA7524}"/>
-              </a:ext>
-            </a:extLst>
-          </p:cNvPr>
-          <p:cNvPicPr>
-            <a:picLocks noChangeAspect="1"/>
-          </p:cNvPicPr>
-          <p:nvPr userDrawn="1"/>
-        </p:nvPicPr>
-        <p:blipFill>
-          <a:blip r:embed="rId2"/>
-          <a:stretch>
-            <a:fillRect/>
-          </a:stretch>
-        </p:blipFill>
-        <p:spPr>
-          <a:xfrm>
-            <a:off x="446399" y="432533"/>
-            <a:ext cx="1744349" cy="825500"/>
-          </a:xfrm>
-          <a:prstGeom prst="rect">
-            <a:avLst/>
-          </a:prstGeom>
-        </p:spPr>
-      </p:pic>
-      <p:sp>
-        <p:nvSpPr>
-          <p:cNvPr id="9" name="Title 1">
-            <a:extLst>
-              <a:ext uri="{FF2B5EF4-FFF2-40B4-BE49-F238E27FC236}">
-                <a16:creationId xmlns:a16="http://schemas.microsoft.com/office/drawing/2014/main" id="{BC937C47-2970-C17A-04A2-184F783AD95F}"/>
-              </a:ext>
-            </a:extLst>
-          </p:cNvPr>
-          <p:cNvSpPr>
-            <a:spLocks noGrp="1"/>
-          </p:cNvSpPr>
-          <p:nvPr>
-            <p:ph type="title"/>
-          </p:nvPr>
-        </p:nvSpPr>
-        <p:spPr>
-          <a:xfrm>
-            <a:off x="2295524" y="432532"/>
-            <a:ext cx="9450077" cy="825501"/>
-          </a:xfrm>
-        </p:spPr>
-        <p:txBody>
-          <a:bodyPr>
-            <a:normAutofit/>
-          </a:bodyPr>
-          <a:lstStyle>
-            <a:lvl1pPr>
-              <a:defRPr sz="2800" b="1"/>
-            </a:lvl1pPr>
-          </a:lstStyle>
-          <a:p>
-            <a:r>
-              <a:rPr lang="en-US" dirty="0"/>
-              <a:t>Click to edit Master title style</a:t>
-            </a:r>
-            <a:endParaRPr lang="de-DE" dirty="0"/>
+            <a:endParaRPr lang="en-US"/>
           </a:p>
         </p:txBody>
       </p:sp>
     </p:spTree>
     <p:extLst>
       <p:ext uri="{BB962C8B-B14F-4D97-AF65-F5344CB8AC3E}">
-        <p14:creationId xmlns:p14="http://schemas.microsoft.com/office/powerpoint/2010/main" val="48810582"/>
+        <p14:creationId xmlns:p14="http://schemas.microsoft.com/office/powerpoint/2010/main" val="2619886245"/>
       </p:ext>
     </p:extLst>
   </p:cSld>
@@ -6168,7 +5685,7 @@
 </file>
 
 <file path=ppt/slideLayouts/slideLayout5.xml><?xml version="1.0" encoding="utf-8"?>
-<p:sldLayout xmlns:a="http://schemas.openxmlformats.org/drawingml/2006/main" xmlns:r="http://schemas.openxmlformats.org/officeDocument/2006/relationships" xmlns:p="http://schemas.openxmlformats.org/presentationml/2006/main" preserve="1" userDrawn="1">
+<p:sldLayout xmlns:a="http://schemas.openxmlformats.org/drawingml/2006/main" xmlns:r="http://schemas.openxmlformats.org/officeDocument/2006/relationships" xmlns:p="http://schemas.openxmlformats.org/presentationml/2006/main" type="twoTxTwoObj" preserve="1">
   <p:cSld name="Comparison">
     <p:spTree>
       <p:nvGrpSpPr>
@@ -6186,13 +5703,33 @@
       </p:grpSpPr>
       <p:sp>
         <p:nvSpPr>
-          <p:cNvPr id="3" name="Text Placeholder 2">
-            <a:extLst>
-              <a:ext uri="{FF2B5EF4-FFF2-40B4-BE49-F238E27FC236}">
-                <a16:creationId xmlns:a16="http://schemas.microsoft.com/office/drawing/2014/main" id="{84102E86-70FA-A206-CA89-BD72BB8CDFBC}"/>
-              </a:ext>
-            </a:extLst>
-          </p:cNvPr>
+          <p:cNvPr id="2" name="Title 1"/>
+          <p:cNvSpPr>
+            <a:spLocks noGrp="1"/>
+          </p:cNvSpPr>
+          <p:nvPr>
+            <p:ph type="title"/>
+          </p:nvPr>
+        </p:nvSpPr>
+        <p:spPr/>
+        <p:txBody>
+          <a:bodyPr/>
+          <a:lstStyle>
+            <a:lvl1pPr>
+              <a:defRPr/>
+            </a:lvl1pPr>
+          </a:lstStyle>
+          <a:p>
+            <a:r>
+              <a:rPr lang="en-US"/>
+              <a:t>Click to edit Master title style</a:t>
+            </a:r>
+          </a:p>
+        </p:txBody>
+      </p:sp>
+      <p:sp>
+        <p:nvSpPr>
+          <p:cNvPr id="3" name="Text Placeholder 2"/>
           <p:cNvSpPr>
             <a:spLocks noGrp="1"/>
           </p:cNvSpPr>
@@ -6202,8 +5739,8 @@
         </p:nvSpPr>
         <p:spPr>
           <a:xfrm>
-            <a:off x="446399" y="1469598"/>
-            <a:ext cx="5551176" cy="823912"/>
+            <a:off x="457200" y="1151335"/>
+            <a:ext cx="4040188" cy="479822"/>
           </a:xfrm>
         </p:spPr>
         <p:txBody>
@@ -6211,45 +5748,45 @@
           <a:lstStyle>
             <a:lvl1pPr marL="0" indent="0">
               <a:buNone/>
-              <a:defRPr sz="2400" b="1"/>
+              <a:defRPr sz="1800" b="1"/>
             </a:lvl1pPr>
-            <a:lvl2pPr marL="457200" indent="0">
-              <a:buNone/>
-              <a:defRPr sz="2000" b="1"/>
+            <a:lvl2pPr marL="342900" indent="0">
+              <a:buNone/>
+              <a:defRPr sz="1500" b="1"/>
             </a:lvl2pPr>
-            <a:lvl3pPr marL="914400" indent="0">
-              <a:buNone/>
-              <a:defRPr sz="1800" b="1"/>
+            <a:lvl3pPr marL="685800" indent="0">
+              <a:buNone/>
+              <a:defRPr sz="1350" b="1"/>
             </a:lvl3pPr>
-            <a:lvl4pPr marL="1371600" indent="0">
-              <a:buNone/>
-              <a:defRPr sz="1600" b="1"/>
+            <a:lvl4pPr marL="1028700" indent="0">
+              <a:buNone/>
+              <a:defRPr sz="1200" b="1"/>
             </a:lvl4pPr>
-            <a:lvl5pPr marL="1828800" indent="0">
-              <a:buNone/>
-              <a:defRPr sz="1600" b="1"/>
+            <a:lvl5pPr marL="1371600" indent="0">
+              <a:buNone/>
+              <a:defRPr sz="1200" b="1"/>
             </a:lvl5pPr>
-            <a:lvl6pPr marL="2286000" indent="0">
-              <a:buNone/>
-              <a:defRPr sz="1600" b="1"/>
+            <a:lvl6pPr marL="1714500" indent="0">
+              <a:buNone/>
+              <a:defRPr sz="1200" b="1"/>
             </a:lvl6pPr>
-            <a:lvl7pPr marL="2743200" indent="0">
-              <a:buNone/>
-              <a:defRPr sz="1600" b="1"/>
+            <a:lvl7pPr marL="2057400" indent="0">
+              <a:buNone/>
+              <a:defRPr sz="1200" b="1"/>
             </a:lvl7pPr>
-            <a:lvl8pPr marL="3200400" indent="0">
-              <a:buNone/>
-              <a:defRPr sz="1600" b="1"/>
+            <a:lvl8pPr marL="2400300" indent="0">
+              <a:buNone/>
+              <a:defRPr sz="1200" b="1"/>
             </a:lvl8pPr>
-            <a:lvl9pPr marL="3657600" indent="0">
-              <a:buNone/>
-              <a:defRPr sz="1600" b="1"/>
+            <a:lvl9pPr marL="2743200" indent="0">
+              <a:buNone/>
+              <a:defRPr sz="1200" b="1"/>
             </a:lvl9pPr>
           </a:lstStyle>
           <a:p>
             <a:pPr lvl="0"/>
             <a:r>
-              <a:rPr lang="en-US" dirty="0"/>
+              <a:rPr lang="en-US"/>
               <a:t>Click to edit Master text styles</a:t>
             </a:r>
           </a:p>
@@ -6257,24 +5794,102 @@
       </p:sp>
       <p:sp>
         <p:nvSpPr>
-          <p:cNvPr id="5" name="Text Placeholder 4">
-            <a:extLst>
-              <a:ext uri="{FF2B5EF4-FFF2-40B4-BE49-F238E27FC236}">
-                <a16:creationId xmlns:a16="http://schemas.microsoft.com/office/drawing/2014/main" id="{A734D658-CB0A-0EA8-B947-B10F61C59866}"/>
-              </a:ext>
-            </a:extLst>
-          </p:cNvPr>
-          <p:cNvSpPr>
-            <a:spLocks noGrp="1"/>
-          </p:cNvSpPr>
-          <p:nvPr>
-            <p:ph type="body" sz="quarter" idx="3"/>
+          <p:cNvPr id="4" name="Content Placeholder 3"/>
+          <p:cNvSpPr>
+            <a:spLocks noGrp="1"/>
+          </p:cNvSpPr>
+          <p:nvPr>
+            <p:ph sz="half" idx="2"/>
           </p:nvPr>
         </p:nvSpPr>
         <p:spPr>
           <a:xfrm>
-            <a:off x="6170611" y="1469598"/>
-            <a:ext cx="5574989" cy="823912"/>
+            <a:off x="457200" y="1631156"/>
+            <a:ext cx="4040188" cy="2963466"/>
+          </a:xfrm>
+        </p:spPr>
+        <p:txBody>
+          <a:bodyPr/>
+          <a:lstStyle>
+            <a:lvl1pPr>
+              <a:defRPr sz="1800"/>
+            </a:lvl1pPr>
+            <a:lvl2pPr>
+              <a:defRPr sz="1500"/>
+            </a:lvl2pPr>
+            <a:lvl3pPr>
+              <a:defRPr sz="1350"/>
+            </a:lvl3pPr>
+            <a:lvl4pPr>
+              <a:defRPr sz="1200"/>
+            </a:lvl4pPr>
+            <a:lvl5pPr>
+              <a:defRPr sz="1200"/>
+            </a:lvl5pPr>
+            <a:lvl6pPr>
+              <a:defRPr sz="1200"/>
+            </a:lvl6pPr>
+            <a:lvl7pPr>
+              <a:defRPr sz="1200"/>
+            </a:lvl7pPr>
+            <a:lvl8pPr>
+              <a:defRPr sz="1200"/>
+            </a:lvl8pPr>
+            <a:lvl9pPr>
+              <a:defRPr sz="1200"/>
+            </a:lvl9pPr>
+          </a:lstStyle>
+          <a:p>
+            <a:pPr lvl="0"/>
+            <a:r>
+              <a:rPr lang="en-US"/>
+              <a:t>Click to edit Master text styles</a:t>
+            </a:r>
+          </a:p>
+          <a:p>
+            <a:pPr lvl="1"/>
+            <a:r>
+              <a:rPr lang="en-US"/>
+              <a:t>Second level</a:t>
+            </a:r>
+          </a:p>
+          <a:p>
+            <a:pPr lvl="2"/>
+            <a:r>
+              <a:rPr lang="en-US"/>
+              <a:t>Third level</a:t>
+            </a:r>
+          </a:p>
+          <a:p>
+            <a:pPr lvl="3"/>
+            <a:r>
+              <a:rPr lang="en-US"/>
+              <a:t>Fourth level</a:t>
+            </a:r>
+          </a:p>
+          <a:p>
+            <a:pPr lvl="4"/>
+            <a:r>
+              <a:rPr lang="en-US"/>
+              <a:t>Fifth level</a:t>
+            </a:r>
+          </a:p>
+        </p:txBody>
+      </p:sp>
+      <p:sp>
+        <p:nvSpPr>
+          <p:cNvPr id="5" name="Text Placeholder 4"/>
+          <p:cNvSpPr>
+            <a:spLocks noGrp="1"/>
+          </p:cNvSpPr>
+          <p:nvPr>
+            <p:ph type="body" sz="quarter" idx="3"/>
+          </p:nvPr>
+        </p:nvSpPr>
+        <p:spPr>
+          <a:xfrm>
+            <a:off x="4645026" y="1151335"/>
+            <a:ext cx="4041775" cy="479822"/>
           </a:xfrm>
         </p:spPr>
         <p:txBody>
@@ -6282,45 +5897,45 @@
           <a:lstStyle>
             <a:lvl1pPr marL="0" indent="0">
               <a:buNone/>
-              <a:defRPr sz="2400" b="1"/>
+              <a:defRPr sz="1800" b="1"/>
             </a:lvl1pPr>
-            <a:lvl2pPr marL="457200" indent="0">
-              <a:buNone/>
-              <a:defRPr sz="2000" b="1"/>
+            <a:lvl2pPr marL="342900" indent="0">
+              <a:buNone/>
+              <a:defRPr sz="1500" b="1"/>
             </a:lvl2pPr>
-            <a:lvl3pPr marL="914400" indent="0">
-              <a:buNone/>
-              <a:defRPr sz="1800" b="1"/>
+            <a:lvl3pPr marL="685800" indent="0">
+              <a:buNone/>
+              <a:defRPr sz="1350" b="1"/>
             </a:lvl3pPr>
-            <a:lvl4pPr marL="1371600" indent="0">
-              <a:buNone/>
-              <a:defRPr sz="1600" b="1"/>
+            <a:lvl4pPr marL="1028700" indent="0">
+              <a:buNone/>
+              <a:defRPr sz="1200" b="1"/>
             </a:lvl4pPr>
-            <a:lvl5pPr marL="1828800" indent="0">
-              <a:buNone/>
-              <a:defRPr sz="1600" b="1"/>
+            <a:lvl5pPr marL="1371600" indent="0">
+              <a:buNone/>
+              <a:defRPr sz="1200" b="1"/>
             </a:lvl5pPr>
-            <a:lvl6pPr marL="2286000" indent="0">
-              <a:buNone/>
-              <a:defRPr sz="1600" b="1"/>
+            <a:lvl6pPr marL="1714500" indent="0">
+              <a:buNone/>
+              <a:defRPr sz="1200" b="1"/>
             </a:lvl6pPr>
-            <a:lvl7pPr marL="2743200" indent="0">
-              <a:buNone/>
-              <a:defRPr sz="1600" b="1"/>
+            <a:lvl7pPr marL="2057400" indent="0">
+              <a:buNone/>
+              <a:defRPr sz="1200" b="1"/>
             </a:lvl7pPr>
-            <a:lvl8pPr marL="3200400" indent="0">
-              <a:buNone/>
-              <a:defRPr sz="1600" b="1"/>
+            <a:lvl8pPr marL="2400300" indent="0">
+              <a:buNone/>
+              <a:defRPr sz="1200" b="1"/>
             </a:lvl8pPr>
-            <a:lvl9pPr marL="3657600" indent="0">
-              <a:buNone/>
-              <a:defRPr sz="1600" b="1"/>
+            <a:lvl9pPr marL="2743200" indent="0">
+              <a:buNone/>
+              <a:defRPr sz="1200" b="1"/>
             </a:lvl9pPr>
           </a:lstStyle>
           <a:p>
             <a:pPr lvl="0"/>
             <a:r>
-              <a:rPr lang="en-US" dirty="0"/>
+              <a:rPr lang="en-US"/>
               <a:t>Click to edit Master text styles</a:t>
             </a:r>
           </a:p>
@@ -6328,47 +5943,114 @@
       </p:sp>
       <p:sp>
         <p:nvSpPr>
-          <p:cNvPr id="7" name="Date Placeholder 6">
-            <a:extLst>
-              <a:ext uri="{FF2B5EF4-FFF2-40B4-BE49-F238E27FC236}">
-                <a16:creationId xmlns:a16="http://schemas.microsoft.com/office/drawing/2014/main" id="{20FE9718-F4B6-58DB-2EE5-A6F7187F0783}"/>
-              </a:ext>
-            </a:extLst>
-          </p:cNvPr>
-          <p:cNvSpPr>
-            <a:spLocks noGrp="1"/>
-          </p:cNvSpPr>
-          <p:nvPr>
-            <p:ph type="dt" sz="half" idx="10"/>
+          <p:cNvPr id="6" name="Content Placeholder 5"/>
+          <p:cNvSpPr>
+            <a:spLocks noGrp="1"/>
+          </p:cNvSpPr>
+          <p:nvPr>
+            <p:ph sz="quarter" idx="4"/>
           </p:nvPr>
         </p:nvSpPr>
         <p:spPr>
           <a:xfrm>
-            <a:off x="446399" y="6356350"/>
-            <a:ext cx="3135001" cy="365125"/>
+            <a:off x="4645026" y="1631156"/>
+            <a:ext cx="4041775" cy="2963466"/>
           </a:xfrm>
         </p:spPr>
         <p:txBody>
           <a:bodyPr/>
-          <a:lstStyle/>
-          <a:p>
-            <a:fld id="{7D1F46F6-2FB8-E348-BEB7-ECE7E886726D}" type="datetime1">
+          <a:lstStyle>
+            <a:lvl1pPr>
+              <a:defRPr sz="1800"/>
+            </a:lvl1pPr>
+            <a:lvl2pPr>
+              <a:defRPr sz="1500"/>
+            </a:lvl2pPr>
+            <a:lvl3pPr>
+              <a:defRPr sz="1350"/>
+            </a:lvl3pPr>
+            <a:lvl4pPr>
+              <a:defRPr sz="1200"/>
+            </a:lvl4pPr>
+            <a:lvl5pPr>
+              <a:defRPr sz="1200"/>
+            </a:lvl5pPr>
+            <a:lvl6pPr>
+              <a:defRPr sz="1200"/>
+            </a:lvl6pPr>
+            <a:lvl7pPr>
+              <a:defRPr sz="1200"/>
+            </a:lvl7pPr>
+            <a:lvl8pPr>
+              <a:defRPr sz="1200"/>
+            </a:lvl8pPr>
+            <a:lvl9pPr>
+              <a:defRPr sz="1200"/>
+            </a:lvl9pPr>
+          </a:lstStyle>
+          <a:p>
+            <a:pPr lvl="0"/>
+            <a:r>
+              <a:rPr lang="en-US"/>
+              <a:t>Click to edit Master text styles</a:t>
+            </a:r>
+          </a:p>
+          <a:p>
+            <a:pPr lvl="1"/>
+            <a:r>
+              <a:rPr lang="en-US"/>
+              <a:t>Second level</a:t>
+            </a:r>
+          </a:p>
+          <a:p>
+            <a:pPr lvl="2"/>
+            <a:r>
+              <a:rPr lang="en-US"/>
+              <a:t>Third level</a:t>
+            </a:r>
+          </a:p>
+          <a:p>
+            <a:pPr lvl="3"/>
+            <a:r>
+              <a:rPr lang="en-US"/>
+              <a:t>Fourth level</a:t>
+            </a:r>
+          </a:p>
+          <a:p>
+            <a:pPr lvl="4"/>
+            <a:r>
+              <a:rPr lang="en-US"/>
+              <a:t>Fifth level</a:t>
+            </a:r>
+          </a:p>
+        </p:txBody>
+      </p:sp>
+      <p:sp>
+        <p:nvSpPr>
+          <p:cNvPr id="7" name="Date Placeholder 6"/>
+          <p:cNvSpPr>
+            <a:spLocks noGrp="1"/>
+          </p:cNvSpPr>
+          <p:nvPr>
+            <p:ph type="dt" sz="half" idx="10"/>
+          </p:nvPr>
+        </p:nvSpPr>
+        <p:spPr/>
+        <p:txBody>
+          <a:bodyPr/>
+          <a:lstStyle/>
+          <a:p>
+            <a:fld id="{241EB5C9-1307-BA42-ABA2-0BC069CD8E7F}" type="datetimeFigureOut">
               <a:rPr lang="en-US" smtClean="0"/>
-              <a:t>9/22/26</a:t>
+              <a:t>1/2/22</a:t>
             </a:fld>
-            <a:endParaRPr lang="de-DE"/>
-          </a:p>
-        </p:txBody>
-      </p:sp>
-      <p:sp>
-        <p:nvSpPr>
-          <p:cNvPr id="8" name="Footer Placeholder 7">
-            <a:extLst>
-              <a:ext uri="{FF2B5EF4-FFF2-40B4-BE49-F238E27FC236}">
-                <a16:creationId xmlns:a16="http://schemas.microsoft.com/office/drawing/2014/main" id="{39CBE51E-F47C-1692-7AEE-1996D85FE583}"/>
-              </a:ext>
-            </a:extLst>
-          </p:cNvPr>
+            <a:endParaRPr lang="en-US"/>
+          </a:p>
+        </p:txBody>
+      </p:sp>
+      <p:sp>
+        <p:nvSpPr>
+          <p:cNvPr id="8" name="Footer Placeholder 7"/>
           <p:cNvSpPr>
             <a:spLocks noGrp="1"/>
           </p:cNvSpPr>
@@ -6381,19 +6063,13 @@
           <a:bodyPr/>
           <a:lstStyle/>
           <a:p>
-            <a:endParaRPr lang="de-DE"/>
-          </a:p>
-        </p:txBody>
-      </p:sp>
-      <p:sp>
-        <p:nvSpPr>
-          <p:cNvPr id="9" name="Slide Number Placeholder 8">
-            <a:extLst>
-              <a:ext uri="{FF2B5EF4-FFF2-40B4-BE49-F238E27FC236}">
-                <a16:creationId xmlns:a16="http://schemas.microsoft.com/office/drawing/2014/main" id="{AD48C7BA-4AD7-FEFC-841A-2BC1F286AFDD}"/>
-              </a:ext>
-            </a:extLst>
-          </p:cNvPr>
+            <a:endParaRPr lang="en-US"/>
+          </a:p>
+        </p:txBody>
+      </p:sp>
+      <p:sp>
+        <p:nvSpPr>
+          <p:cNvPr id="9" name="Slide Number Placeholder 8"/>
           <p:cNvSpPr>
             <a:spLocks noGrp="1"/>
           </p:cNvSpPr>
@@ -6401,244 +6077,23 @@
             <p:ph type="sldNum" sz="quarter" idx="12"/>
           </p:nvPr>
         </p:nvSpPr>
-        <p:spPr>
-          <a:xfrm>
-            <a:off x="8610600" y="6356350"/>
-            <a:ext cx="3135000" cy="365125"/>
-          </a:xfrm>
-        </p:spPr>
-        <p:txBody>
-          <a:bodyPr/>
-          <a:lstStyle/>
-          <a:p>
-            <a:fld id="{7FEFBAB6-26D0-44D8-BD53-612461CE1ACC}" type="slidenum">
-              <a:rPr lang="de-DE" smtClean="0"/>
+        <p:spPr/>
+        <p:txBody>
+          <a:bodyPr/>
+          <a:lstStyle/>
+          <a:p>
+            <a:fld id="{C5EF2332-01BF-834F-8236-50238282D533}" type="slidenum">
+              <a:rPr lang="en-US" smtClean="0"/>
               <a:t>‹#›</a:t>
             </a:fld>
-            <a:endParaRPr lang="de-DE"/>
-          </a:p>
-        </p:txBody>
-      </p:sp>
-      <p:sp>
-        <p:nvSpPr>
-          <p:cNvPr id="10" name="Title 1">
-            <a:extLst>
-              <a:ext uri="{FF2B5EF4-FFF2-40B4-BE49-F238E27FC236}">
-                <a16:creationId xmlns:a16="http://schemas.microsoft.com/office/drawing/2014/main" id="{FC705A9A-0205-FE9C-99C9-063702832FDF}"/>
-              </a:ext>
-            </a:extLst>
-          </p:cNvPr>
-          <p:cNvSpPr>
-            <a:spLocks noGrp="1"/>
-          </p:cNvSpPr>
-          <p:nvPr>
-            <p:ph type="title"/>
-          </p:nvPr>
-        </p:nvSpPr>
-        <p:spPr>
-          <a:xfrm>
-            <a:off x="2295524" y="432532"/>
-            <a:ext cx="9450077" cy="825501"/>
-          </a:xfrm>
-        </p:spPr>
-        <p:txBody>
-          <a:bodyPr>
-            <a:normAutofit/>
-          </a:bodyPr>
-          <a:lstStyle>
-            <a:lvl1pPr>
-              <a:defRPr sz="2800" b="1"/>
-            </a:lvl1pPr>
-          </a:lstStyle>
-          <a:p>
-            <a:r>
-              <a:rPr lang="en-US" dirty="0"/>
-              <a:t>Click to edit Master title style</a:t>
-            </a:r>
-            <a:endParaRPr lang="de-DE" dirty="0"/>
-          </a:p>
-        </p:txBody>
-      </p:sp>
-      <p:pic>
-        <p:nvPicPr>
-          <p:cNvPr id="12" name="Grafik 1">
-            <a:extLst>
-              <a:ext uri="{FF2B5EF4-FFF2-40B4-BE49-F238E27FC236}">
-                <a16:creationId xmlns:a16="http://schemas.microsoft.com/office/drawing/2014/main" id="{15E8C26E-545A-DEFF-E2E9-7420B85E40BF}"/>
-              </a:ext>
-            </a:extLst>
-          </p:cNvPr>
-          <p:cNvPicPr>
-            <a:picLocks noChangeAspect="1"/>
-          </p:cNvPicPr>
-          <p:nvPr userDrawn="1"/>
-        </p:nvPicPr>
-        <p:blipFill>
-          <a:blip r:embed="rId2"/>
-          <a:stretch>
-            <a:fillRect/>
-          </a:stretch>
-        </p:blipFill>
-        <p:spPr>
-          <a:xfrm>
-            <a:off x="446399" y="432533"/>
-            <a:ext cx="1744349" cy="825500"/>
-          </a:xfrm>
-          <a:prstGeom prst="rect">
-            <a:avLst/>
-          </a:prstGeom>
-        </p:spPr>
-      </p:pic>
-      <p:sp>
-        <p:nvSpPr>
-          <p:cNvPr id="13" name="Content Placeholder 2">
-            <a:extLst>
-              <a:ext uri="{FF2B5EF4-FFF2-40B4-BE49-F238E27FC236}">
-                <a16:creationId xmlns:a16="http://schemas.microsoft.com/office/drawing/2014/main" id="{C6993A24-31B8-B2E5-A244-72F9AD36DA89}"/>
-              </a:ext>
-            </a:extLst>
-          </p:cNvPr>
-          <p:cNvSpPr>
-            <a:spLocks noGrp="1"/>
-          </p:cNvSpPr>
-          <p:nvPr>
-            <p:ph sz="half" idx="13"/>
-          </p:nvPr>
-        </p:nvSpPr>
-        <p:spPr>
-          <a:xfrm>
-            <a:off x="446399" y="2460197"/>
-            <a:ext cx="5573401" cy="3716766"/>
-          </a:xfrm>
-        </p:spPr>
-        <p:txBody>
-          <a:bodyPr/>
-          <a:lstStyle>
-            <a:lvl1pPr>
-              <a:defRPr sz="2200"/>
-            </a:lvl1pPr>
-            <a:lvl2pPr>
-              <a:defRPr sz="2100"/>
-            </a:lvl2pPr>
-            <a:lvl4pPr>
-              <a:defRPr sz="1900"/>
-            </a:lvl4pPr>
-          </a:lstStyle>
-          <a:p>
-            <a:pPr lvl="0"/>
-            <a:r>
-              <a:rPr lang="en-US" dirty="0"/>
-              <a:t>Click to edit Master text styles</a:t>
-            </a:r>
-          </a:p>
-          <a:p>
-            <a:pPr lvl="1"/>
-            <a:r>
-              <a:rPr lang="en-US" dirty="0"/>
-              <a:t>Second level</a:t>
-            </a:r>
-          </a:p>
-          <a:p>
-            <a:pPr lvl="2"/>
-            <a:r>
-              <a:rPr lang="en-US" dirty="0"/>
-              <a:t>Third level</a:t>
-            </a:r>
-          </a:p>
-          <a:p>
-            <a:pPr lvl="3"/>
-            <a:r>
-              <a:rPr lang="en-US" dirty="0"/>
-              <a:t>Fourth level</a:t>
-            </a:r>
-          </a:p>
-          <a:p>
-            <a:pPr lvl="4"/>
-            <a:r>
-              <a:rPr lang="en-US" dirty="0"/>
-              <a:t>Fifth level</a:t>
-            </a:r>
-            <a:endParaRPr lang="de-DE" dirty="0"/>
-          </a:p>
-        </p:txBody>
-      </p:sp>
-      <p:sp>
-        <p:nvSpPr>
-          <p:cNvPr id="14" name="Content Placeholder 3">
-            <a:extLst>
-              <a:ext uri="{FF2B5EF4-FFF2-40B4-BE49-F238E27FC236}">
-                <a16:creationId xmlns:a16="http://schemas.microsoft.com/office/drawing/2014/main" id="{6AB2572A-E2A5-7607-0A56-E53032CD7B56}"/>
-              </a:ext>
-            </a:extLst>
-          </p:cNvPr>
-          <p:cNvSpPr>
-            <a:spLocks noGrp="1"/>
-          </p:cNvSpPr>
-          <p:nvPr>
-            <p:ph sz="half" idx="2"/>
-          </p:nvPr>
-        </p:nvSpPr>
-        <p:spPr>
-          <a:xfrm>
-            <a:off x="6172199" y="2460195"/>
-            <a:ext cx="5573401" cy="3716767"/>
-          </a:xfrm>
-        </p:spPr>
-        <p:txBody>
-          <a:bodyPr/>
-          <a:lstStyle>
-            <a:lvl1pPr>
-              <a:defRPr sz="2200"/>
-            </a:lvl1pPr>
-            <a:lvl2pPr>
-              <a:defRPr sz="2100"/>
-            </a:lvl2pPr>
-            <a:lvl4pPr>
-              <a:defRPr sz="1900"/>
-            </a:lvl4pPr>
-          </a:lstStyle>
-          <a:p>
-            <a:pPr lvl="0"/>
-            <a:r>
-              <a:rPr lang="en-US" dirty="0"/>
-              <a:t>Click to edit Master text styles</a:t>
-            </a:r>
-          </a:p>
-          <a:p>
-            <a:pPr lvl="1"/>
-            <a:r>
-              <a:rPr lang="en-US" dirty="0"/>
-              <a:t>Second level</a:t>
-            </a:r>
-          </a:p>
-          <a:p>
-            <a:pPr lvl="2"/>
-            <a:r>
-              <a:rPr lang="en-US" dirty="0"/>
-              <a:t>Third level</a:t>
-            </a:r>
-          </a:p>
-          <a:p>
-            <a:pPr lvl="3"/>
-            <a:r>
-              <a:rPr lang="en-US" dirty="0"/>
-              <a:t>Fourth level</a:t>
-            </a:r>
-          </a:p>
-          <a:p>
-            <a:pPr lvl="4"/>
-            <a:r>
-              <a:rPr lang="en-US" dirty="0"/>
-              <a:t>Fifth level</a:t>
-            </a:r>
-            <a:endParaRPr lang="de-DE" dirty="0"/>
+            <a:endParaRPr lang="en-US"/>
           </a:p>
         </p:txBody>
       </p:sp>
     </p:spTree>
     <p:extLst>
       <p:ext uri="{BB962C8B-B14F-4D97-AF65-F5344CB8AC3E}">
-        <p14:creationId xmlns:p14="http://schemas.microsoft.com/office/powerpoint/2010/main" val="3513987937"/>
+        <p14:creationId xmlns:p14="http://schemas.microsoft.com/office/powerpoint/2010/main" val="2535793967"/>
       </p:ext>
     </p:extLst>
   </p:cSld>
@@ -6649,8 +6104,8 @@
 </file>
 
 <file path=ppt/slideLayouts/slideLayout6.xml><?xml version="1.0" encoding="utf-8"?>
-<p:sldLayout xmlns:a="http://schemas.openxmlformats.org/drawingml/2006/main" xmlns:r="http://schemas.openxmlformats.org/officeDocument/2006/relationships" xmlns:p="http://schemas.openxmlformats.org/presentationml/2006/main" type="objTx" preserve="1">
-  <p:cSld name="Content with Caption">
+<p:sldLayout xmlns:a="http://schemas.openxmlformats.org/drawingml/2006/main" xmlns:r="http://schemas.openxmlformats.org/officeDocument/2006/relationships" xmlns:p="http://schemas.openxmlformats.org/presentationml/2006/main" type="titleOnly" preserve="1">
+  <p:cSld name="Title Only">
     <p:spTree>
       <p:nvGrpSpPr>
         <p:cNvPr id="1" name=""/>
@@ -6667,13 +6122,7 @@
       </p:grpSpPr>
       <p:sp>
         <p:nvSpPr>
-          <p:cNvPr id="2" name="Title 1">
-            <a:extLst>
-              <a:ext uri="{FF2B5EF4-FFF2-40B4-BE49-F238E27FC236}">
-                <a16:creationId xmlns:a16="http://schemas.microsoft.com/office/drawing/2014/main" id="{12131F71-CF7E-3DA4-7847-3ACEC01625C3}"/>
-              </a:ext>
-            </a:extLst>
-          </p:cNvPr>
+          <p:cNvPr id="2" name="Title 1"/>
           <p:cNvSpPr>
             <a:spLocks noGrp="1"/>
           </p:cNvSpPr>
@@ -6681,199 +6130,21 @@
             <p:ph type="title"/>
           </p:nvPr>
         </p:nvSpPr>
-        <p:spPr>
-          <a:xfrm>
-            <a:off x="446399" y="1392999"/>
-            <a:ext cx="4735201" cy="996952"/>
-          </a:xfrm>
-        </p:spPr>
-        <p:txBody>
-          <a:bodyPr anchor="b"/>
-          <a:lstStyle>
-            <a:lvl1pPr>
-              <a:defRPr sz="2800" b="1"/>
-            </a:lvl1pPr>
-          </a:lstStyle>
-          <a:p>
-            <a:r>
-              <a:rPr lang="en-US" dirty="0"/>
+        <p:spPr/>
+        <p:txBody>
+          <a:bodyPr/>
+          <a:lstStyle/>
+          <a:p>
+            <a:r>
+              <a:rPr lang="en-US"/>
               <a:t>Click to edit Master title style</a:t>
             </a:r>
-            <a:endParaRPr lang="de-DE" dirty="0"/>
-          </a:p>
-        </p:txBody>
-      </p:sp>
-      <p:sp>
-        <p:nvSpPr>
-          <p:cNvPr id="3" name="Content Placeholder 2">
-            <a:extLst>
-              <a:ext uri="{FF2B5EF4-FFF2-40B4-BE49-F238E27FC236}">
-                <a16:creationId xmlns:a16="http://schemas.microsoft.com/office/drawing/2014/main" id="{1ABD3518-0673-3D1D-365A-E2B15CD22643}"/>
-              </a:ext>
-            </a:extLst>
-          </p:cNvPr>
-          <p:cNvSpPr>
-            <a:spLocks noGrp="1"/>
-          </p:cNvSpPr>
-          <p:nvPr>
-            <p:ph idx="1"/>
-          </p:nvPr>
-        </p:nvSpPr>
-        <p:spPr>
-          <a:xfrm>
-            <a:off x="5372100" y="1581150"/>
-            <a:ext cx="6373500" cy="4460081"/>
-          </a:xfrm>
-        </p:spPr>
-        <p:txBody>
-          <a:bodyPr/>
-          <a:lstStyle>
-            <a:lvl1pPr>
-              <a:defRPr sz="2200"/>
-            </a:lvl1pPr>
-            <a:lvl2pPr>
-              <a:defRPr sz="2100"/>
-            </a:lvl2pPr>
-            <a:lvl3pPr>
-              <a:defRPr sz="2000"/>
-            </a:lvl3pPr>
-            <a:lvl4pPr>
-              <a:defRPr sz="1900"/>
-            </a:lvl4pPr>
-            <a:lvl5pPr>
-              <a:defRPr sz="1800"/>
-            </a:lvl5pPr>
-            <a:lvl6pPr>
-              <a:defRPr sz="2000"/>
-            </a:lvl6pPr>
-            <a:lvl7pPr>
-              <a:defRPr sz="2000"/>
-            </a:lvl7pPr>
-            <a:lvl8pPr>
-              <a:defRPr sz="2000"/>
-            </a:lvl8pPr>
-            <a:lvl9pPr>
-              <a:defRPr sz="2000"/>
-            </a:lvl9pPr>
-          </a:lstStyle>
-          <a:p>
-            <a:pPr lvl="0"/>
-            <a:r>
-              <a:rPr lang="en-US" dirty="0"/>
-              <a:t>Click to edit Master text styles</a:t>
-            </a:r>
-          </a:p>
-          <a:p>
-            <a:pPr lvl="1"/>
-            <a:r>
-              <a:rPr lang="en-US" dirty="0"/>
-              <a:t>Second level</a:t>
-            </a:r>
-          </a:p>
-          <a:p>
-            <a:pPr lvl="2"/>
-            <a:r>
-              <a:rPr lang="en-US" dirty="0"/>
-              <a:t>Third level</a:t>
-            </a:r>
-          </a:p>
-          <a:p>
-            <a:pPr lvl="3"/>
-            <a:r>
-              <a:rPr lang="en-US" dirty="0"/>
-              <a:t>Fourth level</a:t>
-            </a:r>
-          </a:p>
-          <a:p>
-            <a:pPr lvl="4"/>
-            <a:r>
-              <a:rPr lang="en-US" dirty="0"/>
-              <a:t>Fifth level</a:t>
-            </a:r>
-            <a:endParaRPr lang="de-DE" dirty="0"/>
-          </a:p>
-        </p:txBody>
-      </p:sp>
-      <p:sp>
-        <p:nvSpPr>
-          <p:cNvPr id="4" name="Text Placeholder 3">
-            <a:extLst>
-              <a:ext uri="{FF2B5EF4-FFF2-40B4-BE49-F238E27FC236}">
-                <a16:creationId xmlns:a16="http://schemas.microsoft.com/office/drawing/2014/main" id="{7381D285-C44D-D095-90F1-6D3CF7B2C883}"/>
-              </a:ext>
-            </a:extLst>
-          </p:cNvPr>
-          <p:cNvSpPr>
-            <a:spLocks noGrp="1"/>
-          </p:cNvSpPr>
-          <p:nvPr>
-            <p:ph type="body" sz="half" idx="2"/>
-          </p:nvPr>
-        </p:nvSpPr>
-        <p:spPr>
-          <a:xfrm>
-            <a:off x="446399" y="2524918"/>
-            <a:ext cx="4735201" cy="3516313"/>
-          </a:xfrm>
-        </p:spPr>
-        <p:txBody>
-          <a:bodyPr/>
-          <a:lstStyle>
-            <a:lvl1pPr marL="0" indent="0">
-              <a:buNone/>
-              <a:defRPr sz="1600"/>
-            </a:lvl1pPr>
-            <a:lvl2pPr marL="457200" indent="0">
-              <a:buNone/>
-              <a:defRPr sz="1400"/>
-            </a:lvl2pPr>
-            <a:lvl3pPr marL="914400" indent="0">
-              <a:buNone/>
-              <a:defRPr sz="1200"/>
-            </a:lvl3pPr>
-            <a:lvl4pPr marL="1371600" indent="0">
-              <a:buNone/>
-              <a:defRPr sz="1000"/>
-            </a:lvl4pPr>
-            <a:lvl5pPr marL="1828800" indent="0">
-              <a:buNone/>
-              <a:defRPr sz="1000"/>
-            </a:lvl5pPr>
-            <a:lvl6pPr marL="2286000" indent="0">
-              <a:buNone/>
-              <a:defRPr sz="1000"/>
-            </a:lvl6pPr>
-            <a:lvl7pPr marL="2743200" indent="0">
-              <a:buNone/>
-              <a:defRPr sz="1000"/>
-            </a:lvl7pPr>
-            <a:lvl8pPr marL="3200400" indent="0">
-              <a:buNone/>
-              <a:defRPr sz="1000"/>
-            </a:lvl8pPr>
-            <a:lvl9pPr marL="3657600" indent="0">
-              <a:buNone/>
-              <a:defRPr sz="1000"/>
-            </a:lvl9pPr>
-          </a:lstStyle>
-          <a:p>
-            <a:pPr lvl="0"/>
-            <a:r>
-              <a:rPr lang="en-US" dirty="0"/>
-              <a:t>Click to edit Master text styles</a:t>
-            </a:r>
-          </a:p>
-        </p:txBody>
-      </p:sp>
-      <p:sp>
-        <p:nvSpPr>
-          <p:cNvPr id="5" name="Date Placeholder 4">
-            <a:extLst>
-              <a:ext uri="{FF2B5EF4-FFF2-40B4-BE49-F238E27FC236}">
-                <a16:creationId xmlns:a16="http://schemas.microsoft.com/office/drawing/2014/main" id="{C66B5DBF-6BAC-52FC-7335-7A3F60190EE7}"/>
-              </a:ext>
-            </a:extLst>
-          </p:cNvPr>
+          </a:p>
+        </p:txBody>
+      </p:sp>
+      <p:sp>
+        <p:nvSpPr>
+          <p:cNvPr id="3" name="Date Placeholder 2"/>
           <p:cNvSpPr>
             <a:spLocks noGrp="1"/>
           </p:cNvSpPr>
@@ -6881,33 +6152,22 @@
             <p:ph type="dt" sz="half" idx="10"/>
           </p:nvPr>
         </p:nvSpPr>
-        <p:spPr>
-          <a:xfrm>
-            <a:off x="446399" y="6356350"/>
-            <a:ext cx="3135001" cy="365125"/>
-          </a:xfrm>
-        </p:spPr>
-        <p:txBody>
-          <a:bodyPr/>
-          <a:lstStyle/>
-          <a:p>
-            <a:fld id="{2BED87DE-3125-1D4E-99ED-F4C0CC774B19}" type="datetime1">
+        <p:spPr/>
+        <p:txBody>
+          <a:bodyPr/>
+          <a:lstStyle/>
+          <a:p>
+            <a:fld id="{241EB5C9-1307-BA42-ABA2-0BC069CD8E7F}" type="datetimeFigureOut">
               <a:rPr lang="en-US" smtClean="0"/>
-              <a:t>9/22/26</a:t>
+              <a:t>1/2/22</a:t>
             </a:fld>
-            <a:endParaRPr lang="de-DE"/>
-          </a:p>
-        </p:txBody>
-      </p:sp>
-      <p:sp>
-        <p:nvSpPr>
-          <p:cNvPr id="6" name="Footer Placeholder 5">
-            <a:extLst>
-              <a:ext uri="{FF2B5EF4-FFF2-40B4-BE49-F238E27FC236}">
-                <a16:creationId xmlns:a16="http://schemas.microsoft.com/office/drawing/2014/main" id="{1B72B7B0-FB82-754A-E331-9F3D03F13D2D}"/>
-              </a:ext>
-            </a:extLst>
-          </p:cNvPr>
+            <a:endParaRPr lang="en-US"/>
+          </a:p>
+        </p:txBody>
+      </p:sp>
+      <p:sp>
+        <p:nvSpPr>
+          <p:cNvPr id="4" name="Footer Placeholder 3"/>
           <p:cNvSpPr>
             <a:spLocks noGrp="1"/>
           </p:cNvSpPr>
@@ -6920,19 +6180,13 @@
           <a:bodyPr/>
           <a:lstStyle/>
           <a:p>
-            <a:endParaRPr lang="de-DE"/>
-          </a:p>
-        </p:txBody>
-      </p:sp>
-      <p:sp>
-        <p:nvSpPr>
-          <p:cNvPr id="7" name="Slide Number Placeholder 6">
-            <a:extLst>
-              <a:ext uri="{FF2B5EF4-FFF2-40B4-BE49-F238E27FC236}">
-                <a16:creationId xmlns:a16="http://schemas.microsoft.com/office/drawing/2014/main" id="{7EC0C6E5-A864-8D29-B45D-21E23026496C}"/>
-              </a:ext>
-            </a:extLst>
-          </p:cNvPr>
+            <a:endParaRPr lang="en-US"/>
+          </a:p>
+        </p:txBody>
+      </p:sp>
+      <p:sp>
+        <p:nvSpPr>
+          <p:cNvPr id="5" name="Slide Number Placeholder 4"/>
           <p:cNvSpPr>
             <a:spLocks noGrp="1"/>
           </p:cNvSpPr>
@@ -6940,58 +6194,23 @@
             <p:ph type="sldNum" sz="quarter" idx="12"/>
           </p:nvPr>
         </p:nvSpPr>
-        <p:spPr>
-          <a:xfrm>
-            <a:off x="8610600" y="6356350"/>
-            <a:ext cx="3135000" cy="365125"/>
-          </a:xfrm>
-        </p:spPr>
-        <p:txBody>
-          <a:bodyPr/>
-          <a:lstStyle/>
-          <a:p>
-            <a:fld id="{7FEFBAB6-26D0-44D8-BD53-612461CE1ACC}" type="slidenum">
-              <a:rPr lang="de-DE" smtClean="0"/>
+        <p:spPr/>
+        <p:txBody>
+          <a:bodyPr/>
+          <a:lstStyle/>
+          <a:p>
+            <a:fld id="{C5EF2332-01BF-834F-8236-50238282D533}" type="slidenum">
+              <a:rPr lang="en-US" smtClean="0"/>
               <a:t>‹#›</a:t>
             </a:fld>
-            <a:endParaRPr lang="de-DE"/>
-          </a:p>
-        </p:txBody>
-      </p:sp>
-      <p:pic>
-        <p:nvPicPr>
-          <p:cNvPr id="8" name="Grafik 1">
-            <a:extLst>
-              <a:ext uri="{FF2B5EF4-FFF2-40B4-BE49-F238E27FC236}">
-                <a16:creationId xmlns:a16="http://schemas.microsoft.com/office/drawing/2014/main" id="{902BBA65-A2D7-A18A-E548-A3E6399B68E8}"/>
-              </a:ext>
-            </a:extLst>
-          </p:cNvPr>
-          <p:cNvPicPr>
-            <a:picLocks noChangeAspect="1"/>
-          </p:cNvPicPr>
-          <p:nvPr userDrawn="1"/>
-        </p:nvPicPr>
-        <p:blipFill>
-          <a:blip r:embed="rId2"/>
-          <a:stretch>
-            <a:fillRect/>
-          </a:stretch>
-        </p:blipFill>
-        <p:spPr>
-          <a:xfrm>
-            <a:off x="446399" y="432533"/>
-            <a:ext cx="1744349" cy="825500"/>
-          </a:xfrm>
-          <a:prstGeom prst="rect">
-            <a:avLst/>
-          </a:prstGeom>
-        </p:spPr>
-      </p:pic>
+            <a:endParaRPr lang="en-US"/>
+          </a:p>
+        </p:txBody>
+      </p:sp>
     </p:spTree>
     <p:extLst>
       <p:ext uri="{BB962C8B-B14F-4D97-AF65-F5344CB8AC3E}">
-        <p14:creationId xmlns:p14="http://schemas.microsoft.com/office/powerpoint/2010/main" val="4902161"/>
+        <p14:creationId xmlns:p14="http://schemas.microsoft.com/office/powerpoint/2010/main" val="3472721253"/>
       </p:ext>
     </p:extLst>
   </p:cSld>
@@ -7020,13 +6239,7 @@
       </p:grpSpPr>
       <p:sp>
         <p:nvSpPr>
-          <p:cNvPr id="2" name="Date Placeholder 1">
-            <a:extLst>
-              <a:ext uri="{FF2B5EF4-FFF2-40B4-BE49-F238E27FC236}">
-                <a16:creationId xmlns:a16="http://schemas.microsoft.com/office/drawing/2014/main" id="{D8F17B60-1712-491C-09F9-ADCE8A4EA65E}"/>
-              </a:ext>
-            </a:extLst>
-          </p:cNvPr>
+          <p:cNvPr id="2" name="Date Placeholder 1"/>
           <p:cNvSpPr>
             <a:spLocks noGrp="1"/>
           </p:cNvSpPr>
@@ -7034,33 +6247,22 @@
             <p:ph type="dt" sz="half" idx="10"/>
           </p:nvPr>
         </p:nvSpPr>
-        <p:spPr>
-          <a:xfrm>
-            <a:off x="446399" y="6356350"/>
-            <a:ext cx="3135001" cy="365125"/>
-          </a:xfrm>
-        </p:spPr>
-        <p:txBody>
-          <a:bodyPr/>
-          <a:lstStyle/>
-          <a:p>
-            <a:fld id="{43C3618C-C306-F848-BE7E-873814464F34}" type="datetime1">
+        <p:spPr/>
+        <p:txBody>
+          <a:bodyPr/>
+          <a:lstStyle/>
+          <a:p>
+            <a:fld id="{241EB5C9-1307-BA42-ABA2-0BC069CD8E7F}" type="datetimeFigureOut">
               <a:rPr lang="en-US" smtClean="0"/>
-              <a:t>9/22/26</a:t>
+              <a:t>1/2/22</a:t>
             </a:fld>
-            <a:endParaRPr lang="de-DE"/>
-          </a:p>
-        </p:txBody>
-      </p:sp>
-      <p:sp>
-        <p:nvSpPr>
-          <p:cNvPr id="3" name="Footer Placeholder 2">
-            <a:extLst>
-              <a:ext uri="{FF2B5EF4-FFF2-40B4-BE49-F238E27FC236}">
-                <a16:creationId xmlns:a16="http://schemas.microsoft.com/office/drawing/2014/main" id="{10BD0012-87AD-0547-F9CE-9D55443F1035}"/>
-              </a:ext>
-            </a:extLst>
-          </p:cNvPr>
+            <a:endParaRPr lang="en-US"/>
+          </a:p>
+        </p:txBody>
+      </p:sp>
+      <p:sp>
+        <p:nvSpPr>
+          <p:cNvPr id="3" name="Footer Placeholder 2"/>
           <p:cNvSpPr>
             <a:spLocks noGrp="1"/>
           </p:cNvSpPr>
@@ -7073,19 +6275,13 @@
           <a:bodyPr/>
           <a:lstStyle/>
           <a:p>
-            <a:endParaRPr lang="de-DE"/>
-          </a:p>
-        </p:txBody>
-      </p:sp>
-      <p:sp>
-        <p:nvSpPr>
-          <p:cNvPr id="4" name="Slide Number Placeholder 3">
-            <a:extLst>
-              <a:ext uri="{FF2B5EF4-FFF2-40B4-BE49-F238E27FC236}">
-                <a16:creationId xmlns:a16="http://schemas.microsoft.com/office/drawing/2014/main" id="{1A6DA1F9-52F5-00B7-CC94-CD773FE1A39E}"/>
-              </a:ext>
-            </a:extLst>
-          </p:cNvPr>
+            <a:endParaRPr lang="en-US"/>
+          </a:p>
+        </p:txBody>
+      </p:sp>
+      <p:sp>
+        <p:nvSpPr>
+          <p:cNvPr id="4" name="Slide Number Placeholder 3"/>
           <p:cNvSpPr>
             <a:spLocks noGrp="1"/>
           </p:cNvSpPr>
@@ -7093,60 +6289,23 @@
             <p:ph type="sldNum" sz="quarter" idx="12"/>
           </p:nvPr>
         </p:nvSpPr>
-        <p:spPr>
-          <a:xfrm>
-            <a:off x="8610599" y="6356350"/>
-            <a:ext cx="3135001" cy="365125"/>
-          </a:xfrm>
-        </p:spPr>
-        <p:txBody>
-          <a:bodyPr/>
-          <a:lstStyle/>
-          <a:p>
-            <a:fld id="{7FEFBAB6-26D0-44D8-BD53-612461CE1ACC}" type="slidenum">
-              <a:rPr lang="de-DE" smtClean="0"/>
+        <p:spPr/>
+        <p:txBody>
+          <a:bodyPr/>
+          <a:lstStyle/>
+          <a:p>
+            <a:fld id="{C5EF2332-01BF-834F-8236-50238282D533}" type="slidenum">
+              <a:rPr lang="en-US" smtClean="0"/>
               <a:t>‹#›</a:t>
             </a:fld>
-            <a:endParaRPr lang="de-DE"/>
-          </a:p>
-        </p:txBody>
-      </p:sp>
-      <p:pic>
-        <p:nvPicPr>
-          <p:cNvPr id="5" name="Grafik 2">
-            <a:extLst>
-              <a:ext uri="{FF2B5EF4-FFF2-40B4-BE49-F238E27FC236}">
-                <a16:creationId xmlns:a16="http://schemas.microsoft.com/office/drawing/2014/main" id="{A7DB3C19-A476-57E8-CD23-56765C7ABC05}"/>
-              </a:ext>
-            </a:extLst>
-          </p:cNvPr>
-          <p:cNvPicPr>
-            <a:picLocks noChangeAspect="1"/>
-          </p:cNvPicPr>
-          <p:nvPr userDrawn="1"/>
-        </p:nvPicPr>
-        <p:blipFill>
-          <a:blip r:embed="rId2">
-            <a:alphaModFix amt="15000"/>
-          </a:blip>
-          <a:stretch>
-            <a:fillRect/>
-          </a:stretch>
-        </p:blipFill>
-        <p:spPr>
-          <a:xfrm>
-            <a:off x="8648700" y="2743200"/>
-            <a:ext cx="3543300" cy="4114800"/>
-          </a:xfrm>
-          <a:prstGeom prst="rect">
-            <a:avLst/>
-          </a:prstGeom>
-        </p:spPr>
-      </p:pic>
+            <a:endParaRPr lang="en-US"/>
+          </a:p>
+        </p:txBody>
+      </p:sp>
     </p:spTree>
     <p:extLst>
       <p:ext uri="{BB962C8B-B14F-4D97-AF65-F5344CB8AC3E}">
-        <p14:creationId xmlns:p14="http://schemas.microsoft.com/office/powerpoint/2010/main" val="3077948073"/>
+        <p14:creationId xmlns:p14="http://schemas.microsoft.com/office/powerpoint/2010/main" val="2130901097"/>
       </p:ext>
     </p:extLst>
   </p:cSld>
@@ -7157,8 +6316,8 @@
 </file>
 
 <file path=ppt/slideLayouts/slideLayout8.xml><?xml version="1.0" encoding="utf-8"?>
-<p:sldLayout xmlns:a="http://schemas.openxmlformats.org/drawingml/2006/main" xmlns:r="http://schemas.openxmlformats.org/officeDocument/2006/relationships" xmlns:p="http://schemas.openxmlformats.org/presentationml/2006/main" type="titleOnly" preserve="1">
-  <p:cSld name="Title Only">
+<p:sldLayout xmlns:a="http://schemas.openxmlformats.org/drawingml/2006/main" xmlns:r="http://schemas.openxmlformats.org/officeDocument/2006/relationships" xmlns:p="http://schemas.openxmlformats.org/presentationml/2006/main" type="objTx" preserve="1">
+  <p:cSld name="Content with Caption">
     <p:spTree>
       <p:nvGrpSpPr>
         <p:cNvPr id="1" name=""/>
@@ -7175,13 +6334,7 @@
       </p:grpSpPr>
       <p:sp>
         <p:nvSpPr>
-          <p:cNvPr id="2" name="Title 1">
-            <a:extLst>
-              <a:ext uri="{FF2B5EF4-FFF2-40B4-BE49-F238E27FC236}">
-                <a16:creationId xmlns:a16="http://schemas.microsoft.com/office/drawing/2014/main" id="{06722E5B-20EE-8FA0-DC48-C00E0A8F3FB6}"/>
-              </a:ext>
-            </a:extLst>
-          </p:cNvPr>
+          <p:cNvPr id="2" name="Title 1"/>
           <p:cNvSpPr>
             <a:spLocks noGrp="1"/>
           </p:cNvSpPr>
@@ -7189,28 +6342,179 @@
             <p:ph type="title"/>
           </p:nvPr>
         </p:nvSpPr>
-        <p:spPr/>
-        <p:txBody>
-          <a:bodyPr/>
-          <a:lstStyle/>
+        <p:spPr>
+          <a:xfrm>
+            <a:off x="457201" y="204787"/>
+            <a:ext cx="3008313" cy="871538"/>
+          </a:xfrm>
+        </p:spPr>
+        <p:txBody>
+          <a:bodyPr anchor="b"/>
+          <a:lstStyle>
+            <a:lvl1pPr algn="l">
+              <a:defRPr sz="1500" b="1"/>
+            </a:lvl1pPr>
+          </a:lstStyle>
           <a:p>
             <a:r>
               <a:rPr lang="en-US"/>
               <a:t>Click to edit Master title style</a:t>
             </a:r>
-            <a:endParaRPr lang="de-DE"/>
-          </a:p>
-        </p:txBody>
-      </p:sp>
-      <p:sp>
-        <p:nvSpPr>
-          <p:cNvPr id="3" name="Date Placeholder 2">
-            <a:extLst>
-              <a:ext uri="{FF2B5EF4-FFF2-40B4-BE49-F238E27FC236}">
-                <a16:creationId xmlns:a16="http://schemas.microsoft.com/office/drawing/2014/main" id="{57C1A6CB-306B-8F22-C754-D44FEEC90577}"/>
-              </a:ext>
-            </a:extLst>
-          </p:cNvPr>
+          </a:p>
+        </p:txBody>
+      </p:sp>
+      <p:sp>
+        <p:nvSpPr>
+          <p:cNvPr id="3" name="Content Placeholder 2"/>
+          <p:cNvSpPr>
+            <a:spLocks noGrp="1"/>
+          </p:cNvSpPr>
+          <p:nvPr>
+            <p:ph idx="1"/>
+          </p:nvPr>
+        </p:nvSpPr>
+        <p:spPr>
+          <a:xfrm>
+            <a:off x="3575050" y="204788"/>
+            <a:ext cx="5111750" cy="4389835"/>
+          </a:xfrm>
+        </p:spPr>
+        <p:txBody>
+          <a:bodyPr/>
+          <a:lstStyle>
+            <a:lvl1pPr>
+              <a:defRPr sz="2400"/>
+            </a:lvl1pPr>
+            <a:lvl2pPr>
+              <a:defRPr sz="2100"/>
+            </a:lvl2pPr>
+            <a:lvl3pPr>
+              <a:defRPr sz="1800"/>
+            </a:lvl3pPr>
+            <a:lvl4pPr>
+              <a:defRPr sz="1500"/>
+            </a:lvl4pPr>
+            <a:lvl5pPr>
+              <a:defRPr sz="1500"/>
+            </a:lvl5pPr>
+            <a:lvl6pPr>
+              <a:defRPr sz="1500"/>
+            </a:lvl6pPr>
+            <a:lvl7pPr>
+              <a:defRPr sz="1500"/>
+            </a:lvl7pPr>
+            <a:lvl8pPr>
+              <a:defRPr sz="1500"/>
+            </a:lvl8pPr>
+            <a:lvl9pPr>
+              <a:defRPr sz="1500"/>
+            </a:lvl9pPr>
+          </a:lstStyle>
+          <a:p>
+            <a:pPr lvl="0"/>
+            <a:r>
+              <a:rPr lang="en-US"/>
+              <a:t>Click to edit Master text styles</a:t>
+            </a:r>
+          </a:p>
+          <a:p>
+            <a:pPr lvl="1"/>
+            <a:r>
+              <a:rPr lang="en-US"/>
+              <a:t>Second level</a:t>
+            </a:r>
+          </a:p>
+          <a:p>
+            <a:pPr lvl="2"/>
+            <a:r>
+              <a:rPr lang="en-US"/>
+              <a:t>Third level</a:t>
+            </a:r>
+          </a:p>
+          <a:p>
+            <a:pPr lvl="3"/>
+            <a:r>
+              <a:rPr lang="en-US"/>
+              <a:t>Fourth level</a:t>
+            </a:r>
+          </a:p>
+          <a:p>
+            <a:pPr lvl="4"/>
+            <a:r>
+              <a:rPr lang="en-US"/>
+              <a:t>Fifth level</a:t>
+            </a:r>
+          </a:p>
+        </p:txBody>
+      </p:sp>
+      <p:sp>
+        <p:nvSpPr>
+          <p:cNvPr id="4" name="Text Placeholder 3"/>
+          <p:cNvSpPr>
+            <a:spLocks noGrp="1"/>
+          </p:cNvSpPr>
+          <p:nvPr>
+            <p:ph type="body" sz="half" idx="2"/>
+          </p:nvPr>
+        </p:nvSpPr>
+        <p:spPr>
+          <a:xfrm>
+            <a:off x="457201" y="1076326"/>
+            <a:ext cx="3008313" cy="3518297"/>
+          </a:xfrm>
+        </p:spPr>
+        <p:txBody>
+          <a:bodyPr/>
+          <a:lstStyle>
+            <a:lvl1pPr marL="0" indent="0">
+              <a:buNone/>
+              <a:defRPr sz="1050"/>
+            </a:lvl1pPr>
+            <a:lvl2pPr marL="342900" indent="0">
+              <a:buNone/>
+              <a:defRPr sz="900"/>
+            </a:lvl2pPr>
+            <a:lvl3pPr marL="685800" indent="0">
+              <a:buNone/>
+              <a:defRPr sz="750"/>
+            </a:lvl3pPr>
+            <a:lvl4pPr marL="1028700" indent="0">
+              <a:buNone/>
+              <a:defRPr sz="675"/>
+            </a:lvl4pPr>
+            <a:lvl5pPr marL="1371600" indent="0">
+              <a:buNone/>
+              <a:defRPr sz="675"/>
+            </a:lvl5pPr>
+            <a:lvl6pPr marL="1714500" indent="0">
+              <a:buNone/>
+              <a:defRPr sz="675"/>
+            </a:lvl6pPr>
+            <a:lvl7pPr marL="2057400" indent="0">
+              <a:buNone/>
+              <a:defRPr sz="675"/>
+            </a:lvl7pPr>
+            <a:lvl8pPr marL="2400300" indent="0">
+              <a:buNone/>
+              <a:defRPr sz="675"/>
+            </a:lvl8pPr>
+            <a:lvl9pPr marL="2743200" indent="0">
+              <a:buNone/>
+              <a:defRPr sz="675"/>
+            </a:lvl9pPr>
+          </a:lstStyle>
+          <a:p>
+            <a:pPr lvl="0"/>
+            <a:r>
+              <a:rPr lang="en-US"/>
+              <a:t>Click to edit Master text styles</a:t>
+            </a:r>
+          </a:p>
+        </p:txBody>
+      </p:sp>
+      <p:sp>
+        <p:nvSpPr>
+          <p:cNvPr id="5" name="Date Placeholder 4"/>
           <p:cNvSpPr>
             <a:spLocks noGrp="1"/>
           </p:cNvSpPr>
@@ -7223,23 +6527,17 @@
           <a:bodyPr/>
           <a:lstStyle/>
           <a:p>
-            <a:fld id="{CBECF02C-3C7A-A047-B181-FDDE9ECD3312}" type="datetime1">
+            <a:fld id="{241EB5C9-1307-BA42-ABA2-0BC069CD8E7F}" type="datetimeFigureOut">
               <a:rPr lang="en-US" smtClean="0"/>
-              <a:t>9/22/26</a:t>
+              <a:t>1/2/22</a:t>
             </a:fld>
-            <a:endParaRPr lang="de-DE"/>
-          </a:p>
-        </p:txBody>
-      </p:sp>
-      <p:sp>
-        <p:nvSpPr>
-          <p:cNvPr id="4" name="Footer Placeholder 3">
-            <a:extLst>
-              <a:ext uri="{FF2B5EF4-FFF2-40B4-BE49-F238E27FC236}">
-                <a16:creationId xmlns:a16="http://schemas.microsoft.com/office/drawing/2014/main" id="{77950D6A-461B-2E49-EB48-06F8A5A528D1}"/>
-              </a:ext>
-            </a:extLst>
-          </p:cNvPr>
+            <a:endParaRPr lang="en-US"/>
+          </a:p>
+        </p:txBody>
+      </p:sp>
+      <p:sp>
+        <p:nvSpPr>
+          <p:cNvPr id="6" name="Footer Placeholder 5"/>
           <p:cNvSpPr>
             <a:spLocks noGrp="1"/>
           </p:cNvSpPr>
@@ -7252,19 +6550,13 @@
           <a:bodyPr/>
           <a:lstStyle/>
           <a:p>
-            <a:endParaRPr lang="de-DE"/>
-          </a:p>
-        </p:txBody>
-      </p:sp>
-      <p:sp>
-        <p:nvSpPr>
-          <p:cNvPr id="5" name="Slide Number Placeholder 4">
-            <a:extLst>
-              <a:ext uri="{FF2B5EF4-FFF2-40B4-BE49-F238E27FC236}">
-                <a16:creationId xmlns:a16="http://schemas.microsoft.com/office/drawing/2014/main" id="{2442B0E1-13AB-8BA1-D9D7-0B37A7081F8F}"/>
-              </a:ext>
-            </a:extLst>
-          </p:cNvPr>
+            <a:endParaRPr lang="en-US"/>
+          </a:p>
+        </p:txBody>
+      </p:sp>
+      <p:sp>
+        <p:nvSpPr>
+          <p:cNvPr id="7" name="Slide Number Placeholder 6"/>
           <p:cNvSpPr>
             <a:spLocks noGrp="1"/>
           </p:cNvSpPr>
@@ -7277,18 +6569,18 @@
           <a:bodyPr/>
           <a:lstStyle/>
           <a:p>
-            <a:fld id="{7FEFBAB6-26D0-44D8-BD53-612461CE1ACC}" type="slidenum">
-              <a:rPr lang="de-DE" smtClean="0"/>
+            <a:fld id="{C5EF2332-01BF-834F-8236-50238282D533}" type="slidenum">
+              <a:rPr lang="en-US" smtClean="0"/>
               <a:t>‹#›</a:t>
             </a:fld>
-            <a:endParaRPr lang="de-DE"/>
+            <a:endParaRPr lang="en-US"/>
           </a:p>
         </p:txBody>
       </p:sp>
     </p:spTree>
     <p:extLst>
       <p:ext uri="{BB962C8B-B14F-4D97-AF65-F5344CB8AC3E}">
-        <p14:creationId xmlns:p14="http://schemas.microsoft.com/office/powerpoint/2010/main" val="740028193"/>
+        <p14:creationId xmlns:p14="http://schemas.microsoft.com/office/powerpoint/2010/main" val="3540895647"/>
       </p:ext>
     </p:extLst>
   </p:cSld>
@@ -7317,13 +6609,7 @@
       </p:grpSpPr>
       <p:sp>
         <p:nvSpPr>
-          <p:cNvPr id="2" name="Title 1">
-            <a:extLst>
-              <a:ext uri="{FF2B5EF4-FFF2-40B4-BE49-F238E27FC236}">
-                <a16:creationId xmlns:a16="http://schemas.microsoft.com/office/drawing/2014/main" id="{CA4B3CE1-04CA-025C-39FF-401456A4FA52}"/>
-              </a:ext>
-            </a:extLst>
-          </p:cNvPr>
+          <p:cNvPr id="2" name="Title 1"/>
           <p:cNvSpPr>
             <a:spLocks noGrp="1"/>
           </p:cNvSpPr>
@@ -7333,15 +6619,15 @@
         </p:nvSpPr>
         <p:spPr>
           <a:xfrm>
-            <a:off x="839788" y="457200"/>
-            <a:ext cx="3932237" cy="1600200"/>
+            <a:off x="1792288" y="3600450"/>
+            <a:ext cx="5486400" cy="425054"/>
           </a:xfrm>
         </p:spPr>
         <p:txBody>
           <a:bodyPr anchor="b"/>
           <a:lstStyle>
-            <a:lvl1pPr>
-              <a:defRPr sz="3200"/>
+            <a:lvl1pPr algn="l">
+              <a:defRPr sz="1500" b="1"/>
             </a:lvl1pPr>
           </a:lstStyle>
           <a:p>
@@ -7349,19 +6635,12 @@
               <a:rPr lang="en-US"/>
               <a:t>Click to edit Master title style</a:t>
             </a:r>
-            <a:endParaRPr lang="de-DE"/>
-          </a:p>
-        </p:txBody>
-      </p:sp>
-      <p:sp>
-        <p:nvSpPr>
-          <p:cNvPr id="3" name="Picture Placeholder 2">
-            <a:extLst>
-              <a:ext uri="{FF2B5EF4-FFF2-40B4-BE49-F238E27FC236}">
-                <a16:creationId xmlns:a16="http://schemas.microsoft.com/office/drawing/2014/main" id="{DA44F906-7AD5-526C-CD80-B2A508454A58}"/>
-              </a:ext>
-            </a:extLst>
-          </p:cNvPr>
+          </a:p>
+        </p:txBody>
+      </p:sp>
+      <p:sp>
+        <p:nvSpPr>
+          <p:cNvPr id="3" name="Picture Placeholder 2"/>
           <p:cNvSpPr>
             <a:spLocks noGrp="1"/>
           </p:cNvSpPr>
@@ -7371,8 +6650,8 @@
         </p:nvSpPr>
         <p:spPr>
           <a:xfrm>
-            <a:off x="5183188" y="987425"/>
-            <a:ext cx="6172200" cy="4873625"/>
+            <a:off x="1792288" y="459581"/>
+            <a:ext cx="5486400" cy="3086100"/>
           </a:xfrm>
         </p:spPr>
         <p:txBody>
@@ -7380,55 +6659,49 @@
           <a:lstStyle>
             <a:lvl1pPr marL="0" indent="0">
               <a:buNone/>
-              <a:defRPr sz="3200"/>
+              <a:defRPr sz="2400"/>
             </a:lvl1pPr>
-            <a:lvl2pPr marL="457200" indent="0">
-              <a:buNone/>
-              <a:defRPr sz="2800"/>
+            <a:lvl2pPr marL="342900" indent="0">
+              <a:buNone/>
+              <a:defRPr sz="2100"/>
             </a:lvl2pPr>
-            <a:lvl3pPr marL="914400" indent="0">
-              <a:buNone/>
-              <a:defRPr sz="2400"/>
+            <a:lvl3pPr marL="685800" indent="0">
+              <a:buNone/>
+              <a:defRPr sz="1800"/>
             </a:lvl3pPr>
-            <a:lvl4pPr marL="1371600" indent="0">
-              <a:buNone/>
-              <a:defRPr sz="2000"/>
+            <a:lvl4pPr marL="1028700" indent="0">
+              <a:buNone/>
+              <a:defRPr sz="1500"/>
             </a:lvl4pPr>
-            <a:lvl5pPr marL="1828800" indent="0">
-              <a:buNone/>
-              <a:defRPr sz="2000"/>
+            <a:lvl5pPr marL="1371600" indent="0">
+              <a:buNone/>
+              <a:defRPr sz="1500"/>
             </a:lvl5pPr>
-            <a:lvl6pPr marL="2286000" indent="0">
-              <a:buNone/>
-              <a:defRPr sz="2000"/>
+            <a:lvl6pPr marL="1714500" indent="0">
+              <a:buNone/>
+              <a:defRPr sz="1500"/>
             </a:lvl6pPr>
-            <a:lvl7pPr marL="2743200" indent="0">
-              <a:buNone/>
-              <a:defRPr sz="2000"/>
+            <a:lvl7pPr marL="2057400" indent="0">
+              <a:buNone/>
+              <a:defRPr sz="1500"/>
             </a:lvl7pPr>
-            <a:lvl8pPr marL="3200400" indent="0">
-              <a:buNone/>
-              <a:defRPr sz="2000"/>
+            <a:lvl8pPr marL="2400300" indent="0">
+              <a:buNone/>
+              <a:defRPr sz="1500"/>
             </a:lvl8pPr>
-            <a:lvl9pPr marL="3657600" indent="0">
-              <a:buNone/>
-              <a:defRPr sz="2000"/>
+            <a:lvl9pPr marL="2743200" indent="0">
+              <a:buNone/>
+              <a:defRPr sz="1500"/>
             </a:lvl9pPr>
           </a:lstStyle>
           <a:p>
-            <a:endParaRPr lang="de-DE"/>
-          </a:p>
-        </p:txBody>
-      </p:sp>
-      <p:sp>
-        <p:nvSpPr>
-          <p:cNvPr id="4" name="Text Placeholder 3">
-            <a:extLst>
-              <a:ext uri="{FF2B5EF4-FFF2-40B4-BE49-F238E27FC236}">
-                <a16:creationId xmlns:a16="http://schemas.microsoft.com/office/drawing/2014/main" id="{64B70566-E61B-2FCF-C5D7-41F2C0D98D7D}"/>
-              </a:ext>
-            </a:extLst>
-          </p:cNvPr>
+            <a:endParaRPr lang="en-US"/>
+          </a:p>
+        </p:txBody>
+      </p:sp>
+      <p:sp>
+        <p:nvSpPr>
+          <p:cNvPr id="4" name="Text Placeholder 3"/>
           <p:cNvSpPr>
             <a:spLocks noGrp="1"/>
           </p:cNvSpPr>
@@ -7438,8 +6711,8 @@
         </p:nvSpPr>
         <p:spPr>
           <a:xfrm>
-            <a:off x="839788" y="2057400"/>
-            <a:ext cx="3932237" cy="3811588"/>
+            <a:off x="1792288" y="4025503"/>
+            <a:ext cx="5486400" cy="603647"/>
           </a:xfrm>
         </p:spPr>
         <p:txBody>
@@ -7447,39 +6720,39 @@
           <a:lstStyle>
             <a:lvl1pPr marL="0" indent="0">
               <a:buNone/>
-              <a:defRPr sz="1600"/>
+              <a:defRPr sz="1050"/>
             </a:lvl1pPr>
-            <a:lvl2pPr marL="457200" indent="0">
-              <a:buNone/>
-              <a:defRPr sz="1400"/>
+            <a:lvl2pPr marL="342900" indent="0">
+              <a:buNone/>
+              <a:defRPr sz="900"/>
             </a:lvl2pPr>
-            <a:lvl3pPr marL="914400" indent="0">
-              <a:buNone/>
-              <a:defRPr sz="1200"/>
+            <a:lvl3pPr marL="685800" indent="0">
+              <a:buNone/>
+              <a:defRPr sz="750"/>
             </a:lvl3pPr>
-            <a:lvl4pPr marL="1371600" indent="0">
-              <a:buNone/>
-              <a:defRPr sz="1000"/>
+            <a:lvl4pPr marL="1028700" indent="0">
+              <a:buNone/>
+              <a:defRPr sz="675"/>
             </a:lvl4pPr>
-            <a:lvl5pPr marL="1828800" indent="0">
-              <a:buNone/>
-              <a:defRPr sz="1000"/>
+            <a:lvl5pPr marL="1371600" indent="0">
+              <a:buNone/>
+              <a:defRPr sz="675"/>
             </a:lvl5pPr>
-            <a:lvl6pPr marL="2286000" indent="0">
-              <a:buNone/>
-              <a:defRPr sz="1000"/>
+            <a:lvl6pPr marL="1714500" indent="0">
+              <a:buNone/>
+              <a:defRPr sz="675"/>
             </a:lvl6pPr>
-            <a:lvl7pPr marL="2743200" indent="0">
-              <a:buNone/>
-              <a:defRPr sz="1000"/>
+            <a:lvl7pPr marL="2057400" indent="0">
+              <a:buNone/>
+              <a:defRPr sz="675"/>
             </a:lvl7pPr>
-            <a:lvl8pPr marL="3200400" indent="0">
-              <a:buNone/>
-              <a:defRPr sz="1000"/>
+            <a:lvl8pPr marL="2400300" indent="0">
+              <a:buNone/>
+              <a:defRPr sz="675"/>
             </a:lvl8pPr>
-            <a:lvl9pPr marL="3657600" indent="0">
-              <a:buNone/>
-              <a:defRPr sz="1000"/>
+            <a:lvl9pPr marL="2743200" indent="0">
+              <a:buNone/>
+              <a:defRPr sz="675"/>
             </a:lvl9pPr>
           </a:lstStyle>
           <a:p>
@@ -7493,13 +6766,7 @@
       </p:sp>
       <p:sp>
         <p:nvSpPr>
-          <p:cNvPr id="5" name="Date Placeholder 4">
-            <a:extLst>
-              <a:ext uri="{FF2B5EF4-FFF2-40B4-BE49-F238E27FC236}">
-                <a16:creationId xmlns:a16="http://schemas.microsoft.com/office/drawing/2014/main" id="{AA60B7E7-FB96-B9C8-7116-144619711829}"/>
-              </a:ext>
-            </a:extLst>
-          </p:cNvPr>
+          <p:cNvPr id="5" name="Date Placeholder 4"/>
           <p:cNvSpPr>
             <a:spLocks noGrp="1"/>
           </p:cNvSpPr>
@@ -7512,23 +6779,17 @@
           <a:bodyPr/>
           <a:lstStyle/>
           <a:p>
-            <a:fld id="{C1CB0BDE-9158-9842-9649-F7D64D576DD4}" type="datetime1">
+            <a:fld id="{241EB5C9-1307-BA42-ABA2-0BC069CD8E7F}" type="datetimeFigureOut">
               <a:rPr lang="en-US" smtClean="0"/>
-              <a:t>9/22/26</a:t>
+              <a:t>1/2/22</a:t>
             </a:fld>
-            <a:endParaRPr lang="de-DE"/>
-          </a:p>
-        </p:txBody>
-      </p:sp>
-      <p:sp>
-        <p:nvSpPr>
-          <p:cNvPr id="6" name="Footer Placeholder 5">
-            <a:extLst>
-              <a:ext uri="{FF2B5EF4-FFF2-40B4-BE49-F238E27FC236}">
-                <a16:creationId xmlns:a16="http://schemas.microsoft.com/office/drawing/2014/main" id="{9C8D1E1B-2F89-88D3-4683-737C468D3987}"/>
-              </a:ext>
-            </a:extLst>
-          </p:cNvPr>
+            <a:endParaRPr lang="en-US"/>
+          </a:p>
+        </p:txBody>
+      </p:sp>
+      <p:sp>
+        <p:nvSpPr>
+          <p:cNvPr id="6" name="Footer Placeholder 5"/>
           <p:cNvSpPr>
             <a:spLocks noGrp="1"/>
           </p:cNvSpPr>
@@ -7541,19 +6802,13 @@
           <a:bodyPr/>
           <a:lstStyle/>
           <a:p>
-            <a:endParaRPr lang="de-DE"/>
-          </a:p>
-        </p:txBody>
-      </p:sp>
-      <p:sp>
-        <p:nvSpPr>
-          <p:cNvPr id="7" name="Slide Number Placeholder 6">
-            <a:extLst>
-              <a:ext uri="{FF2B5EF4-FFF2-40B4-BE49-F238E27FC236}">
-                <a16:creationId xmlns:a16="http://schemas.microsoft.com/office/drawing/2014/main" id="{46E57D26-B97C-C747-49D7-6451D4CA0B22}"/>
-              </a:ext>
-            </a:extLst>
-          </p:cNvPr>
+            <a:endParaRPr lang="en-US"/>
+          </a:p>
+        </p:txBody>
+      </p:sp>
+      <p:sp>
+        <p:nvSpPr>
+          <p:cNvPr id="7" name="Slide Number Placeholder 6"/>
           <p:cNvSpPr>
             <a:spLocks noGrp="1"/>
           </p:cNvSpPr>
@@ -7566,18 +6821,18 @@
           <a:bodyPr/>
           <a:lstStyle/>
           <a:p>
-            <a:fld id="{7FEFBAB6-26D0-44D8-BD53-612461CE1ACC}" type="slidenum">
-              <a:rPr lang="de-DE" smtClean="0"/>
+            <a:fld id="{C5EF2332-01BF-834F-8236-50238282D533}" type="slidenum">
+              <a:rPr lang="en-US" smtClean="0"/>
               <a:t>‹#›</a:t>
             </a:fld>
-            <a:endParaRPr lang="de-DE"/>
+            <a:endParaRPr lang="en-US"/>
           </a:p>
         </p:txBody>
       </p:sp>
     </p:spTree>
     <p:extLst>
       <p:ext uri="{BB962C8B-B14F-4D97-AF65-F5344CB8AC3E}">
-        <p14:creationId xmlns:p14="http://schemas.microsoft.com/office/powerpoint/2010/main" val="1516656258"/>
+        <p14:creationId xmlns:p14="http://schemas.microsoft.com/office/powerpoint/2010/main" val="3566899855"/>
       </p:ext>
     </p:extLst>
   </p:cSld>
@@ -7611,13 +6866,7 @@
       </p:grpSpPr>
       <p:sp>
         <p:nvSpPr>
-          <p:cNvPr id="2" name="Title Placeholder 1">
-            <a:extLst>
-              <a:ext uri="{FF2B5EF4-FFF2-40B4-BE49-F238E27FC236}">
-                <a16:creationId xmlns:a16="http://schemas.microsoft.com/office/drawing/2014/main" id="{AB67EE87-C05A-0104-CB97-6D15BE457012}"/>
-              </a:ext>
-            </a:extLst>
-          </p:cNvPr>
+          <p:cNvPr id="2" name="Title Placeholder 1"/>
           <p:cNvSpPr>
             <a:spLocks noGrp="1"/>
           </p:cNvSpPr>
@@ -7627,8 +6876,8 @@
         </p:nvSpPr>
         <p:spPr>
           <a:xfrm>
-            <a:off x="838200" y="365125"/>
-            <a:ext cx="10515600" cy="1325563"/>
+            <a:off x="457200" y="205979"/>
+            <a:ext cx="8229600" cy="857250"/>
           </a:xfrm>
           <a:prstGeom prst="rect">
             <a:avLst/>
@@ -7644,19 +6893,12 @@
               <a:rPr lang="en-US"/>
               <a:t>Click to edit Master title style</a:t>
             </a:r>
-            <a:endParaRPr lang="de-DE"/>
-          </a:p>
-        </p:txBody>
-      </p:sp>
-      <p:sp>
-        <p:nvSpPr>
-          <p:cNvPr id="3" name="Text Placeholder 2">
-            <a:extLst>
-              <a:ext uri="{FF2B5EF4-FFF2-40B4-BE49-F238E27FC236}">
-                <a16:creationId xmlns:a16="http://schemas.microsoft.com/office/drawing/2014/main" id="{6A537335-1A87-B65B-F1D0-CB0022F1C3CE}"/>
-              </a:ext>
-            </a:extLst>
-          </p:cNvPr>
+          </a:p>
+        </p:txBody>
+      </p:sp>
+      <p:sp>
+        <p:nvSpPr>
+          <p:cNvPr id="3" name="Text Placeholder 2"/>
           <p:cNvSpPr>
             <a:spLocks noGrp="1"/>
           </p:cNvSpPr>
@@ -7666,8 +6908,8 @@
         </p:nvSpPr>
         <p:spPr>
           <a:xfrm>
-            <a:off x="838200" y="1825625"/>
-            <a:ext cx="10515600" cy="4351338"/>
+            <a:off x="457200" y="1200151"/>
+            <a:ext cx="8229600" cy="3394472"/>
           </a:xfrm>
           <a:prstGeom prst="rect">
             <a:avLst/>
@@ -7681,50 +6923,43 @@
           <a:p>
             <a:pPr lvl="0"/>
             <a:r>
-              <a:rPr dirty="0" lang="en-US"/>
+              <a:rPr lang="en-US"/>
               <a:t>Click to edit Master text styles</a:t>
             </a:r>
           </a:p>
           <a:p>
             <a:pPr lvl="1"/>
             <a:r>
-              <a:rPr dirty="0" lang="en-US"/>
+              <a:rPr lang="en-US"/>
               <a:t>Second level</a:t>
             </a:r>
           </a:p>
           <a:p>
             <a:pPr lvl="2"/>
             <a:r>
-              <a:rPr dirty="0" lang="en-US"/>
+              <a:rPr lang="en-US"/>
               <a:t>Third level</a:t>
             </a:r>
           </a:p>
           <a:p>
             <a:pPr lvl="3"/>
             <a:r>
-              <a:rPr dirty="0" lang="en-US"/>
+              <a:rPr lang="en-US"/>
               <a:t>Fourth level</a:t>
             </a:r>
           </a:p>
           <a:p>
             <a:pPr lvl="4"/>
             <a:r>
-              <a:rPr dirty="0" lang="en-US"/>
+              <a:rPr lang="en-US"/>
               <a:t>Fifth level</a:t>
             </a:r>
-            <a:endParaRPr dirty="0" lang="de-DE"/>
-          </a:p>
-        </p:txBody>
-      </p:sp>
-      <p:sp>
-        <p:nvSpPr>
-          <p:cNvPr id="4" name="Date Placeholder 3">
-            <a:extLst>
-              <a:ext uri="{FF2B5EF4-FFF2-40B4-BE49-F238E27FC236}">
-                <a16:creationId xmlns:a16="http://schemas.microsoft.com/office/drawing/2014/main" id="{56455800-6623-40E6-869A-E1E3B8E8C90F}"/>
-              </a:ext>
-            </a:extLst>
-          </p:cNvPr>
+          </a:p>
+        </p:txBody>
+      </p:sp>
+      <p:sp>
+        <p:nvSpPr>
+          <p:cNvPr id="4" name="Date Placeholder 3"/>
           <p:cNvSpPr>
             <a:spLocks noGrp="1"/>
           </p:cNvSpPr>
@@ -7734,8 +6969,8 @@
         </p:nvSpPr>
         <p:spPr>
           <a:xfrm>
-            <a:off x="838200" y="6356350"/>
-            <a:ext cx="2743200" cy="365125"/>
+            <a:off x="457200" y="4767263"/>
+            <a:ext cx="2133600" cy="273844"/>
           </a:xfrm>
           <a:prstGeom prst="rect">
             <a:avLst/>
@@ -7745,33 +6980,27 @@
           <a:bodyPr anchor="ctr" bIns="45720" lIns="91440" rIns="91440" rtlCol="0" tIns="45720" vert="horz"/>
           <a:lstStyle>
             <a:lvl1pPr algn="l">
-              <a:defRPr sz="1200">
+              <a:defRPr sz="900">
                 <a:solidFill>
                   <a:schemeClr val="tx1">
-                    <a:tint val="82000"/>
+                    <a:tint val="75000"/>
                   </a:schemeClr>
                 </a:solidFill>
               </a:defRPr>
             </a:lvl1pPr>
           </a:lstStyle>
           <a:p>
-            <a:fld id="{5F4432E8-C144-0141-ADD6-F0C21840F670}" type="datetime1">
+            <a:fld id="{241EB5C9-1307-BA42-ABA2-0BC069CD8E7F}" type="datetimeFigureOut">
               <a:rPr lang="en-US" smtClean="0"/>
-              <a:t>9/22/26</a:t>
+              <a:t>1/2/22</a:t>
             </a:fld>
-            <a:endParaRPr lang="de-DE"/>
-          </a:p>
-        </p:txBody>
-      </p:sp>
-      <p:sp>
-        <p:nvSpPr>
-          <p:cNvPr id="5" name="Footer Placeholder 4">
-            <a:extLst>
-              <a:ext uri="{FF2B5EF4-FFF2-40B4-BE49-F238E27FC236}">
-                <a16:creationId xmlns:a16="http://schemas.microsoft.com/office/drawing/2014/main" id="{C25AF420-6358-CF2F-ACCE-D22F80A8B85C}"/>
-              </a:ext>
-            </a:extLst>
-          </p:cNvPr>
+            <a:endParaRPr lang="en-US"/>
+          </a:p>
+        </p:txBody>
+      </p:sp>
+      <p:sp>
+        <p:nvSpPr>
+          <p:cNvPr id="5" name="Footer Placeholder 4"/>
           <p:cNvSpPr>
             <a:spLocks noGrp="1"/>
           </p:cNvSpPr>
@@ -7781,8 +7010,8 @@
         </p:nvSpPr>
         <p:spPr>
           <a:xfrm>
-            <a:off x="4038600" y="6356350"/>
-            <a:ext cx="4114800" cy="365125"/>
+            <a:off x="3124200" y="4767263"/>
+            <a:ext cx="2895600" cy="273844"/>
           </a:xfrm>
           <a:prstGeom prst="rect">
             <a:avLst/>
@@ -7792,29 +7021,23 @@
           <a:bodyPr anchor="ctr" bIns="45720" lIns="91440" rIns="91440" rtlCol="0" tIns="45720" vert="horz"/>
           <a:lstStyle>
             <a:lvl1pPr algn="ctr">
-              <a:defRPr sz="1200">
+              <a:defRPr sz="900">
                 <a:solidFill>
                   <a:schemeClr val="tx1">
-                    <a:tint val="82000"/>
+                    <a:tint val="75000"/>
                   </a:schemeClr>
                 </a:solidFill>
               </a:defRPr>
             </a:lvl1pPr>
           </a:lstStyle>
           <a:p>
-            <a:endParaRPr lang="de-DE"/>
-          </a:p>
-        </p:txBody>
-      </p:sp>
-      <p:sp>
-        <p:nvSpPr>
-          <p:cNvPr id="6" name="Slide Number Placeholder 5">
-            <a:extLst>
-              <a:ext uri="{FF2B5EF4-FFF2-40B4-BE49-F238E27FC236}">
-                <a16:creationId xmlns:a16="http://schemas.microsoft.com/office/drawing/2014/main" id="{CF0FE700-0F47-2D53-713D-9B5435FC21A7}"/>
-              </a:ext>
-            </a:extLst>
-          </p:cNvPr>
+            <a:endParaRPr lang="en-US"/>
+          </a:p>
+        </p:txBody>
+      </p:sp>
+      <p:sp>
+        <p:nvSpPr>
+          <p:cNvPr id="6" name="Slide Number Placeholder 5"/>
           <p:cNvSpPr>
             <a:spLocks noGrp="1"/>
           </p:cNvSpPr>
@@ -7824,8 +7047,8 @@
         </p:nvSpPr>
         <p:spPr>
           <a:xfrm>
-            <a:off x="8610600" y="6356350"/>
-            <a:ext cx="2743200" cy="365125"/>
+            <a:off x="6553200" y="4767263"/>
+            <a:ext cx="2133600" cy="273844"/>
           </a:xfrm>
           <a:prstGeom prst="rect">
             <a:avLst/>
@@ -7835,28 +7058,28 @@
           <a:bodyPr anchor="ctr" bIns="45720" lIns="91440" rIns="91440" rtlCol="0" tIns="45720" vert="horz"/>
           <a:lstStyle>
             <a:lvl1pPr algn="r">
-              <a:defRPr sz="1200">
+              <a:defRPr sz="900">
                 <a:solidFill>
                   <a:schemeClr val="tx1">
-                    <a:tint val="82000"/>
+                    <a:tint val="75000"/>
                   </a:schemeClr>
                 </a:solidFill>
               </a:defRPr>
             </a:lvl1pPr>
           </a:lstStyle>
           <a:p>
-            <a:fld id="{7FEFBAB6-26D0-44D8-BD53-612461CE1ACC}" type="slidenum">
-              <a:rPr lang="de-DE" smtClean="0"/>
+            <a:fld id="{C5EF2332-01BF-834F-8236-50238282D533}" type="slidenum">
+              <a:rPr lang="en-US" smtClean="0"/>
               <a:t>‹#›</a:t>
             </a:fld>
-            <a:endParaRPr lang="de-DE"/>
+            <a:endParaRPr lang="en-US"/>
           </a:p>
         </p:txBody>
       </p:sp>
     </p:spTree>
     <p:extLst>
       <p:ext uri="{BB962C8B-B14F-4D97-AF65-F5344CB8AC3E}">
-        <p14:creationId xmlns:p14="http://schemas.microsoft.com/office/powerpoint/2010/main" val="1218565218"/>
+        <p14:creationId xmlns:p14="http://schemas.microsoft.com/office/powerpoint/2010/main" val="3676200875"/>
       </p:ext>
     </p:extLst>
   </p:cSld>
@@ -7867,25 +7090,21 @@
     <p:sldLayoutId id="2147483651" r:id="rId3"/>
     <p:sldLayoutId id="2147483652" r:id="rId4"/>
     <p:sldLayoutId id="2147483653" r:id="rId5"/>
-    <p:sldLayoutId id="2147483656" r:id="rId6"/>
+    <p:sldLayoutId id="2147483654" r:id="rId6"/>
     <p:sldLayoutId id="2147483655" r:id="rId7"/>
-    <p:sldLayoutId id="2147483654" r:id="rId8"/>
+    <p:sldLayoutId id="2147483656" r:id="rId8"/>
     <p:sldLayoutId id="2147483657" r:id="rId9"/>
     <p:sldLayoutId id="2147483658" r:id="rId10"/>
     <p:sldLayoutId id="2147483659" r:id="rId11"/>
   </p:sldLayoutIdLst>
-  <p:hf dt="0" ftr="0" hdr="0"/>
   <p:txStyles>
     <p:titleStyle>
-      <a:lvl1pPr algn="l" defTabSz="914400" eaLnBrk="1" hangingPunct="1" latinLnBrk="0" rtl="0">
-        <a:lnSpc>
-          <a:spcPct val="90000"/>
-        </a:lnSpc>
+      <a:lvl1pPr algn="ctr" defTabSz="342900" eaLnBrk="1" hangingPunct="1" latinLnBrk="0" rtl="0">
         <a:spcBef>
           <a:spcPct val="0"/>
         </a:spcBef>
         <a:buNone/>
-        <a:defRPr kern="1200" sz="4400">
+        <a:defRPr kern="1200" sz="3300">
           <a:solidFill>
             <a:schemeClr val="tx1"/>
           </a:solidFill>
@@ -7896,32 +7115,11 @@
       </a:lvl1pPr>
     </p:titleStyle>
     <p:bodyStyle>
-      <a:lvl1pPr algn="l" defTabSz="914400" eaLnBrk="1" hangingPunct="1" indent="-228600" latinLnBrk="0" marL="228600" rtl="0">
-        <a:lnSpc>
-          <a:spcPct val="90000"/>
-        </a:lnSpc>
+      <a:lvl1pPr algn="l" defTabSz="342900" eaLnBrk="1" hangingPunct="1" indent="-342900" latinLnBrk="0" marL="342900" rtl="0">
         <a:spcBef>
-          <a:spcPts val="1000"/>
+          <a:spcPct val="20000"/>
         </a:spcBef>
-        <a:buFont charset="0" panose="020B0604020202020204" pitchFamily="34" typeface="Arial"/>
-        <a:buChar char="•"/>
-        <a:defRPr kern="1200" sz="2800">
-          <a:solidFill>
-            <a:schemeClr val="tx1"/>
-          </a:solidFill>
-          <a:latin typeface="+mn-lt"/>
-          <a:ea typeface="+mn-ea"/>
-          <a:cs typeface="+mn-cs"/>
-        </a:defRPr>
-      </a:lvl1pPr>
-      <a:lvl2pPr algn="l" defTabSz="914400" eaLnBrk="1" hangingPunct="1" indent="-228600" latinLnBrk="0" marL="685800" rtl="0">
-        <a:lnSpc>
-          <a:spcPct val="90000"/>
-        </a:lnSpc>
-        <a:spcBef>
-          <a:spcPts val="500"/>
-        </a:spcBef>
-        <a:buFont charset="0" panose="020B0604020202020204" pitchFamily="34" typeface="Arial"/>
+        <a:buFont typeface="Arial"/>
         <a:buChar char="•"/>
         <a:defRPr kern="1200" sz="2400">
           <a:solidFill>
@@ -7931,17 +7129,14 @@
           <a:ea typeface="+mn-ea"/>
           <a:cs typeface="+mn-cs"/>
         </a:defRPr>
-      </a:lvl2pPr>
-      <a:lvl3pPr algn="l" defTabSz="914400" eaLnBrk="1" hangingPunct="1" indent="-228600" latinLnBrk="0" marL="1143000" rtl="0">
-        <a:lnSpc>
-          <a:spcPct val="90000"/>
-        </a:lnSpc>
+      </a:lvl1pPr>
+      <a:lvl2pPr algn="l" defTabSz="342900" eaLnBrk="1" hangingPunct="1" indent="-342900" latinLnBrk="0" marL="685800" rtl="0">
         <a:spcBef>
-          <a:spcPts val="500"/>
+          <a:spcPct val="20000"/>
         </a:spcBef>
-        <a:buFont charset="0" panose="020B0604020202020204" pitchFamily="34" typeface="Arial"/>
-        <a:buChar char="•"/>
-        <a:defRPr kern="1200" sz="2000">
+        <a:buFont typeface="Arial"/>
+        <a:buChar char="–"/>
+        <a:defRPr kern="1200" sz="2100">
           <a:solidFill>
             <a:schemeClr val="tx1"/>
           </a:solidFill>
@@ -7949,15 +7144,12 @@
           <a:ea typeface="+mn-ea"/>
           <a:cs typeface="+mn-cs"/>
         </a:defRPr>
-      </a:lvl3pPr>
-      <a:lvl4pPr algn="l" defTabSz="914400" eaLnBrk="1" hangingPunct="1" indent="-228600" latinLnBrk="0" marL="1600200" rtl="0">
-        <a:lnSpc>
-          <a:spcPct val="90000"/>
-        </a:lnSpc>
+      </a:lvl2pPr>
+      <a:lvl3pPr algn="l" defTabSz="342900" eaLnBrk="1" hangingPunct="1" indent="-342900" latinLnBrk="0" marL="1028700" rtl="0">
         <a:spcBef>
-          <a:spcPts val="500"/>
+          <a:spcPct val="20000"/>
         </a:spcBef>
-        <a:buFont charset="0" panose="020B0604020202020204" pitchFamily="34" typeface="Arial"/>
+        <a:buFont typeface="Arial"/>
         <a:buChar char="•"/>
         <a:defRPr kern="1200" sz="1800">
           <a:solidFill>
@@ -7967,17 +7159,29 @@
           <a:ea typeface="+mn-ea"/>
           <a:cs typeface="+mn-cs"/>
         </a:defRPr>
+      </a:lvl3pPr>
+      <a:lvl4pPr algn="l" defTabSz="342900" eaLnBrk="1" hangingPunct="1" indent="-342900" latinLnBrk="0" marL="1371600" rtl="0">
+        <a:spcBef>
+          <a:spcPct val="20000"/>
+        </a:spcBef>
+        <a:buFont typeface="Arial"/>
+        <a:buChar char="–"/>
+        <a:defRPr kern="1200" sz="1500">
+          <a:solidFill>
+            <a:schemeClr val="tx1"/>
+          </a:solidFill>
+          <a:latin typeface="+mn-lt"/>
+          <a:ea typeface="+mn-ea"/>
+          <a:cs typeface="+mn-cs"/>
+        </a:defRPr>
       </a:lvl4pPr>
-      <a:lvl5pPr algn="l" defTabSz="914400" eaLnBrk="1" hangingPunct="1" indent="-228600" latinLnBrk="0" marL="2057400" rtl="0">
-        <a:lnSpc>
-          <a:spcPct val="90000"/>
-        </a:lnSpc>
+      <a:lvl5pPr algn="l" defTabSz="342900" eaLnBrk="1" hangingPunct="1" indent="-342900" latinLnBrk="0" marL="1714500" rtl="0">
         <a:spcBef>
-          <a:spcPts val="500"/>
+          <a:spcPct val="20000"/>
         </a:spcBef>
-        <a:buFont charset="0" panose="020B0604020202020204" pitchFamily="34" typeface="Arial"/>
-        <a:buChar char="•"/>
-        <a:defRPr kern="1200" sz="1800">
+        <a:buFont typeface="Arial"/>
+        <a:buChar char="»"/>
+        <a:defRPr kern="1200" sz="1500">
           <a:solidFill>
             <a:schemeClr val="tx1"/>
           </a:solidFill>
@@ -7986,16 +7190,13 @@
           <a:cs typeface="+mn-cs"/>
         </a:defRPr>
       </a:lvl5pPr>
-      <a:lvl6pPr algn="l" defTabSz="914400" eaLnBrk="1" hangingPunct="1" indent="-228600" latinLnBrk="0" marL="2514600" rtl="0">
-        <a:lnSpc>
-          <a:spcPct val="90000"/>
-        </a:lnSpc>
+      <a:lvl6pPr algn="l" defTabSz="342900" eaLnBrk="1" hangingPunct="1" indent="-342900" latinLnBrk="0" marL="2057400" rtl="0">
         <a:spcBef>
-          <a:spcPts val="500"/>
+          <a:spcPct val="20000"/>
         </a:spcBef>
-        <a:buFont charset="0" panose="020B0604020202020204" pitchFamily="34" typeface="Arial"/>
+        <a:buFont typeface="Arial"/>
         <a:buChar char="•"/>
-        <a:defRPr kern="1200" sz="1800">
+        <a:defRPr kern="1200" sz="1500">
           <a:solidFill>
             <a:schemeClr val="tx1"/>
           </a:solidFill>
@@ -8004,16 +7205,13 @@
           <a:cs typeface="+mn-cs"/>
         </a:defRPr>
       </a:lvl6pPr>
-      <a:lvl7pPr algn="l" defTabSz="914400" eaLnBrk="1" hangingPunct="1" indent="-228600" latinLnBrk="0" marL="2971800" rtl="0">
-        <a:lnSpc>
-          <a:spcPct val="90000"/>
-        </a:lnSpc>
+      <a:lvl7pPr algn="l" defTabSz="342900" eaLnBrk="1" hangingPunct="1" indent="-342900" latinLnBrk="0" marL="2400300" rtl="0">
         <a:spcBef>
-          <a:spcPts val="500"/>
+          <a:spcPct val="20000"/>
         </a:spcBef>
-        <a:buFont charset="0" panose="020B0604020202020204" pitchFamily="34" typeface="Arial"/>
+        <a:buFont typeface="Arial"/>
         <a:buChar char="•"/>
-        <a:defRPr kern="1200" sz="1800">
+        <a:defRPr kern="1200" sz="1500">
           <a:solidFill>
             <a:schemeClr val="tx1"/>
           </a:solidFill>
@@ -8022,16 +7220,13 @@
           <a:cs typeface="+mn-cs"/>
         </a:defRPr>
       </a:lvl7pPr>
-      <a:lvl8pPr algn="l" defTabSz="914400" eaLnBrk="1" hangingPunct="1" indent="-228600" latinLnBrk="0" marL="3429000" rtl="0">
-        <a:lnSpc>
-          <a:spcPct val="90000"/>
-        </a:lnSpc>
+      <a:lvl8pPr algn="l" defTabSz="342900" eaLnBrk="1" hangingPunct="1" indent="-342900" latinLnBrk="0" marL="2743200" rtl="0">
         <a:spcBef>
-          <a:spcPts val="500"/>
+          <a:spcPct val="20000"/>
         </a:spcBef>
-        <a:buFont charset="0" panose="020B0604020202020204" pitchFamily="34" typeface="Arial"/>
+        <a:buFont typeface="Arial"/>
         <a:buChar char="•"/>
-        <a:defRPr kern="1200" sz="1800">
+        <a:defRPr kern="1200" sz="1500">
           <a:solidFill>
             <a:schemeClr val="tx1"/>
           </a:solidFill>
@@ -8040,16 +7235,13 @@
           <a:cs typeface="+mn-cs"/>
         </a:defRPr>
       </a:lvl8pPr>
-      <a:lvl9pPr algn="l" defTabSz="914400" eaLnBrk="1" hangingPunct="1" indent="-228600" latinLnBrk="0" marL="3886200" rtl="0">
-        <a:lnSpc>
-          <a:spcPct val="90000"/>
-        </a:lnSpc>
+      <a:lvl9pPr algn="l" defTabSz="342900" eaLnBrk="1" hangingPunct="1" indent="-342900" latinLnBrk="0" marL="3086100" rtl="0">
         <a:spcBef>
-          <a:spcPts val="500"/>
+          <a:spcPct val="20000"/>
         </a:spcBef>
-        <a:buFont charset="0" panose="020B0604020202020204" pitchFamily="34" typeface="Arial"/>
+        <a:buFont typeface="Arial"/>
         <a:buChar char="•"/>
-        <a:defRPr kern="1200" sz="1800">
+        <a:defRPr kern="1200" sz="1500">
           <a:solidFill>
             <a:schemeClr val="tx1"/>
           </a:solidFill>
@@ -8061,10 +7253,10 @@
     </p:bodyStyle>
     <p:otherStyle>
       <a:defPPr>
-        <a:defRPr lang="de-DE"/>
+        <a:defRPr lang="en-US"/>
       </a:defPPr>
-      <a:lvl1pPr algn="l" defTabSz="914400" eaLnBrk="1" hangingPunct="1" latinLnBrk="0" marL="0" rtl="0">
-        <a:defRPr kern="1200" sz="1800">
+      <a:lvl1pPr algn="l" defTabSz="342900" eaLnBrk="1" hangingPunct="1" latinLnBrk="0" marL="0" rtl="0">
+        <a:defRPr kern="1200" sz="1350">
           <a:solidFill>
             <a:schemeClr val="tx1"/>
           </a:solidFill>
@@ -8073,8 +7265,8 @@
           <a:cs typeface="+mn-cs"/>
         </a:defRPr>
       </a:lvl1pPr>
-      <a:lvl2pPr algn="l" defTabSz="914400" eaLnBrk="1" hangingPunct="1" latinLnBrk="0" marL="457200" rtl="0">
-        <a:defRPr kern="1200" sz="1800">
+      <a:lvl2pPr algn="l" defTabSz="342900" eaLnBrk="1" hangingPunct="1" latinLnBrk="0" marL="342900" rtl="0">
+        <a:defRPr kern="1200" sz="1350">
           <a:solidFill>
             <a:schemeClr val="tx1"/>
           </a:solidFill>
@@ -8083,8 +7275,8 @@
           <a:cs typeface="+mn-cs"/>
         </a:defRPr>
       </a:lvl2pPr>
-      <a:lvl3pPr algn="l" defTabSz="914400" eaLnBrk="1" hangingPunct="1" latinLnBrk="0" marL="914400" rtl="0">
-        <a:defRPr kern="1200" sz="1800">
+      <a:lvl3pPr algn="l" defTabSz="342900" eaLnBrk="1" hangingPunct="1" latinLnBrk="0" marL="685800" rtl="0">
+        <a:defRPr kern="1200" sz="1350">
           <a:solidFill>
             <a:schemeClr val="tx1"/>
           </a:solidFill>
@@ -8093,8 +7285,8 @@
           <a:cs typeface="+mn-cs"/>
         </a:defRPr>
       </a:lvl3pPr>
-      <a:lvl4pPr algn="l" defTabSz="914400" eaLnBrk="1" hangingPunct="1" latinLnBrk="0" marL="1371600" rtl="0">
-        <a:defRPr kern="1200" sz="1800">
+      <a:lvl4pPr algn="l" defTabSz="342900" eaLnBrk="1" hangingPunct="1" latinLnBrk="0" marL="1028700" rtl="0">
+        <a:defRPr kern="1200" sz="1350">
           <a:solidFill>
             <a:schemeClr val="tx1"/>
           </a:solidFill>
@@ -8103,8 +7295,8 @@
           <a:cs typeface="+mn-cs"/>
         </a:defRPr>
       </a:lvl4pPr>
-      <a:lvl5pPr algn="l" defTabSz="914400" eaLnBrk="1" hangingPunct="1" latinLnBrk="0" marL="1828800" rtl="0">
-        <a:defRPr kern="1200" sz="1800">
+      <a:lvl5pPr algn="l" defTabSz="342900" eaLnBrk="1" hangingPunct="1" latinLnBrk="0" marL="1371600" rtl="0">
+        <a:defRPr kern="1200" sz="1350">
           <a:solidFill>
             <a:schemeClr val="tx1"/>
           </a:solidFill>
@@ -8113,8 +7305,8 @@
           <a:cs typeface="+mn-cs"/>
         </a:defRPr>
       </a:lvl5pPr>
-      <a:lvl6pPr algn="l" defTabSz="914400" eaLnBrk="1" hangingPunct="1" latinLnBrk="0" marL="2286000" rtl="0">
-        <a:defRPr kern="1200" sz="1800">
+      <a:lvl6pPr algn="l" defTabSz="342900" eaLnBrk="1" hangingPunct="1" latinLnBrk="0" marL="1714500" rtl="0">
+        <a:defRPr kern="1200" sz="1350">
           <a:solidFill>
             <a:schemeClr val="tx1"/>
           </a:solidFill>
@@ -8123,8 +7315,8 @@
           <a:cs typeface="+mn-cs"/>
         </a:defRPr>
       </a:lvl6pPr>
-      <a:lvl7pPr algn="l" defTabSz="914400" eaLnBrk="1" hangingPunct="1" latinLnBrk="0" marL="2743200" rtl="0">
-        <a:defRPr kern="1200" sz="1800">
+      <a:lvl7pPr algn="l" defTabSz="342900" eaLnBrk="1" hangingPunct="1" latinLnBrk="0" marL="2057400" rtl="0">
+        <a:defRPr kern="1200" sz="1350">
           <a:solidFill>
             <a:schemeClr val="tx1"/>
           </a:solidFill>
@@ -8133,8 +7325,8 @@
           <a:cs typeface="+mn-cs"/>
         </a:defRPr>
       </a:lvl7pPr>
-      <a:lvl8pPr algn="l" defTabSz="914400" eaLnBrk="1" hangingPunct="1" latinLnBrk="0" marL="3200400" rtl="0">
-        <a:defRPr kern="1200" sz="1800">
+      <a:lvl8pPr algn="l" defTabSz="342900" eaLnBrk="1" hangingPunct="1" latinLnBrk="0" marL="2400300" rtl="0">
+        <a:defRPr kern="1200" sz="1350">
           <a:solidFill>
             <a:schemeClr val="tx1"/>
           </a:solidFill>
@@ -8143,8 +7335,8 @@
           <a:cs typeface="+mn-cs"/>
         </a:defRPr>
       </a:lvl8pPr>
-      <a:lvl9pPr algn="l" defTabSz="914400" eaLnBrk="1" hangingPunct="1" latinLnBrk="0" marL="3657600" rtl="0">
-        <a:defRPr kern="1200" sz="1800">
+      <a:lvl9pPr algn="l" defTabSz="342900" eaLnBrk="1" hangingPunct="1" latinLnBrk="0" marL="2743200" rtl="0">
+        <a:defRPr kern="1200" sz="1350">
           <a:solidFill>
             <a:schemeClr val="tx1"/>
           </a:solidFill>
@@ -8177,13 +7369,7 @@
       </p:grpSpPr>
       <p:sp>
         <p:nvSpPr>
-          <p:cNvPr id="2" name="Title 1">
-            <a:extLst>
-              <a:ext uri="{FF2B5EF4-FFF2-40B4-BE49-F238E27FC236}">
-                <a16:creationId xmlns:a16="http://schemas.microsoft.com/office/drawing/2014/main" id="{F53F8BAC-AD64-825E-E9B9-6AFEAD4DE15C}"/>
-              </a:ext>
-            </a:extLst>
-          </p:cNvPr>
+          <p:cNvPr id="2" name="Title 1"/>
           <p:cNvSpPr>
             <a:spLocks noGrp="1"/>
           </p:cNvSpPr>
@@ -8193,8 +7379,8 @@
         </p:nvSpPr>
         <p:spPr>
           <a:xfrm>
-            <a:off x="1524000" y="1714499"/>
-            <a:ext cx="9144000" cy="1795463"/>
+            <a:off x="685800" y="1597819"/>
+            <a:ext cx="7772400" cy="1102519"/>
           </a:xfrm>
         </p:spPr>
         <p:txBody>
@@ -8213,13 +7399,7 @@
       </p:sp>
       <p:sp>
         <p:nvSpPr>
-          <p:cNvPr id="3" name="Subtitle 2">
-            <a:extLst>
-              <a:ext uri="{FF2B5EF4-FFF2-40B4-BE49-F238E27FC236}">
-                <a16:creationId xmlns:a16="http://schemas.microsoft.com/office/drawing/2014/main" id="{032BD40E-7E13-B1FA-A1D1-2C360EE8DF4B}"/>
-              </a:ext>
-            </a:extLst>
-          </p:cNvPr>
+          <p:cNvPr id="3" name="Subtitle 2"/>
           <p:cNvSpPr>
             <a:spLocks noGrp="1"/>
           </p:cNvSpPr>
@@ -8229,8 +7409,8 @@
         </p:nvSpPr>
         <p:spPr>
           <a:xfrm>
-            <a:off x="1524000" y="3602038"/>
-            <a:ext cx="9144000" cy="1655762"/>
+            <a:off x="1371600" y="2914650"/>
+            <a:ext cx="6400800" cy="1314450"/>
           </a:xfrm>
         </p:spPr>
         <p:txBody>
@@ -8249,13 +7429,7 @@
       </p:sp>
       <p:sp>
         <p:nvSpPr>
-          <p:cNvPr id="4" name="Date Placeholder 3">
-            <a:extLst>
-              <a:ext uri="{FF2B5EF4-FFF2-40B4-BE49-F238E27FC236}">
-                <a16:creationId xmlns:a16="http://schemas.microsoft.com/office/drawing/2014/main" id="{349C7714-67B2-3985-27ED-BCB048C59339}"/>
-              </a:ext>
-            </a:extLst>
-          </p:cNvPr>
+          <p:cNvPr id="4" name="Date Placeholder 3"/>
           <p:cNvSpPr>
             <a:spLocks noGrp="1"/>
           </p:cNvSpPr>
@@ -8263,66 +7437,18 @@
             <p:ph idx="10" sz="half" type="dt"/>
           </p:nvPr>
         </p:nvSpPr>
-        <p:spPr>
-          <a:xfrm>
-            <a:off x="446400" y="6356350"/>
-            <a:ext cx="3135000" cy="365125"/>
-          </a:xfrm>
-        </p:spPr>
-        <p:txBody>
-          <a:bodyPr/>
-          <a:lstStyle/>
-          <a:p>
-            <a:pPr lvl="0" indent="0" marL="0">
-              <a:buNone/>
-            </a:pPr>
-            <a:r>
-              <a:rPr/>
-              <a:t>22/09/2026</a:t>
-            </a:r>
-          </a:p>
-        </p:txBody>
-      </p:sp>
-      <p:sp>
-        <p:nvSpPr>
-          <p:cNvPr id="6" name="Slide Number Placeholder 5">
-            <a:extLst>
-              <a:ext uri="{FF2B5EF4-FFF2-40B4-BE49-F238E27FC236}">
-                <a16:creationId xmlns:a16="http://schemas.microsoft.com/office/drawing/2014/main" id="{A5E5FB60-FFB4-682C-82D2-0D1E175BDC09}"/>
-              </a:ext>
-            </a:extLst>
-          </p:cNvPr>
-          <p:cNvSpPr>
-            <a:spLocks noGrp="1"/>
-          </p:cNvSpPr>
-          <p:nvPr>
-            <p:ph idx="12" sz="quarter" type="sldNum"/>
-          </p:nvPr>
-        </p:nvSpPr>
-        <p:spPr>
-          <a:xfrm>
-            <a:off x="8610600" y="6356350"/>
-            <a:ext cx="3135000" cy="365125"/>
-          </a:xfrm>
-        </p:spPr>
-        <p:txBody>
-          <a:bodyPr/>
-          <a:lstStyle>
-            <a:lvl1pPr>
-              <a:defRPr>
-                <a:solidFill>
-                  <a:schemeClr val="bg1"/>
-                </a:solidFill>
-              </a:defRPr>
-            </a:lvl1pPr>
-          </a:lstStyle>
-          <a:p>
-            <a:fld id="{7FEFBAB6-26D0-44D8-BD53-612461CE1ACC}" type="slidenum">
-              <a:rPr lang="de-DE" smtClean="0"/>
-              <a:pPr/>
-              <a:t>‹#›</a:t>
-            </a:fld>
-            <a:endParaRPr lang="de-DE"/>
+        <p:spPr/>
+        <p:txBody>
+          <a:bodyPr/>
+          <a:lstStyle/>
+          <a:p>
+            <a:pPr lvl="0" indent="0" marL="0">
+              <a:buNone/>
+            </a:pPr>
+            <a:r>
+              <a:rPr/>
+              <a:t>2020-03-03</a:t>
+            </a:r>
           </a:p>
         </p:txBody>
       </p:sp>
@@ -8350,13 +7476,7 @@
       </p:grpSpPr>
       <p:sp>
         <p:nvSpPr>
-          <p:cNvPr id="2" name="Title 1">
-            <a:extLst>
-              <a:ext uri="{FF2B5EF4-FFF2-40B4-BE49-F238E27FC236}">
-                <a16:creationId xmlns:a16="http://schemas.microsoft.com/office/drawing/2014/main" id="{6BF04AE0-F94F-A586-34B8-68D9CAB6C6D1}"/>
-              </a:ext>
-            </a:extLst>
-          </p:cNvPr>
+          <p:cNvPr id="2" name="Title 1"/>
           <p:cNvSpPr>
             <a:spLocks noGrp="1"/>
           </p:cNvSpPr>
@@ -8364,12 +7484,7 @@
             <p:ph type="title"/>
           </p:nvPr>
         </p:nvSpPr>
-        <p:spPr>
-          <a:xfrm>
-            <a:off x="2295524" y="432532"/>
-            <a:ext cx="9450077" cy="825501"/>
-          </a:xfrm>
-        </p:spPr>
+        <p:spPr/>
         <p:txBody>
           <a:bodyPr/>
           <a:lstStyle/>
@@ -8381,40 +7496,6 @@
               <a:rPr/>
               <a:t>Before we start: Survey time!</a:t>
             </a:r>
-          </a:p>
-        </p:txBody>
-      </p:sp>
-      <p:sp>
-        <p:nvSpPr>
-          <p:cNvPr id="6" name="Slide Number Placeholder 5">
-            <a:extLst>
-              <a:ext uri="{FF2B5EF4-FFF2-40B4-BE49-F238E27FC236}">
-                <a16:creationId xmlns:a16="http://schemas.microsoft.com/office/drawing/2014/main" id="{5F33F24B-1A9E-2EAF-F2AB-89426454DEE9}"/>
-              </a:ext>
-            </a:extLst>
-          </p:cNvPr>
-          <p:cNvSpPr>
-            <a:spLocks noGrp="1"/>
-          </p:cNvSpPr>
-          <p:nvPr>
-            <p:ph idx="12" sz="quarter" type="sldNum"/>
-          </p:nvPr>
-        </p:nvSpPr>
-        <p:spPr>
-          <a:xfrm>
-            <a:off x="8610599" y="6356350"/>
-            <a:ext cx="3135001" cy="365125"/>
-          </a:xfrm>
-        </p:spPr>
-        <p:txBody>
-          <a:bodyPr/>
-          <a:lstStyle/>
-          <a:p>
-            <a:fld id="{7FEFBAB6-26D0-44D8-BD53-612461CE1ACC}" type="slidenum">
-              <a:rPr lang="de-DE" smtClean="0"/>
-              <a:t>‹#›</a:t>
-            </a:fld>
-            <a:endParaRPr lang="de-DE"/>
           </a:p>
         </p:txBody>
       </p:sp>
@@ -8442,13 +7523,7 @@
       </p:grpSpPr>
       <p:sp>
         <p:nvSpPr>
-          <p:cNvPr id="3" name="Content Placeholder 2">
-            <a:extLst>
-              <a:ext uri="{FF2B5EF4-FFF2-40B4-BE49-F238E27FC236}">
-                <a16:creationId xmlns:a16="http://schemas.microsoft.com/office/drawing/2014/main" id="{372FA590-20E9-0368-85B4-90C26598F852}"/>
-              </a:ext>
-            </a:extLst>
-          </p:cNvPr>
+          <p:cNvPr id="3" name="Content Placeholder 2"/>
           <p:cNvSpPr>
             <a:spLocks noGrp="1"/>
           </p:cNvSpPr>
@@ -8470,7 +7545,7 @@
             </a:r>
           </a:p>
           <a:p>
-            <a:pPr lvl="0" indent="-457200" marL="457200">
+            <a:pPr lvl="0" indent="-342900" marL="342900">
               <a:buAutoNum type="alphaLcPeriod"/>
             </a:pPr>
             <a:r>
@@ -8479,7 +7554,7 @@
             </a:r>
           </a:p>
           <a:p>
-            <a:pPr lvl="0" indent="-457200" marL="457200">
+            <a:pPr lvl="0" indent="-342900" marL="342900">
               <a:buAutoNum type="alphaLcPeriod"/>
             </a:pPr>
             <a:r>
@@ -8488,7 +7563,7 @@
             </a:r>
           </a:p>
           <a:p>
-            <a:pPr lvl="0" indent="-457200" marL="457200">
+            <a:pPr lvl="0" indent="-342900" marL="342900">
               <a:buAutoNum type="alphaLcPeriod"/>
             </a:pPr>
             <a:r>
@@ -8497,47 +7572,13 @@
             </a:r>
           </a:p>
           <a:p>
-            <a:pPr lvl="0" indent="-457200" marL="457200">
+            <a:pPr lvl="0" indent="-342900" marL="342900">
               <a:buAutoNum type="alphaLcPeriod"/>
             </a:pPr>
             <a:r>
               <a:rPr/>
               <a:t>I am very familiar and have worked with it extensively.</a:t>
             </a:r>
-          </a:p>
-        </p:txBody>
-      </p:sp>
-      <p:sp>
-        <p:nvSpPr>
-          <p:cNvPr id="6" name="Slide Number Placeholder 5">
-            <a:extLst>
-              <a:ext uri="{FF2B5EF4-FFF2-40B4-BE49-F238E27FC236}">
-                <a16:creationId xmlns:a16="http://schemas.microsoft.com/office/drawing/2014/main" id="{5F33F24B-1A9E-2EAF-F2AB-89426454DEE9}"/>
-              </a:ext>
-            </a:extLst>
-          </p:cNvPr>
-          <p:cNvSpPr>
-            <a:spLocks noGrp="1"/>
-          </p:cNvSpPr>
-          <p:nvPr>
-            <p:ph idx="12" sz="quarter" type="sldNum"/>
-          </p:nvPr>
-        </p:nvSpPr>
-        <p:spPr>
-          <a:xfrm>
-            <a:off x="8610599" y="6356350"/>
-            <a:ext cx="3135001" cy="365125"/>
-          </a:xfrm>
-        </p:spPr>
-        <p:txBody>
-          <a:bodyPr/>
-          <a:lstStyle/>
-          <a:p>
-            <a:fld id="{7FEFBAB6-26D0-44D8-BD53-612461CE1ACC}" type="slidenum">
-              <a:rPr lang="de-DE" smtClean="0"/>
-              <a:t>‹#›</a:t>
-            </a:fld>
-            <a:endParaRPr lang="de-DE"/>
           </a:p>
         </p:txBody>
       </p:sp>
@@ -8565,13 +7606,7 @@
       </p:grpSpPr>
       <p:sp>
         <p:nvSpPr>
-          <p:cNvPr id="3" name="Content Placeholder 2">
-            <a:extLst>
-              <a:ext uri="{FF2B5EF4-FFF2-40B4-BE49-F238E27FC236}">
-                <a16:creationId xmlns:a16="http://schemas.microsoft.com/office/drawing/2014/main" id="{372FA590-20E9-0368-85B4-90C26598F852}"/>
-              </a:ext>
-            </a:extLst>
-          </p:cNvPr>
+          <p:cNvPr id="3" name="Content Placeholder 2"/>
           <p:cNvSpPr>
             <a:spLocks noGrp="1"/>
           </p:cNvSpPr>
@@ -8601,7 +7636,7 @@
             </a:r>
           </a:p>
           <a:p>
-            <a:pPr lvl="0" indent="-457200" marL="457200">
+            <a:pPr lvl="0" indent="-342900" marL="342900">
               <a:buAutoNum type="alphaLcPeriod"/>
             </a:pPr>
             <a:r>
@@ -8610,7 +7645,7 @@
             </a:r>
           </a:p>
           <a:p>
-            <a:pPr lvl="0" indent="-457200" marL="457200">
+            <a:pPr lvl="0" indent="-342900" marL="342900">
               <a:buAutoNum type="alphaLcPeriod"/>
             </a:pPr>
             <a:r>
@@ -8619,7 +7654,7 @@
             </a:r>
           </a:p>
           <a:p>
-            <a:pPr lvl="0" indent="-457200" marL="457200">
+            <a:pPr lvl="0" indent="-342900" marL="342900">
               <a:buAutoNum type="alphaLcPeriod"/>
             </a:pPr>
             <a:r>
@@ -8628,7 +7663,7 @@
             </a:r>
           </a:p>
           <a:p>
-            <a:pPr lvl="0" indent="-457200" marL="457200">
+            <a:pPr lvl="0" indent="-342900" marL="342900">
               <a:buAutoNum type="alphaLcPeriod"/>
             </a:pPr>
             <a:r>
@@ -8637,47 +7672,13 @@
             </a:r>
           </a:p>
           <a:p>
-            <a:pPr lvl="0" indent="-457200" marL="457200">
+            <a:pPr lvl="0" indent="-342900" marL="342900">
               <a:buAutoNum type="alphaLcPeriod"/>
             </a:pPr>
             <a:r>
               <a:rPr/>
               <a:t>5</a:t>
             </a:r>
-          </a:p>
-        </p:txBody>
-      </p:sp>
-      <p:sp>
-        <p:nvSpPr>
-          <p:cNvPr id="6" name="Slide Number Placeholder 5">
-            <a:extLst>
-              <a:ext uri="{FF2B5EF4-FFF2-40B4-BE49-F238E27FC236}">
-                <a16:creationId xmlns:a16="http://schemas.microsoft.com/office/drawing/2014/main" id="{5F33F24B-1A9E-2EAF-F2AB-89426454DEE9}"/>
-              </a:ext>
-            </a:extLst>
-          </p:cNvPr>
-          <p:cNvSpPr>
-            <a:spLocks noGrp="1"/>
-          </p:cNvSpPr>
-          <p:nvPr>
-            <p:ph idx="12" sz="quarter" type="sldNum"/>
-          </p:nvPr>
-        </p:nvSpPr>
-        <p:spPr>
-          <a:xfrm>
-            <a:off x="8610599" y="6356350"/>
-            <a:ext cx="3135001" cy="365125"/>
-          </a:xfrm>
-        </p:spPr>
-        <p:txBody>
-          <a:bodyPr/>
-          <a:lstStyle/>
-          <a:p>
-            <a:fld id="{7FEFBAB6-26D0-44D8-BD53-612461CE1ACC}" type="slidenum">
-              <a:rPr lang="de-DE" smtClean="0"/>
-              <a:t>‹#›</a:t>
-            </a:fld>
-            <a:endParaRPr lang="de-DE"/>
           </a:p>
         </p:txBody>
       </p:sp>
@@ -8705,13 +7706,7 @@
       </p:grpSpPr>
       <p:sp>
         <p:nvSpPr>
-          <p:cNvPr id="2" name="Title 1">
-            <a:extLst>
-              <a:ext uri="{FF2B5EF4-FFF2-40B4-BE49-F238E27FC236}">
-                <a16:creationId xmlns:a16="http://schemas.microsoft.com/office/drawing/2014/main" id="{6BF04AE0-F94F-A586-34B8-68D9CAB6C6D1}"/>
-              </a:ext>
-            </a:extLst>
-          </p:cNvPr>
+          <p:cNvPr id="2" name="Title 1"/>
           <p:cNvSpPr>
             <a:spLocks noGrp="1"/>
           </p:cNvSpPr>
@@ -8719,12 +7714,7 @@
             <p:ph type="title"/>
           </p:nvPr>
         </p:nvSpPr>
-        <p:spPr>
-          <a:xfrm>
-            <a:off x="2295524" y="432532"/>
-            <a:ext cx="9450077" cy="825501"/>
-          </a:xfrm>
-        </p:spPr>
+        <p:spPr/>
         <p:txBody>
           <a:bodyPr/>
           <a:lstStyle/>
@@ -8741,13 +7731,7 @@
       </p:sp>
       <p:sp>
         <p:nvSpPr>
-          <p:cNvPr id="3" name="Content Placeholder 2">
-            <a:extLst>
-              <a:ext uri="{FF2B5EF4-FFF2-40B4-BE49-F238E27FC236}">
-                <a16:creationId xmlns:a16="http://schemas.microsoft.com/office/drawing/2014/main" id="{372FA590-20E9-0368-85B4-90C26598F852}"/>
-              </a:ext>
-            </a:extLst>
-          </p:cNvPr>
+          <p:cNvPr id="3" name="Content Placeholder 2"/>
           <p:cNvSpPr>
             <a:spLocks noGrp="1"/>
           </p:cNvSpPr>
@@ -8767,40 +7751,6 @@
               <a:rPr b="1"/>
               <a:t>What do we see in the results?</a:t>
             </a:r>
-          </a:p>
-        </p:txBody>
-      </p:sp>
-      <p:sp>
-        <p:nvSpPr>
-          <p:cNvPr id="6" name="Slide Number Placeholder 5">
-            <a:extLst>
-              <a:ext uri="{FF2B5EF4-FFF2-40B4-BE49-F238E27FC236}">
-                <a16:creationId xmlns:a16="http://schemas.microsoft.com/office/drawing/2014/main" id="{5F33F24B-1A9E-2EAF-F2AB-89426454DEE9}"/>
-              </a:ext>
-            </a:extLst>
-          </p:cNvPr>
-          <p:cNvSpPr>
-            <a:spLocks noGrp="1"/>
-          </p:cNvSpPr>
-          <p:nvPr>
-            <p:ph idx="12" sz="quarter" type="sldNum"/>
-          </p:nvPr>
-        </p:nvSpPr>
-        <p:spPr>
-          <a:xfrm>
-            <a:off x="8610599" y="6356350"/>
-            <a:ext cx="3135001" cy="365125"/>
-          </a:xfrm>
-        </p:spPr>
-        <p:txBody>
-          <a:bodyPr/>
-          <a:lstStyle/>
-          <a:p>
-            <a:fld id="{7FEFBAB6-26D0-44D8-BD53-612461CE1ACC}" type="slidenum">
-              <a:rPr lang="de-DE" smtClean="0"/>
-              <a:t>‹#›</a:t>
-            </a:fld>
-            <a:endParaRPr lang="de-DE"/>
           </a:p>
         </p:txBody>
       </p:sp>
@@ -8828,13 +7778,7 @@
       </p:grpSpPr>
       <p:sp>
         <p:nvSpPr>
-          <p:cNvPr id="2" name="Title 1">
-            <a:extLst>
-              <a:ext uri="{FF2B5EF4-FFF2-40B4-BE49-F238E27FC236}">
-                <a16:creationId xmlns:a16="http://schemas.microsoft.com/office/drawing/2014/main" id="{6BF04AE0-F94F-A586-34B8-68D9CAB6C6D1}"/>
-              </a:ext>
-            </a:extLst>
-          </p:cNvPr>
+          <p:cNvPr id="2" name="Title 1"/>
           <p:cNvSpPr>
             <a:spLocks noGrp="1"/>
           </p:cNvSpPr>
@@ -8842,12 +7786,7 @@
             <p:ph type="title"/>
           </p:nvPr>
         </p:nvSpPr>
-        <p:spPr>
-          <a:xfrm>
-            <a:off x="2295524" y="432532"/>
-            <a:ext cx="9450077" cy="825501"/>
-          </a:xfrm>
-        </p:spPr>
+        <p:spPr/>
         <p:txBody>
           <a:bodyPr/>
           <a:lstStyle/>
@@ -8864,13 +7803,7 @@
       </p:sp>
       <p:sp>
         <p:nvSpPr>
-          <p:cNvPr id="3" name="Content Placeholder 2">
-            <a:extLst>
-              <a:ext uri="{FF2B5EF4-FFF2-40B4-BE49-F238E27FC236}">
-                <a16:creationId xmlns:a16="http://schemas.microsoft.com/office/drawing/2014/main" id="{372FA590-20E9-0368-85B4-90C26598F852}"/>
-              </a:ext>
-            </a:extLst>
-          </p:cNvPr>
+          <p:cNvPr id="3" name="Content Placeholder 2"/>
           <p:cNvSpPr>
             <a:spLocks noGrp="1"/>
           </p:cNvSpPr>
@@ -8956,40 +7889,6 @@
               <a:rPr/>
               <a:t>Citation management tool: Using Zotero in our workflow</a:t>
             </a:r>
-          </a:p>
-        </p:txBody>
-      </p:sp>
-      <p:sp>
-        <p:nvSpPr>
-          <p:cNvPr id="6" name="Slide Number Placeholder 5">
-            <a:extLst>
-              <a:ext uri="{FF2B5EF4-FFF2-40B4-BE49-F238E27FC236}">
-                <a16:creationId xmlns:a16="http://schemas.microsoft.com/office/drawing/2014/main" id="{5F33F24B-1A9E-2EAF-F2AB-89426454DEE9}"/>
-              </a:ext>
-            </a:extLst>
-          </p:cNvPr>
-          <p:cNvSpPr>
-            <a:spLocks noGrp="1"/>
-          </p:cNvSpPr>
-          <p:nvPr>
-            <p:ph idx="12" sz="quarter" type="sldNum"/>
-          </p:nvPr>
-        </p:nvSpPr>
-        <p:spPr>
-          <a:xfrm>
-            <a:off x="8610599" y="6356350"/>
-            <a:ext cx="3135001" cy="365125"/>
-          </a:xfrm>
-        </p:spPr>
-        <p:txBody>
-          <a:bodyPr/>
-          <a:lstStyle/>
-          <a:p>
-            <a:fld id="{7FEFBAB6-26D0-44D8-BD53-612461CE1ACC}" type="slidenum">
-              <a:rPr lang="de-DE" smtClean="0"/>
-              <a:t>‹#›</a:t>
-            </a:fld>
-            <a:endParaRPr lang="de-DE"/>
           </a:p>
         </p:txBody>
       </p:sp>
@@ -9017,13 +7916,7 @@
       </p:grpSpPr>
       <p:sp>
         <p:nvSpPr>
-          <p:cNvPr id="2" name="Title 1">
-            <a:extLst>
-              <a:ext uri="{FF2B5EF4-FFF2-40B4-BE49-F238E27FC236}">
-                <a16:creationId xmlns:a16="http://schemas.microsoft.com/office/drawing/2014/main" id="{6BF04AE0-F94F-A586-34B8-68D9CAB6C6D1}"/>
-              </a:ext>
-            </a:extLst>
-          </p:cNvPr>
+          <p:cNvPr id="2" name="Title 1"/>
           <p:cNvSpPr>
             <a:spLocks noGrp="1"/>
           </p:cNvSpPr>
@@ -9031,12 +7924,7 @@
             <p:ph type="title"/>
           </p:nvPr>
         </p:nvSpPr>
-        <p:spPr>
-          <a:xfrm>
-            <a:off x="2295524" y="432532"/>
-            <a:ext cx="9450077" cy="825501"/>
-          </a:xfrm>
-        </p:spPr>
+        <p:spPr/>
         <p:txBody>
           <a:bodyPr/>
           <a:lstStyle/>
@@ -9053,13 +7941,7 @@
       </p:sp>
       <p:sp>
         <p:nvSpPr>
-          <p:cNvPr id="3" name="Content Placeholder 2">
-            <a:extLst>
-              <a:ext uri="{FF2B5EF4-FFF2-40B4-BE49-F238E27FC236}">
-                <a16:creationId xmlns:a16="http://schemas.microsoft.com/office/drawing/2014/main" id="{372FA590-20E9-0368-85B4-90C26598F852}"/>
-              </a:ext>
-            </a:extLst>
-          </p:cNvPr>
+          <p:cNvPr id="3" name="Content Placeholder 2"/>
           <p:cNvSpPr>
             <a:spLocks noGrp="1"/>
           </p:cNvSpPr>
@@ -9125,40 +8007,6 @@
               <a:rPr/>
               <a:t> a referencing workflow in MS Word</a:t>
             </a:r>
-          </a:p>
-        </p:txBody>
-      </p:sp>
-      <p:sp>
-        <p:nvSpPr>
-          <p:cNvPr id="6" name="Slide Number Placeholder 5">
-            <a:extLst>
-              <a:ext uri="{FF2B5EF4-FFF2-40B4-BE49-F238E27FC236}">
-                <a16:creationId xmlns:a16="http://schemas.microsoft.com/office/drawing/2014/main" id="{5F33F24B-1A9E-2EAF-F2AB-89426454DEE9}"/>
-              </a:ext>
-            </a:extLst>
-          </p:cNvPr>
-          <p:cNvSpPr>
-            <a:spLocks noGrp="1"/>
-          </p:cNvSpPr>
-          <p:nvPr>
-            <p:ph idx="12" sz="quarter" type="sldNum"/>
-          </p:nvPr>
-        </p:nvSpPr>
-        <p:spPr>
-          <a:xfrm>
-            <a:off x="8610599" y="6356350"/>
-            <a:ext cx="3135001" cy="365125"/>
-          </a:xfrm>
-        </p:spPr>
-        <p:txBody>
-          <a:bodyPr/>
-          <a:lstStyle/>
-          <a:p>
-            <a:fld id="{7FEFBAB6-26D0-44D8-BD53-612461CE1ACC}" type="slidenum">
-              <a:rPr lang="de-DE" smtClean="0"/>
-              <a:t>‹#›</a:t>
-            </a:fld>
-            <a:endParaRPr lang="de-DE"/>
           </a:p>
         </p:txBody>
       </p:sp>
@@ -9464,13 +8312,7 @@
       </p:grpSpPr>
       <p:sp>
         <p:nvSpPr>
-          <p:cNvPr id="2" name="Title 1">
-            <a:extLst>
-              <a:ext uri="{FF2B5EF4-FFF2-40B4-BE49-F238E27FC236}">
-                <a16:creationId xmlns:a16="http://schemas.microsoft.com/office/drawing/2014/main" id="{12131F71-CF7E-3DA4-7847-3ACEC01625C3}"/>
-              </a:ext>
-            </a:extLst>
-          </p:cNvPr>
+          <p:cNvPr id="2" name="Title 1"/>
           <p:cNvSpPr>
             <a:spLocks noGrp="1"/>
           </p:cNvSpPr>
@@ -9480,8 +8322,8 @@
         </p:nvSpPr>
         <p:spPr>
           <a:xfrm>
-            <a:off x="446399" y="1392999"/>
-            <a:ext cx="4735201" cy="996952"/>
+            <a:off x="457201" y="204787"/>
+            <a:ext cx="3008313" cy="871538"/>
           </a:xfrm>
         </p:spPr>
         <p:txBody>
@@ -9500,13 +8342,7 @@
       </p:sp>
       <p:sp>
         <p:nvSpPr>
-          <p:cNvPr id="4" name="Text Placeholder 3">
-            <a:extLst>
-              <a:ext uri="{FF2B5EF4-FFF2-40B4-BE49-F238E27FC236}">
-                <a16:creationId xmlns:a16="http://schemas.microsoft.com/office/drawing/2014/main" id="{7381D285-C44D-D095-90F1-6D3CF7B2C883}"/>
-              </a:ext>
-            </a:extLst>
-          </p:cNvPr>
+          <p:cNvPr id="4" name="Text Placeholder 3"/>
           <p:cNvSpPr>
             <a:spLocks noGrp="1"/>
           </p:cNvSpPr>
@@ -9566,8 +8402,8 @@
         </p:blipFill>
         <p:spPr bwMode="auto">
           <a:xfrm>
-            <a:off x="5372100" y="2438400"/>
-            <a:ext cx="6362700" cy="2235200"/>
+            <a:off x="3568700" y="1244600"/>
+            <a:ext cx="5105400" cy="1790700"/>
           </a:xfrm>
           <a:prstGeom prst="rect">
             <a:avLst/>
@@ -9590,8 +8426,8 @@
         </p:nvSpPr>
         <p:spPr>
           <a:xfrm>
-            <a:off x="5372100" y="5524500"/>
-            <a:ext cx="6362700" cy="508000"/>
+            <a:off x="3568700" y="4076700"/>
+            <a:ext cx="5105400" cy="508000"/>
           </a:xfrm>
           <a:prstGeom prst="rect">
             <a:avLst/>
@@ -9614,13 +8450,7 @@
       </p:sp>
       <p:sp>
         <p:nvSpPr>
-          <p:cNvPr id="3" name="Content Placeholder 2">
-            <a:extLst>
-              <a:ext uri="{FF2B5EF4-FFF2-40B4-BE49-F238E27FC236}">
-                <a16:creationId xmlns:a16="http://schemas.microsoft.com/office/drawing/2014/main" id="{1ABD3518-0673-3D1D-365A-E2B15CD22643}"/>
-              </a:ext>
-            </a:extLst>
-          </p:cNvPr>
+          <p:cNvPr id="3" name="Content Placeholder 2"/>
           <p:cNvSpPr>
             <a:spLocks noGrp="1"/>
           </p:cNvSpPr>
@@ -9648,40 +8478,6 @@
               <a:rPr/>
               <a:t> the source of your knowledge; in this case, a scientific paper.</a:t>
             </a:r>
-          </a:p>
-        </p:txBody>
-      </p:sp>
-      <p:sp>
-        <p:nvSpPr>
-          <p:cNvPr id="7" name="Slide Number Placeholder 6">
-            <a:extLst>
-              <a:ext uri="{FF2B5EF4-FFF2-40B4-BE49-F238E27FC236}">
-                <a16:creationId xmlns:a16="http://schemas.microsoft.com/office/drawing/2014/main" id="{7EC0C6E5-A864-8D29-B45D-21E23026496C}"/>
-              </a:ext>
-            </a:extLst>
-          </p:cNvPr>
-          <p:cNvSpPr>
-            <a:spLocks noGrp="1"/>
-          </p:cNvSpPr>
-          <p:nvPr>
-            <p:ph idx="12" sz="quarter" type="sldNum"/>
-          </p:nvPr>
-        </p:nvSpPr>
-        <p:spPr>
-          <a:xfrm>
-            <a:off x="8610600" y="6356350"/>
-            <a:ext cx="3135000" cy="365125"/>
-          </a:xfrm>
-        </p:spPr>
-        <p:txBody>
-          <a:bodyPr/>
-          <a:lstStyle/>
-          <a:p>
-            <a:fld id="{7FEFBAB6-26D0-44D8-BD53-612461CE1ACC}" type="slidenum">
-              <a:rPr lang="de-DE" smtClean="0"/>
-              <a:t>‹#›</a:t>
-            </a:fld>
-            <a:endParaRPr lang="de-DE"/>
           </a:p>
         </p:txBody>
       </p:sp>
@@ -9709,13 +8505,7 @@
       </p:grpSpPr>
       <p:sp>
         <p:nvSpPr>
-          <p:cNvPr id="2" name="Title 1">
-            <a:extLst>
-              <a:ext uri="{FF2B5EF4-FFF2-40B4-BE49-F238E27FC236}">
-                <a16:creationId xmlns:a16="http://schemas.microsoft.com/office/drawing/2014/main" id="{12131F71-CF7E-3DA4-7847-3ACEC01625C3}"/>
-              </a:ext>
-            </a:extLst>
-          </p:cNvPr>
+          <p:cNvPr id="2" name="Title 1"/>
           <p:cNvSpPr>
             <a:spLocks noGrp="1"/>
           </p:cNvSpPr>
@@ -9725,8 +8515,8 @@
         </p:nvSpPr>
         <p:spPr>
           <a:xfrm>
-            <a:off x="446399" y="1392999"/>
-            <a:ext cx="4735201" cy="996952"/>
+            <a:off x="457201" y="204787"/>
+            <a:ext cx="3008313" cy="871538"/>
           </a:xfrm>
         </p:spPr>
         <p:txBody>
@@ -9745,13 +8535,7 @@
       </p:sp>
       <p:sp>
         <p:nvSpPr>
-          <p:cNvPr id="4" name="Text Placeholder 3">
-            <a:extLst>
-              <a:ext uri="{FF2B5EF4-FFF2-40B4-BE49-F238E27FC236}">
-                <a16:creationId xmlns:a16="http://schemas.microsoft.com/office/drawing/2014/main" id="{7381D285-C44D-D095-90F1-6D3CF7B2C883}"/>
-              </a:ext>
-            </a:extLst>
-          </p:cNvPr>
+          <p:cNvPr id="4" name="Text Placeholder 3"/>
           <p:cNvSpPr>
             <a:spLocks noGrp="1"/>
           </p:cNvSpPr>
@@ -9800,8 +8584,8 @@
         </p:blipFill>
         <p:spPr bwMode="auto">
           <a:xfrm>
-            <a:off x="5372100" y="3441700"/>
-            <a:ext cx="6362700" cy="723900"/>
+            <a:off x="3568700" y="2108200"/>
+            <a:ext cx="5105400" cy="584200"/>
           </a:xfrm>
           <a:prstGeom prst="rect">
             <a:avLst/>
@@ -9814,40 +8598,6 @@
           </a:ln>
         </p:spPr>
       </p:pic>
-      <p:sp>
-        <p:nvSpPr>
-          <p:cNvPr id="7" name="Slide Number Placeholder 6">
-            <a:extLst>
-              <a:ext uri="{FF2B5EF4-FFF2-40B4-BE49-F238E27FC236}">
-                <a16:creationId xmlns:a16="http://schemas.microsoft.com/office/drawing/2014/main" id="{7EC0C6E5-A864-8D29-B45D-21E23026496C}"/>
-              </a:ext>
-            </a:extLst>
-          </p:cNvPr>
-          <p:cNvSpPr>
-            <a:spLocks noGrp="1"/>
-          </p:cNvSpPr>
-          <p:nvPr>
-            <p:ph idx="12" sz="quarter" type="sldNum"/>
-          </p:nvPr>
-        </p:nvSpPr>
-        <p:spPr>
-          <a:xfrm>
-            <a:off x="8610600" y="6356350"/>
-            <a:ext cx="3135000" cy="365125"/>
-          </a:xfrm>
-        </p:spPr>
-        <p:txBody>
-          <a:bodyPr/>
-          <a:lstStyle/>
-          <a:p>
-            <a:fld id="{7FEFBAB6-26D0-44D8-BD53-612461CE1ACC}" type="slidenum">
-              <a:rPr lang="de-DE" smtClean="0"/>
-              <a:t>‹#›</a:t>
-            </a:fld>
-            <a:endParaRPr lang="de-DE"/>
-          </a:p>
-        </p:txBody>
-      </p:sp>
     </p:spTree>
   </p:cSld>
 </p:sld>
@@ -9872,13 +8622,7 @@
       </p:grpSpPr>
       <p:sp>
         <p:nvSpPr>
-          <p:cNvPr id="2" name="Title 1">
-            <a:extLst>
-              <a:ext uri="{FF2B5EF4-FFF2-40B4-BE49-F238E27FC236}">
-                <a16:creationId xmlns:a16="http://schemas.microsoft.com/office/drawing/2014/main" id="{12131F71-CF7E-3DA4-7847-3ACEC01625C3}"/>
-              </a:ext>
-            </a:extLst>
-          </p:cNvPr>
+          <p:cNvPr id="2" name="Title 1"/>
           <p:cNvSpPr>
             <a:spLocks noGrp="1"/>
           </p:cNvSpPr>
@@ -9888,8 +8632,8 @@
         </p:nvSpPr>
         <p:spPr>
           <a:xfrm>
-            <a:off x="446399" y="1392999"/>
-            <a:ext cx="4735201" cy="996952"/>
+            <a:off x="457201" y="204787"/>
+            <a:ext cx="3008313" cy="871538"/>
           </a:xfrm>
         </p:spPr>
         <p:txBody>
@@ -9908,13 +8652,7 @@
       </p:sp>
       <p:sp>
         <p:nvSpPr>
-          <p:cNvPr id="4" name="Text Placeholder 3">
-            <a:extLst>
-              <a:ext uri="{FF2B5EF4-FFF2-40B4-BE49-F238E27FC236}">
-                <a16:creationId xmlns:a16="http://schemas.microsoft.com/office/drawing/2014/main" id="{7381D285-C44D-D095-90F1-6D3CF7B2C883}"/>
-              </a:ext>
-            </a:extLst>
-          </p:cNvPr>
+          <p:cNvPr id="4" name="Text Placeholder 3"/>
           <p:cNvSpPr>
             <a:spLocks noGrp="1"/>
           </p:cNvSpPr>
@@ -9975,8 +8713,8 @@
         </p:blipFill>
         <p:spPr bwMode="auto">
           <a:xfrm>
-            <a:off x="5372100" y="3060700"/>
-            <a:ext cx="6362700" cy="1473200"/>
+            <a:off x="3568700" y="1803400"/>
+            <a:ext cx="5105400" cy="1181100"/>
           </a:xfrm>
           <a:prstGeom prst="rect">
             <a:avLst/>
@@ -9989,40 +8727,6 @@
           </a:ln>
         </p:spPr>
       </p:pic>
-      <p:sp>
-        <p:nvSpPr>
-          <p:cNvPr id="7" name="Slide Number Placeholder 6">
-            <a:extLst>
-              <a:ext uri="{FF2B5EF4-FFF2-40B4-BE49-F238E27FC236}">
-                <a16:creationId xmlns:a16="http://schemas.microsoft.com/office/drawing/2014/main" id="{7EC0C6E5-A864-8D29-B45D-21E23026496C}"/>
-              </a:ext>
-            </a:extLst>
-          </p:cNvPr>
-          <p:cNvSpPr>
-            <a:spLocks noGrp="1"/>
-          </p:cNvSpPr>
-          <p:nvPr>
-            <p:ph idx="12" sz="quarter" type="sldNum"/>
-          </p:nvPr>
-        </p:nvSpPr>
-        <p:spPr>
-          <a:xfrm>
-            <a:off x="8610600" y="6356350"/>
-            <a:ext cx="3135000" cy="365125"/>
-          </a:xfrm>
-        </p:spPr>
-        <p:txBody>
-          <a:bodyPr/>
-          <a:lstStyle/>
-          <a:p>
-            <a:fld id="{7FEFBAB6-26D0-44D8-BD53-612461CE1ACC}" type="slidenum">
-              <a:rPr lang="de-DE" smtClean="0"/>
-              <a:t>‹#›</a:t>
-            </a:fld>
-            <a:endParaRPr lang="de-DE"/>
-          </a:p>
-        </p:txBody>
-      </p:sp>
     </p:spTree>
   </p:cSld>
 </p:sld>
@@ -10047,13 +8751,7 @@
       </p:grpSpPr>
       <p:sp>
         <p:nvSpPr>
-          <p:cNvPr id="2" name="Title 1">
-            <a:extLst>
-              <a:ext uri="{FF2B5EF4-FFF2-40B4-BE49-F238E27FC236}">
-                <a16:creationId xmlns:a16="http://schemas.microsoft.com/office/drawing/2014/main" id="{6BF04AE0-F94F-A586-34B8-68D9CAB6C6D1}"/>
-              </a:ext>
-            </a:extLst>
-          </p:cNvPr>
+          <p:cNvPr id="2" name="Title 1"/>
           <p:cNvSpPr>
             <a:spLocks noGrp="1"/>
           </p:cNvSpPr>
@@ -10061,12 +8759,7 @@
             <p:ph type="title"/>
           </p:nvPr>
         </p:nvSpPr>
-        <p:spPr>
-          <a:xfrm>
-            <a:off x="2295524" y="432532"/>
-            <a:ext cx="9450077" cy="825501"/>
-          </a:xfrm>
-        </p:spPr>
+        <p:spPr/>
         <p:txBody>
           <a:bodyPr/>
           <a:lstStyle/>
@@ -10083,13 +8776,7 @@
       </p:sp>
       <p:sp>
         <p:nvSpPr>
-          <p:cNvPr id="3" name="Content Placeholder 2">
-            <a:extLst>
-              <a:ext uri="{FF2B5EF4-FFF2-40B4-BE49-F238E27FC236}">
-                <a16:creationId xmlns:a16="http://schemas.microsoft.com/office/drawing/2014/main" id="{372FA590-20E9-0368-85B4-90C26598F852}"/>
-              </a:ext>
-            </a:extLst>
-          </p:cNvPr>
+          <p:cNvPr id="3" name="Content Placeholder 2"/>
           <p:cNvSpPr>
             <a:spLocks noGrp="1"/>
           </p:cNvSpPr>
@@ -10161,40 +8848,6 @@
               <a:rPr/>
               <a:t> Citations link papers into a big web of knowledge and are often used (not perfectly) to see which work has had a big impact.</a:t>
             </a:r>
-          </a:p>
-        </p:txBody>
-      </p:sp>
-      <p:sp>
-        <p:nvSpPr>
-          <p:cNvPr id="6" name="Slide Number Placeholder 5">
-            <a:extLst>
-              <a:ext uri="{FF2B5EF4-FFF2-40B4-BE49-F238E27FC236}">
-                <a16:creationId xmlns:a16="http://schemas.microsoft.com/office/drawing/2014/main" id="{5F33F24B-1A9E-2EAF-F2AB-89426454DEE9}"/>
-              </a:ext>
-            </a:extLst>
-          </p:cNvPr>
-          <p:cNvSpPr>
-            <a:spLocks noGrp="1"/>
-          </p:cNvSpPr>
-          <p:nvPr>
-            <p:ph idx="12" sz="quarter" type="sldNum"/>
-          </p:nvPr>
-        </p:nvSpPr>
-        <p:spPr>
-          <a:xfrm>
-            <a:off x="8610599" y="6356350"/>
-            <a:ext cx="3135001" cy="365125"/>
-          </a:xfrm>
-        </p:spPr>
-        <p:txBody>
-          <a:bodyPr/>
-          <a:lstStyle/>
-          <a:p>
-            <a:fld id="{7FEFBAB6-26D0-44D8-BD53-612461CE1ACC}" type="slidenum">
-              <a:rPr lang="de-DE" smtClean="0"/>
-              <a:t>‹#›</a:t>
-            </a:fld>
-            <a:endParaRPr lang="de-DE"/>
           </a:p>
         </p:txBody>
       </p:sp>
@@ -10451,13 +9104,7 @@
       </p:grpSpPr>
       <p:sp>
         <p:nvSpPr>
-          <p:cNvPr id="2" name="Title 1">
-            <a:extLst>
-              <a:ext uri="{FF2B5EF4-FFF2-40B4-BE49-F238E27FC236}">
-                <a16:creationId xmlns:a16="http://schemas.microsoft.com/office/drawing/2014/main" id="{6BF04AE0-F94F-A586-34B8-68D9CAB6C6D1}"/>
-              </a:ext>
-            </a:extLst>
-          </p:cNvPr>
+          <p:cNvPr id="2" name="Title 1"/>
           <p:cNvSpPr>
             <a:spLocks noGrp="1"/>
           </p:cNvSpPr>
@@ -10465,12 +9112,7 @@
             <p:ph type="title"/>
           </p:nvPr>
         </p:nvSpPr>
-        <p:spPr>
-          <a:xfrm>
-            <a:off x="2295524" y="432532"/>
-            <a:ext cx="9450077" cy="825501"/>
-          </a:xfrm>
-        </p:spPr>
+        <p:spPr/>
         <p:txBody>
           <a:bodyPr/>
           <a:lstStyle/>
@@ -10487,13 +9129,7 @@
       </p:sp>
       <p:sp>
         <p:nvSpPr>
-          <p:cNvPr id="3" name="Content Placeholder 2">
-            <a:extLst>
-              <a:ext uri="{FF2B5EF4-FFF2-40B4-BE49-F238E27FC236}">
-                <a16:creationId xmlns:a16="http://schemas.microsoft.com/office/drawing/2014/main" id="{372FA590-20E9-0368-85B4-90C26598F852}"/>
-              </a:ext>
-            </a:extLst>
-          </p:cNvPr>
+          <p:cNvPr id="3" name="Content Placeholder 2"/>
           <p:cNvSpPr>
             <a:spLocks noGrp="1"/>
           </p:cNvSpPr>
@@ -10537,40 +9173,6 @@
               </a:rPr>
               <a:t>Jackson (1990)</a:t>
             </a:r>
-          </a:p>
-        </p:txBody>
-      </p:sp>
-      <p:sp>
-        <p:nvSpPr>
-          <p:cNvPr id="6" name="Slide Number Placeholder 5">
-            <a:extLst>
-              <a:ext uri="{FF2B5EF4-FFF2-40B4-BE49-F238E27FC236}">
-                <a16:creationId xmlns:a16="http://schemas.microsoft.com/office/drawing/2014/main" id="{5F33F24B-1A9E-2EAF-F2AB-89426454DEE9}"/>
-              </a:ext>
-            </a:extLst>
-          </p:cNvPr>
-          <p:cNvSpPr>
-            <a:spLocks noGrp="1"/>
-          </p:cNvSpPr>
-          <p:nvPr>
-            <p:ph idx="12" sz="quarter" type="sldNum"/>
-          </p:nvPr>
-        </p:nvSpPr>
-        <p:spPr>
-          <a:xfrm>
-            <a:off x="8610599" y="6356350"/>
-            <a:ext cx="3135001" cy="365125"/>
-          </a:xfrm>
-        </p:spPr>
-        <p:txBody>
-          <a:bodyPr/>
-          <a:lstStyle/>
-          <a:p>
-            <a:fld id="{7FEFBAB6-26D0-44D8-BD53-612461CE1ACC}" type="slidenum">
-              <a:rPr lang="de-DE" smtClean="0"/>
-              <a:t>‹#›</a:t>
-            </a:fld>
-            <a:endParaRPr lang="de-DE"/>
           </a:p>
         </p:txBody>
       </p:sp>
@@ -10598,13 +9200,7 @@
       </p:grpSpPr>
       <p:sp>
         <p:nvSpPr>
-          <p:cNvPr id="2" name="Title 1">
-            <a:extLst>
-              <a:ext uri="{FF2B5EF4-FFF2-40B4-BE49-F238E27FC236}">
-                <a16:creationId xmlns:a16="http://schemas.microsoft.com/office/drawing/2014/main" id="{6BF04AE0-F94F-A586-34B8-68D9CAB6C6D1}"/>
-              </a:ext>
-            </a:extLst>
-          </p:cNvPr>
+          <p:cNvPr id="2" name="Title 1"/>
           <p:cNvSpPr>
             <a:spLocks noGrp="1"/>
           </p:cNvSpPr>
@@ -10612,12 +9208,7 @@
             <p:ph type="title"/>
           </p:nvPr>
         </p:nvSpPr>
-        <p:spPr>
-          <a:xfrm>
-            <a:off x="2295524" y="432532"/>
-            <a:ext cx="9450077" cy="825501"/>
-          </a:xfrm>
-        </p:spPr>
+        <p:spPr/>
         <p:txBody>
           <a:bodyPr/>
           <a:lstStyle/>
@@ -10634,13 +9225,7 @@
       </p:sp>
       <p:sp>
         <p:nvSpPr>
-          <p:cNvPr id="3" name="Content Placeholder 2">
-            <a:extLst>
-              <a:ext uri="{FF2B5EF4-FFF2-40B4-BE49-F238E27FC236}">
-                <a16:creationId xmlns:a16="http://schemas.microsoft.com/office/drawing/2014/main" id="{372FA590-20E9-0368-85B4-90C26598F852}"/>
-              </a:ext>
-            </a:extLst>
-          </p:cNvPr>
+          <p:cNvPr id="3" name="Content Placeholder 2"/>
           <p:cNvSpPr>
             <a:spLocks noGrp="1"/>
           </p:cNvSpPr>
@@ -10691,7 +9276,7 @@
             </a:r>
           </a:p>
           <a:p>
-            <a:pPr lvl="1" indent="-457200" marL="914400">
+            <a:pPr lvl="1" indent="-342900" marL="685800">
               <a:buAutoNum type="arabicPeriod"/>
             </a:pPr>
             <a:r>
@@ -10700,7 +9285,7 @@
             </a:r>
           </a:p>
           <a:p>
-            <a:pPr lvl="1" indent="-457200" marL="914400">
+            <a:pPr lvl="1" indent="-342900" marL="685800">
               <a:buAutoNum type="arabicPeriod"/>
             </a:pPr>
             <a:r>
@@ -10709,7 +9294,7 @@
             </a:r>
           </a:p>
           <a:p>
-            <a:pPr lvl="1" indent="-457200" marL="914400">
+            <a:pPr lvl="1" indent="-342900" marL="685800">
               <a:buAutoNum type="arabicPeriod"/>
             </a:pPr>
             <a:r>
@@ -10718,7 +9303,7 @@
             </a:r>
           </a:p>
           <a:p>
-            <a:pPr lvl="1" indent="-457200" marL="914400">
+            <a:pPr lvl="1" indent="-342900" marL="685800">
               <a:buAutoNum type="arabicPeriod"/>
             </a:pPr>
             <a:r>
@@ -10737,40 +9322,6 @@
               <a:rPr i="1"/>
               <a:t>Note: Listed in an alphabetical order.</a:t>
             </a:r>
-          </a:p>
-        </p:txBody>
-      </p:sp>
-      <p:sp>
-        <p:nvSpPr>
-          <p:cNvPr id="6" name="Slide Number Placeholder 5">
-            <a:extLst>
-              <a:ext uri="{FF2B5EF4-FFF2-40B4-BE49-F238E27FC236}">
-                <a16:creationId xmlns:a16="http://schemas.microsoft.com/office/drawing/2014/main" id="{5F33F24B-1A9E-2EAF-F2AB-89426454DEE9}"/>
-              </a:ext>
-            </a:extLst>
-          </p:cNvPr>
-          <p:cNvSpPr>
-            <a:spLocks noGrp="1"/>
-          </p:cNvSpPr>
-          <p:nvPr>
-            <p:ph idx="12" sz="quarter" type="sldNum"/>
-          </p:nvPr>
-        </p:nvSpPr>
-        <p:spPr>
-          <a:xfrm>
-            <a:off x="8610599" y="6356350"/>
-            <a:ext cx="3135001" cy="365125"/>
-          </a:xfrm>
-        </p:spPr>
-        <p:txBody>
-          <a:bodyPr/>
-          <a:lstStyle/>
-          <a:p>
-            <a:fld id="{7FEFBAB6-26D0-44D8-BD53-612461CE1ACC}" type="slidenum">
-              <a:rPr lang="de-DE" smtClean="0"/>
-              <a:t>‹#›</a:t>
-            </a:fld>
-            <a:endParaRPr lang="de-DE"/>
           </a:p>
         </p:txBody>
       </p:sp>
@@ -11125,13 +9676,7 @@
       </p:grpSpPr>
       <p:sp>
         <p:nvSpPr>
-          <p:cNvPr id="2" name="Title 1">
-            <a:extLst>
-              <a:ext uri="{FF2B5EF4-FFF2-40B4-BE49-F238E27FC236}">
-                <a16:creationId xmlns:a16="http://schemas.microsoft.com/office/drawing/2014/main" id="{6BF04AE0-F94F-A586-34B8-68D9CAB6C6D1}"/>
-              </a:ext>
-            </a:extLst>
-          </p:cNvPr>
+          <p:cNvPr id="2" name="Title 1"/>
           <p:cNvSpPr>
             <a:spLocks noGrp="1"/>
           </p:cNvSpPr>
@@ -11139,12 +9684,7 @@
             <p:ph type="title"/>
           </p:nvPr>
         </p:nvSpPr>
-        <p:spPr>
-          <a:xfrm>
-            <a:off x="2295524" y="432532"/>
-            <a:ext cx="9450077" cy="825501"/>
-          </a:xfrm>
-        </p:spPr>
+        <p:spPr/>
         <p:txBody>
           <a:bodyPr/>
           <a:lstStyle/>
@@ -11161,13 +9701,7 @@
       </p:sp>
       <p:sp>
         <p:nvSpPr>
-          <p:cNvPr id="3" name="Content Placeholder 2">
-            <a:extLst>
-              <a:ext uri="{FF2B5EF4-FFF2-40B4-BE49-F238E27FC236}">
-                <a16:creationId xmlns:a16="http://schemas.microsoft.com/office/drawing/2014/main" id="{372FA590-20E9-0368-85B4-90C26598F852}"/>
-              </a:ext>
-            </a:extLst>
-          </p:cNvPr>
+          <p:cNvPr id="3" name="Content Placeholder 2"/>
           <p:cNvSpPr>
             <a:spLocks noGrp="1"/>
           </p:cNvSpPr>
@@ -11218,7 +9752,7 @@
             </a:r>
           </a:p>
           <a:p>
-            <a:pPr lvl="1" indent="-457200" marL="914400">
+            <a:pPr lvl="1" indent="-342900" marL="685800">
               <a:buAutoNum type="arabicPeriod"/>
             </a:pPr>
             <a:r>
@@ -11227,7 +9761,7 @@
             </a:r>
           </a:p>
           <a:p>
-            <a:pPr lvl="1" indent="-457200" marL="914400">
+            <a:pPr lvl="1" indent="-342900" marL="685800">
               <a:buAutoNum type="arabicPeriod"/>
             </a:pPr>
             <a:r>
@@ -11236,7 +9770,7 @@
             </a:r>
           </a:p>
           <a:p>
-            <a:pPr lvl="1" indent="-457200" marL="914400">
+            <a:pPr lvl="1" indent="-342900" marL="685800">
               <a:buAutoNum type="arabicPeriod"/>
             </a:pPr>
             <a:r>
@@ -11245,7 +9779,7 @@
             </a:r>
           </a:p>
           <a:p>
-            <a:pPr lvl="1" indent="-457200" marL="914400">
+            <a:pPr lvl="1" indent="-342900" marL="685800">
               <a:buAutoNum type="arabicPeriod"/>
             </a:pPr>
             <a:r>
@@ -11285,40 +9819,6 @@
               <a:rPr/>
               <a:t> depends on the citation format.</a:t>
             </a:r>
-          </a:p>
-        </p:txBody>
-      </p:sp>
-      <p:sp>
-        <p:nvSpPr>
-          <p:cNvPr id="6" name="Slide Number Placeholder 5">
-            <a:extLst>
-              <a:ext uri="{FF2B5EF4-FFF2-40B4-BE49-F238E27FC236}">
-                <a16:creationId xmlns:a16="http://schemas.microsoft.com/office/drawing/2014/main" id="{5F33F24B-1A9E-2EAF-F2AB-89426454DEE9}"/>
-              </a:ext>
-            </a:extLst>
-          </p:cNvPr>
-          <p:cNvSpPr>
-            <a:spLocks noGrp="1"/>
-          </p:cNvSpPr>
-          <p:nvPr>
-            <p:ph idx="12" sz="quarter" type="sldNum"/>
-          </p:nvPr>
-        </p:nvSpPr>
-        <p:spPr>
-          <a:xfrm>
-            <a:off x="8610599" y="6356350"/>
-            <a:ext cx="3135001" cy="365125"/>
-          </a:xfrm>
-        </p:spPr>
-        <p:txBody>
-          <a:bodyPr/>
-          <a:lstStyle/>
-          <a:p>
-            <a:fld id="{7FEFBAB6-26D0-44D8-BD53-612461CE1ACC}" type="slidenum">
-              <a:rPr lang="de-DE" smtClean="0"/>
-              <a:t>‹#›</a:t>
-            </a:fld>
-            <a:endParaRPr lang="de-DE"/>
           </a:p>
         </p:txBody>
       </p:sp>
@@ -11346,13 +9846,7 @@
       </p:grpSpPr>
       <p:sp>
         <p:nvSpPr>
-          <p:cNvPr id="2" name="Title 1">
-            <a:extLst>
-              <a:ext uri="{FF2B5EF4-FFF2-40B4-BE49-F238E27FC236}">
-                <a16:creationId xmlns:a16="http://schemas.microsoft.com/office/drawing/2014/main" id="{6BF04AE0-F94F-A586-34B8-68D9CAB6C6D1}"/>
-              </a:ext>
-            </a:extLst>
-          </p:cNvPr>
+          <p:cNvPr id="2" name="Title 1"/>
           <p:cNvSpPr>
             <a:spLocks noGrp="1"/>
           </p:cNvSpPr>
@@ -11360,12 +9854,7 @@
             <p:ph type="title"/>
           </p:nvPr>
         </p:nvSpPr>
-        <p:spPr>
-          <a:xfrm>
-            <a:off x="2295524" y="432532"/>
-            <a:ext cx="9450077" cy="825501"/>
-          </a:xfrm>
-        </p:spPr>
+        <p:spPr/>
         <p:txBody>
           <a:bodyPr/>
           <a:lstStyle/>
@@ -11391,8 +9880,8 @@
           </p:nvPr>
         </p:nvGraphicFramePr>
         <p:xfrm>
-          <a:off x="444500" y="1511300"/>
-          <a:ext cx="11290300" cy="4660900"/>
+          <a:off x="457200" y="1193800"/>
+          <a:ext cx="8229600" cy="3390900"/>
         </p:xfrm>
         <a:graphic>
           <a:graphicData uri="http://schemas.openxmlformats.org/drawingml/2006/table">
@@ -11401,10 +9890,10 @@
                 <a:tableStyleId>{5C22544A-7EE6-4342-B048-85BDC9FD1C3A}</a:tableStyleId>
               </a:tblPr>
               <a:tblGrid>
-                <a:gridCol w="1206500"/>
-                <a:gridCol w="2197100"/>
-                <a:gridCol w="1371600"/>
-                <a:gridCol w="6527800"/>
+                <a:gridCol w="876300"/>
+                <a:gridCol w="1600200"/>
+                <a:gridCol w="1003300"/>
+                <a:gridCol w="4749800"/>
               </a:tblGrid>
               <a:tr h="0">
                 <a:tc>
@@ -11680,40 +10169,6 @@
           </a:graphicData>
         </a:graphic>
       </p:graphicFrame>
-      <p:sp>
-        <p:nvSpPr>
-          <p:cNvPr id="6" name="Slide Number Placeholder 5">
-            <a:extLst>
-              <a:ext uri="{FF2B5EF4-FFF2-40B4-BE49-F238E27FC236}">
-                <a16:creationId xmlns:a16="http://schemas.microsoft.com/office/drawing/2014/main" id="{5F33F24B-1A9E-2EAF-F2AB-89426454DEE9}"/>
-              </a:ext>
-            </a:extLst>
-          </p:cNvPr>
-          <p:cNvSpPr>
-            <a:spLocks noGrp="1"/>
-          </p:cNvSpPr>
-          <p:nvPr>
-            <p:ph idx="12" sz="quarter" type="sldNum"/>
-          </p:nvPr>
-        </p:nvSpPr>
-        <p:spPr>
-          <a:xfrm>
-            <a:off x="8610599" y="6356350"/>
-            <a:ext cx="3135001" cy="365125"/>
-          </a:xfrm>
-        </p:spPr>
-        <p:txBody>
-          <a:bodyPr/>
-          <a:lstStyle/>
-          <a:p>
-            <a:fld id="{7FEFBAB6-26D0-44D8-BD53-612461CE1ACC}" type="slidenum">
-              <a:rPr lang="de-DE" smtClean="0"/>
-              <a:t>‹#›</a:t>
-            </a:fld>
-            <a:endParaRPr lang="de-DE"/>
-          </a:p>
-        </p:txBody>
-      </p:sp>
     </p:spTree>
   </p:cSld>
 </p:sld>
@@ -11738,13 +10193,7 @@
       </p:grpSpPr>
       <p:sp>
         <p:nvSpPr>
-          <p:cNvPr id="2" name="Title 1">
-            <a:extLst>
-              <a:ext uri="{FF2B5EF4-FFF2-40B4-BE49-F238E27FC236}">
-                <a16:creationId xmlns:a16="http://schemas.microsoft.com/office/drawing/2014/main" id="{6BF04AE0-F94F-A586-34B8-68D9CAB6C6D1}"/>
-              </a:ext>
-            </a:extLst>
-          </p:cNvPr>
+          <p:cNvPr id="2" name="Title 1"/>
           <p:cNvSpPr>
             <a:spLocks noGrp="1"/>
           </p:cNvSpPr>
@@ -11752,12 +10201,7 @@
             <p:ph type="title"/>
           </p:nvPr>
         </p:nvSpPr>
-        <p:spPr>
-          <a:xfrm>
-            <a:off x="2295524" y="432532"/>
-            <a:ext cx="9450077" cy="825501"/>
-          </a:xfrm>
-        </p:spPr>
+        <p:spPr/>
         <p:txBody>
           <a:bodyPr/>
           <a:lstStyle/>
@@ -11783,8 +10227,8 @@
           </p:nvPr>
         </p:nvGraphicFramePr>
         <p:xfrm>
-          <a:off x="444500" y="1511300"/>
-          <a:ext cx="11290300" cy="4660900"/>
+          <a:off x="457200" y="1193800"/>
+          <a:ext cx="8229600" cy="3390900"/>
         </p:xfrm>
         <a:graphic>
           <a:graphicData uri="http://schemas.openxmlformats.org/drawingml/2006/table">
@@ -11793,10 +10237,10 @@
                 <a:tableStyleId>{5C22544A-7EE6-4342-B048-85BDC9FD1C3A}</a:tableStyleId>
               </a:tblPr>
               <a:tblGrid>
-                <a:gridCol w="1206500"/>
-                <a:gridCol w="2197100"/>
-                <a:gridCol w="1371600"/>
-                <a:gridCol w="6527800"/>
+                <a:gridCol w="876300"/>
+                <a:gridCol w="1600200"/>
+                <a:gridCol w="1003300"/>
+                <a:gridCol w="4749800"/>
               </a:tblGrid>
               <a:tr h="0">
                 <a:tc>
@@ -12000,40 +10444,6 @@
           </a:graphicData>
         </a:graphic>
       </p:graphicFrame>
-      <p:sp>
-        <p:nvSpPr>
-          <p:cNvPr id="6" name="Slide Number Placeholder 5">
-            <a:extLst>
-              <a:ext uri="{FF2B5EF4-FFF2-40B4-BE49-F238E27FC236}">
-                <a16:creationId xmlns:a16="http://schemas.microsoft.com/office/drawing/2014/main" id="{5F33F24B-1A9E-2EAF-F2AB-89426454DEE9}"/>
-              </a:ext>
-            </a:extLst>
-          </p:cNvPr>
-          <p:cNvSpPr>
-            <a:spLocks noGrp="1"/>
-          </p:cNvSpPr>
-          <p:nvPr>
-            <p:ph idx="12" sz="quarter" type="sldNum"/>
-          </p:nvPr>
-        </p:nvSpPr>
-        <p:spPr>
-          <a:xfrm>
-            <a:off x="8610599" y="6356350"/>
-            <a:ext cx="3135001" cy="365125"/>
-          </a:xfrm>
-        </p:spPr>
-        <p:txBody>
-          <a:bodyPr/>
-          <a:lstStyle/>
-          <a:p>
-            <a:fld id="{7FEFBAB6-26D0-44D8-BD53-612461CE1ACC}" type="slidenum">
-              <a:rPr lang="de-DE" smtClean="0"/>
-              <a:t>‹#›</a:t>
-            </a:fld>
-            <a:endParaRPr lang="de-DE"/>
-          </a:p>
-        </p:txBody>
-      </p:sp>
     </p:spTree>
   </p:cSld>
 </p:sld>
@@ -12058,13 +10468,7 @@
       </p:grpSpPr>
       <p:sp>
         <p:nvSpPr>
-          <p:cNvPr id="2" name="Title 1">
-            <a:extLst>
-              <a:ext uri="{FF2B5EF4-FFF2-40B4-BE49-F238E27FC236}">
-                <a16:creationId xmlns:a16="http://schemas.microsoft.com/office/drawing/2014/main" id="{6BF04AE0-F94F-A586-34B8-68D9CAB6C6D1}"/>
-              </a:ext>
-            </a:extLst>
-          </p:cNvPr>
+          <p:cNvPr id="2" name="Title 1"/>
           <p:cNvSpPr>
             <a:spLocks noGrp="1"/>
           </p:cNvSpPr>
@@ -12072,12 +10476,7 @@
             <p:ph type="title"/>
           </p:nvPr>
         </p:nvSpPr>
-        <p:spPr>
-          <a:xfrm>
-            <a:off x="2295524" y="432532"/>
-            <a:ext cx="9450077" cy="825501"/>
-          </a:xfrm>
-        </p:spPr>
+        <p:spPr/>
         <p:txBody>
           <a:bodyPr/>
           <a:lstStyle/>
@@ -12094,13 +10493,7 @@
       </p:sp>
       <p:sp>
         <p:nvSpPr>
-          <p:cNvPr id="3" name="Content Placeholder 2">
-            <a:extLst>
-              <a:ext uri="{FF2B5EF4-FFF2-40B4-BE49-F238E27FC236}">
-                <a16:creationId xmlns:a16="http://schemas.microsoft.com/office/drawing/2014/main" id="{372FA590-20E9-0368-85B4-90C26598F852}"/>
-              </a:ext>
-            </a:extLst>
-          </p:cNvPr>
+          <p:cNvPr id="3" name="Content Placeholder 2"/>
           <p:cNvSpPr>
             <a:spLocks noGrp="1"/>
           </p:cNvSpPr>
@@ -12128,40 +10521,6 @@
               <a:rPr/>
               <a:t>.</a:t>
             </a:r>
-          </a:p>
-        </p:txBody>
-      </p:sp>
-      <p:sp>
-        <p:nvSpPr>
-          <p:cNvPr id="6" name="Slide Number Placeholder 5">
-            <a:extLst>
-              <a:ext uri="{FF2B5EF4-FFF2-40B4-BE49-F238E27FC236}">
-                <a16:creationId xmlns:a16="http://schemas.microsoft.com/office/drawing/2014/main" id="{5F33F24B-1A9E-2EAF-F2AB-89426454DEE9}"/>
-              </a:ext>
-            </a:extLst>
-          </p:cNvPr>
-          <p:cNvSpPr>
-            <a:spLocks noGrp="1"/>
-          </p:cNvSpPr>
-          <p:nvPr>
-            <p:ph idx="12" sz="quarter" type="sldNum"/>
-          </p:nvPr>
-        </p:nvSpPr>
-        <p:spPr>
-          <a:xfrm>
-            <a:off x="8610599" y="6356350"/>
-            <a:ext cx="3135001" cy="365125"/>
-          </a:xfrm>
-        </p:spPr>
-        <p:txBody>
-          <a:bodyPr/>
-          <a:lstStyle/>
-          <a:p>
-            <a:fld id="{7FEFBAB6-26D0-44D8-BD53-612461CE1ACC}" type="slidenum">
-              <a:rPr lang="de-DE" smtClean="0"/>
-              <a:t>‹#›</a:t>
-            </a:fld>
-            <a:endParaRPr lang="de-DE"/>
           </a:p>
         </p:txBody>
       </p:sp>
@@ -12189,13 +10548,7 @@
       </p:grpSpPr>
       <p:sp>
         <p:nvSpPr>
-          <p:cNvPr id="2" name="Title 1">
-            <a:extLst>
-              <a:ext uri="{FF2B5EF4-FFF2-40B4-BE49-F238E27FC236}">
-                <a16:creationId xmlns:a16="http://schemas.microsoft.com/office/drawing/2014/main" id="{6BF04AE0-F94F-A586-34B8-68D9CAB6C6D1}"/>
-              </a:ext>
-            </a:extLst>
-          </p:cNvPr>
+          <p:cNvPr id="2" name="Title 1"/>
           <p:cNvSpPr>
             <a:spLocks noGrp="1"/>
           </p:cNvSpPr>
@@ -12203,12 +10556,7 @@
             <p:ph type="title"/>
           </p:nvPr>
         </p:nvSpPr>
-        <p:spPr>
-          <a:xfrm>
-            <a:off x="2295524" y="432532"/>
-            <a:ext cx="9450077" cy="825501"/>
-          </a:xfrm>
-        </p:spPr>
+        <p:spPr/>
         <p:txBody>
           <a:bodyPr/>
           <a:lstStyle/>
@@ -12225,13 +10573,7 @@
       </p:sp>
       <p:sp>
         <p:nvSpPr>
-          <p:cNvPr id="3" name="Content Placeholder 2">
-            <a:extLst>
-              <a:ext uri="{FF2B5EF4-FFF2-40B4-BE49-F238E27FC236}">
-                <a16:creationId xmlns:a16="http://schemas.microsoft.com/office/drawing/2014/main" id="{372FA590-20E9-0368-85B4-90C26598F852}"/>
-              </a:ext>
-            </a:extLst>
-          </p:cNvPr>
+          <p:cNvPr id="3" name="Content Placeholder 2"/>
           <p:cNvSpPr>
             <a:spLocks noGrp="1"/>
           </p:cNvSpPr>
@@ -12310,40 +10652,6 @@
               </a:rPr>
               <a:t>https://www.citavi.com</a:t>
             </a:r>
-          </a:p>
-        </p:txBody>
-      </p:sp>
-      <p:sp>
-        <p:nvSpPr>
-          <p:cNvPr id="6" name="Slide Number Placeholder 5">
-            <a:extLst>
-              <a:ext uri="{FF2B5EF4-FFF2-40B4-BE49-F238E27FC236}">
-                <a16:creationId xmlns:a16="http://schemas.microsoft.com/office/drawing/2014/main" id="{5F33F24B-1A9E-2EAF-F2AB-89426454DEE9}"/>
-              </a:ext>
-            </a:extLst>
-          </p:cNvPr>
-          <p:cNvSpPr>
-            <a:spLocks noGrp="1"/>
-          </p:cNvSpPr>
-          <p:nvPr>
-            <p:ph idx="12" sz="quarter" type="sldNum"/>
-          </p:nvPr>
-        </p:nvSpPr>
-        <p:spPr>
-          <a:xfrm>
-            <a:off x="8610599" y="6356350"/>
-            <a:ext cx="3135001" cy="365125"/>
-          </a:xfrm>
-        </p:spPr>
-        <p:txBody>
-          <a:bodyPr/>
-          <a:lstStyle/>
-          <a:p>
-            <a:fld id="{7FEFBAB6-26D0-44D8-BD53-612461CE1ACC}" type="slidenum">
-              <a:rPr lang="de-DE" smtClean="0"/>
-              <a:t>‹#›</a:t>
-            </a:fld>
-            <a:endParaRPr lang="de-DE"/>
           </a:p>
         </p:txBody>
       </p:sp>
@@ -12371,13 +10679,7 @@
       </p:grpSpPr>
       <p:sp>
         <p:nvSpPr>
-          <p:cNvPr id="2" name="Title 1">
-            <a:extLst>
-              <a:ext uri="{FF2B5EF4-FFF2-40B4-BE49-F238E27FC236}">
-                <a16:creationId xmlns:a16="http://schemas.microsoft.com/office/drawing/2014/main" id="{6BF04AE0-F94F-A586-34B8-68D9CAB6C6D1}"/>
-              </a:ext>
-            </a:extLst>
-          </p:cNvPr>
+          <p:cNvPr id="2" name="Title 1"/>
           <p:cNvSpPr>
             <a:spLocks noGrp="1"/>
           </p:cNvSpPr>
@@ -12385,12 +10687,7 @@
             <p:ph type="title"/>
           </p:nvPr>
         </p:nvSpPr>
-        <p:spPr>
-          <a:xfrm>
-            <a:off x="2295524" y="432532"/>
-            <a:ext cx="9450077" cy="825501"/>
-          </a:xfrm>
-        </p:spPr>
+        <p:spPr/>
         <p:txBody>
           <a:bodyPr/>
           <a:lstStyle/>
@@ -12407,13 +10704,7 @@
       </p:sp>
       <p:sp>
         <p:nvSpPr>
-          <p:cNvPr id="3" name="Content Placeholder 2">
-            <a:extLst>
-              <a:ext uri="{FF2B5EF4-FFF2-40B4-BE49-F238E27FC236}">
-                <a16:creationId xmlns:a16="http://schemas.microsoft.com/office/drawing/2014/main" id="{372FA590-20E9-0368-85B4-90C26598F852}"/>
-              </a:ext>
-            </a:extLst>
-          </p:cNvPr>
+          <p:cNvPr id="3" name="Content Placeholder 2"/>
           <p:cNvSpPr>
             <a:spLocks noGrp="1"/>
           </p:cNvSpPr>
@@ -12516,40 +10807,6 @@
               <a:rPr/>
               <a:t>, e.g., pdfs, notes, snapshots, urls</a:t>
             </a:r>
-          </a:p>
-        </p:txBody>
-      </p:sp>
-      <p:sp>
-        <p:nvSpPr>
-          <p:cNvPr id="6" name="Slide Number Placeholder 5">
-            <a:extLst>
-              <a:ext uri="{FF2B5EF4-FFF2-40B4-BE49-F238E27FC236}">
-                <a16:creationId xmlns:a16="http://schemas.microsoft.com/office/drawing/2014/main" id="{5F33F24B-1A9E-2EAF-F2AB-89426454DEE9}"/>
-              </a:ext>
-            </a:extLst>
-          </p:cNvPr>
-          <p:cNvSpPr>
-            <a:spLocks noGrp="1"/>
-          </p:cNvSpPr>
-          <p:nvPr>
-            <p:ph idx="12" sz="quarter" type="sldNum"/>
-          </p:nvPr>
-        </p:nvSpPr>
-        <p:spPr>
-          <a:xfrm>
-            <a:off x="8610599" y="6356350"/>
-            <a:ext cx="3135001" cy="365125"/>
-          </a:xfrm>
-        </p:spPr>
-        <p:txBody>
-          <a:bodyPr/>
-          <a:lstStyle/>
-          <a:p>
-            <a:fld id="{7FEFBAB6-26D0-44D8-BD53-612461CE1ACC}" type="slidenum">
-              <a:rPr lang="de-DE" smtClean="0"/>
-              <a:t>‹#›</a:t>
-            </a:fld>
-            <a:endParaRPr lang="de-DE"/>
           </a:p>
         </p:txBody>
       </p:sp>
@@ -12904,13 +11161,7 @@
       </p:grpSpPr>
       <p:sp>
         <p:nvSpPr>
-          <p:cNvPr id="2" name="Title 1">
-            <a:extLst>
-              <a:ext uri="{FF2B5EF4-FFF2-40B4-BE49-F238E27FC236}">
-                <a16:creationId xmlns:a16="http://schemas.microsoft.com/office/drawing/2014/main" id="{6BF04AE0-F94F-A586-34B8-68D9CAB6C6D1}"/>
-              </a:ext>
-            </a:extLst>
-          </p:cNvPr>
+          <p:cNvPr id="2" name="Title 1"/>
           <p:cNvSpPr>
             <a:spLocks noGrp="1"/>
           </p:cNvSpPr>
@@ -12918,12 +11169,7 @@
             <p:ph type="title"/>
           </p:nvPr>
         </p:nvSpPr>
-        <p:spPr>
-          <a:xfrm>
-            <a:off x="2295524" y="432532"/>
-            <a:ext cx="9450077" cy="825501"/>
-          </a:xfrm>
-        </p:spPr>
+        <p:spPr/>
         <p:txBody>
           <a:bodyPr/>
           <a:lstStyle/>
@@ -12935,40 +11181,6 @@
               <a:rPr/>
               <a:t>Questions at this point?</a:t>
             </a:r>
-          </a:p>
-        </p:txBody>
-      </p:sp>
-      <p:sp>
-        <p:nvSpPr>
-          <p:cNvPr id="6" name="Slide Number Placeholder 5">
-            <a:extLst>
-              <a:ext uri="{FF2B5EF4-FFF2-40B4-BE49-F238E27FC236}">
-                <a16:creationId xmlns:a16="http://schemas.microsoft.com/office/drawing/2014/main" id="{5F33F24B-1A9E-2EAF-F2AB-89426454DEE9}"/>
-              </a:ext>
-            </a:extLst>
-          </p:cNvPr>
-          <p:cNvSpPr>
-            <a:spLocks noGrp="1"/>
-          </p:cNvSpPr>
-          <p:nvPr>
-            <p:ph idx="12" sz="quarter" type="sldNum"/>
-          </p:nvPr>
-        </p:nvSpPr>
-        <p:spPr>
-          <a:xfrm>
-            <a:off x="8610599" y="6356350"/>
-            <a:ext cx="3135001" cy="365125"/>
-          </a:xfrm>
-        </p:spPr>
-        <p:txBody>
-          <a:bodyPr/>
-          <a:lstStyle/>
-          <a:p>
-            <a:fld id="{7FEFBAB6-26D0-44D8-BD53-612461CE1ACC}" type="slidenum">
-              <a:rPr lang="de-DE" smtClean="0"/>
-              <a:t>‹#›</a:t>
-            </a:fld>
-            <a:endParaRPr lang="de-DE"/>
           </a:p>
         </p:txBody>
       </p:sp>
@@ -12996,13 +11208,7 @@
       </p:grpSpPr>
       <p:sp>
         <p:nvSpPr>
-          <p:cNvPr id="2" name="Title 1">
-            <a:extLst>
-              <a:ext uri="{FF2B5EF4-FFF2-40B4-BE49-F238E27FC236}">
-                <a16:creationId xmlns:a16="http://schemas.microsoft.com/office/drawing/2014/main" id="{125F7DD1-BC99-F967-7E0D-AD07C61B1543}"/>
-              </a:ext>
-            </a:extLst>
-          </p:cNvPr>
+          <p:cNvPr id="2" name="Title 1"/>
           <p:cNvSpPr>
             <a:spLocks noGrp="1"/>
           </p:cNvSpPr>
@@ -13012,8 +11218,8 @@
         </p:nvSpPr>
         <p:spPr>
           <a:xfrm>
-            <a:off x="831850" y="1709738"/>
-            <a:ext cx="10515600" cy="2852737"/>
+            <a:off x="722313" y="3305176"/>
+            <a:ext cx="7772400" cy="1021556"/>
           </a:xfrm>
         </p:spPr>
         <p:txBody>
@@ -13027,40 +11233,6 @@
               <a:rPr/>
               <a:t>Brief overview of Zotero</a:t>
             </a:r>
-          </a:p>
-        </p:txBody>
-      </p:sp>
-      <p:sp>
-        <p:nvSpPr>
-          <p:cNvPr id="6" name="Slide Number Placeholder 5">
-            <a:extLst>
-              <a:ext uri="{FF2B5EF4-FFF2-40B4-BE49-F238E27FC236}">
-                <a16:creationId xmlns:a16="http://schemas.microsoft.com/office/drawing/2014/main" id="{B93C94A4-D223-C226-398A-59B1A3955C6C}"/>
-              </a:ext>
-            </a:extLst>
-          </p:cNvPr>
-          <p:cNvSpPr>
-            <a:spLocks noGrp="1"/>
-          </p:cNvSpPr>
-          <p:nvPr>
-            <p:ph idx="12" sz="quarter" type="sldNum"/>
-          </p:nvPr>
-        </p:nvSpPr>
-        <p:spPr>
-          <a:xfrm>
-            <a:off x="8610599" y="6356350"/>
-            <a:ext cx="3135001" cy="365125"/>
-          </a:xfrm>
-        </p:spPr>
-        <p:txBody>
-          <a:bodyPr/>
-          <a:lstStyle/>
-          <a:p>
-            <a:fld id="{7FEFBAB6-26D0-44D8-BD53-612461CE1ACC}" type="slidenum">
-              <a:rPr lang="de-DE" smtClean="0"/>
-              <a:t>‹#›</a:t>
-            </a:fld>
-            <a:endParaRPr lang="de-DE"/>
           </a:p>
         </p:txBody>
       </p:sp>
@@ -13088,13 +11260,7 @@
       </p:grpSpPr>
       <p:sp>
         <p:nvSpPr>
-          <p:cNvPr id="2" name="Title 1">
-            <a:extLst>
-              <a:ext uri="{FF2B5EF4-FFF2-40B4-BE49-F238E27FC236}">
-                <a16:creationId xmlns:a16="http://schemas.microsoft.com/office/drawing/2014/main" id="{6BF04AE0-F94F-A586-34B8-68D9CAB6C6D1}"/>
-              </a:ext>
-            </a:extLst>
-          </p:cNvPr>
+          <p:cNvPr id="2" name="Title 1"/>
           <p:cNvSpPr>
             <a:spLocks noGrp="1"/>
           </p:cNvSpPr>
@@ -13102,12 +11268,7 @@
             <p:ph type="title"/>
           </p:nvPr>
         </p:nvSpPr>
-        <p:spPr>
-          <a:xfrm>
-            <a:off x="2295524" y="432532"/>
-            <a:ext cx="9450077" cy="825501"/>
-          </a:xfrm>
-        </p:spPr>
+        <p:spPr/>
         <p:txBody>
           <a:bodyPr/>
           <a:lstStyle/>
@@ -13124,13 +11285,7 @@
       </p:sp>
       <p:sp>
         <p:nvSpPr>
-          <p:cNvPr id="3" name="Content Placeholder 2">
-            <a:extLst>
-              <a:ext uri="{FF2B5EF4-FFF2-40B4-BE49-F238E27FC236}">
-                <a16:creationId xmlns:a16="http://schemas.microsoft.com/office/drawing/2014/main" id="{372FA590-20E9-0368-85B4-90C26598F852}"/>
-              </a:ext>
-            </a:extLst>
-          </p:cNvPr>
+          <p:cNvPr id="3" name="Content Placeholder 2"/>
           <p:cNvSpPr>
             <a:spLocks noGrp="1"/>
           </p:cNvSpPr>
@@ -13174,40 +11329,6 @@
               <a:rPr/>
               <a:t>: Plugins for Word, Quarto, and Google Docs generate in‑text citations and bibliographies automatically.</a:t>
             </a:r>
-          </a:p>
-        </p:txBody>
-      </p:sp>
-      <p:sp>
-        <p:nvSpPr>
-          <p:cNvPr id="6" name="Slide Number Placeholder 5">
-            <a:extLst>
-              <a:ext uri="{FF2B5EF4-FFF2-40B4-BE49-F238E27FC236}">
-                <a16:creationId xmlns:a16="http://schemas.microsoft.com/office/drawing/2014/main" id="{5F33F24B-1A9E-2EAF-F2AB-89426454DEE9}"/>
-              </a:ext>
-            </a:extLst>
-          </p:cNvPr>
-          <p:cNvSpPr>
-            <a:spLocks noGrp="1"/>
-          </p:cNvSpPr>
-          <p:nvPr>
-            <p:ph idx="12" sz="quarter" type="sldNum"/>
-          </p:nvPr>
-        </p:nvSpPr>
-        <p:spPr>
-          <a:xfrm>
-            <a:off x="8610599" y="6356350"/>
-            <a:ext cx="3135001" cy="365125"/>
-          </a:xfrm>
-        </p:spPr>
-        <p:txBody>
-          <a:bodyPr/>
-          <a:lstStyle/>
-          <a:p>
-            <a:fld id="{7FEFBAB6-26D0-44D8-BD53-612461CE1ACC}" type="slidenum">
-              <a:rPr lang="de-DE" smtClean="0"/>
-              <a:t>‹#›</a:t>
-            </a:fld>
-            <a:endParaRPr lang="de-DE"/>
           </a:p>
         </p:txBody>
       </p:sp>
@@ -13415,13 +11536,7 @@
       </p:grpSpPr>
       <p:sp>
         <p:nvSpPr>
-          <p:cNvPr id="2" name="Title 1">
-            <a:extLst>
-              <a:ext uri="{FF2B5EF4-FFF2-40B4-BE49-F238E27FC236}">
-                <a16:creationId xmlns:a16="http://schemas.microsoft.com/office/drawing/2014/main" id="{125F7DD1-BC99-F967-7E0D-AD07C61B1543}"/>
-              </a:ext>
-            </a:extLst>
-          </p:cNvPr>
+          <p:cNvPr id="2" name="Title 1"/>
           <p:cNvSpPr>
             <a:spLocks noGrp="1"/>
           </p:cNvSpPr>
@@ -13431,8 +11546,8 @@
         </p:nvSpPr>
         <p:spPr>
           <a:xfrm>
-            <a:off x="831850" y="1709738"/>
-            <a:ext cx="10515600" cy="2852737"/>
+            <a:off x="722313" y="3305176"/>
+            <a:ext cx="7772400" cy="1021556"/>
           </a:xfrm>
         </p:spPr>
         <p:txBody>
@@ -13446,40 +11561,6 @@
               <a:rPr/>
               <a:t>Section Header?</a:t>
             </a:r>
-          </a:p>
-        </p:txBody>
-      </p:sp>
-      <p:sp>
-        <p:nvSpPr>
-          <p:cNvPr id="6" name="Slide Number Placeholder 5">
-            <a:extLst>
-              <a:ext uri="{FF2B5EF4-FFF2-40B4-BE49-F238E27FC236}">
-                <a16:creationId xmlns:a16="http://schemas.microsoft.com/office/drawing/2014/main" id="{B93C94A4-D223-C226-398A-59B1A3955C6C}"/>
-              </a:ext>
-            </a:extLst>
-          </p:cNvPr>
-          <p:cNvSpPr>
-            <a:spLocks noGrp="1"/>
-          </p:cNvSpPr>
-          <p:nvPr>
-            <p:ph idx="12" sz="quarter" type="sldNum"/>
-          </p:nvPr>
-        </p:nvSpPr>
-        <p:spPr>
-          <a:xfrm>
-            <a:off x="8610599" y="6356350"/>
-            <a:ext cx="3135001" cy="365125"/>
-          </a:xfrm>
-        </p:spPr>
-        <p:txBody>
-          <a:bodyPr/>
-          <a:lstStyle/>
-          <a:p>
-            <a:fld id="{7FEFBAB6-26D0-44D8-BD53-612461CE1ACC}" type="slidenum">
-              <a:rPr lang="de-DE" smtClean="0"/>
-              <a:t>‹#›</a:t>
-            </a:fld>
-            <a:endParaRPr lang="de-DE"/>
           </a:p>
         </p:txBody>
       </p:sp>
@@ -13507,13 +11588,7 @@
       </p:grpSpPr>
       <p:sp>
         <p:nvSpPr>
-          <p:cNvPr id="2" name="Title 1">
-            <a:extLst>
-              <a:ext uri="{FF2B5EF4-FFF2-40B4-BE49-F238E27FC236}">
-                <a16:creationId xmlns:a16="http://schemas.microsoft.com/office/drawing/2014/main" id="{6BF04AE0-F94F-A586-34B8-68D9CAB6C6D1}"/>
-              </a:ext>
-            </a:extLst>
-          </p:cNvPr>
+          <p:cNvPr id="2" name="Title 1"/>
           <p:cNvSpPr>
             <a:spLocks noGrp="1"/>
           </p:cNvSpPr>
@@ -13521,12 +11596,7 @@
             <p:ph type="title"/>
           </p:nvPr>
         </p:nvSpPr>
-        <p:spPr>
-          <a:xfrm>
-            <a:off x="2295524" y="432532"/>
-            <a:ext cx="9450077" cy="825501"/>
-          </a:xfrm>
-        </p:spPr>
+        <p:spPr/>
         <p:txBody>
           <a:bodyPr/>
           <a:lstStyle/>
@@ -13557,8 +11627,8 @@
         </p:blipFill>
         <p:spPr bwMode="auto">
           <a:xfrm>
-            <a:off x="2184400" y="1511300"/>
-            <a:ext cx="7810500" cy="4660900"/>
+            <a:off x="1727200" y="1193800"/>
+            <a:ext cx="5676900" cy="3390900"/>
           </a:xfrm>
           <a:prstGeom prst="rect">
             <a:avLst/>
@@ -13571,40 +11641,6 @@
           </a:ln>
         </p:spPr>
       </p:pic>
-      <p:sp>
-        <p:nvSpPr>
-          <p:cNvPr id="6" name="Slide Number Placeholder 5">
-            <a:extLst>
-              <a:ext uri="{FF2B5EF4-FFF2-40B4-BE49-F238E27FC236}">
-                <a16:creationId xmlns:a16="http://schemas.microsoft.com/office/drawing/2014/main" id="{5F33F24B-1A9E-2EAF-F2AB-89426454DEE9}"/>
-              </a:ext>
-            </a:extLst>
-          </p:cNvPr>
-          <p:cNvSpPr>
-            <a:spLocks noGrp="1"/>
-          </p:cNvSpPr>
-          <p:nvPr>
-            <p:ph idx="12" sz="quarter" type="sldNum"/>
-          </p:nvPr>
-        </p:nvSpPr>
-        <p:spPr>
-          <a:xfrm>
-            <a:off x="8610599" y="6356350"/>
-            <a:ext cx="3135001" cy="365125"/>
-          </a:xfrm>
-        </p:spPr>
-        <p:txBody>
-          <a:bodyPr/>
-          <a:lstStyle/>
-          <a:p>
-            <a:fld id="{7FEFBAB6-26D0-44D8-BD53-612461CE1ACC}" type="slidenum">
-              <a:rPr lang="de-DE" smtClean="0"/>
-              <a:t>‹#›</a:t>
-            </a:fld>
-            <a:endParaRPr lang="de-DE"/>
-          </a:p>
-        </p:txBody>
-      </p:sp>
     </p:spTree>
   </p:cSld>
 </p:sld>
@@ -13629,13 +11665,7 @@
       </p:grpSpPr>
       <p:sp>
         <p:nvSpPr>
-          <p:cNvPr id="2" name="Title 1">
-            <a:extLst>
-              <a:ext uri="{FF2B5EF4-FFF2-40B4-BE49-F238E27FC236}">
-                <a16:creationId xmlns:a16="http://schemas.microsoft.com/office/drawing/2014/main" id="{6BF04AE0-F94F-A586-34B8-68D9CAB6C6D1}"/>
-              </a:ext>
-            </a:extLst>
-          </p:cNvPr>
+          <p:cNvPr id="2" name="Title 1"/>
           <p:cNvSpPr>
             <a:spLocks noGrp="1"/>
           </p:cNvSpPr>
@@ -13643,12 +11673,7 @@
             <p:ph type="title"/>
           </p:nvPr>
         </p:nvSpPr>
-        <p:spPr>
-          <a:xfrm>
-            <a:off x="2295524" y="432532"/>
-            <a:ext cx="9450077" cy="825501"/>
-          </a:xfrm>
-        </p:spPr>
+        <p:spPr/>
         <p:txBody>
           <a:bodyPr/>
           <a:lstStyle/>
@@ -13665,13 +11690,7 @@
       </p:sp>
       <p:sp>
         <p:nvSpPr>
-          <p:cNvPr id="3" name="Content Placeholder 2">
-            <a:extLst>
-              <a:ext uri="{FF2B5EF4-FFF2-40B4-BE49-F238E27FC236}">
-                <a16:creationId xmlns:a16="http://schemas.microsoft.com/office/drawing/2014/main" id="{372FA590-20E9-0368-85B4-90C26598F852}"/>
-              </a:ext>
-            </a:extLst>
-          </p:cNvPr>
+          <p:cNvPr id="3" name="Content Placeholder 2"/>
           <p:cNvSpPr>
             <a:spLocks noGrp="1"/>
           </p:cNvSpPr>
@@ -13767,40 +11786,6 @@
               <a:rPr/>
               <a:t> at the end of this session and discuss any remaining questions.</a:t>
             </a:r>
-          </a:p>
-        </p:txBody>
-      </p:sp>
-      <p:sp>
-        <p:nvSpPr>
-          <p:cNvPr id="6" name="Slide Number Placeholder 5">
-            <a:extLst>
-              <a:ext uri="{FF2B5EF4-FFF2-40B4-BE49-F238E27FC236}">
-                <a16:creationId xmlns:a16="http://schemas.microsoft.com/office/drawing/2014/main" id="{5F33F24B-1A9E-2EAF-F2AB-89426454DEE9}"/>
-              </a:ext>
-            </a:extLst>
-          </p:cNvPr>
-          <p:cNvSpPr>
-            <a:spLocks noGrp="1"/>
-          </p:cNvSpPr>
-          <p:nvPr>
-            <p:ph idx="12" sz="quarter" type="sldNum"/>
-          </p:nvPr>
-        </p:nvSpPr>
-        <p:spPr>
-          <a:xfrm>
-            <a:off x="8610599" y="6356350"/>
-            <a:ext cx="3135001" cy="365125"/>
-          </a:xfrm>
-        </p:spPr>
-        <p:txBody>
-          <a:bodyPr/>
-          <a:lstStyle/>
-          <a:p>
-            <a:fld id="{7FEFBAB6-26D0-44D8-BD53-612461CE1ACC}" type="slidenum">
-              <a:rPr lang="de-DE" smtClean="0"/>
-              <a:t>‹#›</a:t>
-            </a:fld>
-            <a:endParaRPr lang="de-DE"/>
           </a:p>
         </p:txBody>
       </p:sp>
@@ -13828,13 +11813,7 @@
       </p:grpSpPr>
       <p:sp>
         <p:nvSpPr>
-          <p:cNvPr id="2" name="Title 1">
-            <a:extLst>
-              <a:ext uri="{FF2B5EF4-FFF2-40B4-BE49-F238E27FC236}">
-                <a16:creationId xmlns:a16="http://schemas.microsoft.com/office/drawing/2014/main" id="{6BF04AE0-F94F-A586-34B8-68D9CAB6C6D1}"/>
-              </a:ext>
-            </a:extLst>
-          </p:cNvPr>
+          <p:cNvPr id="2" name="Title 1"/>
           <p:cNvSpPr>
             <a:spLocks noGrp="1"/>
           </p:cNvSpPr>
@@ -13842,12 +11821,7 @@
             <p:ph type="title"/>
           </p:nvPr>
         </p:nvSpPr>
-        <p:spPr>
-          <a:xfrm>
-            <a:off x="2295524" y="432532"/>
-            <a:ext cx="9450077" cy="825501"/>
-          </a:xfrm>
-        </p:spPr>
+        <p:spPr/>
         <p:txBody>
           <a:bodyPr/>
           <a:lstStyle/>
@@ -13864,13 +11838,7 @@
       </p:sp>
       <p:sp>
         <p:nvSpPr>
-          <p:cNvPr id="3" name="Content Placeholder 2">
-            <a:extLst>
-              <a:ext uri="{FF2B5EF4-FFF2-40B4-BE49-F238E27FC236}">
-                <a16:creationId xmlns:a16="http://schemas.microsoft.com/office/drawing/2014/main" id="{372FA590-20E9-0368-85B4-90C26598F852}"/>
-              </a:ext>
-            </a:extLst>
-          </p:cNvPr>
+          <p:cNvPr id="3" name="Content Placeholder 2"/>
           <p:cNvSpPr>
             <a:spLocks noGrp="1"/>
           </p:cNvSpPr>
@@ -13924,40 +11892,6 @@
               <a:rPr/>
               <a:t>How easy has it been navigating different CSL formats?</a:t>
             </a:r>
-          </a:p>
-        </p:txBody>
-      </p:sp>
-      <p:sp>
-        <p:nvSpPr>
-          <p:cNvPr id="6" name="Slide Number Placeholder 5">
-            <a:extLst>
-              <a:ext uri="{FF2B5EF4-FFF2-40B4-BE49-F238E27FC236}">
-                <a16:creationId xmlns:a16="http://schemas.microsoft.com/office/drawing/2014/main" id="{5F33F24B-1A9E-2EAF-F2AB-89426454DEE9}"/>
-              </a:ext>
-            </a:extLst>
-          </p:cNvPr>
-          <p:cNvSpPr>
-            <a:spLocks noGrp="1"/>
-          </p:cNvSpPr>
-          <p:nvPr>
-            <p:ph idx="12" sz="quarter" type="sldNum"/>
-          </p:nvPr>
-        </p:nvSpPr>
-        <p:spPr>
-          <a:xfrm>
-            <a:off x="8610599" y="6356350"/>
-            <a:ext cx="3135001" cy="365125"/>
-          </a:xfrm>
-        </p:spPr>
-        <p:txBody>
-          <a:bodyPr/>
-          <a:lstStyle/>
-          <a:p>
-            <a:fld id="{7FEFBAB6-26D0-44D8-BD53-612461CE1ACC}" type="slidenum">
-              <a:rPr lang="de-DE" smtClean="0"/>
-              <a:t>‹#›</a:t>
-            </a:fld>
-            <a:endParaRPr lang="de-DE"/>
           </a:p>
         </p:txBody>
       </p:sp>
@@ -13985,13 +11919,7 @@
       </p:grpSpPr>
       <p:sp>
         <p:nvSpPr>
-          <p:cNvPr id="2" name="Title 1">
-            <a:extLst>
-              <a:ext uri="{FF2B5EF4-FFF2-40B4-BE49-F238E27FC236}">
-                <a16:creationId xmlns:a16="http://schemas.microsoft.com/office/drawing/2014/main" id="{6BF04AE0-F94F-A586-34B8-68D9CAB6C6D1}"/>
-              </a:ext>
-            </a:extLst>
-          </p:cNvPr>
+          <p:cNvPr id="2" name="Title 1"/>
           <p:cNvSpPr>
             <a:spLocks noGrp="1"/>
           </p:cNvSpPr>
@@ -13999,12 +11927,7 @@
             <p:ph type="title"/>
           </p:nvPr>
         </p:nvSpPr>
-        <p:spPr>
-          <a:xfrm>
-            <a:off x="2295524" y="432532"/>
-            <a:ext cx="9450077" cy="825501"/>
-          </a:xfrm>
-        </p:spPr>
+        <p:spPr/>
         <p:txBody>
           <a:bodyPr/>
           <a:lstStyle/>
@@ -14021,13 +11944,7 @@
       </p:sp>
       <p:sp>
         <p:nvSpPr>
-          <p:cNvPr id="3" name="Content Placeholder 2">
-            <a:extLst>
-              <a:ext uri="{FF2B5EF4-FFF2-40B4-BE49-F238E27FC236}">
-                <a16:creationId xmlns:a16="http://schemas.microsoft.com/office/drawing/2014/main" id="{372FA590-20E9-0368-85B4-90C26598F852}"/>
-              </a:ext>
-            </a:extLst>
-          </p:cNvPr>
+          <p:cNvPr id="3" name="Content Placeholder 2"/>
           <p:cNvSpPr>
             <a:spLocks noGrp="1"/>
           </p:cNvSpPr>
@@ -14040,7 +11957,7 @@
           <a:bodyPr/>
           <a:lstStyle/>
           <a:p>
-            <a:pPr lvl="0" indent="-457200" marL="457200">
+            <a:pPr lvl="0" indent="-342900" marL="342900">
               <a:buAutoNum type="arabicPeriod"/>
             </a:pPr>
             <a:r>
@@ -14094,47 +12011,13 @@
             </a:r>
           </a:p>
           <a:p>
-            <a:pPr lvl="0" indent="-457200" marL="457200">
+            <a:pPr lvl="0" indent="-342900" marL="342900">
               <a:buAutoNum startAt="2" type="arabicPeriod"/>
             </a:pPr>
             <a:r>
               <a:rPr b="1"/>
               <a:t>Share your thoughts with the group.</a:t>
             </a:r>
-          </a:p>
-        </p:txBody>
-      </p:sp>
-      <p:sp>
-        <p:nvSpPr>
-          <p:cNvPr id="6" name="Slide Number Placeholder 5">
-            <a:extLst>
-              <a:ext uri="{FF2B5EF4-FFF2-40B4-BE49-F238E27FC236}">
-                <a16:creationId xmlns:a16="http://schemas.microsoft.com/office/drawing/2014/main" id="{5F33F24B-1A9E-2EAF-F2AB-89426454DEE9}"/>
-              </a:ext>
-            </a:extLst>
-          </p:cNvPr>
-          <p:cNvSpPr>
-            <a:spLocks noGrp="1"/>
-          </p:cNvSpPr>
-          <p:nvPr>
-            <p:ph idx="12" sz="quarter" type="sldNum"/>
-          </p:nvPr>
-        </p:nvSpPr>
-        <p:spPr>
-          <a:xfrm>
-            <a:off x="8610599" y="6356350"/>
-            <a:ext cx="3135001" cy="365125"/>
-          </a:xfrm>
-        </p:spPr>
-        <p:txBody>
-          <a:bodyPr/>
-          <a:lstStyle/>
-          <a:p>
-            <a:fld id="{7FEFBAB6-26D0-44D8-BD53-612461CE1ACC}" type="slidenum">
-              <a:rPr lang="de-DE" smtClean="0"/>
-              <a:t>‹#›</a:t>
-            </a:fld>
-            <a:endParaRPr lang="de-DE"/>
           </a:p>
         </p:txBody>
       </p:sp>
@@ -14162,13 +12045,7 @@
       </p:grpSpPr>
       <p:sp>
         <p:nvSpPr>
-          <p:cNvPr id="2" name="Title 1">
-            <a:extLst>
-              <a:ext uri="{FF2B5EF4-FFF2-40B4-BE49-F238E27FC236}">
-                <a16:creationId xmlns:a16="http://schemas.microsoft.com/office/drawing/2014/main" id="{6BF04AE0-F94F-A586-34B8-68D9CAB6C6D1}"/>
-              </a:ext>
-            </a:extLst>
-          </p:cNvPr>
+          <p:cNvPr id="2" name="Title 1"/>
           <p:cNvSpPr>
             <a:spLocks noGrp="1"/>
           </p:cNvSpPr>
@@ -14176,12 +12053,7 @@
             <p:ph type="title"/>
           </p:nvPr>
         </p:nvSpPr>
-        <p:spPr>
-          <a:xfrm>
-            <a:off x="2295524" y="432532"/>
-            <a:ext cx="9450077" cy="825501"/>
-          </a:xfrm>
-        </p:spPr>
+        <p:spPr/>
         <p:txBody>
           <a:bodyPr/>
           <a:lstStyle/>
@@ -14198,13 +12070,7 @@
       </p:sp>
       <p:sp>
         <p:nvSpPr>
-          <p:cNvPr id="3" name="Content Placeholder 2">
-            <a:extLst>
-              <a:ext uri="{FF2B5EF4-FFF2-40B4-BE49-F238E27FC236}">
-                <a16:creationId xmlns:a16="http://schemas.microsoft.com/office/drawing/2014/main" id="{372FA590-20E9-0368-85B4-90C26598F852}"/>
-              </a:ext>
-            </a:extLst>
-          </p:cNvPr>
+          <p:cNvPr id="3" name="Content Placeholder 2"/>
           <p:cNvSpPr>
             <a:spLocks noGrp="1"/>
           </p:cNvSpPr>
@@ -14279,40 +12145,6 @@
               <a:rPr/>
               <a:t>Zotero can be your go-to tool for saving and citing studies, from assignments to thesis.</a:t>
             </a:r>
-          </a:p>
-        </p:txBody>
-      </p:sp>
-      <p:sp>
-        <p:nvSpPr>
-          <p:cNvPr id="6" name="Slide Number Placeholder 5">
-            <a:extLst>
-              <a:ext uri="{FF2B5EF4-FFF2-40B4-BE49-F238E27FC236}">
-                <a16:creationId xmlns:a16="http://schemas.microsoft.com/office/drawing/2014/main" id="{5F33F24B-1A9E-2EAF-F2AB-89426454DEE9}"/>
-              </a:ext>
-            </a:extLst>
-          </p:cNvPr>
-          <p:cNvSpPr>
-            <a:spLocks noGrp="1"/>
-          </p:cNvSpPr>
-          <p:nvPr>
-            <p:ph idx="12" sz="quarter" type="sldNum"/>
-          </p:nvPr>
-        </p:nvSpPr>
-        <p:spPr>
-          <a:xfrm>
-            <a:off x="8610599" y="6356350"/>
-            <a:ext cx="3135001" cy="365125"/>
-          </a:xfrm>
-        </p:spPr>
-        <p:txBody>
-          <a:bodyPr/>
-          <a:lstStyle/>
-          <a:p>
-            <a:fld id="{7FEFBAB6-26D0-44D8-BD53-612461CE1ACC}" type="slidenum">
-              <a:rPr lang="de-DE" smtClean="0"/>
-              <a:t>‹#›</a:t>
-            </a:fld>
-            <a:endParaRPr lang="de-DE"/>
           </a:p>
         </p:txBody>
       </p:sp>
@@ -14471,13 +12303,7 @@
       </p:grpSpPr>
       <p:sp>
         <p:nvSpPr>
-          <p:cNvPr id="2" name="Title 1">
-            <a:extLst>
-              <a:ext uri="{FF2B5EF4-FFF2-40B4-BE49-F238E27FC236}">
-                <a16:creationId xmlns:a16="http://schemas.microsoft.com/office/drawing/2014/main" id="{6BF04AE0-F94F-A586-34B8-68D9CAB6C6D1}"/>
-              </a:ext>
-            </a:extLst>
-          </p:cNvPr>
+          <p:cNvPr id="2" name="Title 1"/>
           <p:cNvSpPr>
             <a:spLocks noGrp="1"/>
           </p:cNvSpPr>
@@ -14485,12 +12311,7 @@
             <p:ph type="title"/>
           </p:nvPr>
         </p:nvSpPr>
-        <p:spPr>
-          <a:xfrm>
-            <a:off x="2295524" y="432532"/>
-            <a:ext cx="9450077" cy="825501"/>
-          </a:xfrm>
-        </p:spPr>
+        <p:spPr/>
         <p:txBody>
           <a:bodyPr/>
           <a:lstStyle/>
@@ -14507,13 +12328,7 @@
       </p:sp>
       <p:sp>
         <p:nvSpPr>
-          <p:cNvPr id="3" name="Content Placeholder 2">
-            <a:extLst>
-              <a:ext uri="{FF2B5EF4-FFF2-40B4-BE49-F238E27FC236}">
-                <a16:creationId xmlns:a16="http://schemas.microsoft.com/office/drawing/2014/main" id="{372FA590-20E9-0368-85B4-90C26598F852}"/>
-              </a:ext>
-            </a:extLst>
-          </p:cNvPr>
+          <p:cNvPr id="3" name="Content Placeholder 2"/>
           <p:cNvSpPr>
             <a:spLocks noGrp="1"/>
           </p:cNvSpPr>
@@ -14588,40 +12403,6 @@
               <a:rPr/>
               <a:t> a referencing workflow in MS Word</a:t>
             </a:r>
-          </a:p>
-        </p:txBody>
-      </p:sp>
-      <p:sp>
-        <p:nvSpPr>
-          <p:cNvPr id="6" name="Slide Number Placeholder 5">
-            <a:extLst>
-              <a:ext uri="{FF2B5EF4-FFF2-40B4-BE49-F238E27FC236}">
-                <a16:creationId xmlns:a16="http://schemas.microsoft.com/office/drawing/2014/main" id="{5F33F24B-1A9E-2EAF-F2AB-89426454DEE9}"/>
-              </a:ext>
-            </a:extLst>
-          </p:cNvPr>
-          <p:cNvSpPr>
-            <a:spLocks noGrp="1"/>
-          </p:cNvSpPr>
-          <p:nvPr>
-            <p:ph idx="12" sz="quarter" type="sldNum"/>
-          </p:nvPr>
-        </p:nvSpPr>
-        <p:spPr>
-          <a:xfrm>
-            <a:off x="8610599" y="6356350"/>
-            <a:ext cx="3135001" cy="365125"/>
-          </a:xfrm>
-        </p:spPr>
-        <p:txBody>
-          <a:bodyPr/>
-          <a:lstStyle/>
-          <a:p>
-            <a:fld id="{7FEFBAB6-26D0-44D8-BD53-612461CE1ACC}" type="slidenum">
-              <a:rPr lang="de-DE" smtClean="0"/>
-              <a:t>‹#›</a:t>
-            </a:fld>
-            <a:endParaRPr lang="de-DE"/>
           </a:p>
         </p:txBody>
       </p:sp>
@@ -14927,13 +12708,7 @@
       </p:grpSpPr>
       <p:sp>
         <p:nvSpPr>
-          <p:cNvPr id="2" name="Title 1">
-            <a:extLst>
-              <a:ext uri="{FF2B5EF4-FFF2-40B4-BE49-F238E27FC236}">
-                <a16:creationId xmlns:a16="http://schemas.microsoft.com/office/drawing/2014/main" id="{6BF04AE0-F94F-A586-34B8-68D9CAB6C6D1}"/>
-              </a:ext>
-            </a:extLst>
-          </p:cNvPr>
+          <p:cNvPr id="2" name="Title 1"/>
           <p:cNvSpPr>
             <a:spLocks noGrp="1"/>
           </p:cNvSpPr>
@@ -14941,12 +12716,7 @@
             <p:ph type="title"/>
           </p:nvPr>
         </p:nvSpPr>
-        <p:spPr>
-          <a:xfrm>
-            <a:off x="2295524" y="432532"/>
-            <a:ext cx="9450077" cy="825501"/>
-          </a:xfrm>
-        </p:spPr>
+        <p:spPr/>
         <p:txBody>
           <a:bodyPr/>
           <a:lstStyle/>
@@ -14958,40 +12728,6 @@
               <a:rPr/>
               <a:t>To conclude: Survey time!</a:t>
             </a:r>
-          </a:p>
-        </p:txBody>
-      </p:sp>
-      <p:sp>
-        <p:nvSpPr>
-          <p:cNvPr id="6" name="Slide Number Placeholder 5">
-            <a:extLst>
-              <a:ext uri="{FF2B5EF4-FFF2-40B4-BE49-F238E27FC236}">
-                <a16:creationId xmlns:a16="http://schemas.microsoft.com/office/drawing/2014/main" id="{5F33F24B-1A9E-2EAF-F2AB-89426454DEE9}"/>
-              </a:ext>
-            </a:extLst>
-          </p:cNvPr>
-          <p:cNvSpPr>
-            <a:spLocks noGrp="1"/>
-          </p:cNvSpPr>
-          <p:nvPr>
-            <p:ph idx="12" sz="quarter" type="sldNum"/>
-          </p:nvPr>
-        </p:nvSpPr>
-        <p:spPr>
-          <a:xfrm>
-            <a:off x="8610599" y="6356350"/>
-            <a:ext cx="3135001" cy="365125"/>
-          </a:xfrm>
-        </p:spPr>
-        <p:txBody>
-          <a:bodyPr/>
-          <a:lstStyle/>
-          <a:p>
-            <a:fld id="{7FEFBAB6-26D0-44D8-BD53-612461CE1ACC}" type="slidenum">
-              <a:rPr lang="de-DE" smtClean="0"/>
-              <a:t>‹#›</a:t>
-            </a:fld>
-            <a:endParaRPr lang="de-DE"/>
           </a:p>
         </p:txBody>
       </p:sp>
@@ -15019,13 +12755,7 @@
       </p:grpSpPr>
       <p:sp>
         <p:nvSpPr>
-          <p:cNvPr id="3" name="Content Placeholder 2">
-            <a:extLst>
-              <a:ext uri="{FF2B5EF4-FFF2-40B4-BE49-F238E27FC236}">
-                <a16:creationId xmlns:a16="http://schemas.microsoft.com/office/drawing/2014/main" id="{372FA590-20E9-0368-85B4-90C26598F852}"/>
-              </a:ext>
-            </a:extLst>
-          </p:cNvPr>
+          <p:cNvPr id="3" name="Content Placeholder 2"/>
           <p:cNvSpPr>
             <a:spLocks noGrp="1"/>
           </p:cNvSpPr>
@@ -15047,7 +12777,7 @@
             </a:r>
           </a:p>
           <a:p>
-            <a:pPr lvl="0" indent="-457200" marL="457200">
+            <a:pPr lvl="0" indent="-342900" marL="342900">
               <a:buAutoNum type="alphaLcPeriod"/>
             </a:pPr>
             <a:r>
@@ -15056,7 +12786,7 @@
             </a:r>
           </a:p>
           <a:p>
-            <a:pPr lvl="0" indent="-457200" marL="457200">
+            <a:pPr lvl="0" indent="-342900" marL="342900">
               <a:buAutoNum type="alphaLcPeriod"/>
             </a:pPr>
             <a:r>
@@ -15065,7 +12795,7 @@
             </a:r>
           </a:p>
           <a:p>
-            <a:pPr lvl="0" indent="-457200" marL="457200">
+            <a:pPr lvl="0" indent="-342900" marL="342900">
               <a:buAutoNum type="alphaLcPeriod"/>
             </a:pPr>
             <a:r>
@@ -15074,47 +12804,13 @@
             </a:r>
           </a:p>
           <a:p>
-            <a:pPr lvl="0" indent="-457200" marL="457200">
+            <a:pPr lvl="0" indent="-342900" marL="342900">
               <a:buAutoNum type="alphaLcPeriod"/>
             </a:pPr>
             <a:r>
               <a:rPr/>
               <a:t>I am very familiar and have worked with it extensively.</a:t>
             </a:r>
-          </a:p>
-        </p:txBody>
-      </p:sp>
-      <p:sp>
-        <p:nvSpPr>
-          <p:cNvPr id="6" name="Slide Number Placeholder 5">
-            <a:extLst>
-              <a:ext uri="{FF2B5EF4-FFF2-40B4-BE49-F238E27FC236}">
-                <a16:creationId xmlns:a16="http://schemas.microsoft.com/office/drawing/2014/main" id="{5F33F24B-1A9E-2EAF-F2AB-89426454DEE9}"/>
-              </a:ext>
-            </a:extLst>
-          </p:cNvPr>
-          <p:cNvSpPr>
-            <a:spLocks noGrp="1"/>
-          </p:cNvSpPr>
-          <p:nvPr>
-            <p:ph idx="12" sz="quarter" type="sldNum"/>
-          </p:nvPr>
-        </p:nvSpPr>
-        <p:spPr>
-          <a:xfrm>
-            <a:off x="8610599" y="6356350"/>
-            <a:ext cx="3135001" cy="365125"/>
-          </a:xfrm>
-        </p:spPr>
-        <p:txBody>
-          <a:bodyPr/>
-          <a:lstStyle/>
-          <a:p>
-            <a:fld id="{7FEFBAB6-26D0-44D8-BD53-612461CE1ACC}" type="slidenum">
-              <a:rPr lang="de-DE" smtClean="0"/>
-              <a:t>‹#›</a:t>
-            </a:fld>
-            <a:endParaRPr lang="de-DE"/>
           </a:p>
         </p:txBody>
       </p:sp>
@@ -15142,13 +12838,7 @@
       </p:grpSpPr>
       <p:sp>
         <p:nvSpPr>
-          <p:cNvPr id="3" name="Content Placeholder 2">
-            <a:extLst>
-              <a:ext uri="{FF2B5EF4-FFF2-40B4-BE49-F238E27FC236}">
-                <a16:creationId xmlns:a16="http://schemas.microsoft.com/office/drawing/2014/main" id="{372FA590-20E9-0368-85B4-90C26598F852}"/>
-              </a:ext>
-            </a:extLst>
-          </p:cNvPr>
+          <p:cNvPr id="3" name="Content Placeholder 2"/>
           <p:cNvSpPr>
             <a:spLocks noGrp="1"/>
           </p:cNvSpPr>
@@ -15178,7 +12868,7 @@
             </a:r>
           </a:p>
           <a:p>
-            <a:pPr lvl="0" indent="-457200" marL="457200">
+            <a:pPr lvl="0" indent="-342900" marL="342900">
               <a:buAutoNum type="alphaLcPeriod"/>
             </a:pPr>
             <a:r>
@@ -15187,7 +12877,7 @@
             </a:r>
           </a:p>
           <a:p>
-            <a:pPr lvl="0" indent="-457200" marL="457200">
+            <a:pPr lvl="0" indent="-342900" marL="342900">
               <a:buAutoNum type="alphaLcPeriod"/>
             </a:pPr>
             <a:r>
@@ -15196,7 +12886,7 @@
             </a:r>
           </a:p>
           <a:p>
-            <a:pPr lvl="0" indent="-457200" marL="457200">
+            <a:pPr lvl="0" indent="-342900" marL="342900">
               <a:buAutoNum type="alphaLcPeriod"/>
             </a:pPr>
             <a:r>
@@ -15205,7 +12895,7 @@
             </a:r>
           </a:p>
           <a:p>
-            <a:pPr lvl="0" indent="-457200" marL="457200">
+            <a:pPr lvl="0" indent="-342900" marL="342900">
               <a:buAutoNum type="alphaLcPeriod"/>
             </a:pPr>
             <a:r>
@@ -15214,47 +12904,13 @@
             </a:r>
           </a:p>
           <a:p>
-            <a:pPr lvl="0" indent="-457200" marL="457200">
+            <a:pPr lvl="0" indent="-342900" marL="342900">
               <a:buAutoNum type="alphaLcPeriod"/>
             </a:pPr>
             <a:r>
               <a:rPr/>
               <a:t>5</a:t>
             </a:r>
-          </a:p>
-        </p:txBody>
-      </p:sp>
-      <p:sp>
-        <p:nvSpPr>
-          <p:cNvPr id="6" name="Slide Number Placeholder 5">
-            <a:extLst>
-              <a:ext uri="{FF2B5EF4-FFF2-40B4-BE49-F238E27FC236}">
-                <a16:creationId xmlns:a16="http://schemas.microsoft.com/office/drawing/2014/main" id="{5F33F24B-1A9E-2EAF-F2AB-89426454DEE9}"/>
-              </a:ext>
-            </a:extLst>
-          </p:cNvPr>
-          <p:cNvSpPr>
-            <a:spLocks noGrp="1"/>
-          </p:cNvSpPr>
-          <p:nvPr>
-            <p:ph idx="12" sz="quarter" type="sldNum"/>
-          </p:nvPr>
-        </p:nvSpPr>
-        <p:spPr>
-          <a:xfrm>
-            <a:off x="8610599" y="6356350"/>
-            <a:ext cx="3135001" cy="365125"/>
-          </a:xfrm>
-        </p:spPr>
-        <p:txBody>
-          <a:bodyPr/>
-          <a:lstStyle/>
-          <a:p>
-            <a:fld id="{7FEFBAB6-26D0-44D8-BD53-612461CE1ACC}" type="slidenum">
-              <a:rPr lang="de-DE" smtClean="0"/>
-              <a:t>‹#›</a:t>
-            </a:fld>
-            <a:endParaRPr lang="de-DE"/>
           </a:p>
         </p:txBody>
       </p:sp>
@@ -15282,13 +12938,7 @@
       </p:grpSpPr>
       <p:sp>
         <p:nvSpPr>
-          <p:cNvPr id="2" name="Title 1">
-            <a:extLst>
-              <a:ext uri="{FF2B5EF4-FFF2-40B4-BE49-F238E27FC236}">
-                <a16:creationId xmlns:a16="http://schemas.microsoft.com/office/drawing/2014/main" id="{6BF04AE0-F94F-A586-34B8-68D9CAB6C6D1}"/>
-              </a:ext>
-            </a:extLst>
-          </p:cNvPr>
+          <p:cNvPr id="2" name="Title 1"/>
           <p:cNvSpPr>
             <a:spLocks noGrp="1"/>
           </p:cNvSpPr>
@@ -15296,12 +12946,7 @@
             <p:ph type="title"/>
           </p:nvPr>
         </p:nvSpPr>
-        <p:spPr>
-          <a:xfrm>
-            <a:off x="2295524" y="432532"/>
-            <a:ext cx="9450077" cy="825501"/>
-          </a:xfrm>
-        </p:spPr>
+        <p:spPr/>
         <p:txBody>
           <a:bodyPr/>
           <a:lstStyle/>
@@ -15318,13 +12963,7 @@
       </p:sp>
       <p:sp>
         <p:nvSpPr>
-          <p:cNvPr id="3" name="Content Placeholder 2">
-            <a:extLst>
-              <a:ext uri="{FF2B5EF4-FFF2-40B4-BE49-F238E27FC236}">
-                <a16:creationId xmlns:a16="http://schemas.microsoft.com/office/drawing/2014/main" id="{372FA590-20E9-0368-85B4-90C26598F852}"/>
-              </a:ext>
-            </a:extLst>
-          </p:cNvPr>
+          <p:cNvPr id="3" name="Content Placeholder 2"/>
           <p:cNvSpPr>
             <a:spLocks noGrp="1"/>
           </p:cNvSpPr>
@@ -15344,40 +12983,6 @@
               <a:rPr b="1"/>
               <a:t>What do we see in the results?</a:t>
             </a:r>
-          </a:p>
-        </p:txBody>
-      </p:sp>
-      <p:sp>
-        <p:nvSpPr>
-          <p:cNvPr id="6" name="Slide Number Placeholder 5">
-            <a:extLst>
-              <a:ext uri="{FF2B5EF4-FFF2-40B4-BE49-F238E27FC236}">
-                <a16:creationId xmlns:a16="http://schemas.microsoft.com/office/drawing/2014/main" id="{5F33F24B-1A9E-2EAF-F2AB-89426454DEE9}"/>
-              </a:ext>
-            </a:extLst>
-          </p:cNvPr>
-          <p:cNvSpPr>
-            <a:spLocks noGrp="1"/>
-          </p:cNvSpPr>
-          <p:nvPr>
-            <p:ph idx="12" sz="quarter" type="sldNum"/>
-          </p:nvPr>
-        </p:nvSpPr>
-        <p:spPr>
-          <a:xfrm>
-            <a:off x="8610599" y="6356350"/>
-            <a:ext cx="3135001" cy="365125"/>
-          </a:xfrm>
-        </p:spPr>
-        <p:txBody>
-          <a:bodyPr/>
-          <a:lstStyle/>
-          <a:p>
-            <a:fld id="{7FEFBAB6-26D0-44D8-BD53-612461CE1ACC}" type="slidenum">
-              <a:rPr lang="de-DE" smtClean="0"/>
-              <a:t>‹#›</a:t>
-            </a:fld>
-            <a:endParaRPr lang="de-DE"/>
           </a:p>
         </p:txBody>
       </p:sp>
@@ -15405,13 +13010,7 @@
       </p:grpSpPr>
       <p:sp>
         <p:nvSpPr>
-          <p:cNvPr id="3" name="Content Placeholder 2">
-            <a:extLst>
-              <a:ext uri="{FF2B5EF4-FFF2-40B4-BE49-F238E27FC236}">
-                <a16:creationId xmlns:a16="http://schemas.microsoft.com/office/drawing/2014/main" id="{372FA590-20E9-0368-85B4-90C26598F852}"/>
-              </a:ext>
-            </a:extLst>
-          </p:cNvPr>
+          <p:cNvPr id="3" name="Content Placeholder 2"/>
           <p:cNvSpPr>
             <a:spLocks noGrp="1"/>
           </p:cNvSpPr>
@@ -15431,40 +13030,6 @@
               <a:rPr/>
               <a:t>content in section header?</a:t>
             </a:r>
-          </a:p>
-        </p:txBody>
-      </p:sp>
-      <p:sp>
-        <p:nvSpPr>
-          <p:cNvPr id="6" name="Slide Number Placeholder 5">
-            <a:extLst>
-              <a:ext uri="{FF2B5EF4-FFF2-40B4-BE49-F238E27FC236}">
-                <a16:creationId xmlns:a16="http://schemas.microsoft.com/office/drawing/2014/main" id="{5F33F24B-1A9E-2EAF-F2AB-89426454DEE9}"/>
-              </a:ext>
-            </a:extLst>
-          </p:cNvPr>
-          <p:cNvSpPr>
-            <a:spLocks noGrp="1"/>
-          </p:cNvSpPr>
-          <p:nvPr>
-            <p:ph idx="12" sz="quarter" type="sldNum"/>
-          </p:nvPr>
-        </p:nvSpPr>
-        <p:spPr>
-          <a:xfrm>
-            <a:off x="8610599" y="6356350"/>
-            <a:ext cx="3135001" cy="365125"/>
-          </a:xfrm>
-        </p:spPr>
-        <p:txBody>
-          <a:bodyPr/>
-          <a:lstStyle/>
-          <a:p>
-            <a:fld id="{7FEFBAB6-26D0-44D8-BD53-612461CE1ACC}" type="slidenum">
-              <a:rPr lang="de-DE" smtClean="0"/>
-              <a:t>‹#›</a:t>
-            </a:fld>
-            <a:endParaRPr lang="de-DE"/>
           </a:p>
         </p:txBody>
       </p:sp>
@@ -15492,13 +13057,7 @@
       </p:grpSpPr>
       <p:sp>
         <p:nvSpPr>
-          <p:cNvPr id="2" name="Title 1">
-            <a:extLst>
-              <a:ext uri="{FF2B5EF4-FFF2-40B4-BE49-F238E27FC236}">
-                <a16:creationId xmlns:a16="http://schemas.microsoft.com/office/drawing/2014/main" id="{6BF04AE0-F94F-A586-34B8-68D9CAB6C6D1}"/>
-              </a:ext>
-            </a:extLst>
-          </p:cNvPr>
+          <p:cNvPr id="2" name="Title 1"/>
           <p:cNvSpPr>
             <a:spLocks noGrp="1"/>
           </p:cNvSpPr>
@@ -15506,12 +13065,7 @@
             <p:ph type="title"/>
           </p:nvPr>
         </p:nvSpPr>
-        <p:spPr>
-          <a:xfrm>
-            <a:off x="2295524" y="432532"/>
-            <a:ext cx="9450077" cy="825501"/>
-          </a:xfrm>
-        </p:spPr>
+        <p:spPr/>
         <p:txBody>
           <a:bodyPr/>
           <a:lstStyle/>
@@ -15528,13 +13082,7 @@
       </p:sp>
       <p:sp>
         <p:nvSpPr>
-          <p:cNvPr id="3" name="Content Placeholder 2">
-            <a:extLst>
-              <a:ext uri="{FF2B5EF4-FFF2-40B4-BE49-F238E27FC236}">
-                <a16:creationId xmlns:a16="http://schemas.microsoft.com/office/drawing/2014/main" id="{372FA590-20E9-0368-85B4-90C26598F852}"/>
-              </a:ext>
-            </a:extLst>
-          </p:cNvPr>
+          <p:cNvPr id="3" name="Content Placeholder 2"/>
           <p:cNvSpPr>
             <a:spLocks noGrp="1"/>
           </p:cNvSpPr>
@@ -15562,40 +13110,6 @@
               <a:rPr/>
               <a:t> (2nd ed., pp. 34–35). Teachers College Press.</a:t>
             </a:r>
-          </a:p>
-        </p:txBody>
-      </p:sp>
-      <p:sp>
-        <p:nvSpPr>
-          <p:cNvPr id="6" name="Slide Number Placeholder 5">
-            <a:extLst>
-              <a:ext uri="{FF2B5EF4-FFF2-40B4-BE49-F238E27FC236}">
-                <a16:creationId xmlns:a16="http://schemas.microsoft.com/office/drawing/2014/main" id="{5F33F24B-1A9E-2EAF-F2AB-89426454DEE9}"/>
-              </a:ext>
-            </a:extLst>
-          </p:cNvPr>
-          <p:cNvSpPr>
-            <a:spLocks noGrp="1"/>
-          </p:cNvSpPr>
-          <p:nvPr>
-            <p:ph idx="12" sz="quarter" type="sldNum"/>
-          </p:nvPr>
-        </p:nvSpPr>
-        <p:spPr>
-          <a:xfrm>
-            <a:off x="8610599" y="6356350"/>
-            <a:ext cx="3135001" cy="365125"/>
-          </a:xfrm>
-        </p:spPr>
-        <p:txBody>
-          <a:bodyPr/>
-          <a:lstStyle/>
-          <a:p>
-            <a:fld id="{7FEFBAB6-26D0-44D8-BD53-612461CE1ACC}" type="slidenum">
-              <a:rPr lang="de-DE" smtClean="0"/>
-              <a:t>‹#›</a:t>
-            </a:fld>
-            <a:endParaRPr lang="de-DE"/>
           </a:p>
         </p:txBody>
       </p:sp>
@@ -15623,13 +13137,7 @@
       </p:grpSpPr>
       <p:sp>
         <p:nvSpPr>
-          <p:cNvPr id="2" name="Title 1">
-            <a:extLst>
-              <a:ext uri="{FF2B5EF4-FFF2-40B4-BE49-F238E27FC236}">
-                <a16:creationId xmlns:a16="http://schemas.microsoft.com/office/drawing/2014/main" id="{6BF04AE0-F94F-A586-34B8-68D9CAB6C6D1}"/>
-              </a:ext>
-            </a:extLst>
-          </p:cNvPr>
+          <p:cNvPr id="2" name="Title 1"/>
           <p:cNvSpPr>
             <a:spLocks noGrp="1"/>
           </p:cNvSpPr>
@@ -15637,12 +13145,7 @@
             <p:ph type="title"/>
           </p:nvPr>
         </p:nvSpPr>
-        <p:spPr>
-          <a:xfrm>
-            <a:off x="2295524" y="432532"/>
-            <a:ext cx="9450077" cy="825501"/>
-          </a:xfrm>
-        </p:spPr>
+        <p:spPr/>
         <p:txBody>
           <a:bodyPr/>
           <a:lstStyle/>
@@ -15659,13 +13162,7 @@
       </p:sp>
       <p:sp>
         <p:nvSpPr>
-          <p:cNvPr id="3" name="Content Placeholder 2">
-            <a:extLst>
-              <a:ext uri="{FF2B5EF4-FFF2-40B4-BE49-F238E27FC236}">
-                <a16:creationId xmlns:a16="http://schemas.microsoft.com/office/drawing/2014/main" id="{372FA590-20E9-0368-85B4-90C26598F852}"/>
-              </a:ext>
-            </a:extLst>
-          </p:cNvPr>
+          <p:cNvPr id="3" name="Content Placeholder 2"/>
           <p:cNvSpPr>
             <a:spLocks noGrp="1"/>
           </p:cNvSpPr>
@@ -15685,40 +13182,6 @@
               <a:rPr/>
               <a:t>See you next session :)</a:t>
             </a:r>
-          </a:p>
-        </p:txBody>
-      </p:sp>
-      <p:sp>
-        <p:nvSpPr>
-          <p:cNvPr id="6" name="Slide Number Placeholder 5">
-            <a:extLst>
-              <a:ext uri="{FF2B5EF4-FFF2-40B4-BE49-F238E27FC236}">
-                <a16:creationId xmlns:a16="http://schemas.microsoft.com/office/drawing/2014/main" id="{5F33F24B-1A9E-2EAF-F2AB-89426454DEE9}"/>
-              </a:ext>
-            </a:extLst>
-          </p:cNvPr>
-          <p:cNvSpPr>
-            <a:spLocks noGrp="1"/>
-          </p:cNvSpPr>
-          <p:nvPr>
-            <p:ph idx="12" sz="quarter" type="sldNum"/>
-          </p:nvPr>
-        </p:nvSpPr>
-        <p:spPr>
-          <a:xfrm>
-            <a:off x="8610599" y="6356350"/>
-            <a:ext cx="3135001" cy="365125"/>
-          </a:xfrm>
-        </p:spPr>
-        <p:txBody>
-          <a:bodyPr/>
-          <a:lstStyle/>
-          <a:p>
-            <a:fld id="{7FEFBAB6-26D0-44D8-BD53-612461CE1ACC}" type="slidenum">
-              <a:rPr lang="de-DE" smtClean="0"/>
-              <a:t>‹#›</a:t>
-            </a:fld>
-            <a:endParaRPr lang="de-DE"/>
           </a:p>
         </p:txBody>
       </p:sp>
@@ -15746,13 +13209,7 @@
       </p:grpSpPr>
       <p:sp>
         <p:nvSpPr>
-          <p:cNvPr id="2" name="Title 1">
-            <a:extLst>
-              <a:ext uri="{FF2B5EF4-FFF2-40B4-BE49-F238E27FC236}">
-                <a16:creationId xmlns:a16="http://schemas.microsoft.com/office/drawing/2014/main" id="{6BF04AE0-F94F-A586-34B8-68D9CAB6C6D1}"/>
-              </a:ext>
-            </a:extLst>
-          </p:cNvPr>
+          <p:cNvPr id="2" name="Title 1"/>
           <p:cNvSpPr>
             <a:spLocks noGrp="1"/>
           </p:cNvSpPr>
@@ -15760,12 +13217,7 @@
             <p:ph type="title"/>
           </p:nvPr>
         </p:nvSpPr>
-        <p:spPr>
-          <a:xfrm>
-            <a:off x="2295524" y="432532"/>
-            <a:ext cx="9450077" cy="825501"/>
-          </a:xfrm>
-        </p:spPr>
+        <p:spPr/>
         <p:txBody>
           <a:bodyPr/>
           <a:lstStyle/>
@@ -15782,13 +13234,7 @@
       </p:sp>
       <p:sp>
         <p:nvSpPr>
-          <p:cNvPr id="3" name="Content Placeholder 2">
-            <a:extLst>
-              <a:ext uri="{FF2B5EF4-FFF2-40B4-BE49-F238E27FC236}">
-                <a16:creationId xmlns:a16="http://schemas.microsoft.com/office/drawing/2014/main" id="{372FA590-20E9-0368-85B4-90C26598F852}"/>
-              </a:ext>
-            </a:extLst>
-          </p:cNvPr>
+          <p:cNvPr id="3" name="Content Placeholder 2"/>
           <p:cNvSpPr>
             <a:spLocks noGrp="1"/>
           </p:cNvSpPr>
@@ -15810,40 +13256,6 @@
               <a:rPr/>
               <a:t>: Get in a pair, navigate a literature database (Google Scholar), find a paper of your choice with its full text, analyse the citations and the reference list. Note what features you see and share in class.</a:t>
             </a:r>
-          </a:p>
-        </p:txBody>
-      </p:sp>
-      <p:sp>
-        <p:nvSpPr>
-          <p:cNvPr id="6" name="Slide Number Placeholder 5">
-            <a:extLst>
-              <a:ext uri="{FF2B5EF4-FFF2-40B4-BE49-F238E27FC236}">
-                <a16:creationId xmlns:a16="http://schemas.microsoft.com/office/drawing/2014/main" id="{5F33F24B-1A9E-2EAF-F2AB-89426454DEE9}"/>
-              </a:ext>
-            </a:extLst>
-          </p:cNvPr>
-          <p:cNvSpPr>
-            <a:spLocks noGrp="1"/>
-          </p:cNvSpPr>
-          <p:nvPr>
-            <p:ph idx="12" sz="quarter" type="sldNum"/>
-          </p:nvPr>
-        </p:nvSpPr>
-        <p:spPr>
-          <a:xfrm>
-            <a:off x="8610599" y="6356350"/>
-            <a:ext cx="3135001" cy="365125"/>
-          </a:xfrm>
-        </p:spPr>
-        <p:txBody>
-          <a:bodyPr/>
-          <a:lstStyle/>
-          <a:p>
-            <a:fld id="{7FEFBAB6-26D0-44D8-BD53-612461CE1ACC}" type="slidenum">
-              <a:rPr lang="de-DE" smtClean="0"/>
-              <a:t>‹#›</a:t>
-            </a:fld>
-            <a:endParaRPr lang="de-DE"/>
           </a:p>
         </p:txBody>
       </p:sp>
@@ -15871,13 +13283,7 @@
       </p:grpSpPr>
       <p:sp>
         <p:nvSpPr>
-          <p:cNvPr id="2" name="Title 1">
-            <a:extLst>
-              <a:ext uri="{FF2B5EF4-FFF2-40B4-BE49-F238E27FC236}">
-                <a16:creationId xmlns:a16="http://schemas.microsoft.com/office/drawing/2014/main" id="{6BF04AE0-F94F-A586-34B8-68D9CAB6C6D1}"/>
-              </a:ext>
-            </a:extLst>
-          </p:cNvPr>
+          <p:cNvPr id="2" name="Title 1"/>
           <p:cNvSpPr>
             <a:spLocks noGrp="1"/>
           </p:cNvSpPr>
@@ -15885,12 +13291,7 @@
             <p:ph type="title"/>
           </p:nvPr>
         </p:nvSpPr>
-        <p:spPr>
-          <a:xfrm>
-            <a:off x="2295524" y="432532"/>
-            <a:ext cx="9450077" cy="825501"/>
-          </a:xfrm>
-        </p:spPr>
+        <p:spPr/>
         <p:txBody>
           <a:bodyPr/>
           <a:lstStyle/>
@@ -15907,13 +13308,7 @@
       </p:sp>
       <p:sp>
         <p:nvSpPr>
-          <p:cNvPr id="3" name="Content Placeholder 2">
-            <a:extLst>
-              <a:ext uri="{FF2B5EF4-FFF2-40B4-BE49-F238E27FC236}">
-                <a16:creationId xmlns:a16="http://schemas.microsoft.com/office/drawing/2014/main" id="{372FA590-20E9-0368-85B4-90C26598F852}"/>
-              </a:ext>
-            </a:extLst>
-          </p:cNvPr>
+          <p:cNvPr id="3" name="Content Placeholder 2"/>
           <p:cNvSpPr>
             <a:spLocks noGrp="1"/>
           </p:cNvSpPr>
@@ -15962,40 +13357,6 @@
               <a:rPr/>
               <a:t>: Conceptualisation, Writing - Review &amp; Editing, Supervision, Project Administration, Validation.</a:t>
             </a:r>
-          </a:p>
-        </p:txBody>
-      </p:sp>
-      <p:sp>
-        <p:nvSpPr>
-          <p:cNvPr id="6" name="Slide Number Placeholder 5">
-            <a:extLst>
-              <a:ext uri="{FF2B5EF4-FFF2-40B4-BE49-F238E27FC236}">
-                <a16:creationId xmlns:a16="http://schemas.microsoft.com/office/drawing/2014/main" id="{5F33F24B-1A9E-2EAF-F2AB-89426454DEE9}"/>
-              </a:ext>
-            </a:extLst>
-          </p:cNvPr>
-          <p:cNvSpPr>
-            <a:spLocks noGrp="1"/>
-          </p:cNvSpPr>
-          <p:nvPr>
-            <p:ph idx="12" sz="quarter" type="sldNum"/>
-          </p:nvPr>
-        </p:nvSpPr>
-        <p:spPr>
-          <a:xfrm>
-            <a:off x="8610599" y="6356350"/>
-            <a:ext cx="3135001" cy="365125"/>
-          </a:xfrm>
-        </p:spPr>
-        <p:txBody>
-          <a:bodyPr/>
-          <a:lstStyle/>
-          <a:p>
-            <a:fld id="{7FEFBAB6-26D0-44D8-BD53-612461CE1ACC}" type="slidenum">
-              <a:rPr lang="de-DE" smtClean="0"/>
-              <a:t>‹#›</a:t>
-            </a:fld>
-            <a:endParaRPr lang="de-DE"/>
           </a:p>
         </p:txBody>
       </p:sp>
@@ -16023,13 +13384,7 @@
       </p:grpSpPr>
       <p:sp>
         <p:nvSpPr>
-          <p:cNvPr id="2" name="Title 1">
-            <a:extLst>
-              <a:ext uri="{FF2B5EF4-FFF2-40B4-BE49-F238E27FC236}">
-                <a16:creationId xmlns:a16="http://schemas.microsoft.com/office/drawing/2014/main" id="{6BF04AE0-F94F-A586-34B8-68D9CAB6C6D1}"/>
-              </a:ext>
-            </a:extLst>
-          </p:cNvPr>
+          <p:cNvPr id="2" name="Title 1"/>
           <p:cNvSpPr>
             <a:spLocks noGrp="1"/>
           </p:cNvSpPr>
@@ -16037,12 +13392,7 @@
             <p:ph type="title"/>
           </p:nvPr>
         </p:nvSpPr>
-        <p:spPr>
-          <a:xfrm>
-            <a:off x="2295524" y="432532"/>
-            <a:ext cx="9450077" cy="825501"/>
-          </a:xfrm>
-        </p:spPr>
+        <p:spPr/>
         <p:txBody>
           <a:bodyPr/>
           <a:lstStyle/>
@@ -16059,13 +13409,7 @@
       </p:sp>
       <p:sp>
         <p:nvSpPr>
-          <p:cNvPr id="3" name="Content Placeholder 2">
-            <a:extLst>
-              <a:ext uri="{FF2B5EF4-FFF2-40B4-BE49-F238E27FC236}">
-                <a16:creationId xmlns:a16="http://schemas.microsoft.com/office/drawing/2014/main" id="{372FA590-20E9-0368-85B4-90C26598F852}"/>
-              </a:ext>
-            </a:extLst>
-          </p:cNvPr>
+          <p:cNvPr id="3" name="Content Placeholder 2"/>
           <p:cNvSpPr>
             <a:spLocks noGrp="1"/>
           </p:cNvSpPr>
@@ -16145,40 +13489,6 @@
               <a:rPr/>
               <a:t>. You may use, modify, distribute, and sell the code snippets for any purpose, without permission or attribution. The code snippets are provided “as is”, without warranty of any kind.</a:t>
             </a:r>
-          </a:p>
-        </p:txBody>
-      </p:sp>
-      <p:sp>
-        <p:nvSpPr>
-          <p:cNvPr id="6" name="Slide Number Placeholder 5">
-            <a:extLst>
-              <a:ext uri="{FF2B5EF4-FFF2-40B4-BE49-F238E27FC236}">
-                <a16:creationId xmlns:a16="http://schemas.microsoft.com/office/drawing/2014/main" id="{5F33F24B-1A9E-2EAF-F2AB-89426454DEE9}"/>
-              </a:ext>
-            </a:extLst>
-          </p:cNvPr>
-          <p:cNvSpPr>
-            <a:spLocks noGrp="1"/>
-          </p:cNvSpPr>
-          <p:nvPr>
-            <p:ph idx="12" sz="quarter" type="sldNum"/>
-          </p:nvPr>
-        </p:nvSpPr>
-        <p:spPr>
-          <a:xfrm>
-            <a:off x="8610599" y="6356350"/>
-            <a:ext cx="3135001" cy="365125"/>
-          </a:xfrm>
-        </p:spPr>
-        <p:txBody>
-          <a:bodyPr/>
-          <a:lstStyle/>
-          <a:p>
-            <a:fld id="{7FEFBAB6-26D0-44D8-BD53-612461CE1ACC}" type="slidenum">
-              <a:rPr lang="de-DE" smtClean="0"/>
-              <a:t>‹#›</a:t>
-            </a:fld>
-            <a:endParaRPr lang="de-DE"/>
           </a:p>
         </p:txBody>
       </p:sp>
@@ -16206,13 +13516,7 @@
       </p:grpSpPr>
       <p:sp>
         <p:nvSpPr>
-          <p:cNvPr id="3" name="Content Placeholder 2">
-            <a:extLst>
-              <a:ext uri="{FF2B5EF4-FFF2-40B4-BE49-F238E27FC236}">
-                <a16:creationId xmlns:a16="http://schemas.microsoft.com/office/drawing/2014/main" id="{372FA590-20E9-0368-85B4-90C26598F852}"/>
-              </a:ext>
-            </a:extLst>
-          </p:cNvPr>
+          <p:cNvPr id="3" name="Content Placeholder 2"/>
           <p:cNvSpPr>
             <a:spLocks noGrp="1"/>
           </p:cNvSpPr>
@@ -16281,40 +13585,6 @@
               <a:rPr/>
               <a:t>)</a:t>
             </a:r>
-          </a:p>
-        </p:txBody>
-      </p:sp>
-      <p:sp>
-        <p:nvSpPr>
-          <p:cNvPr id="6" name="Slide Number Placeholder 5">
-            <a:extLst>
-              <a:ext uri="{FF2B5EF4-FFF2-40B4-BE49-F238E27FC236}">
-                <a16:creationId xmlns:a16="http://schemas.microsoft.com/office/drawing/2014/main" id="{5F33F24B-1A9E-2EAF-F2AB-89426454DEE9}"/>
-              </a:ext>
-            </a:extLst>
-          </p:cNvPr>
-          <p:cNvSpPr>
-            <a:spLocks noGrp="1"/>
-          </p:cNvSpPr>
-          <p:nvPr>
-            <p:ph idx="12" sz="quarter" type="sldNum"/>
-          </p:nvPr>
-        </p:nvSpPr>
-        <p:spPr>
-          <a:xfrm>
-            <a:off x="8610599" y="6356350"/>
-            <a:ext cx="3135001" cy="365125"/>
-          </a:xfrm>
-        </p:spPr>
-        <p:txBody>
-          <a:bodyPr/>
-          <a:lstStyle/>
-          <a:p>
-            <a:fld id="{7FEFBAB6-26D0-44D8-BD53-612461CE1ACC}" type="slidenum">
-              <a:rPr lang="de-DE" smtClean="0"/>
-              <a:t>‹#›</a:t>
-            </a:fld>
-            <a:endParaRPr lang="de-DE"/>
           </a:p>
         </p:txBody>
       </p:sp>
@@ -16342,13 +13612,7 @@
       </p:grpSpPr>
       <p:sp>
         <p:nvSpPr>
-          <p:cNvPr id="2" name="Title 1">
-            <a:extLst>
-              <a:ext uri="{FF2B5EF4-FFF2-40B4-BE49-F238E27FC236}">
-                <a16:creationId xmlns:a16="http://schemas.microsoft.com/office/drawing/2014/main" id="{12131F71-CF7E-3DA4-7847-3ACEC01625C3}"/>
-              </a:ext>
-            </a:extLst>
-          </p:cNvPr>
+          <p:cNvPr id="2" name="Title 1"/>
           <p:cNvSpPr>
             <a:spLocks noGrp="1"/>
           </p:cNvSpPr>
@@ -16358,8 +13622,8 @@
         </p:nvSpPr>
         <p:spPr>
           <a:xfrm>
-            <a:off x="446399" y="1392999"/>
-            <a:ext cx="4735201" cy="996952"/>
+            <a:off x="457201" y="204787"/>
+            <a:ext cx="3008313" cy="871538"/>
           </a:xfrm>
         </p:spPr>
         <p:txBody>
@@ -16378,13 +13642,7 @@
       </p:sp>
       <p:sp>
         <p:nvSpPr>
-          <p:cNvPr id="4" name="Text Placeholder 3">
-            <a:extLst>
-              <a:ext uri="{FF2B5EF4-FFF2-40B4-BE49-F238E27FC236}">
-                <a16:creationId xmlns:a16="http://schemas.microsoft.com/office/drawing/2014/main" id="{7381D285-C44D-D095-90F1-6D3CF7B2C883}"/>
-              </a:ext>
-            </a:extLst>
-          </p:cNvPr>
+          <p:cNvPr id="4" name="Text Placeholder 3"/>
           <p:cNvSpPr>
             <a:spLocks noGrp="1"/>
           </p:cNvSpPr>
@@ -16422,8 +13680,8 @@
           </p:nvPr>
         </p:nvGraphicFramePr>
         <p:xfrm>
-          <a:off x="5372100" y="1574800"/>
-          <a:ext cx="6362700" cy="4457700"/>
+          <a:off x="3568700" y="203200"/>
+          <a:ext cx="5105400" cy="4381500"/>
         </p:xfrm>
         <a:graphic>
           <a:graphicData uri="http://schemas.openxmlformats.org/drawingml/2006/table">
@@ -16432,9 +13690,9 @@
                 <a:tableStyleId>{5C22544A-7EE6-4342-B048-85BDC9FD1C3A}</a:tableStyleId>
               </a:tblPr>
               <a:tblGrid>
-                <a:gridCol w="2120900"/>
-                <a:gridCol w="2120900"/>
-                <a:gridCol w="2120900"/>
+                <a:gridCol w="1701800"/>
+                <a:gridCol w="1701800"/>
+                <a:gridCol w="1701800"/>
               </a:tblGrid>
               <a:tr h="0">
                 <a:tc>
@@ -16637,40 +13895,6 @@
           </a:graphicData>
         </a:graphic>
       </p:graphicFrame>
-      <p:sp>
-        <p:nvSpPr>
-          <p:cNvPr id="7" name="Slide Number Placeholder 6">
-            <a:extLst>
-              <a:ext uri="{FF2B5EF4-FFF2-40B4-BE49-F238E27FC236}">
-                <a16:creationId xmlns:a16="http://schemas.microsoft.com/office/drawing/2014/main" id="{7EC0C6E5-A864-8D29-B45D-21E23026496C}"/>
-              </a:ext>
-            </a:extLst>
-          </p:cNvPr>
-          <p:cNvSpPr>
-            <a:spLocks noGrp="1"/>
-          </p:cNvSpPr>
-          <p:nvPr>
-            <p:ph idx="12" sz="quarter" type="sldNum"/>
-          </p:nvPr>
-        </p:nvSpPr>
-        <p:spPr>
-          <a:xfrm>
-            <a:off x="8610600" y="6356350"/>
-            <a:ext cx="3135000" cy="365125"/>
-          </a:xfrm>
-        </p:spPr>
-        <p:txBody>
-          <a:bodyPr/>
-          <a:lstStyle/>
-          <a:p>
-            <a:fld id="{7FEFBAB6-26D0-44D8-BD53-612461CE1ACC}" type="slidenum">
-              <a:rPr lang="de-DE" smtClean="0"/>
-              <a:t>‹#›</a:t>
-            </a:fld>
-            <a:endParaRPr lang="de-DE"/>
-          </a:p>
-        </p:txBody>
-      </p:sp>
     </p:spTree>
   </p:cSld>
 </p:sld>
@@ -16695,13 +13919,7 @@
       </p:grpSpPr>
       <p:sp>
         <p:nvSpPr>
-          <p:cNvPr id="2" name="Title 1">
-            <a:extLst>
-              <a:ext uri="{FF2B5EF4-FFF2-40B4-BE49-F238E27FC236}">
-                <a16:creationId xmlns:a16="http://schemas.microsoft.com/office/drawing/2014/main" id="{12131F71-CF7E-3DA4-7847-3ACEC01625C3}"/>
-              </a:ext>
-            </a:extLst>
-          </p:cNvPr>
+          <p:cNvPr id="2" name="Title 1"/>
           <p:cNvSpPr>
             <a:spLocks noGrp="1"/>
           </p:cNvSpPr>
@@ -16711,8 +13929,8 @@
         </p:nvSpPr>
         <p:spPr>
           <a:xfrm>
-            <a:off x="446399" y="1392999"/>
-            <a:ext cx="4735201" cy="996952"/>
+            <a:off x="457201" y="204787"/>
+            <a:ext cx="3008313" cy="871538"/>
           </a:xfrm>
         </p:spPr>
         <p:txBody>
@@ -16731,13 +13949,7 @@
       </p:sp>
       <p:sp>
         <p:nvSpPr>
-          <p:cNvPr id="4" name="Text Placeholder 3">
-            <a:extLst>
-              <a:ext uri="{FF2B5EF4-FFF2-40B4-BE49-F238E27FC236}">
-                <a16:creationId xmlns:a16="http://schemas.microsoft.com/office/drawing/2014/main" id="{7381D285-C44D-D095-90F1-6D3CF7B2C883}"/>
-              </a:ext>
-            </a:extLst>
-          </p:cNvPr>
+          <p:cNvPr id="4" name="Text Placeholder 3"/>
           <p:cNvSpPr>
             <a:spLocks noGrp="1"/>
           </p:cNvSpPr>
@@ -16790,8 +14002,8 @@
         </p:blipFill>
         <p:spPr bwMode="auto">
           <a:xfrm>
-            <a:off x="5372100" y="1892300"/>
-            <a:ext cx="6362700" cy="3810000"/>
+            <a:off x="3568700" y="863600"/>
+            <a:ext cx="5105400" cy="3060700"/>
           </a:xfrm>
           <a:prstGeom prst="rect">
             <a:avLst/>
@@ -16804,40 +14016,6 @@
           </a:ln>
         </p:spPr>
       </p:pic>
-      <p:sp>
-        <p:nvSpPr>
-          <p:cNvPr id="7" name="Slide Number Placeholder 6">
-            <a:extLst>
-              <a:ext uri="{FF2B5EF4-FFF2-40B4-BE49-F238E27FC236}">
-                <a16:creationId xmlns:a16="http://schemas.microsoft.com/office/drawing/2014/main" id="{7EC0C6E5-A864-8D29-B45D-21E23026496C}"/>
-              </a:ext>
-            </a:extLst>
-          </p:cNvPr>
-          <p:cNvSpPr>
-            <a:spLocks noGrp="1"/>
-          </p:cNvSpPr>
-          <p:nvPr>
-            <p:ph idx="12" sz="quarter" type="sldNum"/>
-          </p:nvPr>
-        </p:nvSpPr>
-        <p:spPr>
-          <a:xfrm>
-            <a:off x="8610600" y="6356350"/>
-            <a:ext cx="3135000" cy="365125"/>
-          </a:xfrm>
-        </p:spPr>
-        <p:txBody>
-          <a:bodyPr/>
-          <a:lstStyle/>
-          <a:p>
-            <a:fld id="{7FEFBAB6-26D0-44D8-BD53-612461CE1ACC}" type="slidenum">
-              <a:rPr lang="de-DE" smtClean="0"/>
-              <a:t>‹#›</a:t>
-            </a:fld>
-            <a:endParaRPr lang="de-DE"/>
-          </a:p>
-        </p:txBody>
-      </p:sp>
     </p:spTree>
   </p:cSld>
 </p:sld>
@@ -16862,13 +14040,7 @@
       </p:grpSpPr>
       <p:sp>
         <p:nvSpPr>
-          <p:cNvPr id="2" name="Title 1">
-            <a:extLst>
-              <a:ext uri="{FF2B5EF4-FFF2-40B4-BE49-F238E27FC236}">
-                <a16:creationId xmlns:a16="http://schemas.microsoft.com/office/drawing/2014/main" id="{6BF04AE0-F94F-A586-34B8-68D9CAB6C6D1}"/>
-              </a:ext>
-            </a:extLst>
-          </p:cNvPr>
+          <p:cNvPr id="2" name="Title 1"/>
           <p:cNvSpPr>
             <a:spLocks noGrp="1"/>
           </p:cNvSpPr>
@@ -16876,12 +14048,7 @@
             <p:ph type="title"/>
           </p:nvPr>
         </p:nvSpPr>
-        <p:spPr>
-          <a:xfrm>
-            <a:off x="2295524" y="432532"/>
-            <a:ext cx="9450077" cy="825501"/>
-          </a:xfrm>
-        </p:spPr>
+        <p:spPr/>
         <p:txBody>
           <a:bodyPr/>
           <a:lstStyle/>
@@ -16893,40 +14060,6 @@
               <a:rPr/>
               <a:t>Questions from the previous submodule?</a:t>
             </a:r>
-          </a:p>
-        </p:txBody>
-      </p:sp>
-      <p:sp>
-        <p:nvSpPr>
-          <p:cNvPr id="6" name="Slide Number Placeholder 5">
-            <a:extLst>
-              <a:ext uri="{FF2B5EF4-FFF2-40B4-BE49-F238E27FC236}">
-                <a16:creationId xmlns:a16="http://schemas.microsoft.com/office/drawing/2014/main" id="{5F33F24B-1A9E-2EAF-F2AB-89426454DEE9}"/>
-              </a:ext>
-            </a:extLst>
-          </p:cNvPr>
-          <p:cNvSpPr>
-            <a:spLocks noGrp="1"/>
-          </p:cNvSpPr>
-          <p:nvPr>
-            <p:ph idx="12" sz="quarter" type="sldNum"/>
-          </p:nvPr>
-        </p:nvSpPr>
-        <p:spPr>
-          <a:xfrm>
-            <a:off x="8610599" y="6356350"/>
-            <a:ext cx="3135001" cy="365125"/>
-          </a:xfrm>
-        </p:spPr>
-        <p:txBody>
-          <a:bodyPr/>
-          <a:lstStyle/>
-          <a:p>
-            <a:fld id="{7FEFBAB6-26D0-44D8-BD53-612461CE1ACC}" type="slidenum">
-              <a:rPr lang="de-DE" smtClean="0"/>
-              <a:t>‹#›</a:t>
-            </a:fld>
-            <a:endParaRPr lang="de-DE"/>
           </a:p>
         </p:txBody>
       </p:sp>
@@ -16938,7 +14071,7 @@
 <file path=ppt/theme/theme1.xml><?xml version="1.0" encoding="utf-8"?>
 <a:theme xmlns:a="http://schemas.openxmlformats.org/drawingml/2006/main" name="Office Theme">
   <a:themeElements>
-    <a:clrScheme name="Custom 1">
+    <a:clrScheme name="Office">
       <a:dk1>
         <a:sysClr val="windowText" lastClr="000000"/>
       </a:dk1>
@@ -16946,44 +14079,44 @@
         <a:sysClr val="window" lastClr="FFFFFF"/>
       </a:lt1>
       <a:dk2>
-        <a:srgbClr val="0E2841"/>
+        <a:srgbClr val="1F497D"/>
       </a:dk2>
       <a:lt2>
-        <a:srgbClr val="E8E8E8"/>
+        <a:srgbClr val="EEECE1"/>
       </a:lt2>
       <a:accent1>
-        <a:srgbClr val="3A7D22"/>
+        <a:srgbClr val="4F81BD"/>
       </a:accent1>
       <a:accent2>
-        <a:srgbClr val="E97132"/>
+        <a:srgbClr val="C0504D"/>
       </a:accent2>
       <a:accent3>
-        <a:srgbClr val="196B24"/>
+        <a:srgbClr val="9BBB59"/>
       </a:accent3>
       <a:accent4>
-        <a:srgbClr val="0F9ED5"/>
+        <a:srgbClr val="8064A2"/>
       </a:accent4>
       <a:accent5>
-        <a:srgbClr val="A02B93"/>
+        <a:srgbClr val="4BACC6"/>
       </a:accent5>
       <a:accent6>
-        <a:srgbClr val="4EA72E"/>
+        <a:srgbClr val="F79646"/>
       </a:accent6>
       <a:hlink>
-        <a:srgbClr val="467886"/>
+        <a:srgbClr val="0000FF"/>
       </a:hlink>
       <a:folHlink>
-        <a:srgbClr val="96607D"/>
+        <a:srgbClr val="800080"/>
       </a:folHlink>
     </a:clrScheme>
     <a:fontScheme name="Office">
       <a:majorFont>
-        <a:latin typeface="Aptos Display" panose="02110004020202020204"/>
+        <a:latin typeface="Calibri"/>
         <a:ea typeface=""/>
         <a:cs typeface=""/>
-        <a:font script="Jpan" typeface="游ゴシック Light"/>
+        <a:font script="Jpan" typeface="ＭＳ Ｐゴシック"/>
         <a:font script="Hang" typeface="맑은 고딕"/>
-        <a:font script="Hans" typeface="等线 Light"/>
+        <a:font script="Hans" typeface="宋体"/>
         <a:font script="Hant" typeface="新細明體"/>
         <a:font script="Arab" typeface="Times New Roman"/>
         <a:font script="Hebr" typeface="Times New Roman"/>
@@ -17011,31 +14144,14 @@
         <a:font script="Viet" typeface="Times New Roman"/>
         <a:font script="Uigh" typeface="Microsoft Uighur"/>
         <a:font script="Geor" typeface="Sylfaen"/>
-        <a:font script="Armn" typeface="Arial"/>
-        <a:font script="Bugi" typeface="Leelawadee UI"/>
-        <a:font script="Bopo" typeface="Microsoft JhengHei"/>
-        <a:font script="Java" typeface="Javanese Text"/>
-        <a:font script="Lisu" typeface="Segoe UI"/>
-        <a:font script="Mymr" typeface="Myanmar Text"/>
-        <a:font script="Nkoo" typeface="Ebrima"/>
-        <a:font script="Olck" typeface="Nirmala UI"/>
-        <a:font script="Osma" typeface="Ebrima"/>
-        <a:font script="Phag" typeface="Phagspa"/>
-        <a:font script="Syrn" typeface="Estrangelo Edessa"/>
-        <a:font script="Syrj" typeface="Estrangelo Edessa"/>
-        <a:font script="Syre" typeface="Estrangelo Edessa"/>
-        <a:font script="Sora" typeface="Nirmala UI"/>
-        <a:font script="Tale" typeface="Microsoft Tai Le"/>
-        <a:font script="Talu" typeface="Microsoft New Tai Lue"/>
-        <a:font script="Tfng" typeface="Ebrima"/>
       </a:majorFont>
       <a:minorFont>
-        <a:latin typeface="Aptos" panose="02110004020202020204"/>
+        <a:latin typeface="Calibri"/>
         <a:ea typeface=""/>
         <a:cs typeface=""/>
-        <a:font script="Jpan" typeface="游ゴシック"/>
+        <a:font script="Jpan" typeface="ＭＳ Ｐゴシック"/>
         <a:font script="Hang" typeface="맑은 고딕"/>
-        <a:font script="Hans" typeface="等线"/>
+        <a:font script="Hans" typeface="宋体"/>
         <a:font script="Hant" typeface="新細明體"/>
         <a:font script="Arab" typeface="Arial"/>
         <a:font script="Hebr" typeface="Arial"/>
@@ -17063,23 +14179,326 @@
         <a:font script="Viet" typeface="Arial"/>
         <a:font script="Uigh" typeface="Microsoft Uighur"/>
         <a:font script="Geor" typeface="Sylfaen"/>
-        <a:font script="Armn" typeface="Arial"/>
-        <a:font script="Bugi" typeface="Leelawadee UI"/>
-        <a:font script="Bopo" typeface="Microsoft JhengHei"/>
-        <a:font script="Java" typeface="Javanese Text"/>
-        <a:font script="Lisu" typeface="Segoe UI"/>
-        <a:font script="Mymr" typeface="Myanmar Text"/>
-        <a:font script="Nkoo" typeface="Ebrima"/>
-        <a:font script="Olck" typeface="Nirmala UI"/>
-        <a:font script="Osma" typeface="Ebrima"/>
-        <a:font script="Phag" typeface="Phagspa"/>
-        <a:font script="Syrn" typeface="Estrangelo Edessa"/>
-        <a:font script="Syrj" typeface="Estrangelo Edessa"/>
-        <a:font script="Syre" typeface="Estrangelo Edessa"/>
-        <a:font script="Sora" typeface="Nirmala UI"/>
-        <a:font script="Tale" typeface="Microsoft Tai Le"/>
-        <a:font script="Talu" typeface="Microsoft New Tai Lue"/>
-        <a:font script="Tfng" typeface="Ebrima"/>
+      </a:minorFont>
+    </a:fontScheme>
+    <a:fmtScheme name="Office">
+      <a:fillStyleLst>
+        <a:solidFill>
+          <a:schemeClr val="phClr"/>
+        </a:solidFill>
+        <a:gradFill rotWithShape="1">
+          <a:gsLst>
+            <a:gs pos="0">
+              <a:schemeClr val="phClr">
+                <a:tint val="50000"/>
+                <a:satMod val="300000"/>
+              </a:schemeClr>
+            </a:gs>
+            <a:gs pos="35000">
+              <a:schemeClr val="phClr">
+                <a:tint val="37000"/>
+                <a:satMod val="300000"/>
+              </a:schemeClr>
+            </a:gs>
+            <a:gs pos="100000">
+              <a:schemeClr val="phClr">
+                <a:tint val="15000"/>
+                <a:satMod val="350000"/>
+              </a:schemeClr>
+            </a:gs>
+          </a:gsLst>
+          <a:lin ang="16200000" scaled="1"/>
+        </a:gradFill>
+        <a:gradFill rotWithShape="1">
+          <a:gsLst>
+            <a:gs pos="0">
+              <a:schemeClr val="phClr">
+                <a:tint val="100000"/>
+                <a:shade val="100000"/>
+                <a:satMod val="130000"/>
+              </a:schemeClr>
+            </a:gs>
+            <a:gs pos="100000">
+              <a:schemeClr val="phClr">
+                <a:tint val="50000"/>
+                <a:shade val="100000"/>
+                <a:satMod val="350000"/>
+              </a:schemeClr>
+            </a:gs>
+          </a:gsLst>
+          <a:lin ang="16200000" scaled="0"/>
+        </a:gradFill>
+      </a:fillStyleLst>
+      <a:lnStyleLst>
+        <a:ln w="9525" cap="flat" cmpd="sng" algn="ctr">
+          <a:solidFill>
+            <a:schemeClr val="phClr">
+              <a:shade val="95000"/>
+              <a:satMod val="105000"/>
+            </a:schemeClr>
+          </a:solidFill>
+          <a:prstDash val="solid"/>
+        </a:ln>
+        <a:ln w="25400" cap="flat" cmpd="sng" algn="ctr">
+          <a:solidFill>
+            <a:schemeClr val="phClr"/>
+          </a:solidFill>
+          <a:prstDash val="solid"/>
+        </a:ln>
+        <a:ln w="38100" cap="flat" cmpd="sng" algn="ctr">
+          <a:solidFill>
+            <a:schemeClr val="phClr"/>
+          </a:solidFill>
+          <a:prstDash val="solid"/>
+        </a:ln>
+      </a:lnStyleLst>
+      <a:effectStyleLst>
+        <a:effectStyle>
+          <a:effectLst>
+            <a:outerShdw blurRad="40000" dist="20000" dir="5400000" rotWithShape="0">
+              <a:srgbClr val="000000">
+                <a:alpha val="38000"/>
+              </a:srgbClr>
+            </a:outerShdw>
+          </a:effectLst>
+        </a:effectStyle>
+        <a:effectStyle>
+          <a:effectLst>
+            <a:outerShdw blurRad="40000" dist="23000" dir="5400000" rotWithShape="0">
+              <a:srgbClr val="000000">
+                <a:alpha val="35000"/>
+              </a:srgbClr>
+            </a:outerShdw>
+          </a:effectLst>
+        </a:effectStyle>
+        <a:effectStyle>
+          <a:effectLst>
+            <a:outerShdw blurRad="40000" dist="23000" dir="5400000" rotWithShape="0">
+              <a:srgbClr val="000000">
+                <a:alpha val="35000"/>
+              </a:srgbClr>
+            </a:outerShdw>
+          </a:effectLst>
+          <a:scene3d>
+            <a:camera prst="orthographicFront">
+              <a:rot lat="0" lon="0" rev="0"/>
+            </a:camera>
+            <a:lightRig rig="threePt" dir="t">
+              <a:rot lat="0" lon="0" rev="1200000"/>
+            </a:lightRig>
+          </a:scene3d>
+          <a:sp3d>
+            <a:bevelT w="63500" h="25400"/>
+          </a:sp3d>
+        </a:effectStyle>
+      </a:effectStyleLst>
+      <a:bgFillStyleLst>
+        <a:solidFill>
+          <a:schemeClr val="phClr"/>
+        </a:solidFill>
+        <a:gradFill rotWithShape="1">
+          <a:gsLst>
+            <a:gs pos="0">
+              <a:schemeClr val="phClr">
+                <a:tint val="40000"/>
+                <a:satMod val="350000"/>
+              </a:schemeClr>
+            </a:gs>
+            <a:gs pos="40000">
+              <a:schemeClr val="phClr">
+                <a:tint val="45000"/>
+                <a:shade val="99000"/>
+                <a:satMod val="350000"/>
+              </a:schemeClr>
+            </a:gs>
+            <a:gs pos="100000">
+              <a:schemeClr val="phClr">
+                <a:shade val="20000"/>
+                <a:satMod val="255000"/>
+              </a:schemeClr>
+            </a:gs>
+          </a:gsLst>
+          <a:path path="circle">
+            <a:fillToRect l="50000" t="-80000" r="50000" b="180000"/>
+          </a:path>
+        </a:gradFill>
+        <a:gradFill rotWithShape="1">
+          <a:gsLst>
+            <a:gs pos="0">
+              <a:schemeClr val="phClr">
+                <a:tint val="80000"/>
+                <a:satMod val="300000"/>
+              </a:schemeClr>
+            </a:gs>
+            <a:gs pos="100000">
+              <a:schemeClr val="phClr">
+                <a:shade val="30000"/>
+                <a:satMod val="200000"/>
+              </a:schemeClr>
+            </a:gs>
+          </a:gsLst>
+          <a:path path="circle">
+            <a:fillToRect l="50000" t="50000" r="50000" b="50000"/>
+          </a:path>
+        </a:gradFill>
+      </a:bgFillStyleLst>
+    </a:fmtScheme>
+  </a:themeElements>
+  <a:objectDefaults>
+    <a:spDef>
+      <a:spPr/>
+      <a:bodyPr/>
+      <a:lstStyle/>
+      <a:style>
+        <a:lnRef idx="1">
+          <a:schemeClr val="accent1"/>
+        </a:lnRef>
+        <a:fillRef idx="3">
+          <a:schemeClr val="accent1"/>
+        </a:fillRef>
+        <a:effectRef idx="2">
+          <a:schemeClr val="accent1"/>
+        </a:effectRef>
+        <a:fontRef idx="minor">
+          <a:schemeClr val="lt1"/>
+        </a:fontRef>
+      </a:style>
+    </a:spDef>
+    <a:lnDef>
+      <a:spPr/>
+      <a:bodyPr/>
+      <a:lstStyle/>
+      <a:style>
+        <a:lnRef idx="2">
+          <a:schemeClr val="accent1"/>
+        </a:lnRef>
+        <a:fillRef idx="0">
+          <a:schemeClr val="accent1"/>
+        </a:fillRef>
+        <a:effectRef idx="1">
+          <a:schemeClr val="accent1"/>
+        </a:effectRef>
+        <a:fontRef idx="minor">
+          <a:schemeClr val="tx1"/>
+        </a:fontRef>
+      </a:style>
+    </a:lnDef>
+  </a:objectDefaults>
+  <a:extraClrSchemeLst/>
+</a:theme>
+</file>
+
+<file path=ppt/theme/theme2.xml><?xml version="1.0" encoding="utf-8"?>
+<a:theme xmlns:a="http://schemas.openxmlformats.org/drawingml/2006/main" name="Office Theme">
+  <a:themeElements>
+    <a:clrScheme name="Office">
+      <a:dk1>
+        <a:sysClr val="windowText" lastClr="000000"/>
+      </a:dk1>
+      <a:lt1>
+        <a:sysClr val="window" lastClr="FFFFFF"/>
+      </a:lt1>
+      <a:dk2>
+        <a:srgbClr val="44546A"/>
+      </a:dk2>
+      <a:lt2>
+        <a:srgbClr val="E7E6E6"/>
+      </a:lt2>
+      <a:accent1>
+        <a:srgbClr val="5B9BD5"/>
+      </a:accent1>
+      <a:accent2>
+        <a:srgbClr val="ED7D31"/>
+      </a:accent2>
+      <a:accent3>
+        <a:srgbClr val="A5A5A5"/>
+      </a:accent3>
+      <a:accent4>
+        <a:srgbClr val="FFC000"/>
+      </a:accent4>
+      <a:accent5>
+        <a:srgbClr val="4472C4"/>
+      </a:accent5>
+      <a:accent6>
+        <a:srgbClr val="70AD47"/>
+      </a:accent6>
+      <a:hlink>
+        <a:srgbClr val="0563C1"/>
+      </a:hlink>
+      <a:folHlink>
+        <a:srgbClr val="954F72"/>
+      </a:folHlink>
+    </a:clrScheme>
+    <a:fontScheme name="Office">
+      <a:majorFont>
+        <a:latin typeface="Calibri Light" panose="020F0302020204030204"/>
+        <a:ea typeface=""/>
+        <a:cs typeface=""/>
+        <a:font script="Jpan" typeface="ＭＳ Ｐゴシック"/>
+        <a:font script="Hang" typeface="맑은 고딕"/>
+        <a:font script="Hans" typeface="宋体"/>
+        <a:font script="Hant" typeface="新細明體"/>
+        <a:font script="Arab" typeface="Times New Roman"/>
+        <a:font script="Hebr" typeface="Times New Roman"/>
+        <a:font script="Thai" typeface="Angsana New"/>
+        <a:font script="Ethi" typeface="Nyala"/>
+        <a:font script="Beng" typeface="Vrinda"/>
+        <a:font script="Gujr" typeface="Shruti"/>
+        <a:font script="Khmr" typeface="MoolBoran"/>
+        <a:font script="Knda" typeface="Tunga"/>
+        <a:font script="Guru" typeface="Raavi"/>
+        <a:font script="Cans" typeface="Euphemia"/>
+        <a:font script="Cher" typeface="Plantagenet Cherokee"/>
+        <a:font script="Yiii" typeface="Microsoft Yi Baiti"/>
+        <a:font script="Tibt" typeface="Microsoft Himalaya"/>
+        <a:font script="Thaa" typeface="MV Boli"/>
+        <a:font script="Deva" typeface="Mangal"/>
+        <a:font script="Telu" typeface="Gautami"/>
+        <a:font script="Taml" typeface="Latha"/>
+        <a:font script="Syrc" typeface="Estrangelo Edessa"/>
+        <a:font script="Orya" typeface="Kalinga"/>
+        <a:font script="Mlym" typeface="Kartika"/>
+        <a:font script="Laoo" typeface="DokChampa"/>
+        <a:font script="Sinh" typeface="Iskoola Pota"/>
+        <a:font script="Mong" typeface="Mongolian Baiti"/>
+        <a:font script="Viet" typeface="Times New Roman"/>
+        <a:font script="Uigh" typeface="Microsoft Uighur"/>
+        <a:font script="Geor" typeface="Sylfaen"/>
+      </a:majorFont>
+      <a:minorFont>
+        <a:latin typeface="Calibri" panose="020F0502020204030204"/>
+        <a:ea typeface=""/>
+        <a:cs typeface=""/>
+        <a:font script="Jpan" typeface="ＭＳ Ｐゴシック"/>
+        <a:font script="Hang" typeface="맑은 고딕"/>
+        <a:font script="Hans" typeface="宋体"/>
+        <a:font script="Hant" typeface="新細明體"/>
+        <a:font script="Arab" typeface="Arial"/>
+        <a:font script="Hebr" typeface="Arial"/>
+        <a:font script="Thai" typeface="Cordia New"/>
+        <a:font script="Ethi" typeface="Nyala"/>
+        <a:font script="Beng" typeface="Vrinda"/>
+        <a:font script="Gujr" typeface="Shruti"/>
+        <a:font script="Khmr" typeface="DaunPenh"/>
+        <a:font script="Knda" typeface="Tunga"/>
+        <a:font script="Guru" typeface="Raavi"/>
+        <a:font script="Cans" typeface="Euphemia"/>
+        <a:font script="Cher" typeface="Plantagenet Cherokee"/>
+        <a:font script="Yiii" typeface="Microsoft Yi Baiti"/>
+        <a:font script="Tibt" typeface="Microsoft Himalaya"/>
+        <a:font script="Thaa" typeface="MV Boli"/>
+        <a:font script="Deva" typeface="Mangal"/>
+        <a:font script="Telu" typeface="Gautami"/>
+        <a:font script="Taml" typeface="Latha"/>
+        <a:font script="Syrc" typeface="Estrangelo Edessa"/>
+        <a:font script="Orya" typeface="Kalinga"/>
+        <a:font script="Mlym" typeface="Kartika"/>
+        <a:font script="Laoo" typeface="DokChampa"/>
+        <a:font script="Sinh" typeface="Iskoola Pota"/>
+        <a:font script="Mong" typeface="Mongolian Baiti"/>
+        <a:font script="Viet" typeface="Arial"/>
+        <a:font script="Uigh" typeface="Microsoft Uighur"/>
+        <a:font script="Geor" typeface="Sylfaen"/>
       </a:minorFont>
     </a:fontScheme>
     <a:fmtScheme name="Office">
@@ -17141,6 +14560,13 @@
         </a:gradFill>
       </a:fillStyleLst>
       <a:lnStyleLst>
+        <a:ln w="6350" cap="flat" cmpd="sng" algn="ctr">
+          <a:solidFill>
+            <a:schemeClr val="phClr"/>
+          </a:solidFill>
+          <a:prstDash val="solid"/>
+          <a:miter lim="800000"/>
+        </a:ln>
         <a:ln w="12700" cap="flat" cmpd="sng" algn="ctr">
           <a:solidFill>
             <a:schemeClr val="phClr"/>
@@ -17149,13 +14575,6 @@
           <a:miter lim="800000"/>
         </a:ln>
         <a:ln w="19050" cap="flat" cmpd="sng" algn="ctr">
-          <a:solidFill>
-            <a:schemeClr val="phClr"/>
-          </a:solidFill>
-          <a:prstDash val="solid"/>
-          <a:miter lim="800000"/>
-        </a:ln>
-        <a:ln w="25400" cap="flat" cmpd="sng" algn="ctr">
           <a:solidFill>
             <a:schemeClr val="phClr"/>
           </a:solidFill>
@@ -17220,346 +14639,11 @@
       </a:bgFillStyleLst>
     </a:fmtScheme>
   </a:themeElements>
-  <a:objectDefaults>
-    <a:lnDef>
-      <a:spPr/>
-      <a:bodyPr/>
-      <a:lstStyle/>
-      <a:style>
-        <a:lnRef idx="2">
-          <a:schemeClr val="accent1"/>
-        </a:lnRef>
-        <a:fillRef idx="0">
-          <a:schemeClr val="accent1"/>
-        </a:fillRef>
-        <a:effectRef idx="1">
-          <a:schemeClr val="accent1"/>
-        </a:effectRef>
-        <a:fontRef idx="minor">
-          <a:schemeClr val="tx1"/>
-        </a:fontRef>
-      </a:style>
-    </a:lnDef>
-  </a:objectDefaults>
+  <a:objectDefaults/>
   <a:extraClrSchemeLst/>
   <a:extLst>
     <a:ext uri="{05A4C25C-085E-4340-85A3-A5531E510DB2}">
-      <thm15:themeFamily xmlns:thm15="http://schemas.microsoft.com/office/thememl/2012/main" name="Office Theme" id="{2E142A2C-CD16-42D6-873A-C26D2A0506FA}" vid="{1BDDFF52-6CD6-40A5-AB3C-68EB2F1E4D0A}"/>
-    </a:ext>
-  </a:extLst>
-</a:theme>
-</file>
-
-<file path=ppt/theme/theme2.xml><?xml version="1.0" encoding="utf-8"?>
-<a:theme xmlns:a="http://schemas.openxmlformats.org/drawingml/2006/main" name="Office Theme">
-  <a:themeElements>
-    <a:clrScheme name="Office">
-      <a:dk1>
-        <a:sysClr val="windowText" lastClr="000000"/>
-      </a:dk1>
-      <a:lt1>
-        <a:sysClr val="window" lastClr="FFFFFF"/>
-      </a:lt1>
-      <a:dk2>
-        <a:srgbClr val="0E2841"/>
-      </a:dk2>
-      <a:lt2>
-        <a:srgbClr val="E8E8E8"/>
-      </a:lt2>
-      <a:accent1>
-        <a:srgbClr val="156082"/>
-      </a:accent1>
-      <a:accent2>
-        <a:srgbClr val="E97132"/>
-      </a:accent2>
-      <a:accent3>
-        <a:srgbClr val="196B24"/>
-      </a:accent3>
-      <a:accent4>
-        <a:srgbClr val="0F9ED5"/>
-      </a:accent4>
-      <a:accent5>
-        <a:srgbClr val="A02B93"/>
-      </a:accent5>
-      <a:accent6>
-        <a:srgbClr val="4EA72E"/>
-      </a:accent6>
-      <a:hlink>
-        <a:srgbClr val="467886"/>
-      </a:hlink>
-      <a:folHlink>
-        <a:srgbClr val="96607D"/>
-      </a:folHlink>
-    </a:clrScheme>
-    <a:fontScheme name="Office">
-      <a:majorFont>
-        <a:latin typeface="Aptos Display" panose="02110004020202020204"/>
-        <a:ea typeface=""/>
-        <a:cs typeface=""/>
-        <a:font script="Jpan" typeface="游ゴシック Light"/>
-        <a:font script="Hang" typeface="맑은 고딕"/>
-        <a:font script="Hans" typeface="等线 Light"/>
-        <a:font script="Hant" typeface="新細明體"/>
-        <a:font script="Arab" typeface="Times New Roman"/>
-        <a:font script="Hebr" typeface="Times New Roman"/>
-        <a:font script="Thai" typeface="Angsana New"/>
-        <a:font script="Ethi" typeface="Nyala"/>
-        <a:font script="Beng" typeface="Vrinda"/>
-        <a:font script="Gujr" typeface="Shruti"/>
-        <a:font script="Khmr" typeface="MoolBoran"/>
-        <a:font script="Knda" typeface="Tunga"/>
-        <a:font script="Guru" typeface="Raavi"/>
-        <a:font script="Cans" typeface="Euphemia"/>
-        <a:font script="Cher" typeface="Plantagenet Cherokee"/>
-        <a:font script="Yiii" typeface="Microsoft Yi Baiti"/>
-        <a:font script="Tibt" typeface="Microsoft Himalaya"/>
-        <a:font script="Thaa" typeface="MV Boli"/>
-        <a:font script="Deva" typeface="Mangal"/>
-        <a:font script="Telu" typeface="Gautami"/>
-        <a:font script="Taml" typeface="Latha"/>
-        <a:font script="Syrc" typeface="Estrangelo Edessa"/>
-        <a:font script="Orya" typeface="Kalinga"/>
-        <a:font script="Mlym" typeface="Kartika"/>
-        <a:font script="Laoo" typeface="DokChampa"/>
-        <a:font script="Sinh" typeface="Iskoola Pota"/>
-        <a:font script="Mong" typeface="Mongolian Baiti"/>
-        <a:font script="Viet" typeface="Times New Roman"/>
-        <a:font script="Uigh" typeface="Microsoft Uighur"/>
-        <a:font script="Geor" typeface="Sylfaen"/>
-        <a:font script="Armn" typeface="Arial"/>
-        <a:font script="Bugi" typeface="Leelawadee UI"/>
-        <a:font script="Bopo" typeface="Microsoft JhengHei"/>
-        <a:font script="Java" typeface="Javanese Text"/>
-        <a:font script="Lisu" typeface="Segoe UI"/>
-        <a:font script="Mymr" typeface="Myanmar Text"/>
-        <a:font script="Nkoo" typeface="Ebrima"/>
-        <a:font script="Olck" typeface="Nirmala UI"/>
-        <a:font script="Osma" typeface="Ebrima"/>
-        <a:font script="Phag" typeface="Phagspa"/>
-        <a:font script="Syrn" typeface="Estrangelo Edessa"/>
-        <a:font script="Syrj" typeface="Estrangelo Edessa"/>
-        <a:font script="Syre" typeface="Estrangelo Edessa"/>
-        <a:font script="Sora" typeface="Nirmala UI"/>
-        <a:font script="Tale" typeface="Microsoft Tai Le"/>
-        <a:font script="Talu" typeface="Microsoft New Tai Lue"/>
-        <a:font script="Tfng" typeface="Ebrima"/>
-      </a:majorFont>
-      <a:minorFont>
-        <a:latin typeface="Aptos" panose="02110004020202020204"/>
-        <a:ea typeface=""/>
-        <a:cs typeface=""/>
-        <a:font script="Jpan" typeface="游ゴシック"/>
-        <a:font script="Hang" typeface="맑은 고딕"/>
-        <a:font script="Hans" typeface="等线"/>
-        <a:font script="Hant" typeface="新細明體"/>
-        <a:font script="Arab" typeface="Arial"/>
-        <a:font script="Hebr" typeface="Arial"/>
-        <a:font script="Thai" typeface="Cordia New"/>
-        <a:font script="Ethi" typeface="Nyala"/>
-        <a:font script="Beng" typeface="Vrinda"/>
-        <a:font script="Gujr" typeface="Shruti"/>
-        <a:font script="Khmr" typeface="DaunPenh"/>
-        <a:font script="Knda" typeface="Tunga"/>
-        <a:font script="Guru" typeface="Raavi"/>
-        <a:font script="Cans" typeface="Euphemia"/>
-        <a:font script="Cher" typeface="Plantagenet Cherokee"/>
-        <a:font script="Yiii" typeface="Microsoft Yi Baiti"/>
-        <a:font script="Tibt" typeface="Microsoft Himalaya"/>
-        <a:font script="Thaa" typeface="MV Boli"/>
-        <a:font script="Deva" typeface="Mangal"/>
-        <a:font script="Telu" typeface="Gautami"/>
-        <a:font script="Taml" typeface="Latha"/>
-        <a:font script="Syrc" typeface="Estrangelo Edessa"/>
-        <a:font script="Orya" typeface="Kalinga"/>
-        <a:font script="Mlym" typeface="Kartika"/>
-        <a:font script="Laoo" typeface="DokChampa"/>
-        <a:font script="Sinh" typeface="Iskoola Pota"/>
-        <a:font script="Mong" typeface="Mongolian Baiti"/>
-        <a:font script="Viet" typeface="Arial"/>
-        <a:font script="Uigh" typeface="Microsoft Uighur"/>
-        <a:font script="Geor" typeface="Sylfaen"/>
-        <a:font script="Armn" typeface="Arial"/>
-        <a:font script="Bugi" typeface="Leelawadee UI"/>
-        <a:font script="Bopo" typeface="Microsoft JhengHei"/>
-        <a:font script="Java" typeface="Javanese Text"/>
-        <a:font script="Lisu" typeface="Segoe UI"/>
-        <a:font script="Mymr" typeface="Myanmar Text"/>
-        <a:font script="Nkoo" typeface="Ebrima"/>
-        <a:font script="Olck" typeface="Nirmala UI"/>
-        <a:font script="Osma" typeface="Ebrima"/>
-        <a:font script="Phag" typeface="Phagspa"/>
-        <a:font script="Syrn" typeface="Estrangelo Edessa"/>
-        <a:font script="Syrj" typeface="Estrangelo Edessa"/>
-        <a:font script="Syre" typeface="Estrangelo Edessa"/>
-        <a:font script="Sora" typeface="Nirmala UI"/>
-        <a:font script="Tale" typeface="Microsoft Tai Le"/>
-        <a:font script="Talu" typeface="Microsoft New Tai Lue"/>
-        <a:font script="Tfng" typeface="Ebrima"/>
-      </a:minorFont>
-    </a:fontScheme>
-    <a:fmtScheme name="Office">
-      <a:fillStyleLst>
-        <a:solidFill>
-          <a:schemeClr val="phClr"/>
-        </a:solidFill>
-        <a:gradFill rotWithShape="1">
-          <a:gsLst>
-            <a:gs pos="0">
-              <a:schemeClr val="phClr">
-                <a:lumMod val="110000"/>
-                <a:satMod val="105000"/>
-                <a:tint val="67000"/>
-              </a:schemeClr>
-            </a:gs>
-            <a:gs pos="50000">
-              <a:schemeClr val="phClr">
-                <a:lumMod val="105000"/>
-                <a:satMod val="103000"/>
-                <a:tint val="73000"/>
-              </a:schemeClr>
-            </a:gs>
-            <a:gs pos="100000">
-              <a:schemeClr val="phClr">
-                <a:lumMod val="105000"/>
-                <a:satMod val="109000"/>
-                <a:tint val="81000"/>
-              </a:schemeClr>
-            </a:gs>
-          </a:gsLst>
-          <a:lin ang="5400000" scaled="0"/>
-        </a:gradFill>
-        <a:gradFill rotWithShape="1">
-          <a:gsLst>
-            <a:gs pos="0">
-              <a:schemeClr val="phClr">
-                <a:satMod val="103000"/>
-                <a:lumMod val="102000"/>
-                <a:tint val="94000"/>
-              </a:schemeClr>
-            </a:gs>
-            <a:gs pos="50000">
-              <a:schemeClr val="phClr">
-                <a:satMod val="110000"/>
-                <a:lumMod val="100000"/>
-                <a:shade val="100000"/>
-              </a:schemeClr>
-            </a:gs>
-            <a:gs pos="100000">
-              <a:schemeClr val="phClr">
-                <a:lumMod val="99000"/>
-                <a:satMod val="120000"/>
-                <a:shade val="78000"/>
-              </a:schemeClr>
-            </a:gs>
-          </a:gsLst>
-          <a:lin ang="5400000" scaled="0"/>
-        </a:gradFill>
-      </a:fillStyleLst>
-      <a:lnStyleLst>
-        <a:ln w="12700" cap="flat" cmpd="sng" algn="ctr">
-          <a:solidFill>
-            <a:schemeClr val="phClr"/>
-          </a:solidFill>
-          <a:prstDash val="solid"/>
-          <a:miter lim="800000"/>
-        </a:ln>
-        <a:ln w="19050" cap="flat" cmpd="sng" algn="ctr">
-          <a:solidFill>
-            <a:schemeClr val="phClr"/>
-          </a:solidFill>
-          <a:prstDash val="solid"/>
-          <a:miter lim="800000"/>
-        </a:ln>
-        <a:ln w="25400" cap="flat" cmpd="sng" algn="ctr">
-          <a:solidFill>
-            <a:schemeClr val="phClr"/>
-          </a:solidFill>
-          <a:prstDash val="solid"/>
-          <a:miter lim="800000"/>
-        </a:ln>
-      </a:lnStyleLst>
-      <a:effectStyleLst>
-        <a:effectStyle>
-          <a:effectLst/>
-        </a:effectStyle>
-        <a:effectStyle>
-          <a:effectLst/>
-        </a:effectStyle>
-        <a:effectStyle>
-          <a:effectLst>
-            <a:outerShdw blurRad="57150" dist="19050" dir="5400000" algn="ctr" rotWithShape="0">
-              <a:srgbClr val="000000">
-                <a:alpha val="63000"/>
-              </a:srgbClr>
-            </a:outerShdw>
-          </a:effectLst>
-        </a:effectStyle>
-      </a:effectStyleLst>
-      <a:bgFillStyleLst>
-        <a:solidFill>
-          <a:schemeClr val="phClr"/>
-        </a:solidFill>
-        <a:solidFill>
-          <a:schemeClr val="phClr">
-            <a:tint val="95000"/>
-            <a:satMod val="170000"/>
-          </a:schemeClr>
-        </a:solidFill>
-        <a:gradFill rotWithShape="1">
-          <a:gsLst>
-            <a:gs pos="0">
-              <a:schemeClr val="phClr">
-                <a:tint val="93000"/>
-                <a:satMod val="150000"/>
-                <a:shade val="98000"/>
-                <a:lumMod val="102000"/>
-              </a:schemeClr>
-            </a:gs>
-            <a:gs pos="50000">
-              <a:schemeClr val="phClr">
-                <a:tint val="98000"/>
-                <a:satMod val="130000"/>
-                <a:shade val="90000"/>
-                <a:lumMod val="103000"/>
-              </a:schemeClr>
-            </a:gs>
-            <a:gs pos="100000">
-              <a:schemeClr val="phClr">
-                <a:shade val="63000"/>
-                <a:satMod val="120000"/>
-              </a:schemeClr>
-            </a:gs>
-          </a:gsLst>
-          <a:lin ang="5400000" scaled="0"/>
-        </a:gradFill>
-      </a:bgFillStyleLst>
-    </a:fmtScheme>
-  </a:themeElements>
-  <a:objectDefaults>
-    <a:lnDef>
-      <a:spPr/>
-      <a:bodyPr/>
-      <a:lstStyle/>
-      <a:style>
-        <a:lnRef idx="2">
-          <a:schemeClr val="accent1"/>
-        </a:lnRef>
-        <a:fillRef idx="0">
-          <a:schemeClr val="accent1"/>
-        </a:fillRef>
-        <a:effectRef idx="1">
-          <a:schemeClr val="accent1"/>
-        </a:effectRef>
-        <a:fontRef idx="minor">
-          <a:schemeClr val="tx1"/>
-        </a:fontRef>
-      </a:style>
-    </a:lnDef>
-  </a:objectDefaults>
-  <a:extraClrSchemeLst/>
-  <a:extLst>
-    <a:ext uri="{05A4C25C-085E-4340-85A3-A5531E510DB2}">
-      <thm15:themeFamily xmlns:thm15="http://schemas.microsoft.com/office/thememl/2012/main" name="Office Theme" id="{2E142A2C-CD16-42D6-873A-C26D2A0506FA}" vid="{1BDDFF52-6CD6-40A5-AB3C-68EB2F1E4D0A}"/>
+      <thm15:themeFamily xmlns:thm15="http://schemas.microsoft.com/office/thememl/2012/main" name="Office Theme" id="{62F939B6-93AF-4DB8-9C6B-D6C7DFDC589F}" vid="{4A3C46E8-61CC-4603-A589-7422A47A8E4A}"/>
     </a:ext>
   </a:extLst>
 </a:theme>

--- a/index.pptx
+++ b/index.pptx
@@ -5,7 +5,7 @@
     <p:sldMasterId id="2147483648" r:id="rId1"/>
   </p:sldMasterIdLst>
   <p:notesMasterIdLst>
-    <p:notesMasterId r:id="rId45"/>
+    <p:notesMasterId r:id="rId47"/>
   </p:notesMasterIdLst>
   <p:sldIdLst>
     <p:sldId id="256" r:id="rId2"/>
@@ -51,6 +51,8 @@
     <p:sldId id="296" r:id="rId42"/>
     <p:sldId id="297" r:id="rId43"/>
     <p:sldId id="298" r:id="rId44"/>
+    <p:sldId id="299" r:id="rId45"/>
+    <p:sldId id="300" r:id="rId46"/>
   </p:sldIdLst>
   <p:sldSz cx="9144000" cy="5143500" type="screen16x9"/>
   <p:notesSz cx="6858000" cy="9144000"/>
@@ -592,7 +594,7 @@
           <a:p>
             <a:fld id="{18BDFEC3-8487-43E8-A154-7C12CBC1FFF2}" type="slidenum">
               <a:rPr lang="en-US"/>
-              <a:t>5</a:t>
+              <a:t>7</a:t>
             </a:fld>
             <a:endParaRPr lang="en-US"/>
           </a:p>
@@ -719,7 +721,7 @@
           <a:p>
             <a:fld id="{18BDFEC3-8487-43E8-A154-7C12CBC1FFF2}" type="slidenum">
               <a:rPr lang="en-US"/>
-              <a:t>17</a:t>
+              <a:t>19</a:t>
             </a:fld>
             <a:endParaRPr lang="en-US"/>
           </a:p>
@@ -860,7 +862,7 @@
           <a:p>
             <a:fld id="{18BDFEC3-8487-43E8-A154-7C12CBC1FFF2}" type="slidenum">
               <a:rPr lang="en-US"/>
-              <a:t>18</a:t>
+              <a:t>20</a:t>
             </a:fld>
             <a:endParaRPr lang="en-US"/>
           </a:p>
@@ -1007,7 +1009,7 @@
           <a:p>
             <a:fld id="{18BDFEC3-8487-43E8-A154-7C12CBC1FFF2}" type="slidenum">
               <a:rPr lang="en-US"/>
-              <a:t>19</a:t>
+              <a:t>21</a:t>
             </a:fld>
             <a:endParaRPr lang="en-US"/>
           </a:p>
@@ -1144,7 +1146,7 @@
           <a:p>
             <a:fld id="{18BDFEC3-8487-43E8-A154-7C12CBC1FFF2}" type="slidenum">
               <a:rPr lang="en-US"/>
-              <a:t>20</a:t>
+              <a:t>22</a:t>
             </a:fld>
             <a:endParaRPr lang="en-US"/>
           </a:p>
@@ -1244,7 +1246,7 @@
           <a:p>
             <a:fld id="{18BDFEC3-8487-43E8-A154-7C12CBC1FFF2}" type="slidenum">
               <a:rPr lang="en-US"/>
-              <a:t>21</a:t>
+              <a:t>23</a:t>
             </a:fld>
             <a:endParaRPr lang="en-US"/>
           </a:p>
@@ -1420,7 +1422,7 @@
           <a:p>
             <a:fld id="{18BDFEC3-8487-43E8-A154-7C12CBC1FFF2}" type="slidenum">
               <a:rPr lang="en-US"/>
-              <a:t>22</a:t>
+              <a:t>24</a:t>
             </a:fld>
             <a:endParaRPr lang="en-US"/>
           </a:p>
@@ -1530,7 +1532,7 @@
           <a:p>
             <a:fld id="{18BDFEC3-8487-43E8-A154-7C12CBC1FFF2}" type="slidenum">
               <a:rPr lang="en-US"/>
-              <a:t>23</a:t>
+              <a:t>25</a:t>
             </a:fld>
             <a:endParaRPr lang="en-US"/>
           </a:p>
@@ -1634,7 +1636,7 @@
           <a:p>
             <a:fld id="{18BDFEC3-8487-43E8-A154-7C12CBC1FFF2}" type="slidenum">
               <a:rPr lang="en-US"/>
-              <a:t>24</a:t>
+              <a:t>26</a:t>
             </a:fld>
             <a:endParaRPr lang="en-US"/>
           </a:p>
@@ -1806,7 +1808,7 @@
           <a:p>
             <a:fld id="{18BDFEC3-8487-43E8-A154-7C12CBC1FFF2}" type="slidenum">
               <a:rPr lang="en-US"/>
-              <a:t>25</a:t>
+              <a:t>27</a:t>
             </a:fld>
             <a:endParaRPr lang="en-US"/>
           </a:p>
@@ -1988,7 +1990,7 @@
           <a:p>
             <a:fld id="{18BDFEC3-8487-43E8-A154-7C12CBC1FFF2}" type="slidenum">
               <a:rPr lang="en-US"/>
-              <a:t>26</a:t>
+              <a:t>28</a:t>
             </a:fld>
             <a:endParaRPr lang="en-US"/>
           </a:p>
@@ -2092,7 +2094,7 @@
           <a:p>
             <a:fld id="{18BDFEC3-8487-43E8-A154-7C12CBC1FFF2}" type="slidenum">
               <a:rPr lang="en-US"/>
-              <a:t>7</a:t>
+              <a:t>9</a:t>
             </a:fld>
             <a:endParaRPr lang="en-US"/>
           </a:p>
@@ -2196,7 +2198,7 @@
           <a:p>
             <a:fld id="{18BDFEC3-8487-43E8-A154-7C12CBC1FFF2}" type="slidenum">
               <a:rPr lang="en-US"/>
-              <a:t>27</a:t>
+              <a:t>29</a:t>
             </a:fld>
             <a:endParaRPr lang="en-US"/>
           </a:p>
@@ -2320,7 +2322,7 @@
           <a:p>
             <a:fld id="{18BDFEC3-8487-43E8-A154-7C12CBC1FFF2}" type="slidenum">
               <a:rPr lang="en-US"/>
-              <a:t>29</a:t>
+              <a:t>31</a:t>
             </a:fld>
             <a:endParaRPr lang="en-US"/>
           </a:p>
@@ -2456,7 +2458,7 @@
           <a:p>
             <a:fld id="{18BDFEC3-8487-43E8-A154-7C12CBC1FFF2}" type="slidenum">
               <a:rPr lang="en-US"/>
-              <a:t>30</a:t>
+              <a:t>32</a:t>
             </a:fld>
             <a:endParaRPr lang="en-US"/>
           </a:p>
@@ -2560,7 +2562,7 @@
           <a:p>
             <a:fld id="{18BDFEC3-8487-43E8-A154-7C12CBC1FFF2}" type="slidenum">
               <a:rPr lang="en-US"/>
-              <a:t>31</a:t>
+              <a:t>33</a:t>
             </a:fld>
             <a:endParaRPr lang="en-US"/>
           </a:p>
@@ -2706,7 +2708,7 @@
           <a:p>
             <a:fld id="{18BDFEC3-8487-43E8-A154-7C12CBC1FFF2}" type="slidenum">
               <a:rPr lang="en-US"/>
-              <a:t>32</a:t>
+              <a:t>34</a:t>
             </a:fld>
             <a:endParaRPr lang="en-US"/>
           </a:p>
@@ -2935,7 +2937,7 @@
           <a:p>
             <a:fld id="{18BDFEC3-8487-43E8-A154-7C12CBC1FFF2}" type="slidenum">
               <a:rPr lang="en-US"/>
-              <a:t>33</a:t>
+              <a:t>35</a:t>
             </a:fld>
             <a:endParaRPr lang="en-US"/>
           </a:p>
@@ -3058,7 +3060,7 @@
           <a:p>
             <a:fld id="{18BDFEC3-8487-43E8-A154-7C12CBC1FFF2}" type="slidenum">
               <a:rPr lang="en-US"/>
-              <a:t>34</a:t>
+              <a:t>36</a:t>
             </a:fld>
             <a:endParaRPr lang="en-US"/>
           </a:p>
@@ -3176,7 +3178,7 @@
           <a:p>
             <a:fld id="{18BDFEC3-8487-43E8-A154-7C12CBC1FFF2}" type="slidenum">
               <a:rPr lang="en-US"/>
-              <a:t>35</a:t>
+              <a:t>37</a:t>
             </a:fld>
             <a:endParaRPr lang="en-US"/>
           </a:p>
@@ -3270,7 +3272,7 @@
           <a:p>
             <a:fld id="{18BDFEC3-8487-43E8-A154-7C12CBC1FFF2}" type="slidenum">
               <a:rPr lang="en-US"/>
-              <a:t>36</a:t>
+              <a:t>38</a:t>
             </a:fld>
             <a:endParaRPr lang="en-US"/>
           </a:p>
@@ -3394,7 +3396,7 @@
           <a:p>
             <a:fld id="{18BDFEC3-8487-43E8-A154-7C12CBC1FFF2}" type="slidenum">
               <a:rPr lang="en-US"/>
-              <a:t>39</a:t>
+              <a:t>41</a:t>
             </a:fld>
             <a:endParaRPr lang="en-US"/>
           </a:p>
@@ -3498,7 +3500,7 @@
           <a:p>
             <a:fld id="{18BDFEC3-8487-43E8-A154-7C12CBC1FFF2}" type="slidenum">
               <a:rPr lang="en-US"/>
-              <a:t>8</a:t>
+              <a:t>10</a:t>
             </a:fld>
             <a:endParaRPr lang="en-US"/>
           </a:p>
@@ -3620,7 +3622,7 @@
           <a:p>
             <a:fld id="{18BDFEC3-8487-43E8-A154-7C12CBC1FFF2}" type="slidenum">
               <a:rPr lang="en-US"/>
-              <a:t>42</a:t>
+              <a:t>44</a:t>
             </a:fld>
             <a:endParaRPr lang="en-US"/>
           </a:p>
@@ -3776,7 +3778,7 @@
           <a:p>
             <a:fld id="{18BDFEC3-8487-43E8-A154-7C12CBC1FFF2}" type="slidenum">
               <a:rPr lang="en-US"/>
-              <a:t>9</a:t>
+              <a:t>11</a:t>
             </a:fld>
             <a:endParaRPr lang="en-US"/>
           </a:p>
@@ -3908,7 +3910,7 @@
           <a:p>
             <a:fld id="{18BDFEC3-8487-43E8-A154-7C12CBC1FFF2}" type="slidenum">
               <a:rPr lang="en-US"/>
-              <a:t>10</a:t>
+              <a:t>12</a:t>
             </a:fld>
             <a:endParaRPr lang="en-US"/>
           </a:p>
@@ -4012,7 +4014,7 @@
           <a:p>
             <a:fld id="{18BDFEC3-8487-43E8-A154-7C12CBC1FFF2}" type="slidenum">
               <a:rPr lang="en-US"/>
-              <a:t>13</a:t>
+              <a:t>15</a:t>
             </a:fld>
             <a:endParaRPr lang="en-US"/>
           </a:p>
@@ -4144,7 +4146,7 @@
           <a:p>
             <a:fld id="{18BDFEC3-8487-43E8-A154-7C12CBC1FFF2}" type="slidenum">
               <a:rPr lang="en-US"/>
-              <a:t>14</a:t>
+              <a:t>16</a:t>
             </a:fld>
             <a:endParaRPr lang="en-US"/>
           </a:p>
@@ -4266,7 +4268,7 @@
           <a:p>
             <a:fld id="{18BDFEC3-8487-43E8-A154-7C12CBC1FFF2}" type="slidenum">
               <a:rPr lang="en-US"/>
-              <a:t>15</a:t>
+              <a:t>17</a:t>
             </a:fld>
             <a:endParaRPr lang="en-US"/>
           </a:p>
@@ -4389,7 +4391,7 @@
           <a:p>
             <a:fld id="{18BDFEC3-8487-43E8-A154-7C12CBC1FFF2}" type="slidenum">
               <a:rPr lang="en-US"/>
-              <a:t>16</a:t>
+              <a:t>18</a:t>
             </a:fld>
             <a:endParaRPr lang="en-US"/>
           </a:p>
@@ -7447,7 +7449,7 @@
             </a:pPr>
             <a:r>
               <a:rPr/>
-              <a:t>2020-03-03</a:t>
+              <a:t>2022-06-09</a:t>
             </a:r>
           </a:p>
         </p:txBody>
@@ -7484,21 +7486,95 @@
             <p:ph type="title"/>
           </p:nvPr>
         </p:nvSpPr>
-        <p:spPr/>
-        <p:txBody>
-          <a:bodyPr/>
-          <a:lstStyle/>
-          <a:p>
-            <a:pPr lvl="0" indent="0" marL="0">
-              <a:buNone/>
-            </a:pPr>
-            <a:r>
-              <a:rPr/>
-              <a:t>Before we start: Survey time!</a:t>
-            </a:r>
-          </a:p>
-        </p:txBody>
-      </p:sp>
+        <p:spPr>
+          <a:xfrm>
+            <a:off x="457201" y="204787"/>
+            <a:ext cx="3008313" cy="871538"/>
+          </a:xfrm>
+        </p:spPr>
+        <p:txBody>
+          <a:bodyPr/>
+          <a:lstStyle/>
+          <a:p>
+            <a:pPr lvl="0" indent="0" marL="0">
+              <a:buNone/>
+            </a:pPr>
+            <a:r>
+              <a:rPr/>
+              <a:t>Prerequisites (cont.)</a:t>
+            </a:r>
+          </a:p>
+        </p:txBody>
+      </p:sp>
+      <p:sp>
+        <p:nvSpPr>
+          <p:cNvPr id="4" name="Text Placeholder 3"/>
+          <p:cNvSpPr>
+            <a:spLocks noGrp="1"/>
+          </p:cNvSpPr>
+          <p:nvPr>
+            <p:ph idx="2" sz="half" type="body"/>
+          </p:nvPr>
+        </p:nvSpPr>
+        <p:spPr/>
+        <p:txBody>
+          <a:bodyPr/>
+          <a:lstStyle/>
+          <a:p>
+            <a:pPr lvl="0"/>
+            <a:r>
+              <a:rPr/>
+              <a:t>Familiarity with the concept of </a:t>
+            </a:r>
+            <a:r>
+              <a:rPr b="1"/>
+              <a:t>literature review</a:t>
+            </a:r>
+            <a:r>
+              <a:rPr/>
+              <a:t>; how and where to access scientific papers, such as </a:t>
+            </a:r>
+            <a:r>
+              <a:rPr i="1"/>
+              <a:t>Google Scholar</a:t>
+            </a:r>
+            <a:r>
+              <a:rPr/>
+              <a:t>.</a:t>
+            </a:r>
+          </a:p>
+        </p:txBody>
+      </p:sp>
+      <p:pic>
+        <p:nvPicPr>
+          <p:cNvPr descr="images/GoogleScholar.png" id="0" name="Picture 1"/>
+          <p:cNvPicPr>
+            <a:picLocks noGrp="1" noChangeAspect="1"/>
+          </p:cNvPicPr>
+          <p:nvPr/>
+        </p:nvPicPr>
+        <p:blipFill>
+          <a:blip r:embed="rId3"/>
+          <a:stretch>
+            <a:fillRect/>
+          </a:stretch>
+        </p:blipFill>
+        <p:spPr bwMode="auto">
+          <a:xfrm>
+            <a:off x="3568700" y="863600"/>
+            <a:ext cx="5105400" cy="3060700"/>
+          </a:xfrm>
+          <a:prstGeom prst="rect">
+            <a:avLst/>
+          </a:prstGeom>
+          <a:noFill/>
+          <a:ln w="9525">
+            <a:noFill/>
+            <a:headEnd/>
+            <a:tailEnd/>
+          </a:ln>
+        </p:spPr>
+      </p:pic>
     </p:spTree>
   </p:cSld>
 </p:sld>
@@ -7523,61 +7599,25 @@
       </p:grpSpPr>
       <p:sp>
         <p:nvSpPr>
-          <p:cNvPr id="3" name="Content Placeholder 2"/>
-          <p:cNvSpPr>
-            <a:spLocks noGrp="1"/>
-          </p:cNvSpPr>
-          <p:nvPr>
-            <p:ph idx="1"/>
-          </p:nvPr>
-        </p:nvSpPr>
-        <p:spPr/>
-        <p:txBody>
-          <a:bodyPr/>
-          <a:lstStyle/>
-          <a:p>
-            <a:pPr lvl="0" indent="0" marL="0">
-              <a:buNone/>
-            </a:pPr>
-            <a:r>
-              <a:rPr b="1"/>
-              <a:t>What is your level of familiarity with citing and referencing scientific papers?</a:t>
-            </a:r>
-          </a:p>
-          <a:p>
-            <a:pPr lvl="0" indent="-342900" marL="342900">
-              <a:buAutoNum type="alphaLcPeriod"/>
-            </a:pPr>
-            <a:r>
-              <a:rPr/>
-              <a:t>I have never heard of it before.</a:t>
-            </a:r>
-          </a:p>
-          <a:p>
-            <a:pPr lvl="0" indent="-342900" marL="342900">
-              <a:buAutoNum type="alphaLcPeriod"/>
-            </a:pPr>
-            <a:r>
-              <a:rPr/>
-              <a:t>I have heard of it but have never worked with it.</a:t>
-            </a:r>
-          </a:p>
-          <a:p>
-            <a:pPr lvl="0" indent="-342900" marL="342900">
-              <a:buAutoNum type="alphaLcPeriod"/>
-            </a:pPr>
-            <a:r>
-              <a:rPr/>
-              <a:t>I have basic understanding and experience with it.</a:t>
-            </a:r>
-          </a:p>
-          <a:p>
-            <a:pPr lvl="0" indent="-342900" marL="342900">
-              <a:buAutoNum type="alphaLcPeriod"/>
-            </a:pPr>
-            <a:r>
-              <a:rPr/>
-              <a:t>I am very familiar and have worked with it extensively.</a:t>
+          <p:cNvPr id="2" name="Title 1"/>
+          <p:cNvSpPr>
+            <a:spLocks noGrp="1"/>
+          </p:cNvSpPr>
+          <p:nvPr>
+            <p:ph type="title"/>
+          </p:nvPr>
+        </p:nvSpPr>
+        <p:spPr/>
+        <p:txBody>
+          <a:bodyPr/>
+          <a:lstStyle/>
+          <a:p>
+            <a:pPr lvl="0" indent="0" marL="0">
+              <a:buNone/>
+            </a:pPr>
+            <a:r>
+              <a:rPr/>
+              <a:t>Questions from the previous submodule?</a:t>
             </a:r>
           </a:p>
         </p:txBody>
@@ -7606,78 +7646,25 @@
       </p:grpSpPr>
       <p:sp>
         <p:nvSpPr>
-          <p:cNvPr id="3" name="Content Placeholder 2"/>
-          <p:cNvSpPr>
-            <a:spLocks noGrp="1"/>
-          </p:cNvSpPr>
-          <p:nvPr>
-            <p:ph idx="1"/>
-          </p:nvPr>
-        </p:nvSpPr>
-        <p:spPr/>
-        <p:txBody>
-          <a:bodyPr/>
-          <a:lstStyle/>
-          <a:p>
-            <a:pPr lvl="0" indent="0" marL="0">
-              <a:buNone/>
-            </a:pPr>
-            <a:r>
-              <a:rPr b="1"/>
-              <a:t>How confident do you feel with the Zotero workflow of collection, organisation, and citing?</a:t>
-            </a:r>
-            <a:r>
-              <a:rPr/>
-              <a:t> </a:t>
-            </a:r>
-            <a:r>
-              <a:rPr i="1"/>
-              <a:t>(1 = Not confident at all, 5 = Very confident)</a:t>
-            </a:r>
-          </a:p>
-          <a:p>
-            <a:pPr lvl="0" indent="-342900" marL="342900">
-              <a:buAutoNum type="alphaLcPeriod"/>
-            </a:pPr>
-            <a:r>
-              <a:rPr/>
-              <a:t>1</a:t>
-            </a:r>
-          </a:p>
-          <a:p>
-            <a:pPr lvl="0" indent="-342900" marL="342900">
-              <a:buAutoNum type="alphaLcPeriod"/>
-            </a:pPr>
-            <a:r>
-              <a:rPr/>
-              <a:t>2</a:t>
-            </a:r>
-          </a:p>
-          <a:p>
-            <a:pPr lvl="0" indent="-342900" marL="342900">
-              <a:buAutoNum type="alphaLcPeriod"/>
-            </a:pPr>
-            <a:r>
-              <a:rPr/>
-              <a:t>3</a:t>
-            </a:r>
-          </a:p>
-          <a:p>
-            <a:pPr lvl="0" indent="-342900" marL="342900">
-              <a:buAutoNum type="alphaLcPeriod"/>
-            </a:pPr>
-            <a:r>
-              <a:rPr/>
-              <a:t>4</a:t>
-            </a:r>
-          </a:p>
-          <a:p>
-            <a:pPr lvl="0" indent="-342900" marL="342900">
-              <a:buAutoNum type="alphaLcPeriod"/>
-            </a:pPr>
-            <a:r>
-              <a:rPr/>
-              <a:t>5</a:t>
+          <p:cNvPr id="2" name="Title 1"/>
+          <p:cNvSpPr>
+            <a:spLocks noGrp="1"/>
+          </p:cNvSpPr>
+          <p:nvPr>
+            <p:ph type="title"/>
+          </p:nvPr>
+        </p:nvSpPr>
+        <p:spPr/>
+        <p:txBody>
+          <a:bodyPr/>
+          <a:lstStyle/>
+          <a:p>
+            <a:pPr lvl="0" indent="0" marL="0">
+              <a:buNone/>
+            </a:pPr>
+            <a:r>
+              <a:rPr/>
+              <a:t>Before we start: Survey time!</a:t>
             </a:r>
           </a:p>
         </p:txBody>
@@ -7706,31 +7693,6 @@
       </p:grpSpPr>
       <p:sp>
         <p:nvSpPr>
-          <p:cNvPr id="2" name="Title 1"/>
-          <p:cNvSpPr>
-            <a:spLocks noGrp="1"/>
-          </p:cNvSpPr>
-          <p:nvPr>
-            <p:ph type="title"/>
-          </p:nvPr>
-        </p:nvSpPr>
-        <p:spPr/>
-        <p:txBody>
-          <a:bodyPr/>
-          <a:lstStyle/>
-          <a:p>
-            <a:pPr lvl="0" indent="0" marL="0">
-              <a:buNone/>
-            </a:pPr>
-            <a:r>
-              <a:rPr/>
-              <a:t>Discussion of survey results</a:t>
-            </a:r>
-          </a:p>
-        </p:txBody>
-      </p:sp>
-      <p:sp>
-        <p:nvSpPr>
           <p:cNvPr id="3" name="Content Placeholder 2"/>
           <p:cNvSpPr>
             <a:spLocks noGrp="1"/>
@@ -7749,7 +7711,43 @@
             </a:pPr>
             <a:r>
               <a:rPr b="1"/>
-              <a:t>What do we see in the results?</a:t>
+              <a:t>What is your level of familiarity with citing and referencing scientific papers?</a:t>
+            </a:r>
+          </a:p>
+          <a:p>
+            <a:pPr lvl="0" indent="-342900" marL="342900">
+              <a:buAutoNum type="alphaLcPeriod"/>
+            </a:pPr>
+            <a:r>
+              <a:rPr/>
+              <a:t>I have never heard of it before.</a:t>
+            </a:r>
+          </a:p>
+          <a:p>
+            <a:pPr lvl="0" indent="-342900" marL="342900">
+              <a:buAutoNum type="alphaLcPeriod"/>
+            </a:pPr>
+            <a:r>
+              <a:rPr/>
+              <a:t>I have heard of it but have never worked with it.</a:t>
+            </a:r>
+          </a:p>
+          <a:p>
+            <a:pPr lvl="0" indent="-342900" marL="342900">
+              <a:buAutoNum type="alphaLcPeriod"/>
+            </a:pPr>
+            <a:r>
+              <a:rPr/>
+              <a:t>I have basic understanding and experience with it.</a:t>
+            </a:r>
+          </a:p>
+          <a:p>
+            <a:pPr lvl="0" indent="-342900" marL="342900">
+              <a:buAutoNum type="alphaLcPeriod"/>
+            </a:pPr>
+            <a:r>
+              <a:rPr/>
+              <a:t>I am very familiar and have worked with it extensively.</a:t>
             </a:r>
           </a:p>
         </p:txBody>
@@ -7778,31 +7776,6 @@
       </p:grpSpPr>
       <p:sp>
         <p:nvSpPr>
-          <p:cNvPr id="2" name="Title 1"/>
-          <p:cNvSpPr>
-            <a:spLocks noGrp="1"/>
-          </p:cNvSpPr>
-          <p:nvPr>
-            <p:ph type="title"/>
-          </p:nvPr>
-        </p:nvSpPr>
-        <p:spPr/>
-        <p:txBody>
-          <a:bodyPr/>
-          <a:lstStyle/>
-          <a:p>
-            <a:pPr lvl="0" indent="0" marL="0">
-              <a:buNone/>
-            </a:pPr>
-            <a:r>
-              <a:rPr/>
-              <a:t>Where are we at?</a:t>
-            </a:r>
-          </a:p>
-        </p:txBody>
-      </p:sp>
-      <p:sp>
-        <p:nvSpPr>
           <p:cNvPr id="3" name="Content Placeholder 2"/>
           <p:cNvSpPr>
             <a:spLocks noGrp="1"/>
@@ -7821,73 +7794,60 @@
             </a:pPr>
             <a:r>
               <a:rPr b="1"/>
-              <a:t>Previously</a:t>
-            </a:r>
-            <a:r>
-              <a:rPr/>
-              <a:t>:</a:t>
-            </a:r>
-          </a:p>
-          <a:p>
-            <a:pPr lvl="0"/>
-            <a:r>
-              <a:rPr/>
-              <a:t>Familiarization with R basics</a:t>
-            </a:r>
-          </a:p>
-          <a:p>
-            <a:pPr lvl="0"/>
-            <a:r>
-              <a:rPr/>
-              <a:t>Advanced R skills</a:t>
-            </a:r>
-          </a:p>
-          <a:p>
-            <a:pPr lvl="0"/>
-            <a:r>
-              <a:rPr/>
-              <a:t>Version control with Git</a:t>
-            </a:r>
-          </a:p>
-          <a:p>
-            <a:pPr lvl="0"/>
-            <a:r>
-              <a:rPr/>
-              <a:t>Collaborative working with GitHub</a:t>
-            </a:r>
-          </a:p>
-          <a:p>
-            <a:pPr lvl="0"/>
-            <a:r>
-              <a:rPr/>
-              <a:t>Introduction to Quarto</a:t>
-            </a:r>
-          </a:p>
-          <a:p>
-            <a:pPr lvl="0" indent="0" marL="0">
-              <a:buNone/>
-            </a:pPr>
-            <a:r>
-              <a:rPr b="1"/>
-              <a:t>Up next</a:t>
-            </a:r>
-            <a:r>
-              <a:rPr/>
-              <a:t>:</a:t>
-            </a:r>
-          </a:p>
-          <a:p>
-            <a:pPr lvl="0"/>
-            <a:r>
-              <a:rPr/>
-              <a:t>Citations and references: What are they and when/how to use them</a:t>
-            </a:r>
-          </a:p>
-          <a:p>
-            <a:pPr lvl="0"/>
-            <a:r>
-              <a:rPr/>
-              <a:t>Citation management tool: Using Zotero in our workflow</a:t>
+              <a:t>How confident do you feel with the Zotero workflow of collection, organisation, and citing?</a:t>
+            </a:r>
+            <a:r>
+              <a:rPr/>
+              <a:t> </a:t>
+            </a:r>
+            <a:r>
+              <a:rPr i="1"/>
+              <a:t>(1 = Not confident at all, 5 = Very confident)</a:t>
+            </a:r>
+          </a:p>
+          <a:p>
+            <a:pPr lvl="0" indent="-342900" marL="342900">
+              <a:buAutoNum type="alphaLcPeriod"/>
+            </a:pPr>
+            <a:r>
+              <a:rPr/>
+              <a:t>1</a:t>
+            </a:r>
+          </a:p>
+          <a:p>
+            <a:pPr lvl="0" indent="-342900" marL="342900">
+              <a:buAutoNum type="alphaLcPeriod"/>
+            </a:pPr>
+            <a:r>
+              <a:rPr/>
+              <a:t>2</a:t>
+            </a:r>
+          </a:p>
+          <a:p>
+            <a:pPr lvl="0" indent="-342900" marL="342900">
+              <a:buAutoNum type="alphaLcPeriod"/>
+            </a:pPr>
+            <a:r>
+              <a:rPr/>
+              <a:t>3</a:t>
+            </a:r>
+          </a:p>
+          <a:p>
+            <a:pPr lvl="0" indent="-342900" marL="342900">
+              <a:buAutoNum type="alphaLcPeriod"/>
+            </a:pPr>
+            <a:r>
+              <a:rPr/>
+              <a:t>4</a:t>
+            </a:r>
+          </a:p>
+          <a:p>
+            <a:pPr lvl="0" indent="-342900" marL="342900">
+              <a:buAutoNum type="alphaLcPeriod"/>
+            </a:pPr>
+            <a:r>
+              <a:rPr/>
+              <a:t>5</a:t>
             </a:r>
           </a:p>
         </p:txBody>
@@ -7898,6 +7858,216 @@
 </file>
 
 <file path=ppt/slides/slide15.xml><?xml version="1.0" encoding="utf-8"?>
+<p:sld xmlns:a="http://schemas.openxmlformats.org/drawingml/2006/main" xmlns:r="http://schemas.openxmlformats.org/officeDocument/2006/relationships" xmlns:p="http://schemas.openxmlformats.org/presentationml/2006/main">
+  <p:cSld>
+    <p:spTree>
+      <p:nvGrpSpPr>
+        <p:cNvPr id="1" name=""/>
+        <p:cNvGrpSpPr/>
+        <p:nvPr/>
+      </p:nvGrpSpPr>
+      <p:grpSpPr>
+        <a:xfrm>
+          <a:off x="0" y="0"/>
+          <a:ext cx="0" cy="0"/>
+          <a:chOff x="0" y="0"/>
+          <a:chExt cx="0" cy="0"/>
+        </a:xfrm>
+      </p:grpSpPr>
+      <p:sp>
+        <p:nvSpPr>
+          <p:cNvPr id="2" name="Title 1"/>
+          <p:cNvSpPr>
+            <a:spLocks noGrp="1"/>
+          </p:cNvSpPr>
+          <p:nvPr>
+            <p:ph type="title"/>
+          </p:nvPr>
+        </p:nvSpPr>
+        <p:spPr/>
+        <p:txBody>
+          <a:bodyPr/>
+          <a:lstStyle/>
+          <a:p>
+            <a:pPr lvl="0" indent="0" marL="0">
+              <a:buNone/>
+            </a:pPr>
+            <a:r>
+              <a:rPr/>
+              <a:t>Discussion of survey results</a:t>
+            </a:r>
+          </a:p>
+        </p:txBody>
+      </p:sp>
+      <p:sp>
+        <p:nvSpPr>
+          <p:cNvPr id="3" name="Content Placeholder 2"/>
+          <p:cNvSpPr>
+            <a:spLocks noGrp="1"/>
+          </p:cNvSpPr>
+          <p:nvPr>
+            <p:ph idx="1"/>
+          </p:nvPr>
+        </p:nvSpPr>
+        <p:spPr/>
+        <p:txBody>
+          <a:bodyPr/>
+          <a:lstStyle/>
+          <a:p>
+            <a:pPr lvl="0" indent="0" marL="0">
+              <a:buNone/>
+            </a:pPr>
+            <a:r>
+              <a:rPr b="1"/>
+              <a:t>What do we see in the results?</a:t>
+            </a:r>
+          </a:p>
+        </p:txBody>
+      </p:sp>
+    </p:spTree>
+  </p:cSld>
+</p:sld>
+</file>
+
+<file path=ppt/slides/slide16.xml><?xml version="1.0" encoding="utf-8"?>
+<p:sld xmlns:a="http://schemas.openxmlformats.org/drawingml/2006/main" xmlns:r="http://schemas.openxmlformats.org/officeDocument/2006/relationships" xmlns:p="http://schemas.openxmlformats.org/presentationml/2006/main">
+  <p:cSld>
+    <p:spTree>
+      <p:nvGrpSpPr>
+        <p:cNvPr id="1" name=""/>
+        <p:cNvGrpSpPr/>
+        <p:nvPr/>
+      </p:nvGrpSpPr>
+      <p:grpSpPr>
+        <a:xfrm>
+          <a:off x="0" y="0"/>
+          <a:ext cx="0" cy="0"/>
+          <a:chOff x="0" y="0"/>
+          <a:chExt cx="0" cy="0"/>
+        </a:xfrm>
+      </p:grpSpPr>
+      <p:sp>
+        <p:nvSpPr>
+          <p:cNvPr id="2" name="Title 1"/>
+          <p:cNvSpPr>
+            <a:spLocks noGrp="1"/>
+          </p:cNvSpPr>
+          <p:nvPr>
+            <p:ph type="title"/>
+          </p:nvPr>
+        </p:nvSpPr>
+        <p:spPr/>
+        <p:txBody>
+          <a:bodyPr/>
+          <a:lstStyle/>
+          <a:p>
+            <a:pPr lvl="0" indent="0" marL="0">
+              <a:buNone/>
+            </a:pPr>
+            <a:r>
+              <a:rPr/>
+              <a:t>Where are we at?</a:t>
+            </a:r>
+          </a:p>
+        </p:txBody>
+      </p:sp>
+      <p:sp>
+        <p:nvSpPr>
+          <p:cNvPr id="3" name="Content Placeholder 2"/>
+          <p:cNvSpPr>
+            <a:spLocks noGrp="1"/>
+          </p:cNvSpPr>
+          <p:nvPr>
+            <p:ph idx="1"/>
+          </p:nvPr>
+        </p:nvSpPr>
+        <p:spPr/>
+        <p:txBody>
+          <a:bodyPr/>
+          <a:lstStyle/>
+          <a:p>
+            <a:pPr lvl="0" indent="0" marL="0">
+              <a:buNone/>
+            </a:pPr>
+            <a:r>
+              <a:rPr b="1"/>
+              <a:t>Previously</a:t>
+            </a:r>
+            <a:r>
+              <a:rPr/>
+              <a:t>:</a:t>
+            </a:r>
+          </a:p>
+          <a:p>
+            <a:pPr lvl="0"/>
+            <a:r>
+              <a:rPr/>
+              <a:t>Familiarization with R basics</a:t>
+            </a:r>
+          </a:p>
+          <a:p>
+            <a:pPr lvl="0"/>
+            <a:r>
+              <a:rPr/>
+              <a:t>Advanced R skills</a:t>
+            </a:r>
+          </a:p>
+          <a:p>
+            <a:pPr lvl="0"/>
+            <a:r>
+              <a:rPr/>
+              <a:t>Version control with Git</a:t>
+            </a:r>
+          </a:p>
+          <a:p>
+            <a:pPr lvl="0"/>
+            <a:r>
+              <a:rPr/>
+              <a:t>Collaborative working with GitHub</a:t>
+            </a:r>
+          </a:p>
+          <a:p>
+            <a:pPr lvl="0"/>
+            <a:r>
+              <a:rPr/>
+              <a:t>Introduction to Quarto</a:t>
+            </a:r>
+          </a:p>
+          <a:p>
+            <a:pPr lvl="0" indent="0" marL="0">
+              <a:buNone/>
+            </a:pPr>
+            <a:r>
+              <a:rPr b="1"/>
+              <a:t>Up next</a:t>
+            </a:r>
+            <a:r>
+              <a:rPr/>
+              <a:t>:</a:t>
+            </a:r>
+          </a:p>
+          <a:p>
+            <a:pPr lvl="0"/>
+            <a:r>
+              <a:rPr/>
+              <a:t>Citations and references: What are they and when/how to use them</a:t>
+            </a:r>
+          </a:p>
+          <a:p>
+            <a:pPr lvl="0"/>
+            <a:r>
+              <a:rPr/>
+              <a:t>Citation management tool: Using Zotero in our workflow</a:t>
+            </a:r>
+          </a:p>
+        </p:txBody>
+      </p:sp>
+    </p:spTree>
+  </p:cSld>
+</p:sld>
+</file>
+
+<file path=ppt/slides/slide17.xml><?xml version="1.0" encoding="utf-8"?>
 <p:sld xmlns:a="http://schemas.openxmlformats.org/drawingml/2006/main" xmlns:r="http://schemas.openxmlformats.org/officeDocument/2006/relationships" xmlns:p="http://schemas.openxmlformats.org/presentationml/2006/main">
   <p:cSld>
     <p:spTree>
@@ -8293,7 +8463,7 @@
 </p:sld>
 </file>
 
-<file path=ppt/slides/slide16.xml><?xml version="1.0" encoding="utf-8"?>
+<file path=ppt/slides/slide18.xml><?xml version="1.0" encoding="utf-8"?>
 <p:sld xmlns:a="http://schemas.openxmlformats.org/drawingml/2006/main" xmlns:r="http://schemas.openxmlformats.org/officeDocument/2006/relationships" xmlns:p="http://schemas.openxmlformats.org/presentationml/2006/main">
   <p:cSld>
     <p:spTree>
@@ -8486,7 +8656,7 @@
 </p:sld>
 </file>
 
-<file path=ppt/slides/slide17.xml><?xml version="1.0" encoding="utf-8"?>
+<file path=ppt/slides/slide19.xml><?xml version="1.0" encoding="utf-8"?>
 <p:sld xmlns:a="http://schemas.openxmlformats.org/drawingml/2006/main" xmlns:r="http://schemas.openxmlformats.org/officeDocument/2006/relationships" xmlns:p="http://schemas.openxmlformats.org/presentationml/2006/main">
   <p:cSld>
     <p:spTree>
@@ -8603,7 +8773,103 @@
 </p:sld>
 </file>
 
-<file path=ppt/slides/slide18.xml><?xml version="1.0" encoding="utf-8"?>
+<file path=ppt/slides/slide2.xml><?xml version="1.0" encoding="utf-8"?>
+<p:sld xmlns:a="http://schemas.openxmlformats.org/drawingml/2006/main" xmlns:r="http://schemas.openxmlformats.org/officeDocument/2006/relationships" xmlns:p="http://schemas.openxmlformats.org/presentationml/2006/main">
+  <p:cSld>
+    <p:spTree>
+      <p:nvGrpSpPr>
+        <p:cNvPr id="1" name=""/>
+        <p:cNvGrpSpPr/>
+        <p:nvPr/>
+      </p:nvGrpSpPr>
+      <p:grpSpPr>
+        <a:xfrm>
+          <a:off x="0" y="0"/>
+          <a:ext cx="0" cy="0"/>
+          <a:chOff x="0" y="0"/>
+          <a:chExt cx="0" cy="0"/>
+        </a:xfrm>
+      </p:grpSpPr>
+      <p:sp>
+        <p:nvSpPr>
+          <p:cNvPr id="2" name="Title 1"/>
+          <p:cNvSpPr>
+            <a:spLocks noGrp="1"/>
+          </p:cNvSpPr>
+          <p:nvPr>
+            <p:ph type="title"/>
+          </p:nvPr>
+        </p:nvSpPr>
+        <p:spPr/>
+        <p:txBody>
+          <a:bodyPr/>
+          <a:lstStyle/>
+          <a:p>
+            <a:pPr lvl="0" indent="0" marL="0">
+              <a:buNone/>
+            </a:pPr>
+            <a:r>
+              <a:rPr/>
+              <a:t>Testing Slide</a:t>
+            </a:r>
+          </a:p>
+        </p:txBody>
+      </p:sp>
+      <p:sp>
+        <p:nvSpPr>
+          <p:cNvPr id="3" name="Content Placeholder 2"/>
+          <p:cNvSpPr>
+            <a:spLocks noGrp="1"/>
+          </p:cNvSpPr>
+          <p:nvPr>
+            <p:ph idx="1"/>
+          </p:nvPr>
+        </p:nvSpPr>
+        <p:spPr/>
+        <p:txBody>
+          <a:bodyPr/>
+          <a:lstStyle/>
+          <a:p>
+            <a:pPr lvl="0" indent="0" marL="1270000">
+              <a:buNone/>
+            </a:pPr>
+            <a:r>
+              <a:rPr sz="2000" b="1"/>
+              <a:t>Tip</a:t>
+            </a:r>
+          </a:p>
+          <a:p>
+            <a:pPr lvl="0" indent="0" marL="1270000">
+              <a:buNone/>
+            </a:pPr>
+            <a:r>
+              <a:rPr sz="2000"/>
+              <a:t>This is a callout box test</a:t>
+            </a:r>
+          </a:p>
+          <a:p>
+            <a:pPr lvl="0" indent="0" marL="0">
+              <a:buNone/>
+            </a:pPr>
+            <a:r>
+              <a:rPr/>
+              <a:t>Test citation </a:t>
+            </a:r>
+            <a:r>
+              <a:rPr>
+                <a:hlinkClick r:id="rId2" action="ppaction://hlinksldjump"/>
+              </a:rPr>
+              <a:t>Jackson (1990)</a:t>
+            </a:r>
+          </a:p>
+        </p:txBody>
+      </p:sp>
+    </p:spTree>
+  </p:cSld>
+</p:sld>
+</file>
+
+<file path=ppt/slides/slide20.xml><?xml version="1.0" encoding="utf-8"?>
 <p:sld xmlns:a="http://schemas.openxmlformats.org/drawingml/2006/main" xmlns:r="http://schemas.openxmlformats.org/officeDocument/2006/relationships" xmlns:p="http://schemas.openxmlformats.org/presentationml/2006/main">
   <p:cSld>
     <p:spTree>
@@ -8732,7 +8998,7 @@
 </p:sld>
 </file>
 
-<file path=ppt/slides/slide19.xml><?xml version="1.0" encoding="utf-8"?>
+<file path=ppt/slides/slide21.xml><?xml version="1.0" encoding="utf-8"?>
 <p:sld xmlns:a="http://schemas.openxmlformats.org/drawingml/2006/main" xmlns:r="http://schemas.openxmlformats.org/officeDocument/2006/relationships" xmlns:p="http://schemas.openxmlformats.org/presentationml/2006/main">
   <p:cSld>
     <p:spTree>
@@ -9085,103 +9351,7 @@
 </p:sld>
 </file>
 
-<file path=ppt/slides/slide2.xml><?xml version="1.0" encoding="utf-8"?>
-<p:sld xmlns:a="http://schemas.openxmlformats.org/drawingml/2006/main" xmlns:r="http://schemas.openxmlformats.org/officeDocument/2006/relationships" xmlns:p="http://schemas.openxmlformats.org/presentationml/2006/main">
-  <p:cSld>
-    <p:spTree>
-      <p:nvGrpSpPr>
-        <p:cNvPr id="1" name=""/>
-        <p:cNvGrpSpPr/>
-        <p:nvPr/>
-      </p:nvGrpSpPr>
-      <p:grpSpPr>
-        <a:xfrm>
-          <a:off x="0" y="0"/>
-          <a:ext cx="0" cy="0"/>
-          <a:chOff x="0" y="0"/>
-          <a:chExt cx="0" cy="0"/>
-        </a:xfrm>
-      </p:grpSpPr>
-      <p:sp>
-        <p:nvSpPr>
-          <p:cNvPr id="2" name="Title 1"/>
-          <p:cNvSpPr>
-            <a:spLocks noGrp="1"/>
-          </p:cNvSpPr>
-          <p:nvPr>
-            <p:ph type="title"/>
-          </p:nvPr>
-        </p:nvSpPr>
-        <p:spPr/>
-        <p:txBody>
-          <a:bodyPr/>
-          <a:lstStyle/>
-          <a:p>
-            <a:pPr lvl="0" indent="0" marL="0">
-              <a:buNone/>
-            </a:pPr>
-            <a:r>
-              <a:rPr/>
-              <a:t>Testing Slide</a:t>
-            </a:r>
-          </a:p>
-        </p:txBody>
-      </p:sp>
-      <p:sp>
-        <p:nvSpPr>
-          <p:cNvPr id="3" name="Content Placeholder 2"/>
-          <p:cNvSpPr>
-            <a:spLocks noGrp="1"/>
-          </p:cNvSpPr>
-          <p:nvPr>
-            <p:ph idx="1"/>
-          </p:nvPr>
-        </p:nvSpPr>
-        <p:spPr/>
-        <p:txBody>
-          <a:bodyPr/>
-          <a:lstStyle/>
-          <a:p>
-            <a:pPr lvl="0" indent="0" marL="1270000">
-              <a:buNone/>
-            </a:pPr>
-            <a:r>
-              <a:rPr sz="2000" b="1"/>
-              <a:t>Tip</a:t>
-            </a:r>
-          </a:p>
-          <a:p>
-            <a:pPr lvl="0" indent="0" marL="1270000">
-              <a:buNone/>
-            </a:pPr>
-            <a:r>
-              <a:rPr sz="2000"/>
-              <a:t>This is a callout box test</a:t>
-            </a:r>
-          </a:p>
-          <a:p>
-            <a:pPr lvl="0" indent="0" marL="0">
-              <a:buNone/>
-            </a:pPr>
-            <a:r>
-              <a:rPr/>
-              <a:t>Test citation </a:t>
-            </a:r>
-            <a:r>
-              <a:rPr>
-                <a:hlinkClick r:id="rId2" action="ppaction://hlinksldjump"/>
-              </a:rPr>
-              <a:t>Jackson (1990)</a:t>
-            </a:r>
-          </a:p>
-        </p:txBody>
-      </p:sp>
-    </p:spTree>
-  </p:cSld>
-</p:sld>
-</file>
-
-<file path=ppt/slides/slide20.xml><?xml version="1.0" encoding="utf-8"?>
+<file path=ppt/slides/slide22.xml><?xml version="1.0" encoding="utf-8"?>
 <p:sld xmlns:a="http://schemas.openxmlformats.org/drawingml/2006/main" xmlns:r="http://schemas.openxmlformats.org/officeDocument/2006/relationships" xmlns:p="http://schemas.openxmlformats.org/presentationml/2006/main">
   <p:cSld>
     <p:spTree>
@@ -9657,7 +9827,7 @@
 </p:sld>
 </file>
 
-<file path=ppt/slides/slide21.xml><?xml version="1.0" encoding="utf-8"?>
+<file path=ppt/slides/slide23.xml><?xml version="1.0" encoding="utf-8"?>
 <p:sld xmlns:a="http://schemas.openxmlformats.org/drawingml/2006/main" xmlns:r="http://schemas.openxmlformats.org/officeDocument/2006/relationships" xmlns:p="http://schemas.openxmlformats.org/presentationml/2006/main">
   <p:cSld>
     <p:spTree>
@@ -9827,7 +9997,7 @@
 </p:sld>
 </file>
 
-<file path=ppt/slides/slide22.xml><?xml version="1.0" encoding="utf-8"?>
+<file path=ppt/slides/slide24.xml><?xml version="1.0" encoding="utf-8"?>
 <p:sld xmlns:a="http://schemas.openxmlformats.org/drawingml/2006/main" xmlns:r="http://schemas.openxmlformats.org/officeDocument/2006/relationships" xmlns:p="http://schemas.openxmlformats.org/presentationml/2006/main">
   <p:cSld>
     <p:spTree>
@@ -10174,7 +10344,7 @@
 </p:sld>
 </file>
 
-<file path=ppt/slides/slide23.xml><?xml version="1.0" encoding="utf-8"?>
+<file path=ppt/slides/slide25.xml><?xml version="1.0" encoding="utf-8"?>
 <p:sld xmlns:a="http://schemas.openxmlformats.org/drawingml/2006/main" xmlns:r="http://schemas.openxmlformats.org/officeDocument/2006/relationships" xmlns:p="http://schemas.openxmlformats.org/presentationml/2006/main">
   <p:cSld>
     <p:spTree>
@@ -10449,7 +10619,7 @@
 </p:sld>
 </file>
 
-<file path=ppt/slides/slide24.xml><?xml version="1.0" encoding="utf-8"?>
+<file path=ppt/slides/slide26.xml><?xml version="1.0" encoding="utf-8"?>
 <p:sld xmlns:a="http://schemas.openxmlformats.org/drawingml/2006/main" xmlns:r="http://schemas.openxmlformats.org/officeDocument/2006/relationships" xmlns:p="http://schemas.openxmlformats.org/presentationml/2006/main">
   <p:cSld>
     <p:spTree>
@@ -10529,7 +10699,7 @@
 </p:sld>
 </file>
 
-<file path=ppt/slides/slide25.xml><?xml version="1.0" encoding="utf-8"?>
+<file path=ppt/slides/slide27.xml><?xml version="1.0" encoding="utf-8"?>
 <p:sld xmlns:a="http://schemas.openxmlformats.org/drawingml/2006/main" xmlns:r="http://schemas.openxmlformats.org/officeDocument/2006/relationships" xmlns:p="http://schemas.openxmlformats.org/presentationml/2006/main">
   <p:cSld>
     <p:spTree>
@@ -10660,7 +10830,7 @@
 </p:sld>
 </file>
 
-<file path=ppt/slides/slide26.xml><?xml version="1.0" encoding="utf-8"?>
+<file path=ppt/slides/slide28.xml><?xml version="1.0" encoding="utf-8"?>
 <p:sld xmlns:a="http://schemas.openxmlformats.org/drawingml/2006/main" xmlns:r="http://schemas.openxmlformats.org/officeDocument/2006/relationships" xmlns:p="http://schemas.openxmlformats.org/presentationml/2006/main">
   <p:cSld>
     <p:spTree>
@@ -11142,7 +11312,7 @@
 </p:sld>
 </file>
 
-<file path=ppt/slides/slide27.xml><?xml version="1.0" encoding="utf-8"?>
+<file path=ppt/slides/slide29.xml><?xml version="1.0" encoding="utf-8"?>
 <p:sld xmlns:a="http://schemas.openxmlformats.org/drawingml/2006/main" xmlns:r="http://schemas.openxmlformats.org/officeDocument/2006/relationships" xmlns:p="http://schemas.openxmlformats.org/presentationml/2006/main">
   <p:cSld>
     <p:spTree>
@@ -11189,7 +11359,7 @@
 </p:sld>
 </file>
 
-<file path=ppt/slides/slide28.xml><?xml version="1.0" encoding="utf-8"?>
+<file path=ppt/slides/slide3.xml><?xml version="1.0" encoding="utf-8"?>
 <p:sld xmlns:a="http://schemas.openxmlformats.org/drawingml/2006/main" xmlns:r="http://schemas.openxmlformats.org/officeDocument/2006/relationships" xmlns:p="http://schemas.openxmlformats.org/presentationml/2006/main">
   <p:cSld>
     <p:spTree>
@@ -11231,7 +11401,7 @@
             </a:pPr>
             <a:r>
               <a:rPr/>
-              <a:t>Brief overview of Zotero</a:t>
+              <a:t>Section Header?</a:t>
             </a:r>
           </a:p>
         </p:txBody>
@@ -11241,7 +11411,59 @@
 </p:sld>
 </file>
 
-<file path=ppt/slides/slide29.xml><?xml version="1.0" encoding="utf-8"?>
+<file path=ppt/slides/slide30.xml><?xml version="1.0" encoding="utf-8"?>
+<p:sld xmlns:a="http://schemas.openxmlformats.org/drawingml/2006/main" xmlns:r="http://schemas.openxmlformats.org/officeDocument/2006/relationships" xmlns:p="http://schemas.openxmlformats.org/presentationml/2006/main">
+  <p:cSld>
+    <p:spTree>
+      <p:nvGrpSpPr>
+        <p:cNvPr id="1" name=""/>
+        <p:cNvGrpSpPr/>
+        <p:nvPr/>
+      </p:nvGrpSpPr>
+      <p:grpSpPr>
+        <a:xfrm>
+          <a:off x="0" y="0"/>
+          <a:ext cx="0" cy="0"/>
+          <a:chOff x="0" y="0"/>
+          <a:chExt cx="0" cy="0"/>
+        </a:xfrm>
+      </p:grpSpPr>
+      <p:sp>
+        <p:nvSpPr>
+          <p:cNvPr id="2" name="Title 1"/>
+          <p:cNvSpPr>
+            <a:spLocks noGrp="1"/>
+          </p:cNvSpPr>
+          <p:nvPr>
+            <p:ph type="title"/>
+          </p:nvPr>
+        </p:nvSpPr>
+        <p:spPr>
+          <a:xfrm>
+            <a:off x="722313" y="3305176"/>
+            <a:ext cx="7772400" cy="1021556"/>
+          </a:xfrm>
+        </p:spPr>
+        <p:txBody>
+          <a:bodyPr/>
+          <a:lstStyle/>
+          <a:p>
+            <a:pPr lvl="0" indent="0" marL="0">
+              <a:buNone/>
+            </a:pPr>
+            <a:r>
+              <a:rPr/>
+              <a:t>Brief overview of Zotero</a:t>
+            </a:r>
+          </a:p>
+        </p:txBody>
+      </p:sp>
+    </p:spTree>
+  </p:cSld>
+</p:sld>
+</file>
+
+<file path=ppt/slides/slide31.xml><?xml version="1.0" encoding="utf-8"?>
 <p:sld xmlns:a="http://schemas.openxmlformats.org/drawingml/2006/main" xmlns:r="http://schemas.openxmlformats.org/officeDocument/2006/relationships" xmlns:p="http://schemas.openxmlformats.org/presentationml/2006/main">
   <p:cSld>
     <p:spTree>
@@ -11517,59 +11739,7 @@
 </p:sld>
 </file>
 
-<file path=ppt/slides/slide3.xml><?xml version="1.0" encoding="utf-8"?>
-<p:sld xmlns:a="http://schemas.openxmlformats.org/drawingml/2006/main" xmlns:r="http://schemas.openxmlformats.org/officeDocument/2006/relationships" xmlns:p="http://schemas.openxmlformats.org/presentationml/2006/main">
-  <p:cSld>
-    <p:spTree>
-      <p:nvGrpSpPr>
-        <p:cNvPr id="1" name=""/>
-        <p:cNvGrpSpPr/>
-        <p:nvPr/>
-      </p:nvGrpSpPr>
-      <p:grpSpPr>
-        <a:xfrm>
-          <a:off x="0" y="0"/>
-          <a:ext cx="0" cy="0"/>
-          <a:chOff x="0" y="0"/>
-          <a:chExt cx="0" cy="0"/>
-        </a:xfrm>
-      </p:grpSpPr>
-      <p:sp>
-        <p:nvSpPr>
-          <p:cNvPr id="2" name="Title 1"/>
-          <p:cNvSpPr>
-            <a:spLocks noGrp="1"/>
-          </p:cNvSpPr>
-          <p:nvPr>
-            <p:ph type="title"/>
-          </p:nvPr>
-        </p:nvSpPr>
-        <p:spPr>
-          <a:xfrm>
-            <a:off x="722313" y="3305176"/>
-            <a:ext cx="7772400" cy="1021556"/>
-          </a:xfrm>
-        </p:spPr>
-        <p:txBody>
-          <a:bodyPr/>
-          <a:lstStyle/>
-          <a:p>
-            <a:pPr lvl="0" indent="0" marL="0">
-              <a:buNone/>
-            </a:pPr>
-            <a:r>
-              <a:rPr/>
-              <a:t>Section Header?</a:t>
-            </a:r>
-          </a:p>
-        </p:txBody>
-      </p:sp>
-    </p:spTree>
-  </p:cSld>
-</p:sld>
-</file>
-
-<file path=ppt/slides/slide30.xml><?xml version="1.0" encoding="utf-8"?>
+<file path=ppt/slides/slide32.xml><?xml version="1.0" encoding="utf-8"?>
 <p:sld xmlns:a="http://schemas.openxmlformats.org/drawingml/2006/main" xmlns:r="http://schemas.openxmlformats.org/officeDocument/2006/relationships" xmlns:p="http://schemas.openxmlformats.org/presentationml/2006/main">
   <p:cSld>
     <p:spTree>
@@ -11646,260 +11816,6 @@
 </p:sld>
 </file>
 
-<file path=ppt/slides/slide31.xml><?xml version="1.0" encoding="utf-8"?>
-<p:sld xmlns:a="http://schemas.openxmlformats.org/drawingml/2006/main" xmlns:r="http://schemas.openxmlformats.org/officeDocument/2006/relationships" xmlns:p="http://schemas.openxmlformats.org/presentationml/2006/main">
-  <p:cSld>
-    <p:spTree>
-      <p:nvGrpSpPr>
-        <p:cNvPr id="1" name=""/>
-        <p:cNvGrpSpPr/>
-        <p:nvPr/>
-      </p:nvGrpSpPr>
-      <p:grpSpPr>
-        <a:xfrm>
-          <a:off x="0" y="0"/>
-          <a:ext cx="0" cy="0"/>
-          <a:chOff x="0" y="0"/>
-          <a:chExt cx="0" cy="0"/>
-        </a:xfrm>
-      </p:grpSpPr>
-      <p:sp>
-        <p:nvSpPr>
-          <p:cNvPr id="2" name="Title 1"/>
-          <p:cNvSpPr>
-            <a:spLocks noGrp="1"/>
-          </p:cNvSpPr>
-          <p:nvPr>
-            <p:ph type="title"/>
-          </p:nvPr>
-        </p:nvSpPr>
-        <p:spPr/>
-        <p:txBody>
-          <a:bodyPr/>
-          <a:lstStyle/>
-          <a:p>
-            <a:pPr lvl="0" indent="0" marL="0">
-              <a:buNone/>
-            </a:pPr>
-            <a:r>
-              <a:rPr/>
-              <a:t>Your turn!</a:t>
-            </a:r>
-          </a:p>
-        </p:txBody>
-      </p:sp>
-      <p:sp>
-        <p:nvSpPr>
-          <p:cNvPr id="3" name="Content Placeholder 2"/>
-          <p:cNvSpPr>
-            <a:spLocks noGrp="1"/>
-          </p:cNvSpPr>
-          <p:nvPr>
-            <p:ph idx="1"/>
-          </p:nvPr>
-        </p:nvSpPr>
-        <p:spPr/>
-        <p:txBody>
-          <a:bodyPr/>
-          <a:lstStyle/>
-          <a:p>
-            <a:pPr lvl="0" indent="0" marL="0">
-              <a:buNone/>
-            </a:pPr>
-            <a:r>
-              <a:rPr/>
-              <a:t>In this next part, you will familiarize yourself with </a:t>
-            </a:r>
-            <a:r>
-              <a:rPr b="1"/>
-              <a:t>Zotero</a:t>
-            </a:r>
-            <a:r>
-              <a:rPr/>
-              <a:t> through </a:t>
-            </a:r>
-            <a:r>
-              <a:rPr b="1"/>
-              <a:t>hands-on exercices and activities</a:t>
-            </a:r>
-            <a:r>
-              <a:rPr/>
-              <a:t>:</a:t>
-            </a:r>
-          </a:p>
-          <a:p>
-            <a:pPr lvl="0"/>
-            <a:r>
-              <a:rPr/>
-              <a:t>Click here: </a:t>
-            </a:r>
-            <a:r>
-              <a:rPr>
-                <a:hlinkClick r:id="rId3"/>
-              </a:rPr>
-              <a:t>Zotero: Hands-on practical activities</a:t>
-            </a:r>
-          </a:p>
-          <a:p>
-            <a:pPr lvl="0"/>
-            <a:r>
-              <a:rPr/>
-              <a:t>Or follow: </a:t>
-            </a:r>
-            <a:r>
-              <a:rPr>
-                <a:hlinkClick r:id="rId4"/>
-              </a:rPr>
-              <a:t>https://lmu-osc.github.io/introduction-to-zotero/background/zotero_basics.html</a:t>
-            </a:r>
-          </a:p>
-          <a:p>
-            <a:pPr lvl="0" indent="0" marL="0">
-              <a:buNone/>
-            </a:pPr>
-            <a:r>
-              <a:rPr b="1"/>
-              <a:t>Tip:</a:t>
-            </a:r>
-          </a:p>
-          <a:p>
-            <a:pPr lvl="0" indent="0" marL="0">
-              <a:buNone/>
-            </a:pPr>
-            <a:r>
-              <a:rPr/>
-              <a:t>Since this is a self-paced tutorial, </a:t>
-            </a:r>
-            <a:r>
-              <a:rPr i="1"/>
-              <a:t>take your time</a:t>
-            </a:r>
-            <a:r>
-              <a:rPr/>
-              <a:t> on navigating it; and it can be finished at home as well. We will have a </a:t>
-            </a:r>
-            <a:r>
-              <a:rPr b="1"/>
-              <a:t>check-in moment</a:t>
-            </a:r>
-            <a:r>
-              <a:rPr/>
-              <a:t> at the end of this session and discuss any remaining questions.</a:t>
-            </a:r>
-          </a:p>
-        </p:txBody>
-      </p:sp>
-    </p:spTree>
-  </p:cSld>
-</p:sld>
-</file>
-
-<file path=ppt/slides/slide32.xml><?xml version="1.0" encoding="utf-8"?>
-<p:sld xmlns:a="http://schemas.openxmlformats.org/drawingml/2006/main" xmlns:r="http://schemas.openxmlformats.org/officeDocument/2006/relationships" xmlns:p="http://schemas.openxmlformats.org/presentationml/2006/main">
-  <p:cSld>
-    <p:spTree>
-      <p:nvGrpSpPr>
-        <p:cNvPr id="1" name=""/>
-        <p:cNvGrpSpPr/>
-        <p:nvPr/>
-      </p:nvGrpSpPr>
-      <p:grpSpPr>
-        <a:xfrm>
-          <a:off x="0" y="0"/>
-          <a:ext cx="0" cy="0"/>
-          <a:chOff x="0" y="0"/>
-          <a:chExt cx="0" cy="0"/>
-        </a:xfrm>
-      </p:grpSpPr>
-      <p:sp>
-        <p:nvSpPr>
-          <p:cNvPr id="2" name="Title 1"/>
-          <p:cNvSpPr>
-            <a:spLocks noGrp="1"/>
-          </p:cNvSpPr>
-          <p:nvPr>
-            <p:ph type="title"/>
-          </p:nvPr>
-        </p:nvSpPr>
-        <p:spPr/>
-        <p:txBody>
-          <a:bodyPr/>
-          <a:lstStyle/>
-          <a:p>
-            <a:pPr lvl="0" indent="0" marL="0">
-              <a:buNone/>
-            </a:pPr>
-            <a:r>
-              <a:rPr/>
-              <a:t>Wrapping up</a:t>
-            </a:r>
-          </a:p>
-        </p:txBody>
-      </p:sp>
-      <p:sp>
-        <p:nvSpPr>
-          <p:cNvPr id="3" name="Content Placeholder 2"/>
-          <p:cNvSpPr>
-            <a:spLocks noGrp="1"/>
-          </p:cNvSpPr>
-          <p:nvPr>
-            <p:ph idx="1"/>
-          </p:nvPr>
-        </p:nvSpPr>
-        <p:spPr/>
-        <p:txBody>
-          <a:bodyPr/>
-          <a:lstStyle/>
-          <a:p>
-            <a:pPr lvl="0"/>
-            <a:r>
-              <a:rPr b="1"/>
-              <a:t>For later</a:t>
-            </a:r>
-            <a:r>
-              <a:rPr/>
-              <a:t>: Finish the remaining of the ‘Introduction to Zotero’ tutorial and its exercises at home.</a:t>
-            </a:r>
-          </a:p>
-          <a:p>
-            <a:pPr lvl="0"/>
-            <a:r>
-              <a:rPr b="1"/>
-              <a:t>For now</a:t>
-            </a:r>
-            <a:r>
-              <a:rPr/>
-              <a:t>: Take one minute to assess your learning progress from the tutorial:</a:t>
-            </a:r>
-          </a:p>
-          <a:p>
-            <a:pPr lvl="1"/>
-            <a:r>
-              <a:rPr/>
-              <a:t>What is one key concept about citations or Zotero that became clearer after completing the exercises?</a:t>
-            </a:r>
-          </a:p>
-          <a:p>
-            <a:pPr lvl="1"/>
-            <a:r>
-              <a:rPr/>
-              <a:t>Which Zotero task can you now perform confidently, and which one still feels challenging?</a:t>
-            </a:r>
-          </a:p>
-          <a:p>
-            <a:pPr lvl="1"/>
-            <a:r>
-              <a:rPr/>
-              <a:t>How easy has it been navigating different CSL formats?</a:t>
-            </a:r>
-          </a:p>
-        </p:txBody>
-      </p:sp>
-    </p:spTree>
-  </p:cSld>
-</p:sld>
-</file>
-
 <file path=ppt/slides/slide33.xml><?xml version="1.0" encoding="utf-8"?>
 <p:sld xmlns:a="http://schemas.openxmlformats.org/drawingml/2006/main" xmlns:r="http://schemas.openxmlformats.org/officeDocument/2006/relationships" xmlns:p="http://schemas.openxmlformats.org/presentationml/2006/main">
   <p:cSld>
@@ -11937,7 +11853,7 @@
             </a:pPr>
             <a:r>
               <a:rPr/>
-              <a:t>Looking into the future</a:t>
+              <a:t>Your turn!</a:t>
             </a:r>
           </a:p>
         </p:txBody>
@@ -11957,66 +11873,88 @@
           <a:bodyPr/>
           <a:lstStyle/>
           <a:p>
-            <a:pPr lvl="0" indent="-342900" marL="342900">
-              <a:buAutoNum type="arabicPeriod"/>
-            </a:pPr>
-            <a:r>
-              <a:rPr b="1"/>
-              <a:t>Take a minute to think about the following questions, first for yourself, then in a pair:</a:t>
+            <a:pPr lvl="0" indent="0" marL="0">
+              <a:buNone/>
+            </a:pPr>
+            <a:r>
+              <a:rPr/>
+              <a:t>In this next part, you will familiarize yourself with </a:t>
+            </a:r>
+            <a:r>
+              <a:rPr b="1"/>
+              <a:t>Zotero</a:t>
+            </a:r>
+            <a:r>
+              <a:rPr/>
+              <a:t> through </a:t>
+            </a:r>
+            <a:r>
+              <a:rPr b="1"/>
+              <a:t>hands-on exercices and activities</a:t>
+            </a:r>
+            <a:r>
+              <a:rPr/>
+              <a:t>:</a:t>
             </a:r>
           </a:p>
           <a:p>
             <a:pPr lvl="0"/>
             <a:r>
               <a:rPr/>
-              <a:t>Can you identify some </a:t>
-            </a:r>
-            <a:r>
-              <a:rPr b="1"/>
-              <a:t>practical benefits</a:t>
-            </a:r>
-            <a:r>
-              <a:rPr/>
-              <a:t> of using Zotero?</a:t>
+              <a:t>Click here: </a:t>
+            </a:r>
+            <a:r>
+              <a:rPr>
+                <a:hlinkClick r:id="rId3"/>
+              </a:rPr>
+              <a:t>Zotero: Hands-on practical activities</a:t>
             </a:r>
           </a:p>
           <a:p>
             <a:pPr lvl="0"/>
             <a:r>
               <a:rPr/>
-              <a:t>What </a:t>
-            </a:r>
-            <a:r>
-              <a:rPr b="1"/>
-              <a:t>obstacles</a:t>
-            </a:r>
-            <a:r>
-              <a:rPr/>
-              <a:t> do you anticipate in using it consistently?</a:t>
-            </a:r>
-          </a:p>
-          <a:p>
-            <a:pPr lvl="0"/>
-            <a:r>
-              <a:rPr/>
-              <a:t>How can Zotero support you in your </a:t>
-            </a:r>
-            <a:r>
-              <a:rPr b="1"/>
-              <a:t>upcoming projects</a:t>
-            </a:r>
-            <a:r>
-              <a:rPr/>
-              <a:t>?</a:t>
-            </a:r>
-          </a:p>
-          <a:p>
-            <a:pPr lvl="0" indent="-342900" marL="342900">
-              <a:buAutoNum startAt="2" type="arabicPeriod"/>
-            </a:pPr>
-            <a:r>
-              <a:rPr b="1"/>
-              <a:t>Share your thoughts with the group.</a:t>
+              <a:t>Or follow: </a:t>
+            </a:r>
+            <a:r>
+              <a:rPr>
+                <a:hlinkClick r:id="rId4"/>
+              </a:rPr>
+              <a:t>https://lmu-osc.github.io/introduction-to-zotero/background/zotero_basics.html</a:t>
+            </a:r>
+          </a:p>
+          <a:p>
+            <a:pPr lvl="0" indent="0" marL="0">
+              <a:buNone/>
+            </a:pPr>
+            <a:r>
+              <a:rPr b="1"/>
+              <a:t>Tip:</a:t>
+            </a:r>
+          </a:p>
+          <a:p>
+            <a:pPr lvl="0" indent="0" marL="0">
+              <a:buNone/>
+            </a:pPr>
+            <a:r>
+              <a:rPr/>
+              <a:t>Since this is a self-paced tutorial, </a:t>
+            </a:r>
+            <a:r>
+              <a:rPr i="1"/>
+              <a:t>take your time</a:t>
+            </a:r>
+            <a:r>
+              <a:rPr/>
+              <a:t> on navigating it; and it can be finished at home as well. We will have a </a:t>
+            </a:r>
+            <a:r>
+              <a:rPr b="1"/>
+              <a:t>check-in moment</a:t>
+            </a:r>
+            <a:r>
+              <a:rPr/>
+              <a:t> at the end of this session and discuss any remaining questions.</a:t>
             </a:r>
           </a:p>
         </p:txBody>
@@ -12027,6 +11965,238 @@
 </file>
 
 <file path=ppt/slides/slide34.xml><?xml version="1.0" encoding="utf-8"?>
+<p:sld xmlns:a="http://schemas.openxmlformats.org/drawingml/2006/main" xmlns:r="http://schemas.openxmlformats.org/officeDocument/2006/relationships" xmlns:p="http://schemas.openxmlformats.org/presentationml/2006/main">
+  <p:cSld>
+    <p:spTree>
+      <p:nvGrpSpPr>
+        <p:cNvPr id="1" name=""/>
+        <p:cNvGrpSpPr/>
+        <p:nvPr/>
+      </p:nvGrpSpPr>
+      <p:grpSpPr>
+        <a:xfrm>
+          <a:off x="0" y="0"/>
+          <a:ext cx="0" cy="0"/>
+          <a:chOff x="0" y="0"/>
+          <a:chExt cx="0" cy="0"/>
+        </a:xfrm>
+      </p:grpSpPr>
+      <p:sp>
+        <p:nvSpPr>
+          <p:cNvPr id="2" name="Title 1"/>
+          <p:cNvSpPr>
+            <a:spLocks noGrp="1"/>
+          </p:cNvSpPr>
+          <p:nvPr>
+            <p:ph type="title"/>
+          </p:nvPr>
+        </p:nvSpPr>
+        <p:spPr/>
+        <p:txBody>
+          <a:bodyPr/>
+          <a:lstStyle/>
+          <a:p>
+            <a:pPr lvl="0" indent="0" marL="0">
+              <a:buNone/>
+            </a:pPr>
+            <a:r>
+              <a:rPr/>
+              <a:t>Wrapping up</a:t>
+            </a:r>
+          </a:p>
+        </p:txBody>
+      </p:sp>
+      <p:sp>
+        <p:nvSpPr>
+          <p:cNvPr id="3" name="Content Placeholder 2"/>
+          <p:cNvSpPr>
+            <a:spLocks noGrp="1"/>
+          </p:cNvSpPr>
+          <p:nvPr>
+            <p:ph idx="1"/>
+          </p:nvPr>
+        </p:nvSpPr>
+        <p:spPr/>
+        <p:txBody>
+          <a:bodyPr/>
+          <a:lstStyle/>
+          <a:p>
+            <a:pPr lvl="0"/>
+            <a:r>
+              <a:rPr b="1"/>
+              <a:t>For later</a:t>
+            </a:r>
+            <a:r>
+              <a:rPr/>
+              <a:t>: Finish the remaining of the ‘Introduction to Zotero’ tutorial and its exercises at home.</a:t>
+            </a:r>
+          </a:p>
+          <a:p>
+            <a:pPr lvl="0"/>
+            <a:r>
+              <a:rPr b="1"/>
+              <a:t>For now</a:t>
+            </a:r>
+            <a:r>
+              <a:rPr/>
+              <a:t>: Take one minute to assess your learning progress from the tutorial:</a:t>
+            </a:r>
+          </a:p>
+          <a:p>
+            <a:pPr lvl="1"/>
+            <a:r>
+              <a:rPr/>
+              <a:t>What is one key concept about citations or Zotero that became clearer after completing the exercises?</a:t>
+            </a:r>
+          </a:p>
+          <a:p>
+            <a:pPr lvl="1"/>
+            <a:r>
+              <a:rPr/>
+              <a:t>Which Zotero task can you now perform confidently, and which one still feels challenging?</a:t>
+            </a:r>
+          </a:p>
+          <a:p>
+            <a:pPr lvl="1"/>
+            <a:r>
+              <a:rPr/>
+              <a:t>How easy has it been navigating different CSL formats?</a:t>
+            </a:r>
+          </a:p>
+        </p:txBody>
+      </p:sp>
+    </p:spTree>
+  </p:cSld>
+</p:sld>
+</file>
+
+<file path=ppt/slides/slide35.xml><?xml version="1.0" encoding="utf-8"?>
+<p:sld xmlns:a="http://schemas.openxmlformats.org/drawingml/2006/main" xmlns:r="http://schemas.openxmlformats.org/officeDocument/2006/relationships" xmlns:p="http://schemas.openxmlformats.org/presentationml/2006/main">
+  <p:cSld>
+    <p:spTree>
+      <p:nvGrpSpPr>
+        <p:cNvPr id="1" name=""/>
+        <p:cNvGrpSpPr/>
+        <p:nvPr/>
+      </p:nvGrpSpPr>
+      <p:grpSpPr>
+        <a:xfrm>
+          <a:off x="0" y="0"/>
+          <a:ext cx="0" cy="0"/>
+          <a:chOff x="0" y="0"/>
+          <a:chExt cx="0" cy="0"/>
+        </a:xfrm>
+      </p:grpSpPr>
+      <p:sp>
+        <p:nvSpPr>
+          <p:cNvPr id="2" name="Title 1"/>
+          <p:cNvSpPr>
+            <a:spLocks noGrp="1"/>
+          </p:cNvSpPr>
+          <p:nvPr>
+            <p:ph type="title"/>
+          </p:nvPr>
+        </p:nvSpPr>
+        <p:spPr/>
+        <p:txBody>
+          <a:bodyPr/>
+          <a:lstStyle/>
+          <a:p>
+            <a:pPr lvl="0" indent="0" marL="0">
+              <a:buNone/>
+            </a:pPr>
+            <a:r>
+              <a:rPr/>
+              <a:t>Looking into the future</a:t>
+            </a:r>
+          </a:p>
+        </p:txBody>
+      </p:sp>
+      <p:sp>
+        <p:nvSpPr>
+          <p:cNvPr id="3" name="Content Placeholder 2"/>
+          <p:cNvSpPr>
+            <a:spLocks noGrp="1"/>
+          </p:cNvSpPr>
+          <p:nvPr>
+            <p:ph idx="1"/>
+          </p:nvPr>
+        </p:nvSpPr>
+        <p:spPr/>
+        <p:txBody>
+          <a:bodyPr/>
+          <a:lstStyle/>
+          <a:p>
+            <a:pPr lvl="0" indent="-342900" marL="342900">
+              <a:buAutoNum type="arabicPeriod"/>
+            </a:pPr>
+            <a:r>
+              <a:rPr b="1"/>
+              <a:t>Take a minute to think about the following questions, first for yourself, then in a pair:</a:t>
+            </a:r>
+          </a:p>
+          <a:p>
+            <a:pPr lvl="0"/>
+            <a:r>
+              <a:rPr/>
+              <a:t>Can you identify some </a:t>
+            </a:r>
+            <a:r>
+              <a:rPr b="1"/>
+              <a:t>practical benefits</a:t>
+            </a:r>
+            <a:r>
+              <a:rPr/>
+              <a:t> of using Zotero?</a:t>
+            </a:r>
+          </a:p>
+          <a:p>
+            <a:pPr lvl="0"/>
+            <a:r>
+              <a:rPr/>
+              <a:t>What </a:t>
+            </a:r>
+            <a:r>
+              <a:rPr b="1"/>
+              <a:t>obstacles</a:t>
+            </a:r>
+            <a:r>
+              <a:rPr/>
+              <a:t> do you anticipate in using it consistently?</a:t>
+            </a:r>
+          </a:p>
+          <a:p>
+            <a:pPr lvl="0"/>
+            <a:r>
+              <a:rPr/>
+              <a:t>How can Zotero support you in your </a:t>
+            </a:r>
+            <a:r>
+              <a:rPr b="1"/>
+              <a:t>upcoming projects</a:t>
+            </a:r>
+            <a:r>
+              <a:rPr/>
+              <a:t>?</a:t>
+            </a:r>
+          </a:p>
+          <a:p>
+            <a:pPr lvl="0" indent="-342900" marL="342900">
+              <a:buAutoNum startAt="2" type="arabicPeriod"/>
+            </a:pPr>
+            <a:r>
+              <a:rPr b="1"/>
+              <a:t>Share your thoughts with the group.</a:t>
+            </a:r>
+          </a:p>
+        </p:txBody>
+      </p:sp>
+    </p:spTree>
+  </p:cSld>
+</p:sld>
+</file>
+
+<file path=ppt/slides/slide36.xml><?xml version="1.0" encoding="utf-8"?>
 <p:sld xmlns:a="http://schemas.openxmlformats.org/drawingml/2006/main" xmlns:r="http://schemas.openxmlformats.org/officeDocument/2006/relationships" xmlns:p="http://schemas.openxmlformats.org/presentationml/2006/main">
   <p:cSld>
     <p:spTree>
@@ -12284,7 +12454,7 @@
 </p:sld>
 </file>
 
-<file path=ppt/slides/slide35.xml><?xml version="1.0" encoding="utf-8"?>
+<file path=ppt/slides/slide37.xml><?xml version="1.0" encoding="utf-8"?>
 <p:sld xmlns:a="http://schemas.openxmlformats.org/drawingml/2006/main" xmlns:r="http://schemas.openxmlformats.org/officeDocument/2006/relationships" xmlns:p="http://schemas.openxmlformats.org/presentationml/2006/main">
   <p:cSld>
     <p:spTree>
@@ -12689,136 +12859,6 @@
 </p:sld>
 </file>
 
-<file path=ppt/slides/slide36.xml><?xml version="1.0" encoding="utf-8"?>
-<p:sld xmlns:a="http://schemas.openxmlformats.org/drawingml/2006/main" xmlns:r="http://schemas.openxmlformats.org/officeDocument/2006/relationships" xmlns:p="http://schemas.openxmlformats.org/presentationml/2006/main">
-  <p:cSld>
-    <p:spTree>
-      <p:nvGrpSpPr>
-        <p:cNvPr id="1" name=""/>
-        <p:cNvGrpSpPr/>
-        <p:nvPr/>
-      </p:nvGrpSpPr>
-      <p:grpSpPr>
-        <a:xfrm>
-          <a:off x="0" y="0"/>
-          <a:ext cx="0" cy="0"/>
-          <a:chOff x="0" y="0"/>
-          <a:chExt cx="0" cy="0"/>
-        </a:xfrm>
-      </p:grpSpPr>
-      <p:sp>
-        <p:nvSpPr>
-          <p:cNvPr id="2" name="Title 1"/>
-          <p:cNvSpPr>
-            <a:spLocks noGrp="1"/>
-          </p:cNvSpPr>
-          <p:nvPr>
-            <p:ph type="title"/>
-          </p:nvPr>
-        </p:nvSpPr>
-        <p:spPr/>
-        <p:txBody>
-          <a:bodyPr/>
-          <a:lstStyle/>
-          <a:p>
-            <a:pPr lvl="0" indent="0" marL="0">
-              <a:buNone/>
-            </a:pPr>
-            <a:r>
-              <a:rPr/>
-              <a:t>To conclude: Survey time!</a:t>
-            </a:r>
-          </a:p>
-        </p:txBody>
-      </p:sp>
-    </p:spTree>
-  </p:cSld>
-</p:sld>
-</file>
-
-<file path=ppt/slides/slide37.xml><?xml version="1.0" encoding="utf-8"?>
-<p:sld xmlns:a="http://schemas.openxmlformats.org/drawingml/2006/main" xmlns:r="http://schemas.openxmlformats.org/officeDocument/2006/relationships" xmlns:p="http://schemas.openxmlformats.org/presentationml/2006/main">
-  <p:cSld>
-    <p:spTree>
-      <p:nvGrpSpPr>
-        <p:cNvPr id="1" name=""/>
-        <p:cNvGrpSpPr/>
-        <p:nvPr/>
-      </p:nvGrpSpPr>
-      <p:grpSpPr>
-        <a:xfrm>
-          <a:off x="0" y="0"/>
-          <a:ext cx="0" cy="0"/>
-          <a:chOff x="0" y="0"/>
-          <a:chExt cx="0" cy="0"/>
-        </a:xfrm>
-      </p:grpSpPr>
-      <p:sp>
-        <p:nvSpPr>
-          <p:cNvPr id="3" name="Content Placeholder 2"/>
-          <p:cNvSpPr>
-            <a:spLocks noGrp="1"/>
-          </p:cNvSpPr>
-          <p:nvPr>
-            <p:ph idx="1"/>
-          </p:nvPr>
-        </p:nvSpPr>
-        <p:spPr/>
-        <p:txBody>
-          <a:bodyPr/>
-          <a:lstStyle/>
-          <a:p>
-            <a:pPr lvl="0" indent="0" marL="0">
-              <a:buNone/>
-            </a:pPr>
-            <a:r>
-              <a:rPr b="1"/>
-              <a:t>What is your level of familiarity with citing and referencing scientific papers?</a:t>
-            </a:r>
-          </a:p>
-          <a:p>
-            <a:pPr lvl="0" indent="-342900" marL="342900">
-              <a:buAutoNum type="alphaLcPeriod"/>
-            </a:pPr>
-            <a:r>
-              <a:rPr/>
-              <a:t>I have never heard of it before.</a:t>
-            </a:r>
-          </a:p>
-          <a:p>
-            <a:pPr lvl="0" indent="-342900" marL="342900">
-              <a:buAutoNum type="alphaLcPeriod"/>
-            </a:pPr>
-            <a:r>
-              <a:rPr/>
-              <a:t>I have heard of it but have never worked with it.</a:t>
-            </a:r>
-          </a:p>
-          <a:p>
-            <a:pPr lvl="0" indent="-342900" marL="342900">
-              <a:buAutoNum type="alphaLcPeriod"/>
-            </a:pPr>
-            <a:r>
-              <a:rPr/>
-              <a:t>I have basic understanding and experience with it.</a:t>
-            </a:r>
-          </a:p>
-          <a:p>
-            <a:pPr lvl="0" indent="-342900" marL="342900">
-              <a:buAutoNum type="alphaLcPeriod"/>
-            </a:pPr>
-            <a:r>
-              <a:rPr/>
-              <a:t>I am very familiar and have worked with it extensively.</a:t>
-            </a:r>
-          </a:p>
-        </p:txBody>
-      </p:sp>
-    </p:spTree>
-  </p:cSld>
-</p:sld>
-</file>
-
 <file path=ppt/slides/slide38.xml><?xml version="1.0" encoding="utf-8"?>
 <p:sld xmlns:a="http://schemas.openxmlformats.org/drawingml/2006/main" xmlns:r="http://schemas.openxmlformats.org/officeDocument/2006/relationships" xmlns:p="http://schemas.openxmlformats.org/presentationml/2006/main">
   <p:cSld>
@@ -12838,78 +12878,25 @@
       </p:grpSpPr>
       <p:sp>
         <p:nvSpPr>
-          <p:cNvPr id="3" name="Content Placeholder 2"/>
-          <p:cNvSpPr>
-            <a:spLocks noGrp="1"/>
-          </p:cNvSpPr>
-          <p:nvPr>
-            <p:ph idx="1"/>
-          </p:nvPr>
-        </p:nvSpPr>
-        <p:spPr/>
-        <p:txBody>
-          <a:bodyPr/>
-          <a:lstStyle/>
-          <a:p>
-            <a:pPr lvl="0" indent="0" marL="0">
-              <a:buNone/>
-            </a:pPr>
-            <a:r>
-              <a:rPr b="1"/>
-              <a:t>How confident do you feel with the Zotero workflow of collection, organisation, and citing?</a:t>
-            </a:r>
-            <a:r>
-              <a:rPr/>
-              <a:t> </a:t>
-            </a:r>
-            <a:r>
-              <a:rPr i="1"/>
-              <a:t>(1 = Not confident at all, 5 = Very confident)</a:t>
-            </a:r>
-          </a:p>
-          <a:p>
-            <a:pPr lvl="0" indent="-342900" marL="342900">
-              <a:buAutoNum type="alphaLcPeriod"/>
-            </a:pPr>
-            <a:r>
-              <a:rPr/>
-              <a:t>1</a:t>
-            </a:r>
-          </a:p>
-          <a:p>
-            <a:pPr lvl="0" indent="-342900" marL="342900">
-              <a:buAutoNum type="alphaLcPeriod"/>
-            </a:pPr>
-            <a:r>
-              <a:rPr/>
-              <a:t>2</a:t>
-            </a:r>
-          </a:p>
-          <a:p>
-            <a:pPr lvl="0" indent="-342900" marL="342900">
-              <a:buAutoNum type="alphaLcPeriod"/>
-            </a:pPr>
-            <a:r>
-              <a:rPr/>
-              <a:t>3</a:t>
-            </a:r>
-          </a:p>
-          <a:p>
-            <a:pPr lvl="0" indent="-342900" marL="342900">
-              <a:buAutoNum type="alphaLcPeriod"/>
-            </a:pPr>
-            <a:r>
-              <a:rPr/>
-              <a:t>4</a:t>
-            </a:r>
-          </a:p>
-          <a:p>
-            <a:pPr lvl="0" indent="-342900" marL="342900">
-              <a:buAutoNum type="alphaLcPeriod"/>
-            </a:pPr>
-            <a:r>
-              <a:rPr/>
-              <a:t>5</a:t>
+          <p:cNvPr id="2" name="Title 1"/>
+          <p:cNvSpPr>
+            <a:spLocks noGrp="1"/>
+          </p:cNvSpPr>
+          <p:nvPr>
+            <p:ph type="title"/>
+          </p:nvPr>
+        </p:nvSpPr>
+        <p:spPr/>
+        <p:txBody>
+          <a:bodyPr/>
+          <a:lstStyle/>
+          <a:p>
+            <a:pPr lvl="0" indent="0" marL="0">
+              <a:buNone/>
+            </a:pPr>
+            <a:r>
+              <a:rPr/>
+              <a:t>To conclude: Survey time!</a:t>
             </a:r>
           </a:p>
         </p:txBody>
@@ -12938,31 +12925,6 @@
       </p:grpSpPr>
       <p:sp>
         <p:nvSpPr>
-          <p:cNvPr id="2" name="Title 1"/>
-          <p:cNvSpPr>
-            <a:spLocks noGrp="1"/>
-          </p:cNvSpPr>
-          <p:nvPr>
-            <p:ph type="title"/>
-          </p:nvPr>
-        </p:nvSpPr>
-        <p:spPr/>
-        <p:txBody>
-          <a:bodyPr/>
-          <a:lstStyle/>
-          <a:p>
-            <a:pPr lvl="0" indent="0" marL="0">
-              <a:buNone/>
-            </a:pPr>
-            <a:r>
-              <a:rPr/>
-              <a:t>Discussion of survey results</a:t>
-            </a:r>
-          </a:p>
-        </p:txBody>
-      </p:sp>
-      <p:sp>
-        <p:nvSpPr>
           <p:cNvPr id="3" name="Content Placeholder 2"/>
           <p:cNvSpPr>
             <a:spLocks noGrp="1"/>
@@ -12981,7 +12943,43 @@
             </a:pPr>
             <a:r>
               <a:rPr b="1"/>
-              <a:t>What do we see in the results?</a:t>
+              <a:t>What is your level of familiarity with citing and referencing scientific papers?</a:t>
+            </a:r>
+          </a:p>
+          <a:p>
+            <a:pPr lvl="0" indent="-342900" marL="342900">
+              <a:buAutoNum type="alphaLcPeriod"/>
+            </a:pPr>
+            <a:r>
+              <a:rPr/>
+              <a:t>I have never heard of it before.</a:t>
+            </a:r>
+          </a:p>
+          <a:p>
+            <a:pPr lvl="0" indent="-342900" marL="342900">
+              <a:buAutoNum type="alphaLcPeriod"/>
+            </a:pPr>
+            <a:r>
+              <a:rPr/>
+              <a:t>I have heard of it but have never worked with it.</a:t>
+            </a:r>
+          </a:p>
+          <a:p>
+            <a:pPr lvl="0" indent="-342900" marL="342900">
+              <a:buAutoNum type="alphaLcPeriod"/>
+            </a:pPr>
+            <a:r>
+              <a:rPr/>
+              <a:t>I have basic understanding and experience with it.</a:t>
+            </a:r>
+          </a:p>
+          <a:p>
+            <a:pPr lvl="0" indent="-342900" marL="342900">
+              <a:buAutoNum type="alphaLcPeriod"/>
+            </a:pPr>
+            <a:r>
+              <a:rPr/>
+              <a:t>I am very familiar and have worked with it extensively.</a:t>
             </a:r>
           </a:p>
         </p:txBody>
@@ -13057,31 +13055,6 @@
       </p:grpSpPr>
       <p:sp>
         <p:nvSpPr>
-          <p:cNvPr id="2" name="Title 1"/>
-          <p:cNvSpPr>
-            <a:spLocks noGrp="1"/>
-          </p:cNvSpPr>
-          <p:nvPr>
-            <p:ph type="title"/>
-          </p:nvPr>
-        </p:nvSpPr>
-        <p:spPr/>
-        <p:txBody>
-          <a:bodyPr/>
-          <a:lstStyle/>
-          <a:p>
-            <a:pPr lvl="0" indent="0" marL="0">
-              <a:buNone/>
-            </a:pPr>
-            <a:r>
-              <a:rPr/>
-              <a:t>References</a:t>
-            </a:r>
-          </a:p>
-        </p:txBody>
-      </p:sp>
-      <p:sp>
-        <p:nvSpPr>
           <p:cNvPr id="3" name="Content Placeholder 2"/>
           <p:cNvSpPr>
             <a:spLocks noGrp="1"/>
@@ -13099,16 +13072,61 @@
               <a:buNone/>
             </a:pPr>
             <a:r>
-              <a:rPr/>
-              <a:t>Jackson, P. (1990). The Daily Grind. In </a:t>
+              <a:rPr b="1"/>
+              <a:t>How confident do you feel with the Zotero workflow of collection, organisation, and citing?</a:t>
+            </a:r>
+            <a:r>
+              <a:rPr/>
+              <a:t> </a:t>
             </a:r>
             <a:r>
               <a:rPr i="1"/>
-              <a:t>Life in Classrooms</a:t>
-            </a:r>
-            <a:r>
-              <a:rPr/>
-              <a:t> (2nd ed., pp. 34–35). Teachers College Press.</a:t>
+              <a:t>(1 = Not confident at all, 5 = Very confident)</a:t>
+            </a:r>
+          </a:p>
+          <a:p>
+            <a:pPr lvl="0" indent="-342900" marL="342900">
+              <a:buAutoNum type="alphaLcPeriod"/>
+            </a:pPr>
+            <a:r>
+              <a:rPr/>
+              <a:t>1</a:t>
+            </a:r>
+          </a:p>
+          <a:p>
+            <a:pPr lvl="0" indent="-342900" marL="342900">
+              <a:buAutoNum type="alphaLcPeriod"/>
+            </a:pPr>
+            <a:r>
+              <a:rPr/>
+              <a:t>2</a:t>
+            </a:r>
+          </a:p>
+          <a:p>
+            <a:pPr lvl="0" indent="-342900" marL="342900">
+              <a:buAutoNum type="alphaLcPeriod"/>
+            </a:pPr>
+            <a:r>
+              <a:rPr/>
+              <a:t>3</a:t>
+            </a:r>
+          </a:p>
+          <a:p>
+            <a:pPr lvl="0" indent="-342900" marL="342900">
+              <a:buAutoNum type="alphaLcPeriod"/>
+            </a:pPr>
+            <a:r>
+              <a:rPr/>
+              <a:t>4</a:t>
+            </a:r>
+          </a:p>
+          <a:p>
+            <a:pPr lvl="0" indent="-342900" marL="342900">
+              <a:buAutoNum type="alphaLcPeriod"/>
+            </a:pPr>
+            <a:r>
+              <a:rPr/>
+              <a:t>5</a:t>
             </a:r>
           </a:p>
         </p:txBody>
@@ -13155,7 +13173,7 @@
             </a:pPr>
             <a:r>
               <a:rPr/>
-              <a:t>Thanks!</a:t>
+              <a:t>Discussion of survey results</a:t>
             </a:r>
           </a:p>
         </p:txBody>
@@ -13179,8 +13197,8 @@
               <a:buNone/>
             </a:pPr>
             <a:r>
-              <a:rPr/>
-              <a:t>See you next session :)</a:t>
+              <a:rPr b="1"/>
+              <a:t>What do we see in the results?</a:t>
             </a:r>
           </a:p>
         </p:txBody>
@@ -13227,7 +13245,7 @@
             </a:pPr>
             <a:r>
               <a:rPr/>
-              <a:t>Additional in-class activity</a:t>
+              <a:t>References</a:t>
             </a:r>
           </a:p>
         </p:txBody>
@@ -13247,14 +13265,20 @@
           <a:bodyPr/>
           <a:lstStyle/>
           <a:p>
-            <a:pPr lvl="0"/>
-            <a:r>
-              <a:rPr b="1"/>
-              <a:t>Activity</a:t>
-            </a:r>
-            <a:r>
-              <a:rPr/>
-              <a:t>: Get in a pair, navigate a literature database (Google Scholar), find a paper of your choice with its full text, analyse the citations and the reference list. Note what features you see and share in class.</a:t>
+            <a:pPr lvl="0" indent="0" marL="0">
+              <a:buNone/>
+            </a:pPr>
+            <a:r>
+              <a:rPr/>
+              <a:t>Jackson, P. (1990). The Daily Grind. In </a:t>
+            </a:r>
+            <a:r>
+              <a:rPr i="1"/>
+              <a:t>Life in Classrooms</a:t>
+            </a:r>
+            <a:r>
+              <a:rPr/>
+              <a:t> (2nd ed., pp. 34–35). Teachers College Press.</a:t>
             </a:r>
           </a:p>
         </p:txBody>
@@ -13301,6 +13325,152 @@
             </a:pPr>
             <a:r>
               <a:rPr/>
+              <a:t>Thanks!</a:t>
+            </a:r>
+          </a:p>
+        </p:txBody>
+      </p:sp>
+      <p:sp>
+        <p:nvSpPr>
+          <p:cNvPr id="3" name="Content Placeholder 2"/>
+          <p:cNvSpPr>
+            <a:spLocks noGrp="1"/>
+          </p:cNvSpPr>
+          <p:nvPr>
+            <p:ph idx="1"/>
+          </p:nvPr>
+        </p:nvSpPr>
+        <p:spPr/>
+        <p:txBody>
+          <a:bodyPr/>
+          <a:lstStyle/>
+          <a:p>
+            <a:pPr lvl="0" indent="0" marL="0">
+              <a:buNone/>
+            </a:pPr>
+            <a:r>
+              <a:rPr/>
+              <a:t>See you next session :)</a:t>
+            </a:r>
+          </a:p>
+        </p:txBody>
+      </p:sp>
+    </p:spTree>
+  </p:cSld>
+</p:sld>
+</file>
+
+<file path=ppt/slides/slide44.xml><?xml version="1.0" encoding="utf-8"?>
+<p:sld xmlns:a="http://schemas.openxmlformats.org/drawingml/2006/main" xmlns:r="http://schemas.openxmlformats.org/officeDocument/2006/relationships" xmlns:p="http://schemas.openxmlformats.org/presentationml/2006/main">
+  <p:cSld>
+    <p:spTree>
+      <p:nvGrpSpPr>
+        <p:cNvPr id="1" name=""/>
+        <p:cNvGrpSpPr/>
+        <p:nvPr/>
+      </p:nvGrpSpPr>
+      <p:grpSpPr>
+        <a:xfrm>
+          <a:off x="0" y="0"/>
+          <a:ext cx="0" cy="0"/>
+          <a:chOff x="0" y="0"/>
+          <a:chExt cx="0" cy="0"/>
+        </a:xfrm>
+      </p:grpSpPr>
+      <p:sp>
+        <p:nvSpPr>
+          <p:cNvPr id="2" name="Title 1"/>
+          <p:cNvSpPr>
+            <a:spLocks noGrp="1"/>
+          </p:cNvSpPr>
+          <p:nvPr>
+            <p:ph type="title"/>
+          </p:nvPr>
+        </p:nvSpPr>
+        <p:spPr/>
+        <p:txBody>
+          <a:bodyPr/>
+          <a:lstStyle/>
+          <a:p>
+            <a:pPr lvl="0" indent="0" marL="0">
+              <a:buNone/>
+            </a:pPr>
+            <a:r>
+              <a:rPr/>
+              <a:t>Additional in-class activity</a:t>
+            </a:r>
+          </a:p>
+        </p:txBody>
+      </p:sp>
+      <p:sp>
+        <p:nvSpPr>
+          <p:cNvPr id="3" name="Content Placeholder 2"/>
+          <p:cNvSpPr>
+            <a:spLocks noGrp="1"/>
+          </p:cNvSpPr>
+          <p:nvPr>
+            <p:ph idx="1"/>
+          </p:nvPr>
+        </p:nvSpPr>
+        <p:spPr/>
+        <p:txBody>
+          <a:bodyPr/>
+          <a:lstStyle/>
+          <a:p>
+            <a:pPr lvl="0"/>
+            <a:r>
+              <a:rPr b="1"/>
+              <a:t>Activity</a:t>
+            </a:r>
+            <a:r>
+              <a:rPr/>
+              <a:t>: Get in a pair, navigate a literature database (Google Scholar), find a paper of your choice with its full text, analyse the citations and the reference list. Note what features you see and share in class.</a:t>
+            </a:r>
+          </a:p>
+        </p:txBody>
+      </p:sp>
+    </p:spTree>
+  </p:cSld>
+</p:sld>
+</file>
+
+<file path=ppt/slides/slide45.xml><?xml version="1.0" encoding="utf-8"?>
+<p:sld xmlns:a="http://schemas.openxmlformats.org/drawingml/2006/main" xmlns:r="http://schemas.openxmlformats.org/officeDocument/2006/relationships" xmlns:p="http://schemas.openxmlformats.org/presentationml/2006/main">
+  <p:cSld>
+    <p:spTree>
+      <p:nvGrpSpPr>
+        <p:cNvPr id="1" name=""/>
+        <p:cNvGrpSpPr/>
+        <p:nvPr/>
+      </p:nvGrpSpPr>
+      <p:grpSpPr>
+        <a:xfrm>
+          <a:off x="0" y="0"/>
+          <a:ext cx="0" cy="0"/>
+          <a:chOff x="0" y="0"/>
+          <a:chExt cx="0" cy="0"/>
+        </a:xfrm>
+      </p:grpSpPr>
+      <p:sp>
+        <p:nvSpPr>
+          <p:cNvPr id="2" name="Title 1"/>
+          <p:cNvSpPr>
+            <a:spLocks noGrp="1"/>
+          </p:cNvSpPr>
+          <p:nvPr>
+            <p:ph type="title"/>
+          </p:nvPr>
+        </p:nvSpPr>
+        <p:spPr/>
+        <p:txBody>
+          <a:bodyPr/>
+          <a:lstStyle/>
+          <a:p>
+            <a:pPr lvl="0" indent="0" marL="0">
+              <a:buNone/>
+            </a:pPr>
+            <a:r>
+              <a:rPr/>
               <a:t>CREDiT Contribution Statement - TO DO</a:t>
             </a:r>
           </a:p>
@@ -13402,7 +13572,7 @@
             </a:pPr>
             <a:r>
               <a:rPr/>
-              <a:t>Licence</a:t>
+              <a:t>a section</a:t>
             </a:r>
           </a:p>
         </p:txBody>
@@ -13422,72 +13592,31 @@
           <a:bodyPr/>
           <a:lstStyle/>
           <a:p>
-            <a:pPr lvl="0" indent="0" marL="0">
-              <a:buNone/>
-            </a:pPr>
-            <a:r>
-              <a:rPr/>
-              <a:t>This work was originally created by Pat Callahan and Dejana Damjanovic under a CC-BY-SA 4.0 </a:t>
-            </a:r>
-            <a:r>
-              <a:rPr>
-                <a:hlinkClick r:id="rId3"/>
-              </a:rPr>
-              <a:t>Creative Commons Attribution 4.0 International License</a:t>
-            </a:r>
-            <a:r>
-              <a:rPr/>
-              <a:t> and a CC0 1.0 </a:t>
-            </a:r>
-            <a:r>
-              <a:rPr>
-                <a:hlinkClick r:id="rId4"/>
-              </a:rPr>
-              <a:t>Creative Commons Universal</a:t>
-            </a:r>
-            <a:r>
-              <a:rPr/>
-              <a:t> licence for code snippets. It was subsequently adapted and revised by </a:t>
-            </a:r>
-            <a:r>
-              <a:rPr>
-                <a:hlinkClick r:id="rId5"/>
-              </a:rPr>
-              <a:t>Sarah von Grebmer zu Wolfsthurn</a:t>
-            </a:r>
-            <a:r>
-              <a:rPr/>
-              <a:t>. This current work by </a:t>
-            </a:r>
-            <a:r>
-              <a:rPr>
-                <a:hlinkClick r:id="rId6"/>
-              </a:rPr>
-              <a:t>Tejaswini Sharma</a:t>
-            </a:r>
-            <a:r>
-              <a:rPr/>
-              <a:t> and Sarah von Grebmer zu Wolfsthurn is licensed under a CC-BY-SA 4.0 </a:t>
-            </a:r>
-            <a:r>
-              <a:rPr>
-                <a:hlinkClick r:id="rId7"/>
-              </a:rPr>
-              <a:t>Creative Commons Attribution 4.0 International SA License</a:t>
-            </a:r>
-            <a:r>
-              <a:rPr/>
-              <a:t>. permits unrestricted re-use, distribution, and reproduction in any medium, provided the original work is properly cited. If you remix, transform, or build upon the material, you must distribute your contributions under the same license as the original. Code snippets are dedicated to the public domain and licenced under a CC0 1.0 </a:t>
-            </a:r>
-            <a:r>
-              <a:rPr>
-                <a:hlinkClick r:id="rId8"/>
-              </a:rPr>
-              <a:t>Creative Commons Universal Licence</a:t>
-            </a:r>
-            <a:r>
-              <a:rPr/>
-              <a:t>. You may use, modify, distribute, and sell the code snippets for any purpose, without permission or attribution. The code snippets are provided “as is”, without warranty of any kind.</a:t>
+            <a:pPr lvl="0"/>
+            <a:r>
+              <a:rPr/>
+              <a:t>some text</a:t>
+            </a:r>
+          </a:p>
+          <a:p>
+            <a:pPr lvl="0"/>
+            <a:r>
+              <a:rPr/>
+              <a:t>another bullet point</a:t>
+            </a:r>
+          </a:p>
+          <a:p>
+            <a:pPr lvl="0"/>
+            <a:r>
+              <a:rPr b="1"/>
+              <a:t>bold</a:t>
+            </a:r>
+          </a:p>
+          <a:p>
+            <a:pPr lvl="0"/>
+            <a:r>
+              <a:rPr i="1"/>
+              <a:t>italics</a:t>
             </a:r>
           </a:p>
         </p:txBody>
@@ -13537,53 +13666,7 @@
             </a:pPr>
             <a:r>
               <a:rPr b="1"/>
-              <a:t>Contribution statement</a:t>
-            </a:r>
-          </a:p>
-          <a:p>
-            <a:pPr lvl="0" indent="0" marL="0">
-              <a:buNone/>
-            </a:pPr>
-            <a:r>
-              <a:rPr b="1"/>
-              <a:t>Creator</a:t>
-            </a:r>
-            <a:r>
-              <a:rPr/>
-              <a:t>: Sharma, Tejaswini (</a:t>
-            </a:r>
-            <a:r>
-              <a:rPr>
-                <a:hlinkClick r:id="rId2"/>
-              </a:rPr>
-              <a:t>Orcid-ID: 00009-0000-0305-9751</a:t>
-            </a:r>
-            <a:r>
-              <a:rPr/>
-              <a:t>)</a:t>
-            </a:r>
-          </a:p>
-          <a:p>
-            <a:pPr lvl="0" indent="0" marL="0">
-              <a:buNone/>
-            </a:pPr>
-            <a:r>
-              <a:rPr b="1"/>
-              <a:t>Reviewer</a:t>
-            </a:r>
-            <a:r>
-              <a:rPr/>
-              <a:t>: Von Grebmer zu Wolfsthurn, Sarah (</a:t>
-            </a:r>
-            <a:r>
-              <a:rPr>
-                <a:hlinkClick r:id="rId3"/>
-              </a:rPr>
-              <a:t>Ordcid-ID: 0000-0002-6413-3895</a:t>
-            </a:r>
-            <a:r>
-              <a:rPr/>
-              <a:t>)</a:t>
+              <a:t>this is a level three headers</a:t>
             </a:r>
           </a:p>
         </p:txBody>
@@ -13594,6 +13677,234 @@
 </file>
 
 <file path=ppt/slides/slide7.xml><?xml version="1.0" encoding="utf-8"?>
+<p:sld xmlns:a="http://schemas.openxmlformats.org/drawingml/2006/main" xmlns:r="http://schemas.openxmlformats.org/officeDocument/2006/relationships" xmlns:p="http://schemas.openxmlformats.org/presentationml/2006/main">
+  <p:cSld>
+    <p:spTree>
+      <p:nvGrpSpPr>
+        <p:cNvPr id="1" name=""/>
+        <p:cNvGrpSpPr/>
+        <p:nvPr/>
+      </p:nvGrpSpPr>
+      <p:grpSpPr>
+        <a:xfrm>
+          <a:off x="0" y="0"/>
+          <a:ext cx="0" cy="0"/>
+          <a:chOff x="0" y="0"/>
+          <a:chExt cx="0" cy="0"/>
+        </a:xfrm>
+      </p:grpSpPr>
+      <p:sp>
+        <p:nvSpPr>
+          <p:cNvPr id="2" name="Title 1"/>
+          <p:cNvSpPr>
+            <a:spLocks noGrp="1"/>
+          </p:cNvSpPr>
+          <p:nvPr>
+            <p:ph type="title"/>
+          </p:nvPr>
+        </p:nvSpPr>
+        <p:spPr/>
+        <p:txBody>
+          <a:bodyPr/>
+          <a:lstStyle/>
+          <a:p>
+            <a:pPr lvl="0" indent="0" marL="0">
+              <a:buNone/>
+            </a:pPr>
+            <a:r>
+              <a:rPr/>
+              <a:t>Licence</a:t>
+            </a:r>
+          </a:p>
+        </p:txBody>
+      </p:sp>
+      <p:sp>
+        <p:nvSpPr>
+          <p:cNvPr id="3" name="Content Placeholder 2"/>
+          <p:cNvSpPr>
+            <a:spLocks noGrp="1"/>
+          </p:cNvSpPr>
+          <p:nvPr>
+            <p:ph idx="1"/>
+          </p:nvPr>
+        </p:nvSpPr>
+        <p:spPr/>
+        <p:txBody>
+          <a:bodyPr/>
+          <a:lstStyle/>
+          <a:p>
+            <a:pPr lvl="0" indent="0" marL="0">
+              <a:buNone/>
+            </a:pPr>
+            <a:r>
+              <a:rPr/>
+              <a:t>This work was originally created by Pat Callahan and Dejana Damjanovic under a CC-BY-SA 4.0 </a:t>
+            </a:r>
+            <a:r>
+              <a:rPr>
+                <a:hlinkClick r:id="rId3"/>
+              </a:rPr>
+              <a:t>Creative Commons Attribution 4.0 International License</a:t>
+            </a:r>
+            <a:r>
+              <a:rPr/>
+              <a:t> and a CC0 1.0 </a:t>
+            </a:r>
+            <a:r>
+              <a:rPr>
+                <a:hlinkClick r:id="rId4"/>
+              </a:rPr>
+              <a:t>Creative Commons Universal</a:t>
+            </a:r>
+            <a:r>
+              <a:rPr/>
+              <a:t> licence for code snippets. It was subsequently adapted and revised by </a:t>
+            </a:r>
+            <a:r>
+              <a:rPr>
+                <a:hlinkClick r:id="rId5"/>
+              </a:rPr>
+              <a:t>Sarah von Grebmer zu Wolfsthurn</a:t>
+            </a:r>
+            <a:r>
+              <a:rPr/>
+              <a:t>. This current work by </a:t>
+            </a:r>
+            <a:r>
+              <a:rPr>
+                <a:hlinkClick r:id="rId6"/>
+              </a:rPr>
+              <a:t>Tejaswini Sharma</a:t>
+            </a:r>
+            <a:r>
+              <a:rPr/>
+              <a:t> and Sarah von Grebmer zu Wolfsthurn is licensed under a CC-BY-SA 4.0 </a:t>
+            </a:r>
+            <a:r>
+              <a:rPr>
+                <a:hlinkClick r:id="rId7"/>
+              </a:rPr>
+              <a:t>Creative Commons Attribution 4.0 International SA License</a:t>
+            </a:r>
+            <a:r>
+              <a:rPr/>
+              <a:t>. permits unrestricted re-use, distribution, and reproduction in any medium, provided the original work is properly cited. If you remix, transform, or build upon the material, you must distribute your contributions under the same license as the original. Code snippets are dedicated to the public domain and licenced under a CC0 1.0 </a:t>
+            </a:r>
+            <a:r>
+              <a:rPr>
+                <a:hlinkClick r:id="rId8"/>
+              </a:rPr>
+              <a:t>Creative Commons Universal Licence</a:t>
+            </a:r>
+            <a:r>
+              <a:rPr/>
+              <a:t>. You may use, modify, distribute, and sell the code snippets for any purpose, without permission or attribution. The code snippets are provided “as is”, without warranty of any kind.</a:t>
+            </a:r>
+          </a:p>
+        </p:txBody>
+      </p:sp>
+    </p:spTree>
+  </p:cSld>
+</p:sld>
+</file>
+
+<file path=ppt/slides/slide8.xml><?xml version="1.0" encoding="utf-8"?>
+<p:sld xmlns:a="http://schemas.openxmlformats.org/drawingml/2006/main" xmlns:r="http://schemas.openxmlformats.org/officeDocument/2006/relationships" xmlns:p="http://schemas.openxmlformats.org/presentationml/2006/main">
+  <p:cSld>
+    <p:spTree>
+      <p:nvGrpSpPr>
+        <p:cNvPr id="1" name=""/>
+        <p:cNvGrpSpPr/>
+        <p:nvPr/>
+      </p:nvGrpSpPr>
+      <p:grpSpPr>
+        <a:xfrm>
+          <a:off x="0" y="0"/>
+          <a:ext cx="0" cy="0"/>
+          <a:chOff x="0" y="0"/>
+          <a:chExt cx="0" cy="0"/>
+        </a:xfrm>
+      </p:grpSpPr>
+      <p:sp>
+        <p:nvSpPr>
+          <p:cNvPr id="3" name="Content Placeholder 2"/>
+          <p:cNvSpPr>
+            <a:spLocks noGrp="1"/>
+          </p:cNvSpPr>
+          <p:nvPr>
+            <p:ph idx="1"/>
+          </p:nvPr>
+        </p:nvSpPr>
+        <p:spPr/>
+        <p:txBody>
+          <a:bodyPr/>
+          <a:lstStyle/>
+          <a:p>
+            <a:pPr lvl="0" indent="0" marL="0">
+              <a:spcBef>
+                <a:spcPts val="3000"/>
+              </a:spcBef>
+              <a:buNone/>
+            </a:pPr>
+            <a:r>
+              <a:rPr b="1"/>
+              <a:t>Contribution statement</a:t>
+            </a:r>
+          </a:p>
+          <a:p>
+            <a:pPr lvl="0" indent="0" marL="0">
+              <a:buNone/>
+            </a:pPr>
+            <a:r>
+              <a:rPr b="1"/>
+              <a:t>Creator</a:t>
+            </a:r>
+            <a:r>
+              <a:rPr/>
+              <a:t>: Sharma, Tejaswini (</a:t>
+            </a:r>
+            <a:r>
+              <a:rPr>
+                <a:hlinkClick r:id="rId2"/>
+              </a:rPr>
+              <a:t>Orcid-ID: 00009-0000-0305-9751</a:t>
+            </a:r>
+            <a:r>
+              <a:rPr/>
+              <a:t>)</a:t>
+            </a:r>
+          </a:p>
+          <a:p>
+            <a:pPr lvl="0" indent="0" marL="0">
+              <a:buNone/>
+            </a:pPr>
+            <a:r>
+              <a:rPr b="1"/>
+              <a:t>Reviewer</a:t>
+            </a:r>
+            <a:r>
+              <a:rPr/>
+              <a:t>: Von Grebmer zu Wolfsthurn, Sarah (</a:t>
+            </a:r>
+            <a:r>
+              <a:rPr>
+                <a:hlinkClick r:id="rId3"/>
+              </a:rPr>
+              <a:t>Ordcid-ID: 0000-0002-6413-3895</a:t>
+            </a:r>
+            <a:r>
+              <a:rPr/>
+              <a:t>)</a:t>
+            </a:r>
+          </a:p>
+        </p:txBody>
+      </p:sp>
+    </p:spTree>
+  </p:cSld>
+</p:sld>
+</file>
+
+<file path=ppt/slides/slide9.xml><?xml version="1.0" encoding="utf-8"?>
 <p:sld xmlns:a="http://schemas.openxmlformats.org/drawingml/2006/main" xmlns:r="http://schemas.openxmlformats.org/officeDocument/2006/relationships" xmlns:p="http://schemas.openxmlformats.org/presentationml/2006/main">
   <p:cSld>
     <p:spTree>
@@ -13895,174 +14206,6 @@
           </a:graphicData>
         </a:graphic>
       </p:graphicFrame>
-    </p:spTree>
-  </p:cSld>
-</p:sld>
-</file>
-
-<file path=ppt/slides/slide8.xml><?xml version="1.0" encoding="utf-8"?>
-<p:sld xmlns:a="http://schemas.openxmlformats.org/drawingml/2006/main" xmlns:r="http://schemas.openxmlformats.org/officeDocument/2006/relationships" xmlns:p="http://schemas.openxmlformats.org/presentationml/2006/main">
-  <p:cSld>
-    <p:spTree>
-      <p:nvGrpSpPr>
-        <p:cNvPr id="1" name=""/>
-        <p:cNvGrpSpPr/>
-        <p:nvPr/>
-      </p:nvGrpSpPr>
-      <p:grpSpPr>
-        <a:xfrm>
-          <a:off x="0" y="0"/>
-          <a:ext cx="0" cy="0"/>
-          <a:chOff x="0" y="0"/>
-          <a:chExt cx="0" cy="0"/>
-        </a:xfrm>
-      </p:grpSpPr>
-      <p:sp>
-        <p:nvSpPr>
-          <p:cNvPr id="2" name="Title 1"/>
-          <p:cNvSpPr>
-            <a:spLocks noGrp="1"/>
-          </p:cNvSpPr>
-          <p:nvPr>
-            <p:ph type="title"/>
-          </p:nvPr>
-        </p:nvSpPr>
-        <p:spPr>
-          <a:xfrm>
-            <a:off x="457201" y="204787"/>
-            <a:ext cx="3008313" cy="871538"/>
-          </a:xfrm>
-        </p:spPr>
-        <p:txBody>
-          <a:bodyPr/>
-          <a:lstStyle/>
-          <a:p>
-            <a:pPr lvl="0" indent="0" marL="0">
-              <a:buNone/>
-            </a:pPr>
-            <a:r>
-              <a:rPr/>
-              <a:t>Prerequisites (cont.)</a:t>
-            </a:r>
-          </a:p>
-        </p:txBody>
-      </p:sp>
-      <p:sp>
-        <p:nvSpPr>
-          <p:cNvPr id="4" name="Text Placeholder 3"/>
-          <p:cNvSpPr>
-            <a:spLocks noGrp="1"/>
-          </p:cNvSpPr>
-          <p:nvPr>
-            <p:ph idx="2" sz="half" type="body"/>
-          </p:nvPr>
-        </p:nvSpPr>
-        <p:spPr/>
-        <p:txBody>
-          <a:bodyPr/>
-          <a:lstStyle/>
-          <a:p>
-            <a:pPr lvl="0"/>
-            <a:r>
-              <a:rPr/>
-              <a:t>Familiarity with the concept of </a:t>
-            </a:r>
-            <a:r>
-              <a:rPr b="1"/>
-              <a:t>literature review</a:t>
-            </a:r>
-            <a:r>
-              <a:rPr/>
-              <a:t>; how and where to access scientific papers, such as </a:t>
-            </a:r>
-            <a:r>
-              <a:rPr i="1"/>
-              <a:t>Google Scholar</a:t>
-            </a:r>
-            <a:r>
-              <a:rPr/>
-              <a:t>.</a:t>
-            </a:r>
-          </a:p>
-        </p:txBody>
-      </p:sp>
-      <p:pic>
-        <p:nvPicPr>
-          <p:cNvPr descr="images/GoogleScholar.png" id="0" name="Picture 1"/>
-          <p:cNvPicPr>
-            <a:picLocks noGrp="1" noChangeAspect="1"/>
-          </p:cNvPicPr>
-          <p:nvPr/>
-        </p:nvPicPr>
-        <p:blipFill>
-          <a:blip r:embed="rId3"/>
-          <a:stretch>
-            <a:fillRect/>
-          </a:stretch>
-        </p:blipFill>
-        <p:spPr bwMode="auto">
-          <a:xfrm>
-            <a:off x="3568700" y="863600"/>
-            <a:ext cx="5105400" cy="3060700"/>
-          </a:xfrm>
-          <a:prstGeom prst="rect">
-            <a:avLst/>
-          </a:prstGeom>
-          <a:noFill/>
-          <a:ln w="9525">
-            <a:noFill/>
-            <a:headEnd/>
-            <a:tailEnd/>
-          </a:ln>
-        </p:spPr>
-      </p:pic>
-    </p:spTree>
-  </p:cSld>
-</p:sld>
-</file>
-
-<file path=ppt/slides/slide9.xml><?xml version="1.0" encoding="utf-8"?>
-<p:sld xmlns:a="http://schemas.openxmlformats.org/drawingml/2006/main" xmlns:r="http://schemas.openxmlformats.org/officeDocument/2006/relationships" xmlns:p="http://schemas.openxmlformats.org/presentationml/2006/main">
-  <p:cSld>
-    <p:spTree>
-      <p:nvGrpSpPr>
-        <p:cNvPr id="1" name=""/>
-        <p:cNvGrpSpPr/>
-        <p:nvPr/>
-      </p:nvGrpSpPr>
-      <p:grpSpPr>
-        <a:xfrm>
-          <a:off x="0" y="0"/>
-          <a:ext cx="0" cy="0"/>
-          <a:chOff x="0" y="0"/>
-          <a:chExt cx="0" cy="0"/>
-        </a:xfrm>
-      </p:grpSpPr>
-      <p:sp>
-        <p:nvSpPr>
-          <p:cNvPr id="2" name="Title 1"/>
-          <p:cNvSpPr>
-            <a:spLocks noGrp="1"/>
-          </p:cNvSpPr>
-          <p:nvPr>
-            <p:ph type="title"/>
-          </p:nvPr>
-        </p:nvSpPr>
-        <p:spPr/>
-        <p:txBody>
-          <a:bodyPr/>
-          <a:lstStyle/>
-          <a:p>
-            <a:pPr lvl="0" indent="0" marL="0">
-              <a:buNone/>
-            </a:pPr>
-            <a:r>
-              <a:rPr/>
-              <a:t>Questions from the previous submodule?</a:t>
-            </a:r>
-          </a:p>
-        </p:txBody>
-      </p:sp>
     </p:spTree>
   </p:cSld>
 </p:sld>

--- a/index.pptx
+++ b/index.pptx
@@ -7449,7 +7449,7 @@
             </a:pPr>
             <a:r>
               <a:rPr/>
-              <a:t>2022-06-09</a:t>
+              <a:t>2020-09-30</a:t>
             </a:r>
           </a:p>
         </p:txBody>

--- a/index.pptx
+++ b/index.pptx
@@ -5,7 +5,7 @@
     <p:sldMasterId id="2147483648" r:id="rId1"/>
   </p:sldMasterIdLst>
   <p:notesMasterIdLst>
-    <p:notesMasterId r:id="rId47"/>
+    <p:notesMasterId r:id="rId42"/>
   </p:notesMasterIdLst>
   <p:sldIdLst>
     <p:sldId id="256" r:id="rId2"/>
@@ -48,11 +48,6 @@
     <p:sldId id="293" r:id="rId39"/>
     <p:sldId id="294" r:id="rId40"/>
     <p:sldId id="295" r:id="rId41"/>
-    <p:sldId id="296" r:id="rId42"/>
-    <p:sldId id="297" r:id="rId43"/>
-    <p:sldId id="298" r:id="rId44"/>
-    <p:sldId id="299" r:id="rId45"/>
-    <p:sldId id="300" r:id="rId46"/>
   </p:sldIdLst>
   <p:sldSz cx="9144000" cy="5143500" type="screen16x9"/>
   <p:notesSz cx="6858000" cy="9144000"/>
@@ -594,7 +589,7 @@
           <a:p>
             <a:fld id="{18BDFEC3-8487-43E8-A154-7C12CBC1FFF2}" type="slidenum">
               <a:rPr lang="en-US"/>
-              <a:t>7</a:t>
+              <a:t>2</a:t>
             </a:fld>
             <a:endParaRPr lang="en-US"/>
           </a:p>
@@ -721,7 +716,7 @@
           <a:p>
             <a:fld id="{18BDFEC3-8487-43E8-A154-7C12CBC1FFF2}" type="slidenum">
               <a:rPr lang="en-US"/>
-              <a:t>19</a:t>
+              <a:t>14</a:t>
             </a:fld>
             <a:endParaRPr lang="en-US"/>
           </a:p>
@@ -862,7 +857,7 @@
           <a:p>
             <a:fld id="{18BDFEC3-8487-43E8-A154-7C12CBC1FFF2}" type="slidenum">
               <a:rPr lang="en-US"/>
-              <a:t>20</a:t>
+              <a:t>15</a:t>
             </a:fld>
             <a:endParaRPr lang="en-US"/>
           </a:p>
@@ -1009,7 +1004,7 @@
           <a:p>
             <a:fld id="{18BDFEC3-8487-43E8-A154-7C12CBC1FFF2}" type="slidenum">
               <a:rPr lang="en-US"/>
-              <a:t>21</a:t>
+              <a:t>16</a:t>
             </a:fld>
             <a:endParaRPr lang="en-US"/>
           </a:p>
@@ -1146,7 +1141,7 @@
           <a:p>
             <a:fld id="{18BDFEC3-8487-43E8-A154-7C12CBC1FFF2}" type="slidenum">
               <a:rPr lang="en-US"/>
-              <a:t>22</a:t>
+              <a:t>17</a:t>
             </a:fld>
             <a:endParaRPr lang="en-US"/>
           </a:p>
@@ -1246,7 +1241,7 @@
           <a:p>
             <a:fld id="{18BDFEC3-8487-43E8-A154-7C12CBC1FFF2}" type="slidenum">
               <a:rPr lang="en-US"/>
-              <a:t>23</a:t>
+              <a:t>18</a:t>
             </a:fld>
             <a:endParaRPr lang="en-US"/>
           </a:p>
@@ -1422,7 +1417,7 @@
           <a:p>
             <a:fld id="{18BDFEC3-8487-43E8-A154-7C12CBC1FFF2}" type="slidenum">
               <a:rPr lang="en-US"/>
-              <a:t>24</a:t>
+              <a:t>19</a:t>
             </a:fld>
             <a:endParaRPr lang="en-US"/>
           </a:p>
@@ -1532,7 +1527,7 @@
           <a:p>
             <a:fld id="{18BDFEC3-8487-43E8-A154-7C12CBC1FFF2}" type="slidenum">
               <a:rPr lang="en-US"/>
-              <a:t>25</a:t>
+              <a:t>20</a:t>
             </a:fld>
             <a:endParaRPr lang="en-US"/>
           </a:p>
@@ -1636,7 +1631,7 @@
           <a:p>
             <a:fld id="{18BDFEC3-8487-43E8-A154-7C12CBC1FFF2}" type="slidenum">
               <a:rPr lang="en-US"/>
-              <a:t>26</a:t>
+              <a:t>21</a:t>
             </a:fld>
             <a:endParaRPr lang="en-US"/>
           </a:p>
@@ -1808,7 +1803,7 @@
           <a:p>
             <a:fld id="{18BDFEC3-8487-43E8-A154-7C12CBC1FFF2}" type="slidenum">
               <a:rPr lang="en-US"/>
-              <a:t>27</a:t>
+              <a:t>22</a:t>
             </a:fld>
             <a:endParaRPr lang="en-US"/>
           </a:p>
@@ -1990,7 +1985,7 @@
           <a:p>
             <a:fld id="{18BDFEC3-8487-43E8-A154-7C12CBC1FFF2}" type="slidenum">
               <a:rPr lang="en-US"/>
-              <a:t>28</a:t>
+              <a:t>23</a:t>
             </a:fld>
             <a:endParaRPr lang="en-US"/>
           </a:p>
@@ -2094,7 +2089,7 @@
           <a:p>
             <a:fld id="{18BDFEC3-8487-43E8-A154-7C12CBC1FFF2}" type="slidenum">
               <a:rPr lang="en-US"/>
-              <a:t>9</a:t>
+              <a:t>4</a:t>
             </a:fld>
             <a:endParaRPr lang="en-US"/>
           </a:p>
@@ -2198,7 +2193,7 @@
           <a:p>
             <a:fld id="{18BDFEC3-8487-43E8-A154-7C12CBC1FFF2}" type="slidenum">
               <a:rPr lang="en-US"/>
-              <a:t>29</a:t>
+              <a:t>24</a:t>
             </a:fld>
             <a:endParaRPr lang="en-US"/>
           </a:p>
@@ -2322,7 +2317,7 @@
           <a:p>
             <a:fld id="{18BDFEC3-8487-43E8-A154-7C12CBC1FFF2}" type="slidenum">
               <a:rPr lang="en-US"/>
-              <a:t>31</a:t>
+              <a:t>26</a:t>
             </a:fld>
             <a:endParaRPr lang="en-US"/>
           </a:p>
@@ -2458,7 +2453,7 @@
           <a:p>
             <a:fld id="{18BDFEC3-8487-43E8-A154-7C12CBC1FFF2}" type="slidenum">
               <a:rPr lang="en-US"/>
-              <a:t>32</a:t>
+              <a:t>27</a:t>
             </a:fld>
             <a:endParaRPr lang="en-US"/>
           </a:p>
@@ -2562,7 +2557,7 @@
           <a:p>
             <a:fld id="{18BDFEC3-8487-43E8-A154-7C12CBC1FFF2}" type="slidenum">
               <a:rPr lang="en-US"/>
-              <a:t>33</a:t>
+              <a:t>28</a:t>
             </a:fld>
             <a:endParaRPr lang="en-US"/>
           </a:p>
@@ -2708,7 +2703,7 @@
           <a:p>
             <a:fld id="{18BDFEC3-8487-43E8-A154-7C12CBC1FFF2}" type="slidenum">
               <a:rPr lang="en-US"/>
-              <a:t>34</a:t>
+              <a:t>29</a:t>
             </a:fld>
             <a:endParaRPr lang="en-US"/>
           </a:p>
@@ -2937,7 +2932,7 @@
           <a:p>
             <a:fld id="{18BDFEC3-8487-43E8-A154-7C12CBC1FFF2}" type="slidenum">
               <a:rPr lang="en-US"/>
-              <a:t>35</a:t>
+              <a:t>30</a:t>
             </a:fld>
             <a:endParaRPr lang="en-US"/>
           </a:p>
@@ -3060,7 +3055,7 @@
           <a:p>
             <a:fld id="{18BDFEC3-8487-43E8-A154-7C12CBC1FFF2}" type="slidenum">
               <a:rPr lang="en-US"/>
-              <a:t>36</a:t>
+              <a:t>31</a:t>
             </a:fld>
             <a:endParaRPr lang="en-US"/>
           </a:p>
@@ -3178,7 +3173,7 @@
           <a:p>
             <a:fld id="{18BDFEC3-8487-43E8-A154-7C12CBC1FFF2}" type="slidenum">
               <a:rPr lang="en-US"/>
-              <a:t>37</a:t>
+              <a:t>32</a:t>
             </a:fld>
             <a:endParaRPr lang="en-US"/>
           </a:p>
@@ -3272,7 +3267,7 @@
           <a:p>
             <a:fld id="{18BDFEC3-8487-43E8-A154-7C12CBC1FFF2}" type="slidenum">
               <a:rPr lang="en-US"/>
-              <a:t>38</a:t>
+              <a:t>33</a:t>
             </a:fld>
             <a:endParaRPr lang="en-US"/>
           </a:p>
@@ -3396,7 +3391,7 @@
           <a:p>
             <a:fld id="{18BDFEC3-8487-43E8-A154-7C12CBC1FFF2}" type="slidenum">
               <a:rPr lang="en-US"/>
-              <a:t>41</a:t>
+              <a:t>36</a:t>
             </a:fld>
             <a:endParaRPr lang="en-US"/>
           </a:p>
@@ -3500,7 +3495,7 @@
           <a:p>
             <a:fld id="{18BDFEC3-8487-43E8-A154-7C12CBC1FFF2}" type="slidenum">
               <a:rPr lang="en-US"/>
-              <a:t>10</a:t>
+              <a:t>5</a:t>
             </a:fld>
             <a:endParaRPr lang="en-US"/>
           </a:p>
@@ -3622,7 +3617,7 @@
           <a:p>
             <a:fld id="{18BDFEC3-8487-43E8-A154-7C12CBC1FFF2}" type="slidenum">
               <a:rPr lang="en-US"/>
-              <a:t>44</a:t>
+              <a:t>39</a:t>
             </a:fld>
             <a:endParaRPr lang="en-US"/>
           </a:p>
@@ -3778,7 +3773,7 @@
           <a:p>
             <a:fld id="{18BDFEC3-8487-43E8-A154-7C12CBC1FFF2}" type="slidenum">
               <a:rPr lang="en-US"/>
-              <a:t>11</a:t>
+              <a:t>6</a:t>
             </a:fld>
             <a:endParaRPr lang="en-US"/>
           </a:p>
@@ -3910,7 +3905,7 @@
           <a:p>
             <a:fld id="{18BDFEC3-8487-43E8-A154-7C12CBC1FFF2}" type="slidenum">
               <a:rPr lang="en-US"/>
-              <a:t>12</a:t>
+              <a:t>7</a:t>
             </a:fld>
             <a:endParaRPr lang="en-US"/>
           </a:p>
@@ -4014,7 +4009,7 @@
           <a:p>
             <a:fld id="{18BDFEC3-8487-43E8-A154-7C12CBC1FFF2}" type="slidenum">
               <a:rPr lang="en-US"/>
-              <a:t>15</a:t>
+              <a:t>10</a:t>
             </a:fld>
             <a:endParaRPr lang="en-US"/>
           </a:p>
@@ -4146,7 +4141,7 @@
           <a:p>
             <a:fld id="{18BDFEC3-8487-43E8-A154-7C12CBC1FFF2}" type="slidenum">
               <a:rPr lang="en-US"/>
-              <a:t>16</a:t>
+              <a:t>11</a:t>
             </a:fld>
             <a:endParaRPr lang="en-US"/>
           </a:p>
@@ -4268,7 +4263,7 @@
           <a:p>
             <a:fld id="{18BDFEC3-8487-43E8-A154-7C12CBC1FFF2}" type="slidenum">
               <a:rPr lang="en-US"/>
-              <a:t>17</a:t>
+              <a:t>12</a:t>
             </a:fld>
             <a:endParaRPr lang="en-US"/>
           </a:p>
@@ -4391,7 +4386,7 @@
           <a:p>
             <a:fld id="{18BDFEC3-8487-43E8-A154-7C12CBC1FFF2}" type="slidenum">
               <a:rPr lang="en-US"/>
-              <a:t>18</a:t>
+              <a:t>13</a:t>
             </a:fld>
             <a:endParaRPr lang="en-US"/>
           </a:p>
@@ -7486,95 +7481,46 @@
             <p:ph type="title"/>
           </p:nvPr>
         </p:nvSpPr>
-        <p:spPr>
-          <a:xfrm>
-            <a:off x="457201" y="204787"/>
-            <a:ext cx="3008313" cy="871538"/>
-          </a:xfrm>
-        </p:spPr>
-        <p:txBody>
-          <a:bodyPr/>
-          <a:lstStyle/>
-          <a:p>
-            <a:pPr lvl="0" indent="0" marL="0">
-              <a:buNone/>
-            </a:pPr>
-            <a:r>
-              <a:rPr/>
-              <a:t>Prerequisites (cont.)</a:t>
-            </a:r>
-          </a:p>
-        </p:txBody>
-      </p:sp>
-      <p:sp>
-        <p:nvSpPr>
-          <p:cNvPr id="4" name="Text Placeholder 3"/>
-          <p:cNvSpPr>
-            <a:spLocks noGrp="1"/>
-          </p:cNvSpPr>
-          <p:nvPr>
-            <p:ph idx="2" sz="half" type="body"/>
-          </p:nvPr>
-        </p:nvSpPr>
-        <p:spPr/>
-        <p:txBody>
-          <a:bodyPr/>
-          <a:lstStyle/>
-          <a:p>
-            <a:pPr lvl="0"/>
-            <a:r>
-              <a:rPr/>
-              <a:t>Familiarity with the concept of </a:t>
-            </a:r>
-            <a:r>
-              <a:rPr b="1"/>
-              <a:t>literature review</a:t>
-            </a:r>
-            <a:r>
-              <a:rPr/>
-              <a:t>; how and where to access scientific papers, such as </a:t>
-            </a:r>
-            <a:r>
-              <a:rPr i="1"/>
-              <a:t>Google Scholar</a:t>
-            </a:r>
-            <a:r>
-              <a:rPr/>
-              <a:t>.</a:t>
-            </a:r>
-          </a:p>
-        </p:txBody>
-      </p:sp>
-      <p:pic>
-        <p:nvPicPr>
-          <p:cNvPr descr="images/GoogleScholar.png" id="0" name="Picture 1"/>
-          <p:cNvPicPr>
-            <a:picLocks noGrp="1" noChangeAspect="1"/>
-          </p:cNvPicPr>
-          <p:nvPr/>
-        </p:nvPicPr>
-        <p:blipFill>
-          <a:blip r:embed="rId3"/>
-          <a:stretch>
-            <a:fillRect/>
-          </a:stretch>
-        </p:blipFill>
-        <p:spPr bwMode="auto">
-          <a:xfrm>
-            <a:off x="3568700" y="863600"/>
-            <a:ext cx="5105400" cy="3060700"/>
-          </a:xfrm>
-          <a:prstGeom prst="rect">
-            <a:avLst/>
-          </a:prstGeom>
-          <a:noFill/>
-          <a:ln w="9525">
-            <a:noFill/>
-            <a:headEnd/>
-            <a:tailEnd/>
-          </a:ln>
-        </p:spPr>
-      </p:pic>
+        <p:spPr/>
+        <p:txBody>
+          <a:bodyPr/>
+          <a:lstStyle/>
+          <a:p>
+            <a:pPr lvl="0" indent="0" marL="0">
+              <a:buNone/>
+            </a:pPr>
+            <a:r>
+              <a:rPr/>
+              <a:t>Discussion of survey results</a:t>
+            </a:r>
+          </a:p>
+        </p:txBody>
+      </p:sp>
+      <p:sp>
+        <p:nvSpPr>
+          <p:cNvPr id="3" name="Content Placeholder 2"/>
+          <p:cNvSpPr>
+            <a:spLocks noGrp="1"/>
+          </p:cNvSpPr>
+          <p:nvPr>
+            <p:ph idx="1"/>
+          </p:nvPr>
+        </p:nvSpPr>
+        <p:spPr/>
+        <p:txBody>
+          <a:bodyPr/>
+          <a:lstStyle/>
+          <a:p>
+            <a:pPr lvl="0" indent="0" marL="0">
+              <a:buNone/>
+            </a:pPr>
+            <a:r>
+              <a:rPr b="1"/>
+              <a:t>What do we see in the results?</a:t>
+            </a:r>
+          </a:p>
+        </p:txBody>
+      </p:sp>
     </p:spTree>
   </p:cSld>
 </p:sld>
@@ -7617,7 +7563,98 @@
             </a:pPr>
             <a:r>
               <a:rPr/>
-              <a:t>Questions from the previous submodule?</a:t>
+              <a:t>Where are we at?</a:t>
+            </a:r>
+          </a:p>
+        </p:txBody>
+      </p:sp>
+      <p:sp>
+        <p:nvSpPr>
+          <p:cNvPr id="3" name="Content Placeholder 2"/>
+          <p:cNvSpPr>
+            <a:spLocks noGrp="1"/>
+          </p:cNvSpPr>
+          <p:nvPr>
+            <p:ph idx="1"/>
+          </p:nvPr>
+        </p:nvSpPr>
+        <p:spPr/>
+        <p:txBody>
+          <a:bodyPr/>
+          <a:lstStyle/>
+          <a:p>
+            <a:pPr lvl="0" indent="0" marL="0">
+              <a:buNone/>
+            </a:pPr>
+            <a:r>
+              <a:rPr b="1"/>
+              <a:t>Previously</a:t>
+            </a:r>
+            <a:r>
+              <a:rPr/>
+              <a:t>:</a:t>
+            </a:r>
+          </a:p>
+          <a:p>
+            <a:pPr lvl="0"/>
+            <a:r>
+              <a:rPr/>
+              <a:t>Familiarization with R basics</a:t>
+            </a:r>
+          </a:p>
+          <a:p>
+            <a:pPr lvl="0"/>
+            <a:r>
+              <a:rPr/>
+              <a:t>Advanced R skills</a:t>
+            </a:r>
+          </a:p>
+          <a:p>
+            <a:pPr lvl="0"/>
+            <a:r>
+              <a:rPr/>
+              <a:t>Version control with Git</a:t>
+            </a:r>
+          </a:p>
+          <a:p>
+            <a:pPr lvl="0"/>
+            <a:r>
+              <a:rPr/>
+              <a:t>Collaborative working with GitHub</a:t>
+            </a:r>
+          </a:p>
+          <a:p>
+            <a:pPr lvl="0"/>
+            <a:r>
+              <a:rPr/>
+              <a:t>Introduction to Quarto</a:t>
+            </a:r>
+          </a:p>
+          <a:p>
+            <a:pPr lvl="0" indent="0" marL="0">
+              <a:buNone/>
+            </a:pPr>
+            <a:r>
+              <a:rPr b="1"/>
+              <a:t>Up next</a:t>
+            </a:r>
+            <a:r>
+              <a:rPr/>
+              <a:t>:</a:t>
+            </a:r>
+          </a:p>
+          <a:p>
+            <a:pPr lvl="0"/>
+            <a:r>
+              <a:rPr/>
+              <a:t>Citations and references: What are they and when/how to use them</a:t>
+            </a:r>
+          </a:p>
+          <a:p>
+            <a:pPr lvl="0"/>
+            <a:r>
+              <a:rPr/>
+              <a:t>Citation management tool: Using Zotero in our workflow</a:t>
             </a:r>
           </a:p>
         </p:txBody>
@@ -7628,446 +7665,6 @@
 </file>
 
 <file path=ppt/slides/slide12.xml><?xml version="1.0" encoding="utf-8"?>
-<p:sld xmlns:a="http://schemas.openxmlformats.org/drawingml/2006/main" xmlns:r="http://schemas.openxmlformats.org/officeDocument/2006/relationships" xmlns:p="http://schemas.openxmlformats.org/presentationml/2006/main">
-  <p:cSld>
-    <p:spTree>
-      <p:nvGrpSpPr>
-        <p:cNvPr id="1" name=""/>
-        <p:cNvGrpSpPr/>
-        <p:nvPr/>
-      </p:nvGrpSpPr>
-      <p:grpSpPr>
-        <a:xfrm>
-          <a:off x="0" y="0"/>
-          <a:ext cx="0" cy="0"/>
-          <a:chOff x="0" y="0"/>
-          <a:chExt cx="0" cy="0"/>
-        </a:xfrm>
-      </p:grpSpPr>
-      <p:sp>
-        <p:nvSpPr>
-          <p:cNvPr id="2" name="Title 1"/>
-          <p:cNvSpPr>
-            <a:spLocks noGrp="1"/>
-          </p:cNvSpPr>
-          <p:nvPr>
-            <p:ph type="title"/>
-          </p:nvPr>
-        </p:nvSpPr>
-        <p:spPr/>
-        <p:txBody>
-          <a:bodyPr/>
-          <a:lstStyle/>
-          <a:p>
-            <a:pPr lvl="0" indent="0" marL="0">
-              <a:buNone/>
-            </a:pPr>
-            <a:r>
-              <a:rPr/>
-              <a:t>Before we start: Survey time!</a:t>
-            </a:r>
-          </a:p>
-        </p:txBody>
-      </p:sp>
-    </p:spTree>
-  </p:cSld>
-</p:sld>
-</file>
-
-<file path=ppt/slides/slide13.xml><?xml version="1.0" encoding="utf-8"?>
-<p:sld xmlns:a="http://schemas.openxmlformats.org/drawingml/2006/main" xmlns:r="http://schemas.openxmlformats.org/officeDocument/2006/relationships" xmlns:p="http://schemas.openxmlformats.org/presentationml/2006/main">
-  <p:cSld>
-    <p:spTree>
-      <p:nvGrpSpPr>
-        <p:cNvPr id="1" name=""/>
-        <p:cNvGrpSpPr/>
-        <p:nvPr/>
-      </p:nvGrpSpPr>
-      <p:grpSpPr>
-        <a:xfrm>
-          <a:off x="0" y="0"/>
-          <a:ext cx="0" cy="0"/>
-          <a:chOff x="0" y="0"/>
-          <a:chExt cx="0" cy="0"/>
-        </a:xfrm>
-      </p:grpSpPr>
-      <p:sp>
-        <p:nvSpPr>
-          <p:cNvPr id="3" name="Content Placeholder 2"/>
-          <p:cNvSpPr>
-            <a:spLocks noGrp="1"/>
-          </p:cNvSpPr>
-          <p:nvPr>
-            <p:ph idx="1"/>
-          </p:nvPr>
-        </p:nvSpPr>
-        <p:spPr/>
-        <p:txBody>
-          <a:bodyPr/>
-          <a:lstStyle/>
-          <a:p>
-            <a:pPr lvl="0" indent="0" marL="0">
-              <a:buNone/>
-            </a:pPr>
-            <a:r>
-              <a:rPr b="1"/>
-              <a:t>What is your level of familiarity with citing and referencing scientific papers?</a:t>
-            </a:r>
-          </a:p>
-          <a:p>
-            <a:pPr lvl="0" indent="-342900" marL="342900">
-              <a:buAutoNum type="alphaLcPeriod"/>
-            </a:pPr>
-            <a:r>
-              <a:rPr/>
-              <a:t>I have never heard of it before.</a:t>
-            </a:r>
-          </a:p>
-          <a:p>
-            <a:pPr lvl="0" indent="-342900" marL="342900">
-              <a:buAutoNum type="alphaLcPeriod"/>
-            </a:pPr>
-            <a:r>
-              <a:rPr/>
-              <a:t>I have heard of it but have never worked with it.</a:t>
-            </a:r>
-          </a:p>
-          <a:p>
-            <a:pPr lvl="0" indent="-342900" marL="342900">
-              <a:buAutoNum type="alphaLcPeriod"/>
-            </a:pPr>
-            <a:r>
-              <a:rPr/>
-              <a:t>I have basic understanding and experience with it.</a:t>
-            </a:r>
-          </a:p>
-          <a:p>
-            <a:pPr lvl="0" indent="-342900" marL="342900">
-              <a:buAutoNum type="alphaLcPeriod"/>
-            </a:pPr>
-            <a:r>
-              <a:rPr/>
-              <a:t>I am very familiar and have worked with it extensively.</a:t>
-            </a:r>
-          </a:p>
-        </p:txBody>
-      </p:sp>
-    </p:spTree>
-  </p:cSld>
-</p:sld>
-</file>
-
-<file path=ppt/slides/slide14.xml><?xml version="1.0" encoding="utf-8"?>
-<p:sld xmlns:a="http://schemas.openxmlformats.org/drawingml/2006/main" xmlns:r="http://schemas.openxmlformats.org/officeDocument/2006/relationships" xmlns:p="http://schemas.openxmlformats.org/presentationml/2006/main">
-  <p:cSld>
-    <p:spTree>
-      <p:nvGrpSpPr>
-        <p:cNvPr id="1" name=""/>
-        <p:cNvGrpSpPr/>
-        <p:nvPr/>
-      </p:nvGrpSpPr>
-      <p:grpSpPr>
-        <a:xfrm>
-          <a:off x="0" y="0"/>
-          <a:ext cx="0" cy="0"/>
-          <a:chOff x="0" y="0"/>
-          <a:chExt cx="0" cy="0"/>
-        </a:xfrm>
-      </p:grpSpPr>
-      <p:sp>
-        <p:nvSpPr>
-          <p:cNvPr id="3" name="Content Placeholder 2"/>
-          <p:cNvSpPr>
-            <a:spLocks noGrp="1"/>
-          </p:cNvSpPr>
-          <p:nvPr>
-            <p:ph idx="1"/>
-          </p:nvPr>
-        </p:nvSpPr>
-        <p:spPr/>
-        <p:txBody>
-          <a:bodyPr/>
-          <a:lstStyle/>
-          <a:p>
-            <a:pPr lvl="0" indent="0" marL="0">
-              <a:buNone/>
-            </a:pPr>
-            <a:r>
-              <a:rPr b="1"/>
-              <a:t>How confident do you feel with the Zotero workflow of collection, organisation, and citing?</a:t>
-            </a:r>
-            <a:r>
-              <a:rPr/>
-              <a:t> </a:t>
-            </a:r>
-            <a:r>
-              <a:rPr i="1"/>
-              <a:t>(1 = Not confident at all, 5 = Very confident)</a:t>
-            </a:r>
-          </a:p>
-          <a:p>
-            <a:pPr lvl="0" indent="-342900" marL="342900">
-              <a:buAutoNum type="alphaLcPeriod"/>
-            </a:pPr>
-            <a:r>
-              <a:rPr/>
-              <a:t>1</a:t>
-            </a:r>
-          </a:p>
-          <a:p>
-            <a:pPr lvl="0" indent="-342900" marL="342900">
-              <a:buAutoNum type="alphaLcPeriod"/>
-            </a:pPr>
-            <a:r>
-              <a:rPr/>
-              <a:t>2</a:t>
-            </a:r>
-          </a:p>
-          <a:p>
-            <a:pPr lvl="0" indent="-342900" marL="342900">
-              <a:buAutoNum type="alphaLcPeriod"/>
-            </a:pPr>
-            <a:r>
-              <a:rPr/>
-              <a:t>3</a:t>
-            </a:r>
-          </a:p>
-          <a:p>
-            <a:pPr lvl="0" indent="-342900" marL="342900">
-              <a:buAutoNum type="alphaLcPeriod"/>
-            </a:pPr>
-            <a:r>
-              <a:rPr/>
-              <a:t>4</a:t>
-            </a:r>
-          </a:p>
-          <a:p>
-            <a:pPr lvl="0" indent="-342900" marL="342900">
-              <a:buAutoNum type="alphaLcPeriod"/>
-            </a:pPr>
-            <a:r>
-              <a:rPr/>
-              <a:t>5</a:t>
-            </a:r>
-          </a:p>
-        </p:txBody>
-      </p:sp>
-    </p:spTree>
-  </p:cSld>
-</p:sld>
-</file>
-
-<file path=ppt/slides/slide15.xml><?xml version="1.0" encoding="utf-8"?>
-<p:sld xmlns:a="http://schemas.openxmlformats.org/drawingml/2006/main" xmlns:r="http://schemas.openxmlformats.org/officeDocument/2006/relationships" xmlns:p="http://schemas.openxmlformats.org/presentationml/2006/main">
-  <p:cSld>
-    <p:spTree>
-      <p:nvGrpSpPr>
-        <p:cNvPr id="1" name=""/>
-        <p:cNvGrpSpPr/>
-        <p:nvPr/>
-      </p:nvGrpSpPr>
-      <p:grpSpPr>
-        <a:xfrm>
-          <a:off x="0" y="0"/>
-          <a:ext cx="0" cy="0"/>
-          <a:chOff x="0" y="0"/>
-          <a:chExt cx="0" cy="0"/>
-        </a:xfrm>
-      </p:grpSpPr>
-      <p:sp>
-        <p:nvSpPr>
-          <p:cNvPr id="2" name="Title 1"/>
-          <p:cNvSpPr>
-            <a:spLocks noGrp="1"/>
-          </p:cNvSpPr>
-          <p:nvPr>
-            <p:ph type="title"/>
-          </p:nvPr>
-        </p:nvSpPr>
-        <p:spPr/>
-        <p:txBody>
-          <a:bodyPr/>
-          <a:lstStyle/>
-          <a:p>
-            <a:pPr lvl="0" indent="0" marL="0">
-              <a:buNone/>
-            </a:pPr>
-            <a:r>
-              <a:rPr/>
-              <a:t>Discussion of survey results</a:t>
-            </a:r>
-          </a:p>
-        </p:txBody>
-      </p:sp>
-      <p:sp>
-        <p:nvSpPr>
-          <p:cNvPr id="3" name="Content Placeholder 2"/>
-          <p:cNvSpPr>
-            <a:spLocks noGrp="1"/>
-          </p:cNvSpPr>
-          <p:nvPr>
-            <p:ph idx="1"/>
-          </p:nvPr>
-        </p:nvSpPr>
-        <p:spPr/>
-        <p:txBody>
-          <a:bodyPr/>
-          <a:lstStyle/>
-          <a:p>
-            <a:pPr lvl="0" indent="0" marL="0">
-              <a:buNone/>
-            </a:pPr>
-            <a:r>
-              <a:rPr b="1"/>
-              <a:t>What do we see in the results?</a:t>
-            </a:r>
-          </a:p>
-        </p:txBody>
-      </p:sp>
-    </p:spTree>
-  </p:cSld>
-</p:sld>
-</file>
-
-<file path=ppt/slides/slide16.xml><?xml version="1.0" encoding="utf-8"?>
-<p:sld xmlns:a="http://schemas.openxmlformats.org/drawingml/2006/main" xmlns:r="http://schemas.openxmlformats.org/officeDocument/2006/relationships" xmlns:p="http://schemas.openxmlformats.org/presentationml/2006/main">
-  <p:cSld>
-    <p:spTree>
-      <p:nvGrpSpPr>
-        <p:cNvPr id="1" name=""/>
-        <p:cNvGrpSpPr/>
-        <p:nvPr/>
-      </p:nvGrpSpPr>
-      <p:grpSpPr>
-        <a:xfrm>
-          <a:off x="0" y="0"/>
-          <a:ext cx="0" cy="0"/>
-          <a:chOff x="0" y="0"/>
-          <a:chExt cx="0" cy="0"/>
-        </a:xfrm>
-      </p:grpSpPr>
-      <p:sp>
-        <p:nvSpPr>
-          <p:cNvPr id="2" name="Title 1"/>
-          <p:cNvSpPr>
-            <a:spLocks noGrp="1"/>
-          </p:cNvSpPr>
-          <p:nvPr>
-            <p:ph type="title"/>
-          </p:nvPr>
-        </p:nvSpPr>
-        <p:spPr/>
-        <p:txBody>
-          <a:bodyPr/>
-          <a:lstStyle/>
-          <a:p>
-            <a:pPr lvl="0" indent="0" marL="0">
-              <a:buNone/>
-            </a:pPr>
-            <a:r>
-              <a:rPr/>
-              <a:t>Where are we at?</a:t>
-            </a:r>
-          </a:p>
-        </p:txBody>
-      </p:sp>
-      <p:sp>
-        <p:nvSpPr>
-          <p:cNvPr id="3" name="Content Placeholder 2"/>
-          <p:cNvSpPr>
-            <a:spLocks noGrp="1"/>
-          </p:cNvSpPr>
-          <p:nvPr>
-            <p:ph idx="1"/>
-          </p:nvPr>
-        </p:nvSpPr>
-        <p:spPr/>
-        <p:txBody>
-          <a:bodyPr/>
-          <a:lstStyle/>
-          <a:p>
-            <a:pPr lvl="0" indent="0" marL="0">
-              <a:buNone/>
-            </a:pPr>
-            <a:r>
-              <a:rPr b="1"/>
-              <a:t>Previously</a:t>
-            </a:r>
-            <a:r>
-              <a:rPr/>
-              <a:t>:</a:t>
-            </a:r>
-          </a:p>
-          <a:p>
-            <a:pPr lvl="0"/>
-            <a:r>
-              <a:rPr/>
-              <a:t>Familiarization with R basics</a:t>
-            </a:r>
-          </a:p>
-          <a:p>
-            <a:pPr lvl="0"/>
-            <a:r>
-              <a:rPr/>
-              <a:t>Advanced R skills</a:t>
-            </a:r>
-          </a:p>
-          <a:p>
-            <a:pPr lvl="0"/>
-            <a:r>
-              <a:rPr/>
-              <a:t>Version control with Git</a:t>
-            </a:r>
-          </a:p>
-          <a:p>
-            <a:pPr lvl="0"/>
-            <a:r>
-              <a:rPr/>
-              <a:t>Collaborative working with GitHub</a:t>
-            </a:r>
-          </a:p>
-          <a:p>
-            <a:pPr lvl="0"/>
-            <a:r>
-              <a:rPr/>
-              <a:t>Introduction to Quarto</a:t>
-            </a:r>
-          </a:p>
-          <a:p>
-            <a:pPr lvl="0" indent="0" marL="0">
-              <a:buNone/>
-            </a:pPr>
-            <a:r>
-              <a:rPr b="1"/>
-              <a:t>Up next</a:t>
-            </a:r>
-            <a:r>
-              <a:rPr/>
-              <a:t>:</a:t>
-            </a:r>
-          </a:p>
-          <a:p>
-            <a:pPr lvl="0"/>
-            <a:r>
-              <a:rPr/>
-              <a:t>Citations and references: What are they and when/how to use them</a:t>
-            </a:r>
-          </a:p>
-          <a:p>
-            <a:pPr lvl="0"/>
-            <a:r>
-              <a:rPr/>
-              <a:t>Citation management tool: Using Zotero in our workflow</a:t>
-            </a:r>
-          </a:p>
-        </p:txBody>
-      </p:sp>
-    </p:spTree>
-  </p:cSld>
-</p:sld>
-</file>
-
-<file path=ppt/slides/slide17.xml><?xml version="1.0" encoding="utf-8"?>
 <p:sld xmlns:a="http://schemas.openxmlformats.org/drawingml/2006/main" xmlns:r="http://schemas.openxmlformats.org/officeDocument/2006/relationships" xmlns:p="http://schemas.openxmlformats.org/presentationml/2006/main">
   <p:cSld>
     <p:spTree>
@@ -8463,7 +8060,7 @@
 </p:sld>
 </file>
 
-<file path=ppt/slides/slide18.xml><?xml version="1.0" encoding="utf-8"?>
+<file path=ppt/slides/slide13.xml><?xml version="1.0" encoding="utf-8"?>
 <p:sld xmlns:a="http://schemas.openxmlformats.org/drawingml/2006/main" xmlns:r="http://schemas.openxmlformats.org/officeDocument/2006/relationships" xmlns:p="http://schemas.openxmlformats.org/presentationml/2006/main">
   <p:cSld>
     <p:spTree>
@@ -8656,7 +8253,7 @@
 </p:sld>
 </file>
 
-<file path=ppt/slides/slide19.xml><?xml version="1.0" encoding="utf-8"?>
+<file path=ppt/slides/slide14.xml><?xml version="1.0" encoding="utf-8"?>
 <p:sld xmlns:a="http://schemas.openxmlformats.org/drawingml/2006/main" xmlns:r="http://schemas.openxmlformats.org/officeDocument/2006/relationships" xmlns:p="http://schemas.openxmlformats.org/presentationml/2006/main">
   <p:cSld>
     <p:spTree>
@@ -8773,103 +8370,7 @@
 </p:sld>
 </file>
 
-<file path=ppt/slides/slide2.xml><?xml version="1.0" encoding="utf-8"?>
-<p:sld xmlns:a="http://schemas.openxmlformats.org/drawingml/2006/main" xmlns:r="http://schemas.openxmlformats.org/officeDocument/2006/relationships" xmlns:p="http://schemas.openxmlformats.org/presentationml/2006/main">
-  <p:cSld>
-    <p:spTree>
-      <p:nvGrpSpPr>
-        <p:cNvPr id="1" name=""/>
-        <p:cNvGrpSpPr/>
-        <p:nvPr/>
-      </p:nvGrpSpPr>
-      <p:grpSpPr>
-        <a:xfrm>
-          <a:off x="0" y="0"/>
-          <a:ext cx="0" cy="0"/>
-          <a:chOff x="0" y="0"/>
-          <a:chExt cx="0" cy="0"/>
-        </a:xfrm>
-      </p:grpSpPr>
-      <p:sp>
-        <p:nvSpPr>
-          <p:cNvPr id="2" name="Title 1"/>
-          <p:cNvSpPr>
-            <a:spLocks noGrp="1"/>
-          </p:cNvSpPr>
-          <p:nvPr>
-            <p:ph type="title"/>
-          </p:nvPr>
-        </p:nvSpPr>
-        <p:spPr/>
-        <p:txBody>
-          <a:bodyPr/>
-          <a:lstStyle/>
-          <a:p>
-            <a:pPr lvl="0" indent="0" marL="0">
-              <a:buNone/>
-            </a:pPr>
-            <a:r>
-              <a:rPr/>
-              <a:t>Testing Slide</a:t>
-            </a:r>
-          </a:p>
-        </p:txBody>
-      </p:sp>
-      <p:sp>
-        <p:nvSpPr>
-          <p:cNvPr id="3" name="Content Placeholder 2"/>
-          <p:cNvSpPr>
-            <a:spLocks noGrp="1"/>
-          </p:cNvSpPr>
-          <p:nvPr>
-            <p:ph idx="1"/>
-          </p:nvPr>
-        </p:nvSpPr>
-        <p:spPr/>
-        <p:txBody>
-          <a:bodyPr/>
-          <a:lstStyle/>
-          <a:p>
-            <a:pPr lvl="0" indent="0" marL="1270000">
-              <a:buNone/>
-            </a:pPr>
-            <a:r>
-              <a:rPr sz="2000" b="1"/>
-              <a:t>Tip</a:t>
-            </a:r>
-          </a:p>
-          <a:p>
-            <a:pPr lvl="0" indent="0" marL="1270000">
-              <a:buNone/>
-            </a:pPr>
-            <a:r>
-              <a:rPr sz="2000"/>
-              <a:t>This is a callout box test</a:t>
-            </a:r>
-          </a:p>
-          <a:p>
-            <a:pPr lvl="0" indent="0" marL="0">
-              <a:buNone/>
-            </a:pPr>
-            <a:r>
-              <a:rPr/>
-              <a:t>Test citation </a:t>
-            </a:r>
-            <a:r>
-              <a:rPr>
-                <a:hlinkClick r:id="rId2" action="ppaction://hlinksldjump"/>
-              </a:rPr>
-              <a:t>Jackson (1990)</a:t>
-            </a:r>
-          </a:p>
-        </p:txBody>
-      </p:sp>
-    </p:spTree>
-  </p:cSld>
-</p:sld>
-</file>
-
-<file path=ppt/slides/slide20.xml><?xml version="1.0" encoding="utf-8"?>
+<file path=ppt/slides/slide15.xml><?xml version="1.0" encoding="utf-8"?>
 <p:sld xmlns:a="http://schemas.openxmlformats.org/drawingml/2006/main" xmlns:r="http://schemas.openxmlformats.org/officeDocument/2006/relationships" xmlns:p="http://schemas.openxmlformats.org/presentationml/2006/main">
   <p:cSld>
     <p:spTree>
@@ -8998,7 +8499,7 @@
 </p:sld>
 </file>
 
-<file path=ppt/slides/slide21.xml><?xml version="1.0" encoding="utf-8"?>
+<file path=ppt/slides/slide16.xml><?xml version="1.0" encoding="utf-8"?>
 <p:sld xmlns:a="http://schemas.openxmlformats.org/drawingml/2006/main" xmlns:r="http://schemas.openxmlformats.org/officeDocument/2006/relationships" xmlns:p="http://schemas.openxmlformats.org/presentationml/2006/main">
   <p:cSld>
     <p:spTree>
@@ -9351,7 +8852,7 @@
 </p:sld>
 </file>
 
-<file path=ppt/slides/slide22.xml><?xml version="1.0" encoding="utf-8"?>
+<file path=ppt/slides/slide17.xml><?xml version="1.0" encoding="utf-8"?>
 <p:sld xmlns:a="http://schemas.openxmlformats.org/drawingml/2006/main" xmlns:r="http://schemas.openxmlformats.org/officeDocument/2006/relationships" xmlns:p="http://schemas.openxmlformats.org/presentationml/2006/main">
   <p:cSld>
     <p:spTree>
@@ -9827,7 +9328,7 @@
 </p:sld>
 </file>
 
-<file path=ppt/slides/slide23.xml><?xml version="1.0" encoding="utf-8"?>
+<file path=ppt/slides/slide18.xml><?xml version="1.0" encoding="utf-8"?>
 <p:sld xmlns:a="http://schemas.openxmlformats.org/drawingml/2006/main" xmlns:r="http://schemas.openxmlformats.org/officeDocument/2006/relationships" xmlns:p="http://schemas.openxmlformats.org/presentationml/2006/main">
   <p:cSld>
     <p:spTree>
@@ -9997,7 +9498,7 @@
 </p:sld>
 </file>
 
-<file path=ppt/slides/slide24.xml><?xml version="1.0" encoding="utf-8"?>
+<file path=ppt/slides/slide19.xml><?xml version="1.0" encoding="utf-8"?>
 <p:sld xmlns:a="http://schemas.openxmlformats.org/drawingml/2006/main" xmlns:r="http://schemas.openxmlformats.org/officeDocument/2006/relationships" xmlns:p="http://schemas.openxmlformats.org/presentationml/2006/main">
   <p:cSld>
     <p:spTree>
@@ -10344,7 +9845,139 @@
 </p:sld>
 </file>
 
-<file path=ppt/slides/slide25.xml><?xml version="1.0" encoding="utf-8"?>
+<file path=ppt/slides/slide2.xml><?xml version="1.0" encoding="utf-8"?>
+<p:sld xmlns:a="http://schemas.openxmlformats.org/drawingml/2006/main" xmlns:r="http://schemas.openxmlformats.org/officeDocument/2006/relationships" xmlns:p="http://schemas.openxmlformats.org/presentationml/2006/main">
+  <p:cSld>
+    <p:spTree>
+      <p:nvGrpSpPr>
+        <p:cNvPr id="1" name=""/>
+        <p:cNvGrpSpPr/>
+        <p:nvPr/>
+      </p:nvGrpSpPr>
+      <p:grpSpPr>
+        <a:xfrm>
+          <a:off x="0" y="0"/>
+          <a:ext cx="0" cy="0"/>
+          <a:chOff x="0" y="0"/>
+          <a:chExt cx="0" cy="0"/>
+        </a:xfrm>
+      </p:grpSpPr>
+      <p:sp>
+        <p:nvSpPr>
+          <p:cNvPr id="2" name="Title 1"/>
+          <p:cNvSpPr>
+            <a:spLocks noGrp="1"/>
+          </p:cNvSpPr>
+          <p:nvPr>
+            <p:ph type="title"/>
+          </p:nvPr>
+        </p:nvSpPr>
+        <p:spPr/>
+        <p:txBody>
+          <a:bodyPr/>
+          <a:lstStyle/>
+          <a:p>
+            <a:pPr lvl="0" indent="0" marL="0">
+              <a:buNone/>
+            </a:pPr>
+            <a:r>
+              <a:rPr/>
+              <a:t>Licence</a:t>
+            </a:r>
+          </a:p>
+        </p:txBody>
+      </p:sp>
+      <p:sp>
+        <p:nvSpPr>
+          <p:cNvPr id="3" name="Content Placeholder 2"/>
+          <p:cNvSpPr>
+            <a:spLocks noGrp="1"/>
+          </p:cNvSpPr>
+          <p:nvPr>
+            <p:ph idx="1"/>
+          </p:nvPr>
+        </p:nvSpPr>
+        <p:spPr/>
+        <p:txBody>
+          <a:bodyPr/>
+          <a:lstStyle/>
+          <a:p>
+            <a:pPr lvl="0" indent="0" marL="0">
+              <a:buNone/>
+            </a:pPr>
+            <a:r>
+              <a:rPr/>
+              <a:t>This work was originally created by Pat Callahan and Dejana Damjanovic under a CC-BY-SA 4.0 </a:t>
+            </a:r>
+            <a:r>
+              <a:rPr>
+                <a:hlinkClick r:id="rId3"/>
+              </a:rPr>
+              <a:t>Creative Commons Attribution 4.0 International License</a:t>
+            </a:r>
+            <a:r>
+              <a:rPr/>
+              <a:t> and a CC0 1.0 </a:t>
+            </a:r>
+            <a:r>
+              <a:rPr>
+                <a:hlinkClick r:id="rId4"/>
+              </a:rPr>
+              <a:t>Creative Commons Universal</a:t>
+            </a:r>
+            <a:r>
+              <a:rPr/>
+              <a:t> licence for code snippets. It was subsequently adapted and revised by </a:t>
+            </a:r>
+            <a:r>
+              <a:rPr>
+                <a:hlinkClick r:id="rId5"/>
+              </a:rPr>
+              <a:t>Sarah von Grebmer zu Wolfsthurn</a:t>
+            </a:r>
+            <a:r>
+              <a:rPr/>
+              <a:t>. This current work by </a:t>
+            </a:r>
+            <a:r>
+              <a:rPr>
+                <a:hlinkClick r:id="rId6"/>
+              </a:rPr>
+              <a:t>Tejaswini Sharma</a:t>
+            </a:r>
+            <a:r>
+              <a:rPr/>
+              <a:t> and Sarah von Grebmer zu Wolfsthurn is licensed under a CC-BY-SA 4.0 </a:t>
+            </a:r>
+            <a:r>
+              <a:rPr>
+                <a:hlinkClick r:id="rId7"/>
+              </a:rPr>
+              <a:t>Creative Commons Attribution 4.0 International SA License</a:t>
+            </a:r>
+            <a:r>
+              <a:rPr/>
+              <a:t>. permits unrestricted re-use, distribution, and reproduction in any medium, provided the original work is properly cited. If you remix, transform, or build upon the material, you must distribute your contributions under the same license as the original. Code snippets are dedicated to the public domain and licenced under a CC0 1.0 </a:t>
+            </a:r>
+            <a:r>
+              <a:rPr>
+                <a:hlinkClick r:id="rId8"/>
+              </a:rPr>
+              <a:t>Creative Commons Universal Licence</a:t>
+            </a:r>
+            <a:r>
+              <a:rPr/>
+              <a:t>. You may use, modify, distribute, and sell the code snippets for any purpose, without permission or attribution. The code snippets are provided “as is”, without warranty of any kind.</a:t>
+            </a:r>
+          </a:p>
+        </p:txBody>
+      </p:sp>
+    </p:spTree>
+  </p:cSld>
+</p:sld>
+</file>
+
+<file path=ppt/slides/slide20.xml><?xml version="1.0" encoding="utf-8"?>
 <p:sld xmlns:a="http://schemas.openxmlformats.org/drawingml/2006/main" xmlns:r="http://schemas.openxmlformats.org/officeDocument/2006/relationships" xmlns:p="http://schemas.openxmlformats.org/presentationml/2006/main">
   <p:cSld>
     <p:spTree>
@@ -10619,7 +10252,7 @@
 </p:sld>
 </file>
 
-<file path=ppt/slides/slide26.xml><?xml version="1.0" encoding="utf-8"?>
+<file path=ppt/slides/slide21.xml><?xml version="1.0" encoding="utf-8"?>
 <p:sld xmlns:a="http://schemas.openxmlformats.org/drawingml/2006/main" xmlns:r="http://schemas.openxmlformats.org/officeDocument/2006/relationships" xmlns:p="http://schemas.openxmlformats.org/presentationml/2006/main">
   <p:cSld>
     <p:spTree>
@@ -10699,7 +10332,7 @@
 </p:sld>
 </file>
 
-<file path=ppt/slides/slide27.xml><?xml version="1.0" encoding="utf-8"?>
+<file path=ppt/slides/slide22.xml><?xml version="1.0" encoding="utf-8"?>
 <p:sld xmlns:a="http://schemas.openxmlformats.org/drawingml/2006/main" xmlns:r="http://schemas.openxmlformats.org/officeDocument/2006/relationships" xmlns:p="http://schemas.openxmlformats.org/presentationml/2006/main">
   <p:cSld>
     <p:spTree>
@@ -10830,7 +10463,7 @@
 </p:sld>
 </file>
 
-<file path=ppt/slides/slide28.xml><?xml version="1.0" encoding="utf-8"?>
+<file path=ppt/slides/slide23.xml><?xml version="1.0" encoding="utf-8"?>
 <p:sld xmlns:a="http://schemas.openxmlformats.org/drawingml/2006/main" xmlns:r="http://schemas.openxmlformats.org/officeDocument/2006/relationships" xmlns:p="http://schemas.openxmlformats.org/presentationml/2006/main">
   <p:cSld>
     <p:spTree>
@@ -11312,7 +10945,7 @@
 </p:sld>
 </file>
 
-<file path=ppt/slides/slide29.xml><?xml version="1.0" encoding="utf-8"?>
+<file path=ppt/slides/slide24.xml><?xml version="1.0" encoding="utf-8"?>
 <p:sld xmlns:a="http://schemas.openxmlformats.org/drawingml/2006/main" xmlns:r="http://schemas.openxmlformats.org/officeDocument/2006/relationships" xmlns:p="http://schemas.openxmlformats.org/presentationml/2006/main">
   <p:cSld>
     <p:spTree>
@@ -11359,7 +10992,7 @@
 </p:sld>
 </file>
 
-<file path=ppt/slides/slide3.xml><?xml version="1.0" encoding="utf-8"?>
+<file path=ppt/slides/slide25.xml><?xml version="1.0" encoding="utf-8"?>
 <p:sld xmlns:a="http://schemas.openxmlformats.org/drawingml/2006/main" xmlns:r="http://schemas.openxmlformats.org/officeDocument/2006/relationships" xmlns:p="http://schemas.openxmlformats.org/presentationml/2006/main">
   <p:cSld>
     <p:spTree>
@@ -11401,7 +11034,7 @@
             </a:pPr>
             <a:r>
               <a:rPr/>
-              <a:t>Section Header?</a:t>
+              <a:t>Brief overview of Zotero</a:t>
             </a:r>
           </a:p>
         </p:txBody>
@@ -11411,59 +11044,7 @@
 </p:sld>
 </file>
 
-<file path=ppt/slides/slide30.xml><?xml version="1.0" encoding="utf-8"?>
-<p:sld xmlns:a="http://schemas.openxmlformats.org/drawingml/2006/main" xmlns:r="http://schemas.openxmlformats.org/officeDocument/2006/relationships" xmlns:p="http://schemas.openxmlformats.org/presentationml/2006/main">
-  <p:cSld>
-    <p:spTree>
-      <p:nvGrpSpPr>
-        <p:cNvPr id="1" name=""/>
-        <p:cNvGrpSpPr/>
-        <p:nvPr/>
-      </p:nvGrpSpPr>
-      <p:grpSpPr>
-        <a:xfrm>
-          <a:off x="0" y="0"/>
-          <a:ext cx="0" cy="0"/>
-          <a:chOff x="0" y="0"/>
-          <a:chExt cx="0" cy="0"/>
-        </a:xfrm>
-      </p:grpSpPr>
-      <p:sp>
-        <p:nvSpPr>
-          <p:cNvPr id="2" name="Title 1"/>
-          <p:cNvSpPr>
-            <a:spLocks noGrp="1"/>
-          </p:cNvSpPr>
-          <p:nvPr>
-            <p:ph type="title"/>
-          </p:nvPr>
-        </p:nvSpPr>
-        <p:spPr>
-          <a:xfrm>
-            <a:off x="722313" y="3305176"/>
-            <a:ext cx="7772400" cy="1021556"/>
-          </a:xfrm>
-        </p:spPr>
-        <p:txBody>
-          <a:bodyPr/>
-          <a:lstStyle/>
-          <a:p>
-            <a:pPr lvl="0" indent="0" marL="0">
-              <a:buNone/>
-            </a:pPr>
-            <a:r>
-              <a:rPr/>
-              <a:t>Brief overview of Zotero</a:t>
-            </a:r>
-          </a:p>
-        </p:txBody>
-      </p:sp>
-    </p:spTree>
-  </p:cSld>
-</p:sld>
-</file>
-
-<file path=ppt/slides/slide31.xml><?xml version="1.0" encoding="utf-8"?>
+<file path=ppt/slides/slide26.xml><?xml version="1.0" encoding="utf-8"?>
 <p:sld xmlns:a="http://schemas.openxmlformats.org/drawingml/2006/main" xmlns:r="http://schemas.openxmlformats.org/officeDocument/2006/relationships" xmlns:p="http://schemas.openxmlformats.org/presentationml/2006/main">
   <p:cSld>
     <p:spTree>
@@ -11739,7 +11320,7 @@
 </p:sld>
 </file>
 
-<file path=ppt/slides/slide32.xml><?xml version="1.0" encoding="utf-8"?>
+<file path=ppt/slides/slide27.xml><?xml version="1.0" encoding="utf-8"?>
 <p:sld xmlns:a="http://schemas.openxmlformats.org/drawingml/2006/main" xmlns:r="http://schemas.openxmlformats.org/officeDocument/2006/relationships" xmlns:p="http://schemas.openxmlformats.org/presentationml/2006/main">
   <p:cSld>
     <p:spTree>
@@ -11816,7 +11397,7 @@
 </p:sld>
 </file>
 
-<file path=ppt/slides/slide33.xml><?xml version="1.0" encoding="utf-8"?>
+<file path=ppt/slides/slide28.xml><?xml version="1.0" encoding="utf-8"?>
 <p:sld xmlns:a="http://schemas.openxmlformats.org/drawingml/2006/main" xmlns:r="http://schemas.openxmlformats.org/officeDocument/2006/relationships" xmlns:p="http://schemas.openxmlformats.org/presentationml/2006/main">
   <p:cSld>
     <p:spTree>
@@ -11964,7 +11545,7 @@
 </p:sld>
 </file>
 
-<file path=ppt/slides/slide34.xml><?xml version="1.0" encoding="utf-8"?>
+<file path=ppt/slides/slide29.xml><?xml version="1.0" encoding="utf-8"?>
 <p:sld xmlns:a="http://schemas.openxmlformats.org/drawingml/2006/main" xmlns:r="http://schemas.openxmlformats.org/officeDocument/2006/relationships" xmlns:p="http://schemas.openxmlformats.org/presentationml/2006/main">
   <p:cSld>
     <p:spTree>
@@ -12070,7 +11651,7 @@
 </p:sld>
 </file>
 
-<file path=ppt/slides/slide35.xml><?xml version="1.0" encoding="utf-8"?>
+<file path=ppt/slides/slide3.xml><?xml version="1.0" encoding="utf-8"?>
 <p:sld xmlns:a="http://schemas.openxmlformats.org/drawingml/2006/main" xmlns:r="http://schemas.openxmlformats.org/officeDocument/2006/relationships" xmlns:p="http://schemas.openxmlformats.org/presentationml/2006/main">
   <p:cSld>
     <p:spTree>
@@ -12089,31 +11670,6 @@
       </p:grpSpPr>
       <p:sp>
         <p:nvSpPr>
-          <p:cNvPr id="2" name="Title 1"/>
-          <p:cNvSpPr>
-            <a:spLocks noGrp="1"/>
-          </p:cNvSpPr>
-          <p:nvPr>
-            <p:ph type="title"/>
-          </p:nvPr>
-        </p:nvSpPr>
-        <p:spPr/>
-        <p:txBody>
-          <a:bodyPr/>
-          <a:lstStyle/>
-          <a:p>
-            <a:pPr lvl="0" indent="0" marL="0">
-              <a:buNone/>
-            </a:pPr>
-            <a:r>
-              <a:rPr/>
-              <a:t>Looking into the future</a:t>
-            </a:r>
-          </a:p>
-        </p:txBody>
-      </p:sp>
-      <p:sp>
-        <p:nvSpPr>
           <p:cNvPr id="3" name="Content Placeholder 2"/>
           <p:cNvSpPr>
             <a:spLocks noGrp="1"/>
@@ -12127,66 +11683,61 @@
           <a:bodyPr/>
           <a:lstStyle/>
           <a:p>
-            <a:pPr lvl="0" indent="-342900" marL="342900">
-              <a:buAutoNum type="arabicPeriod"/>
-            </a:pPr>
-            <a:r>
-              <a:rPr b="1"/>
-              <a:t>Take a minute to think about the following questions, first for yourself, then in a pair:</a:t>
-            </a:r>
-          </a:p>
-          <a:p>
-            <a:pPr lvl="0"/>
-            <a:r>
-              <a:rPr/>
-              <a:t>Can you identify some </a:t>
-            </a:r>
-            <a:r>
-              <a:rPr b="1"/>
-              <a:t>practical benefits</a:t>
-            </a:r>
-            <a:r>
-              <a:rPr/>
-              <a:t> of using Zotero?</a:t>
-            </a:r>
-          </a:p>
-          <a:p>
-            <a:pPr lvl="0"/>
-            <a:r>
-              <a:rPr/>
-              <a:t>What </a:t>
-            </a:r>
-            <a:r>
-              <a:rPr b="1"/>
-              <a:t>obstacles</a:t>
-            </a:r>
-            <a:r>
-              <a:rPr/>
-              <a:t> do you anticipate in using it consistently?</a:t>
-            </a:r>
-          </a:p>
-          <a:p>
-            <a:pPr lvl="0"/>
-            <a:r>
-              <a:rPr/>
-              <a:t>How can Zotero support you in your </a:t>
-            </a:r>
-            <a:r>
-              <a:rPr b="1"/>
-              <a:t>upcoming projects</a:t>
-            </a:r>
-            <a:r>
-              <a:rPr/>
-              <a:t>?</a:t>
-            </a:r>
-          </a:p>
-          <a:p>
-            <a:pPr lvl="0" indent="-342900" marL="342900">
-              <a:buAutoNum startAt="2" type="arabicPeriod"/>
-            </a:pPr>
-            <a:r>
-              <a:rPr b="1"/>
-              <a:t>Share your thoughts with the group.</a:t>
+            <a:pPr lvl="0" indent="0" marL="0">
+              <a:spcBef>
+                <a:spcPts val="3000"/>
+              </a:spcBef>
+              <a:buNone/>
+            </a:pPr>
+            <a:r>
+              <a:rPr b="1"/>
+              <a:t>Contribution statement</a:t>
+            </a:r>
+          </a:p>
+          <a:p>
+            <a:pPr lvl="0" indent="0" marL="0">
+              <a:buNone/>
+            </a:pPr>
+            <a:r>
+              <a:rPr b="1"/>
+              <a:t>Creator</a:t>
+            </a:r>
+            <a:r>
+              <a:rPr/>
+              <a:t>: Sharma, Tejaswini (</a:t>
+            </a:r>
+            <a:r>
+              <a:rPr>
+                <a:hlinkClick r:id="rId2"/>
+              </a:rPr>
+              <a:t>Orcid-ID: 00009-0000-0305-9751</a:t>
+            </a:r>
+            <a:r>
+              <a:rPr/>
+              <a:t>)</a:t>
+            </a:r>
+          </a:p>
+          <a:p>
+            <a:pPr lvl="0" indent="0" marL="0">
+              <a:buNone/>
+            </a:pPr>
+            <a:r>
+              <a:rPr b="1"/>
+              <a:t>Reviewer</a:t>
+            </a:r>
+            <a:r>
+              <a:rPr/>
+              <a:t>: Von Grebmer zu Wolfsthurn, Sarah (</a:t>
+            </a:r>
+            <a:r>
+              <a:rPr>
+                <a:hlinkClick r:id="rId3"/>
+              </a:rPr>
+              <a:t>Ordcid-ID: 0000-0002-6413-3895</a:t>
+            </a:r>
+            <a:r>
+              <a:rPr/>
+              <a:t>)</a:t>
             </a:r>
           </a:p>
         </p:txBody>
@@ -12196,7 +11747,133 @@
 </p:sld>
 </file>
 
-<file path=ppt/slides/slide36.xml><?xml version="1.0" encoding="utf-8"?>
+<file path=ppt/slides/slide30.xml><?xml version="1.0" encoding="utf-8"?>
+<p:sld xmlns:a="http://schemas.openxmlformats.org/drawingml/2006/main" xmlns:r="http://schemas.openxmlformats.org/officeDocument/2006/relationships" xmlns:p="http://schemas.openxmlformats.org/presentationml/2006/main">
+  <p:cSld>
+    <p:spTree>
+      <p:nvGrpSpPr>
+        <p:cNvPr id="1" name=""/>
+        <p:cNvGrpSpPr/>
+        <p:nvPr/>
+      </p:nvGrpSpPr>
+      <p:grpSpPr>
+        <a:xfrm>
+          <a:off x="0" y="0"/>
+          <a:ext cx="0" cy="0"/>
+          <a:chOff x="0" y="0"/>
+          <a:chExt cx="0" cy="0"/>
+        </a:xfrm>
+      </p:grpSpPr>
+      <p:sp>
+        <p:nvSpPr>
+          <p:cNvPr id="2" name="Title 1"/>
+          <p:cNvSpPr>
+            <a:spLocks noGrp="1"/>
+          </p:cNvSpPr>
+          <p:nvPr>
+            <p:ph type="title"/>
+          </p:nvPr>
+        </p:nvSpPr>
+        <p:spPr/>
+        <p:txBody>
+          <a:bodyPr/>
+          <a:lstStyle/>
+          <a:p>
+            <a:pPr lvl="0" indent="0" marL="0">
+              <a:buNone/>
+            </a:pPr>
+            <a:r>
+              <a:rPr/>
+              <a:t>Looking into the future</a:t>
+            </a:r>
+          </a:p>
+        </p:txBody>
+      </p:sp>
+      <p:sp>
+        <p:nvSpPr>
+          <p:cNvPr id="3" name="Content Placeholder 2"/>
+          <p:cNvSpPr>
+            <a:spLocks noGrp="1"/>
+          </p:cNvSpPr>
+          <p:nvPr>
+            <p:ph idx="1"/>
+          </p:nvPr>
+        </p:nvSpPr>
+        <p:spPr/>
+        <p:txBody>
+          <a:bodyPr/>
+          <a:lstStyle/>
+          <a:p>
+            <a:pPr lvl="0" indent="-342900" marL="342900">
+              <a:buAutoNum type="arabicPeriod"/>
+            </a:pPr>
+            <a:r>
+              <a:rPr b="1"/>
+              <a:t>Take a minute to think about the following questions, first for yourself, then in a pair:</a:t>
+            </a:r>
+          </a:p>
+          <a:p>
+            <a:pPr lvl="0"/>
+            <a:r>
+              <a:rPr/>
+              <a:t>Can you identify some </a:t>
+            </a:r>
+            <a:r>
+              <a:rPr b="1"/>
+              <a:t>practical benefits</a:t>
+            </a:r>
+            <a:r>
+              <a:rPr/>
+              <a:t> of using Zotero?</a:t>
+            </a:r>
+          </a:p>
+          <a:p>
+            <a:pPr lvl="0"/>
+            <a:r>
+              <a:rPr/>
+              <a:t>What </a:t>
+            </a:r>
+            <a:r>
+              <a:rPr b="1"/>
+              <a:t>obstacles</a:t>
+            </a:r>
+            <a:r>
+              <a:rPr/>
+              <a:t> do you anticipate in using it consistently?</a:t>
+            </a:r>
+          </a:p>
+          <a:p>
+            <a:pPr lvl="0"/>
+            <a:r>
+              <a:rPr/>
+              <a:t>How can Zotero support you in your </a:t>
+            </a:r>
+            <a:r>
+              <a:rPr b="1"/>
+              <a:t>upcoming projects</a:t>
+            </a:r>
+            <a:r>
+              <a:rPr/>
+              <a:t>?</a:t>
+            </a:r>
+          </a:p>
+          <a:p>
+            <a:pPr lvl="0" indent="-342900" marL="342900">
+              <a:buAutoNum startAt="2" type="arabicPeriod"/>
+            </a:pPr>
+            <a:r>
+              <a:rPr b="1"/>
+              <a:t>Share your thoughts with the group.</a:t>
+            </a:r>
+          </a:p>
+        </p:txBody>
+      </p:sp>
+    </p:spTree>
+  </p:cSld>
+</p:sld>
+</file>
+
+<file path=ppt/slides/slide31.xml><?xml version="1.0" encoding="utf-8"?>
 <p:sld xmlns:a="http://schemas.openxmlformats.org/drawingml/2006/main" xmlns:r="http://schemas.openxmlformats.org/officeDocument/2006/relationships" xmlns:p="http://schemas.openxmlformats.org/presentationml/2006/main">
   <p:cSld>
     <p:spTree>
@@ -12454,7 +12131,7 @@
 </p:sld>
 </file>
 
-<file path=ppt/slides/slide37.xml><?xml version="1.0" encoding="utf-8"?>
+<file path=ppt/slides/slide32.xml><?xml version="1.0" encoding="utf-8"?>
 <p:sld xmlns:a="http://schemas.openxmlformats.org/drawingml/2006/main" xmlns:r="http://schemas.openxmlformats.org/officeDocument/2006/relationships" xmlns:p="http://schemas.openxmlformats.org/presentationml/2006/main">
   <p:cSld>
     <p:spTree>
@@ -12859,6 +12536,355 @@
 </p:sld>
 </file>
 
+<file path=ppt/slides/slide33.xml><?xml version="1.0" encoding="utf-8"?>
+<p:sld xmlns:a="http://schemas.openxmlformats.org/drawingml/2006/main" xmlns:r="http://schemas.openxmlformats.org/officeDocument/2006/relationships" xmlns:p="http://schemas.openxmlformats.org/presentationml/2006/main">
+  <p:cSld>
+    <p:spTree>
+      <p:nvGrpSpPr>
+        <p:cNvPr id="1" name=""/>
+        <p:cNvGrpSpPr/>
+        <p:nvPr/>
+      </p:nvGrpSpPr>
+      <p:grpSpPr>
+        <a:xfrm>
+          <a:off x="0" y="0"/>
+          <a:ext cx="0" cy="0"/>
+          <a:chOff x="0" y="0"/>
+          <a:chExt cx="0" cy="0"/>
+        </a:xfrm>
+      </p:grpSpPr>
+      <p:sp>
+        <p:nvSpPr>
+          <p:cNvPr id="2" name="Title 1"/>
+          <p:cNvSpPr>
+            <a:spLocks noGrp="1"/>
+          </p:cNvSpPr>
+          <p:nvPr>
+            <p:ph type="title"/>
+          </p:nvPr>
+        </p:nvSpPr>
+        <p:spPr/>
+        <p:txBody>
+          <a:bodyPr/>
+          <a:lstStyle/>
+          <a:p>
+            <a:pPr lvl="0" indent="0" marL="0">
+              <a:buNone/>
+            </a:pPr>
+            <a:r>
+              <a:rPr/>
+              <a:t>To conclude: Survey time!</a:t>
+            </a:r>
+          </a:p>
+        </p:txBody>
+      </p:sp>
+    </p:spTree>
+  </p:cSld>
+</p:sld>
+</file>
+
+<file path=ppt/slides/slide34.xml><?xml version="1.0" encoding="utf-8"?>
+<p:sld xmlns:a="http://schemas.openxmlformats.org/drawingml/2006/main" xmlns:r="http://schemas.openxmlformats.org/officeDocument/2006/relationships" xmlns:p="http://schemas.openxmlformats.org/presentationml/2006/main">
+  <p:cSld>
+    <p:spTree>
+      <p:nvGrpSpPr>
+        <p:cNvPr id="1" name=""/>
+        <p:cNvGrpSpPr/>
+        <p:nvPr/>
+      </p:nvGrpSpPr>
+      <p:grpSpPr>
+        <a:xfrm>
+          <a:off x="0" y="0"/>
+          <a:ext cx="0" cy="0"/>
+          <a:chOff x="0" y="0"/>
+          <a:chExt cx="0" cy="0"/>
+        </a:xfrm>
+      </p:grpSpPr>
+      <p:sp>
+        <p:nvSpPr>
+          <p:cNvPr id="3" name="Content Placeholder 2"/>
+          <p:cNvSpPr>
+            <a:spLocks noGrp="1"/>
+          </p:cNvSpPr>
+          <p:nvPr>
+            <p:ph idx="1"/>
+          </p:nvPr>
+        </p:nvSpPr>
+        <p:spPr/>
+        <p:txBody>
+          <a:bodyPr/>
+          <a:lstStyle/>
+          <a:p>
+            <a:pPr lvl="0" indent="0" marL="0">
+              <a:buNone/>
+            </a:pPr>
+            <a:r>
+              <a:rPr b="1"/>
+              <a:t>What is your level of familiarity with citing and referencing scientific papers?</a:t>
+            </a:r>
+          </a:p>
+          <a:p>
+            <a:pPr lvl="0" indent="-342900" marL="342900">
+              <a:buAutoNum type="alphaLcPeriod"/>
+            </a:pPr>
+            <a:r>
+              <a:rPr/>
+              <a:t>I have never heard of it before.</a:t>
+            </a:r>
+          </a:p>
+          <a:p>
+            <a:pPr lvl="0" indent="-342900" marL="342900">
+              <a:buAutoNum type="alphaLcPeriod"/>
+            </a:pPr>
+            <a:r>
+              <a:rPr/>
+              <a:t>I have heard of it but have never worked with it.</a:t>
+            </a:r>
+          </a:p>
+          <a:p>
+            <a:pPr lvl="0" indent="-342900" marL="342900">
+              <a:buAutoNum type="alphaLcPeriod"/>
+            </a:pPr>
+            <a:r>
+              <a:rPr/>
+              <a:t>I have basic understanding and experience with it.</a:t>
+            </a:r>
+          </a:p>
+          <a:p>
+            <a:pPr lvl="0" indent="-342900" marL="342900">
+              <a:buAutoNum type="alphaLcPeriod"/>
+            </a:pPr>
+            <a:r>
+              <a:rPr/>
+              <a:t>I am very familiar and have worked with it extensively.</a:t>
+            </a:r>
+          </a:p>
+        </p:txBody>
+      </p:sp>
+    </p:spTree>
+  </p:cSld>
+</p:sld>
+</file>
+
+<file path=ppt/slides/slide35.xml><?xml version="1.0" encoding="utf-8"?>
+<p:sld xmlns:a="http://schemas.openxmlformats.org/drawingml/2006/main" xmlns:r="http://schemas.openxmlformats.org/officeDocument/2006/relationships" xmlns:p="http://schemas.openxmlformats.org/presentationml/2006/main">
+  <p:cSld>
+    <p:spTree>
+      <p:nvGrpSpPr>
+        <p:cNvPr id="1" name=""/>
+        <p:cNvGrpSpPr/>
+        <p:nvPr/>
+      </p:nvGrpSpPr>
+      <p:grpSpPr>
+        <a:xfrm>
+          <a:off x="0" y="0"/>
+          <a:ext cx="0" cy="0"/>
+          <a:chOff x="0" y="0"/>
+          <a:chExt cx="0" cy="0"/>
+        </a:xfrm>
+      </p:grpSpPr>
+      <p:sp>
+        <p:nvSpPr>
+          <p:cNvPr id="3" name="Content Placeholder 2"/>
+          <p:cNvSpPr>
+            <a:spLocks noGrp="1"/>
+          </p:cNvSpPr>
+          <p:nvPr>
+            <p:ph idx="1"/>
+          </p:nvPr>
+        </p:nvSpPr>
+        <p:spPr/>
+        <p:txBody>
+          <a:bodyPr/>
+          <a:lstStyle/>
+          <a:p>
+            <a:pPr lvl="0" indent="0" marL="0">
+              <a:buNone/>
+            </a:pPr>
+            <a:r>
+              <a:rPr b="1"/>
+              <a:t>How confident do you feel with the Zotero workflow of collection, organisation, and citing?</a:t>
+            </a:r>
+            <a:r>
+              <a:rPr/>
+              <a:t> </a:t>
+            </a:r>
+            <a:r>
+              <a:rPr i="1"/>
+              <a:t>(1 = Not confident at all, 5 = Very confident)</a:t>
+            </a:r>
+          </a:p>
+          <a:p>
+            <a:pPr lvl="0" indent="-342900" marL="342900">
+              <a:buAutoNum type="alphaLcPeriod"/>
+            </a:pPr>
+            <a:r>
+              <a:rPr/>
+              <a:t>1</a:t>
+            </a:r>
+          </a:p>
+          <a:p>
+            <a:pPr lvl="0" indent="-342900" marL="342900">
+              <a:buAutoNum type="alphaLcPeriod"/>
+            </a:pPr>
+            <a:r>
+              <a:rPr/>
+              <a:t>2</a:t>
+            </a:r>
+          </a:p>
+          <a:p>
+            <a:pPr lvl="0" indent="-342900" marL="342900">
+              <a:buAutoNum type="alphaLcPeriod"/>
+            </a:pPr>
+            <a:r>
+              <a:rPr/>
+              <a:t>3</a:t>
+            </a:r>
+          </a:p>
+          <a:p>
+            <a:pPr lvl="0" indent="-342900" marL="342900">
+              <a:buAutoNum type="alphaLcPeriod"/>
+            </a:pPr>
+            <a:r>
+              <a:rPr/>
+              <a:t>4</a:t>
+            </a:r>
+          </a:p>
+          <a:p>
+            <a:pPr lvl="0" indent="-342900" marL="342900">
+              <a:buAutoNum type="alphaLcPeriod"/>
+            </a:pPr>
+            <a:r>
+              <a:rPr/>
+              <a:t>5</a:t>
+            </a:r>
+          </a:p>
+        </p:txBody>
+      </p:sp>
+    </p:spTree>
+  </p:cSld>
+</p:sld>
+</file>
+
+<file path=ppt/slides/slide36.xml><?xml version="1.0" encoding="utf-8"?>
+<p:sld xmlns:a="http://schemas.openxmlformats.org/drawingml/2006/main" xmlns:r="http://schemas.openxmlformats.org/officeDocument/2006/relationships" xmlns:p="http://schemas.openxmlformats.org/presentationml/2006/main">
+  <p:cSld>
+    <p:spTree>
+      <p:nvGrpSpPr>
+        <p:cNvPr id="1" name=""/>
+        <p:cNvGrpSpPr/>
+        <p:nvPr/>
+      </p:nvGrpSpPr>
+      <p:grpSpPr>
+        <a:xfrm>
+          <a:off x="0" y="0"/>
+          <a:ext cx="0" cy="0"/>
+          <a:chOff x="0" y="0"/>
+          <a:chExt cx="0" cy="0"/>
+        </a:xfrm>
+      </p:grpSpPr>
+      <p:sp>
+        <p:nvSpPr>
+          <p:cNvPr id="2" name="Title 1"/>
+          <p:cNvSpPr>
+            <a:spLocks noGrp="1"/>
+          </p:cNvSpPr>
+          <p:nvPr>
+            <p:ph type="title"/>
+          </p:nvPr>
+        </p:nvSpPr>
+        <p:spPr/>
+        <p:txBody>
+          <a:bodyPr/>
+          <a:lstStyle/>
+          <a:p>
+            <a:pPr lvl="0" indent="0" marL="0">
+              <a:buNone/>
+            </a:pPr>
+            <a:r>
+              <a:rPr/>
+              <a:t>Discussion of survey results</a:t>
+            </a:r>
+          </a:p>
+        </p:txBody>
+      </p:sp>
+      <p:sp>
+        <p:nvSpPr>
+          <p:cNvPr id="3" name="Content Placeholder 2"/>
+          <p:cNvSpPr>
+            <a:spLocks noGrp="1"/>
+          </p:cNvSpPr>
+          <p:nvPr>
+            <p:ph idx="1"/>
+          </p:nvPr>
+        </p:nvSpPr>
+        <p:spPr/>
+        <p:txBody>
+          <a:bodyPr/>
+          <a:lstStyle/>
+          <a:p>
+            <a:pPr lvl="0" indent="0" marL="0">
+              <a:buNone/>
+            </a:pPr>
+            <a:r>
+              <a:rPr b="1"/>
+              <a:t>What do we see in the results?</a:t>
+            </a:r>
+          </a:p>
+        </p:txBody>
+      </p:sp>
+    </p:spTree>
+  </p:cSld>
+</p:sld>
+</file>
+
+<file path=ppt/slides/slide37.xml><?xml version="1.0" encoding="utf-8"?>
+<p:sld xmlns:a="http://schemas.openxmlformats.org/drawingml/2006/main" xmlns:r="http://schemas.openxmlformats.org/officeDocument/2006/relationships" xmlns:p="http://schemas.openxmlformats.org/presentationml/2006/main">
+  <p:cSld>
+    <p:spTree>
+      <p:nvGrpSpPr>
+        <p:cNvPr id="1" name=""/>
+        <p:cNvGrpSpPr/>
+        <p:nvPr/>
+      </p:nvGrpSpPr>
+      <p:grpSpPr>
+        <a:xfrm>
+          <a:off x="0" y="0"/>
+          <a:ext cx="0" cy="0"/>
+          <a:chOff x="0" y="0"/>
+          <a:chExt cx="0" cy="0"/>
+        </a:xfrm>
+      </p:grpSpPr>
+      <p:sp>
+        <p:nvSpPr>
+          <p:cNvPr id="2" name="Title 1"/>
+          <p:cNvSpPr>
+            <a:spLocks noGrp="1"/>
+          </p:cNvSpPr>
+          <p:nvPr>
+            <p:ph type="title"/>
+          </p:nvPr>
+        </p:nvSpPr>
+        <p:spPr/>
+        <p:txBody>
+          <a:bodyPr/>
+          <a:lstStyle/>
+          <a:p>
+            <a:pPr lvl="0" indent="0" marL="0">
+              <a:buNone/>
+            </a:pPr>
+            <a:r>
+              <a:rPr/>
+              <a:t>References</a:t>
+            </a:r>
+          </a:p>
+        </p:txBody>
+      </p:sp>
+    </p:spTree>
+  </p:cSld>
+</p:sld>
+</file>
+
 <file path=ppt/slides/slide38.xml><?xml version="1.0" encoding="utf-8"?>
 <p:sld xmlns:a="http://schemas.openxmlformats.org/drawingml/2006/main" xmlns:r="http://schemas.openxmlformats.org/officeDocument/2006/relationships" xmlns:p="http://schemas.openxmlformats.org/presentationml/2006/main">
   <p:cSld>
@@ -12896,7 +12922,32 @@
             </a:pPr>
             <a:r>
               <a:rPr/>
-              <a:t>To conclude: Survey time!</a:t>
+              <a:t>Thanks!</a:t>
+            </a:r>
+          </a:p>
+        </p:txBody>
+      </p:sp>
+      <p:sp>
+        <p:nvSpPr>
+          <p:cNvPr id="3" name="Content Placeholder 2"/>
+          <p:cNvSpPr>
+            <a:spLocks noGrp="1"/>
+          </p:cNvSpPr>
+          <p:nvPr>
+            <p:ph idx="1"/>
+          </p:nvPr>
+        </p:nvSpPr>
+        <p:spPr/>
+        <p:txBody>
+          <a:bodyPr/>
+          <a:lstStyle/>
+          <a:p>
+            <a:pPr lvl="0" indent="0" marL="0">
+              <a:buNone/>
+            </a:pPr>
+            <a:r>
+              <a:rPr/>
+              <a:t>See you next session :)</a:t>
             </a:r>
           </a:p>
         </p:txBody>
@@ -12925,6 +12976,31 @@
       </p:grpSpPr>
       <p:sp>
         <p:nvSpPr>
+          <p:cNvPr id="2" name="Title 1"/>
+          <p:cNvSpPr>
+            <a:spLocks noGrp="1"/>
+          </p:cNvSpPr>
+          <p:nvPr>
+            <p:ph type="title"/>
+          </p:nvPr>
+        </p:nvSpPr>
+        <p:spPr/>
+        <p:txBody>
+          <a:bodyPr/>
+          <a:lstStyle/>
+          <a:p>
+            <a:pPr lvl="0" indent="0" marL="0">
+              <a:buNone/>
+            </a:pPr>
+            <a:r>
+              <a:rPr/>
+              <a:t>Additional in-class activity</a:t>
+            </a:r>
+          </a:p>
+        </p:txBody>
+      </p:sp>
+      <p:sp>
+        <p:nvSpPr>
           <p:cNvPr id="3" name="Content Placeholder 2"/>
           <p:cNvSpPr>
             <a:spLocks noGrp="1"/>
@@ -12938,48 +13014,14 @@
           <a:bodyPr/>
           <a:lstStyle/>
           <a:p>
-            <a:pPr lvl="0" indent="0" marL="0">
-              <a:buNone/>
-            </a:pPr>
-            <a:r>
-              <a:rPr b="1"/>
-              <a:t>What is your level of familiarity with citing and referencing scientific papers?</a:t>
-            </a:r>
-          </a:p>
-          <a:p>
-            <a:pPr lvl="0" indent="-342900" marL="342900">
-              <a:buAutoNum type="alphaLcPeriod"/>
-            </a:pPr>
-            <a:r>
-              <a:rPr/>
-              <a:t>I have never heard of it before.</a:t>
-            </a:r>
-          </a:p>
-          <a:p>
-            <a:pPr lvl="0" indent="-342900" marL="342900">
-              <a:buAutoNum type="alphaLcPeriod"/>
-            </a:pPr>
-            <a:r>
-              <a:rPr/>
-              <a:t>I have heard of it but have never worked with it.</a:t>
-            </a:r>
-          </a:p>
-          <a:p>
-            <a:pPr lvl="0" indent="-342900" marL="342900">
-              <a:buAutoNum type="alphaLcPeriod"/>
-            </a:pPr>
-            <a:r>
-              <a:rPr/>
-              <a:t>I have basic understanding and experience with it.</a:t>
-            </a:r>
-          </a:p>
-          <a:p>
-            <a:pPr lvl="0" indent="-342900" marL="342900">
-              <a:buAutoNum type="alphaLcPeriod"/>
-            </a:pPr>
-            <a:r>
-              <a:rPr/>
-              <a:t>I am very familiar and have worked with it extensively.</a:t>
+            <a:pPr lvl="0"/>
+            <a:r>
+              <a:rPr b="1"/>
+              <a:t>Activity</a:t>
+            </a:r>
+            <a:r>
+              <a:rPr/>
+              <a:t>: Get in a pair, navigate a literature database (Google Scholar), find a paper of your choice with its full text, analyse the citations and the reference list. Note what features you see and share in class.</a:t>
             </a:r>
           </a:p>
         </p:txBody>
@@ -12990,921 +13032,6 @@
 </file>
 
 <file path=ppt/slides/slide4.xml><?xml version="1.0" encoding="utf-8"?>
-<p:sld xmlns:a="http://schemas.openxmlformats.org/drawingml/2006/main" xmlns:r="http://schemas.openxmlformats.org/officeDocument/2006/relationships" xmlns:p="http://schemas.openxmlformats.org/presentationml/2006/main">
-  <p:cSld>
-    <p:spTree>
-      <p:nvGrpSpPr>
-        <p:cNvPr id="1" name=""/>
-        <p:cNvGrpSpPr/>
-        <p:nvPr/>
-      </p:nvGrpSpPr>
-      <p:grpSpPr>
-        <a:xfrm>
-          <a:off x="0" y="0"/>
-          <a:ext cx="0" cy="0"/>
-          <a:chOff x="0" y="0"/>
-          <a:chExt cx="0" cy="0"/>
-        </a:xfrm>
-      </p:grpSpPr>
-      <p:sp>
-        <p:nvSpPr>
-          <p:cNvPr id="3" name="Content Placeholder 2"/>
-          <p:cNvSpPr>
-            <a:spLocks noGrp="1"/>
-          </p:cNvSpPr>
-          <p:nvPr>
-            <p:ph idx="1"/>
-          </p:nvPr>
-        </p:nvSpPr>
-        <p:spPr/>
-        <p:txBody>
-          <a:bodyPr/>
-          <a:lstStyle/>
-          <a:p>
-            <a:pPr lvl="0" indent="0" marL="0">
-              <a:buNone/>
-            </a:pPr>
-            <a:r>
-              <a:rPr/>
-              <a:t>content in section header?</a:t>
-            </a:r>
-          </a:p>
-        </p:txBody>
-      </p:sp>
-    </p:spTree>
-  </p:cSld>
-</p:sld>
-</file>
-
-<file path=ppt/slides/slide40.xml><?xml version="1.0" encoding="utf-8"?>
-<p:sld xmlns:a="http://schemas.openxmlformats.org/drawingml/2006/main" xmlns:r="http://schemas.openxmlformats.org/officeDocument/2006/relationships" xmlns:p="http://schemas.openxmlformats.org/presentationml/2006/main">
-  <p:cSld>
-    <p:spTree>
-      <p:nvGrpSpPr>
-        <p:cNvPr id="1" name=""/>
-        <p:cNvGrpSpPr/>
-        <p:nvPr/>
-      </p:nvGrpSpPr>
-      <p:grpSpPr>
-        <a:xfrm>
-          <a:off x="0" y="0"/>
-          <a:ext cx="0" cy="0"/>
-          <a:chOff x="0" y="0"/>
-          <a:chExt cx="0" cy="0"/>
-        </a:xfrm>
-      </p:grpSpPr>
-      <p:sp>
-        <p:nvSpPr>
-          <p:cNvPr id="3" name="Content Placeholder 2"/>
-          <p:cNvSpPr>
-            <a:spLocks noGrp="1"/>
-          </p:cNvSpPr>
-          <p:nvPr>
-            <p:ph idx="1"/>
-          </p:nvPr>
-        </p:nvSpPr>
-        <p:spPr/>
-        <p:txBody>
-          <a:bodyPr/>
-          <a:lstStyle/>
-          <a:p>
-            <a:pPr lvl="0" indent="0" marL="0">
-              <a:buNone/>
-            </a:pPr>
-            <a:r>
-              <a:rPr b="1"/>
-              <a:t>How confident do you feel with the Zotero workflow of collection, organisation, and citing?</a:t>
-            </a:r>
-            <a:r>
-              <a:rPr/>
-              <a:t> </a:t>
-            </a:r>
-            <a:r>
-              <a:rPr i="1"/>
-              <a:t>(1 = Not confident at all, 5 = Very confident)</a:t>
-            </a:r>
-          </a:p>
-          <a:p>
-            <a:pPr lvl="0" indent="-342900" marL="342900">
-              <a:buAutoNum type="alphaLcPeriod"/>
-            </a:pPr>
-            <a:r>
-              <a:rPr/>
-              <a:t>1</a:t>
-            </a:r>
-          </a:p>
-          <a:p>
-            <a:pPr lvl="0" indent="-342900" marL="342900">
-              <a:buAutoNum type="alphaLcPeriod"/>
-            </a:pPr>
-            <a:r>
-              <a:rPr/>
-              <a:t>2</a:t>
-            </a:r>
-          </a:p>
-          <a:p>
-            <a:pPr lvl="0" indent="-342900" marL="342900">
-              <a:buAutoNum type="alphaLcPeriod"/>
-            </a:pPr>
-            <a:r>
-              <a:rPr/>
-              <a:t>3</a:t>
-            </a:r>
-          </a:p>
-          <a:p>
-            <a:pPr lvl="0" indent="-342900" marL="342900">
-              <a:buAutoNum type="alphaLcPeriod"/>
-            </a:pPr>
-            <a:r>
-              <a:rPr/>
-              <a:t>4</a:t>
-            </a:r>
-          </a:p>
-          <a:p>
-            <a:pPr lvl="0" indent="-342900" marL="342900">
-              <a:buAutoNum type="alphaLcPeriod"/>
-            </a:pPr>
-            <a:r>
-              <a:rPr/>
-              <a:t>5</a:t>
-            </a:r>
-          </a:p>
-        </p:txBody>
-      </p:sp>
-    </p:spTree>
-  </p:cSld>
-</p:sld>
-</file>
-
-<file path=ppt/slides/slide41.xml><?xml version="1.0" encoding="utf-8"?>
-<p:sld xmlns:a="http://schemas.openxmlformats.org/drawingml/2006/main" xmlns:r="http://schemas.openxmlformats.org/officeDocument/2006/relationships" xmlns:p="http://schemas.openxmlformats.org/presentationml/2006/main">
-  <p:cSld>
-    <p:spTree>
-      <p:nvGrpSpPr>
-        <p:cNvPr id="1" name=""/>
-        <p:cNvGrpSpPr/>
-        <p:nvPr/>
-      </p:nvGrpSpPr>
-      <p:grpSpPr>
-        <a:xfrm>
-          <a:off x="0" y="0"/>
-          <a:ext cx="0" cy="0"/>
-          <a:chOff x="0" y="0"/>
-          <a:chExt cx="0" cy="0"/>
-        </a:xfrm>
-      </p:grpSpPr>
-      <p:sp>
-        <p:nvSpPr>
-          <p:cNvPr id="2" name="Title 1"/>
-          <p:cNvSpPr>
-            <a:spLocks noGrp="1"/>
-          </p:cNvSpPr>
-          <p:nvPr>
-            <p:ph type="title"/>
-          </p:nvPr>
-        </p:nvSpPr>
-        <p:spPr/>
-        <p:txBody>
-          <a:bodyPr/>
-          <a:lstStyle/>
-          <a:p>
-            <a:pPr lvl="0" indent="0" marL="0">
-              <a:buNone/>
-            </a:pPr>
-            <a:r>
-              <a:rPr/>
-              <a:t>Discussion of survey results</a:t>
-            </a:r>
-          </a:p>
-        </p:txBody>
-      </p:sp>
-      <p:sp>
-        <p:nvSpPr>
-          <p:cNvPr id="3" name="Content Placeholder 2"/>
-          <p:cNvSpPr>
-            <a:spLocks noGrp="1"/>
-          </p:cNvSpPr>
-          <p:nvPr>
-            <p:ph idx="1"/>
-          </p:nvPr>
-        </p:nvSpPr>
-        <p:spPr/>
-        <p:txBody>
-          <a:bodyPr/>
-          <a:lstStyle/>
-          <a:p>
-            <a:pPr lvl="0" indent="0" marL="0">
-              <a:buNone/>
-            </a:pPr>
-            <a:r>
-              <a:rPr b="1"/>
-              <a:t>What do we see in the results?</a:t>
-            </a:r>
-          </a:p>
-        </p:txBody>
-      </p:sp>
-    </p:spTree>
-  </p:cSld>
-</p:sld>
-</file>
-
-<file path=ppt/slides/slide42.xml><?xml version="1.0" encoding="utf-8"?>
-<p:sld xmlns:a="http://schemas.openxmlformats.org/drawingml/2006/main" xmlns:r="http://schemas.openxmlformats.org/officeDocument/2006/relationships" xmlns:p="http://schemas.openxmlformats.org/presentationml/2006/main">
-  <p:cSld>
-    <p:spTree>
-      <p:nvGrpSpPr>
-        <p:cNvPr id="1" name=""/>
-        <p:cNvGrpSpPr/>
-        <p:nvPr/>
-      </p:nvGrpSpPr>
-      <p:grpSpPr>
-        <a:xfrm>
-          <a:off x="0" y="0"/>
-          <a:ext cx="0" cy="0"/>
-          <a:chOff x="0" y="0"/>
-          <a:chExt cx="0" cy="0"/>
-        </a:xfrm>
-      </p:grpSpPr>
-      <p:sp>
-        <p:nvSpPr>
-          <p:cNvPr id="2" name="Title 1"/>
-          <p:cNvSpPr>
-            <a:spLocks noGrp="1"/>
-          </p:cNvSpPr>
-          <p:nvPr>
-            <p:ph type="title"/>
-          </p:nvPr>
-        </p:nvSpPr>
-        <p:spPr/>
-        <p:txBody>
-          <a:bodyPr/>
-          <a:lstStyle/>
-          <a:p>
-            <a:pPr lvl="0" indent="0" marL="0">
-              <a:buNone/>
-            </a:pPr>
-            <a:r>
-              <a:rPr/>
-              <a:t>References</a:t>
-            </a:r>
-          </a:p>
-        </p:txBody>
-      </p:sp>
-      <p:sp>
-        <p:nvSpPr>
-          <p:cNvPr id="3" name="Content Placeholder 2"/>
-          <p:cNvSpPr>
-            <a:spLocks noGrp="1"/>
-          </p:cNvSpPr>
-          <p:nvPr>
-            <p:ph idx="1"/>
-          </p:nvPr>
-        </p:nvSpPr>
-        <p:spPr/>
-        <p:txBody>
-          <a:bodyPr/>
-          <a:lstStyle/>
-          <a:p>
-            <a:pPr lvl="0" indent="0" marL="0">
-              <a:buNone/>
-            </a:pPr>
-            <a:r>
-              <a:rPr/>
-              <a:t>Jackson, P. (1990). The Daily Grind. In </a:t>
-            </a:r>
-            <a:r>
-              <a:rPr i="1"/>
-              <a:t>Life in Classrooms</a:t>
-            </a:r>
-            <a:r>
-              <a:rPr/>
-              <a:t> (2nd ed., pp. 34–35). Teachers College Press.</a:t>
-            </a:r>
-          </a:p>
-        </p:txBody>
-      </p:sp>
-    </p:spTree>
-  </p:cSld>
-</p:sld>
-</file>
-
-<file path=ppt/slides/slide43.xml><?xml version="1.0" encoding="utf-8"?>
-<p:sld xmlns:a="http://schemas.openxmlformats.org/drawingml/2006/main" xmlns:r="http://schemas.openxmlformats.org/officeDocument/2006/relationships" xmlns:p="http://schemas.openxmlformats.org/presentationml/2006/main">
-  <p:cSld>
-    <p:spTree>
-      <p:nvGrpSpPr>
-        <p:cNvPr id="1" name=""/>
-        <p:cNvGrpSpPr/>
-        <p:nvPr/>
-      </p:nvGrpSpPr>
-      <p:grpSpPr>
-        <a:xfrm>
-          <a:off x="0" y="0"/>
-          <a:ext cx="0" cy="0"/>
-          <a:chOff x="0" y="0"/>
-          <a:chExt cx="0" cy="0"/>
-        </a:xfrm>
-      </p:grpSpPr>
-      <p:sp>
-        <p:nvSpPr>
-          <p:cNvPr id="2" name="Title 1"/>
-          <p:cNvSpPr>
-            <a:spLocks noGrp="1"/>
-          </p:cNvSpPr>
-          <p:nvPr>
-            <p:ph type="title"/>
-          </p:nvPr>
-        </p:nvSpPr>
-        <p:spPr/>
-        <p:txBody>
-          <a:bodyPr/>
-          <a:lstStyle/>
-          <a:p>
-            <a:pPr lvl="0" indent="0" marL="0">
-              <a:buNone/>
-            </a:pPr>
-            <a:r>
-              <a:rPr/>
-              <a:t>Thanks!</a:t>
-            </a:r>
-          </a:p>
-        </p:txBody>
-      </p:sp>
-      <p:sp>
-        <p:nvSpPr>
-          <p:cNvPr id="3" name="Content Placeholder 2"/>
-          <p:cNvSpPr>
-            <a:spLocks noGrp="1"/>
-          </p:cNvSpPr>
-          <p:nvPr>
-            <p:ph idx="1"/>
-          </p:nvPr>
-        </p:nvSpPr>
-        <p:spPr/>
-        <p:txBody>
-          <a:bodyPr/>
-          <a:lstStyle/>
-          <a:p>
-            <a:pPr lvl="0" indent="0" marL="0">
-              <a:buNone/>
-            </a:pPr>
-            <a:r>
-              <a:rPr/>
-              <a:t>See you next session :)</a:t>
-            </a:r>
-          </a:p>
-        </p:txBody>
-      </p:sp>
-    </p:spTree>
-  </p:cSld>
-</p:sld>
-</file>
-
-<file path=ppt/slides/slide44.xml><?xml version="1.0" encoding="utf-8"?>
-<p:sld xmlns:a="http://schemas.openxmlformats.org/drawingml/2006/main" xmlns:r="http://schemas.openxmlformats.org/officeDocument/2006/relationships" xmlns:p="http://schemas.openxmlformats.org/presentationml/2006/main">
-  <p:cSld>
-    <p:spTree>
-      <p:nvGrpSpPr>
-        <p:cNvPr id="1" name=""/>
-        <p:cNvGrpSpPr/>
-        <p:nvPr/>
-      </p:nvGrpSpPr>
-      <p:grpSpPr>
-        <a:xfrm>
-          <a:off x="0" y="0"/>
-          <a:ext cx="0" cy="0"/>
-          <a:chOff x="0" y="0"/>
-          <a:chExt cx="0" cy="0"/>
-        </a:xfrm>
-      </p:grpSpPr>
-      <p:sp>
-        <p:nvSpPr>
-          <p:cNvPr id="2" name="Title 1"/>
-          <p:cNvSpPr>
-            <a:spLocks noGrp="1"/>
-          </p:cNvSpPr>
-          <p:nvPr>
-            <p:ph type="title"/>
-          </p:nvPr>
-        </p:nvSpPr>
-        <p:spPr/>
-        <p:txBody>
-          <a:bodyPr/>
-          <a:lstStyle/>
-          <a:p>
-            <a:pPr lvl="0" indent="0" marL="0">
-              <a:buNone/>
-            </a:pPr>
-            <a:r>
-              <a:rPr/>
-              <a:t>Additional in-class activity</a:t>
-            </a:r>
-          </a:p>
-        </p:txBody>
-      </p:sp>
-      <p:sp>
-        <p:nvSpPr>
-          <p:cNvPr id="3" name="Content Placeholder 2"/>
-          <p:cNvSpPr>
-            <a:spLocks noGrp="1"/>
-          </p:cNvSpPr>
-          <p:nvPr>
-            <p:ph idx="1"/>
-          </p:nvPr>
-        </p:nvSpPr>
-        <p:spPr/>
-        <p:txBody>
-          <a:bodyPr/>
-          <a:lstStyle/>
-          <a:p>
-            <a:pPr lvl="0"/>
-            <a:r>
-              <a:rPr b="1"/>
-              <a:t>Activity</a:t>
-            </a:r>
-            <a:r>
-              <a:rPr/>
-              <a:t>: Get in a pair, navigate a literature database (Google Scholar), find a paper of your choice with its full text, analyse the citations and the reference list. Note what features you see and share in class.</a:t>
-            </a:r>
-          </a:p>
-        </p:txBody>
-      </p:sp>
-    </p:spTree>
-  </p:cSld>
-</p:sld>
-</file>
-
-<file path=ppt/slides/slide45.xml><?xml version="1.0" encoding="utf-8"?>
-<p:sld xmlns:a="http://schemas.openxmlformats.org/drawingml/2006/main" xmlns:r="http://schemas.openxmlformats.org/officeDocument/2006/relationships" xmlns:p="http://schemas.openxmlformats.org/presentationml/2006/main">
-  <p:cSld>
-    <p:spTree>
-      <p:nvGrpSpPr>
-        <p:cNvPr id="1" name=""/>
-        <p:cNvGrpSpPr/>
-        <p:nvPr/>
-      </p:nvGrpSpPr>
-      <p:grpSpPr>
-        <a:xfrm>
-          <a:off x="0" y="0"/>
-          <a:ext cx="0" cy="0"/>
-          <a:chOff x="0" y="0"/>
-          <a:chExt cx="0" cy="0"/>
-        </a:xfrm>
-      </p:grpSpPr>
-      <p:sp>
-        <p:nvSpPr>
-          <p:cNvPr id="2" name="Title 1"/>
-          <p:cNvSpPr>
-            <a:spLocks noGrp="1"/>
-          </p:cNvSpPr>
-          <p:nvPr>
-            <p:ph type="title"/>
-          </p:nvPr>
-        </p:nvSpPr>
-        <p:spPr/>
-        <p:txBody>
-          <a:bodyPr/>
-          <a:lstStyle/>
-          <a:p>
-            <a:pPr lvl="0" indent="0" marL="0">
-              <a:buNone/>
-            </a:pPr>
-            <a:r>
-              <a:rPr/>
-              <a:t>CREDiT Contribution Statement - TO DO</a:t>
-            </a:r>
-          </a:p>
-        </p:txBody>
-      </p:sp>
-      <p:sp>
-        <p:nvSpPr>
-          <p:cNvPr id="3" name="Content Placeholder 2"/>
-          <p:cNvSpPr>
-            <a:spLocks noGrp="1"/>
-          </p:cNvSpPr>
-          <p:nvPr>
-            <p:ph idx="1"/>
-          </p:nvPr>
-        </p:nvSpPr>
-        <p:spPr/>
-        <p:txBody>
-          <a:bodyPr/>
-          <a:lstStyle/>
-          <a:p>
-            <a:pPr lvl="0" indent="0" marL="0">
-              <a:buNone/>
-            </a:pPr>
-            <a:r>
-              <a:rPr/>
-              <a:t>Possible roles using the CRediT contribition system or the Zenodo Contribution System:</a:t>
-            </a:r>
-          </a:p>
-          <a:p>
-            <a:pPr lvl="0" indent="0" marL="0">
-              <a:buNone/>
-            </a:pPr>
-            <a:r>
-              <a:rPr b="1"/>
-              <a:t>Name main content creator</a:t>
-            </a:r>
-            <a:r>
-              <a:rPr/>
-              <a:t>: Conceptualization, Software, Writing - Original Draft, Visualization. </a:t>
-            </a:r>
-            <a:r>
-              <a:rPr b="1"/>
-              <a:t>Sara Lil Middleton</a:t>
-            </a:r>
-            <a:r>
-              <a:rPr/>
-              <a:t>: Writing - Review &amp; Editing, Supervision. </a:t>
-            </a:r>
-            <a:r>
-              <a:rPr b="1"/>
-              <a:t>Sarah von Grebmer zu Wolfsthurn</a:t>
-            </a:r>
-            <a:r>
-              <a:rPr/>
-              <a:t>: Conceptualisation, Writing - Review &amp; Editing, Supervision, Project Administration, Validation.</a:t>
-            </a:r>
-          </a:p>
-        </p:txBody>
-      </p:sp>
-    </p:spTree>
-  </p:cSld>
-</p:sld>
-</file>
-
-<file path=ppt/slides/slide5.xml><?xml version="1.0" encoding="utf-8"?>
-<p:sld xmlns:a="http://schemas.openxmlformats.org/drawingml/2006/main" xmlns:r="http://schemas.openxmlformats.org/officeDocument/2006/relationships" xmlns:p="http://schemas.openxmlformats.org/presentationml/2006/main">
-  <p:cSld>
-    <p:spTree>
-      <p:nvGrpSpPr>
-        <p:cNvPr id="1" name=""/>
-        <p:cNvGrpSpPr/>
-        <p:nvPr/>
-      </p:nvGrpSpPr>
-      <p:grpSpPr>
-        <a:xfrm>
-          <a:off x="0" y="0"/>
-          <a:ext cx="0" cy="0"/>
-          <a:chOff x="0" y="0"/>
-          <a:chExt cx="0" cy="0"/>
-        </a:xfrm>
-      </p:grpSpPr>
-      <p:sp>
-        <p:nvSpPr>
-          <p:cNvPr id="2" name="Title 1"/>
-          <p:cNvSpPr>
-            <a:spLocks noGrp="1"/>
-          </p:cNvSpPr>
-          <p:nvPr>
-            <p:ph type="title"/>
-          </p:nvPr>
-        </p:nvSpPr>
-        <p:spPr/>
-        <p:txBody>
-          <a:bodyPr/>
-          <a:lstStyle/>
-          <a:p>
-            <a:pPr lvl="0" indent="0" marL="0">
-              <a:buNone/>
-            </a:pPr>
-            <a:r>
-              <a:rPr/>
-              <a:t>a section</a:t>
-            </a:r>
-          </a:p>
-        </p:txBody>
-      </p:sp>
-      <p:sp>
-        <p:nvSpPr>
-          <p:cNvPr id="3" name="Content Placeholder 2"/>
-          <p:cNvSpPr>
-            <a:spLocks noGrp="1"/>
-          </p:cNvSpPr>
-          <p:nvPr>
-            <p:ph idx="1"/>
-          </p:nvPr>
-        </p:nvSpPr>
-        <p:spPr/>
-        <p:txBody>
-          <a:bodyPr/>
-          <a:lstStyle/>
-          <a:p>
-            <a:pPr lvl="0"/>
-            <a:r>
-              <a:rPr/>
-              <a:t>some text</a:t>
-            </a:r>
-          </a:p>
-          <a:p>
-            <a:pPr lvl="0"/>
-            <a:r>
-              <a:rPr/>
-              <a:t>another bullet point</a:t>
-            </a:r>
-          </a:p>
-          <a:p>
-            <a:pPr lvl="0"/>
-            <a:r>
-              <a:rPr b="1"/>
-              <a:t>bold</a:t>
-            </a:r>
-          </a:p>
-          <a:p>
-            <a:pPr lvl="0"/>
-            <a:r>
-              <a:rPr i="1"/>
-              <a:t>italics</a:t>
-            </a:r>
-          </a:p>
-        </p:txBody>
-      </p:sp>
-    </p:spTree>
-  </p:cSld>
-</p:sld>
-</file>
-
-<file path=ppt/slides/slide6.xml><?xml version="1.0" encoding="utf-8"?>
-<p:sld xmlns:a="http://schemas.openxmlformats.org/drawingml/2006/main" xmlns:r="http://schemas.openxmlformats.org/officeDocument/2006/relationships" xmlns:p="http://schemas.openxmlformats.org/presentationml/2006/main">
-  <p:cSld>
-    <p:spTree>
-      <p:nvGrpSpPr>
-        <p:cNvPr id="1" name=""/>
-        <p:cNvGrpSpPr/>
-        <p:nvPr/>
-      </p:nvGrpSpPr>
-      <p:grpSpPr>
-        <a:xfrm>
-          <a:off x="0" y="0"/>
-          <a:ext cx="0" cy="0"/>
-          <a:chOff x="0" y="0"/>
-          <a:chExt cx="0" cy="0"/>
-        </a:xfrm>
-      </p:grpSpPr>
-      <p:sp>
-        <p:nvSpPr>
-          <p:cNvPr id="3" name="Content Placeholder 2"/>
-          <p:cNvSpPr>
-            <a:spLocks noGrp="1"/>
-          </p:cNvSpPr>
-          <p:nvPr>
-            <p:ph idx="1"/>
-          </p:nvPr>
-        </p:nvSpPr>
-        <p:spPr/>
-        <p:txBody>
-          <a:bodyPr/>
-          <a:lstStyle/>
-          <a:p>
-            <a:pPr lvl="0" indent="0" marL="0">
-              <a:spcBef>
-                <a:spcPts val="3000"/>
-              </a:spcBef>
-              <a:buNone/>
-            </a:pPr>
-            <a:r>
-              <a:rPr b="1"/>
-              <a:t>this is a level three headers</a:t>
-            </a:r>
-          </a:p>
-        </p:txBody>
-      </p:sp>
-    </p:spTree>
-  </p:cSld>
-</p:sld>
-</file>
-
-<file path=ppt/slides/slide7.xml><?xml version="1.0" encoding="utf-8"?>
-<p:sld xmlns:a="http://schemas.openxmlformats.org/drawingml/2006/main" xmlns:r="http://schemas.openxmlformats.org/officeDocument/2006/relationships" xmlns:p="http://schemas.openxmlformats.org/presentationml/2006/main">
-  <p:cSld>
-    <p:spTree>
-      <p:nvGrpSpPr>
-        <p:cNvPr id="1" name=""/>
-        <p:cNvGrpSpPr/>
-        <p:nvPr/>
-      </p:nvGrpSpPr>
-      <p:grpSpPr>
-        <a:xfrm>
-          <a:off x="0" y="0"/>
-          <a:ext cx="0" cy="0"/>
-          <a:chOff x="0" y="0"/>
-          <a:chExt cx="0" cy="0"/>
-        </a:xfrm>
-      </p:grpSpPr>
-      <p:sp>
-        <p:nvSpPr>
-          <p:cNvPr id="2" name="Title 1"/>
-          <p:cNvSpPr>
-            <a:spLocks noGrp="1"/>
-          </p:cNvSpPr>
-          <p:nvPr>
-            <p:ph type="title"/>
-          </p:nvPr>
-        </p:nvSpPr>
-        <p:spPr/>
-        <p:txBody>
-          <a:bodyPr/>
-          <a:lstStyle/>
-          <a:p>
-            <a:pPr lvl="0" indent="0" marL="0">
-              <a:buNone/>
-            </a:pPr>
-            <a:r>
-              <a:rPr/>
-              <a:t>Licence</a:t>
-            </a:r>
-          </a:p>
-        </p:txBody>
-      </p:sp>
-      <p:sp>
-        <p:nvSpPr>
-          <p:cNvPr id="3" name="Content Placeholder 2"/>
-          <p:cNvSpPr>
-            <a:spLocks noGrp="1"/>
-          </p:cNvSpPr>
-          <p:nvPr>
-            <p:ph idx="1"/>
-          </p:nvPr>
-        </p:nvSpPr>
-        <p:spPr/>
-        <p:txBody>
-          <a:bodyPr/>
-          <a:lstStyle/>
-          <a:p>
-            <a:pPr lvl="0" indent="0" marL="0">
-              <a:buNone/>
-            </a:pPr>
-            <a:r>
-              <a:rPr/>
-              <a:t>This work was originally created by Pat Callahan and Dejana Damjanovic under a CC-BY-SA 4.0 </a:t>
-            </a:r>
-            <a:r>
-              <a:rPr>
-                <a:hlinkClick r:id="rId3"/>
-              </a:rPr>
-              <a:t>Creative Commons Attribution 4.0 International License</a:t>
-            </a:r>
-            <a:r>
-              <a:rPr/>
-              <a:t> and a CC0 1.0 </a:t>
-            </a:r>
-            <a:r>
-              <a:rPr>
-                <a:hlinkClick r:id="rId4"/>
-              </a:rPr>
-              <a:t>Creative Commons Universal</a:t>
-            </a:r>
-            <a:r>
-              <a:rPr/>
-              <a:t> licence for code snippets. It was subsequently adapted and revised by </a:t>
-            </a:r>
-            <a:r>
-              <a:rPr>
-                <a:hlinkClick r:id="rId5"/>
-              </a:rPr>
-              <a:t>Sarah von Grebmer zu Wolfsthurn</a:t>
-            </a:r>
-            <a:r>
-              <a:rPr/>
-              <a:t>. This current work by </a:t>
-            </a:r>
-            <a:r>
-              <a:rPr>
-                <a:hlinkClick r:id="rId6"/>
-              </a:rPr>
-              <a:t>Tejaswini Sharma</a:t>
-            </a:r>
-            <a:r>
-              <a:rPr/>
-              <a:t> and Sarah von Grebmer zu Wolfsthurn is licensed under a CC-BY-SA 4.0 </a:t>
-            </a:r>
-            <a:r>
-              <a:rPr>
-                <a:hlinkClick r:id="rId7"/>
-              </a:rPr>
-              <a:t>Creative Commons Attribution 4.0 International SA License</a:t>
-            </a:r>
-            <a:r>
-              <a:rPr/>
-              <a:t>. permits unrestricted re-use, distribution, and reproduction in any medium, provided the original work is properly cited. If you remix, transform, or build upon the material, you must distribute your contributions under the same license as the original. Code snippets are dedicated to the public domain and licenced under a CC0 1.0 </a:t>
-            </a:r>
-            <a:r>
-              <a:rPr>
-                <a:hlinkClick r:id="rId8"/>
-              </a:rPr>
-              <a:t>Creative Commons Universal Licence</a:t>
-            </a:r>
-            <a:r>
-              <a:rPr/>
-              <a:t>. You may use, modify, distribute, and sell the code snippets for any purpose, without permission or attribution. The code snippets are provided “as is”, without warranty of any kind.</a:t>
-            </a:r>
-          </a:p>
-        </p:txBody>
-      </p:sp>
-    </p:spTree>
-  </p:cSld>
-</p:sld>
-</file>
-
-<file path=ppt/slides/slide8.xml><?xml version="1.0" encoding="utf-8"?>
-<p:sld xmlns:a="http://schemas.openxmlformats.org/drawingml/2006/main" xmlns:r="http://schemas.openxmlformats.org/officeDocument/2006/relationships" xmlns:p="http://schemas.openxmlformats.org/presentationml/2006/main">
-  <p:cSld>
-    <p:spTree>
-      <p:nvGrpSpPr>
-        <p:cNvPr id="1" name=""/>
-        <p:cNvGrpSpPr/>
-        <p:nvPr/>
-      </p:nvGrpSpPr>
-      <p:grpSpPr>
-        <a:xfrm>
-          <a:off x="0" y="0"/>
-          <a:ext cx="0" cy="0"/>
-          <a:chOff x="0" y="0"/>
-          <a:chExt cx="0" cy="0"/>
-        </a:xfrm>
-      </p:grpSpPr>
-      <p:sp>
-        <p:nvSpPr>
-          <p:cNvPr id="3" name="Content Placeholder 2"/>
-          <p:cNvSpPr>
-            <a:spLocks noGrp="1"/>
-          </p:cNvSpPr>
-          <p:nvPr>
-            <p:ph idx="1"/>
-          </p:nvPr>
-        </p:nvSpPr>
-        <p:spPr/>
-        <p:txBody>
-          <a:bodyPr/>
-          <a:lstStyle/>
-          <a:p>
-            <a:pPr lvl="0" indent="0" marL="0">
-              <a:spcBef>
-                <a:spcPts val="3000"/>
-              </a:spcBef>
-              <a:buNone/>
-            </a:pPr>
-            <a:r>
-              <a:rPr b="1"/>
-              <a:t>Contribution statement</a:t>
-            </a:r>
-          </a:p>
-          <a:p>
-            <a:pPr lvl="0" indent="0" marL="0">
-              <a:buNone/>
-            </a:pPr>
-            <a:r>
-              <a:rPr b="1"/>
-              <a:t>Creator</a:t>
-            </a:r>
-            <a:r>
-              <a:rPr/>
-              <a:t>: Sharma, Tejaswini (</a:t>
-            </a:r>
-            <a:r>
-              <a:rPr>
-                <a:hlinkClick r:id="rId2"/>
-              </a:rPr>
-              <a:t>Orcid-ID: 00009-0000-0305-9751</a:t>
-            </a:r>
-            <a:r>
-              <a:rPr/>
-              <a:t>)</a:t>
-            </a:r>
-          </a:p>
-          <a:p>
-            <a:pPr lvl="0" indent="0" marL="0">
-              <a:buNone/>
-            </a:pPr>
-            <a:r>
-              <a:rPr b="1"/>
-              <a:t>Reviewer</a:t>
-            </a:r>
-            <a:r>
-              <a:rPr/>
-              <a:t>: Von Grebmer zu Wolfsthurn, Sarah (</a:t>
-            </a:r>
-            <a:r>
-              <a:rPr>
-                <a:hlinkClick r:id="rId3"/>
-              </a:rPr>
-              <a:t>Ordcid-ID: 0000-0002-6413-3895</a:t>
-            </a:r>
-            <a:r>
-              <a:rPr/>
-              <a:t>)</a:t>
-            </a:r>
-          </a:p>
-        </p:txBody>
-      </p:sp>
-    </p:spTree>
-  </p:cSld>
-</p:sld>
-</file>
-
-<file path=ppt/slides/slide9.xml><?xml version="1.0" encoding="utf-8"?>
 <p:sld xmlns:a="http://schemas.openxmlformats.org/drawingml/2006/main" xmlns:r="http://schemas.openxmlformats.org/officeDocument/2006/relationships" xmlns:p="http://schemas.openxmlformats.org/presentationml/2006/main">
   <p:cSld>
     <p:spTree>
@@ -14206,6 +13333,505 @@
           </a:graphicData>
         </a:graphic>
       </p:graphicFrame>
+    </p:spTree>
+  </p:cSld>
+</p:sld>
+</file>
+
+<file path=ppt/slides/slide40.xml><?xml version="1.0" encoding="utf-8"?>
+<p:sld xmlns:a="http://schemas.openxmlformats.org/drawingml/2006/main" xmlns:r="http://schemas.openxmlformats.org/officeDocument/2006/relationships" xmlns:p="http://schemas.openxmlformats.org/presentationml/2006/main">
+  <p:cSld>
+    <p:spTree>
+      <p:nvGrpSpPr>
+        <p:cNvPr id="1" name=""/>
+        <p:cNvGrpSpPr/>
+        <p:nvPr/>
+      </p:nvGrpSpPr>
+      <p:grpSpPr>
+        <a:xfrm>
+          <a:off x="0" y="0"/>
+          <a:ext cx="0" cy="0"/>
+          <a:chOff x="0" y="0"/>
+          <a:chExt cx="0" cy="0"/>
+        </a:xfrm>
+      </p:grpSpPr>
+      <p:sp>
+        <p:nvSpPr>
+          <p:cNvPr id="2" name="Title 1"/>
+          <p:cNvSpPr>
+            <a:spLocks noGrp="1"/>
+          </p:cNvSpPr>
+          <p:nvPr>
+            <p:ph type="title"/>
+          </p:nvPr>
+        </p:nvSpPr>
+        <p:spPr/>
+        <p:txBody>
+          <a:bodyPr/>
+          <a:lstStyle/>
+          <a:p>
+            <a:pPr lvl="0" indent="0" marL="0">
+              <a:buNone/>
+            </a:pPr>
+            <a:r>
+              <a:rPr/>
+              <a:t>CREDiT Contribution Statement - TO DO</a:t>
+            </a:r>
+          </a:p>
+        </p:txBody>
+      </p:sp>
+      <p:sp>
+        <p:nvSpPr>
+          <p:cNvPr id="3" name="Content Placeholder 2"/>
+          <p:cNvSpPr>
+            <a:spLocks noGrp="1"/>
+          </p:cNvSpPr>
+          <p:nvPr>
+            <p:ph idx="1"/>
+          </p:nvPr>
+        </p:nvSpPr>
+        <p:spPr/>
+        <p:txBody>
+          <a:bodyPr/>
+          <a:lstStyle/>
+          <a:p>
+            <a:pPr lvl="0" indent="0" marL="0">
+              <a:buNone/>
+            </a:pPr>
+            <a:r>
+              <a:rPr/>
+              <a:t>Possible roles using the CRediT contribition system or the Zenodo Contribution System:</a:t>
+            </a:r>
+          </a:p>
+          <a:p>
+            <a:pPr lvl="0" indent="0" marL="0">
+              <a:buNone/>
+            </a:pPr>
+            <a:r>
+              <a:rPr b="1"/>
+              <a:t>Name main content creator</a:t>
+            </a:r>
+            <a:r>
+              <a:rPr/>
+              <a:t>: Conceptualization, Software, Writing - Original Draft, Visualization. </a:t>
+            </a:r>
+            <a:r>
+              <a:rPr b="1"/>
+              <a:t>Sara Lil Middleton</a:t>
+            </a:r>
+            <a:r>
+              <a:rPr/>
+              <a:t>: Writing - Review &amp; Editing, Supervision. </a:t>
+            </a:r>
+            <a:r>
+              <a:rPr b="1"/>
+              <a:t>Sarah von Grebmer zu Wolfsthurn</a:t>
+            </a:r>
+            <a:r>
+              <a:rPr/>
+              <a:t>: Conceptualisation, Writing - Review &amp; Editing, Supervision, Project Administration, Validation.</a:t>
+            </a:r>
+          </a:p>
+        </p:txBody>
+      </p:sp>
+    </p:spTree>
+  </p:cSld>
+</p:sld>
+</file>
+
+<file path=ppt/slides/slide5.xml><?xml version="1.0" encoding="utf-8"?>
+<p:sld xmlns:a="http://schemas.openxmlformats.org/drawingml/2006/main" xmlns:r="http://schemas.openxmlformats.org/officeDocument/2006/relationships" xmlns:p="http://schemas.openxmlformats.org/presentationml/2006/main">
+  <p:cSld>
+    <p:spTree>
+      <p:nvGrpSpPr>
+        <p:cNvPr id="1" name=""/>
+        <p:cNvGrpSpPr/>
+        <p:nvPr/>
+      </p:nvGrpSpPr>
+      <p:grpSpPr>
+        <a:xfrm>
+          <a:off x="0" y="0"/>
+          <a:ext cx="0" cy="0"/>
+          <a:chOff x="0" y="0"/>
+          <a:chExt cx="0" cy="0"/>
+        </a:xfrm>
+      </p:grpSpPr>
+      <p:sp>
+        <p:nvSpPr>
+          <p:cNvPr id="2" name="Title 1"/>
+          <p:cNvSpPr>
+            <a:spLocks noGrp="1"/>
+          </p:cNvSpPr>
+          <p:nvPr>
+            <p:ph type="title"/>
+          </p:nvPr>
+        </p:nvSpPr>
+        <p:spPr>
+          <a:xfrm>
+            <a:off x="457201" y="204787"/>
+            <a:ext cx="3008313" cy="871538"/>
+          </a:xfrm>
+        </p:spPr>
+        <p:txBody>
+          <a:bodyPr/>
+          <a:lstStyle/>
+          <a:p>
+            <a:pPr lvl="0" indent="0" marL="0">
+              <a:buNone/>
+            </a:pPr>
+            <a:r>
+              <a:rPr/>
+              <a:t>Prerequisites (cont.)</a:t>
+            </a:r>
+          </a:p>
+        </p:txBody>
+      </p:sp>
+      <p:sp>
+        <p:nvSpPr>
+          <p:cNvPr id="4" name="Text Placeholder 3"/>
+          <p:cNvSpPr>
+            <a:spLocks noGrp="1"/>
+          </p:cNvSpPr>
+          <p:nvPr>
+            <p:ph idx="2" sz="half" type="body"/>
+          </p:nvPr>
+        </p:nvSpPr>
+        <p:spPr/>
+        <p:txBody>
+          <a:bodyPr/>
+          <a:lstStyle/>
+          <a:p>
+            <a:pPr lvl="0"/>
+            <a:r>
+              <a:rPr/>
+              <a:t>Familiarity with the concept of </a:t>
+            </a:r>
+            <a:r>
+              <a:rPr b="1"/>
+              <a:t>literature review</a:t>
+            </a:r>
+            <a:r>
+              <a:rPr/>
+              <a:t>; how and where to access scientific papers, such as </a:t>
+            </a:r>
+            <a:r>
+              <a:rPr i="1"/>
+              <a:t>Google Scholar</a:t>
+            </a:r>
+            <a:r>
+              <a:rPr/>
+              <a:t>.</a:t>
+            </a:r>
+          </a:p>
+        </p:txBody>
+      </p:sp>
+      <p:pic>
+        <p:nvPicPr>
+          <p:cNvPr descr="images/GoogleScholar.png" id="0" name="Picture 1"/>
+          <p:cNvPicPr>
+            <a:picLocks noGrp="1" noChangeAspect="1"/>
+          </p:cNvPicPr>
+          <p:nvPr/>
+        </p:nvPicPr>
+        <p:blipFill>
+          <a:blip r:embed="rId3"/>
+          <a:stretch>
+            <a:fillRect/>
+          </a:stretch>
+        </p:blipFill>
+        <p:spPr bwMode="auto">
+          <a:xfrm>
+            <a:off x="3568700" y="863600"/>
+            <a:ext cx="5105400" cy="3060700"/>
+          </a:xfrm>
+          <a:prstGeom prst="rect">
+            <a:avLst/>
+          </a:prstGeom>
+          <a:noFill/>
+          <a:ln w="9525">
+            <a:noFill/>
+            <a:headEnd/>
+            <a:tailEnd/>
+          </a:ln>
+        </p:spPr>
+      </p:pic>
+    </p:spTree>
+  </p:cSld>
+</p:sld>
+</file>
+
+<file path=ppt/slides/slide6.xml><?xml version="1.0" encoding="utf-8"?>
+<p:sld xmlns:a="http://schemas.openxmlformats.org/drawingml/2006/main" xmlns:r="http://schemas.openxmlformats.org/officeDocument/2006/relationships" xmlns:p="http://schemas.openxmlformats.org/presentationml/2006/main">
+  <p:cSld>
+    <p:spTree>
+      <p:nvGrpSpPr>
+        <p:cNvPr id="1" name=""/>
+        <p:cNvGrpSpPr/>
+        <p:nvPr/>
+      </p:nvGrpSpPr>
+      <p:grpSpPr>
+        <a:xfrm>
+          <a:off x="0" y="0"/>
+          <a:ext cx="0" cy="0"/>
+          <a:chOff x="0" y="0"/>
+          <a:chExt cx="0" cy="0"/>
+        </a:xfrm>
+      </p:grpSpPr>
+      <p:sp>
+        <p:nvSpPr>
+          <p:cNvPr id="2" name="Title 1"/>
+          <p:cNvSpPr>
+            <a:spLocks noGrp="1"/>
+          </p:cNvSpPr>
+          <p:nvPr>
+            <p:ph type="title"/>
+          </p:nvPr>
+        </p:nvSpPr>
+        <p:spPr/>
+        <p:txBody>
+          <a:bodyPr/>
+          <a:lstStyle/>
+          <a:p>
+            <a:pPr lvl="0" indent="0" marL="0">
+              <a:buNone/>
+            </a:pPr>
+            <a:r>
+              <a:rPr/>
+              <a:t>Questions from the previous submodule?</a:t>
+            </a:r>
+          </a:p>
+        </p:txBody>
+      </p:sp>
+    </p:spTree>
+  </p:cSld>
+</p:sld>
+</file>
+
+<file path=ppt/slides/slide7.xml><?xml version="1.0" encoding="utf-8"?>
+<p:sld xmlns:a="http://schemas.openxmlformats.org/drawingml/2006/main" xmlns:r="http://schemas.openxmlformats.org/officeDocument/2006/relationships" xmlns:p="http://schemas.openxmlformats.org/presentationml/2006/main">
+  <p:cSld>
+    <p:spTree>
+      <p:nvGrpSpPr>
+        <p:cNvPr id="1" name=""/>
+        <p:cNvGrpSpPr/>
+        <p:nvPr/>
+      </p:nvGrpSpPr>
+      <p:grpSpPr>
+        <a:xfrm>
+          <a:off x="0" y="0"/>
+          <a:ext cx="0" cy="0"/>
+          <a:chOff x="0" y="0"/>
+          <a:chExt cx="0" cy="0"/>
+        </a:xfrm>
+      </p:grpSpPr>
+      <p:sp>
+        <p:nvSpPr>
+          <p:cNvPr id="2" name="Title 1"/>
+          <p:cNvSpPr>
+            <a:spLocks noGrp="1"/>
+          </p:cNvSpPr>
+          <p:nvPr>
+            <p:ph type="title"/>
+          </p:nvPr>
+        </p:nvSpPr>
+        <p:spPr/>
+        <p:txBody>
+          <a:bodyPr/>
+          <a:lstStyle/>
+          <a:p>
+            <a:pPr lvl="0" indent="0" marL="0">
+              <a:buNone/>
+            </a:pPr>
+            <a:r>
+              <a:rPr/>
+              <a:t>Before we start: Survey time!</a:t>
+            </a:r>
+          </a:p>
+        </p:txBody>
+      </p:sp>
+    </p:spTree>
+  </p:cSld>
+</p:sld>
+</file>
+
+<file path=ppt/slides/slide8.xml><?xml version="1.0" encoding="utf-8"?>
+<p:sld xmlns:a="http://schemas.openxmlformats.org/drawingml/2006/main" xmlns:r="http://schemas.openxmlformats.org/officeDocument/2006/relationships" xmlns:p="http://schemas.openxmlformats.org/presentationml/2006/main">
+  <p:cSld>
+    <p:spTree>
+      <p:nvGrpSpPr>
+        <p:cNvPr id="1" name=""/>
+        <p:cNvGrpSpPr/>
+        <p:nvPr/>
+      </p:nvGrpSpPr>
+      <p:grpSpPr>
+        <a:xfrm>
+          <a:off x="0" y="0"/>
+          <a:ext cx="0" cy="0"/>
+          <a:chOff x="0" y="0"/>
+          <a:chExt cx="0" cy="0"/>
+        </a:xfrm>
+      </p:grpSpPr>
+      <p:sp>
+        <p:nvSpPr>
+          <p:cNvPr id="3" name="Content Placeholder 2"/>
+          <p:cNvSpPr>
+            <a:spLocks noGrp="1"/>
+          </p:cNvSpPr>
+          <p:nvPr>
+            <p:ph idx="1"/>
+          </p:nvPr>
+        </p:nvSpPr>
+        <p:spPr/>
+        <p:txBody>
+          <a:bodyPr/>
+          <a:lstStyle/>
+          <a:p>
+            <a:pPr lvl="0" indent="0" marL="0">
+              <a:buNone/>
+            </a:pPr>
+            <a:r>
+              <a:rPr b="1"/>
+              <a:t>What is your level of familiarity with citing and referencing scientific papers?</a:t>
+            </a:r>
+          </a:p>
+          <a:p>
+            <a:pPr lvl="0" indent="-342900" marL="342900">
+              <a:buAutoNum type="alphaLcPeriod"/>
+            </a:pPr>
+            <a:r>
+              <a:rPr/>
+              <a:t>I have never heard of it before.</a:t>
+            </a:r>
+          </a:p>
+          <a:p>
+            <a:pPr lvl="0" indent="-342900" marL="342900">
+              <a:buAutoNum type="alphaLcPeriod"/>
+            </a:pPr>
+            <a:r>
+              <a:rPr/>
+              <a:t>I have heard of it but have never worked with it.</a:t>
+            </a:r>
+          </a:p>
+          <a:p>
+            <a:pPr lvl="0" indent="-342900" marL="342900">
+              <a:buAutoNum type="alphaLcPeriod"/>
+            </a:pPr>
+            <a:r>
+              <a:rPr/>
+              <a:t>I have basic understanding and experience with it.</a:t>
+            </a:r>
+          </a:p>
+          <a:p>
+            <a:pPr lvl="0" indent="-342900" marL="342900">
+              <a:buAutoNum type="alphaLcPeriod"/>
+            </a:pPr>
+            <a:r>
+              <a:rPr/>
+              <a:t>I am very familiar and have worked with it extensively.</a:t>
+            </a:r>
+          </a:p>
+        </p:txBody>
+      </p:sp>
+    </p:spTree>
+  </p:cSld>
+</p:sld>
+</file>
+
+<file path=ppt/slides/slide9.xml><?xml version="1.0" encoding="utf-8"?>
+<p:sld xmlns:a="http://schemas.openxmlformats.org/drawingml/2006/main" xmlns:r="http://schemas.openxmlformats.org/officeDocument/2006/relationships" xmlns:p="http://schemas.openxmlformats.org/presentationml/2006/main">
+  <p:cSld>
+    <p:spTree>
+      <p:nvGrpSpPr>
+        <p:cNvPr id="1" name=""/>
+        <p:cNvGrpSpPr/>
+        <p:nvPr/>
+      </p:nvGrpSpPr>
+      <p:grpSpPr>
+        <a:xfrm>
+          <a:off x="0" y="0"/>
+          <a:ext cx="0" cy="0"/>
+          <a:chOff x="0" y="0"/>
+          <a:chExt cx="0" cy="0"/>
+        </a:xfrm>
+      </p:grpSpPr>
+      <p:sp>
+        <p:nvSpPr>
+          <p:cNvPr id="3" name="Content Placeholder 2"/>
+          <p:cNvSpPr>
+            <a:spLocks noGrp="1"/>
+          </p:cNvSpPr>
+          <p:nvPr>
+            <p:ph idx="1"/>
+          </p:nvPr>
+        </p:nvSpPr>
+        <p:spPr/>
+        <p:txBody>
+          <a:bodyPr/>
+          <a:lstStyle/>
+          <a:p>
+            <a:pPr lvl="0" indent="0" marL="0">
+              <a:buNone/>
+            </a:pPr>
+            <a:r>
+              <a:rPr b="1"/>
+              <a:t>How confident do you feel with the Zotero workflow of collection, organisation, and citing?</a:t>
+            </a:r>
+            <a:r>
+              <a:rPr/>
+              <a:t> </a:t>
+            </a:r>
+            <a:r>
+              <a:rPr i="1"/>
+              <a:t>(1 = Not confident at all, 5 = Very confident)</a:t>
+            </a:r>
+          </a:p>
+          <a:p>
+            <a:pPr lvl="0" indent="-342900" marL="342900">
+              <a:buAutoNum type="alphaLcPeriod"/>
+            </a:pPr>
+            <a:r>
+              <a:rPr/>
+              <a:t>1</a:t>
+            </a:r>
+          </a:p>
+          <a:p>
+            <a:pPr lvl="0" indent="-342900" marL="342900">
+              <a:buAutoNum type="alphaLcPeriod"/>
+            </a:pPr>
+            <a:r>
+              <a:rPr/>
+              <a:t>2</a:t>
+            </a:r>
+          </a:p>
+          <a:p>
+            <a:pPr lvl="0" indent="-342900" marL="342900">
+              <a:buAutoNum type="alphaLcPeriod"/>
+            </a:pPr>
+            <a:r>
+              <a:rPr/>
+              <a:t>3</a:t>
+            </a:r>
+          </a:p>
+          <a:p>
+            <a:pPr lvl="0" indent="-342900" marL="342900">
+              <a:buAutoNum type="alphaLcPeriod"/>
+            </a:pPr>
+            <a:r>
+              <a:rPr/>
+              <a:t>4</a:t>
+            </a:r>
+          </a:p>
+          <a:p>
+            <a:pPr lvl="0" indent="-342900" marL="342900">
+              <a:buAutoNum type="alphaLcPeriod"/>
+            </a:pPr>
+            <a:r>
+              <a:rPr/>
+              <a:t>5</a:t>
+            </a:r>
+          </a:p>
+        </p:txBody>
+      </p:sp>
     </p:spTree>
   </p:cSld>
 </p:sld>
